--- a/out/Internship_Exit_Presentation_Stewart.pptx
+++ b/out/Internship_Exit_Presentation_Stewart.pptx
@@ -3846,9 +3846,9 @@
                 <a:solidFill>
                   <a:srgbClr val="43464A"/>
                 </a:solidFill>
-                <a:latin typeface="Consolas" pitchFamily="34" charset="0"/>
-                <a:ea typeface="Consolas" pitchFamily="34" charset="-122"/>
-                <a:cs typeface="Consolas" pitchFamily="34" charset="-120"/>
+                <a:latin typeface="Courier New" pitchFamily="34" charset="0"/>
+                <a:ea typeface="Courier New" pitchFamily="34" charset="-122"/>
+                <a:cs typeface="Courier New" pitchFamily="34" charset="-120"/>
               </a:rPr>
               <a:t>findVulnerable()</a:t>
             </a:r>
@@ -3885,9 +3885,9 @@
                 <a:solidFill>
                   <a:srgbClr val="43464A"/>
                 </a:solidFill>
-                <a:latin typeface="Consolas" pitchFamily="34" charset="0"/>
-                <a:ea typeface="Consolas" pitchFamily="34" charset="-122"/>
-                <a:cs typeface="Consolas" pitchFamily="34" charset="-120"/>
+                <a:latin typeface="Courier New" pitchFamily="34" charset="0"/>
+                <a:ea typeface="Courier New" pitchFamily="34" charset="-122"/>
+                <a:cs typeface="Courier New" pitchFamily="34" charset="-120"/>
               </a:rPr>
               <a:t>checkReachable()</a:t>
             </a:r>
@@ -3924,9 +3924,9 @@
                 <a:solidFill>
                   <a:srgbClr val="43464A"/>
                 </a:solidFill>
-                <a:latin typeface="Consolas" pitchFamily="34" charset="0"/>
-                <a:ea typeface="Consolas" pitchFamily="34" charset="-122"/>
-                <a:cs typeface="Consolas" pitchFamily="34" charset="-120"/>
+                <a:latin typeface="Courier New" pitchFamily="34" charset="0"/>
+                <a:ea typeface="Courier New" pitchFamily="34" charset="-122"/>
+                <a:cs typeface="Courier New" pitchFamily="34" charset="-120"/>
               </a:rPr>
               <a:t>markResolved()</a:t>
             </a:r>
@@ -4098,9 +4098,9 @@
                 <a:solidFill>
                   <a:srgbClr val="43464A"/>
                 </a:solidFill>
-                <a:latin typeface="Consolas" pitchFamily="34" charset="0"/>
-                <a:ea typeface="Consolas" pitchFamily="34" charset="-122"/>
-                <a:cs typeface="Consolas" pitchFamily="34" charset="-120"/>
+                <a:latin typeface="Courier New" pitchFamily="34" charset="0"/>
+                <a:ea typeface="Courier New" pitchFamily="34" charset="-122"/>
+                <a:cs typeface="Courier New" pitchFamily="34" charset="-120"/>
               </a:rPr>
               <a:t>proposeFix()</a:t>
             </a:r>
@@ -4137,9 +4137,9 @@
                 <a:solidFill>
                   <a:srgbClr val="43464A"/>
                 </a:solidFill>
-                <a:latin typeface="Consolas" pitchFamily="34" charset="0"/>
-                <a:ea typeface="Consolas" pitchFamily="34" charset="-122"/>
-                <a:cs typeface="Consolas" pitchFamily="34" charset="-120"/>
+                <a:latin typeface="Courier New" pitchFamily="34" charset="0"/>
+                <a:ea typeface="Courier New" pitchFamily="34" charset="-122"/>
+                <a:cs typeface="Courier New" pitchFamily="34" charset="-120"/>
               </a:rPr>
               <a:t>openBranch()</a:t>
             </a:r>
@@ -4176,9 +4176,9 @@
                 <a:solidFill>
                   <a:srgbClr val="43464A"/>
                 </a:solidFill>
-                <a:latin typeface="Consolas" pitchFamily="34" charset="0"/>
-                <a:ea typeface="Consolas" pitchFamily="34" charset="-122"/>
-                <a:cs typeface="Consolas" pitchFamily="34" charset="-120"/>
+                <a:latin typeface="Courier New" pitchFamily="34" charset="0"/>
+                <a:ea typeface="Courier New" pitchFamily="34" charset="-122"/>
+                <a:cs typeface="Courier New" pitchFamily="34" charset="-120"/>
               </a:rPr>
               <a:t>runTests()</a:t>
             </a:r>
@@ -4350,9 +4350,9 @@
                 <a:solidFill>
                   <a:srgbClr val="43464A"/>
                 </a:solidFill>
-                <a:latin typeface="Consolas" pitchFamily="34" charset="0"/>
-                <a:ea typeface="Consolas" pitchFamily="34" charset="-122"/>
-                <a:cs typeface="Consolas" pitchFamily="34" charset="-120"/>
+                <a:latin typeface="Courier New" pitchFamily="34" charset="0"/>
+                <a:ea typeface="Courier New" pitchFamily="34" charset="-122"/>
+                <a:cs typeface="Courier New" pitchFamily="34" charset="-120"/>
               </a:rPr>
               <a:t>recordFinding()</a:t>
             </a:r>
@@ -4389,9 +4389,9 @@
                 <a:solidFill>
                   <a:srgbClr val="43464A"/>
                 </a:solidFill>
-                <a:latin typeface="Consolas" pitchFamily="34" charset="0"/>
-                <a:ea typeface="Consolas" pitchFamily="34" charset="-122"/>
-                <a:cs typeface="Consolas" pitchFamily="34" charset="-120"/>
+                <a:latin typeface="Courier New" pitchFamily="34" charset="0"/>
+                <a:ea typeface="Courier New" pitchFamily="34" charset="-122"/>
+                <a:cs typeface="Courier New" pitchFamily="34" charset="-120"/>
               </a:rPr>
               <a:t>trackState()</a:t>
             </a:r>
@@ -4428,9 +4428,9 @@
                 <a:solidFill>
                   <a:srgbClr val="43464A"/>
                 </a:solidFill>
-                <a:latin typeface="Consolas" pitchFamily="34" charset="0"/>
-                <a:ea typeface="Consolas" pitchFamily="34" charset="-122"/>
-                <a:cs typeface="Consolas" pitchFamily="34" charset="-120"/>
+                <a:latin typeface="Courier New" pitchFamily="34" charset="0"/>
+                <a:ea typeface="Courier New" pitchFamily="34" charset="-122"/>
+                <a:cs typeface="Courier New" pitchFamily="34" charset="-120"/>
               </a:rPr>
               <a:t>auditTrail()</a:t>
             </a:r>
@@ -4602,9 +4602,9 @@
                 <a:solidFill>
                   <a:srgbClr val="43464A"/>
                 </a:solidFill>
-                <a:latin typeface="Consolas" pitchFamily="34" charset="0"/>
-                <a:ea typeface="Consolas" pitchFamily="34" charset="-122"/>
-                <a:cs typeface="Consolas" pitchFamily="34" charset="-120"/>
+                <a:latin typeface="Courier New" pitchFamily="34" charset="0"/>
+                <a:ea typeface="Courier New" pitchFamily="34" charset="-122"/>
+                <a:cs typeface="Courier New" pitchFamily="34" charset="-120"/>
               </a:rPr>
               <a:t>watchFeeds()</a:t>
             </a:r>
@@ -4641,9 +4641,9 @@
                 <a:solidFill>
                   <a:srgbClr val="43464A"/>
                 </a:solidFill>
-                <a:latin typeface="Consolas" pitchFamily="34" charset="0"/>
-                <a:ea typeface="Consolas" pitchFamily="34" charset="-122"/>
-                <a:cs typeface="Consolas" pitchFamily="34" charset="-120"/>
+                <a:latin typeface="Courier New" pitchFamily="34" charset="0"/>
+                <a:ea typeface="Courier New" pitchFamily="34" charset="-122"/>
+                <a:cs typeface="Courier New" pitchFamily="34" charset="-120"/>
               </a:rPr>
               <a:t>raiseAlert()</a:t>
             </a:r>
@@ -4680,9 +4680,9 @@
                 <a:solidFill>
                   <a:srgbClr val="43464A"/>
                 </a:solidFill>
-                <a:latin typeface="Consolas" pitchFamily="34" charset="0"/>
-                <a:ea typeface="Consolas" pitchFamily="34" charset="-122"/>
-                <a:cs typeface="Consolas" pitchFamily="34" charset="-120"/>
+                <a:latin typeface="Courier New" pitchFamily="34" charset="0"/>
+                <a:ea typeface="Courier New" pitchFamily="34" charset="-122"/>
+                <a:cs typeface="Courier New" pitchFamily="34" charset="-120"/>
               </a:rPr>
               <a:t>reportDrift()</a:t>
             </a:r>
@@ -4698,25 +4698,41 @@
         </p:nvSpPr>
         <p:spPr>
           <a:xfrm>
-            <a:off x="3044952" y="3639312"/>
-            <a:ext cx="485546" cy="0"/>
-          </a:xfrm>
-          <a:prstGeom prst="line">
-            <a:avLst/>
-          </a:prstGeom>
-          <a:noFill/>
-          <a:ln w="19050">
-            <a:solidFill>
-              <a:srgbClr val="43464A"/>
-            </a:solidFill>
-            <a:prstDash val="solid"/>
-            <a:tailEnd type="triangle"/>
-          </a:ln>
-        </p:spPr>
-      </p:sp>
-      <p:sp>
-        <p:nvSpPr>
-          <p:cNvPr id="39" name="Text 36"/>
+            <a:off x="3044952" y="3629254"/>
+            <a:ext cx="394106" cy="20117"/>
+          </a:xfrm>
+          <a:prstGeom prst="rect">
+            <a:avLst/>
+          </a:prstGeom>
+          <a:solidFill>
+            <a:srgbClr val="43464A"/>
+          </a:solidFill>
+          <a:ln/>
+        </p:spPr>
+      </p:sp>
+      <p:sp>
+        <p:nvSpPr>
+          <p:cNvPr id="39" name="Shape 36"/>
+          <p:cNvSpPr/>
+          <p:nvPr/>
+        </p:nvSpPr>
+        <p:spPr>
+          <a:xfrm rot="5400000">
+            <a:off x="3439058" y="3579876"/>
+            <a:ext cx="91440" cy="118872"/>
+          </a:xfrm>
+          <a:prstGeom prst="triangle">
+            <a:avLst/>
+          </a:prstGeom>
+          <a:solidFill>
+            <a:srgbClr val="43464A"/>
+          </a:solidFill>
+          <a:ln/>
+        </p:spPr>
+      </p:sp>
+      <p:sp>
+        <p:nvSpPr>
+          <p:cNvPr id="40" name="Text 37"/>
           <p:cNvSpPr txBox="1"/>
           <p:nvPr/>
         </p:nvSpPr>
@@ -4758,31 +4774,47 @@
       </p:sp>
       <p:sp>
         <p:nvSpPr>
-          <p:cNvPr id="40" name="Shape 37"/>
-          <p:cNvSpPr/>
-          <p:nvPr/>
-        </p:nvSpPr>
-        <p:spPr>
-          <a:xfrm>
-            <a:off x="5853074" y="3639312"/>
-            <a:ext cx="485546" cy="0"/>
-          </a:xfrm>
-          <a:prstGeom prst="line">
-            <a:avLst/>
-          </a:prstGeom>
-          <a:noFill/>
-          <a:ln w="19050">
-            <a:solidFill>
-              <a:srgbClr val="43464A"/>
-            </a:solidFill>
-            <a:prstDash val="solid"/>
-            <a:tailEnd type="triangle"/>
-          </a:ln>
-        </p:spPr>
-      </p:sp>
-      <p:sp>
-        <p:nvSpPr>
-          <p:cNvPr id="41" name="Text 38"/>
+          <p:cNvPr id="41" name="Shape 38"/>
+          <p:cNvSpPr/>
+          <p:nvPr/>
+        </p:nvSpPr>
+        <p:spPr>
+          <a:xfrm>
+            <a:off x="5853074" y="3629254"/>
+            <a:ext cx="394106" cy="20117"/>
+          </a:xfrm>
+          <a:prstGeom prst="rect">
+            <a:avLst/>
+          </a:prstGeom>
+          <a:solidFill>
+            <a:srgbClr val="43464A"/>
+          </a:solidFill>
+          <a:ln/>
+        </p:spPr>
+      </p:sp>
+      <p:sp>
+        <p:nvSpPr>
+          <p:cNvPr id="42" name="Shape 39"/>
+          <p:cNvSpPr/>
+          <p:nvPr/>
+        </p:nvSpPr>
+        <p:spPr>
+          <a:xfrm rot="5400000">
+            <a:off x="6247181" y="3579876"/>
+            <a:ext cx="91440" cy="118872"/>
+          </a:xfrm>
+          <a:prstGeom prst="triangle">
+            <a:avLst/>
+          </a:prstGeom>
+          <a:solidFill>
+            <a:srgbClr val="43464A"/>
+          </a:solidFill>
+          <a:ln/>
+        </p:spPr>
+      </p:sp>
+      <p:sp>
+        <p:nvSpPr>
+          <p:cNvPr id="43" name="Text 40"/>
           <p:cNvSpPr txBox="1"/>
           <p:nvPr/>
         </p:nvSpPr>
@@ -4844,31 +4876,47 @@
       </p:sp>
       <p:sp>
         <p:nvSpPr>
-          <p:cNvPr id="42" name="Shape 39"/>
-          <p:cNvSpPr/>
-          <p:nvPr/>
-        </p:nvSpPr>
-        <p:spPr>
-          <a:xfrm>
-            <a:off x="8661197" y="3639312"/>
-            <a:ext cx="485546" cy="0"/>
-          </a:xfrm>
-          <a:prstGeom prst="line">
-            <a:avLst/>
-          </a:prstGeom>
-          <a:noFill/>
-          <a:ln w="19050">
-            <a:solidFill>
-              <a:srgbClr val="43464A"/>
-            </a:solidFill>
-            <a:prstDash val="solid"/>
-            <a:tailEnd type="triangle"/>
-          </a:ln>
-        </p:spPr>
-      </p:sp>
-      <p:sp>
-        <p:nvSpPr>
-          <p:cNvPr id="43" name="Text 40"/>
+          <p:cNvPr id="44" name="Shape 41"/>
+          <p:cNvSpPr/>
+          <p:nvPr/>
+        </p:nvSpPr>
+        <p:spPr>
+          <a:xfrm>
+            <a:off x="8661197" y="3629254"/>
+            <a:ext cx="394106" cy="20117"/>
+          </a:xfrm>
+          <a:prstGeom prst="rect">
+            <a:avLst/>
+          </a:prstGeom>
+          <a:solidFill>
+            <a:srgbClr val="43464A"/>
+          </a:solidFill>
+          <a:ln/>
+        </p:spPr>
+      </p:sp>
+      <p:sp>
+        <p:nvSpPr>
+          <p:cNvPr id="45" name="Shape 42"/>
+          <p:cNvSpPr/>
+          <p:nvPr/>
+        </p:nvSpPr>
+        <p:spPr>
+          <a:xfrm rot="5400000">
+            <a:off x="9055303" y="3579876"/>
+            <a:ext cx="91440" cy="118872"/>
+          </a:xfrm>
+          <a:prstGeom prst="triangle">
+            <a:avLst/>
+          </a:prstGeom>
+          <a:solidFill>
+            <a:srgbClr val="43464A"/>
+          </a:solidFill>
+          <a:ln/>
+        </p:spPr>
+      </p:sp>
+      <p:sp>
+        <p:nvSpPr>
+          <p:cNvPr id="46" name="Text 43"/>
           <p:cNvSpPr txBox="1"/>
           <p:nvPr/>
         </p:nvSpPr>
@@ -4930,78 +4978,1547 @@
       </p:sp>
       <p:sp>
         <p:nvSpPr>
-          <p:cNvPr id="44" name="Shape 41"/>
-          <p:cNvSpPr/>
-          <p:nvPr/>
-        </p:nvSpPr>
-        <p:spPr>
-          <a:xfrm>
-            <a:off x="10308031" y="4407408"/>
-            <a:ext cx="0" cy="420624"/>
-          </a:xfrm>
-          <a:prstGeom prst="line">
-            <a:avLst/>
-          </a:prstGeom>
-          <a:noFill/>
-          <a:ln w="19050">
-            <a:solidFill>
-              <a:srgbClr val="942838"/>
-            </a:solidFill>
-            <a:prstDash val="dash"/>
-          </a:ln>
-        </p:spPr>
-      </p:sp>
-      <p:sp>
-        <p:nvSpPr>
-          <p:cNvPr id="45" name="Shape 42"/>
-          <p:cNvSpPr/>
-          <p:nvPr/>
-        </p:nvSpPr>
-        <p:spPr>
-          <a:xfrm>
-            <a:off x="1883664" y="4828032"/>
-            <a:ext cx="8424367" cy="0"/>
-          </a:xfrm>
-          <a:prstGeom prst="line">
-            <a:avLst/>
-          </a:prstGeom>
-          <a:noFill/>
-          <a:ln w="19050">
-            <a:solidFill>
-              <a:srgbClr val="942838"/>
-            </a:solidFill>
-            <a:prstDash val="dash"/>
-          </a:ln>
-        </p:spPr>
-      </p:sp>
-      <p:sp>
-        <p:nvSpPr>
-          <p:cNvPr id="46" name="Shape 43"/>
-          <p:cNvSpPr/>
-          <p:nvPr/>
-        </p:nvSpPr>
-        <p:spPr>
-          <a:xfrm>
-            <a:off x="1883664" y="4407408"/>
-            <a:ext cx="0" cy="420624"/>
-          </a:xfrm>
-          <a:prstGeom prst="line">
-            <a:avLst/>
-          </a:prstGeom>
-          <a:noFill/>
-          <a:ln w="19050">
-            <a:solidFill>
-              <a:srgbClr val="942838"/>
-            </a:solidFill>
-            <a:prstDash val="dash"/>
-            <a:headEnd type="triangle"/>
-            <a:tailEnd type="triangle"/>
-          </a:ln>
-        </p:spPr>
-      </p:sp>
-      <p:sp>
-        <p:nvSpPr>
-          <p:cNvPr id="47" name="Text 44"/>
+          <p:cNvPr id="47" name="Shape 44"/>
+          <p:cNvSpPr/>
+          <p:nvPr/>
+        </p:nvSpPr>
+        <p:spPr>
+          <a:xfrm>
+            <a:off x="10297973" y="4407408"/>
+            <a:ext cx="20117" cy="68580"/>
+          </a:xfrm>
+          <a:prstGeom prst="rect">
+            <a:avLst/>
+          </a:prstGeom>
+          <a:solidFill>
+            <a:srgbClr val="942838"/>
+          </a:solidFill>
+          <a:ln/>
+        </p:spPr>
+      </p:sp>
+      <p:sp>
+        <p:nvSpPr>
+          <p:cNvPr id="48" name="Shape 45"/>
+          <p:cNvSpPr/>
+          <p:nvPr/>
+        </p:nvSpPr>
+        <p:spPr>
+          <a:xfrm>
+            <a:off x="10297973" y="4526280"/>
+            <a:ext cx="20117" cy="68580"/>
+          </a:xfrm>
+          <a:prstGeom prst="rect">
+            <a:avLst/>
+          </a:prstGeom>
+          <a:solidFill>
+            <a:srgbClr val="942838"/>
+          </a:solidFill>
+          <a:ln/>
+        </p:spPr>
+      </p:sp>
+      <p:sp>
+        <p:nvSpPr>
+          <p:cNvPr id="49" name="Shape 46"/>
+          <p:cNvSpPr/>
+          <p:nvPr/>
+        </p:nvSpPr>
+        <p:spPr>
+          <a:xfrm>
+            <a:off x="10297973" y="4645152"/>
+            <a:ext cx="20117" cy="68580"/>
+          </a:xfrm>
+          <a:prstGeom prst="rect">
+            <a:avLst/>
+          </a:prstGeom>
+          <a:solidFill>
+            <a:srgbClr val="942838"/>
+          </a:solidFill>
+          <a:ln/>
+        </p:spPr>
+      </p:sp>
+      <p:sp>
+        <p:nvSpPr>
+          <p:cNvPr id="50" name="Shape 47"/>
+          <p:cNvSpPr/>
+          <p:nvPr/>
+        </p:nvSpPr>
+        <p:spPr>
+          <a:xfrm>
+            <a:off x="10297973" y="4764024"/>
+            <a:ext cx="20117" cy="64008"/>
+          </a:xfrm>
+          <a:prstGeom prst="rect">
+            <a:avLst/>
+          </a:prstGeom>
+          <a:solidFill>
+            <a:srgbClr val="942838"/>
+          </a:solidFill>
+          <a:ln/>
+        </p:spPr>
+      </p:sp>
+      <p:sp>
+        <p:nvSpPr>
+          <p:cNvPr id="51" name="Shape 48"/>
+          <p:cNvSpPr/>
+          <p:nvPr/>
+        </p:nvSpPr>
+        <p:spPr>
+          <a:xfrm>
+            <a:off x="1883664" y="4817974"/>
+            <a:ext cx="68580" cy="20117"/>
+          </a:xfrm>
+          <a:prstGeom prst="rect">
+            <a:avLst/>
+          </a:prstGeom>
+          <a:solidFill>
+            <a:srgbClr val="942838"/>
+          </a:solidFill>
+          <a:ln/>
+        </p:spPr>
+      </p:sp>
+      <p:sp>
+        <p:nvSpPr>
+          <p:cNvPr id="52" name="Shape 49"/>
+          <p:cNvSpPr/>
+          <p:nvPr/>
+        </p:nvSpPr>
+        <p:spPr>
+          <a:xfrm>
+            <a:off x="2002536" y="4817974"/>
+            <a:ext cx="68580" cy="20117"/>
+          </a:xfrm>
+          <a:prstGeom prst="rect">
+            <a:avLst/>
+          </a:prstGeom>
+          <a:solidFill>
+            <a:srgbClr val="942838"/>
+          </a:solidFill>
+          <a:ln/>
+        </p:spPr>
+      </p:sp>
+      <p:sp>
+        <p:nvSpPr>
+          <p:cNvPr id="53" name="Shape 50"/>
+          <p:cNvSpPr/>
+          <p:nvPr/>
+        </p:nvSpPr>
+        <p:spPr>
+          <a:xfrm>
+            <a:off x="2121408" y="4817974"/>
+            <a:ext cx="68580" cy="20117"/>
+          </a:xfrm>
+          <a:prstGeom prst="rect">
+            <a:avLst/>
+          </a:prstGeom>
+          <a:solidFill>
+            <a:srgbClr val="942838"/>
+          </a:solidFill>
+          <a:ln/>
+        </p:spPr>
+      </p:sp>
+      <p:sp>
+        <p:nvSpPr>
+          <p:cNvPr id="54" name="Shape 51"/>
+          <p:cNvSpPr/>
+          <p:nvPr/>
+        </p:nvSpPr>
+        <p:spPr>
+          <a:xfrm>
+            <a:off x="2240280" y="4817974"/>
+            <a:ext cx="68580" cy="20117"/>
+          </a:xfrm>
+          <a:prstGeom prst="rect">
+            <a:avLst/>
+          </a:prstGeom>
+          <a:solidFill>
+            <a:srgbClr val="942838"/>
+          </a:solidFill>
+          <a:ln/>
+        </p:spPr>
+      </p:sp>
+      <p:sp>
+        <p:nvSpPr>
+          <p:cNvPr id="55" name="Shape 52"/>
+          <p:cNvSpPr/>
+          <p:nvPr/>
+        </p:nvSpPr>
+        <p:spPr>
+          <a:xfrm>
+            <a:off x="2359152" y="4817974"/>
+            <a:ext cx="68580" cy="20117"/>
+          </a:xfrm>
+          <a:prstGeom prst="rect">
+            <a:avLst/>
+          </a:prstGeom>
+          <a:solidFill>
+            <a:srgbClr val="942838"/>
+          </a:solidFill>
+          <a:ln/>
+        </p:spPr>
+      </p:sp>
+      <p:sp>
+        <p:nvSpPr>
+          <p:cNvPr id="56" name="Shape 53"/>
+          <p:cNvSpPr/>
+          <p:nvPr/>
+        </p:nvSpPr>
+        <p:spPr>
+          <a:xfrm>
+            <a:off x="2478024" y="4817974"/>
+            <a:ext cx="68580" cy="20117"/>
+          </a:xfrm>
+          <a:prstGeom prst="rect">
+            <a:avLst/>
+          </a:prstGeom>
+          <a:solidFill>
+            <a:srgbClr val="942838"/>
+          </a:solidFill>
+          <a:ln/>
+        </p:spPr>
+      </p:sp>
+      <p:sp>
+        <p:nvSpPr>
+          <p:cNvPr id="57" name="Shape 54"/>
+          <p:cNvSpPr/>
+          <p:nvPr/>
+        </p:nvSpPr>
+        <p:spPr>
+          <a:xfrm>
+            <a:off x="2596896" y="4817974"/>
+            <a:ext cx="68580" cy="20117"/>
+          </a:xfrm>
+          <a:prstGeom prst="rect">
+            <a:avLst/>
+          </a:prstGeom>
+          <a:solidFill>
+            <a:srgbClr val="942838"/>
+          </a:solidFill>
+          <a:ln/>
+        </p:spPr>
+      </p:sp>
+      <p:sp>
+        <p:nvSpPr>
+          <p:cNvPr id="58" name="Shape 55"/>
+          <p:cNvSpPr/>
+          <p:nvPr/>
+        </p:nvSpPr>
+        <p:spPr>
+          <a:xfrm>
+            <a:off x="2715768" y="4817974"/>
+            <a:ext cx="68580" cy="20117"/>
+          </a:xfrm>
+          <a:prstGeom prst="rect">
+            <a:avLst/>
+          </a:prstGeom>
+          <a:solidFill>
+            <a:srgbClr val="942838"/>
+          </a:solidFill>
+          <a:ln/>
+        </p:spPr>
+      </p:sp>
+      <p:sp>
+        <p:nvSpPr>
+          <p:cNvPr id="59" name="Shape 56"/>
+          <p:cNvSpPr/>
+          <p:nvPr/>
+        </p:nvSpPr>
+        <p:spPr>
+          <a:xfrm>
+            <a:off x="2834640" y="4817974"/>
+            <a:ext cx="68580" cy="20117"/>
+          </a:xfrm>
+          <a:prstGeom prst="rect">
+            <a:avLst/>
+          </a:prstGeom>
+          <a:solidFill>
+            <a:srgbClr val="942838"/>
+          </a:solidFill>
+          <a:ln/>
+        </p:spPr>
+      </p:sp>
+      <p:sp>
+        <p:nvSpPr>
+          <p:cNvPr id="60" name="Shape 57"/>
+          <p:cNvSpPr/>
+          <p:nvPr/>
+        </p:nvSpPr>
+        <p:spPr>
+          <a:xfrm>
+            <a:off x="2953512" y="4817974"/>
+            <a:ext cx="68580" cy="20117"/>
+          </a:xfrm>
+          <a:prstGeom prst="rect">
+            <a:avLst/>
+          </a:prstGeom>
+          <a:solidFill>
+            <a:srgbClr val="942838"/>
+          </a:solidFill>
+          <a:ln/>
+        </p:spPr>
+      </p:sp>
+      <p:sp>
+        <p:nvSpPr>
+          <p:cNvPr id="61" name="Shape 58"/>
+          <p:cNvSpPr/>
+          <p:nvPr/>
+        </p:nvSpPr>
+        <p:spPr>
+          <a:xfrm>
+            <a:off x="3072384" y="4817974"/>
+            <a:ext cx="68580" cy="20117"/>
+          </a:xfrm>
+          <a:prstGeom prst="rect">
+            <a:avLst/>
+          </a:prstGeom>
+          <a:solidFill>
+            <a:srgbClr val="942838"/>
+          </a:solidFill>
+          <a:ln/>
+        </p:spPr>
+      </p:sp>
+      <p:sp>
+        <p:nvSpPr>
+          <p:cNvPr id="62" name="Shape 59"/>
+          <p:cNvSpPr/>
+          <p:nvPr/>
+        </p:nvSpPr>
+        <p:spPr>
+          <a:xfrm>
+            <a:off x="3191256" y="4817974"/>
+            <a:ext cx="68580" cy="20117"/>
+          </a:xfrm>
+          <a:prstGeom prst="rect">
+            <a:avLst/>
+          </a:prstGeom>
+          <a:solidFill>
+            <a:srgbClr val="942838"/>
+          </a:solidFill>
+          <a:ln/>
+        </p:spPr>
+      </p:sp>
+      <p:sp>
+        <p:nvSpPr>
+          <p:cNvPr id="63" name="Shape 60"/>
+          <p:cNvSpPr/>
+          <p:nvPr/>
+        </p:nvSpPr>
+        <p:spPr>
+          <a:xfrm>
+            <a:off x="3310128" y="4817974"/>
+            <a:ext cx="68580" cy="20117"/>
+          </a:xfrm>
+          <a:prstGeom prst="rect">
+            <a:avLst/>
+          </a:prstGeom>
+          <a:solidFill>
+            <a:srgbClr val="942838"/>
+          </a:solidFill>
+          <a:ln/>
+        </p:spPr>
+      </p:sp>
+      <p:sp>
+        <p:nvSpPr>
+          <p:cNvPr id="64" name="Shape 61"/>
+          <p:cNvSpPr/>
+          <p:nvPr/>
+        </p:nvSpPr>
+        <p:spPr>
+          <a:xfrm>
+            <a:off x="3429000" y="4817974"/>
+            <a:ext cx="68580" cy="20117"/>
+          </a:xfrm>
+          <a:prstGeom prst="rect">
+            <a:avLst/>
+          </a:prstGeom>
+          <a:solidFill>
+            <a:srgbClr val="942838"/>
+          </a:solidFill>
+          <a:ln/>
+        </p:spPr>
+      </p:sp>
+      <p:sp>
+        <p:nvSpPr>
+          <p:cNvPr id="65" name="Shape 62"/>
+          <p:cNvSpPr/>
+          <p:nvPr/>
+        </p:nvSpPr>
+        <p:spPr>
+          <a:xfrm>
+            <a:off x="3547872" y="4817974"/>
+            <a:ext cx="68580" cy="20117"/>
+          </a:xfrm>
+          <a:prstGeom prst="rect">
+            <a:avLst/>
+          </a:prstGeom>
+          <a:solidFill>
+            <a:srgbClr val="942838"/>
+          </a:solidFill>
+          <a:ln/>
+        </p:spPr>
+      </p:sp>
+      <p:sp>
+        <p:nvSpPr>
+          <p:cNvPr id="66" name="Shape 63"/>
+          <p:cNvSpPr/>
+          <p:nvPr/>
+        </p:nvSpPr>
+        <p:spPr>
+          <a:xfrm>
+            <a:off x="3666744" y="4817974"/>
+            <a:ext cx="68580" cy="20117"/>
+          </a:xfrm>
+          <a:prstGeom prst="rect">
+            <a:avLst/>
+          </a:prstGeom>
+          <a:solidFill>
+            <a:srgbClr val="942838"/>
+          </a:solidFill>
+          <a:ln/>
+        </p:spPr>
+      </p:sp>
+      <p:sp>
+        <p:nvSpPr>
+          <p:cNvPr id="67" name="Shape 64"/>
+          <p:cNvSpPr/>
+          <p:nvPr/>
+        </p:nvSpPr>
+        <p:spPr>
+          <a:xfrm>
+            <a:off x="3785616" y="4817974"/>
+            <a:ext cx="68580" cy="20117"/>
+          </a:xfrm>
+          <a:prstGeom prst="rect">
+            <a:avLst/>
+          </a:prstGeom>
+          <a:solidFill>
+            <a:srgbClr val="942838"/>
+          </a:solidFill>
+          <a:ln/>
+        </p:spPr>
+      </p:sp>
+      <p:sp>
+        <p:nvSpPr>
+          <p:cNvPr id="68" name="Shape 65"/>
+          <p:cNvSpPr/>
+          <p:nvPr/>
+        </p:nvSpPr>
+        <p:spPr>
+          <a:xfrm>
+            <a:off x="3904488" y="4817974"/>
+            <a:ext cx="68580" cy="20117"/>
+          </a:xfrm>
+          <a:prstGeom prst="rect">
+            <a:avLst/>
+          </a:prstGeom>
+          <a:solidFill>
+            <a:srgbClr val="942838"/>
+          </a:solidFill>
+          <a:ln/>
+        </p:spPr>
+      </p:sp>
+      <p:sp>
+        <p:nvSpPr>
+          <p:cNvPr id="69" name="Shape 66"/>
+          <p:cNvSpPr/>
+          <p:nvPr/>
+        </p:nvSpPr>
+        <p:spPr>
+          <a:xfrm>
+            <a:off x="4023360" y="4817974"/>
+            <a:ext cx="68580" cy="20117"/>
+          </a:xfrm>
+          <a:prstGeom prst="rect">
+            <a:avLst/>
+          </a:prstGeom>
+          <a:solidFill>
+            <a:srgbClr val="942838"/>
+          </a:solidFill>
+          <a:ln/>
+        </p:spPr>
+      </p:sp>
+      <p:sp>
+        <p:nvSpPr>
+          <p:cNvPr id="70" name="Shape 67"/>
+          <p:cNvSpPr/>
+          <p:nvPr/>
+        </p:nvSpPr>
+        <p:spPr>
+          <a:xfrm>
+            <a:off x="4142232" y="4817974"/>
+            <a:ext cx="68580" cy="20117"/>
+          </a:xfrm>
+          <a:prstGeom prst="rect">
+            <a:avLst/>
+          </a:prstGeom>
+          <a:solidFill>
+            <a:srgbClr val="942838"/>
+          </a:solidFill>
+          <a:ln/>
+        </p:spPr>
+      </p:sp>
+      <p:sp>
+        <p:nvSpPr>
+          <p:cNvPr id="71" name="Shape 68"/>
+          <p:cNvSpPr/>
+          <p:nvPr/>
+        </p:nvSpPr>
+        <p:spPr>
+          <a:xfrm>
+            <a:off x="4261104" y="4817974"/>
+            <a:ext cx="68580" cy="20117"/>
+          </a:xfrm>
+          <a:prstGeom prst="rect">
+            <a:avLst/>
+          </a:prstGeom>
+          <a:solidFill>
+            <a:srgbClr val="942838"/>
+          </a:solidFill>
+          <a:ln/>
+        </p:spPr>
+      </p:sp>
+      <p:sp>
+        <p:nvSpPr>
+          <p:cNvPr id="72" name="Shape 69"/>
+          <p:cNvSpPr/>
+          <p:nvPr/>
+        </p:nvSpPr>
+        <p:spPr>
+          <a:xfrm>
+            <a:off x="4379976" y="4817974"/>
+            <a:ext cx="68580" cy="20117"/>
+          </a:xfrm>
+          <a:prstGeom prst="rect">
+            <a:avLst/>
+          </a:prstGeom>
+          <a:solidFill>
+            <a:srgbClr val="942838"/>
+          </a:solidFill>
+          <a:ln/>
+        </p:spPr>
+      </p:sp>
+      <p:sp>
+        <p:nvSpPr>
+          <p:cNvPr id="73" name="Shape 70"/>
+          <p:cNvSpPr/>
+          <p:nvPr/>
+        </p:nvSpPr>
+        <p:spPr>
+          <a:xfrm>
+            <a:off x="4498848" y="4817974"/>
+            <a:ext cx="68580" cy="20117"/>
+          </a:xfrm>
+          <a:prstGeom prst="rect">
+            <a:avLst/>
+          </a:prstGeom>
+          <a:solidFill>
+            <a:srgbClr val="942838"/>
+          </a:solidFill>
+          <a:ln/>
+        </p:spPr>
+      </p:sp>
+      <p:sp>
+        <p:nvSpPr>
+          <p:cNvPr id="74" name="Shape 71"/>
+          <p:cNvSpPr/>
+          <p:nvPr/>
+        </p:nvSpPr>
+        <p:spPr>
+          <a:xfrm>
+            <a:off x="4617720" y="4817974"/>
+            <a:ext cx="68580" cy="20117"/>
+          </a:xfrm>
+          <a:prstGeom prst="rect">
+            <a:avLst/>
+          </a:prstGeom>
+          <a:solidFill>
+            <a:srgbClr val="942838"/>
+          </a:solidFill>
+          <a:ln/>
+        </p:spPr>
+      </p:sp>
+      <p:sp>
+        <p:nvSpPr>
+          <p:cNvPr id="75" name="Shape 72"/>
+          <p:cNvSpPr/>
+          <p:nvPr/>
+        </p:nvSpPr>
+        <p:spPr>
+          <a:xfrm>
+            <a:off x="4736592" y="4817974"/>
+            <a:ext cx="68580" cy="20117"/>
+          </a:xfrm>
+          <a:prstGeom prst="rect">
+            <a:avLst/>
+          </a:prstGeom>
+          <a:solidFill>
+            <a:srgbClr val="942838"/>
+          </a:solidFill>
+          <a:ln/>
+        </p:spPr>
+      </p:sp>
+      <p:sp>
+        <p:nvSpPr>
+          <p:cNvPr id="76" name="Shape 73"/>
+          <p:cNvSpPr/>
+          <p:nvPr/>
+        </p:nvSpPr>
+        <p:spPr>
+          <a:xfrm>
+            <a:off x="4855464" y="4817974"/>
+            <a:ext cx="68580" cy="20117"/>
+          </a:xfrm>
+          <a:prstGeom prst="rect">
+            <a:avLst/>
+          </a:prstGeom>
+          <a:solidFill>
+            <a:srgbClr val="942838"/>
+          </a:solidFill>
+          <a:ln/>
+        </p:spPr>
+      </p:sp>
+      <p:sp>
+        <p:nvSpPr>
+          <p:cNvPr id="77" name="Shape 74"/>
+          <p:cNvSpPr/>
+          <p:nvPr/>
+        </p:nvSpPr>
+        <p:spPr>
+          <a:xfrm>
+            <a:off x="4974336" y="4817974"/>
+            <a:ext cx="68580" cy="20117"/>
+          </a:xfrm>
+          <a:prstGeom prst="rect">
+            <a:avLst/>
+          </a:prstGeom>
+          <a:solidFill>
+            <a:srgbClr val="942838"/>
+          </a:solidFill>
+          <a:ln/>
+        </p:spPr>
+      </p:sp>
+      <p:sp>
+        <p:nvSpPr>
+          <p:cNvPr id="78" name="Shape 75"/>
+          <p:cNvSpPr/>
+          <p:nvPr/>
+        </p:nvSpPr>
+        <p:spPr>
+          <a:xfrm>
+            <a:off x="5093208" y="4817974"/>
+            <a:ext cx="68580" cy="20117"/>
+          </a:xfrm>
+          <a:prstGeom prst="rect">
+            <a:avLst/>
+          </a:prstGeom>
+          <a:solidFill>
+            <a:srgbClr val="942838"/>
+          </a:solidFill>
+          <a:ln/>
+        </p:spPr>
+      </p:sp>
+      <p:sp>
+        <p:nvSpPr>
+          <p:cNvPr id="79" name="Shape 76"/>
+          <p:cNvSpPr/>
+          <p:nvPr/>
+        </p:nvSpPr>
+        <p:spPr>
+          <a:xfrm>
+            <a:off x="5212080" y="4817974"/>
+            <a:ext cx="68580" cy="20117"/>
+          </a:xfrm>
+          <a:prstGeom prst="rect">
+            <a:avLst/>
+          </a:prstGeom>
+          <a:solidFill>
+            <a:srgbClr val="942838"/>
+          </a:solidFill>
+          <a:ln/>
+        </p:spPr>
+      </p:sp>
+      <p:sp>
+        <p:nvSpPr>
+          <p:cNvPr id="80" name="Shape 77"/>
+          <p:cNvSpPr/>
+          <p:nvPr/>
+        </p:nvSpPr>
+        <p:spPr>
+          <a:xfrm>
+            <a:off x="5330952" y="4817974"/>
+            <a:ext cx="68580" cy="20117"/>
+          </a:xfrm>
+          <a:prstGeom prst="rect">
+            <a:avLst/>
+          </a:prstGeom>
+          <a:solidFill>
+            <a:srgbClr val="942838"/>
+          </a:solidFill>
+          <a:ln/>
+        </p:spPr>
+      </p:sp>
+      <p:sp>
+        <p:nvSpPr>
+          <p:cNvPr id="81" name="Shape 78"/>
+          <p:cNvSpPr/>
+          <p:nvPr/>
+        </p:nvSpPr>
+        <p:spPr>
+          <a:xfrm>
+            <a:off x="5449824" y="4817974"/>
+            <a:ext cx="68580" cy="20117"/>
+          </a:xfrm>
+          <a:prstGeom prst="rect">
+            <a:avLst/>
+          </a:prstGeom>
+          <a:solidFill>
+            <a:srgbClr val="942838"/>
+          </a:solidFill>
+          <a:ln/>
+        </p:spPr>
+      </p:sp>
+      <p:sp>
+        <p:nvSpPr>
+          <p:cNvPr id="82" name="Shape 79"/>
+          <p:cNvSpPr/>
+          <p:nvPr/>
+        </p:nvSpPr>
+        <p:spPr>
+          <a:xfrm>
+            <a:off x="5568696" y="4817974"/>
+            <a:ext cx="68580" cy="20117"/>
+          </a:xfrm>
+          <a:prstGeom prst="rect">
+            <a:avLst/>
+          </a:prstGeom>
+          <a:solidFill>
+            <a:srgbClr val="942838"/>
+          </a:solidFill>
+          <a:ln/>
+        </p:spPr>
+      </p:sp>
+      <p:sp>
+        <p:nvSpPr>
+          <p:cNvPr id="83" name="Shape 80"/>
+          <p:cNvSpPr/>
+          <p:nvPr/>
+        </p:nvSpPr>
+        <p:spPr>
+          <a:xfrm>
+            <a:off x="5687568" y="4817974"/>
+            <a:ext cx="68580" cy="20117"/>
+          </a:xfrm>
+          <a:prstGeom prst="rect">
+            <a:avLst/>
+          </a:prstGeom>
+          <a:solidFill>
+            <a:srgbClr val="942838"/>
+          </a:solidFill>
+          <a:ln/>
+        </p:spPr>
+      </p:sp>
+      <p:sp>
+        <p:nvSpPr>
+          <p:cNvPr id="84" name="Shape 81"/>
+          <p:cNvSpPr/>
+          <p:nvPr/>
+        </p:nvSpPr>
+        <p:spPr>
+          <a:xfrm>
+            <a:off x="5806440" y="4817974"/>
+            <a:ext cx="68580" cy="20117"/>
+          </a:xfrm>
+          <a:prstGeom prst="rect">
+            <a:avLst/>
+          </a:prstGeom>
+          <a:solidFill>
+            <a:srgbClr val="942838"/>
+          </a:solidFill>
+          <a:ln/>
+        </p:spPr>
+      </p:sp>
+      <p:sp>
+        <p:nvSpPr>
+          <p:cNvPr id="85" name="Shape 82"/>
+          <p:cNvSpPr/>
+          <p:nvPr/>
+        </p:nvSpPr>
+        <p:spPr>
+          <a:xfrm>
+            <a:off x="5925312" y="4817974"/>
+            <a:ext cx="68580" cy="20117"/>
+          </a:xfrm>
+          <a:prstGeom prst="rect">
+            <a:avLst/>
+          </a:prstGeom>
+          <a:solidFill>
+            <a:srgbClr val="942838"/>
+          </a:solidFill>
+          <a:ln/>
+        </p:spPr>
+      </p:sp>
+      <p:sp>
+        <p:nvSpPr>
+          <p:cNvPr id="86" name="Shape 83"/>
+          <p:cNvSpPr/>
+          <p:nvPr/>
+        </p:nvSpPr>
+        <p:spPr>
+          <a:xfrm>
+            <a:off x="6044184" y="4817974"/>
+            <a:ext cx="68580" cy="20117"/>
+          </a:xfrm>
+          <a:prstGeom prst="rect">
+            <a:avLst/>
+          </a:prstGeom>
+          <a:solidFill>
+            <a:srgbClr val="942838"/>
+          </a:solidFill>
+          <a:ln/>
+        </p:spPr>
+      </p:sp>
+      <p:sp>
+        <p:nvSpPr>
+          <p:cNvPr id="87" name="Shape 84"/>
+          <p:cNvSpPr/>
+          <p:nvPr/>
+        </p:nvSpPr>
+        <p:spPr>
+          <a:xfrm>
+            <a:off x="6163056" y="4817974"/>
+            <a:ext cx="68580" cy="20117"/>
+          </a:xfrm>
+          <a:prstGeom prst="rect">
+            <a:avLst/>
+          </a:prstGeom>
+          <a:solidFill>
+            <a:srgbClr val="942838"/>
+          </a:solidFill>
+          <a:ln/>
+        </p:spPr>
+      </p:sp>
+      <p:sp>
+        <p:nvSpPr>
+          <p:cNvPr id="88" name="Shape 85"/>
+          <p:cNvSpPr/>
+          <p:nvPr/>
+        </p:nvSpPr>
+        <p:spPr>
+          <a:xfrm>
+            <a:off x="6281928" y="4817974"/>
+            <a:ext cx="68580" cy="20117"/>
+          </a:xfrm>
+          <a:prstGeom prst="rect">
+            <a:avLst/>
+          </a:prstGeom>
+          <a:solidFill>
+            <a:srgbClr val="942838"/>
+          </a:solidFill>
+          <a:ln/>
+        </p:spPr>
+      </p:sp>
+      <p:sp>
+        <p:nvSpPr>
+          <p:cNvPr id="89" name="Shape 86"/>
+          <p:cNvSpPr/>
+          <p:nvPr/>
+        </p:nvSpPr>
+        <p:spPr>
+          <a:xfrm>
+            <a:off x="6400800" y="4817974"/>
+            <a:ext cx="68580" cy="20117"/>
+          </a:xfrm>
+          <a:prstGeom prst="rect">
+            <a:avLst/>
+          </a:prstGeom>
+          <a:solidFill>
+            <a:srgbClr val="942838"/>
+          </a:solidFill>
+          <a:ln/>
+        </p:spPr>
+      </p:sp>
+      <p:sp>
+        <p:nvSpPr>
+          <p:cNvPr id="90" name="Shape 87"/>
+          <p:cNvSpPr/>
+          <p:nvPr/>
+        </p:nvSpPr>
+        <p:spPr>
+          <a:xfrm>
+            <a:off x="6519672" y="4817974"/>
+            <a:ext cx="68580" cy="20117"/>
+          </a:xfrm>
+          <a:prstGeom prst="rect">
+            <a:avLst/>
+          </a:prstGeom>
+          <a:solidFill>
+            <a:srgbClr val="942838"/>
+          </a:solidFill>
+          <a:ln/>
+        </p:spPr>
+      </p:sp>
+      <p:sp>
+        <p:nvSpPr>
+          <p:cNvPr id="91" name="Shape 88"/>
+          <p:cNvSpPr/>
+          <p:nvPr/>
+        </p:nvSpPr>
+        <p:spPr>
+          <a:xfrm>
+            <a:off x="6638544" y="4817974"/>
+            <a:ext cx="68580" cy="20117"/>
+          </a:xfrm>
+          <a:prstGeom prst="rect">
+            <a:avLst/>
+          </a:prstGeom>
+          <a:solidFill>
+            <a:srgbClr val="942838"/>
+          </a:solidFill>
+          <a:ln/>
+        </p:spPr>
+      </p:sp>
+      <p:sp>
+        <p:nvSpPr>
+          <p:cNvPr id="92" name="Shape 89"/>
+          <p:cNvSpPr/>
+          <p:nvPr/>
+        </p:nvSpPr>
+        <p:spPr>
+          <a:xfrm>
+            <a:off x="6757416" y="4817974"/>
+            <a:ext cx="68580" cy="20117"/>
+          </a:xfrm>
+          <a:prstGeom prst="rect">
+            <a:avLst/>
+          </a:prstGeom>
+          <a:solidFill>
+            <a:srgbClr val="942838"/>
+          </a:solidFill>
+          <a:ln/>
+        </p:spPr>
+      </p:sp>
+      <p:sp>
+        <p:nvSpPr>
+          <p:cNvPr id="93" name="Shape 90"/>
+          <p:cNvSpPr/>
+          <p:nvPr/>
+        </p:nvSpPr>
+        <p:spPr>
+          <a:xfrm>
+            <a:off x="6876288" y="4817974"/>
+            <a:ext cx="68580" cy="20117"/>
+          </a:xfrm>
+          <a:prstGeom prst="rect">
+            <a:avLst/>
+          </a:prstGeom>
+          <a:solidFill>
+            <a:srgbClr val="942838"/>
+          </a:solidFill>
+          <a:ln/>
+        </p:spPr>
+      </p:sp>
+      <p:sp>
+        <p:nvSpPr>
+          <p:cNvPr id="94" name="Shape 91"/>
+          <p:cNvSpPr/>
+          <p:nvPr/>
+        </p:nvSpPr>
+        <p:spPr>
+          <a:xfrm>
+            <a:off x="6995160" y="4817974"/>
+            <a:ext cx="68580" cy="20117"/>
+          </a:xfrm>
+          <a:prstGeom prst="rect">
+            <a:avLst/>
+          </a:prstGeom>
+          <a:solidFill>
+            <a:srgbClr val="942838"/>
+          </a:solidFill>
+          <a:ln/>
+        </p:spPr>
+      </p:sp>
+      <p:sp>
+        <p:nvSpPr>
+          <p:cNvPr id="95" name="Shape 92"/>
+          <p:cNvSpPr/>
+          <p:nvPr/>
+        </p:nvSpPr>
+        <p:spPr>
+          <a:xfrm>
+            <a:off x="7114032" y="4817974"/>
+            <a:ext cx="68580" cy="20117"/>
+          </a:xfrm>
+          <a:prstGeom prst="rect">
+            <a:avLst/>
+          </a:prstGeom>
+          <a:solidFill>
+            <a:srgbClr val="942838"/>
+          </a:solidFill>
+          <a:ln/>
+        </p:spPr>
+      </p:sp>
+      <p:sp>
+        <p:nvSpPr>
+          <p:cNvPr id="96" name="Shape 93"/>
+          <p:cNvSpPr/>
+          <p:nvPr/>
+        </p:nvSpPr>
+        <p:spPr>
+          <a:xfrm>
+            <a:off x="7232904" y="4817974"/>
+            <a:ext cx="68580" cy="20117"/>
+          </a:xfrm>
+          <a:prstGeom prst="rect">
+            <a:avLst/>
+          </a:prstGeom>
+          <a:solidFill>
+            <a:srgbClr val="942838"/>
+          </a:solidFill>
+          <a:ln/>
+        </p:spPr>
+      </p:sp>
+      <p:sp>
+        <p:nvSpPr>
+          <p:cNvPr id="97" name="Shape 94"/>
+          <p:cNvSpPr/>
+          <p:nvPr/>
+        </p:nvSpPr>
+        <p:spPr>
+          <a:xfrm>
+            <a:off x="7351776" y="4817974"/>
+            <a:ext cx="68580" cy="20117"/>
+          </a:xfrm>
+          <a:prstGeom prst="rect">
+            <a:avLst/>
+          </a:prstGeom>
+          <a:solidFill>
+            <a:srgbClr val="942838"/>
+          </a:solidFill>
+          <a:ln/>
+        </p:spPr>
+      </p:sp>
+      <p:sp>
+        <p:nvSpPr>
+          <p:cNvPr id="98" name="Shape 95"/>
+          <p:cNvSpPr/>
+          <p:nvPr/>
+        </p:nvSpPr>
+        <p:spPr>
+          <a:xfrm>
+            <a:off x="7470648" y="4817974"/>
+            <a:ext cx="68580" cy="20117"/>
+          </a:xfrm>
+          <a:prstGeom prst="rect">
+            <a:avLst/>
+          </a:prstGeom>
+          <a:solidFill>
+            <a:srgbClr val="942838"/>
+          </a:solidFill>
+          <a:ln/>
+        </p:spPr>
+      </p:sp>
+      <p:sp>
+        <p:nvSpPr>
+          <p:cNvPr id="99" name="Shape 96"/>
+          <p:cNvSpPr/>
+          <p:nvPr/>
+        </p:nvSpPr>
+        <p:spPr>
+          <a:xfrm>
+            <a:off x="7589520" y="4817974"/>
+            <a:ext cx="68580" cy="20117"/>
+          </a:xfrm>
+          <a:prstGeom prst="rect">
+            <a:avLst/>
+          </a:prstGeom>
+          <a:solidFill>
+            <a:srgbClr val="942838"/>
+          </a:solidFill>
+          <a:ln/>
+        </p:spPr>
+      </p:sp>
+      <p:sp>
+        <p:nvSpPr>
+          <p:cNvPr id="100" name="Shape 97"/>
+          <p:cNvSpPr/>
+          <p:nvPr/>
+        </p:nvSpPr>
+        <p:spPr>
+          <a:xfrm>
+            <a:off x="7708392" y="4817974"/>
+            <a:ext cx="68580" cy="20117"/>
+          </a:xfrm>
+          <a:prstGeom prst="rect">
+            <a:avLst/>
+          </a:prstGeom>
+          <a:solidFill>
+            <a:srgbClr val="942838"/>
+          </a:solidFill>
+          <a:ln/>
+        </p:spPr>
+      </p:sp>
+      <p:sp>
+        <p:nvSpPr>
+          <p:cNvPr id="101" name="Shape 98"/>
+          <p:cNvSpPr/>
+          <p:nvPr/>
+        </p:nvSpPr>
+        <p:spPr>
+          <a:xfrm>
+            <a:off x="7827264" y="4817974"/>
+            <a:ext cx="68580" cy="20117"/>
+          </a:xfrm>
+          <a:prstGeom prst="rect">
+            <a:avLst/>
+          </a:prstGeom>
+          <a:solidFill>
+            <a:srgbClr val="942838"/>
+          </a:solidFill>
+          <a:ln/>
+        </p:spPr>
+      </p:sp>
+      <p:sp>
+        <p:nvSpPr>
+          <p:cNvPr id="102" name="Shape 99"/>
+          <p:cNvSpPr/>
+          <p:nvPr/>
+        </p:nvSpPr>
+        <p:spPr>
+          <a:xfrm>
+            <a:off x="7946136" y="4817974"/>
+            <a:ext cx="68580" cy="20117"/>
+          </a:xfrm>
+          <a:prstGeom prst="rect">
+            <a:avLst/>
+          </a:prstGeom>
+          <a:solidFill>
+            <a:srgbClr val="942838"/>
+          </a:solidFill>
+          <a:ln/>
+        </p:spPr>
+      </p:sp>
+      <p:sp>
+        <p:nvSpPr>
+          <p:cNvPr id="103" name="Shape 100"/>
+          <p:cNvSpPr/>
+          <p:nvPr/>
+        </p:nvSpPr>
+        <p:spPr>
+          <a:xfrm>
+            <a:off x="8065008" y="4817974"/>
+            <a:ext cx="68580" cy="20117"/>
+          </a:xfrm>
+          <a:prstGeom prst="rect">
+            <a:avLst/>
+          </a:prstGeom>
+          <a:solidFill>
+            <a:srgbClr val="942838"/>
+          </a:solidFill>
+          <a:ln/>
+        </p:spPr>
+      </p:sp>
+      <p:sp>
+        <p:nvSpPr>
+          <p:cNvPr id="104" name="Shape 101"/>
+          <p:cNvSpPr/>
+          <p:nvPr/>
+        </p:nvSpPr>
+        <p:spPr>
+          <a:xfrm>
+            <a:off x="8183880" y="4817974"/>
+            <a:ext cx="68580" cy="20117"/>
+          </a:xfrm>
+          <a:prstGeom prst="rect">
+            <a:avLst/>
+          </a:prstGeom>
+          <a:solidFill>
+            <a:srgbClr val="942838"/>
+          </a:solidFill>
+          <a:ln/>
+        </p:spPr>
+      </p:sp>
+      <p:sp>
+        <p:nvSpPr>
+          <p:cNvPr id="105" name="Shape 102"/>
+          <p:cNvSpPr/>
+          <p:nvPr/>
+        </p:nvSpPr>
+        <p:spPr>
+          <a:xfrm>
+            <a:off x="8302752" y="4817974"/>
+            <a:ext cx="68580" cy="20117"/>
+          </a:xfrm>
+          <a:prstGeom prst="rect">
+            <a:avLst/>
+          </a:prstGeom>
+          <a:solidFill>
+            <a:srgbClr val="942838"/>
+          </a:solidFill>
+          <a:ln/>
+        </p:spPr>
+      </p:sp>
+      <p:sp>
+        <p:nvSpPr>
+          <p:cNvPr id="106" name="Shape 103"/>
+          <p:cNvSpPr/>
+          <p:nvPr/>
+        </p:nvSpPr>
+        <p:spPr>
+          <a:xfrm>
+            <a:off x="8421624" y="4817974"/>
+            <a:ext cx="68580" cy="20117"/>
+          </a:xfrm>
+          <a:prstGeom prst="rect">
+            <a:avLst/>
+          </a:prstGeom>
+          <a:solidFill>
+            <a:srgbClr val="942838"/>
+          </a:solidFill>
+          <a:ln/>
+        </p:spPr>
+      </p:sp>
+      <p:sp>
+        <p:nvSpPr>
+          <p:cNvPr id="107" name="Shape 104"/>
+          <p:cNvSpPr/>
+          <p:nvPr/>
+        </p:nvSpPr>
+        <p:spPr>
+          <a:xfrm>
+            <a:off x="8540496" y="4817974"/>
+            <a:ext cx="68580" cy="20117"/>
+          </a:xfrm>
+          <a:prstGeom prst="rect">
+            <a:avLst/>
+          </a:prstGeom>
+          <a:solidFill>
+            <a:srgbClr val="942838"/>
+          </a:solidFill>
+          <a:ln/>
+        </p:spPr>
+      </p:sp>
+      <p:sp>
+        <p:nvSpPr>
+          <p:cNvPr id="108" name="Shape 105"/>
+          <p:cNvSpPr/>
+          <p:nvPr/>
+        </p:nvSpPr>
+        <p:spPr>
+          <a:xfrm>
+            <a:off x="8659368" y="4817974"/>
+            <a:ext cx="68580" cy="20117"/>
+          </a:xfrm>
+          <a:prstGeom prst="rect">
+            <a:avLst/>
+          </a:prstGeom>
+          <a:solidFill>
+            <a:srgbClr val="942838"/>
+          </a:solidFill>
+          <a:ln/>
+        </p:spPr>
+      </p:sp>
+      <p:sp>
+        <p:nvSpPr>
+          <p:cNvPr id="109" name="Shape 106"/>
+          <p:cNvSpPr/>
+          <p:nvPr/>
+        </p:nvSpPr>
+        <p:spPr>
+          <a:xfrm>
+            <a:off x="8778240" y="4817974"/>
+            <a:ext cx="68580" cy="20117"/>
+          </a:xfrm>
+          <a:prstGeom prst="rect">
+            <a:avLst/>
+          </a:prstGeom>
+          <a:solidFill>
+            <a:srgbClr val="942838"/>
+          </a:solidFill>
+          <a:ln/>
+        </p:spPr>
+      </p:sp>
+      <p:sp>
+        <p:nvSpPr>
+          <p:cNvPr id="110" name="Shape 107"/>
+          <p:cNvSpPr/>
+          <p:nvPr/>
+        </p:nvSpPr>
+        <p:spPr>
+          <a:xfrm>
+            <a:off x="8897112" y="4817974"/>
+            <a:ext cx="68580" cy="20117"/>
+          </a:xfrm>
+          <a:prstGeom prst="rect">
+            <a:avLst/>
+          </a:prstGeom>
+          <a:solidFill>
+            <a:srgbClr val="942838"/>
+          </a:solidFill>
+          <a:ln/>
+        </p:spPr>
+      </p:sp>
+      <p:sp>
+        <p:nvSpPr>
+          <p:cNvPr id="111" name="Shape 108"/>
+          <p:cNvSpPr/>
+          <p:nvPr/>
+        </p:nvSpPr>
+        <p:spPr>
+          <a:xfrm>
+            <a:off x="9015984" y="4817974"/>
+            <a:ext cx="68580" cy="20117"/>
+          </a:xfrm>
+          <a:prstGeom prst="rect">
+            <a:avLst/>
+          </a:prstGeom>
+          <a:solidFill>
+            <a:srgbClr val="942838"/>
+          </a:solidFill>
+          <a:ln/>
+        </p:spPr>
+      </p:sp>
+      <p:sp>
+        <p:nvSpPr>
+          <p:cNvPr id="112" name="Shape 109"/>
+          <p:cNvSpPr/>
+          <p:nvPr/>
+        </p:nvSpPr>
+        <p:spPr>
+          <a:xfrm>
+            <a:off x="9134856" y="4817974"/>
+            <a:ext cx="68580" cy="20117"/>
+          </a:xfrm>
+          <a:prstGeom prst="rect">
+            <a:avLst/>
+          </a:prstGeom>
+          <a:solidFill>
+            <a:srgbClr val="942838"/>
+          </a:solidFill>
+          <a:ln/>
+        </p:spPr>
+      </p:sp>
+      <p:sp>
+        <p:nvSpPr>
+          <p:cNvPr id="113" name="Shape 110"/>
+          <p:cNvSpPr/>
+          <p:nvPr/>
+        </p:nvSpPr>
+        <p:spPr>
+          <a:xfrm>
+            <a:off x="9253728" y="4817974"/>
+            <a:ext cx="68580" cy="20117"/>
+          </a:xfrm>
+          <a:prstGeom prst="rect">
+            <a:avLst/>
+          </a:prstGeom>
+          <a:solidFill>
+            <a:srgbClr val="942838"/>
+          </a:solidFill>
+          <a:ln/>
+        </p:spPr>
+      </p:sp>
+      <p:sp>
+        <p:nvSpPr>
+          <p:cNvPr id="114" name="Shape 111"/>
+          <p:cNvSpPr/>
+          <p:nvPr/>
+        </p:nvSpPr>
+        <p:spPr>
+          <a:xfrm>
+            <a:off x="9372600" y="4817974"/>
+            <a:ext cx="68580" cy="20117"/>
+          </a:xfrm>
+          <a:prstGeom prst="rect">
+            <a:avLst/>
+          </a:prstGeom>
+          <a:solidFill>
+            <a:srgbClr val="942838"/>
+          </a:solidFill>
+          <a:ln/>
+        </p:spPr>
+      </p:sp>
+      <p:sp>
+        <p:nvSpPr>
+          <p:cNvPr id="115" name="Shape 112"/>
+          <p:cNvSpPr/>
+          <p:nvPr/>
+        </p:nvSpPr>
+        <p:spPr>
+          <a:xfrm>
+            <a:off x="9491472" y="4817974"/>
+            <a:ext cx="68580" cy="20117"/>
+          </a:xfrm>
+          <a:prstGeom prst="rect">
+            <a:avLst/>
+          </a:prstGeom>
+          <a:solidFill>
+            <a:srgbClr val="942838"/>
+          </a:solidFill>
+          <a:ln/>
+        </p:spPr>
+      </p:sp>
+      <p:sp>
+        <p:nvSpPr>
+          <p:cNvPr id="116" name="Shape 113"/>
+          <p:cNvSpPr/>
+          <p:nvPr/>
+        </p:nvSpPr>
+        <p:spPr>
+          <a:xfrm>
+            <a:off x="9610344" y="4817974"/>
+            <a:ext cx="68580" cy="20117"/>
+          </a:xfrm>
+          <a:prstGeom prst="rect">
+            <a:avLst/>
+          </a:prstGeom>
+          <a:solidFill>
+            <a:srgbClr val="942838"/>
+          </a:solidFill>
+          <a:ln/>
+        </p:spPr>
+      </p:sp>
+      <p:sp>
+        <p:nvSpPr>
+          <p:cNvPr id="117" name="Shape 114"/>
+          <p:cNvSpPr/>
+          <p:nvPr/>
+        </p:nvSpPr>
+        <p:spPr>
+          <a:xfrm>
+            <a:off x="9729216" y="4817974"/>
+            <a:ext cx="68580" cy="20117"/>
+          </a:xfrm>
+          <a:prstGeom prst="rect">
+            <a:avLst/>
+          </a:prstGeom>
+          <a:solidFill>
+            <a:srgbClr val="942838"/>
+          </a:solidFill>
+          <a:ln/>
+        </p:spPr>
+      </p:sp>
+      <p:sp>
+        <p:nvSpPr>
+          <p:cNvPr id="118" name="Shape 115"/>
+          <p:cNvSpPr/>
+          <p:nvPr/>
+        </p:nvSpPr>
+        <p:spPr>
+          <a:xfrm>
+            <a:off x="9848088" y="4817974"/>
+            <a:ext cx="68580" cy="20117"/>
+          </a:xfrm>
+          <a:prstGeom prst="rect">
+            <a:avLst/>
+          </a:prstGeom>
+          <a:solidFill>
+            <a:srgbClr val="942838"/>
+          </a:solidFill>
+          <a:ln/>
+        </p:spPr>
+      </p:sp>
+      <p:sp>
+        <p:nvSpPr>
+          <p:cNvPr id="119" name="Shape 116"/>
+          <p:cNvSpPr/>
+          <p:nvPr/>
+        </p:nvSpPr>
+        <p:spPr>
+          <a:xfrm>
+            <a:off x="9966960" y="4817974"/>
+            <a:ext cx="68580" cy="20117"/>
+          </a:xfrm>
+          <a:prstGeom prst="rect">
+            <a:avLst/>
+          </a:prstGeom>
+          <a:solidFill>
+            <a:srgbClr val="942838"/>
+          </a:solidFill>
+          <a:ln/>
+        </p:spPr>
+      </p:sp>
+      <p:sp>
+        <p:nvSpPr>
+          <p:cNvPr id="120" name="Shape 117"/>
+          <p:cNvSpPr/>
+          <p:nvPr/>
+        </p:nvSpPr>
+        <p:spPr>
+          <a:xfrm>
+            <a:off x="10085832" y="4817974"/>
+            <a:ext cx="68580" cy="20117"/>
+          </a:xfrm>
+          <a:prstGeom prst="rect">
+            <a:avLst/>
+          </a:prstGeom>
+          <a:solidFill>
+            <a:srgbClr val="942838"/>
+          </a:solidFill>
+          <a:ln/>
+        </p:spPr>
+      </p:sp>
+      <p:sp>
+        <p:nvSpPr>
+          <p:cNvPr id="121" name="Shape 118"/>
+          <p:cNvSpPr/>
+          <p:nvPr/>
+        </p:nvSpPr>
+        <p:spPr>
+          <a:xfrm>
+            <a:off x="10204704" y="4817974"/>
+            <a:ext cx="68580" cy="20117"/>
+          </a:xfrm>
+          <a:prstGeom prst="rect">
+            <a:avLst/>
+          </a:prstGeom>
+          <a:solidFill>
+            <a:srgbClr val="942838"/>
+          </a:solidFill>
+          <a:ln/>
+        </p:spPr>
+      </p:sp>
+      <p:sp>
+        <p:nvSpPr>
+          <p:cNvPr id="122" name="Shape 119"/>
+          <p:cNvSpPr/>
+          <p:nvPr/>
+        </p:nvSpPr>
+        <p:spPr>
+          <a:xfrm>
+            <a:off x="1873606" y="4526280"/>
+            <a:ext cx="20117" cy="301752"/>
+          </a:xfrm>
+          <a:prstGeom prst="rect">
+            <a:avLst/>
+          </a:prstGeom>
+          <a:solidFill>
+            <a:srgbClr val="942838"/>
+          </a:solidFill>
+          <a:ln/>
+        </p:spPr>
+      </p:sp>
+      <p:sp>
+        <p:nvSpPr>
+          <p:cNvPr id="123" name="Shape 120"/>
+          <p:cNvSpPr/>
+          <p:nvPr/>
+        </p:nvSpPr>
+        <p:spPr>
+          <a:xfrm>
+            <a:off x="1837944" y="4407408"/>
+            <a:ext cx="91440" cy="118872"/>
+          </a:xfrm>
+          <a:prstGeom prst="triangle">
+            <a:avLst/>
+          </a:prstGeom>
+          <a:solidFill>
+            <a:srgbClr val="942838"/>
+          </a:solidFill>
+          <a:ln/>
+        </p:spPr>
+      </p:sp>
+      <p:sp>
+        <p:nvSpPr>
+          <p:cNvPr id="124" name="Text 121"/>
           <p:cNvSpPr txBox="1"/>
           <p:nvPr/>
         </p:nvSpPr>
@@ -5040,7 +6557,7 @@
       </p:sp>
       <p:sp>
         <p:nvSpPr>
-          <p:cNvPr id="48" name="Shape 45"/>
+          <p:cNvPr id="125" name="Shape 122"/>
           <p:cNvSpPr/>
           <p:nvPr/>
         </p:nvSpPr>
@@ -5065,7 +6582,7 @@
       </p:sp>
       <p:sp>
         <p:nvSpPr>
-          <p:cNvPr id="49" name="Text 46"/>
+          <p:cNvPr id="126" name="Text 123"/>
           <p:cNvSpPr txBox="1"/>
           <p:nvPr/>
         </p:nvSpPr>
@@ -5104,7 +6621,7 @@
       </p:sp>
       <p:sp>
         <p:nvSpPr>
-          <p:cNvPr id="50" name="Text 47"/>
+          <p:cNvPr id="127" name="Text 124"/>
           <p:cNvSpPr txBox="1"/>
           <p:nvPr/>
         </p:nvSpPr>
@@ -5146,7 +6663,7 @@
       </p:sp>
       <p:sp>
         <p:nvSpPr>
-          <p:cNvPr id="51" name="Shape 48"/>
+          <p:cNvPr id="128" name="Shape 125"/>
           <p:cNvSpPr/>
           <p:nvPr/>
         </p:nvSpPr>
@@ -5171,7 +6688,7 @@
       </p:sp>
       <p:sp>
         <p:nvSpPr>
-          <p:cNvPr id="52" name="Text 49"/>
+          <p:cNvPr id="129" name="Text 126"/>
           <p:cNvSpPr txBox="1"/>
           <p:nvPr/>
         </p:nvSpPr>
@@ -5210,7 +6727,7 @@
       </p:sp>
       <p:sp>
         <p:nvSpPr>
-          <p:cNvPr id="53" name="Text 50"/>
+          <p:cNvPr id="130" name="Text 127"/>
           <p:cNvSpPr txBox="1"/>
           <p:nvPr/>
         </p:nvSpPr>

--- a/out/Internship_Exit_Presentation_Stewart.pptx
+++ b/out/Internship_Exit_Presentation_Stewart.pptx
@@ -2446,7 +2446,7 @@
         <p:spPr>
           <a:xfrm>
             <a:off x="777240" y="566928"/>
-            <a:ext cx="1481328" cy="221277"/>
+            <a:ext cx="2194560" cy="221404"/>
           </a:xfrm>
           <a:prstGeom prst="rect">
             <a:avLst/>
@@ -2700,8 +2700,8 @@
         </p:blipFill>
         <p:spPr>
           <a:xfrm>
-            <a:off x="10298887" y="457200"/>
-            <a:ext cx="1115568" cy="166641"/>
+            <a:off x="9768535" y="457200"/>
+            <a:ext cx="1645920" cy="166053"/>
           </a:xfrm>
           <a:prstGeom prst="rect">
             <a:avLst/>
@@ -3436,8 +3436,8 @@
         </p:blipFill>
         <p:spPr>
           <a:xfrm>
-            <a:off x="10298887" y="457200"/>
-            <a:ext cx="1115568" cy="166641"/>
+            <a:off x="9768535" y="457200"/>
+            <a:ext cx="1645920" cy="166053"/>
           </a:xfrm>
           <a:prstGeom prst="rect">
             <a:avLst/>
@@ -7040,8 +7040,8 @@
         </p:blipFill>
         <p:spPr>
           <a:xfrm>
-            <a:off x="10298887" y="457200"/>
-            <a:ext cx="1115568" cy="166641"/>
+            <a:off x="9768535" y="457200"/>
+            <a:ext cx="1645920" cy="166053"/>
           </a:xfrm>
           <a:prstGeom prst="rect">
             <a:avLst/>
@@ -7174,8 +7174,8 @@
         </p:blipFill>
         <p:spPr>
           <a:xfrm>
-            <a:off x="10298887" y="457200"/>
-            <a:ext cx="1115568" cy="166641"/>
+            <a:off x="9768535" y="457200"/>
+            <a:ext cx="1645920" cy="166053"/>
           </a:xfrm>
           <a:prstGeom prst="rect">
             <a:avLst/>
@@ -7954,8 +7954,8 @@
         </p:blipFill>
         <p:spPr>
           <a:xfrm>
-            <a:off x="10298887" y="457200"/>
-            <a:ext cx="1115568" cy="166641"/>
+            <a:off x="9768535" y="457200"/>
+            <a:ext cx="1645920" cy="166053"/>
           </a:xfrm>
           <a:prstGeom prst="rect">
             <a:avLst/>
@@ -8656,8 +8656,8 @@
         </p:blipFill>
         <p:spPr>
           <a:xfrm>
-            <a:off x="10298887" y="457200"/>
-            <a:ext cx="1115568" cy="166641"/>
+            <a:off x="9768535" y="457200"/>
+            <a:ext cx="1645920" cy="166053"/>
           </a:xfrm>
           <a:prstGeom prst="rect">
             <a:avLst/>
@@ -9865,8 +9865,8 @@
         </p:blipFill>
         <p:spPr>
           <a:xfrm>
-            <a:off x="10298887" y="457200"/>
-            <a:ext cx="1115568" cy="166641"/>
+            <a:off x="9768535" y="457200"/>
+            <a:ext cx="1645920" cy="166053"/>
           </a:xfrm>
           <a:prstGeom prst="rect">
             <a:avLst/>
@@ -10719,8 +10719,8 @@
         </p:blipFill>
         <p:spPr>
           <a:xfrm>
-            <a:off x="10298887" y="457200"/>
-            <a:ext cx="1115568" cy="166641"/>
+            <a:off x="9768535" y="457200"/>
+            <a:ext cx="1645920" cy="166053"/>
           </a:xfrm>
           <a:prstGeom prst="rect">
             <a:avLst/>
@@ -11714,8 +11714,8 @@
         </p:blipFill>
         <p:spPr>
           <a:xfrm>
-            <a:off x="10298887" y="457200"/>
-            <a:ext cx="1115568" cy="166641"/>
+            <a:off x="9768535" y="457200"/>
+            <a:ext cx="1645920" cy="166053"/>
           </a:xfrm>
           <a:prstGeom prst="rect">
             <a:avLst/>
@@ -12567,8 +12567,8 @@
         </p:blipFill>
         <p:spPr>
           <a:xfrm>
-            <a:off x="10298887" y="457200"/>
-            <a:ext cx="1115568" cy="166641"/>
+            <a:off x="9768535" y="457200"/>
+            <a:ext cx="1645920" cy="166053"/>
           </a:xfrm>
           <a:prstGeom prst="rect">
             <a:avLst/>
@@ -14339,8 +14339,8 @@
         </p:blipFill>
         <p:spPr>
           <a:xfrm>
-            <a:off x="10298887" y="457200"/>
-            <a:ext cx="1115568" cy="166641"/>
+            <a:off x="9768535" y="457200"/>
+            <a:ext cx="1645920" cy="166053"/>
           </a:xfrm>
           <a:prstGeom prst="rect">
             <a:avLst/>
@@ -14493,8 +14493,8 @@
         </p:blipFill>
         <p:spPr>
           <a:xfrm>
-            <a:off x="10298887" y="457200"/>
-            <a:ext cx="1115568" cy="166641"/>
+            <a:off x="9768535" y="457200"/>
+            <a:ext cx="1645920" cy="166053"/>
           </a:xfrm>
           <a:prstGeom prst="rect">
             <a:avLst/>
@@ -15638,8 +15638,8 @@
         </p:blipFill>
         <p:spPr>
           <a:xfrm>
-            <a:off x="10298887" y="457200"/>
-            <a:ext cx="1115568" cy="166641"/>
+            <a:off x="9768535" y="457200"/>
+            <a:ext cx="1645920" cy="166053"/>
           </a:xfrm>
           <a:prstGeom prst="rect">
             <a:avLst/>
@@ -15772,8 +15772,8 @@
         </p:blipFill>
         <p:spPr>
           <a:xfrm>
-            <a:off x="10298887" y="457200"/>
-            <a:ext cx="1115568" cy="166641"/>
+            <a:off x="9768535" y="457200"/>
+            <a:ext cx="1645920" cy="166053"/>
           </a:xfrm>
           <a:prstGeom prst="rect">
             <a:avLst/>
@@ -17186,8 +17186,8 @@
         </p:blipFill>
         <p:spPr>
           <a:xfrm>
-            <a:off x="10298887" y="457200"/>
-            <a:ext cx="1115568" cy="166641"/>
+            <a:off x="9768535" y="457200"/>
+            <a:ext cx="1645920" cy="166053"/>
           </a:xfrm>
           <a:prstGeom prst="rect">
             <a:avLst/>
@@ -18421,8 +18421,8 @@
         </p:blipFill>
         <p:spPr>
           <a:xfrm>
-            <a:off x="10298887" y="457200"/>
-            <a:ext cx="1115568" cy="166641"/>
+            <a:off x="9768535" y="457200"/>
+            <a:ext cx="1645920" cy="166053"/>
           </a:xfrm>
           <a:prstGeom prst="rect">
             <a:avLst/>
@@ -18555,8 +18555,8 @@
         </p:blipFill>
         <p:spPr>
           <a:xfrm>
-            <a:off x="10298887" y="457200"/>
-            <a:ext cx="1115568" cy="166641"/>
+            <a:off x="9768535" y="457200"/>
+            <a:ext cx="1645920" cy="166053"/>
           </a:xfrm>
           <a:prstGeom prst="rect">
             <a:avLst/>

--- a/out/Internship_Exit_Presentation_Stewart.pptx
+++ b/out/Internship_Exit_Presentation_Stewart.pptx
@@ -26,9 +26,10 @@
     <p:sldId id="274" r:id="rId20"/>
     <p:sldId id="275" r:id="rId21"/>
     <p:sldId id="276" r:id="rId22"/>
+    <p:sldId id="277" r:id="rId23"/>
   </p:sldIdLst>
   <p:notesMasterIdLst>
-    <p:notesMasterId r:id="rId23"/>
+    <p:notesMasterId r:id="rId24"/>
   </p:notesMasterIdLst>
   <p:sldSz cx="12191695" cy="6858000"/>
   <p:notesSz cx="6858000" cy="12191695"/>
@@ -1690,6 +1691,94 @@
             <a:fld id="{F7021451-1387-4CA6-816F-3879F97B5CBC}" type="slidenum">
               <a:rPr lang="en-US"/>
               <a:t>21</a:t>
+            </a:fld>
+            <a:endParaRPr lang="en-US"/>
+          </a:p>
+        </p:txBody>
+      </p:sp>
+    </p:spTree>
+    <p:extLst>
+      <p:ext uri="{BB962C8B-B14F-4D97-AF65-F5344CB8AC3E}">
+        <p14:creationId xmlns:p14="http://schemas.microsoft.com/office/powerpoint/2010/main" val="1024086991"/>
+      </p:ext>
+    </p:extLst>
+  </p:cSld>
+  <p:clrMapOvr>
+    <a:masterClrMapping/>
+  </p:clrMapOvr>
+</p:notes>
+</file>
+
+<file path=ppt/notesSlides/notesSlide22.xml><?xml version="1.0" encoding="utf-8"?>
+<p:notes xmlns:a="http://schemas.openxmlformats.org/drawingml/2006/main" xmlns:r="http://schemas.openxmlformats.org/officeDocument/2006/relationships" xmlns:p="http://schemas.openxmlformats.org/presentationml/2006/main">
+  <p:cSld>
+    <p:spTree>
+      <p:nvGrpSpPr>
+        <p:cNvPr id="1" name=""/>
+        <p:cNvGrpSpPr/>
+        <p:nvPr/>
+      </p:nvGrpSpPr>
+      <p:grpSpPr>
+        <a:xfrm>
+          <a:off x="0" y="0"/>
+          <a:ext cx="0" cy="0"/>
+          <a:chOff x="0" y="0"/>
+          <a:chExt cx="0" cy="0"/>
+        </a:xfrm>
+      </p:grpSpPr>
+      <p:sp>
+        <p:nvSpPr>
+          <p:cNvPr id="2" name="Slide Image Placeholder 1"/>
+          <p:cNvSpPr>
+            <a:spLocks noGrp="1" noRot="1" noChangeAspect="1"/>
+          </p:cNvSpPr>
+          <p:nvPr>
+            <p:ph type="sldImg"/>
+          </p:nvPr>
+        </p:nvSpPr>
+        <p:spPr/>
+      </p:sp>
+      <p:sp>
+        <p:nvSpPr>
+          <p:cNvPr id="3" name="Notes Placeholder 2"/>
+          <p:cNvSpPr>
+            <a:spLocks noGrp="1"/>
+          </p:cNvSpPr>
+          <p:nvPr>
+            <p:ph type="body" idx="1"/>
+          </p:nvPr>
+        </p:nvSpPr>
+        <p:spPr/>
+        <p:txBody>
+          <a:bodyPr/>
+          <a:lstStyle/>
+          <a:p>
+            <a:r>
+              <a:rPr lang="en-US" dirty="0"/>
+              <a:t/>
+            </a:r>
+            <a:endParaRPr lang="en-US" dirty="0"/>
+          </a:p>
+        </p:txBody>
+      </p:sp>
+      <p:sp>
+        <p:nvSpPr>
+          <p:cNvPr id="4" name="Slide Number Placeholder 3"/>
+          <p:cNvSpPr>
+            <a:spLocks noGrp="1"/>
+          </p:cNvSpPr>
+          <p:nvPr>
+            <p:ph type="sldNum" sz="quarter" idx="10"/>
+          </p:nvPr>
+        </p:nvSpPr>
+        <p:spPr/>
+        <p:txBody>
+          <a:bodyPr/>
+          <a:lstStyle/>
+          <a:p>
+            <a:fld id="{F7021451-1387-4CA6-816F-3879F97B5CBC}" type="slidenum">
+              <a:rPr lang="en-US"/>
+              <a:t>22</a:t>
             </a:fld>
             <a:endParaRPr lang="en-US"/>
           </a:p>
@@ -2795,7 +2884,7 @@
                 <a:ea typeface="Montserrat ExtraBold" pitchFamily="34" charset="-122"/>
                 <a:cs typeface="Montserrat ExtraBold" pitchFamily="34" charset="-120"/>
               </a:rPr>
-              <a:t>Security Analyst</a:t>
+              <a:t>Information Security</a:t>
             </a:r>
             <a:endParaRPr lang="en-US" sz="5000" dirty="0"/>
           </a:p>
@@ -2815,7 +2904,7 @@
                 <a:ea typeface="Montserrat ExtraBold" pitchFamily="34" charset="-122"/>
                 <a:cs typeface="Montserrat ExtraBold" pitchFamily="34" charset="-120"/>
               </a:rPr>
-              <a:t>Internship</a:t>
+              <a:t>Analyst Internship</a:t>
             </a:r>
             <a:endParaRPr lang="en-US" sz="5000" dirty="0"/>
           </a:p>
@@ -8611,8 +8700,8 @@
         </p:nvSpPr>
         <p:spPr>
           <a:xfrm>
-            <a:off x="777240" y="2157984"/>
-            <a:ext cx="3840480" cy="1188720"/>
+            <a:off x="777240" y="2103120"/>
+            <a:ext cx="3840480" cy="1133856"/>
           </a:xfrm>
           <a:prstGeom prst="rect">
             <a:avLst/>
@@ -8650,7 +8739,7 @@
         </p:nvSpPr>
         <p:spPr>
           <a:xfrm>
-            <a:off x="777240" y="3346704"/>
+            <a:off x="777240" y="3236976"/>
             <a:ext cx="3840480" cy="457200"/>
           </a:xfrm>
           <a:prstGeom prst="rect">
@@ -8678,7 +8767,7 @@
                 <a:ea typeface="Montserrat Medium" pitchFamily="34" charset="-122"/>
                 <a:cs typeface="Montserrat Medium" pitchFamily="34" charset="-120"/>
               </a:rPr>
-              <a:t>known flaws flagged this cycle,</a:t>
+              <a:t>high and critical flaws tracked</a:t>
             </a:r>
             <a:endParaRPr lang="en-US" sz="950" dirty="0"/>
           </a:p>
@@ -8698,7 +8787,27 @@
                 <a:ea typeface="Montserrat Medium" pitchFamily="34" charset="-122"/>
                 <a:cs typeface="Montserrat Medium" pitchFamily="34" charset="-120"/>
               </a:rPr>
-              <a:t>each needing its own specific patch</a:t>
+              <a:t>this cycle, every one of them</a:t>
+            </a:r>
+            <a:endParaRPr lang="en-US" sz="950" dirty="0"/>
+          </a:p>
+          <a:p>
+            <a:pPr algn="l" indent="0" marL="0">
+              <a:lnSpc>
+                <a:spcPct val="115000"/>
+              </a:lnSpc>
+              <a:buNone/>
+            </a:pPr>
+            <a:r>
+              <a:rPr lang="en-US" sz="950" spc="30" kern="0" dirty="0">
+                <a:solidFill>
+                  <a:srgbClr val="6E7175"/>
+                </a:solidFill>
+                <a:latin typeface="Montserrat Medium" pitchFamily="34" charset="0"/>
+                <a:ea typeface="Montserrat Medium" pitchFamily="34" charset="-122"/>
+                <a:cs typeface="Montserrat Medium" pitchFamily="34" charset="-120"/>
+              </a:rPr>
+              <a:t>directly affecting the business</a:t>
             </a:r>
             <a:endParaRPr lang="en-US" sz="950" dirty="0"/>
           </a:p>
@@ -8712,7 +8821,7 @@
         </p:nvSpPr>
         <p:spPr>
           <a:xfrm>
-            <a:off x="777240" y="3968496"/>
+            <a:off x="777240" y="4041648"/>
             <a:ext cx="566928" cy="45720"/>
           </a:xfrm>
           <a:prstGeom prst="rect">
@@ -8732,8 +8841,8 @@
         </p:nvSpPr>
         <p:spPr>
           <a:xfrm>
-            <a:off x="777240" y="4169664"/>
-            <a:ext cx="3703320" cy="640080"/>
+            <a:off x="777240" y="4242816"/>
+            <a:ext cx="3703320" cy="1005840"/>
           </a:xfrm>
           <a:prstGeom prst="rect">
             <a:avLst/>
@@ -8760,7 +8869,7 @@
                 <a:ea typeface="Montserrat" pitchFamily="34" charset="-122"/>
                 <a:cs typeface="Montserrat" pitchFamily="34" charset="-120"/>
               </a:rPr>
-              <a:t>Kevlar is the tool the team uses to track which machines are exposed to which flaw.</a:t>
+              <a:t>This is not a sample. Kevlar — the team's vulnerability tracker — flagged these because they met both bars: high or critical severity, and a direct effect on business operations.</a:t>
             </a:r>
             <a:endParaRPr lang="en-US" sz="1100" dirty="0"/>
           </a:p>
@@ -8774,7 +8883,7 @@
         </p:nvSpPr>
         <p:spPr>
           <a:xfrm>
-            <a:off x="5029200" y="2139696"/>
+            <a:off x="5029200" y="2084832"/>
             <a:ext cx="6385255" cy="219456"/>
           </a:xfrm>
           <a:prstGeom prst="rect">
@@ -8813,8 +8922,8 @@
         </p:nvSpPr>
         <p:spPr>
           <a:xfrm>
-            <a:off x="5029200" y="2395728"/>
-            <a:ext cx="6385255" cy="694944"/>
+            <a:off x="5029200" y="2340864"/>
+            <a:ext cx="6385255" cy="786384"/>
           </a:xfrm>
           <a:prstGeom prst="rect">
             <a:avLst/>
@@ -8875,7 +8984,7 @@
         </p:nvSpPr>
         <p:spPr>
           <a:xfrm>
-            <a:off x="5029200" y="3438144"/>
+            <a:off x="5029200" y="3419856"/>
             <a:ext cx="6385255" cy="219456"/>
           </a:xfrm>
           <a:prstGeom prst="rect">
@@ -8914,8 +9023,8 @@
         </p:nvSpPr>
         <p:spPr>
           <a:xfrm>
-            <a:off x="5029200" y="3694176"/>
-            <a:ext cx="6385255" cy="694944"/>
+            <a:off x="5029200" y="3675888"/>
+            <a:ext cx="6385255" cy="786384"/>
           </a:xfrm>
           <a:prstGeom prst="rect">
             <a:avLst/>
@@ -8942,7 +9051,7 @@
                 <a:ea typeface="Montserrat" pitchFamily="34" charset="-122"/>
                 <a:cs typeface="Montserrat" pitchFamily="34" charset="-120"/>
               </a:rPr>
-              <a:t>Finding the right fix means searching the vendor's patch catalogue for that exact flaw, on that exact software version — then repeating it.</a:t>
+              <a:t>For each flaw: find Microsoft's advisory, work out which products and versions are affected, locate the matching patch for each one, then check it against the real machine inventory. Then repeat.</a:t>
             </a:r>
             <a:endParaRPr lang="en-US" sz="1250" dirty="0"/>
           </a:p>
@@ -8956,7 +9065,7 @@
         </p:nvSpPr>
         <p:spPr>
           <a:xfrm>
-            <a:off x="5029200" y="4480560"/>
+            <a:off x="5029200" y="4517136"/>
             <a:ext cx="6385255" cy="10973"/>
           </a:xfrm>
           <a:prstGeom prst="rect">
@@ -8976,12 +9085,12 @@
         </p:nvSpPr>
         <p:spPr>
           <a:xfrm>
-            <a:off x="5029200" y="4773168"/>
-            <a:ext cx="6385255" cy="1207008"/>
+            <a:off x="5029200" y="4700016"/>
+            <a:ext cx="6385255" cy="1335024"/>
           </a:xfrm>
           <a:prstGeom prst="roundRect">
             <a:avLst>
-              <a:gd name="adj" fmla="val 4545"/>
+              <a:gd name="adj" fmla="val 4110"/>
             </a:avLst>
           </a:prstGeom>
           <a:solidFill>
@@ -9005,8 +9114,8 @@
         </p:nvSpPr>
         <p:spPr>
           <a:xfrm>
-            <a:off x="5303520" y="4937760"/>
-            <a:ext cx="2743200" cy="201168"/>
+            <a:off x="5303520" y="4846320"/>
+            <a:ext cx="3657600" cy="201168"/>
           </a:xfrm>
           <a:prstGeom prst="rect">
             <a:avLst/>
@@ -9030,7 +9139,7 @@
                 <a:ea typeface="Montserrat SemiBold" pitchFamily="34" charset="-122"/>
                 <a:cs typeface="Montserrat SemiBold" pitchFamily="34" charset="-120"/>
               </a:rPr>
-              <a:t>BEFORE</a:t>
+              <a:t>BEFORE  ·  DOING IT BY HAND</a:t>
             </a:r>
             <a:endParaRPr lang="en-US" sz="850" dirty="0"/>
           </a:p>
@@ -9044,8 +9153,8 @@
         </p:nvSpPr>
         <p:spPr>
           <a:xfrm>
-            <a:off x="5303520" y="5230368"/>
-            <a:ext cx="5836615" cy="420624"/>
+            <a:off x="5303520" y="5120640"/>
+            <a:ext cx="5836615" cy="402336"/>
           </a:xfrm>
           <a:prstGeom prst="rect">
             <a:avLst/>
@@ -9069,13 +9178,13 @@
                 <a:ea typeface="Montserrat ExtraBold" pitchFamily="34" charset="-122"/>
                 <a:cs typeface="Montserrat ExtraBold" pitchFamily="34" charset="-120"/>
               </a:rPr>
-              <a:t>18+ min</a:t>
-            </a:r>
-            <a:pPr indent="0" marL="0">
-              <a:buNone/>
-            </a:pPr>
-            <a:r>
-              <a:rPr lang="en-US" sz="1300" dirty="0">
+              <a:t>~17.5 hours</a:t>
+            </a:r>
+            <a:pPr indent="0" marL="0">
+              <a:buNone/>
+            </a:pPr>
+            <a:r>
+              <a:rPr lang="en-US" sz="1250" dirty="0">
                 <a:solidFill>
                   <a:srgbClr val="DED9DA"/>
                 </a:solidFill>
@@ -9083,7 +9192,7 @@
                 <a:ea typeface="Montserrat Medium" pitchFamily="34" charset="-122"/>
                 <a:cs typeface="Montserrat Medium" pitchFamily="34" charset="-120"/>
               </a:rPr>
-              <a:t>   of analyst time, every cycle</a:t>
+              <a:t>   about 2 to 2.5 business days</a:t>
             </a:r>
             <a:endParaRPr lang="en-US" sz="2600" dirty="0"/>
           </a:p>
@@ -9097,20 +9206,23 @@
         </p:nvSpPr>
         <p:spPr>
           <a:xfrm>
-            <a:off x="5303520" y="5687568"/>
-            <a:ext cx="5836615" cy="219456"/>
-          </a:xfrm>
-          <a:prstGeom prst="rect">
-            <a:avLst/>
-          </a:prstGeom>
-          <a:noFill/>
-          <a:ln/>
-        </p:spPr>
-        <p:txBody>
-          <a:bodyPr wrap="square" lIns="0" tIns="0" rIns="0" bIns="0" rtlCol="0" anchor="t"/>
-          <a:lstStyle/>
-          <a:p>
-            <a:pPr indent="0" marL="0">
+            <a:off x="5303520" y="5559552"/>
+            <a:ext cx="5836615" cy="402336"/>
+          </a:xfrm>
+          <a:prstGeom prst="rect">
+            <a:avLst/>
+          </a:prstGeom>
+          <a:noFill/>
+          <a:ln/>
+        </p:spPr>
+        <p:txBody>
+          <a:bodyPr wrap="square" lIns="0" tIns="0" rIns="0" bIns="0" rtlCol="0" anchor="t"/>
+          <a:lstStyle/>
+          <a:p>
+            <a:pPr indent="0" marL="0">
+              <a:lnSpc>
+                <a:spcPct val="120000"/>
+              </a:lnSpc>
               <a:buNone/>
             </a:pPr>
             <a:r>
@@ -9122,7 +9234,7 @@
                 <a:ea typeface="Montserrat Medium" pitchFamily="34" charset="-122"/>
                 <a:cs typeface="Montserrat Medium" pitchFamily="34" charset="-120"/>
               </a:rPr>
-              <a:t>None of it automated — 0% matched without a person doing the searching.</a:t>
+              <a:t>Estimated at 8–10 min per flaw from the steps above — a reasoned estimate based on the work involved, not a stopwatch measurement.</a:t>
             </a:r>
             <a:endParaRPr lang="en-US" sz="1000" dirty="0"/>
           </a:p>
@@ -9259,7 +9371,7 @@
                 <a:ea typeface="Montserrat ExtraBold" pitchFamily="34" charset="-122"/>
                 <a:cs typeface="Montserrat ExtraBold" pitchFamily="34" charset="-120"/>
               </a:rPr>
-              <a:t>From hours of manual lookup to seconds</a:t>
+              <a:t>From about two days of work to twelve seconds</a:t>
             </a:r>
             <a:endParaRPr lang="en-US" sz="2900" dirty="0"/>
           </a:p>
@@ -9392,7 +9504,7 @@
         <p:spPr>
           <a:xfrm>
             <a:off x="777240" y="1956816"/>
-            <a:ext cx="10058400" cy="310896"/>
+            <a:ext cx="10241280" cy="310896"/>
           </a:xfrm>
           <a:prstGeom prst="rect">
             <a:avLst/>
@@ -9416,7 +9528,7 @@
                 <a:ea typeface="Montserrat Medium" pitchFamily="34" charset="-122"/>
                 <a:cs typeface="Montserrat Medium" pitchFamily="34" charset="-120"/>
               </a:rPr>
-              <a:t>I built a script that searches Microsoft's official patch catalogue automatically and returns the exact fix for each flaw.</a:t>
+              <a:t>I built a Python script that matches each flaw to its Microsoft patch automatically, using Microsoft's own public security feeds — no API key, no manual searching.</a:t>
             </a:r>
             <a:endParaRPr lang="en-US" sz="1400" dirty="0"/>
           </a:p>
@@ -9824,7 +9936,7 @@
                 <a:ea typeface="Montserrat" pitchFamily="34" charset="-122"/>
                 <a:cs typeface="Montserrat" pitchFamily="34" charset="-120"/>
               </a:rPr>
-              <a:t>independently spot-checked and confirmed correct</a:t>
+              <a:t>spot-checked against Tenable, Rapid7 and public advisories — all confirmed correct</a:t>
             </a:r>
             <a:endParaRPr lang="en-US" sz="1100" dirty="0"/>
           </a:p>
@@ -9919,7 +10031,7 @@
                 <a:ea typeface="Montserrat SemiBold" pitchFamily="34" charset="-122"/>
                 <a:cs typeface="Montserrat SemiBold" pitchFamily="34" charset="-120"/>
               </a:rPr>
-              <a:t>PROJECT 03  ·  GOING DEEPER</a:t>
+              <a:t>PROJECT 03  ·  THE FINDING</a:t>
             </a:r>
             <a:endParaRPr lang="en-US" sz="1000" dirty="0"/>
           </a:p>
@@ -9961,7 +10073,7 @@
                 <a:ea typeface="Montserrat ExtraBold" pitchFamily="34" charset="-122"/>
                 <a:cs typeface="Montserrat ExtraBold" pitchFamily="34" charset="-120"/>
               </a:rPr>
-              <a:t>Matching the flaws was only half the job</a:t>
+              <a:t>52 of the 117 needed no action at all</a:t>
             </a:r>
             <a:endParaRPr lang="en-US" sz="2900" dirty="0"/>
           </a:p>
@@ -10087,26 +10199,65 @@
       </p:sp>
       <p:sp>
         <p:nvSpPr>
-          <p:cNvPr id="9" name="Shape 6"/>
+          <p:cNvPr id="9" name="Text 6"/>
+          <p:cNvSpPr txBox="1"/>
+          <p:nvPr/>
+        </p:nvSpPr>
+        <p:spPr>
+          <a:xfrm>
+            <a:off x="777240" y="1956816"/>
+            <a:ext cx="10241280" cy="310896"/>
+          </a:xfrm>
+          <a:prstGeom prst="rect">
+            <a:avLst/>
+          </a:prstGeom>
+          <a:noFill/>
+          <a:ln/>
+        </p:spPr>
+        <p:txBody>
+          <a:bodyPr wrap="square" lIns="0" tIns="0" rIns="0" bIns="0" rtlCol="0" anchor="t"/>
+          <a:lstStyle/>
+          <a:p>
+            <a:pPr indent="0" marL="0">
+              <a:buNone/>
+            </a:pPr>
+            <a:r>
+              <a:rPr lang="en-US" sz="1400" dirty="0">
+                <a:solidFill>
+                  <a:srgbClr val="6E7175"/>
+                </a:solidFill>
+                <a:latin typeface="Montserrat Medium" pitchFamily="34" charset="0"/>
+                <a:ea typeface="Montserrat Medium" pitchFamily="34" charset="-122"/>
+                <a:cs typeface="Montserrat Medium" pitchFamily="34" charset="-120"/>
+              </a:rPr>
+              <a:t>Cross-referencing the matched patches against the real fleet turned up something better than a faster process: a large share of the work did not need doing in the first place.</a:t>
+            </a:r>
+            <a:endParaRPr lang="en-US" sz="1400" dirty="0"/>
+          </a:p>
+        </p:txBody>
+      </p:sp>
+      <p:sp>
+        <p:nvSpPr>
+          <p:cNvPr id="10" name="Shape 7"/>
           <p:cNvSpPr/>
           <p:nvPr/>
         </p:nvSpPr>
         <p:spPr>
           <a:xfrm>
-            <a:off x="777240" y="2029968"/>
-            <a:ext cx="5175504" cy="2212848"/>
+            <a:off x="777240" y="2432304"/>
+            <a:ext cx="5175504" cy="1316736"/>
           </a:xfrm>
           <a:prstGeom prst="roundRect">
             <a:avLst>
-              <a:gd name="adj" fmla="val 2479"/>
+              <a:gd name="adj" fmla="val 4167"/>
             </a:avLst>
           </a:prstGeom>
           <a:solidFill>
-            <a:srgbClr val="FFFFFF"/>
+            <a:srgbClr val="F6EEF0"/>
           </a:solidFill>
           <a:ln w="9525">
             <a:solidFill>
-              <a:srgbClr val="E6E4E2"/>
+              <a:srgbClr val="942838"/>
             </a:solidFill>
             <a:prstDash val="solid"/>
           </a:ln>
@@ -10121,163 +10272,82 @@
       </p:sp>
       <p:sp>
         <p:nvSpPr>
-          <p:cNvPr id="10" name="Text 7"/>
-          <p:cNvSpPr txBox="1"/>
-          <p:nvPr/>
-        </p:nvSpPr>
-        <p:spPr>
-          <a:xfrm>
-            <a:off x="1088136" y="2304288"/>
-            <a:ext cx="4553712" cy="201168"/>
-          </a:xfrm>
-          <a:prstGeom prst="rect">
-            <a:avLst/>
-          </a:prstGeom>
-          <a:noFill/>
-          <a:ln/>
-        </p:spPr>
-        <p:txBody>
-          <a:bodyPr wrap="square" lIns="0" tIns="0" rIns="0" bIns="0" rtlCol="0" anchor="t"/>
-          <a:lstStyle/>
-          <a:p>
-            <a:pPr indent="0" marL="0">
-              <a:buNone/>
-            </a:pPr>
-            <a:r>
-              <a:rPr lang="en-US" sz="850" spc="140" kern="0" dirty="0">
+          <p:cNvPr id="11" name="Text 8"/>
+          <p:cNvSpPr txBox="1"/>
+          <p:nvPr/>
+        </p:nvSpPr>
+        <p:spPr>
+          <a:xfrm>
+            <a:off x="1088136" y="2670048"/>
+            <a:ext cx="1737360" cy="694944"/>
+          </a:xfrm>
+          <a:prstGeom prst="rect">
+            <a:avLst/>
+          </a:prstGeom>
+          <a:noFill/>
+          <a:ln/>
+        </p:spPr>
+        <p:txBody>
+          <a:bodyPr wrap="square" lIns="0" tIns="0" rIns="0" bIns="0" rtlCol="0" anchor="t"/>
+          <a:lstStyle/>
+          <a:p>
+            <a:pPr indent="0" marL="0">
+              <a:buNone/>
+            </a:pPr>
+            <a:r>
+              <a:rPr lang="en-US" sz="4600" spc="-180" kern="0" dirty="0">
                 <a:solidFill>
                   <a:srgbClr val="942838"/>
+                </a:solidFill>
+                <a:latin typeface="Montserrat ExtraBold" pitchFamily="34" charset="0"/>
+                <a:ea typeface="Montserrat ExtraBold" pitchFamily="34" charset="-122"/>
+                <a:cs typeface="Montserrat ExtraBold" pitchFamily="34" charset="-120"/>
+              </a:rPr>
+              <a:t>65</a:t>
+            </a:r>
+            <a:endParaRPr lang="en-US" sz="4600" dirty="0"/>
+          </a:p>
+        </p:txBody>
+      </p:sp>
+      <p:sp>
+        <p:nvSpPr>
+          <p:cNvPr id="12" name="Text 9"/>
+          <p:cNvSpPr txBox="1"/>
+          <p:nvPr/>
+        </p:nvSpPr>
+        <p:spPr>
+          <a:xfrm>
+            <a:off x="2880360" y="2889504"/>
+            <a:ext cx="2761488" cy="457200"/>
+          </a:xfrm>
+          <a:prstGeom prst="rect">
+            <a:avLst/>
+          </a:prstGeom>
+          <a:noFill/>
+          <a:ln/>
+        </p:spPr>
+        <p:txBody>
+          <a:bodyPr wrap="square" lIns="0" tIns="0" rIns="0" bIns="0" rtlCol="0" anchor="t"/>
+          <a:lstStyle/>
+          <a:p>
+            <a:pPr indent="0" marL="0">
+              <a:lnSpc>
+                <a:spcPct val="115000"/>
+              </a:lnSpc>
+              <a:buNone/>
+            </a:pPr>
+            <a:r>
+              <a:rPr lang="en-US" sz="1300" dirty="0">
+                <a:solidFill>
+                  <a:srgbClr val="2B2D30"/>
                 </a:solidFill>
                 <a:latin typeface="Montserrat SemiBold" pitchFamily="34" charset="0"/>
                 <a:ea typeface="Montserrat SemiBold" pitchFamily="34" charset="-122"/>
                 <a:cs typeface="Montserrat SemiBold" pitchFamily="34" charset="-120"/>
               </a:rPr>
-              <a:t>WHY 209 IS NOT 117</a:t>
-            </a:r>
-            <a:endParaRPr lang="en-US" sz="850" dirty="0"/>
-          </a:p>
-        </p:txBody>
-      </p:sp>
-      <p:sp>
-        <p:nvSpPr>
-          <p:cNvPr id="11" name="Text 8"/>
-          <p:cNvSpPr txBox="1"/>
-          <p:nvPr/>
-        </p:nvSpPr>
-        <p:spPr>
-          <a:xfrm>
-            <a:off x="1088136" y="2578608"/>
-            <a:ext cx="4553712" cy="457200"/>
-          </a:xfrm>
-          <a:prstGeom prst="rect">
-            <a:avLst/>
-          </a:prstGeom>
-          <a:noFill/>
-          <a:ln/>
-        </p:spPr>
-        <p:txBody>
-          <a:bodyPr wrap="square" lIns="0" tIns="0" rIns="0" bIns="0" rtlCol="0" anchor="t"/>
-          <a:lstStyle/>
-          <a:p>
-            <a:pPr indent="0" marL="0">
-              <a:buNone/>
-            </a:pPr>
-            <a:r>
-              <a:rPr lang="en-US" sz="3000" spc="-100" kern="0" dirty="0">
-                <a:solidFill>
-                  <a:srgbClr val="2B2D30"/>
-                </a:solidFill>
-                <a:latin typeface="Montserrat ExtraBold" pitchFamily="34" charset="0"/>
-                <a:ea typeface="Montserrat ExtraBold" pitchFamily="34" charset="-122"/>
-                <a:cs typeface="Montserrat ExtraBold" pitchFamily="34" charset="-120"/>
-              </a:rPr>
-              <a:t>117</a:t>
-            </a:r>
-            <a:pPr indent="0" marL="0">
-              <a:buNone/>
-            </a:pPr>
-            <a:r>
-              <a:rPr lang="en-US" sz="1400" dirty="0">
-                <a:solidFill>
-                  <a:srgbClr val="6E7175"/>
-                </a:solidFill>
-                <a:latin typeface="Montserrat Medium" pitchFamily="34" charset="0"/>
-                <a:ea typeface="Montserrat Medium" pitchFamily="34" charset="-122"/>
-                <a:cs typeface="Montserrat Medium" pitchFamily="34" charset="-120"/>
-              </a:rPr>
-              <a:t>  flaws  →  </a:t>
-            </a:r>
-            <a:pPr indent="0" marL="0">
-              <a:buNone/>
-            </a:pPr>
-            <a:r>
-              <a:rPr lang="en-US" sz="3000" spc="-100" kern="0" dirty="0">
-                <a:solidFill>
-                  <a:srgbClr val="942838"/>
-                </a:solidFill>
-                <a:latin typeface="Montserrat ExtraBold" pitchFamily="34" charset="0"/>
-                <a:ea typeface="Montserrat ExtraBold" pitchFamily="34" charset="-122"/>
-                <a:cs typeface="Montserrat ExtraBold" pitchFamily="34" charset="-120"/>
-              </a:rPr>
-              <a:t>209</a:t>
-            </a:r>
-            <a:pPr indent="0" marL="0">
-              <a:buNone/>
-            </a:pPr>
-            <a:r>
-              <a:rPr lang="en-US" sz="1400" dirty="0">
-                <a:solidFill>
-                  <a:srgbClr val="6E7175"/>
-                </a:solidFill>
-                <a:latin typeface="Montserrat Medium" pitchFamily="34" charset="0"/>
-                <a:ea typeface="Montserrat Medium" pitchFamily="34" charset="-122"/>
-                <a:cs typeface="Montserrat Medium" pitchFamily="34" charset="-120"/>
-              </a:rPr>
-              <a:t>  fix-actions</a:t>
-            </a:r>
-            <a:endParaRPr lang="en-US" sz="3000" dirty="0"/>
-          </a:p>
-        </p:txBody>
-      </p:sp>
-      <p:sp>
-        <p:nvSpPr>
-          <p:cNvPr id="12" name="Text 9"/>
-          <p:cNvSpPr txBox="1"/>
-          <p:nvPr/>
-        </p:nvSpPr>
-        <p:spPr>
-          <a:xfrm>
-            <a:off x="1088136" y="3108960"/>
-            <a:ext cx="4553712" cy="914400"/>
-          </a:xfrm>
-          <a:prstGeom prst="rect">
-            <a:avLst/>
-          </a:prstGeom>
-          <a:noFill/>
-          <a:ln/>
-        </p:spPr>
-        <p:txBody>
-          <a:bodyPr wrap="square" lIns="0" tIns="0" rIns="0" bIns="0" rtlCol="0" anchor="t"/>
-          <a:lstStyle/>
-          <a:p>
-            <a:pPr indent="0" marL="0">
-              <a:lnSpc>
-                <a:spcPct val="126000"/>
-              </a:lnSpc>
-              <a:buNone/>
-            </a:pPr>
-            <a:r>
-              <a:rPr lang="en-US" sz="1100" dirty="0">
-                <a:solidFill>
-                  <a:srgbClr val="43464A"/>
-                </a:solidFill>
-                <a:latin typeface="Montserrat" pitchFamily="34" charset="0"/>
-                <a:ea typeface="Montserrat" pitchFamily="34" charset="-122"/>
-                <a:cs typeface="Montserrat" pitchFamily="34" charset="-120"/>
-              </a:rPr>
-              <a:t>After matching, I cross-referenced against Kevlar's real per-machine tracking data. One flaw can need patching on many machines, and one patch can fix several flaws — so the real count of individual fix-actions across the fleet was 209.</a:t>
-            </a:r>
-            <a:endParaRPr lang="en-US" sz="1100" dirty="0"/>
+              <a:t>flaws genuinely outstanding</a:t>
+            </a:r>
+            <a:endParaRPr lang="en-US" sz="1300" dirty="0"/>
           </a:p>
         </p:txBody>
       </p:sp>
@@ -10289,16 +10359,16 @@
         </p:nvSpPr>
         <p:spPr>
           <a:xfrm>
-            <a:off x="6236208" y="2029968"/>
-            <a:ext cx="5175504" cy="2212848"/>
+            <a:off x="6236208" y="2432304"/>
+            <a:ext cx="5175504" cy="1316736"/>
           </a:xfrm>
           <a:prstGeom prst="roundRect">
             <a:avLst>
-              <a:gd name="adj" fmla="val 2479"/>
+              <a:gd name="adj" fmla="val 4167"/>
             </a:avLst>
           </a:prstGeom>
           <a:solidFill>
-            <a:srgbClr val="FFFFFF"/>
+            <a:srgbClr val="F5F4F3"/>
           </a:solidFill>
           <a:ln w="9525">
             <a:solidFill>
@@ -10323,719 +10393,270 @@
         </p:nvSpPr>
         <p:spPr>
           <a:xfrm>
-            <a:off x="6547104" y="2304288"/>
-            <a:ext cx="4553712" cy="201168"/>
-          </a:xfrm>
-          <a:prstGeom prst="rect">
-            <a:avLst/>
-          </a:prstGeom>
-          <a:noFill/>
-          <a:ln/>
-        </p:spPr>
-        <p:txBody>
-          <a:bodyPr wrap="square" lIns="0" tIns="0" rIns="0" bIns="0" rtlCol="0" anchor="t"/>
-          <a:lstStyle/>
-          <a:p>
-            <a:pPr indent="0" marL="0">
-              <a:buNone/>
-            </a:pPr>
-            <a:r>
-              <a:rPr lang="en-US" sz="850" spc="140" kern="0" dirty="0">
-                <a:solidFill>
-                  <a:srgbClr val="942838"/>
+            <a:off x="6547104" y="2670048"/>
+            <a:ext cx="1737360" cy="694944"/>
+          </a:xfrm>
+          <a:prstGeom prst="rect">
+            <a:avLst/>
+          </a:prstGeom>
+          <a:noFill/>
+          <a:ln/>
+        </p:spPr>
+        <p:txBody>
+          <a:bodyPr wrap="square" lIns="0" tIns="0" rIns="0" bIns="0" rtlCol="0" anchor="t"/>
+          <a:lstStyle/>
+          <a:p>
+            <a:pPr indent="0" marL="0">
+              <a:buNone/>
+            </a:pPr>
+            <a:r>
+              <a:rPr lang="en-US" sz="4600" spc="-180" kern="0" dirty="0">
+                <a:solidFill>
+                  <a:srgbClr val="2B2D30"/>
+                </a:solidFill>
+                <a:latin typeface="Montserrat ExtraBold" pitchFamily="34" charset="0"/>
+                <a:ea typeface="Montserrat ExtraBold" pitchFamily="34" charset="-122"/>
+                <a:cs typeface="Montserrat ExtraBold" pitchFamily="34" charset="-120"/>
+              </a:rPr>
+              <a:t>52</a:t>
+            </a:r>
+            <a:endParaRPr lang="en-US" sz="4600" dirty="0"/>
+          </a:p>
+        </p:txBody>
+      </p:sp>
+      <p:sp>
+        <p:nvSpPr>
+          <p:cNvPr id="15" name="Text 12"/>
+          <p:cNvSpPr txBox="1"/>
+          <p:nvPr/>
+        </p:nvSpPr>
+        <p:spPr>
+          <a:xfrm>
+            <a:off x="8339328" y="2889504"/>
+            <a:ext cx="2761488" cy="457200"/>
+          </a:xfrm>
+          <a:prstGeom prst="rect">
+            <a:avLst/>
+          </a:prstGeom>
+          <a:noFill/>
+          <a:ln/>
+        </p:spPr>
+        <p:txBody>
+          <a:bodyPr wrap="square" lIns="0" tIns="0" rIns="0" bIns="0" rtlCol="0" anchor="t"/>
+          <a:lstStyle/>
+          <a:p>
+            <a:pPr indent="0" marL="0">
+              <a:lnSpc>
+                <a:spcPct val="115000"/>
+              </a:lnSpc>
+              <a:buNone/>
+            </a:pPr>
+            <a:r>
+              <a:rPr lang="en-US" sz="1300" dirty="0">
+                <a:solidFill>
+                  <a:srgbClr val="6E7175"/>
                 </a:solidFill>
                 <a:latin typeface="Montserrat SemiBold" pitchFamily="34" charset="0"/>
                 <a:ea typeface="Montserrat SemiBold" pitchFamily="34" charset="-122"/>
                 <a:cs typeface="Montserrat SemiBold" pitchFamily="34" charset="-120"/>
               </a:rPr>
-              <a:t>THE RULE THAT COLLAPSES IT</a:t>
+              <a:t>flaws needing no action at all</a:t>
+            </a:r>
+            <a:endParaRPr lang="en-US" sz="1300" dirty="0"/>
+          </a:p>
+        </p:txBody>
+      </p:sp>
+      <p:sp>
+        <p:nvSpPr>
+          <p:cNvPr id="16" name="Text 13"/>
+          <p:cNvSpPr txBox="1"/>
+          <p:nvPr/>
+        </p:nvSpPr>
+        <p:spPr>
+          <a:xfrm>
+            <a:off x="777240" y="3986784"/>
+            <a:ext cx="6400800" cy="201168"/>
+          </a:xfrm>
+          <a:prstGeom prst="rect">
+            <a:avLst/>
+          </a:prstGeom>
+          <a:noFill/>
+          <a:ln/>
+        </p:spPr>
+        <p:txBody>
+          <a:bodyPr wrap="square" lIns="0" tIns="0" rIns="0" bIns="0" rtlCol="0" anchor="t"/>
+          <a:lstStyle/>
+          <a:p>
+            <a:pPr indent="0" marL="0">
+              <a:buNone/>
+            </a:pPr>
+            <a:r>
+              <a:rPr lang="en-US" sz="850" spc="140" kern="0" dirty="0">
+                <a:solidFill>
+                  <a:srgbClr val="942838"/>
+                </a:solidFill>
+                <a:latin typeface="Montserrat SemiBold" pitchFamily="34" charset="0"/>
+                <a:ea typeface="Montserrat SemiBold" pitchFamily="34" charset="-122"/>
+                <a:cs typeface="Montserrat SemiBold" pitchFamily="34" charset="-120"/>
+              </a:rPr>
+              <a:t>EVERY SQUARE IS ONE TRACKED FLAW</a:t>
             </a:r>
             <a:endParaRPr lang="en-US" sz="850" dirty="0"/>
           </a:p>
         </p:txBody>
       </p:sp>
-      <p:sp>
-        <p:nvSpPr>
-          <p:cNvPr id="15" name="Text 12"/>
-          <p:cNvSpPr txBox="1"/>
-          <p:nvPr/>
-        </p:nvSpPr>
-        <p:spPr>
-          <a:xfrm>
-            <a:off x="6547104" y="2578608"/>
-            <a:ext cx="4553712" cy="384048"/>
-          </a:xfrm>
-          <a:prstGeom prst="rect">
-            <a:avLst/>
-          </a:prstGeom>
-          <a:noFill/>
-          <a:ln/>
-        </p:spPr>
-        <p:txBody>
-          <a:bodyPr wrap="square" lIns="0" tIns="0" rIns="0" bIns="0" rtlCol="0" anchor="t"/>
-          <a:lstStyle/>
-          <a:p>
-            <a:pPr indent="0" marL="0">
-              <a:buNone/>
-            </a:pPr>
-            <a:r>
-              <a:rPr lang="en-US" sz="2400" spc="-70" kern="0" dirty="0">
+      <p:pic>
+        <p:nvPicPr>
+          <p:cNvPr id="17" name="Image 1" descr="/home/user/ai/assets/gen/chart-no-action.png">    </p:cNvPr>
+          <p:cNvPicPr>
+            <a:picLocks noChangeAspect="1"/>
+          </p:cNvPicPr>
+          <p:nvPr/>
+        </p:nvPicPr>
+        <p:blipFill>
+          <a:blip r:embed="rId2"/>
+          <a:stretch>
+            <a:fillRect/>
+          </a:stretch>
+        </p:blipFill>
+        <p:spPr>
+          <a:xfrm>
+            <a:off x="777240" y="4242816"/>
+            <a:ext cx="10637215" cy="767634"/>
+          </a:xfrm>
+          <a:prstGeom prst="rect">
+            <a:avLst/>
+          </a:prstGeom>
+        </p:spPr>
+      </p:pic>
+      <p:sp>
+        <p:nvSpPr>
+          <p:cNvPr id="18" name="Text 14"/>
+          <p:cNvSpPr txBox="1"/>
+          <p:nvPr/>
+        </p:nvSpPr>
+        <p:spPr>
+          <a:xfrm>
+            <a:off x="777240" y="5101890"/>
+            <a:ext cx="4572000" cy="256032"/>
+          </a:xfrm>
+          <a:prstGeom prst="rect">
+            <a:avLst/>
+          </a:prstGeom>
+          <a:noFill/>
+          <a:ln/>
+        </p:spPr>
+        <p:txBody>
+          <a:bodyPr wrap="square" lIns="0" tIns="0" rIns="0" bIns="0" rtlCol="0" anchor="t"/>
+          <a:lstStyle/>
+          <a:p>
+            <a:pPr indent="0" marL="0">
+              <a:buNone/>
+            </a:pPr>
+            <a:r>
+              <a:rPr lang="en-US" sz="1150" dirty="0">
+                <a:solidFill>
+                  <a:srgbClr val="942838"/>
+                </a:solidFill>
+                <a:latin typeface="Montserrat SemiBold" pitchFamily="34" charset="0"/>
+                <a:ea typeface="Montserrat SemiBold" pitchFamily="34" charset="-122"/>
+                <a:cs typeface="Montserrat SemiBold" pitchFamily="34" charset="-120"/>
+              </a:rPr>
+              <a:t>65 still needed patching</a:t>
+            </a:r>
+            <a:endParaRPr lang="en-US" sz="1150" dirty="0"/>
+          </a:p>
+        </p:txBody>
+      </p:sp>
+      <p:sp>
+        <p:nvSpPr>
+          <p:cNvPr id="19" name="Text 15"/>
+          <p:cNvSpPr txBox="1"/>
+          <p:nvPr/>
+        </p:nvSpPr>
+        <p:spPr>
+          <a:xfrm>
+            <a:off x="5928055" y="5101890"/>
+            <a:ext cx="5486400" cy="256032"/>
+          </a:xfrm>
+          <a:prstGeom prst="rect">
+            <a:avLst/>
+          </a:prstGeom>
+          <a:noFill/>
+          <a:ln/>
+        </p:spPr>
+        <p:txBody>
+          <a:bodyPr wrap="square" lIns="0" tIns="0" rIns="0" bIns="0" rtlCol="0" anchor="t"/>
+          <a:lstStyle/>
+          <a:p>
+            <a:pPr algn="r" indent="0" marL="0">
+              <a:buNone/>
+            </a:pPr>
+            <a:r>
+              <a:rPr lang="en-US" sz="1150" dirty="0">
+                <a:solidFill>
+                  <a:srgbClr val="6E7175"/>
+                </a:solidFill>
+                <a:latin typeface="Montserrat SemiBold" pitchFamily="34" charset="0"/>
+                <a:ea typeface="Montserrat SemiBold" pitchFamily="34" charset="-122"/>
+                <a:cs typeface="Montserrat SemiBold" pitchFamily="34" charset="-120"/>
+              </a:rPr>
+              <a:t>52 already covered by routine monthly patching</a:t>
+            </a:r>
+            <a:endParaRPr lang="en-US" sz="1150" dirty="0"/>
+          </a:p>
+        </p:txBody>
+      </p:sp>
+      <p:sp>
+        <p:nvSpPr>
+          <p:cNvPr id="20" name="Text 16"/>
+          <p:cNvSpPr txBox="1"/>
+          <p:nvPr/>
+        </p:nvSpPr>
+        <p:spPr>
+          <a:xfrm>
+            <a:off x="777240" y="5687568"/>
+            <a:ext cx="10637215" cy="310896"/>
+          </a:xfrm>
+          <a:prstGeom prst="rect">
+            <a:avLst/>
+          </a:prstGeom>
+          <a:noFill/>
+          <a:ln/>
+        </p:spPr>
+        <p:txBody>
+          <a:bodyPr wrap="square" lIns="0" tIns="0" rIns="0" bIns="0" rtlCol="0" anchor="t"/>
+          <a:lstStyle/>
+          <a:p>
+            <a:pPr indent="0" marL="0">
+              <a:buNone/>
+            </a:pPr>
+            <a:r>
+              <a:rPr lang="en-US" sz="1150" dirty="0">
                 <a:solidFill>
                   <a:srgbClr val="2B2D30"/>
                 </a:solidFill>
-                <a:latin typeface="Montserrat ExtraBold" pitchFamily="34" charset="0"/>
-                <a:ea typeface="Montserrat ExtraBold" pitchFamily="34" charset="-122"/>
-                <a:cs typeface="Montserrat ExtraBold" pitchFamily="34" charset="-120"/>
-              </a:rPr>
-              <a:t>Newest patch wins</a:t>
-            </a:r>
-            <a:endParaRPr lang="en-US" sz="2400" dirty="0"/>
-          </a:p>
-        </p:txBody>
-      </p:sp>
-      <p:sp>
-        <p:nvSpPr>
-          <p:cNvPr id="16" name="Text 13"/>
-          <p:cNvSpPr txBox="1"/>
-          <p:nvPr/>
-        </p:nvSpPr>
-        <p:spPr>
-          <a:xfrm>
-            <a:off x="6547104" y="3108960"/>
-            <a:ext cx="4553712" cy="914400"/>
-          </a:xfrm>
-          <a:prstGeom prst="rect">
-            <a:avLst/>
-          </a:prstGeom>
-          <a:noFill/>
-          <a:ln/>
-        </p:spPr>
-        <p:txBody>
-          <a:bodyPr wrap="square" lIns="0" tIns="0" rIns="0" bIns="0" rtlCol="0" anchor="t"/>
-          <a:lstStyle/>
-          <a:p>
-            <a:pPr indent="0" marL="0">
-              <a:lnSpc>
-                <a:spcPct val="126000"/>
-              </a:lnSpc>
-              <a:buNone/>
-            </a:pPr>
-            <a:r>
-              <a:rPr lang="en-US" sz="1100" dirty="0">
-                <a:solidFill>
-                  <a:srgbClr val="43464A"/>
+                <a:latin typeface="Montserrat SemiBold" pitchFamily="34" charset="0"/>
+                <a:ea typeface="Montserrat SemiBold" pitchFamily="34" charset="-122"/>
+                <a:cs typeface="Montserrat SemiBold" pitchFamily="34" charset="-120"/>
+              </a:rPr>
+              <a:t>Why: </a:t>
+            </a:r>
+            <a:pPr indent="0" marL="0">
+              <a:buNone/>
+            </a:pPr>
+            <a:r>
+              <a:rPr lang="en-US" sz="1150" dirty="0">
+                <a:solidFill>
+                  <a:srgbClr val="6E7175"/>
                 </a:solidFill>
                 <a:latin typeface="Montserrat" pitchFamily="34" charset="0"/>
                 <a:ea typeface="Montserrat" pitchFamily="34" charset="-122"/>
                 <a:cs typeface="Montserrat" pitchFamily="34" charset="-120"/>
               </a:rPr>
-              <a:t>Windows patches supersede each other — the newest one already contains every older fix for that software. So we keep only the newest patch for each machine-and-software pair. It silently covers the rest, with nothing left unpatched.</a:t>
-            </a:r>
-            <a:endParaRPr lang="en-US" sz="1100" dirty="0"/>
-          </a:p>
-        </p:txBody>
-      </p:sp>
-      <p:sp>
-        <p:nvSpPr>
-          <p:cNvPr id="17" name="Text 14"/>
-          <p:cNvSpPr txBox="1"/>
-          <p:nvPr/>
-        </p:nvSpPr>
-        <p:spPr>
-          <a:xfrm>
-            <a:off x="777240" y="4681728"/>
-            <a:ext cx="5486400" cy="201168"/>
-          </a:xfrm>
-          <a:prstGeom prst="rect">
-            <a:avLst/>
-          </a:prstGeom>
-          <a:noFill/>
-          <a:ln/>
-        </p:spPr>
-        <p:txBody>
-          <a:bodyPr wrap="square" lIns="0" tIns="0" rIns="0" bIns="0" rtlCol="0" anchor="t"/>
-          <a:lstStyle/>
-          <a:p>
-            <a:pPr indent="0" marL="0">
-              <a:buNone/>
-            </a:pPr>
-            <a:r>
-              <a:rPr lang="en-US" sz="850" spc="140" kern="0" dirty="0">
-                <a:solidFill>
-                  <a:srgbClr val="942838"/>
-                </a:solidFill>
-                <a:latin typeface="Montserrat SemiBold" pitchFamily="34" charset="0"/>
-                <a:ea typeface="Montserrat SemiBold" pitchFamily="34" charset="-122"/>
-                <a:cs typeface="Montserrat SemiBold" pitchFamily="34" charset="-120"/>
-              </a:rPr>
-              <a:t>THE FULL CHAIN</a:t>
-            </a:r>
-            <a:endParaRPr lang="en-US" sz="850" dirty="0"/>
-          </a:p>
-        </p:txBody>
-      </p:sp>
-      <p:sp>
-        <p:nvSpPr>
-          <p:cNvPr id="18" name="Shape 15"/>
-          <p:cNvSpPr/>
-          <p:nvPr/>
-        </p:nvSpPr>
-        <p:spPr>
-          <a:xfrm>
-            <a:off x="777240" y="4992624"/>
-            <a:ext cx="2487168" cy="932688"/>
-          </a:xfrm>
-          <a:prstGeom prst="roundRect">
-            <a:avLst>
-              <a:gd name="adj" fmla="val 5882"/>
-            </a:avLst>
-          </a:prstGeom>
-          <a:solidFill>
-            <a:srgbClr val="F5F4F3"/>
-          </a:solidFill>
-          <a:ln w="9525">
-            <a:solidFill>
-              <a:srgbClr val="E6E4E2"/>
-            </a:solidFill>
-            <a:prstDash val="solid"/>
-          </a:ln>
-          <a:effectLst>
-            <a:outerShdw sx="100000" sy="100000" kx="0" ky="0" algn="bl" rotWithShape="0" blurRad="101600" dist="50800" dir="5400000">
-              <a:srgbClr val="FFFFFF">
-                <a:alpha val="75000"/>
-              </a:srgbClr>
-            </a:outerShdw>
-          </a:effectLst>
-        </p:spPr>
-      </p:sp>
-      <p:sp>
-        <p:nvSpPr>
-          <p:cNvPr id="19" name="Text 16"/>
-          <p:cNvSpPr txBox="1"/>
-          <p:nvPr/>
-        </p:nvSpPr>
-        <p:spPr>
-          <a:xfrm>
-            <a:off x="960120" y="5138928"/>
-            <a:ext cx="2121408" cy="420624"/>
-          </a:xfrm>
-          <a:prstGeom prst="rect">
-            <a:avLst/>
-          </a:prstGeom>
-          <a:noFill/>
-          <a:ln/>
-        </p:spPr>
-        <p:txBody>
-          <a:bodyPr wrap="square" lIns="0" tIns="0" rIns="0" bIns="0" rtlCol="0" anchor="ctr"/>
-          <a:lstStyle/>
-          <a:p>
-            <a:pPr algn="ctr" indent="0" marL="0">
-              <a:buNone/>
-            </a:pPr>
-            <a:r>
-              <a:rPr lang="en-US" sz="2600" spc="-90" kern="0" dirty="0">
-                <a:solidFill>
-                  <a:srgbClr val="2B2D30"/>
-                </a:solidFill>
-                <a:latin typeface="Montserrat ExtraBold" pitchFamily="34" charset="0"/>
-                <a:ea typeface="Montserrat ExtraBold" pitchFamily="34" charset="-122"/>
-                <a:cs typeface="Montserrat ExtraBold" pitchFamily="34" charset="-120"/>
-              </a:rPr>
-              <a:t>117</a:t>
-            </a:r>
-            <a:endParaRPr lang="en-US" sz="2600" dirty="0"/>
-          </a:p>
-        </p:txBody>
-      </p:sp>
-      <p:sp>
-        <p:nvSpPr>
-          <p:cNvPr id="20" name="Text 17"/>
-          <p:cNvSpPr txBox="1"/>
-          <p:nvPr/>
-        </p:nvSpPr>
-        <p:spPr>
-          <a:xfrm>
-            <a:off x="923544" y="5596128"/>
-            <a:ext cx="2194560" cy="256032"/>
-          </a:xfrm>
-          <a:prstGeom prst="rect">
-            <a:avLst/>
-          </a:prstGeom>
-          <a:noFill/>
-          <a:ln/>
-        </p:spPr>
-        <p:txBody>
-          <a:bodyPr wrap="square" lIns="0" tIns="0" rIns="0" bIns="0" rtlCol="0" anchor="t"/>
-          <a:lstStyle/>
-          <a:p>
-            <a:pPr algn="ctr" indent="0" marL="0">
-              <a:buNone/>
-            </a:pPr>
-            <a:r>
-              <a:rPr lang="en-US" sz="950" spc="30" kern="0" dirty="0">
-                <a:solidFill>
-                  <a:srgbClr val="6E7175"/>
-                </a:solidFill>
-                <a:latin typeface="Montserrat Medium" pitchFamily="34" charset="0"/>
-                <a:ea typeface="Montserrat Medium" pitchFamily="34" charset="-122"/>
-                <a:cs typeface="Montserrat Medium" pitchFamily="34" charset="-120"/>
-              </a:rPr>
-              <a:t>flaws matched</a:t>
-            </a:r>
-            <a:endParaRPr lang="en-US" sz="950" dirty="0"/>
-          </a:p>
-        </p:txBody>
-      </p:sp>
-      <p:sp>
-        <p:nvSpPr>
-          <p:cNvPr id="21" name="Text 18"/>
-          <p:cNvSpPr txBox="1"/>
-          <p:nvPr/>
-        </p:nvSpPr>
-        <p:spPr>
-          <a:xfrm>
-            <a:off x="3196285" y="5248656"/>
-            <a:ext cx="365760" cy="420624"/>
-          </a:xfrm>
-          <a:prstGeom prst="rect">
-            <a:avLst/>
-          </a:prstGeom>
-          <a:noFill/>
-          <a:ln/>
-        </p:spPr>
-        <p:txBody>
-          <a:bodyPr wrap="square" lIns="0" tIns="0" rIns="0" bIns="0" rtlCol="0" anchor="ctr"/>
-          <a:lstStyle/>
-          <a:p>
-            <a:pPr algn="ctr" indent="0" marL="0">
-              <a:buNone/>
-            </a:pPr>
-            <a:r>
-              <a:rPr lang="en-US" sz="2600" b="1" dirty="0">
-                <a:solidFill>
-                  <a:srgbClr val="C9C6C4"/>
-                </a:solidFill>
-                <a:latin typeface="Montserrat" pitchFamily="34" charset="0"/>
-                <a:ea typeface="Montserrat" pitchFamily="34" charset="-122"/>
-                <a:cs typeface="Montserrat" pitchFamily="34" charset="-120"/>
-              </a:rPr>
-              <a:t>›</a:t>
-            </a:r>
-            <a:endParaRPr lang="en-US" sz="2600" dirty="0"/>
-          </a:p>
-        </p:txBody>
-      </p:sp>
-      <p:sp>
-        <p:nvSpPr>
-          <p:cNvPr id="22" name="Shape 19"/>
-          <p:cNvSpPr/>
-          <p:nvPr/>
-        </p:nvSpPr>
-        <p:spPr>
-          <a:xfrm>
-            <a:off x="3493922" y="4992624"/>
-            <a:ext cx="2487168" cy="932688"/>
-          </a:xfrm>
-          <a:prstGeom prst="roundRect">
-            <a:avLst>
-              <a:gd name="adj" fmla="val 5882"/>
-            </a:avLst>
-          </a:prstGeom>
-          <a:solidFill>
-            <a:srgbClr val="F5F4F3"/>
-          </a:solidFill>
-          <a:ln w="9525">
-            <a:solidFill>
-              <a:srgbClr val="E6E4E2"/>
-            </a:solidFill>
-            <a:prstDash val="solid"/>
-          </a:ln>
-          <a:effectLst>
-            <a:outerShdw sx="100000" sy="100000" kx="0" ky="0" algn="bl" rotWithShape="0" blurRad="1290320000" dist="645160000" dir="324000000000">
-              <a:srgbClr val="FFFFFF">
-                <a:alpha val="7500000000"/>
-              </a:srgbClr>
-            </a:outerShdw>
-          </a:effectLst>
-        </p:spPr>
-      </p:sp>
-      <p:sp>
-        <p:nvSpPr>
-          <p:cNvPr id="23" name="Text 20"/>
-          <p:cNvSpPr txBox="1"/>
-          <p:nvPr/>
-        </p:nvSpPr>
-        <p:spPr>
-          <a:xfrm>
-            <a:off x="3676802" y="5138928"/>
-            <a:ext cx="2121408" cy="420624"/>
-          </a:xfrm>
-          <a:prstGeom prst="rect">
-            <a:avLst/>
-          </a:prstGeom>
-          <a:noFill/>
-          <a:ln/>
-        </p:spPr>
-        <p:txBody>
-          <a:bodyPr wrap="square" lIns="0" tIns="0" rIns="0" bIns="0" rtlCol="0" anchor="ctr"/>
-          <a:lstStyle/>
-          <a:p>
-            <a:pPr algn="ctr" indent="0" marL="0">
-              <a:buNone/>
-            </a:pPr>
-            <a:r>
-              <a:rPr lang="en-US" sz="2600" spc="-90" kern="0" dirty="0">
-                <a:solidFill>
-                  <a:srgbClr val="2B2D30"/>
-                </a:solidFill>
-                <a:latin typeface="Montserrat ExtraBold" pitchFamily="34" charset="0"/>
-                <a:ea typeface="Montserrat ExtraBold" pitchFamily="34" charset="-122"/>
-                <a:cs typeface="Montserrat ExtraBold" pitchFamily="34" charset="-120"/>
-              </a:rPr>
-              <a:t>209</a:t>
-            </a:r>
-            <a:endParaRPr lang="en-US" sz="2600" dirty="0"/>
-          </a:p>
-        </p:txBody>
-      </p:sp>
-      <p:sp>
-        <p:nvSpPr>
-          <p:cNvPr id="24" name="Text 21"/>
-          <p:cNvSpPr txBox="1"/>
-          <p:nvPr/>
-        </p:nvSpPr>
-        <p:spPr>
-          <a:xfrm>
-            <a:off x="3640226" y="5596128"/>
-            <a:ext cx="2194560" cy="256032"/>
-          </a:xfrm>
-          <a:prstGeom prst="rect">
-            <a:avLst/>
-          </a:prstGeom>
-          <a:noFill/>
-          <a:ln/>
-        </p:spPr>
-        <p:txBody>
-          <a:bodyPr wrap="square" lIns="0" tIns="0" rIns="0" bIns="0" rtlCol="0" anchor="t"/>
-          <a:lstStyle/>
-          <a:p>
-            <a:pPr algn="ctr" indent="0" marL="0">
-              <a:buNone/>
-            </a:pPr>
-            <a:r>
-              <a:rPr lang="en-US" sz="950" spc="30" kern="0" dirty="0">
-                <a:solidFill>
-                  <a:srgbClr val="6E7175"/>
-                </a:solidFill>
-                <a:latin typeface="Montserrat Medium" pitchFamily="34" charset="0"/>
-                <a:ea typeface="Montserrat Medium" pitchFamily="34" charset="-122"/>
-                <a:cs typeface="Montserrat Medium" pitchFamily="34" charset="-120"/>
-              </a:rPr>
-              <a:t>real fix-actions</a:t>
-            </a:r>
-            <a:endParaRPr lang="en-US" sz="950" dirty="0"/>
-          </a:p>
-        </p:txBody>
-      </p:sp>
-      <p:sp>
-        <p:nvSpPr>
-          <p:cNvPr id="25" name="Text 22"/>
-          <p:cNvSpPr txBox="1"/>
-          <p:nvPr/>
-        </p:nvSpPr>
-        <p:spPr>
-          <a:xfrm>
-            <a:off x="5912968" y="5248656"/>
-            <a:ext cx="365760" cy="420624"/>
-          </a:xfrm>
-          <a:prstGeom prst="rect">
-            <a:avLst/>
-          </a:prstGeom>
-          <a:noFill/>
-          <a:ln/>
-        </p:spPr>
-        <p:txBody>
-          <a:bodyPr wrap="square" lIns="0" tIns="0" rIns="0" bIns="0" rtlCol="0" anchor="ctr"/>
-          <a:lstStyle/>
-          <a:p>
-            <a:pPr algn="ctr" indent="0" marL="0">
-              <a:buNone/>
-            </a:pPr>
-            <a:r>
-              <a:rPr lang="en-US" sz="2600" b="1" dirty="0">
-                <a:solidFill>
-                  <a:srgbClr val="C9C6C4"/>
-                </a:solidFill>
-                <a:latin typeface="Montserrat" pitchFamily="34" charset="0"/>
-                <a:ea typeface="Montserrat" pitchFamily="34" charset="-122"/>
-                <a:cs typeface="Montserrat" pitchFamily="34" charset="-120"/>
-              </a:rPr>
-              <a:t>›</a:t>
-            </a:r>
-            <a:endParaRPr lang="en-US" sz="2600" dirty="0"/>
-          </a:p>
-        </p:txBody>
-      </p:sp>
-      <p:sp>
-        <p:nvSpPr>
-          <p:cNvPr id="26" name="Shape 23"/>
-          <p:cNvSpPr/>
-          <p:nvPr/>
-        </p:nvSpPr>
-        <p:spPr>
-          <a:xfrm>
-            <a:off x="6210605" y="4992624"/>
-            <a:ext cx="2487168" cy="932688"/>
-          </a:xfrm>
-          <a:prstGeom prst="roundRect">
-            <a:avLst>
-              <a:gd name="adj" fmla="val 5882"/>
-            </a:avLst>
-          </a:prstGeom>
-          <a:solidFill>
-            <a:srgbClr val="F5F4F3"/>
-          </a:solidFill>
-          <a:ln w="9525">
-            <a:solidFill>
-              <a:srgbClr val="E6E4E2"/>
-            </a:solidFill>
-            <a:prstDash val="solid"/>
-          </a:ln>
-          <a:effectLst>
-            <a:outerShdw sx="100000" sy="100000" kx="0" ky="0" algn="bl" rotWithShape="0" blurRad="16387064000000" dist="8193532000000" dir="19440000000000000">
-              <a:srgbClr val="FFFFFF">
-                <a:alpha val="750000000000000"/>
-              </a:srgbClr>
-            </a:outerShdw>
-          </a:effectLst>
-        </p:spPr>
-      </p:sp>
-      <p:sp>
-        <p:nvSpPr>
-          <p:cNvPr id="27" name="Text 24"/>
-          <p:cNvSpPr txBox="1"/>
-          <p:nvPr/>
-        </p:nvSpPr>
-        <p:spPr>
-          <a:xfrm>
-            <a:off x="6393485" y="5138928"/>
-            <a:ext cx="2121408" cy="420624"/>
-          </a:xfrm>
-          <a:prstGeom prst="rect">
-            <a:avLst/>
-          </a:prstGeom>
-          <a:noFill/>
-          <a:ln/>
-        </p:spPr>
-        <p:txBody>
-          <a:bodyPr wrap="square" lIns="0" tIns="0" rIns="0" bIns="0" rtlCol="0" anchor="ctr"/>
-          <a:lstStyle/>
-          <a:p>
-            <a:pPr algn="ctr" indent="0" marL="0">
-              <a:buNone/>
-            </a:pPr>
-            <a:r>
-              <a:rPr lang="en-US" sz="1700" spc="120" kern="0" dirty="0">
-                <a:solidFill>
-                  <a:srgbClr val="2B2D30"/>
-                </a:solidFill>
-                <a:latin typeface="Montserrat ExtraBold" pitchFamily="34" charset="0"/>
-                <a:ea typeface="Montserrat ExtraBold" pitchFamily="34" charset="-122"/>
-                <a:cs typeface="Montserrat ExtraBold" pitchFamily="34" charset="-120"/>
-              </a:rPr>
-              <a:t>RULE</a:t>
-            </a:r>
-            <a:endParaRPr lang="en-US" sz="1700" dirty="0"/>
-          </a:p>
-        </p:txBody>
-      </p:sp>
-      <p:sp>
-        <p:nvSpPr>
-          <p:cNvPr id="28" name="Text 25"/>
-          <p:cNvSpPr txBox="1"/>
-          <p:nvPr/>
-        </p:nvSpPr>
-        <p:spPr>
-          <a:xfrm>
-            <a:off x="6356909" y="5596128"/>
-            <a:ext cx="2194560" cy="256032"/>
-          </a:xfrm>
-          <a:prstGeom prst="rect">
-            <a:avLst/>
-          </a:prstGeom>
-          <a:noFill/>
-          <a:ln/>
-        </p:spPr>
-        <p:txBody>
-          <a:bodyPr wrap="square" lIns="0" tIns="0" rIns="0" bIns="0" rtlCol="0" anchor="t"/>
-          <a:lstStyle/>
-          <a:p>
-            <a:pPr algn="ctr" indent="0" marL="0">
-              <a:buNone/>
-            </a:pPr>
-            <a:r>
-              <a:rPr lang="en-US" sz="950" spc="30" kern="0" dirty="0">
-                <a:solidFill>
-                  <a:srgbClr val="6E7175"/>
-                </a:solidFill>
-                <a:latin typeface="Montserrat Medium" pitchFamily="34" charset="0"/>
-                <a:ea typeface="Montserrat Medium" pitchFamily="34" charset="-122"/>
-                <a:cs typeface="Montserrat Medium" pitchFamily="34" charset="-120"/>
-              </a:rPr>
-              <a:t>newest patch only</a:t>
-            </a:r>
-            <a:endParaRPr lang="en-US" sz="950" dirty="0"/>
-          </a:p>
-        </p:txBody>
-      </p:sp>
-      <p:sp>
-        <p:nvSpPr>
-          <p:cNvPr id="29" name="Text 26"/>
-          <p:cNvSpPr txBox="1"/>
-          <p:nvPr/>
-        </p:nvSpPr>
-        <p:spPr>
-          <a:xfrm>
-            <a:off x="8629650" y="5248656"/>
-            <a:ext cx="365760" cy="420624"/>
-          </a:xfrm>
-          <a:prstGeom prst="rect">
-            <a:avLst/>
-          </a:prstGeom>
-          <a:noFill/>
-          <a:ln/>
-        </p:spPr>
-        <p:txBody>
-          <a:bodyPr wrap="square" lIns="0" tIns="0" rIns="0" bIns="0" rtlCol="0" anchor="ctr"/>
-          <a:lstStyle/>
-          <a:p>
-            <a:pPr algn="ctr" indent="0" marL="0">
-              <a:buNone/>
-            </a:pPr>
-            <a:r>
-              <a:rPr lang="en-US" sz="2600" b="1" dirty="0">
-                <a:solidFill>
-                  <a:srgbClr val="C9C6C4"/>
-                </a:solidFill>
-                <a:latin typeface="Montserrat" pitchFamily="34" charset="0"/>
-                <a:ea typeface="Montserrat" pitchFamily="34" charset="-122"/>
-                <a:cs typeface="Montserrat" pitchFamily="34" charset="-120"/>
-              </a:rPr>
-              <a:t>›</a:t>
-            </a:r>
-            <a:endParaRPr lang="en-US" sz="2600" dirty="0"/>
-          </a:p>
-        </p:txBody>
-      </p:sp>
-      <p:sp>
-        <p:nvSpPr>
-          <p:cNvPr id="30" name="Shape 27"/>
-          <p:cNvSpPr/>
-          <p:nvPr/>
-        </p:nvSpPr>
-        <p:spPr>
-          <a:xfrm>
-            <a:off x="8927287" y="4992624"/>
-            <a:ext cx="2487168" cy="932688"/>
-          </a:xfrm>
-          <a:prstGeom prst="roundRect">
-            <a:avLst>
-              <a:gd name="adj" fmla="val 5882"/>
-            </a:avLst>
-          </a:prstGeom>
-          <a:solidFill>
-            <a:srgbClr val="942838"/>
-          </a:solidFill>
-          <a:ln w="9525">
-            <a:solidFill>
-              <a:srgbClr val="942838"/>
-            </a:solidFill>
-            <a:prstDash val="solid"/>
-          </a:ln>
-          <a:effectLst>
-            <a:outerShdw sx="100000" sy="100000" kx="0" ky="0" algn="bl" rotWithShape="0" blurRad="203200" dist="50800" dir="5400000">
-              <a:srgbClr val="5D1923">
-                <a:alpha val="34000"/>
-              </a:srgbClr>
-            </a:outerShdw>
-          </a:effectLst>
-        </p:spPr>
-      </p:sp>
-      <p:sp>
-        <p:nvSpPr>
-          <p:cNvPr id="31" name="Text 28"/>
-          <p:cNvSpPr txBox="1"/>
-          <p:nvPr/>
-        </p:nvSpPr>
-        <p:spPr>
-          <a:xfrm>
-            <a:off x="9110167" y="5138928"/>
-            <a:ext cx="2121408" cy="420624"/>
-          </a:xfrm>
-          <a:prstGeom prst="rect">
-            <a:avLst/>
-          </a:prstGeom>
-          <a:noFill/>
-          <a:ln/>
-        </p:spPr>
-        <p:txBody>
-          <a:bodyPr wrap="square" lIns="0" tIns="0" rIns="0" bIns="0" rtlCol="0" anchor="ctr"/>
-          <a:lstStyle/>
-          <a:p>
-            <a:pPr algn="ctr" indent="0" marL="0">
-              <a:buNone/>
-            </a:pPr>
-            <a:r>
-              <a:rPr lang="en-US" sz="2600" spc="-90" kern="0" dirty="0">
-                <a:solidFill>
-                  <a:srgbClr val="FFFFFF"/>
-                </a:solidFill>
-                <a:latin typeface="Montserrat ExtraBold" pitchFamily="34" charset="0"/>
-                <a:ea typeface="Montserrat ExtraBold" pitchFamily="34" charset="-122"/>
-                <a:cs typeface="Montserrat ExtraBold" pitchFamily="34" charset="-120"/>
-              </a:rPr>
-              <a:t>46</a:t>
-            </a:r>
-            <a:endParaRPr lang="en-US" sz="2600" dirty="0"/>
-          </a:p>
-        </p:txBody>
-      </p:sp>
-      <p:sp>
-        <p:nvSpPr>
-          <p:cNvPr id="32" name="Text 29"/>
-          <p:cNvSpPr txBox="1"/>
-          <p:nvPr/>
-        </p:nvSpPr>
-        <p:spPr>
-          <a:xfrm>
-            <a:off x="9073591" y="5596128"/>
-            <a:ext cx="2194560" cy="256032"/>
-          </a:xfrm>
-          <a:prstGeom prst="rect">
-            <a:avLst/>
-          </a:prstGeom>
-          <a:noFill/>
-          <a:ln/>
-        </p:spPr>
-        <p:txBody>
-          <a:bodyPr wrap="square" lIns="0" tIns="0" rIns="0" bIns="0" rtlCol="0" anchor="t"/>
-          <a:lstStyle/>
-          <a:p>
-            <a:pPr algn="ctr" indent="0" marL="0">
-              <a:buNone/>
-            </a:pPr>
-            <a:r>
-              <a:rPr lang="en-US" sz="950" spc="30" kern="0" dirty="0">
-                <a:solidFill>
-                  <a:srgbClr val="E4C9CE"/>
-                </a:solidFill>
-                <a:latin typeface="Montserrat Medium" pitchFamily="34" charset="0"/>
-                <a:ea typeface="Montserrat Medium" pitchFamily="34" charset="-122"/>
-                <a:cs typeface="Montserrat Medium" pitchFamily="34" charset="-120"/>
-              </a:rPr>
-              <a:t>tickets opened</a:t>
-            </a:r>
-            <a:endParaRPr lang="en-US" sz="950" dirty="0"/>
+              <a:t>Windows updates roll forward, so ordinary monthly patching had already carried every current machine past the fix for those 52. They were closed with no ticket and no work.</a:t>
+            </a:r>
+            <a:endParaRPr lang="en-US" sz="1150" dirty="0"/>
           </a:p>
         </p:txBody>
       </p:sp>
@@ -11128,7 +10749,7 @@
                 <a:ea typeface="Montserrat SemiBold" pitchFamily="34" charset="-122"/>
                 <a:cs typeface="Montserrat SemiBold" pitchFamily="34" charset="-120"/>
               </a:rPr>
-              <a:t>PROJECT 03  ·  THE PAYOFF</a:t>
+              <a:t>PROJECT 03  ·  GOING DEEPER</a:t>
             </a:r>
             <a:endParaRPr lang="en-US" sz="1000" dirty="0"/>
           </a:p>
@@ -11170,7 +10791,7 @@
                 <a:ea typeface="Montserrat ExtraBold" pitchFamily="34" charset="-122"/>
                 <a:cs typeface="Montserrat ExtraBold" pitchFamily="34" charset="-120"/>
               </a:rPr>
-              <a:t>209 fix-actions became 46 tickets</a:t>
+              <a:t>Matching the flaws was only half the job</a:t>
             </a:r>
             <a:endParaRPr lang="en-US" sz="2900" dirty="0"/>
           </a:p>
@@ -11302,16 +10923,16 @@
         </p:nvSpPr>
         <p:spPr>
           <a:xfrm>
-            <a:off x="777240" y="2011680"/>
-            <a:ext cx="3310128" cy="1481328"/>
+            <a:off x="777240" y="2029968"/>
+            <a:ext cx="5175504" cy="2212848"/>
           </a:xfrm>
           <a:prstGeom prst="roundRect">
             <a:avLst>
-              <a:gd name="adj" fmla="val 3704"/>
+              <a:gd name="adj" fmla="val 2479"/>
             </a:avLst>
           </a:prstGeom>
           <a:solidFill>
-            <a:srgbClr val="F5F4F3"/>
+            <a:srgbClr val="FFFFFF"/>
           </a:solidFill>
           <a:ln w="9525">
             <a:solidFill>
@@ -11336,24 +10957,63 @@
         </p:nvSpPr>
         <p:spPr>
           <a:xfrm>
-            <a:off x="996696" y="2194560"/>
-            <a:ext cx="2871216" cy="676656"/>
-          </a:xfrm>
-          <a:prstGeom prst="rect">
-            <a:avLst/>
-          </a:prstGeom>
-          <a:noFill/>
-          <a:ln/>
-        </p:spPr>
-        <p:txBody>
-          <a:bodyPr wrap="square" lIns="0" tIns="0" rIns="0" bIns="0" rtlCol="0" anchor="t"/>
-          <a:lstStyle/>
-          <a:p>
-            <a:pPr algn="ctr" indent="0" marL="0">
-              <a:buNone/>
-            </a:pPr>
-            <a:r>
-              <a:rPr lang="en-US" sz="4600" spc="-180" kern="0" dirty="0">
+            <a:off x="1088136" y="2304288"/>
+            <a:ext cx="4553712" cy="201168"/>
+          </a:xfrm>
+          <a:prstGeom prst="rect">
+            <a:avLst/>
+          </a:prstGeom>
+          <a:noFill/>
+          <a:ln/>
+        </p:spPr>
+        <p:txBody>
+          <a:bodyPr wrap="square" lIns="0" tIns="0" rIns="0" bIns="0" rtlCol="0" anchor="t"/>
+          <a:lstStyle/>
+          <a:p>
+            <a:pPr indent="0" marL="0">
+              <a:buNone/>
+            </a:pPr>
+            <a:r>
+              <a:rPr lang="en-US" sz="850" spc="140" kern="0" dirty="0">
+                <a:solidFill>
+                  <a:srgbClr val="942838"/>
+                </a:solidFill>
+                <a:latin typeface="Montserrat SemiBold" pitchFamily="34" charset="0"/>
+                <a:ea typeface="Montserrat SemiBold" pitchFamily="34" charset="-122"/>
+                <a:cs typeface="Montserrat SemiBold" pitchFamily="34" charset="-120"/>
+              </a:rPr>
+              <a:t>WHERE 209 COMES FROM</a:t>
+            </a:r>
+            <a:endParaRPr lang="en-US" sz="850" dirty="0"/>
+          </a:p>
+        </p:txBody>
+      </p:sp>
+      <p:sp>
+        <p:nvSpPr>
+          <p:cNvPr id="11" name="Text 8"/>
+          <p:cNvSpPr txBox="1"/>
+          <p:nvPr/>
+        </p:nvSpPr>
+        <p:spPr>
+          <a:xfrm>
+            <a:off x="1088136" y="2578608"/>
+            <a:ext cx="4553712" cy="384048"/>
+          </a:xfrm>
+          <a:prstGeom prst="rect">
+            <a:avLst/>
+          </a:prstGeom>
+          <a:noFill/>
+          <a:ln/>
+        </p:spPr>
+        <p:txBody>
+          <a:bodyPr wrap="square" lIns="0" tIns="0" rIns="0" bIns="0" rtlCol="0" anchor="t"/>
+          <a:lstStyle/>
+          <a:p>
+            <a:pPr indent="0" marL="0">
+              <a:buNone/>
+            </a:pPr>
+            <a:r>
+              <a:rPr lang="en-US" sz="2400" spc="-70" kern="0" dirty="0">
                 <a:solidFill>
                   <a:srgbClr val="2B2D30"/>
                 </a:solidFill>
@@ -11361,96 +11021,76 @@
                 <a:ea typeface="Montserrat ExtraBold" pitchFamily="34" charset="-122"/>
                 <a:cs typeface="Montserrat ExtraBold" pitchFamily="34" charset="-120"/>
               </a:rPr>
-              <a:t>209</a:t>
-            </a:r>
-            <a:endParaRPr lang="en-US" sz="4600" dirty="0"/>
-          </a:p>
-        </p:txBody>
-      </p:sp>
-      <p:sp>
-        <p:nvSpPr>
-          <p:cNvPr id="11" name="Text 8"/>
-          <p:cNvSpPr txBox="1"/>
-          <p:nvPr/>
-        </p:nvSpPr>
-        <p:spPr>
-          <a:xfrm>
-            <a:off x="996696" y="2907792"/>
-            <a:ext cx="2871216" cy="512064"/>
-          </a:xfrm>
-          <a:prstGeom prst="rect">
-            <a:avLst/>
-          </a:prstGeom>
-          <a:noFill/>
-          <a:ln/>
-        </p:spPr>
-        <p:txBody>
-          <a:bodyPr wrap="square" lIns="0" tIns="0" rIns="0" bIns="0" rtlCol="0" anchor="t"/>
-          <a:lstStyle/>
-          <a:p>
-            <a:pPr algn="ctr" indent="0" marL="0">
+              <a:t>Kevlar's own report</a:t>
+            </a:r>
+            <a:endParaRPr lang="en-US" sz="2400" dirty="0"/>
+          </a:p>
+        </p:txBody>
+      </p:sp>
+      <p:sp>
+        <p:nvSpPr>
+          <p:cNvPr id="12" name="Text 9"/>
+          <p:cNvSpPr txBox="1"/>
+          <p:nvPr/>
+        </p:nvSpPr>
+        <p:spPr>
+          <a:xfrm>
+            <a:off x="1088136" y="3108960"/>
+            <a:ext cx="4553712" cy="914400"/>
+          </a:xfrm>
+          <a:prstGeom prst="rect">
+            <a:avLst/>
+          </a:prstGeom>
+          <a:noFill/>
+          <a:ln/>
+        </p:spPr>
+        <p:txBody>
+          <a:bodyPr wrap="square" lIns="0" tIns="0" rIns="0" bIns="0" rtlCol="0" anchor="t"/>
+          <a:lstStyle/>
+          <a:p>
+            <a:pPr indent="0" marL="0">
               <a:lnSpc>
-                <a:spcPct val="120000"/>
+                <a:spcPct val="126000"/>
               </a:lnSpc>
               <a:buNone/>
             </a:pPr>
             <a:r>
-              <a:rPr lang="en-US" sz="950" spc="30" kern="0" dirty="0">
-                <a:solidFill>
-                  <a:srgbClr val="6E7175"/>
-                </a:solidFill>
-                <a:latin typeface="Montserrat Medium" pitchFamily="34" charset="0"/>
-                <a:ea typeface="Montserrat Medium" pitchFamily="34" charset="-122"/>
-                <a:cs typeface="Montserrat Medium" pitchFamily="34" charset="-120"/>
-              </a:rPr>
-              <a:t>individual fix-actions</a:t>
-            </a:r>
-            <a:endParaRPr lang="en-US" sz="950" dirty="0"/>
-          </a:p>
-          <a:p>
-            <a:pPr algn="ctr" indent="0" marL="0">
-              <a:lnSpc>
-                <a:spcPct val="120000"/>
-              </a:lnSpc>
-              <a:buNone/>
-            </a:pPr>
-            <a:r>
-              <a:rPr lang="en-US" sz="950" spc="30" kern="0" dirty="0">
-                <a:solidFill>
-                  <a:srgbClr val="6E7175"/>
-                </a:solidFill>
-                <a:latin typeface="Montserrat Medium" pitchFamily="34" charset="0"/>
-                <a:ea typeface="Montserrat Medium" pitchFamily="34" charset="-122"/>
-                <a:cs typeface="Montserrat Medium" pitchFamily="34" charset="-120"/>
-              </a:rPr>
-              <a:t>identified across the fleet</a:t>
-            </a:r>
-            <a:endParaRPr lang="en-US" sz="950" dirty="0"/>
-          </a:p>
-        </p:txBody>
-      </p:sp>
-      <p:sp>
-        <p:nvSpPr>
-          <p:cNvPr id="12" name="Shape 9"/>
+              <a:rPr lang="en-US" sz="1100" dirty="0">
+                <a:solidFill>
+                  <a:srgbClr val="43464A"/>
+                </a:solidFill>
+                <a:latin typeface="Montserrat" pitchFamily="34" charset="0"/>
+                <a:ea typeface="Montserrat" pitchFamily="34" charset="-122"/>
+                <a:cs typeface="Montserrat" pitchFamily="34" charset="-120"/>
+              </a:rPr>
+              <a:t>Kevlar publishes its own prioritisation report, and its KB Priority tab already held 209 rows — one for each unique pairing of flaw-set and operating-system product. I found that number in the data; I did not calculate it.</a:t>
+            </a:r>
+            <a:endParaRPr lang="en-US" sz="1100" dirty="0"/>
+          </a:p>
+        </p:txBody>
+      </p:sp>
+      <p:sp>
+        <p:nvSpPr>
+          <p:cNvPr id="13" name="Shape 10"/>
           <p:cNvSpPr/>
           <p:nvPr/>
         </p:nvSpPr>
         <p:spPr>
           <a:xfrm>
-            <a:off x="4440784" y="2011680"/>
-            <a:ext cx="3310128" cy="1481328"/>
+            <a:off x="6236208" y="2029968"/>
+            <a:ext cx="5175504" cy="2212848"/>
           </a:xfrm>
           <a:prstGeom prst="roundRect">
             <a:avLst>
-              <a:gd name="adj" fmla="val 3704"/>
+              <a:gd name="adj" fmla="val 2479"/>
             </a:avLst>
           </a:prstGeom>
           <a:solidFill>
-            <a:srgbClr val="F6EEF0"/>
+            <a:srgbClr val="FFFFFF"/>
           </a:solidFill>
           <a:ln w="9525">
             <a:solidFill>
-              <a:srgbClr val="942838"/>
+              <a:srgbClr val="E6E4E2"/>
             </a:solidFill>
             <a:prstDash val="solid"/>
           </a:ln>
@@ -11465,53 +11105,246 @@
       </p:sp>
       <p:sp>
         <p:nvSpPr>
-          <p:cNvPr id="13" name="Text 10"/>
-          <p:cNvSpPr txBox="1"/>
-          <p:nvPr/>
-        </p:nvSpPr>
-        <p:spPr>
-          <a:xfrm>
-            <a:off x="4660240" y="2194560"/>
-            <a:ext cx="2871216" cy="676656"/>
-          </a:xfrm>
-          <a:prstGeom prst="rect">
-            <a:avLst/>
-          </a:prstGeom>
-          <a:noFill/>
-          <a:ln/>
-        </p:spPr>
-        <p:txBody>
-          <a:bodyPr wrap="square" lIns="0" tIns="0" rIns="0" bIns="0" rtlCol="0" anchor="t"/>
-          <a:lstStyle/>
-          <a:p>
-            <a:pPr algn="ctr" indent="0" marL="0">
-              <a:buNone/>
-            </a:pPr>
-            <a:r>
-              <a:rPr lang="en-US" sz="4600" spc="-180" kern="0" dirty="0">
+          <p:cNvPr id="14" name="Text 11"/>
+          <p:cNvSpPr txBox="1"/>
+          <p:nvPr/>
+        </p:nvSpPr>
+        <p:spPr>
+          <a:xfrm>
+            <a:off x="6547104" y="2304288"/>
+            <a:ext cx="4553712" cy="201168"/>
+          </a:xfrm>
+          <a:prstGeom prst="rect">
+            <a:avLst/>
+          </a:prstGeom>
+          <a:noFill/>
+          <a:ln/>
+        </p:spPr>
+        <p:txBody>
+          <a:bodyPr wrap="square" lIns="0" tIns="0" rIns="0" bIns="0" rtlCol="0" anchor="t"/>
+          <a:lstStyle/>
+          <a:p>
+            <a:pPr indent="0" marL="0">
+              <a:buNone/>
+            </a:pPr>
+            <a:r>
+              <a:rPr lang="en-US" sz="850" spc="140" kern="0" dirty="0">
                 <a:solidFill>
                   <a:srgbClr val="942838"/>
+                </a:solidFill>
+                <a:latin typeface="Montserrat SemiBold" pitchFamily="34" charset="0"/>
+                <a:ea typeface="Montserrat SemiBold" pitchFamily="34" charset="-122"/>
+                <a:cs typeface="Montserrat SemiBold" pitchFamily="34" charset="-120"/>
+              </a:rPr>
+              <a:t>WHAT I ACTUALLY DID</a:t>
+            </a:r>
+            <a:endParaRPr lang="en-US" sz="850" dirty="0"/>
+          </a:p>
+        </p:txBody>
+      </p:sp>
+      <p:sp>
+        <p:nvSpPr>
+          <p:cNvPr id="15" name="Text 12"/>
+          <p:cNvSpPr txBox="1"/>
+          <p:nvPr/>
+        </p:nvSpPr>
+        <p:spPr>
+          <a:xfrm>
+            <a:off x="6547104" y="2578608"/>
+            <a:ext cx="4553712" cy="384048"/>
+          </a:xfrm>
+          <a:prstGeom prst="rect">
+            <a:avLst/>
+          </a:prstGeom>
+          <a:noFill/>
+          <a:ln/>
+        </p:spPr>
+        <p:txBody>
+          <a:bodyPr wrap="square" lIns="0" tIns="0" rIns="0" bIns="0" rtlCol="0" anchor="t"/>
+          <a:lstStyle/>
+          <a:p>
+            <a:pPr indent="0" marL="0">
+              <a:buNone/>
+            </a:pPr>
+            <a:r>
+              <a:rPr lang="en-US" sz="2400" spc="-70" kern="0" dirty="0">
+                <a:solidFill>
+                  <a:srgbClr val="2B2D30"/>
                 </a:solidFill>
                 <a:latin typeface="Montserrat ExtraBold" pitchFamily="34" charset="0"/>
                 <a:ea typeface="Montserrat ExtraBold" pitchFamily="34" charset="-122"/>
                 <a:cs typeface="Montserrat ExtraBold" pitchFamily="34" charset="-120"/>
               </a:rPr>
-              <a:t>46</a:t>
-            </a:r>
-            <a:endParaRPr lang="en-US" sz="4600" dirty="0"/>
-          </a:p>
-        </p:txBody>
-      </p:sp>
-      <p:sp>
-        <p:nvSpPr>
-          <p:cNvPr id="14" name="Text 11"/>
-          <p:cNvSpPr txBox="1"/>
-          <p:nvPr/>
-        </p:nvSpPr>
-        <p:spPr>
-          <a:xfrm>
-            <a:off x="4660240" y="2907792"/>
-            <a:ext cx="2871216" cy="512064"/>
+              <a:t>Highest build wins</a:t>
+            </a:r>
+            <a:endParaRPr lang="en-US" sz="2400" dirty="0"/>
+          </a:p>
+        </p:txBody>
+      </p:sp>
+      <p:sp>
+        <p:nvSpPr>
+          <p:cNvPr id="16" name="Text 13"/>
+          <p:cNvSpPr txBox="1"/>
+          <p:nvPr/>
+        </p:nvSpPr>
+        <p:spPr>
+          <a:xfrm>
+            <a:off x="6547104" y="3108960"/>
+            <a:ext cx="4553712" cy="914400"/>
+          </a:xfrm>
+          <a:prstGeom prst="rect">
+            <a:avLst/>
+          </a:prstGeom>
+          <a:noFill/>
+          <a:ln/>
+        </p:spPr>
+        <p:txBody>
+          <a:bodyPr wrap="square" lIns="0" tIns="0" rIns="0" bIns="0" rtlCol="0" anchor="t"/>
+          <a:lstStyle/>
+          <a:p>
+            <a:pPr indent="0" marL="0">
+              <a:lnSpc>
+                <a:spcPct val="126000"/>
+              </a:lnSpc>
+              <a:buNone/>
+            </a:pPr>
+            <a:r>
+              <a:rPr lang="en-US" sz="1100" dirty="0">
+                <a:solidFill>
+                  <a:srgbClr val="43464A"/>
+                </a:solidFill>
+                <a:latin typeface="Montserrat" pitchFamily="34" charset="0"/>
+                <a:ea typeface="Montserrat" pitchFamily="34" charset="-122"/>
+                <a:cs typeface="Montserrat" pitchFamily="34" charset="-120"/>
+              </a:rPr>
+              <a:t>Windows updates supersede every earlier fix on that branch, so for each machine-and-product pair only the highest fixed-build patch is needed. Applying that rule — and proving it lost nothing — collapsed the 209 rows to 46.</a:t>
+            </a:r>
+            <a:endParaRPr lang="en-US" sz="1100" dirty="0"/>
+          </a:p>
+        </p:txBody>
+      </p:sp>
+      <p:sp>
+        <p:nvSpPr>
+          <p:cNvPr id="17" name="Text 14"/>
+          <p:cNvSpPr txBox="1"/>
+          <p:nvPr/>
+        </p:nvSpPr>
+        <p:spPr>
+          <a:xfrm>
+            <a:off x="777240" y="4681728"/>
+            <a:ext cx="5486400" cy="201168"/>
+          </a:xfrm>
+          <a:prstGeom prst="rect">
+            <a:avLst/>
+          </a:prstGeom>
+          <a:noFill/>
+          <a:ln/>
+        </p:spPr>
+        <p:txBody>
+          <a:bodyPr wrap="square" lIns="0" tIns="0" rIns="0" bIns="0" rtlCol="0" anchor="t"/>
+          <a:lstStyle/>
+          <a:p>
+            <a:pPr indent="0" marL="0">
+              <a:buNone/>
+            </a:pPr>
+            <a:r>
+              <a:rPr lang="en-US" sz="850" spc="140" kern="0" dirty="0">
+                <a:solidFill>
+                  <a:srgbClr val="942838"/>
+                </a:solidFill>
+                <a:latin typeface="Montserrat SemiBold" pitchFamily="34" charset="0"/>
+                <a:ea typeface="Montserrat SemiBold" pitchFamily="34" charset="-122"/>
+                <a:cs typeface="Montserrat SemiBold" pitchFamily="34" charset="-120"/>
+              </a:rPr>
+              <a:t>HOW THE NUMBERS RELATE</a:t>
+            </a:r>
+            <a:endParaRPr lang="en-US" sz="850" dirty="0"/>
+          </a:p>
+        </p:txBody>
+      </p:sp>
+      <p:sp>
+        <p:nvSpPr>
+          <p:cNvPr id="18" name="Shape 15"/>
+          <p:cNvSpPr/>
+          <p:nvPr/>
+        </p:nvSpPr>
+        <p:spPr>
+          <a:xfrm>
+            <a:off x="777240" y="4974336"/>
+            <a:ext cx="2487168" cy="1060704"/>
+          </a:xfrm>
+          <a:prstGeom prst="roundRect">
+            <a:avLst>
+              <a:gd name="adj" fmla="val 5172"/>
+            </a:avLst>
+          </a:prstGeom>
+          <a:solidFill>
+            <a:srgbClr val="F5F4F3"/>
+          </a:solidFill>
+          <a:ln w="9525">
+            <a:solidFill>
+              <a:srgbClr val="E6E4E2"/>
+            </a:solidFill>
+            <a:prstDash val="solid"/>
+          </a:ln>
+          <a:effectLst>
+            <a:outerShdw sx="100000" sy="100000" kx="0" ky="0" algn="bl" rotWithShape="0" blurRad="101600" dist="50800" dir="5400000">
+              <a:srgbClr val="FFFFFF">
+                <a:alpha val="75000"/>
+              </a:srgbClr>
+            </a:outerShdw>
+          </a:effectLst>
+        </p:spPr>
+      </p:sp>
+      <p:sp>
+        <p:nvSpPr>
+          <p:cNvPr id="19" name="Text 16"/>
+          <p:cNvSpPr txBox="1"/>
+          <p:nvPr/>
+        </p:nvSpPr>
+        <p:spPr>
+          <a:xfrm>
+            <a:off x="960120" y="5120640"/>
+            <a:ext cx="2121408" cy="420624"/>
+          </a:xfrm>
+          <a:prstGeom prst="rect">
+            <a:avLst/>
+          </a:prstGeom>
+          <a:noFill/>
+          <a:ln/>
+        </p:spPr>
+        <p:txBody>
+          <a:bodyPr wrap="square" lIns="0" tIns="0" rIns="0" bIns="0" rtlCol="0" anchor="ctr"/>
+          <a:lstStyle/>
+          <a:p>
+            <a:pPr algn="ctr" indent="0" marL="0">
+              <a:buNone/>
+            </a:pPr>
+            <a:r>
+              <a:rPr lang="en-US" sz="2600" spc="-90" kern="0" dirty="0">
+                <a:solidFill>
+                  <a:srgbClr val="2B2D30"/>
+                </a:solidFill>
+                <a:latin typeface="Montserrat ExtraBold" pitchFamily="34" charset="0"/>
+                <a:ea typeface="Montserrat ExtraBold" pitchFamily="34" charset="-122"/>
+                <a:cs typeface="Montserrat ExtraBold" pitchFamily="34" charset="-120"/>
+              </a:rPr>
+              <a:t>2,658</a:t>
+            </a:r>
+            <a:endParaRPr lang="en-US" sz="2600" dirty="0"/>
+          </a:p>
+        </p:txBody>
+      </p:sp>
+      <p:sp>
+        <p:nvSpPr>
+          <p:cNvPr id="20" name="Text 17"/>
+          <p:cNvSpPr txBox="1"/>
+          <p:nvPr/>
+        </p:nvSpPr>
+        <p:spPr>
+          <a:xfrm>
+            <a:off x="923544" y="5559552"/>
+            <a:ext cx="2194560" cy="402336"/>
           </a:xfrm>
           <a:prstGeom prst="rect">
             <a:avLst/>
@@ -11525,7 +11358,7 @@
           <a:p>
             <a:pPr algn="ctr" indent="0" marL="0">
               <a:lnSpc>
-                <a:spcPct val="120000"/>
+                <a:spcPct val="115000"/>
               </a:lnSpc>
               <a:buNone/>
             </a:pPr>
@@ -11538,14 +11371,14 @@
                 <a:ea typeface="Montserrat Medium" pitchFamily="34" charset="-122"/>
                 <a:cs typeface="Montserrat Medium" pitchFamily="34" charset="-120"/>
               </a:rPr>
-              <a:t>tickets actually opened</a:t>
+              <a:t>host and product</a:t>
             </a:r>
             <a:endParaRPr lang="en-US" sz="950" dirty="0"/>
           </a:p>
           <a:p>
             <a:pPr algn="ctr" indent="0" marL="0">
               <a:lnSpc>
-                <a:spcPct val="120000"/>
+                <a:spcPct val="115000"/>
               </a:lnSpc>
               <a:buNone/>
             </a:pPr>
@@ -11558,7 +11391,7 @@
                 <a:ea typeface="Montserrat Medium" pitchFamily="34" charset="-122"/>
                 <a:cs typeface="Montserrat Medium" pitchFamily="34" charset="-120"/>
               </a:rPr>
-              <a:t>after consolidation</a:t>
+              <a:t>assignments in the fleet</a:t>
             </a:r>
             <a:endParaRPr lang="en-US" sz="950" dirty="0"/>
           </a:p>
@@ -11566,22 +11399,409 @@
       </p:sp>
       <p:sp>
         <p:nvSpPr>
-          <p:cNvPr id="15" name="Shape 12"/>
+          <p:cNvPr id="21" name="Text 18"/>
+          <p:cNvSpPr txBox="1"/>
+          <p:nvPr/>
+        </p:nvSpPr>
+        <p:spPr>
+          <a:xfrm>
+            <a:off x="3196285" y="5294376"/>
+            <a:ext cx="365760" cy="420624"/>
+          </a:xfrm>
+          <a:prstGeom prst="rect">
+            <a:avLst/>
+          </a:prstGeom>
+          <a:noFill/>
+          <a:ln/>
+        </p:spPr>
+        <p:txBody>
+          <a:bodyPr wrap="square" lIns="0" tIns="0" rIns="0" bIns="0" rtlCol="0" anchor="ctr"/>
+          <a:lstStyle/>
+          <a:p>
+            <a:pPr algn="ctr" indent="0" marL="0">
+              <a:buNone/>
+            </a:pPr>
+            <a:r>
+              <a:rPr lang="en-US" sz="2600" b="1" dirty="0">
+                <a:solidFill>
+                  <a:srgbClr val="C9C6C4"/>
+                </a:solidFill>
+                <a:latin typeface="Montserrat" pitchFamily="34" charset="0"/>
+                <a:ea typeface="Montserrat" pitchFamily="34" charset="-122"/>
+                <a:cs typeface="Montserrat" pitchFamily="34" charset="-120"/>
+              </a:rPr>
+              <a:t>›</a:t>
+            </a:r>
+            <a:endParaRPr lang="en-US" sz="2600" dirty="0"/>
+          </a:p>
+        </p:txBody>
+      </p:sp>
+      <p:sp>
+        <p:nvSpPr>
+          <p:cNvPr id="22" name="Shape 19"/>
           <p:cNvSpPr/>
           <p:nvPr/>
         </p:nvSpPr>
         <p:spPr>
           <a:xfrm>
-            <a:off x="8104327" y="2011680"/>
-            <a:ext cx="3310128" cy="1481328"/>
+            <a:off x="3493922" y="4974336"/>
+            <a:ext cx="2487168" cy="1060704"/>
           </a:xfrm>
           <a:prstGeom prst="roundRect">
             <a:avLst>
-              <a:gd name="adj" fmla="val 3704"/>
+              <a:gd name="adj" fmla="val 5172"/>
             </a:avLst>
           </a:prstGeom>
           <a:solidFill>
-            <a:srgbClr val="F6EEF0"/>
+            <a:srgbClr val="F5F4F3"/>
+          </a:solidFill>
+          <a:ln w="9525">
+            <a:solidFill>
+              <a:srgbClr val="E6E4E2"/>
+            </a:solidFill>
+            <a:prstDash val="solid"/>
+          </a:ln>
+          <a:effectLst>
+            <a:outerShdw sx="100000" sy="100000" kx="0" ky="0" algn="bl" rotWithShape="0" blurRad="1290320000" dist="645160000" dir="324000000000">
+              <a:srgbClr val="FFFFFF">
+                <a:alpha val="7500000000"/>
+              </a:srgbClr>
+            </a:outerShdw>
+          </a:effectLst>
+        </p:spPr>
+      </p:sp>
+      <p:sp>
+        <p:nvSpPr>
+          <p:cNvPr id="23" name="Text 20"/>
+          <p:cNvSpPr txBox="1"/>
+          <p:nvPr/>
+        </p:nvSpPr>
+        <p:spPr>
+          <a:xfrm>
+            <a:off x="3676802" y="5120640"/>
+            <a:ext cx="2121408" cy="420624"/>
+          </a:xfrm>
+          <a:prstGeom prst="rect">
+            <a:avLst/>
+          </a:prstGeom>
+          <a:noFill/>
+          <a:ln/>
+        </p:spPr>
+        <p:txBody>
+          <a:bodyPr wrap="square" lIns="0" tIns="0" rIns="0" bIns="0" rtlCol="0" anchor="ctr"/>
+          <a:lstStyle/>
+          <a:p>
+            <a:pPr algn="ctr" indent="0" marL="0">
+              <a:buNone/>
+            </a:pPr>
+            <a:r>
+              <a:rPr lang="en-US" sz="2600" spc="-90" kern="0" dirty="0">
+                <a:solidFill>
+                  <a:srgbClr val="2B2D30"/>
+                </a:solidFill>
+                <a:latin typeface="Montserrat ExtraBold" pitchFamily="34" charset="0"/>
+                <a:ea typeface="Montserrat ExtraBold" pitchFamily="34" charset="-122"/>
+                <a:cs typeface="Montserrat ExtraBold" pitchFamily="34" charset="-120"/>
+              </a:rPr>
+              <a:t>209</a:t>
+            </a:r>
+            <a:endParaRPr lang="en-US" sz="2600" dirty="0"/>
+          </a:p>
+        </p:txBody>
+      </p:sp>
+      <p:sp>
+        <p:nvSpPr>
+          <p:cNvPr id="24" name="Text 21"/>
+          <p:cNvSpPr txBox="1"/>
+          <p:nvPr/>
+        </p:nvSpPr>
+        <p:spPr>
+          <a:xfrm>
+            <a:off x="3640226" y="5559552"/>
+            <a:ext cx="2194560" cy="402336"/>
+          </a:xfrm>
+          <a:prstGeom prst="rect">
+            <a:avLst/>
+          </a:prstGeom>
+          <a:noFill/>
+          <a:ln/>
+        </p:spPr>
+        <p:txBody>
+          <a:bodyPr wrap="square" lIns="0" tIns="0" rIns="0" bIns="0" rtlCol="0" anchor="t"/>
+          <a:lstStyle/>
+          <a:p>
+            <a:pPr algn="ctr" indent="0" marL="0">
+              <a:lnSpc>
+                <a:spcPct val="115000"/>
+              </a:lnSpc>
+              <a:buNone/>
+            </a:pPr>
+            <a:r>
+              <a:rPr lang="en-US" sz="950" spc="30" kern="0" dirty="0">
+                <a:solidFill>
+                  <a:srgbClr val="6E7175"/>
+                </a:solidFill>
+                <a:latin typeface="Montserrat Medium" pitchFamily="34" charset="0"/>
+                <a:ea typeface="Montserrat Medium" pitchFamily="34" charset="-122"/>
+                <a:cs typeface="Montserrat Medium" pitchFamily="34" charset="-120"/>
+              </a:rPr>
+              <a:t>rows Kevlar grouped</a:t>
+            </a:r>
+            <a:endParaRPr lang="en-US" sz="950" dirty="0"/>
+          </a:p>
+          <a:p>
+            <a:pPr algn="ctr" indent="0" marL="0">
+              <a:lnSpc>
+                <a:spcPct val="115000"/>
+              </a:lnSpc>
+              <a:buNone/>
+            </a:pPr>
+            <a:r>
+              <a:rPr lang="en-US" sz="950" spc="30" kern="0" dirty="0">
+                <a:solidFill>
+                  <a:srgbClr val="6E7175"/>
+                </a:solidFill>
+                <a:latin typeface="Montserrat Medium" pitchFamily="34" charset="0"/>
+                <a:ea typeface="Montserrat Medium" pitchFamily="34" charset="-122"/>
+                <a:cs typeface="Montserrat Medium" pitchFamily="34" charset="-120"/>
+              </a:rPr>
+              <a:t>them into</a:t>
+            </a:r>
+            <a:endParaRPr lang="en-US" sz="950" dirty="0"/>
+          </a:p>
+        </p:txBody>
+      </p:sp>
+      <p:sp>
+        <p:nvSpPr>
+          <p:cNvPr id="25" name="Text 22"/>
+          <p:cNvSpPr txBox="1"/>
+          <p:nvPr/>
+        </p:nvSpPr>
+        <p:spPr>
+          <a:xfrm>
+            <a:off x="5912968" y="5294376"/>
+            <a:ext cx="365760" cy="420624"/>
+          </a:xfrm>
+          <a:prstGeom prst="rect">
+            <a:avLst/>
+          </a:prstGeom>
+          <a:noFill/>
+          <a:ln/>
+        </p:spPr>
+        <p:txBody>
+          <a:bodyPr wrap="square" lIns="0" tIns="0" rIns="0" bIns="0" rtlCol="0" anchor="ctr"/>
+          <a:lstStyle/>
+          <a:p>
+            <a:pPr algn="ctr" indent="0" marL="0">
+              <a:buNone/>
+            </a:pPr>
+            <a:r>
+              <a:rPr lang="en-US" sz="2600" b="1" dirty="0">
+                <a:solidFill>
+                  <a:srgbClr val="C9C6C4"/>
+                </a:solidFill>
+                <a:latin typeface="Montserrat" pitchFamily="34" charset="0"/>
+                <a:ea typeface="Montserrat" pitchFamily="34" charset="-122"/>
+                <a:cs typeface="Montserrat" pitchFamily="34" charset="-120"/>
+              </a:rPr>
+              <a:t>›</a:t>
+            </a:r>
+            <a:endParaRPr lang="en-US" sz="2600" dirty="0"/>
+          </a:p>
+        </p:txBody>
+      </p:sp>
+      <p:sp>
+        <p:nvSpPr>
+          <p:cNvPr id="26" name="Shape 23"/>
+          <p:cNvSpPr/>
+          <p:nvPr/>
+        </p:nvSpPr>
+        <p:spPr>
+          <a:xfrm>
+            <a:off x="6210605" y="4974336"/>
+            <a:ext cx="2487168" cy="1060704"/>
+          </a:xfrm>
+          <a:prstGeom prst="roundRect">
+            <a:avLst>
+              <a:gd name="adj" fmla="val 5172"/>
+            </a:avLst>
+          </a:prstGeom>
+          <a:solidFill>
+            <a:srgbClr val="F5F4F3"/>
+          </a:solidFill>
+          <a:ln w="9525">
+            <a:solidFill>
+              <a:srgbClr val="E6E4E2"/>
+            </a:solidFill>
+            <a:prstDash val="solid"/>
+          </a:ln>
+          <a:effectLst>
+            <a:outerShdw sx="100000" sy="100000" kx="0" ky="0" algn="bl" rotWithShape="0" blurRad="16387064000000" dist="8193532000000" dir="19440000000000000">
+              <a:srgbClr val="FFFFFF">
+                <a:alpha val="750000000000000"/>
+              </a:srgbClr>
+            </a:outerShdw>
+          </a:effectLst>
+        </p:spPr>
+      </p:sp>
+      <p:sp>
+        <p:nvSpPr>
+          <p:cNvPr id="27" name="Text 24"/>
+          <p:cNvSpPr txBox="1"/>
+          <p:nvPr/>
+        </p:nvSpPr>
+        <p:spPr>
+          <a:xfrm>
+            <a:off x="6393485" y="5120640"/>
+            <a:ext cx="2121408" cy="420624"/>
+          </a:xfrm>
+          <a:prstGeom prst="rect">
+            <a:avLst/>
+          </a:prstGeom>
+          <a:noFill/>
+          <a:ln/>
+        </p:spPr>
+        <p:txBody>
+          <a:bodyPr wrap="square" lIns="0" tIns="0" rIns="0" bIns="0" rtlCol="0" anchor="ctr"/>
+          <a:lstStyle/>
+          <a:p>
+            <a:pPr algn="ctr" indent="0" marL="0">
+              <a:buNone/>
+            </a:pPr>
+            <a:r>
+              <a:rPr lang="en-US" sz="1700" spc="120" kern="0" dirty="0">
+                <a:solidFill>
+                  <a:srgbClr val="2B2D30"/>
+                </a:solidFill>
+                <a:latin typeface="Montserrat ExtraBold" pitchFamily="34" charset="0"/>
+                <a:ea typeface="Montserrat ExtraBold" pitchFamily="34" charset="-122"/>
+                <a:cs typeface="Montserrat ExtraBold" pitchFamily="34" charset="-120"/>
+              </a:rPr>
+              <a:t>RULE</a:t>
+            </a:r>
+            <a:endParaRPr lang="en-US" sz="1700" dirty="0"/>
+          </a:p>
+        </p:txBody>
+      </p:sp>
+      <p:sp>
+        <p:nvSpPr>
+          <p:cNvPr id="28" name="Text 25"/>
+          <p:cNvSpPr txBox="1"/>
+          <p:nvPr/>
+        </p:nvSpPr>
+        <p:spPr>
+          <a:xfrm>
+            <a:off x="6356909" y="5559552"/>
+            <a:ext cx="2194560" cy="402336"/>
+          </a:xfrm>
+          <a:prstGeom prst="rect">
+            <a:avLst/>
+          </a:prstGeom>
+          <a:noFill/>
+          <a:ln/>
+        </p:spPr>
+        <p:txBody>
+          <a:bodyPr wrap="square" lIns="0" tIns="0" rIns="0" bIns="0" rtlCol="0" anchor="t"/>
+          <a:lstStyle/>
+          <a:p>
+            <a:pPr algn="ctr" indent="0" marL="0">
+              <a:lnSpc>
+                <a:spcPct val="115000"/>
+              </a:lnSpc>
+              <a:buNone/>
+            </a:pPr>
+            <a:r>
+              <a:rPr lang="en-US" sz="950" spc="30" kern="0" dirty="0">
+                <a:solidFill>
+                  <a:srgbClr val="6E7175"/>
+                </a:solidFill>
+                <a:latin typeface="Montserrat Medium" pitchFamily="34" charset="0"/>
+                <a:ea typeface="Montserrat Medium" pitchFamily="34" charset="-122"/>
+                <a:cs typeface="Montserrat Medium" pitchFamily="34" charset="-120"/>
+              </a:rPr>
+              <a:t>highest build</a:t>
+            </a:r>
+            <a:endParaRPr lang="en-US" sz="950" dirty="0"/>
+          </a:p>
+          <a:p>
+            <a:pPr algn="ctr" indent="0" marL="0">
+              <a:lnSpc>
+                <a:spcPct val="115000"/>
+              </a:lnSpc>
+              <a:buNone/>
+            </a:pPr>
+            <a:r>
+              <a:rPr lang="en-US" sz="950" spc="30" kern="0" dirty="0">
+                <a:solidFill>
+                  <a:srgbClr val="6E7175"/>
+                </a:solidFill>
+                <a:latin typeface="Montserrat Medium" pitchFamily="34" charset="0"/>
+                <a:ea typeface="Montserrat Medium" pitchFamily="34" charset="-122"/>
+                <a:cs typeface="Montserrat Medium" pitchFamily="34" charset="-120"/>
+              </a:rPr>
+              <a:t>wins</a:t>
+            </a:r>
+            <a:endParaRPr lang="en-US" sz="950" dirty="0"/>
+          </a:p>
+        </p:txBody>
+      </p:sp>
+      <p:sp>
+        <p:nvSpPr>
+          <p:cNvPr id="29" name="Text 26"/>
+          <p:cNvSpPr txBox="1"/>
+          <p:nvPr/>
+        </p:nvSpPr>
+        <p:spPr>
+          <a:xfrm>
+            <a:off x="8629650" y="5294376"/>
+            <a:ext cx="365760" cy="420624"/>
+          </a:xfrm>
+          <a:prstGeom prst="rect">
+            <a:avLst/>
+          </a:prstGeom>
+          <a:noFill/>
+          <a:ln/>
+        </p:spPr>
+        <p:txBody>
+          <a:bodyPr wrap="square" lIns="0" tIns="0" rIns="0" bIns="0" rtlCol="0" anchor="ctr"/>
+          <a:lstStyle/>
+          <a:p>
+            <a:pPr algn="ctr" indent="0" marL="0">
+              <a:buNone/>
+            </a:pPr>
+            <a:r>
+              <a:rPr lang="en-US" sz="2600" b="1" dirty="0">
+                <a:solidFill>
+                  <a:srgbClr val="C9C6C4"/>
+                </a:solidFill>
+                <a:latin typeface="Montserrat" pitchFamily="34" charset="0"/>
+                <a:ea typeface="Montserrat" pitchFamily="34" charset="-122"/>
+                <a:cs typeface="Montserrat" pitchFamily="34" charset="-120"/>
+              </a:rPr>
+              <a:t>›</a:t>
+            </a:r>
+            <a:endParaRPr lang="en-US" sz="2600" dirty="0"/>
+          </a:p>
+        </p:txBody>
+      </p:sp>
+      <p:sp>
+        <p:nvSpPr>
+          <p:cNvPr id="30" name="Shape 27"/>
+          <p:cNvSpPr/>
+          <p:nvPr/>
+        </p:nvSpPr>
+        <p:spPr>
+          <a:xfrm>
+            <a:off x="8927287" y="4974336"/>
+            <a:ext cx="2487168" cy="1060704"/>
+          </a:xfrm>
+          <a:prstGeom prst="roundRect">
+            <a:avLst>
+              <a:gd name="adj" fmla="val 5172"/>
+            </a:avLst>
+          </a:prstGeom>
+          <a:solidFill>
+            <a:srgbClr val="942838"/>
           </a:solidFill>
           <a:ln w="9525">
             <a:solidFill>
@@ -11590,9 +11810,9 @@
             <a:prstDash val="solid"/>
           </a:ln>
           <a:effectLst>
-            <a:outerShdw sx="100000" sy="100000" kx="0" ky="0" algn="bl" rotWithShape="0" blurRad="5.510881335639881e+103" dist="1.3777203339099702e+103" dir="2.5587259226936733e+121">
-              <a:srgbClr val="959092">
-                <a:alpha val="2.2000000000000006e+124"/>
+            <a:outerShdw sx="100000" sy="100000" kx="0" ky="0" algn="bl" rotWithShape="0" blurRad="203200" dist="50800" dir="5400000">
+              <a:srgbClr val="5D1923">
+                <a:alpha val="34000"/>
               </a:srgbClr>
             </a:outerShdw>
           </a:effectLst>
@@ -11600,53 +11820,53 @@
       </p:sp>
       <p:sp>
         <p:nvSpPr>
-          <p:cNvPr id="16" name="Text 13"/>
-          <p:cNvSpPr txBox="1"/>
-          <p:nvPr/>
-        </p:nvSpPr>
-        <p:spPr>
-          <a:xfrm>
-            <a:off x="8323783" y="2194560"/>
-            <a:ext cx="2871216" cy="676656"/>
-          </a:xfrm>
-          <a:prstGeom prst="rect">
-            <a:avLst/>
-          </a:prstGeom>
-          <a:noFill/>
-          <a:ln/>
-        </p:spPr>
-        <p:txBody>
-          <a:bodyPr wrap="square" lIns="0" tIns="0" rIns="0" bIns="0" rtlCol="0" anchor="t"/>
+          <p:cNvPr id="31" name="Text 28"/>
+          <p:cNvSpPr txBox="1"/>
+          <p:nvPr/>
+        </p:nvSpPr>
+        <p:spPr>
+          <a:xfrm>
+            <a:off x="9110167" y="5120640"/>
+            <a:ext cx="2121408" cy="420624"/>
+          </a:xfrm>
+          <a:prstGeom prst="rect">
+            <a:avLst/>
+          </a:prstGeom>
+          <a:noFill/>
+          <a:ln/>
+        </p:spPr>
+        <p:txBody>
+          <a:bodyPr wrap="square" lIns="0" tIns="0" rIns="0" bIns="0" rtlCol="0" anchor="ctr"/>
           <a:lstStyle/>
           <a:p>
             <a:pPr algn="ctr" indent="0" marL="0">
               <a:buNone/>
             </a:pPr>
             <a:r>
-              <a:rPr lang="en-US" sz="4600" spc="-180" kern="0" dirty="0">
-                <a:solidFill>
-                  <a:srgbClr val="942838"/>
+              <a:rPr lang="en-US" sz="2600" spc="-90" kern="0" dirty="0">
+                <a:solidFill>
+                  <a:srgbClr val="FFFFFF"/>
                 </a:solidFill>
                 <a:latin typeface="Montserrat ExtraBold" pitchFamily="34" charset="0"/>
                 <a:ea typeface="Montserrat ExtraBold" pitchFamily="34" charset="-122"/>
                 <a:cs typeface="Montserrat ExtraBold" pitchFamily="34" charset="-120"/>
               </a:rPr>
-              <a:t>78%</a:t>
-            </a:r>
-            <a:endParaRPr lang="en-US" sz="4600" dirty="0"/>
-          </a:p>
-        </p:txBody>
-      </p:sp>
-      <p:sp>
-        <p:nvSpPr>
-          <p:cNvPr id="17" name="Text 14"/>
-          <p:cNvSpPr txBox="1"/>
-          <p:nvPr/>
-        </p:nvSpPr>
-        <p:spPr>
-          <a:xfrm>
-            <a:off x="8323783" y="2907792"/>
-            <a:ext cx="2871216" cy="512064"/>
+              <a:t>46</a:t>
+            </a:r>
+            <a:endParaRPr lang="en-US" sz="2600" dirty="0"/>
+          </a:p>
+        </p:txBody>
+      </p:sp>
+      <p:sp>
+        <p:nvSpPr>
+          <p:cNvPr id="32" name="Text 29"/>
+          <p:cNvSpPr txBox="1"/>
+          <p:nvPr/>
+        </p:nvSpPr>
+        <p:spPr>
+          <a:xfrm>
+            <a:off x="9073591" y="5559552"/>
+            <a:ext cx="2194560" cy="402336"/>
           </a:xfrm>
           <a:prstGeom prst="rect">
             <a:avLst/>
@@ -11660,236 +11880,42 @@
           <a:p>
             <a:pPr algn="ctr" indent="0" marL="0">
               <a:lnSpc>
-                <a:spcPct val="120000"/>
+                <a:spcPct val="115000"/>
               </a:lnSpc>
               <a:buNone/>
             </a:pPr>
             <a:r>
               <a:rPr lang="en-US" sz="950" spc="30" kern="0" dirty="0">
                 <a:solidFill>
-                  <a:srgbClr val="6E7175"/>
+                  <a:srgbClr val="E4C9CE"/>
                 </a:solidFill>
                 <a:latin typeface="Montserrat Medium" pitchFamily="34" charset="0"/>
                 <a:ea typeface="Montserrat Medium" pitchFamily="34" charset="-122"/>
                 <a:cs typeface="Montserrat Medium" pitchFamily="34" charset="-120"/>
               </a:rPr>
-              <a:t>fewer tickets for the</a:t>
+              <a:t>tickets actually</a:t>
             </a:r>
             <a:endParaRPr lang="en-US" sz="950" dirty="0"/>
           </a:p>
           <a:p>
             <a:pPr algn="ctr" indent="0" marL="0">
               <a:lnSpc>
-                <a:spcPct val="120000"/>
+                <a:spcPct val="115000"/>
               </a:lnSpc>
               <a:buNone/>
             </a:pPr>
             <a:r>
               <a:rPr lang="en-US" sz="950" spc="30" kern="0" dirty="0">
                 <a:solidFill>
-                  <a:srgbClr val="6E7175"/>
+                  <a:srgbClr val="E4C9CE"/>
                 </a:solidFill>
                 <a:latin typeface="Montserrat Medium" pitchFamily="34" charset="0"/>
                 <a:ea typeface="Montserrat Medium" pitchFamily="34" charset="-122"/>
                 <a:cs typeface="Montserrat Medium" pitchFamily="34" charset="-120"/>
               </a:rPr>
-              <a:t>team to work through</a:t>
+              <a:t>opened</a:t>
             </a:r>
             <a:endParaRPr lang="en-US" sz="950" dirty="0"/>
-          </a:p>
-        </p:txBody>
-      </p:sp>
-      <p:sp>
-        <p:nvSpPr>
-          <p:cNvPr id="18" name="Text 15"/>
-          <p:cNvSpPr txBox="1"/>
-          <p:nvPr/>
-        </p:nvSpPr>
-        <p:spPr>
-          <a:xfrm>
-            <a:off x="777240" y="3803904"/>
-            <a:ext cx="6400800" cy="201168"/>
-          </a:xfrm>
-          <a:prstGeom prst="rect">
-            <a:avLst/>
-          </a:prstGeom>
-          <a:noFill/>
-          <a:ln/>
-        </p:spPr>
-        <p:txBody>
-          <a:bodyPr wrap="square" lIns="0" tIns="0" rIns="0" bIns="0" rtlCol="0" anchor="t"/>
-          <a:lstStyle/>
-          <a:p>
-            <a:pPr indent="0" marL="0">
-              <a:buNone/>
-            </a:pPr>
-            <a:r>
-              <a:rPr lang="en-US" sz="850" spc="140" kern="0" dirty="0">
-                <a:solidFill>
-                  <a:srgbClr val="942838"/>
-                </a:solidFill>
-                <a:latin typeface="Montserrat SemiBold" pitchFamily="34" charset="0"/>
-                <a:ea typeface="Montserrat SemiBold" pitchFamily="34" charset="-122"/>
-                <a:cs typeface="Montserrat SemiBold" pitchFamily="34" charset="-120"/>
-              </a:rPr>
-              <a:t>EVERY SQUARE IS ONE REAL FIX-ACTION</a:t>
-            </a:r>
-            <a:endParaRPr lang="en-US" sz="850" dirty="0"/>
-          </a:p>
-        </p:txBody>
-      </p:sp>
-      <p:pic>
-        <p:nvPicPr>
-          <p:cNvPr id="19" name="Image 1" descr="/home/user/ai/assets/gen/chart-consolidation.png">    </p:cNvPr>
-          <p:cNvPicPr>
-            <a:picLocks noChangeAspect="1"/>
-          </p:cNvPicPr>
-          <p:nvPr/>
-        </p:nvPicPr>
-        <p:blipFill>
-          <a:blip r:embed="rId2"/>
-          <a:stretch>
-            <a:fillRect/>
-          </a:stretch>
-        </p:blipFill>
-        <p:spPr>
-          <a:xfrm>
-            <a:off x="777240" y="4096512"/>
-            <a:ext cx="10637215" cy="1221498"/>
-          </a:xfrm>
-          <a:prstGeom prst="rect">
-            <a:avLst/>
-          </a:prstGeom>
-        </p:spPr>
-      </p:pic>
-      <p:sp>
-        <p:nvSpPr>
-          <p:cNvPr id="20" name="Text 16"/>
-          <p:cNvSpPr txBox="1"/>
-          <p:nvPr/>
-        </p:nvSpPr>
-        <p:spPr>
-          <a:xfrm>
-            <a:off x="777240" y="5409450"/>
-            <a:ext cx="4572000" cy="256032"/>
-          </a:xfrm>
-          <a:prstGeom prst="rect">
-            <a:avLst/>
-          </a:prstGeom>
-          <a:noFill/>
-          <a:ln/>
-        </p:spPr>
-        <p:txBody>
-          <a:bodyPr wrap="square" lIns="0" tIns="0" rIns="0" bIns="0" rtlCol="0" anchor="t"/>
-          <a:lstStyle/>
-          <a:p>
-            <a:pPr indent="0" marL="0">
-              <a:buNone/>
-            </a:pPr>
-            <a:r>
-              <a:rPr lang="en-US" sz="1150" dirty="0">
-                <a:solidFill>
-                  <a:srgbClr val="942838"/>
-                </a:solidFill>
-                <a:latin typeface="Montserrat SemiBold" pitchFamily="34" charset="0"/>
-                <a:ea typeface="Montserrat SemiBold" pitchFamily="34" charset="-122"/>
-                <a:cs typeface="Montserrat SemiBold" pitchFamily="34" charset="-120"/>
-              </a:rPr>
-              <a:t>46 opened as tickets</a:t>
-            </a:r>
-            <a:endParaRPr lang="en-US" sz="1150" dirty="0"/>
-          </a:p>
-        </p:txBody>
-      </p:sp>
-      <p:sp>
-        <p:nvSpPr>
-          <p:cNvPr id="21" name="Text 17"/>
-          <p:cNvSpPr txBox="1"/>
-          <p:nvPr/>
-        </p:nvSpPr>
-        <p:spPr>
-          <a:xfrm>
-            <a:off x="5928055" y="5409450"/>
-            <a:ext cx="5486400" cy="256032"/>
-          </a:xfrm>
-          <a:prstGeom prst="rect">
-            <a:avLst/>
-          </a:prstGeom>
-          <a:noFill/>
-          <a:ln/>
-        </p:spPr>
-        <p:txBody>
-          <a:bodyPr wrap="square" lIns="0" tIns="0" rIns="0" bIns="0" rtlCol="0" anchor="t"/>
-          <a:lstStyle/>
-          <a:p>
-            <a:pPr algn="r" indent="0" marL="0">
-              <a:buNone/>
-            </a:pPr>
-            <a:r>
-              <a:rPr lang="en-US" sz="1150" dirty="0">
-                <a:solidFill>
-                  <a:srgbClr val="6E7175"/>
-                </a:solidFill>
-                <a:latin typeface="Montserrat SemiBold" pitchFamily="34" charset="0"/>
-                <a:ea typeface="Montserrat SemiBold" pitchFamily="34" charset="-122"/>
-                <a:cs typeface="Montserrat SemiBold" pitchFamily="34" charset="-120"/>
-              </a:rPr>
-              <a:t>163 absorbed by a newer patch already being installed</a:t>
-            </a:r>
-            <a:endParaRPr lang="en-US" sz="1150" dirty="0"/>
-          </a:p>
-        </p:txBody>
-      </p:sp>
-      <p:sp>
-        <p:nvSpPr>
-          <p:cNvPr id="22" name="Text 18"/>
-          <p:cNvSpPr txBox="1"/>
-          <p:nvPr/>
-        </p:nvSpPr>
-        <p:spPr>
-          <a:xfrm>
-            <a:off x="777240" y="5852160"/>
-            <a:ext cx="10637215" cy="274320"/>
-          </a:xfrm>
-          <a:prstGeom prst="rect">
-            <a:avLst/>
-          </a:prstGeom>
-          <a:noFill/>
-          <a:ln/>
-        </p:spPr>
-        <p:txBody>
-          <a:bodyPr wrap="square" lIns="0" tIns="0" rIns="0" bIns="0" rtlCol="0" anchor="t"/>
-          <a:lstStyle/>
-          <a:p>
-            <a:pPr indent="0" marL="0">
-              <a:buNone/>
-            </a:pPr>
-            <a:r>
-              <a:rPr lang="en-US" sz="1150" dirty="0">
-                <a:solidFill>
-                  <a:srgbClr val="2B2D30"/>
-                </a:solidFill>
-                <a:latin typeface="Montserrat SemiBold" pitchFamily="34" charset="0"/>
-                <a:ea typeface="Montserrat SemiBold" pitchFamily="34" charset="-122"/>
-                <a:cs typeface="Montserrat SemiBold" pitchFamily="34" charset="-120"/>
-              </a:rPr>
-              <a:t>Zero coverage loss</a:t>
-            </a:r>
-            <a:pPr indent="0" marL="0">
-              <a:buNone/>
-            </a:pPr>
-            <a:r>
-              <a:rPr lang="en-US" sz="1150" dirty="0">
-                <a:solidFill>
-                  <a:srgbClr val="6E7175"/>
-                </a:solidFill>
-                <a:latin typeface="Montserrat" pitchFamily="34" charset="0"/>
-                <a:ea typeface="Montserrat" pitchFamily="34" charset="-122"/>
-                <a:cs typeface="Montserrat" pitchFamily="34" charset="-120"/>
-              </a:rPr>
-              <a:t>  —  verified across 2,658 machine-and-software combinations.</a:t>
-            </a:r>
-            <a:endParaRPr lang="en-US" sz="1150" dirty="0"/>
           </a:p>
         </p:txBody>
       </p:sp>
@@ -13039,7 +13065,7 @@
                 <a:ea typeface="Montserrat SemiBold" pitchFamily="34" charset="-122"/>
                 <a:cs typeface="Montserrat SemiBold" pitchFamily="34" charset="-120"/>
               </a:rPr>
-              <a:t>PROJECT 03  ·  WHAT COMES NEXT</a:t>
+              <a:t>PROJECT 03  ·  THE PAYOFF</a:t>
             </a:r>
             <a:endParaRPr lang="en-US" sz="1000" dirty="0"/>
           </a:p>
@@ -13081,7 +13107,7 @@
                 <a:ea typeface="Montserrat ExtraBold" pitchFamily="34" charset="-122"/>
                 <a:cs typeface="Montserrat ExtraBold" pitchFamily="34" charset="-120"/>
               </a:rPr>
-              <a:t>Four systems, one screen</a:t>
+              <a:t>209 rows became 46 tickets</a:t>
             </a:r>
             <a:endParaRPr lang="en-US" sz="2900" dirty="0"/>
           </a:p>
@@ -13207,109 +13233,171 @@
       </p:sp>
       <p:sp>
         <p:nvSpPr>
-          <p:cNvPr id="9" name="Text 6"/>
-          <p:cNvSpPr txBox="1"/>
+          <p:cNvPr id="9" name="Shape 6"/>
+          <p:cNvSpPr/>
           <p:nvPr/>
         </p:nvSpPr>
         <p:spPr>
           <a:xfrm>
             <a:off x="777240" y="2011680"/>
-            <a:ext cx="4160520" cy="914400"/>
-          </a:xfrm>
-          <a:prstGeom prst="rect">
-            <a:avLst/>
-          </a:prstGeom>
-          <a:noFill/>
-          <a:ln/>
-        </p:spPr>
-        <p:txBody>
-          <a:bodyPr wrap="square" lIns="0" tIns="0" rIns="0" bIns="0" rtlCol="0" anchor="t"/>
-          <a:lstStyle/>
-          <a:p>
-            <a:pPr indent="0" marL="0">
+            <a:ext cx="3310128" cy="1481328"/>
+          </a:xfrm>
+          <a:prstGeom prst="roundRect">
+            <a:avLst>
+              <a:gd name="adj" fmla="val 3704"/>
+            </a:avLst>
+          </a:prstGeom>
+          <a:solidFill>
+            <a:srgbClr val="F5F4F3"/>
+          </a:solidFill>
+          <a:ln w="9525">
+            <a:solidFill>
+              <a:srgbClr val="E6E4E2"/>
+            </a:solidFill>
+            <a:prstDash val="solid"/>
+          </a:ln>
+          <a:effectLst>
+            <a:outerShdw sx="100000" sy="100000" kx="0" ky="0" algn="bl" rotWithShape="0" blurRad="5.510881335639881e+103" dist="1.3777203339099702e+103" dir="2.5587259226936733e+121">
+              <a:srgbClr val="959092">
+                <a:alpha val="2.2000000000000006e+124"/>
+              </a:srgbClr>
+            </a:outerShdw>
+          </a:effectLst>
+        </p:spPr>
+      </p:sp>
+      <p:sp>
+        <p:nvSpPr>
+          <p:cNvPr id="10" name="Text 7"/>
+          <p:cNvSpPr txBox="1"/>
+          <p:nvPr/>
+        </p:nvSpPr>
+        <p:spPr>
+          <a:xfrm>
+            <a:off x="996696" y="2194560"/>
+            <a:ext cx="2871216" cy="676656"/>
+          </a:xfrm>
+          <a:prstGeom prst="rect">
+            <a:avLst/>
+          </a:prstGeom>
+          <a:noFill/>
+          <a:ln/>
+        </p:spPr>
+        <p:txBody>
+          <a:bodyPr wrap="square" lIns="0" tIns="0" rIns="0" bIns="0" rtlCol="0" anchor="t"/>
+          <a:lstStyle/>
+          <a:p>
+            <a:pPr algn="ctr" indent="0" marL="0">
+              <a:buNone/>
+            </a:pPr>
+            <a:r>
+              <a:rPr lang="en-US" sz="4600" spc="-180" kern="0" dirty="0">
+                <a:solidFill>
+                  <a:srgbClr val="2B2D30"/>
+                </a:solidFill>
+                <a:latin typeface="Montserrat ExtraBold" pitchFamily="34" charset="0"/>
+                <a:ea typeface="Montserrat ExtraBold" pitchFamily="34" charset="-122"/>
+                <a:cs typeface="Montserrat ExtraBold" pitchFamily="34" charset="-120"/>
+              </a:rPr>
+              <a:t>209</a:t>
+            </a:r>
+            <a:endParaRPr lang="en-US" sz="4600" dirty="0"/>
+          </a:p>
+        </p:txBody>
+      </p:sp>
+      <p:sp>
+        <p:nvSpPr>
+          <p:cNvPr id="11" name="Text 8"/>
+          <p:cNvSpPr txBox="1"/>
+          <p:nvPr/>
+        </p:nvSpPr>
+        <p:spPr>
+          <a:xfrm>
+            <a:off x="996696" y="2907792"/>
+            <a:ext cx="2871216" cy="512064"/>
+          </a:xfrm>
+          <a:prstGeom prst="rect">
+            <a:avLst/>
+          </a:prstGeom>
+          <a:noFill/>
+          <a:ln/>
+        </p:spPr>
+        <p:txBody>
+          <a:bodyPr wrap="square" lIns="0" tIns="0" rIns="0" bIns="0" rtlCol="0" anchor="t"/>
+          <a:lstStyle/>
+          <a:p>
+            <a:pPr algn="ctr" indent="0" marL="0">
               <a:lnSpc>
-                <a:spcPct val="128000"/>
+                <a:spcPct val="120000"/>
               </a:lnSpc>
               <a:buNone/>
             </a:pPr>
             <a:r>
-              <a:rPr lang="en-US" sz="1250" dirty="0">
+              <a:rPr lang="en-US" sz="950" spc="30" kern="0" dirty="0">
                 <a:solidFill>
                   <a:srgbClr val="6E7175"/>
                 </a:solidFill>
-                <a:latin typeface="Montserrat" pitchFamily="34" charset="0"/>
-                <a:ea typeface="Montserrat" pitchFamily="34" charset="-122"/>
-                <a:cs typeface="Montserrat" pitchFamily="34" charset="-120"/>
-              </a:rPr>
-              <a:t>Today these four systems each hold one piece of the story, and someone has to stitch them together by hand. The next step is a single view where the whole path is visible at once.</a:t>
-            </a:r>
-            <a:endParaRPr lang="en-US" sz="1250" dirty="0"/>
-          </a:p>
-        </p:txBody>
-      </p:sp>
-      <p:sp>
-        <p:nvSpPr>
-          <p:cNvPr id="10" name="Shape 7"/>
+                <a:latin typeface="Montserrat Medium" pitchFamily="34" charset="0"/>
+                <a:ea typeface="Montserrat Medium" pitchFamily="34" charset="-122"/>
+                <a:cs typeface="Montserrat Medium" pitchFamily="34" charset="-120"/>
+              </a:rPr>
+              <a:t>rows in Kevlar’s own</a:t>
+            </a:r>
+            <a:endParaRPr lang="en-US" sz="950" dirty="0"/>
+          </a:p>
+          <a:p>
+            <a:pPr algn="ctr" indent="0" marL="0">
+              <a:lnSpc>
+                <a:spcPct val="120000"/>
+              </a:lnSpc>
+              <a:buNone/>
+            </a:pPr>
+            <a:r>
+              <a:rPr lang="en-US" sz="950" spc="30" kern="0" dirty="0">
+                <a:solidFill>
+                  <a:srgbClr val="6E7175"/>
+                </a:solidFill>
+                <a:latin typeface="Montserrat Medium" pitchFamily="34" charset="0"/>
+                <a:ea typeface="Montserrat Medium" pitchFamily="34" charset="-122"/>
+                <a:cs typeface="Montserrat Medium" pitchFamily="34" charset="-120"/>
+              </a:rPr>
+              <a:t>KB Priority report</a:t>
+            </a:r>
+            <a:endParaRPr lang="en-US" sz="950" dirty="0"/>
+          </a:p>
+        </p:txBody>
+      </p:sp>
+      <p:sp>
+        <p:nvSpPr>
+          <p:cNvPr id="12" name="Shape 9"/>
           <p:cNvSpPr/>
           <p:nvPr/>
         </p:nvSpPr>
         <p:spPr>
           <a:xfrm>
-            <a:off x="795528" y="3118104"/>
-            <a:ext cx="182880" cy="182880"/>
-          </a:xfrm>
-          <a:prstGeom prst="ellipse">
-            <a:avLst/>
+            <a:off x="4440784" y="2011680"/>
+            <a:ext cx="3310128" cy="1481328"/>
+          </a:xfrm>
+          <a:prstGeom prst="roundRect">
+            <a:avLst>
+              <a:gd name="adj" fmla="val 3704"/>
+            </a:avLst>
           </a:prstGeom>
           <a:solidFill>
             <a:srgbClr val="F6EEF0"/>
           </a:solidFill>
-          <a:ln w="19050">
+          <a:ln w="9525">
             <a:solidFill>
               <a:srgbClr val="942838"/>
             </a:solidFill>
             <a:prstDash val="solid"/>
           </a:ln>
-        </p:spPr>
-      </p:sp>
-      <p:sp>
-        <p:nvSpPr>
-          <p:cNvPr id="11" name="Shape 8"/>
-          <p:cNvSpPr/>
-          <p:nvPr/>
-        </p:nvSpPr>
-        <p:spPr>
-          <a:xfrm>
-            <a:off x="850392" y="3172968"/>
-            <a:ext cx="73152" cy="73152"/>
-          </a:xfrm>
-          <a:prstGeom prst="ellipse">
-            <a:avLst/>
-          </a:prstGeom>
-          <a:solidFill>
-            <a:srgbClr val="942838"/>
-          </a:solidFill>
-          <a:ln/>
-        </p:spPr>
-      </p:sp>
-      <p:sp>
-        <p:nvSpPr>
-          <p:cNvPr id="12" name="Shape 9"/>
-          <p:cNvSpPr/>
-          <p:nvPr/>
-        </p:nvSpPr>
-        <p:spPr>
-          <a:xfrm>
-            <a:off x="882396" y="3319272"/>
-            <a:ext cx="10973" cy="457200"/>
-          </a:xfrm>
-          <a:prstGeom prst="rect">
-            <a:avLst/>
-          </a:prstGeom>
-          <a:solidFill>
-            <a:srgbClr val="C9C6C4"/>
-          </a:solidFill>
-          <a:ln/>
+          <a:effectLst>
+            <a:outerShdw sx="100000" sy="100000" kx="0" ky="0" algn="bl" rotWithShape="0" blurRad="6.998819296262648e+107" dist="1.749704824065662e+107" dir="1.535235553616204e+126">
+              <a:srgbClr val="959092">
+                <a:alpha val="2.2000000000000006e+129"/>
+              </a:srgbClr>
+            </a:outerShdw>
+          </a:effectLst>
         </p:spPr>
       </p:sp>
       <p:sp>
@@ -13320,34 +13408,34 @@
         </p:nvSpPr>
         <p:spPr>
           <a:xfrm>
-            <a:off x="1143000" y="3054096"/>
-            <a:ext cx="3794760" cy="256032"/>
-          </a:xfrm>
-          <a:prstGeom prst="rect">
-            <a:avLst/>
-          </a:prstGeom>
-          <a:noFill/>
-          <a:ln/>
-        </p:spPr>
-        <p:txBody>
-          <a:bodyPr wrap="square" lIns="0" tIns="0" rIns="0" bIns="0" rtlCol="0" anchor="t"/>
-          <a:lstStyle/>
-          <a:p>
-            <a:pPr indent="0" marL="0">
-              <a:buNone/>
-            </a:pPr>
-            <a:r>
-              <a:rPr lang="en-US" sz="1350" dirty="0">
-                <a:solidFill>
-                  <a:srgbClr val="2B2D30"/>
-                </a:solidFill>
-                <a:latin typeface="Montserrat SemiBold" pitchFamily="34" charset="0"/>
-                <a:ea typeface="Montserrat SemiBold" pitchFamily="34" charset="-122"/>
-                <a:cs typeface="Montserrat SemiBold" pitchFamily="34" charset="-120"/>
-              </a:rPr>
-              <a:t>Tenable</a:t>
-            </a:r>
-            <a:endParaRPr lang="en-US" sz="1350" dirty="0"/>
+            <a:off x="4660240" y="2194560"/>
+            <a:ext cx="2871216" cy="676656"/>
+          </a:xfrm>
+          <a:prstGeom prst="rect">
+            <a:avLst/>
+          </a:prstGeom>
+          <a:noFill/>
+          <a:ln/>
+        </p:spPr>
+        <p:txBody>
+          <a:bodyPr wrap="square" lIns="0" tIns="0" rIns="0" bIns="0" rtlCol="0" anchor="t"/>
+          <a:lstStyle/>
+          <a:p>
+            <a:pPr algn="ctr" indent="0" marL="0">
+              <a:buNone/>
+            </a:pPr>
+            <a:r>
+              <a:rPr lang="en-US" sz="4600" spc="-180" kern="0" dirty="0">
+                <a:solidFill>
+                  <a:srgbClr val="942838"/>
+                </a:solidFill>
+                <a:latin typeface="Montserrat ExtraBold" pitchFamily="34" charset="0"/>
+                <a:ea typeface="Montserrat ExtraBold" pitchFamily="34" charset="-122"/>
+                <a:cs typeface="Montserrat ExtraBold" pitchFamily="34" charset="-120"/>
+              </a:rPr>
+              <a:t>46</a:t>
+            </a:r>
+            <a:endParaRPr lang="en-US" sz="4600" dirty="0"/>
           </a:p>
         </p:txBody>
       </p:sp>
@@ -13359,34 +13447,57 @@
         </p:nvSpPr>
         <p:spPr>
           <a:xfrm>
-            <a:off x="1143000" y="3310128"/>
-            <a:ext cx="3749040" cy="274320"/>
-          </a:xfrm>
-          <a:prstGeom prst="rect">
-            <a:avLst/>
-          </a:prstGeom>
-          <a:noFill/>
-          <a:ln/>
-        </p:spPr>
-        <p:txBody>
-          <a:bodyPr wrap="square" lIns="0" tIns="0" rIns="0" bIns="0" rtlCol="0" anchor="t"/>
-          <a:lstStyle/>
-          <a:p>
-            <a:pPr indent="0" marL="0">
-              <a:buNone/>
-            </a:pPr>
-            <a:r>
-              <a:rPr lang="en-US" sz="1100" dirty="0">
+            <a:off x="4660240" y="2907792"/>
+            <a:ext cx="2871216" cy="512064"/>
+          </a:xfrm>
+          <a:prstGeom prst="rect">
+            <a:avLst/>
+          </a:prstGeom>
+          <a:noFill/>
+          <a:ln/>
+        </p:spPr>
+        <p:txBody>
+          <a:bodyPr wrap="square" lIns="0" tIns="0" rIns="0" bIns="0" rtlCol="0" anchor="t"/>
+          <a:lstStyle/>
+          <a:p>
+            <a:pPr algn="ctr" indent="0" marL="0">
+              <a:lnSpc>
+                <a:spcPct val="120000"/>
+              </a:lnSpc>
+              <a:buNone/>
+            </a:pPr>
+            <a:r>
+              <a:rPr lang="en-US" sz="950" spc="30" kern="0" dirty="0">
                 <a:solidFill>
                   <a:srgbClr val="6E7175"/>
                 </a:solidFill>
-                <a:latin typeface="Montserrat" pitchFamily="34" charset="0"/>
-                <a:ea typeface="Montserrat" pitchFamily="34" charset="-122"/>
-                <a:cs typeface="Montserrat" pitchFamily="34" charset="-120"/>
-              </a:rPr>
-              <a:t>finds the flaw</a:t>
-            </a:r>
-            <a:endParaRPr lang="en-US" sz="1100" dirty="0"/>
+                <a:latin typeface="Montserrat Medium" pitchFamily="34" charset="0"/>
+                <a:ea typeface="Montserrat Medium" pitchFamily="34" charset="-122"/>
+                <a:cs typeface="Montserrat Medium" pitchFamily="34" charset="-120"/>
+              </a:rPr>
+              <a:t>tickets actually opened</a:t>
+            </a:r>
+            <a:endParaRPr lang="en-US" sz="950" dirty="0"/>
+          </a:p>
+          <a:p>
+            <a:pPr algn="ctr" indent="0" marL="0">
+              <a:lnSpc>
+                <a:spcPct val="120000"/>
+              </a:lnSpc>
+              <a:buNone/>
+            </a:pPr>
+            <a:r>
+              <a:rPr lang="en-US" sz="950" spc="30" kern="0" dirty="0">
+                <a:solidFill>
+                  <a:srgbClr val="6E7175"/>
+                </a:solidFill>
+                <a:latin typeface="Montserrat Medium" pitchFamily="34" charset="0"/>
+                <a:ea typeface="Montserrat Medium" pitchFamily="34" charset="-122"/>
+                <a:cs typeface="Montserrat Medium" pitchFamily="34" charset="-120"/>
+              </a:rPr>
+              <a:t>after applying the rule</a:t>
+            </a:r>
+            <a:endParaRPr lang="en-US" sz="950" dirty="0"/>
           </a:p>
         </p:txBody>
       </p:sp>
@@ -13398,62 +13509,132 @@
         </p:nvSpPr>
         <p:spPr>
           <a:xfrm>
-            <a:off x="795528" y="3776472"/>
-            <a:ext cx="182880" cy="182880"/>
-          </a:xfrm>
-          <a:prstGeom prst="ellipse">
-            <a:avLst/>
+            <a:off x="8104327" y="2011680"/>
+            <a:ext cx="3310128" cy="1481328"/>
+          </a:xfrm>
+          <a:prstGeom prst="roundRect">
+            <a:avLst>
+              <a:gd name="adj" fmla="val 3704"/>
+            </a:avLst>
           </a:prstGeom>
           <a:solidFill>
             <a:srgbClr val="F6EEF0"/>
           </a:solidFill>
-          <a:ln w="19050">
+          <a:ln w="9525">
             <a:solidFill>
               <a:srgbClr val="942838"/>
             </a:solidFill>
             <a:prstDash val="solid"/>
           </a:ln>
-        </p:spPr>
-      </p:sp>
-      <p:sp>
-        <p:nvSpPr>
-          <p:cNvPr id="16" name="Shape 13"/>
-          <p:cNvSpPr/>
-          <p:nvPr/>
-        </p:nvSpPr>
-        <p:spPr>
-          <a:xfrm>
-            <a:off x="850392" y="3831336"/>
-            <a:ext cx="73152" cy="73152"/>
-          </a:xfrm>
-          <a:prstGeom prst="ellipse">
-            <a:avLst/>
-          </a:prstGeom>
-          <a:solidFill>
-            <a:srgbClr val="942838"/>
-          </a:solidFill>
-          <a:ln/>
-        </p:spPr>
-      </p:sp>
-      <p:sp>
-        <p:nvSpPr>
-          <p:cNvPr id="17" name="Shape 14"/>
-          <p:cNvSpPr/>
-          <p:nvPr/>
-        </p:nvSpPr>
-        <p:spPr>
-          <a:xfrm>
-            <a:off x="882396" y="3977640"/>
-            <a:ext cx="10973" cy="457200"/>
-          </a:xfrm>
-          <a:prstGeom prst="rect">
-            <a:avLst/>
-          </a:prstGeom>
-          <a:solidFill>
-            <a:srgbClr val="C9C6C4"/>
-          </a:solidFill>
-          <a:ln/>
-        </p:spPr>
+          <a:effectLst>
+            <a:outerShdw sx="100000" sy="100000" kx="0" ky="0" algn="bl" rotWithShape="0" blurRad="8.888500506253563e+111" dist="2.2221251265633907e+111" dir="9.211413321697224e+130">
+              <a:srgbClr val="959092">
+                <a:alpha val="2.2000000000000004e+134"/>
+              </a:srgbClr>
+            </a:outerShdw>
+          </a:effectLst>
+        </p:spPr>
+      </p:sp>
+      <p:sp>
+        <p:nvSpPr>
+          <p:cNvPr id="16" name="Text 13"/>
+          <p:cNvSpPr txBox="1"/>
+          <p:nvPr/>
+        </p:nvSpPr>
+        <p:spPr>
+          <a:xfrm>
+            <a:off x="8323783" y="2194560"/>
+            <a:ext cx="2871216" cy="676656"/>
+          </a:xfrm>
+          <a:prstGeom prst="rect">
+            <a:avLst/>
+          </a:prstGeom>
+          <a:noFill/>
+          <a:ln/>
+        </p:spPr>
+        <p:txBody>
+          <a:bodyPr wrap="square" lIns="0" tIns="0" rIns="0" bIns="0" rtlCol="0" anchor="t"/>
+          <a:lstStyle/>
+          <a:p>
+            <a:pPr algn="ctr" indent="0" marL="0">
+              <a:buNone/>
+            </a:pPr>
+            <a:r>
+              <a:rPr lang="en-US" sz="4600" spc="-180" kern="0" dirty="0">
+                <a:solidFill>
+                  <a:srgbClr val="942838"/>
+                </a:solidFill>
+                <a:latin typeface="Montserrat ExtraBold" pitchFamily="34" charset="0"/>
+                <a:ea typeface="Montserrat ExtraBold" pitchFamily="34" charset="-122"/>
+                <a:cs typeface="Montserrat ExtraBold" pitchFamily="34" charset="-120"/>
+              </a:rPr>
+              <a:t>78%</a:t>
+            </a:r>
+            <a:endParaRPr lang="en-US" sz="4600" dirty="0"/>
+          </a:p>
+        </p:txBody>
+      </p:sp>
+      <p:sp>
+        <p:nvSpPr>
+          <p:cNvPr id="17" name="Text 14"/>
+          <p:cNvSpPr txBox="1"/>
+          <p:nvPr/>
+        </p:nvSpPr>
+        <p:spPr>
+          <a:xfrm>
+            <a:off x="8323783" y="2907792"/>
+            <a:ext cx="2871216" cy="512064"/>
+          </a:xfrm>
+          <a:prstGeom prst="rect">
+            <a:avLst/>
+          </a:prstGeom>
+          <a:noFill/>
+          <a:ln/>
+        </p:spPr>
+        <p:txBody>
+          <a:bodyPr wrap="square" lIns="0" tIns="0" rIns="0" bIns="0" rtlCol="0" anchor="t"/>
+          <a:lstStyle/>
+          <a:p>
+            <a:pPr algn="ctr" indent="0" marL="0">
+              <a:lnSpc>
+                <a:spcPct val="120000"/>
+              </a:lnSpc>
+              <a:buNone/>
+            </a:pPr>
+            <a:r>
+              <a:rPr lang="en-US" sz="950" spc="30" kern="0" dirty="0">
+                <a:solidFill>
+                  <a:srgbClr val="6E7175"/>
+                </a:solidFill>
+                <a:latin typeface="Montserrat Medium" pitchFamily="34" charset="0"/>
+                <a:ea typeface="Montserrat Medium" pitchFamily="34" charset="-122"/>
+                <a:cs typeface="Montserrat Medium" pitchFamily="34" charset="-120"/>
+              </a:rPr>
+              <a:t>fewer than the report</a:t>
+            </a:r>
+            <a:endParaRPr lang="en-US" sz="950" dirty="0"/>
+          </a:p>
+          <a:p>
+            <a:pPr algn="ctr" indent="0" marL="0">
+              <a:lnSpc>
+                <a:spcPct val="120000"/>
+              </a:lnSpc>
+              <a:buNone/>
+            </a:pPr>
+            <a:r>
+              <a:rPr lang="en-US" sz="950" spc="30" kern="0" dirty="0">
+                <a:solidFill>
+                  <a:srgbClr val="6E7175"/>
+                </a:solidFill>
+                <a:latin typeface="Montserrat Medium" pitchFamily="34" charset="0"/>
+                <a:ea typeface="Montserrat Medium" pitchFamily="34" charset="-122"/>
+                <a:cs typeface="Montserrat Medium" pitchFamily="34" charset="-120"/>
+              </a:rPr>
+              <a:t>implied — 163 absorbed</a:t>
+            </a:r>
+            <a:endParaRPr lang="en-US" sz="950" dirty="0"/>
+          </a:p>
+        </p:txBody>
       </p:sp>
       <p:sp>
         <p:nvSpPr>
@@ -13463,387 +13644,40 @@
         </p:nvSpPr>
         <p:spPr>
           <a:xfrm>
-            <a:off x="1143000" y="3712464"/>
-            <a:ext cx="3794760" cy="256032"/>
-          </a:xfrm>
-          <a:prstGeom prst="rect">
-            <a:avLst/>
-          </a:prstGeom>
-          <a:noFill/>
-          <a:ln/>
-        </p:spPr>
-        <p:txBody>
-          <a:bodyPr wrap="square" lIns="0" tIns="0" rIns="0" bIns="0" rtlCol="0" anchor="t"/>
-          <a:lstStyle/>
-          <a:p>
-            <a:pPr indent="0" marL="0">
-              <a:buNone/>
-            </a:pPr>
-            <a:r>
-              <a:rPr lang="en-US" sz="1350" dirty="0">
-                <a:solidFill>
-                  <a:srgbClr val="2B2D30"/>
+            <a:off x="777240" y="3803904"/>
+            <a:ext cx="6400800" cy="201168"/>
+          </a:xfrm>
+          <a:prstGeom prst="rect">
+            <a:avLst/>
+          </a:prstGeom>
+          <a:noFill/>
+          <a:ln/>
+        </p:spPr>
+        <p:txBody>
+          <a:bodyPr wrap="square" lIns="0" tIns="0" rIns="0" bIns="0" rtlCol="0" anchor="t"/>
+          <a:lstStyle/>
+          <a:p>
+            <a:pPr indent="0" marL="0">
+              <a:buNone/>
+            </a:pPr>
+            <a:r>
+              <a:rPr lang="en-US" sz="850" spc="140" kern="0" dirty="0">
+                <a:solidFill>
+                  <a:srgbClr val="942838"/>
                 </a:solidFill>
                 <a:latin typeface="Montserrat SemiBold" pitchFamily="34" charset="0"/>
                 <a:ea typeface="Montserrat SemiBold" pitchFamily="34" charset="-122"/>
                 <a:cs typeface="Montserrat SemiBold" pitchFamily="34" charset="-120"/>
               </a:rPr>
-              <a:t>Kevlar</a:t>
-            </a:r>
-            <a:endParaRPr lang="en-US" sz="1350" dirty="0"/>
-          </a:p>
-        </p:txBody>
-      </p:sp>
-      <p:sp>
-        <p:nvSpPr>
-          <p:cNvPr id="19" name="Text 16"/>
-          <p:cNvSpPr txBox="1"/>
-          <p:nvPr/>
-        </p:nvSpPr>
-        <p:spPr>
-          <a:xfrm>
-            <a:off x="1143000" y="3968496"/>
-            <a:ext cx="3749040" cy="274320"/>
-          </a:xfrm>
-          <a:prstGeom prst="rect">
-            <a:avLst/>
-          </a:prstGeom>
-          <a:noFill/>
-          <a:ln/>
-        </p:spPr>
-        <p:txBody>
-          <a:bodyPr wrap="square" lIns="0" tIns="0" rIns="0" bIns="0" rtlCol="0" anchor="t"/>
-          <a:lstStyle/>
-          <a:p>
-            <a:pPr indent="0" marL="0">
-              <a:buNone/>
-            </a:pPr>
-            <a:r>
-              <a:rPr lang="en-US" sz="1100" dirty="0">
-                <a:solidFill>
-                  <a:srgbClr val="6E7175"/>
-                </a:solidFill>
-                <a:latin typeface="Montserrat" pitchFamily="34" charset="0"/>
-                <a:ea typeface="Montserrat" pitchFamily="34" charset="-122"/>
-                <a:cs typeface="Montserrat" pitchFamily="34" charset="-120"/>
-              </a:rPr>
-              <a:t>tracks which machines are exposed</a:t>
-            </a:r>
-            <a:endParaRPr lang="en-US" sz="1100" dirty="0"/>
-          </a:p>
-        </p:txBody>
-      </p:sp>
-      <p:sp>
-        <p:nvSpPr>
-          <p:cNvPr id="20" name="Shape 17"/>
-          <p:cNvSpPr/>
-          <p:nvPr/>
-        </p:nvSpPr>
-        <p:spPr>
-          <a:xfrm>
-            <a:off x="795528" y="4434840"/>
-            <a:ext cx="182880" cy="182880"/>
-          </a:xfrm>
-          <a:prstGeom prst="ellipse">
-            <a:avLst/>
-          </a:prstGeom>
-          <a:solidFill>
-            <a:srgbClr val="F6EEF0"/>
-          </a:solidFill>
-          <a:ln w="19050">
-            <a:solidFill>
-              <a:srgbClr val="942838"/>
-            </a:solidFill>
-            <a:prstDash val="solid"/>
-          </a:ln>
-        </p:spPr>
-      </p:sp>
-      <p:sp>
-        <p:nvSpPr>
-          <p:cNvPr id="21" name="Shape 18"/>
-          <p:cNvSpPr/>
-          <p:nvPr/>
-        </p:nvSpPr>
-        <p:spPr>
-          <a:xfrm>
-            <a:off x="850392" y="4489704"/>
-            <a:ext cx="73152" cy="73152"/>
-          </a:xfrm>
-          <a:prstGeom prst="ellipse">
-            <a:avLst/>
-          </a:prstGeom>
-          <a:solidFill>
-            <a:srgbClr val="942838"/>
-          </a:solidFill>
-          <a:ln/>
-        </p:spPr>
-      </p:sp>
-      <p:sp>
-        <p:nvSpPr>
-          <p:cNvPr id="22" name="Shape 19"/>
-          <p:cNvSpPr/>
-          <p:nvPr/>
-        </p:nvSpPr>
-        <p:spPr>
-          <a:xfrm>
-            <a:off x="882396" y="4636008"/>
-            <a:ext cx="10973" cy="457200"/>
-          </a:xfrm>
-          <a:prstGeom prst="rect">
-            <a:avLst/>
-          </a:prstGeom>
-          <a:solidFill>
-            <a:srgbClr val="C9C6C4"/>
-          </a:solidFill>
-          <a:ln/>
-        </p:spPr>
-      </p:sp>
-      <p:sp>
-        <p:nvSpPr>
-          <p:cNvPr id="23" name="Text 20"/>
-          <p:cNvSpPr txBox="1"/>
-          <p:nvPr/>
-        </p:nvSpPr>
-        <p:spPr>
-          <a:xfrm>
-            <a:off x="1143000" y="4370832"/>
-            <a:ext cx="3794760" cy="256032"/>
-          </a:xfrm>
-          <a:prstGeom prst="rect">
-            <a:avLst/>
-          </a:prstGeom>
-          <a:noFill/>
-          <a:ln/>
-        </p:spPr>
-        <p:txBody>
-          <a:bodyPr wrap="square" lIns="0" tIns="0" rIns="0" bIns="0" rtlCol="0" anchor="t"/>
-          <a:lstStyle/>
-          <a:p>
-            <a:pPr indent="0" marL="0">
-              <a:buNone/>
-            </a:pPr>
-            <a:r>
-              <a:rPr lang="en-US" sz="1350" dirty="0">
-                <a:solidFill>
-                  <a:srgbClr val="2B2D30"/>
-                </a:solidFill>
-                <a:latin typeface="Montserrat SemiBold" pitchFamily="34" charset="0"/>
-                <a:ea typeface="Montserrat SemiBold" pitchFamily="34" charset="-122"/>
-                <a:cs typeface="Montserrat SemiBold" pitchFamily="34" charset="-120"/>
-              </a:rPr>
-              <a:t>ServiceNow</a:t>
-            </a:r>
-            <a:endParaRPr lang="en-US" sz="1350" dirty="0"/>
-          </a:p>
-        </p:txBody>
-      </p:sp>
-      <p:sp>
-        <p:nvSpPr>
-          <p:cNvPr id="24" name="Text 21"/>
-          <p:cNvSpPr txBox="1"/>
-          <p:nvPr/>
-        </p:nvSpPr>
-        <p:spPr>
-          <a:xfrm>
-            <a:off x="1143000" y="4626864"/>
-            <a:ext cx="3749040" cy="274320"/>
-          </a:xfrm>
-          <a:prstGeom prst="rect">
-            <a:avLst/>
-          </a:prstGeom>
-          <a:noFill/>
-          <a:ln/>
-        </p:spPr>
-        <p:txBody>
-          <a:bodyPr wrap="square" lIns="0" tIns="0" rIns="0" bIns="0" rtlCol="0" anchor="t"/>
-          <a:lstStyle/>
-          <a:p>
-            <a:pPr indent="0" marL="0">
-              <a:buNone/>
-            </a:pPr>
-            <a:r>
-              <a:rPr lang="en-US" sz="1100" dirty="0">
-                <a:solidFill>
-                  <a:srgbClr val="6E7175"/>
-                </a:solidFill>
-                <a:latin typeface="Montserrat" pitchFamily="34" charset="0"/>
-                <a:ea typeface="Montserrat" pitchFamily="34" charset="-122"/>
-                <a:cs typeface="Montserrat" pitchFamily="34" charset="-120"/>
-              </a:rPr>
-              <a:t>opens the ticket</a:t>
-            </a:r>
-            <a:endParaRPr lang="en-US" sz="1100" dirty="0"/>
-          </a:p>
-        </p:txBody>
-      </p:sp>
-      <p:sp>
-        <p:nvSpPr>
-          <p:cNvPr id="25" name="Shape 22"/>
-          <p:cNvSpPr/>
-          <p:nvPr/>
-        </p:nvSpPr>
-        <p:spPr>
-          <a:xfrm>
-            <a:off x="795528" y="5093208"/>
-            <a:ext cx="182880" cy="182880"/>
-          </a:xfrm>
-          <a:prstGeom prst="ellipse">
-            <a:avLst/>
-          </a:prstGeom>
-          <a:solidFill>
-            <a:srgbClr val="F6EEF0"/>
-          </a:solidFill>
-          <a:ln w="19050">
-            <a:solidFill>
-              <a:srgbClr val="942838"/>
-            </a:solidFill>
-            <a:prstDash val="solid"/>
-          </a:ln>
-        </p:spPr>
-      </p:sp>
-      <p:sp>
-        <p:nvSpPr>
-          <p:cNvPr id="26" name="Shape 23"/>
-          <p:cNvSpPr/>
-          <p:nvPr/>
-        </p:nvSpPr>
-        <p:spPr>
-          <a:xfrm>
-            <a:off x="850392" y="5148072"/>
-            <a:ext cx="73152" cy="73152"/>
-          </a:xfrm>
-          <a:prstGeom prst="ellipse">
-            <a:avLst/>
-          </a:prstGeom>
-          <a:solidFill>
-            <a:srgbClr val="942838"/>
-          </a:solidFill>
-          <a:ln/>
-        </p:spPr>
-      </p:sp>
-      <p:sp>
-        <p:nvSpPr>
-          <p:cNvPr id="27" name="Text 24"/>
-          <p:cNvSpPr txBox="1"/>
-          <p:nvPr/>
-        </p:nvSpPr>
-        <p:spPr>
-          <a:xfrm>
-            <a:off x="1143000" y="5029200"/>
-            <a:ext cx="3794760" cy="256032"/>
-          </a:xfrm>
-          <a:prstGeom prst="rect">
-            <a:avLst/>
-          </a:prstGeom>
-          <a:noFill/>
-          <a:ln/>
-        </p:spPr>
-        <p:txBody>
-          <a:bodyPr wrap="square" lIns="0" tIns="0" rIns="0" bIns="0" rtlCol="0" anchor="t"/>
-          <a:lstStyle/>
-          <a:p>
-            <a:pPr indent="0" marL="0">
-              <a:buNone/>
-            </a:pPr>
-            <a:r>
-              <a:rPr lang="en-US" sz="1350" dirty="0">
-                <a:solidFill>
-                  <a:srgbClr val="2B2D30"/>
-                </a:solidFill>
-                <a:latin typeface="Montserrat SemiBold" pitchFamily="34" charset="0"/>
-                <a:ea typeface="Montserrat SemiBold" pitchFamily="34" charset="-122"/>
-                <a:cs typeface="Montserrat SemiBold" pitchFamily="34" charset="-120"/>
-              </a:rPr>
-              <a:t>Wiz</a:t>
-            </a:r>
-            <a:endParaRPr lang="en-US" sz="1350" dirty="0"/>
-          </a:p>
-        </p:txBody>
-      </p:sp>
-      <p:sp>
-        <p:nvSpPr>
-          <p:cNvPr id="28" name="Text 25"/>
-          <p:cNvSpPr txBox="1"/>
-          <p:nvPr/>
-        </p:nvSpPr>
-        <p:spPr>
-          <a:xfrm>
-            <a:off x="1143000" y="5285232"/>
-            <a:ext cx="3749040" cy="274320"/>
-          </a:xfrm>
-          <a:prstGeom prst="rect">
-            <a:avLst/>
-          </a:prstGeom>
-          <a:noFill/>
-          <a:ln/>
-        </p:spPr>
-        <p:txBody>
-          <a:bodyPr wrap="square" lIns="0" tIns="0" rIns="0" bIns="0" rtlCol="0" anchor="t"/>
-          <a:lstStyle/>
-          <a:p>
-            <a:pPr indent="0" marL="0">
-              <a:buNone/>
-            </a:pPr>
-            <a:r>
-              <a:rPr lang="en-US" sz="1100" dirty="0">
-                <a:solidFill>
-                  <a:srgbClr val="6E7175"/>
-                </a:solidFill>
-                <a:latin typeface="Montserrat" pitchFamily="34" charset="0"/>
-                <a:ea typeface="Montserrat" pitchFamily="34" charset="-122"/>
-                <a:cs typeface="Montserrat" pitchFamily="34" charset="-120"/>
-              </a:rPr>
-              <a:t>confirms the machine is real and reachable</a:t>
-            </a:r>
-            <a:endParaRPr lang="en-US" sz="1100" dirty="0"/>
-          </a:p>
-        </p:txBody>
-      </p:sp>
-      <p:sp>
-        <p:nvSpPr>
-          <p:cNvPr id="29" name="Text 26"/>
-          <p:cNvSpPr txBox="1"/>
-          <p:nvPr/>
-        </p:nvSpPr>
-        <p:spPr>
-          <a:xfrm>
-            <a:off x="777240" y="5632704"/>
-            <a:ext cx="4160520" cy="457200"/>
-          </a:xfrm>
-          <a:prstGeom prst="rect">
-            <a:avLst/>
-          </a:prstGeom>
-          <a:noFill/>
-          <a:ln/>
-        </p:spPr>
-        <p:txBody>
-          <a:bodyPr wrap="square" lIns="0" tIns="0" rIns="0" bIns="0" rtlCol="0" anchor="t"/>
-          <a:lstStyle/>
-          <a:p>
-            <a:pPr indent="0" marL="0">
-              <a:lnSpc>
-                <a:spcPct val="120000"/>
-              </a:lnSpc>
-              <a:buNone/>
-            </a:pPr>
-            <a:r>
-              <a:rPr lang="en-US" sz="1100" dirty="0">
-                <a:solidFill>
-                  <a:srgbClr val="942838"/>
-                </a:solidFill>
-                <a:latin typeface="Montserrat SemiBold" pitchFamily="34" charset="0"/>
-                <a:ea typeface="Montserrat SemiBold" pitchFamily="34" charset="-122"/>
-                <a:cs typeface="Montserrat SemiBold" pitchFamily="34" charset="-120"/>
-              </a:rPr>
-              <a:t>Flaw found → fix identified → ticket opened → patch confirmed, all in one place.</a:t>
-            </a:r>
-            <a:endParaRPr lang="en-US" sz="1100" dirty="0"/>
+              <a:t>EVERY SQUARE IS ONE ROW IN KEVLAR’S REPORT</a:t>
+            </a:r>
+            <a:endParaRPr lang="en-US" sz="850" dirty="0"/>
           </a:p>
         </p:txBody>
       </p:sp>
       <p:pic>
         <p:nvPicPr>
-          <p:cNvPr id="30" name="Image 1" descr="/home/user/ai/assets/gen/dashboard-mock.png">    </p:cNvPr>
+          <p:cNvPr id="19" name="Image 1" descr="/home/user/ai/assets/gen/chart-consolidation.png">    </p:cNvPr>
           <p:cNvPicPr>
             <a:picLocks noChangeAspect="1"/>
           </p:cNvPicPr>
@@ -13857,8 +13691,8 @@
         </p:blipFill>
         <p:spPr>
           <a:xfrm>
-            <a:off x="5358384" y="2103120"/>
-            <a:ext cx="6056071" cy="3499063"/>
+            <a:off x="777240" y="4096512"/>
+            <a:ext cx="10637215" cy="1221498"/>
           </a:xfrm>
           <a:prstGeom prst="rect">
             <a:avLst/>
@@ -13867,40 +13701,132 @@
       </p:pic>
       <p:sp>
         <p:nvSpPr>
-          <p:cNvPr id="31" name="Text 27"/>
-          <p:cNvSpPr txBox="1"/>
-          <p:nvPr/>
-        </p:nvSpPr>
-        <p:spPr>
-          <a:xfrm>
-            <a:off x="5358384" y="5748487"/>
-            <a:ext cx="6056071" cy="237744"/>
-          </a:xfrm>
-          <a:prstGeom prst="rect">
-            <a:avLst/>
-          </a:prstGeom>
-          <a:noFill/>
-          <a:ln/>
-        </p:spPr>
-        <p:txBody>
-          <a:bodyPr wrap="square" lIns="0" tIns="0" rIns="0" bIns="0" rtlCol="0" anchor="t"/>
-          <a:lstStyle/>
-          <a:p>
-            <a:pPr algn="ctr" indent="0" marL="0">
-              <a:buNone/>
-            </a:pPr>
-            <a:r>
-              <a:rPr lang="en-US" sz="950" spc="30" kern="0" dirty="0">
-                <a:solidFill>
-                  <a:srgbClr val="C9C6C4"/>
-                </a:solidFill>
-                <a:latin typeface="Montserrat Medium" pitchFamily="34" charset="0"/>
-                <a:ea typeface="Montserrat Medium" pitchFamily="34" charset="-122"/>
-                <a:cs typeface="Montserrat Medium" pitchFamily="34" charset="-120"/>
-              </a:rPr>
-              <a:t>Concept — not a live system</a:t>
-            </a:r>
-            <a:endParaRPr lang="en-US" sz="950" dirty="0"/>
+          <p:cNvPr id="20" name="Text 16"/>
+          <p:cNvSpPr txBox="1"/>
+          <p:nvPr/>
+        </p:nvSpPr>
+        <p:spPr>
+          <a:xfrm>
+            <a:off x="777240" y="5409450"/>
+            <a:ext cx="4572000" cy="256032"/>
+          </a:xfrm>
+          <a:prstGeom prst="rect">
+            <a:avLst/>
+          </a:prstGeom>
+          <a:noFill/>
+          <a:ln/>
+        </p:spPr>
+        <p:txBody>
+          <a:bodyPr wrap="square" lIns="0" tIns="0" rIns="0" bIns="0" rtlCol="0" anchor="t"/>
+          <a:lstStyle/>
+          <a:p>
+            <a:pPr indent="0" marL="0">
+              <a:buNone/>
+            </a:pPr>
+            <a:r>
+              <a:rPr lang="en-US" sz="1150" dirty="0">
+                <a:solidFill>
+                  <a:srgbClr val="942838"/>
+                </a:solidFill>
+                <a:latin typeface="Montserrat SemiBold" pitchFamily="34" charset="0"/>
+                <a:ea typeface="Montserrat SemiBold" pitchFamily="34" charset="-122"/>
+                <a:cs typeface="Montserrat SemiBold" pitchFamily="34" charset="-120"/>
+              </a:rPr>
+              <a:t>46 opened as tickets</a:t>
+            </a:r>
+            <a:endParaRPr lang="en-US" sz="1150" dirty="0"/>
+          </a:p>
+        </p:txBody>
+      </p:sp>
+      <p:sp>
+        <p:nvSpPr>
+          <p:cNvPr id="21" name="Text 17"/>
+          <p:cNvSpPr txBox="1"/>
+          <p:nvPr/>
+        </p:nvSpPr>
+        <p:spPr>
+          <a:xfrm>
+            <a:off x="5928055" y="5409450"/>
+            <a:ext cx="5486400" cy="256032"/>
+          </a:xfrm>
+          <a:prstGeom prst="rect">
+            <a:avLst/>
+          </a:prstGeom>
+          <a:noFill/>
+          <a:ln/>
+        </p:spPr>
+        <p:txBody>
+          <a:bodyPr wrap="square" lIns="0" tIns="0" rIns="0" bIns="0" rtlCol="0" anchor="t"/>
+          <a:lstStyle/>
+          <a:p>
+            <a:pPr algn="r" indent="0" marL="0">
+              <a:buNone/>
+            </a:pPr>
+            <a:r>
+              <a:rPr lang="en-US" sz="1150" dirty="0">
+                <a:solidFill>
+                  <a:srgbClr val="6E7175"/>
+                </a:solidFill>
+                <a:latin typeface="Montserrat SemiBold" pitchFamily="34" charset="0"/>
+                <a:ea typeface="Montserrat SemiBold" pitchFamily="34" charset="-122"/>
+                <a:cs typeface="Montserrat SemiBold" pitchFamily="34" charset="-120"/>
+              </a:rPr>
+              <a:t>163 absorbed by a higher build already being installed</a:t>
+            </a:r>
+            <a:endParaRPr lang="en-US" sz="1150" dirty="0"/>
+          </a:p>
+        </p:txBody>
+      </p:sp>
+      <p:sp>
+        <p:nvSpPr>
+          <p:cNvPr id="22" name="Text 18"/>
+          <p:cNvSpPr txBox="1"/>
+          <p:nvPr/>
+        </p:nvSpPr>
+        <p:spPr>
+          <a:xfrm>
+            <a:off x="777240" y="5852160"/>
+            <a:ext cx="10637215" cy="274320"/>
+          </a:xfrm>
+          <a:prstGeom prst="rect">
+            <a:avLst/>
+          </a:prstGeom>
+          <a:noFill/>
+          <a:ln/>
+        </p:spPr>
+        <p:txBody>
+          <a:bodyPr wrap="square" lIns="0" tIns="0" rIns="0" bIns="0" rtlCol="0" anchor="t"/>
+          <a:lstStyle/>
+          <a:p>
+            <a:pPr indent="0" marL="0">
+              <a:buNone/>
+            </a:pPr>
+            <a:r>
+              <a:rPr lang="en-US" sz="1150" dirty="0">
+                <a:solidFill>
+                  <a:srgbClr val="2B2D30"/>
+                </a:solidFill>
+                <a:latin typeface="Montserrat SemiBold" pitchFamily="34" charset="0"/>
+                <a:ea typeface="Montserrat SemiBold" pitchFamily="34" charset="-122"/>
+                <a:cs typeface="Montserrat SemiBold" pitchFamily="34" charset="-120"/>
+              </a:rPr>
+              <a:t>Zero coverage loss</a:t>
+            </a:r>
+            <a:pPr indent="0" marL="0">
+              <a:buNone/>
+            </a:pPr>
+            <a:r>
+              <a:rPr lang="en-US" sz="1150" dirty="0">
+                <a:solidFill>
+                  <a:srgbClr val="6E7175"/>
+                </a:solidFill>
+                <a:latin typeface="Montserrat" pitchFamily="34" charset="0"/>
+                <a:ea typeface="Montserrat" pitchFamily="34" charset="-122"/>
+                <a:cs typeface="Montserrat" pitchFamily="34" charset="-120"/>
+              </a:rPr>
+              <a:t>  —  verified across all 2,658 host-and-product combinations, not a sample.</a:t>
+            </a:r>
+            <a:endParaRPr lang="en-US" sz="1150" dirty="0"/>
           </a:p>
         </p:txBody>
       </p:sp>
@@ -13915,6 +13841,960 @@
 <file path=ppt/slides/slide21.xml><?xml version="1.0" encoding="utf-8"?>
 <p:sld xmlns:a="http://schemas.openxmlformats.org/drawingml/2006/main" xmlns:r="http://schemas.openxmlformats.org/officeDocument/2006/relationships" xmlns:p="http://schemas.openxmlformats.org/presentationml/2006/main">
   <p:cSld name="Slide 21">
+    <p:bg>
+      <p:bgPr>
+        <a:solidFill>
+          <a:srgbClr val="FFFFFF"/>
+        </a:solidFill>
+      </p:bgPr>
+    </p:bg>
+    <p:spTree>
+      <p:nvGrpSpPr>
+        <p:cNvPr id="1" name=""/>
+        <p:cNvGrpSpPr/>
+        <p:nvPr/>
+      </p:nvGrpSpPr>
+      <p:grpSpPr>
+        <a:xfrm>
+          <a:off x="0" y="0"/>
+          <a:ext cx="0" cy="0"/>
+          <a:chOff x="0" y="0"/>
+          <a:chExt cx="0" cy="0"/>
+        </a:xfrm>
+      </p:grpSpPr>
+      <p:pic>
+        <p:nvPicPr>
+          <p:cNvPr id="2" name="Image 0" descr="/home/user/ai/assets/gen/logo-red.png">    </p:cNvPr>
+          <p:cNvPicPr>
+            <a:picLocks noChangeAspect="1"/>
+          </p:cNvPicPr>
+          <p:nvPr/>
+        </p:nvPicPr>
+        <p:blipFill>
+          <a:blip r:embed="rId1"/>
+          <a:stretch>
+            <a:fillRect/>
+          </a:stretch>
+        </p:blipFill>
+        <p:spPr>
+          <a:xfrm>
+            <a:off x="9768535" y="457200"/>
+            <a:ext cx="1645920" cy="166053"/>
+          </a:xfrm>
+          <a:prstGeom prst="rect">
+            <a:avLst/>
+          </a:prstGeom>
+        </p:spPr>
+      </p:pic>
+      <p:sp>
+        <p:nvSpPr>
+          <p:cNvPr id="3" name="Text 0"/>
+          <p:cNvSpPr txBox="1"/>
+          <p:nvPr/>
+        </p:nvSpPr>
+        <p:spPr>
+          <a:xfrm>
+            <a:off x="777240" y="658368"/>
+            <a:ext cx="7315200" cy="219456"/>
+          </a:xfrm>
+          <a:prstGeom prst="rect">
+            <a:avLst/>
+          </a:prstGeom>
+          <a:noFill/>
+          <a:ln/>
+        </p:spPr>
+        <p:txBody>
+          <a:bodyPr wrap="square" lIns="0" tIns="0" rIns="0" bIns="0" rtlCol="0" anchor="t"/>
+          <a:lstStyle/>
+          <a:p>
+            <a:pPr indent="0" marL="0">
+              <a:buNone/>
+            </a:pPr>
+            <a:r>
+              <a:rPr lang="en-US" sz="1000" spc="220" kern="0" dirty="0">
+                <a:solidFill>
+                  <a:srgbClr val="942838"/>
+                </a:solidFill>
+                <a:latin typeface="Montserrat SemiBold" pitchFamily="34" charset="0"/>
+                <a:ea typeface="Montserrat SemiBold" pitchFamily="34" charset="-122"/>
+                <a:cs typeface="Montserrat SemiBold" pitchFamily="34" charset="-120"/>
+              </a:rPr>
+              <a:t>PROJECT 03  ·  WHAT COMES NEXT</a:t>
+            </a:r>
+            <a:endParaRPr lang="en-US" sz="1000" dirty="0"/>
+          </a:p>
+        </p:txBody>
+      </p:sp>
+      <p:sp>
+        <p:nvSpPr>
+          <p:cNvPr id="4" name="Text 1"/>
+          <p:cNvSpPr txBox="1"/>
+          <p:nvPr/>
+        </p:nvSpPr>
+        <p:spPr>
+          <a:xfrm>
+            <a:off x="777240" y="932688"/>
+            <a:ext cx="10515600" cy="868680"/>
+          </a:xfrm>
+          <a:prstGeom prst="rect">
+            <a:avLst/>
+          </a:prstGeom>
+          <a:noFill/>
+          <a:ln/>
+        </p:spPr>
+        <p:txBody>
+          <a:bodyPr wrap="square" lIns="0" tIns="0" rIns="0" bIns="0" rtlCol="0" anchor="t"/>
+          <a:lstStyle/>
+          <a:p>
+            <a:pPr indent="0" marL="0">
+              <a:lnSpc>
+                <a:spcPct val="98000"/>
+              </a:lnSpc>
+              <a:buNone/>
+            </a:pPr>
+            <a:r>
+              <a:rPr lang="en-US" sz="2900" spc="-50" kern="0" dirty="0">
+                <a:solidFill>
+                  <a:srgbClr val="2B2D30"/>
+                </a:solidFill>
+                <a:latin typeface="Montserrat ExtraBold" pitchFamily="34" charset="0"/>
+                <a:ea typeface="Montserrat ExtraBold" pitchFamily="34" charset="-122"/>
+                <a:cs typeface="Montserrat ExtraBold" pitchFamily="34" charset="-120"/>
+              </a:rPr>
+              <a:t>Four systems, one screen</a:t>
+            </a:r>
+            <a:endParaRPr lang="en-US" sz="2900" dirty="0"/>
+          </a:p>
+        </p:txBody>
+      </p:sp>
+      <p:sp>
+        <p:nvSpPr>
+          <p:cNvPr id="5" name="Shape 2"/>
+          <p:cNvSpPr/>
+          <p:nvPr/>
+        </p:nvSpPr>
+        <p:spPr>
+          <a:xfrm>
+            <a:off x="777240" y="1700784"/>
+            <a:ext cx="566928" cy="50292"/>
+          </a:xfrm>
+          <a:prstGeom prst="rect">
+            <a:avLst/>
+          </a:prstGeom>
+          <a:solidFill>
+            <a:srgbClr val="942838"/>
+          </a:solidFill>
+          <a:ln/>
+        </p:spPr>
+      </p:sp>
+      <p:sp>
+        <p:nvSpPr>
+          <p:cNvPr id="6" name="Shape 3"/>
+          <p:cNvSpPr/>
+          <p:nvPr/>
+        </p:nvSpPr>
+        <p:spPr>
+          <a:xfrm>
+            <a:off x="777240" y="6181344"/>
+            <a:ext cx="10637215" cy="10973"/>
+          </a:xfrm>
+          <a:prstGeom prst="rect">
+            <a:avLst/>
+          </a:prstGeom>
+          <a:solidFill>
+            <a:srgbClr val="E6E4E2"/>
+          </a:solidFill>
+          <a:ln/>
+        </p:spPr>
+      </p:sp>
+      <p:sp>
+        <p:nvSpPr>
+          <p:cNvPr id="7" name="Text 4"/>
+          <p:cNvSpPr txBox="1"/>
+          <p:nvPr/>
+        </p:nvSpPr>
+        <p:spPr>
+          <a:xfrm>
+            <a:off x="777240" y="6327648"/>
+            <a:ext cx="7315200" cy="201168"/>
+          </a:xfrm>
+          <a:prstGeom prst="rect">
+            <a:avLst/>
+          </a:prstGeom>
+          <a:noFill/>
+          <a:ln/>
+        </p:spPr>
+        <p:txBody>
+          <a:bodyPr wrap="square" lIns="0" tIns="0" rIns="0" bIns="0" rtlCol="0" anchor="t"/>
+          <a:lstStyle/>
+          <a:p>
+            <a:pPr indent="0" marL="0">
+              <a:buNone/>
+            </a:pPr>
+            <a:r>
+              <a:rPr lang="en-US" sz="850" spc="140" kern="0" dirty="0">
+                <a:solidFill>
+                  <a:srgbClr val="6E7175"/>
+                </a:solidFill>
+                <a:latin typeface="Montserrat SemiBold" pitchFamily="34" charset="0"/>
+                <a:ea typeface="Montserrat SemiBold" pitchFamily="34" charset="-122"/>
+                <a:cs typeface="Montserrat SemiBold" pitchFamily="34" charset="-120"/>
+              </a:rPr>
+              <a:t>CVE-TO-PATCH AUTOMATION</a:t>
+            </a:r>
+            <a:endParaRPr lang="en-US" sz="850" dirty="0"/>
+          </a:p>
+        </p:txBody>
+      </p:sp>
+      <p:sp>
+        <p:nvSpPr>
+          <p:cNvPr id="8" name="Text 5"/>
+          <p:cNvSpPr txBox="1"/>
+          <p:nvPr/>
+        </p:nvSpPr>
+        <p:spPr>
+          <a:xfrm>
+            <a:off x="10317175" y="6327648"/>
+            <a:ext cx="1097280" cy="201168"/>
+          </a:xfrm>
+          <a:prstGeom prst="rect">
+            <a:avLst/>
+          </a:prstGeom>
+          <a:noFill/>
+          <a:ln/>
+        </p:spPr>
+        <p:txBody>
+          <a:bodyPr wrap="square" lIns="0" tIns="0" rIns="0" bIns="0" rtlCol="0" anchor="t"/>
+          <a:lstStyle/>
+          <a:p>
+            <a:pPr algn="r" indent="0" marL="0">
+              <a:buNone/>
+            </a:pPr>
+            <a:r>
+              <a:rPr lang="en-US" sz="850" spc="140" kern="0" dirty="0">
+                <a:solidFill>
+                  <a:srgbClr val="6E7175"/>
+                </a:solidFill>
+                <a:latin typeface="Montserrat SemiBold" pitchFamily="34" charset="0"/>
+                <a:ea typeface="Montserrat SemiBold" pitchFamily="34" charset="-122"/>
+                <a:cs typeface="Montserrat SemiBold" pitchFamily="34" charset="-120"/>
+              </a:rPr>
+              <a:t>21</a:t>
+            </a:r>
+            <a:endParaRPr lang="en-US" sz="850" dirty="0"/>
+          </a:p>
+        </p:txBody>
+      </p:sp>
+      <p:sp>
+        <p:nvSpPr>
+          <p:cNvPr id="9" name="Text 6"/>
+          <p:cNvSpPr txBox="1"/>
+          <p:nvPr/>
+        </p:nvSpPr>
+        <p:spPr>
+          <a:xfrm>
+            <a:off x="777240" y="2011680"/>
+            <a:ext cx="4160520" cy="914400"/>
+          </a:xfrm>
+          <a:prstGeom prst="rect">
+            <a:avLst/>
+          </a:prstGeom>
+          <a:noFill/>
+          <a:ln/>
+        </p:spPr>
+        <p:txBody>
+          <a:bodyPr wrap="square" lIns="0" tIns="0" rIns="0" bIns="0" rtlCol="0" anchor="t"/>
+          <a:lstStyle/>
+          <a:p>
+            <a:pPr indent="0" marL="0">
+              <a:lnSpc>
+                <a:spcPct val="128000"/>
+              </a:lnSpc>
+              <a:buNone/>
+            </a:pPr>
+            <a:r>
+              <a:rPr lang="en-US" sz="1250" dirty="0">
+                <a:solidFill>
+                  <a:srgbClr val="6E7175"/>
+                </a:solidFill>
+                <a:latin typeface="Montserrat" pitchFamily="34" charset="0"/>
+                <a:ea typeface="Montserrat" pitchFamily="34" charset="-122"/>
+                <a:cs typeface="Montserrat" pitchFamily="34" charset="-120"/>
+              </a:rPr>
+              <a:t>Today these four systems each hold one piece of the story, and someone has to stitch them together by hand. The next step is a single view where the whole path is visible at once.</a:t>
+            </a:r>
+            <a:endParaRPr lang="en-US" sz="1250" dirty="0"/>
+          </a:p>
+        </p:txBody>
+      </p:sp>
+      <p:sp>
+        <p:nvSpPr>
+          <p:cNvPr id="10" name="Shape 7"/>
+          <p:cNvSpPr/>
+          <p:nvPr/>
+        </p:nvSpPr>
+        <p:spPr>
+          <a:xfrm>
+            <a:off x="795528" y="3118104"/>
+            <a:ext cx="182880" cy="182880"/>
+          </a:xfrm>
+          <a:prstGeom prst="ellipse">
+            <a:avLst/>
+          </a:prstGeom>
+          <a:solidFill>
+            <a:srgbClr val="F6EEF0"/>
+          </a:solidFill>
+          <a:ln w="19050">
+            <a:solidFill>
+              <a:srgbClr val="942838"/>
+            </a:solidFill>
+            <a:prstDash val="solid"/>
+          </a:ln>
+        </p:spPr>
+      </p:sp>
+      <p:sp>
+        <p:nvSpPr>
+          <p:cNvPr id="11" name="Shape 8"/>
+          <p:cNvSpPr/>
+          <p:nvPr/>
+        </p:nvSpPr>
+        <p:spPr>
+          <a:xfrm>
+            <a:off x="850392" y="3172968"/>
+            <a:ext cx="73152" cy="73152"/>
+          </a:xfrm>
+          <a:prstGeom prst="ellipse">
+            <a:avLst/>
+          </a:prstGeom>
+          <a:solidFill>
+            <a:srgbClr val="942838"/>
+          </a:solidFill>
+          <a:ln/>
+        </p:spPr>
+      </p:sp>
+      <p:sp>
+        <p:nvSpPr>
+          <p:cNvPr id="12" name="Shape 9"/>
+          <p:cNvSpPr/>
+          <p:nvPr/>
+        </p:nvSpPr>
+        <p:spPr>
+          <a:xfrm>
+            <a:off x="882396" y="3319272"/>
+            <a:ext cx="10973" cy="457200"/>
+          </a:xfrm>
+          <a:prstGeom prst="rect">
+            <a:avLst/>
+          </a:prstGeom>
+          <a:solidFill>
+            <a:srgbClr val="C9C6C4"/>
+          </a:solidFill>
+          <a:ln/>
+        </p:spPr>
+      </p:sp>
+      <p:sp>
+        <p:nvSpPr>
+          <p:cNvPr id="13" name="Text 10"/>
+          <p:cNvSpPr txBox="1"/>
+          <p:nvPr/>
+        </p:nvSpPr>
+        <p:spPr>
+          <a:xfrm>
+            <a:off x="1143000" y="3054096"/>
+            <a:ext cx="3794760" cy="256032"/>
+          </a:xfrm>
+          <a:prstGeom prst="rect">
+            <a:avLst/>
+          </a:prstGeom>
+          <a:noFill/>
+          <a:ln/>
+        </p:spPr>
+        <p:txBody>
+          <a:bodyPr wrap="square" lIns="0" tIns="0" rIns="0" bIns="0" rtlCol="0" anchor="t"/>
+          <a:lstStyle/>
+          <a:p>
+            <a:pPr indent="0" marL="0">
+              <a:buNone/>
+            </a:pPr>
+            <a:r>
+              <a:rPr lang="en-US" sz="1350" dirty="0">
+                <a:solidFill>
+                  <a:srgbClr val="2B2D30"/>
+                </a:solidFill>
+                <a:latin typeface="Montserrat SemiBold" pitchFamily="34" charset="0"/>
+                <a:ea typeface="Montserrat SemiBold" pitchFamily="34" charset="-122"/>
+                <a:cs typeface="Montserrat SemiBold" pitchFamily="34" charset="-120"/>
+              </a:rPr>
+              <a:t>Tenable</a:t>
+            </a:r>
+            <a:endParaRPr lang="en-US" sz="1350" dirty="0"/>
+          </a:p>
+        </p:txBody>
+      </p:sp>
+      <p:sp>
+        <p:nvSpPr>
+          <p:cNvPr id="14" name="Text 11"/>
+          <p:cNvSpPr txBox="1"/>
+          <p:nvPr/>
+        </p:nvSpPr>
+        <p:spPr>
+          <a:xfrm>
+            <a:off x="1143000" y="3310128"/>
+            <a:ext cx="3749040" cy="274320"/>
+          </a:xfrm>
+          <a:prstGeom prst="rect">
+            <a:avLst/>
+          </a:prstGeom>
+          <a:noFill/>
+          <a:ln/>
+        </p:spPr>
+        <p:txBody>
+          <a:bodyPr wrap="square" lIns="0" tIns="0" rIns="0" bIns="0" rtlCol="0" anchor="t"/>
+          <a:lstStyle/>
+          <a:p>
+            <a:pPr indent="0" marL="0">
+              <a:buNone/>
+            </a:pPr>
+            <a:r>
+              <a:rPr lang="en-US" sz="1100" dirty="0">
+                <a:solidFill>
+                  <a:srgbClr val="6E7175"/>
+                </a:solidFill>
+                <a:latin typeface="Montserrat" pitchFamily="34" charset="0"/>
+                <a:ea typeface="Montserrat" pitchFamily="34" charset="-122"/>
+                <a:cs typeface="Montserrat" pitchFamily="34" charset="-120"/>
+              </a:rPr>
+              <a:t>finds the flaw</a:t>
+            </a:r>
+            <a:endParaRPr lang="en-US" sz="1100" dirty="0"/>
+          </a:p>
+        </p:txBody>
+      </p:sp>
+      <p:sp>
+        <p:nvSpPr>
+          <p:cNvPr id="15" name="Shape 12"/>
+          <p:cNvSpPr/>
+          <p:nvPr/>
+        </p:nvSpPr>
+        <p:spPr>
+          <a:xfrm>
+            <a:off x="795528" y="3776472"/>
+            <a:ext cx="182880" cy="182880"/>
+          </a:xfrm>
+          <a:prstGeom prst="ellipse">
+            <a:avLst/>
+          </a:prstGeom>
+          <a:solidFill>
+            <a:srgbClr val="F6EEF0"/>
+          </a:solidFill>
+          <a:ln w="19050">
+            <a:solidFill>
+              <a:srgbClr val="942838"/>
+            </a:solidFill>
+            <a:prstDash val="solid"/>
+          </a:ln>
+        </p:spPr>
+      </p:sp>
+      <p:sp>
+        <p:nvSpPr>
+          <p:cNvPr id="16" name="Shape 13"/>
+          <p:cNvSpPr/>
+          <p:nvPr/>
+        </p:nvSpPr>
+        <p:spPr>
+          <a:xfrm>
+            <a:off x="850392" y="3831336"/>
+            <a:ext cx="73152" cy="73152"/>
+          </a:xfrm>
+          <a:prstGeom prst="ellipse">
+            <a:avLst/>
+          </a:prstGeom>
+          <a:solidFill>
+            <a:srgbClr val="942838"/>
+          </a:solidFill>
+          <a:ln/>
+        </p:spPr>
+      </p:sp>
+      <p:sp>
+        <p:nvSpPr>
+          <p:cNvPr id="17" name="Shape 14"/>
+          <p:cNvSpPr/>
+          <p:nvPr/>
+        </p:nvSpPr>
+        <p:spPr>
+          <a:xfrm>
+            <a:off x="882396" y="3977640"/>
+            <a:ext cx="10973" cy="457200"/>
+          </a:xfrm>
+          <a:prstGeom prst="rect">
+            <a:avLst/>
+          </a:prstGeom>
+          <a:solidFill>
+            <a:srgbClr val="C9C6C4"/>
+          </a:solidFill>
+          <a:ln/>
+        </p:spPr>
+      </p:sp>
+      <p:sp>
+        <p:nvSpPr>
+          <p:cNvPr id="18" name="Text 15"/>
+          <p:cNvSpPr txBox="1"/>
+          <p:nvPr/>
+        </p:nvSpPr>
+        <p:spPr>
+          <a:xfrm>
+            <a:off x="1143000" y="3712464"/>
+            <a:ext cx="3794760" cy="256032"/>
+          </a:xfrm>
+          <a:prstGeom prst="rect">
+            <a:avLst/>
+          </a:prstGeom>
+          <a:noFill/>
+          <a:ln/>
+        </p:spPr>
+        <p:txBody>
+          <a:bodyPr wrap="square" lIns="0" tIns="0" rIns="0" bIns="0" rtlCol="0" anchor="t"/>
+          <a:lstStyle/>
+          <a:p>
+            <a:pPr indent="0" marL="0">
+              <a:buNone/>
+            </a:pPr>
+            <a:r>
+              <a:rPr lang="en-US" sz="1350" dirty="0">
+                <a:solidFill>
+                  <a:srgbClr val="2B2D30"/>
+                </a:solidFill>
+                <a:latin typeface="Montserrat SemiBold" pitchFamily="34" charset="0"/>
+                <a:ea typeface="Montserrat SemiBold" pitchFamily="34" charset="-122"/>
+                <a:cs typeface="Montserrat SemiBold" pitchFamily="34" charset="-120"/>
+              </a:rPr>
+              <a:t>Kevlar</a:t>
+            </a:r>
+            <a:endParaRPr lang="en-US" sz="1350" dirty="0"/>
+          </a:p>
+        </p:txBody>
+      </p:sp>
+      <p:sp>
+        <p:nvSpPr>
+          <p:cNvPr id="19" name="Text 16"/>
+          <p:cNvSpPr txBox="1"/>
+          <p:nvPr/>
+        </p:nvSpPr>
+        <p:spPr>
+          <a:xfrm>
+            <a:off x="1143000" y="3968496"/>
+            <a:ext cx="3749040" cy="274320"/>
+          </a:xfrm>
+          <a:prstGeom prst="rect">
+            <a:avLst/>
+          </a:prstGeom>
+          <a:noFill/>
+          <a:ln/>
+        </p:spPr>
+        <p:txBody>
+          <a:bodyPr wrap="square" lIns="0" tIns="0" rIns="0" bIns="0" rtlCol="0" anchor="t"/>
+          <a:lstStyle/>
+          <a:p>
+            <a:pPr indent="0" marL="0">
+              <a:buNone/>
+            </a:pPr>
+            <a:r>
+              <a:rPr lang="en-US" sz="1100" dirty="0">
+                <a:solidFill>
+                  <a:srgbClr val="6E7175"/>
+                </a:solidFill>
+                <a:latin typeface="Montserrat" pitchFamily="34" charset="0"/>
+                <a:ea typeface="Montserrat" pitchFamily="34" charset="-122"/>
+                <a:cs typeface="Montserrat" pitchFamily="34" charset="-120"/>
+              </a:rPr>
+              <a:t>tracks which machines are exposed</a:t>
+            </a:r>
+            <a:endParaRPr lang="en-US" sz="1100" dirty="0"/>
+          </a:p>
+        </p:txBody>
+      </p:sp>
+      <p:sp>
+        <p:nvSpPr>
+          <p:cNvPr id="20" name="Shape 17"/>
+          <p:cNvSpPr/>
+          <p:nvPr/>
+        </p:nvSpPr>
+        <p:spPr>
+          <a:xfrm>
+            <a:off x="795528" y="4434840"/>
+            <a:ext cx="182880" cy="182880"/>
+          </a:xfrm>
+          <a:prstGeom prst="ellipse">
+            <a:avLst/>
+          </a:prstGeom>
+          <a:solidFill>
+            <a:srgbClr val="F6EEF0"/>
+          </a:solidFill>
+          <a:ln w="19050">
+            <a:solidFill>
+              <a:srgbClr val="942838"/>
+            </a:solidFill>
+            <a:prstDash val="solid"/>
+          </a:ln>
+        </p:spPr>
+      </p:sp>
+      <p:sp>
+        <p:nvSpPr>
+          <p:cNvPr id="21" name="Shape 18"/>
+          <p:cNvSpPr/>
+          <p:nvPr/>
+        </p:nvSpPr>
+        <p:spPr>
+          <a:xfrm>
+            <a:off x="850392" y="4489704"/>
+            <a:ext cx="73152" cy="73152"/>
+          </a:xfrm>
+          <a:prstGeom prst="ellipse">
+            <a:avLst/>
+          </a:prstGeom>
+          <a:solidFill>
+            <a:srgbClr val="942838"/>
+          </a:solidFill>
+          <a:ln/>
+        </p:spPr>
+      </p:sp>
+      <p:sp>
+        <p:nvSpPr>
+          <p:cNvPr id="22" name="Shape 19"/>
+          <p:cNvSpPr/>
+          <p:nvPr/>
+        </p:nvSpPr>
+        <p:spPr>
+          <a:xfrm>
+            <a:off x="882396" y="4636008"/>
+            <a:ext cx="10973" cy="457200"/>
+          </a:xfrm>
+          <a:prstGeom prst="rect">
+            <a:avLst/>
+          </a:prstGeom>
+          <a:solidFill>
+            <a:srgbClr val="C9C6C4"/>
+          </a:solidFill>
+          <a:ln/>
+        </p:spPr>
+      </p:sp>
+      <p:sp>
+        <p:nvSpPr>
+          <p:cNvPr id="23" name="Text 20"/>
+          <p:cNvSpPr txBox="1"/>
+          <p:nvPr/>
+        </p:nvSpPr>
+        <p:spPr>
+          <a:xfrm>
+            <a:off x="1143000" y="4370832"/>
+            <a:ext cx="3794760" cy="256032"/>
+          </a:xfrm>
+          <a:prstGeom prst="rect">
+            <a:avLst/>
+          </a:prstGeom>
+          <a:noFill/>
+          <a:ln/>
+        </p:spPr>
+        <p:txBody>
+          <a:bodyPr wrap="square" lIns="0" tIns="0" rIns="0" bIns="0" rtlCol="0" anchor="t"/>
+          <a:lstStyle/>
+          <a:p>
+            <a:pPr indent="0" marL="0">
+              <a:buNone/>
+            </a:pPr>
+            <a:r>
+              <a:rPr lang="en-US" sz="1350" dirty="0">
+                <a:solidFill>
+                  <a:srgbClr val="2B2D30"/>
+                </a:solidFill>
+                <a:latin typeface="Montserrat SemiBold" pitchFamily="34" charset="0"/>
+                <a:ea typeface="Montserrat SemiBold" pitchFamily="34" charset="-122"/>
+                <a:cs typeface="Montserrat SemiBold" pitchFamily="34" charset="-120"/>
+              </a:rPr>
+              <a:t>Jira</a:t>
+            </a:r>
+            <a:endParaRPr lang="en-US" sz="1350" dirty="0"/>
+          </a:p>
+        </p:txBody>
+      </p:sp>
+      <p:sp>
+        <p:nvSpPr>
+          <p:cNvPr id="24" name="Text 21"/>
+          <p:cNvSpPr txBox="1"/>
+          <p:nvPr/>
+        </p:nvSpPr>
+        <p:spPr>
+          <a:xfrm>
+            <a:off x="1143000" y="4626864"/>
+            <a:ext cx="3749040" cy="274320"/>
+          </a:xfrm>
+          <a:prstGeom prst="rect">
+            <a:avLst/>
+          </a:prstGeom>
+          <a:noFill/>
+          <a:ln/>
+        </p:spPr>
+        <p:txBody>
+          <a:bodyPr wrap="square" lIns="0" tIns="0" rIns="0" bIns="0" rtlCol="0" anchor="t"/>
+          <a:lstStyle/>
+          <a:p>
+            <a:pPr indent="0" marL="0">
+              <a:buNone/>
+            </a:pPr>
+            <a:r>
+              <a:rPr lang="en-US" sz="1100" dirty="0">
+                <a:solidFill>
+                  <a:srgbClr val="6E7175"/>
+                </a:solidFill>
+                <a:latin typeface="Montserrat" pitchFamily="34" charset="0"/>
+                <a:ea typeface="Montserrat" pitchFamily="34" charset="-122"/>
+                <a:cs typeface="Montserrat" pitchFamily="34" charset="-120"/>
+              </a:rPr>
+              <a:t>opens the ticket</a:t>
+            </a:r>
+            <a:endParaRPr lang="en-US" sz="1100" dirty="0"/>
+          </a:p>
+        </p:txBody>
+      </p:sp>
+      <p:sp>
+        <p:nvSpPr>
+          <p:cNvPr id="25" name="Shape 22"/>
+          <p:cNvSpPr/>
+          <p:nvPr/>
+        </p:nvSpPr>
+        <p:spPr>
+          <a:xfrm>
+            <a:off x="795528" y="5093208"/>
+            <a:ext cx="182880" cy="182880"/>
+          </a:xfrm>
+          <a:prstGeom prst="ellipse">
+            <a:avLst/>
+          </a:prstGeom>
+          <a:solidFill>
+            <a:srgbClr val="F6EEF0"/>
+          </a:solidFill>
+          <a:ln w="19050">
+            <a:solidFill>
+              <a:srgbClr val="942838"/>
+            </a:solidFill>
+            <a:prstDash val="solid"/>
+          </a:ln>
+        </p:spPr>
+      </p:sp>
+      <p:sp>
+        <p:nvSpPr>
+          <p:cNvPr id="26" name="Shape 23"/>
+          <p:cNvSpPr/>
+          <p:nvPr/>
+        </p:nvSpPr>
+        <p:spPr>
+          <a:xfrm>
+            <a:off x="850392" y="5148072"/>
+            <a:ext cx="73152" cy="73152"/>
+          </a:xfrm>
+          <a:prstGeom prst="ellipse">
+            <a:avLst/>
+          </a:prstGeom>
+          <a:solidFill>
+            <a:srgbClr val="942838"/>
+          </a:solidFill>
+          <a:ln/>
+        </p:spPr>
+      </p:sp>
+      <p:sp>
+        <p:nvSpPr>
+          <p:cNvPr id="27" name="Text 24"/>
+          <p:cNvSpPr txBox="1"/>
+          <p:nvPr/>
+        </p:nvSpPr>
+        <p:spPr>
+          <a:xfrm>
+            <a:off x="1143000" y="5029200"/>
+            <a:ext cx="3794760" cy="256032"/>
+          </a:xfrm>
+          <a:prstGeom prst="rect">
+            <a:avLst/>
+          </a:prstGeom>
+          <a:noFill/>
+          <a:ln/>
+        </p:spPr>
+        <p:txBody>
+          <a:bodyPr wrap="square" lIns="0" tIns="0" rIns="0" bIns="0" rtlCol="0" anchor="t"/>
+          <a:lstStyle/>
+          <a:p>
+            <a:pPr indent="0" marL="0">
+              <a:buNone/>
+            </a:pPr>
+            <a:r>
+              <a:rPr lang="en-US" sz="1350" dirty="0">
+                <a:solidFill>
+                  <a:srgbClr val="2B2D30"/>
+                </a:solidFill>
+                <a:latin typeface="Montserrat SemiBold" pitchFamily="34" charset="0"/>
+                <a:ea typeface="Montserrat SemiBold" pitchFamily="34" charset="-122"/>
+                <a:cs typeface="Montserrat SemiBold" pitchFamily="34" charset="-120"/>
+              </a:rPr>
+              <a:t>Wiz</a:t>
+            </a:r>
+            <a:endParaRPr lang="en-US" sz="1350" dirty="0"/>
+          </a:p>
+        </p:txBody>
+      </p:sp>
+      <p:sp>
+        <p:nvSpPr>
+          <p:cNvPr id="28" name="Text 25"/>
+          <p:cNvSpPr txBox="1"/>
+          <p:nvPr/>
+        </p:nvSpPr>
+        <p:spPr>
+          <a:xfrm>
+            <a:off x="1143000" y="5285232"/>
+            <a:ext cx="3749040" cy="274320"/>
+          </a:xfrm>
+          <a:prstGeom prst="rect">
+            <a:avLst/>
+          </a:prstGeom>
+          <a:noFill/>
+          <a:ln/>
+        </p:spPr>
+        <p:txBody>
+          <a:bodyPr wrap="square" lIns="0" tIns="0" rIns="0" bIns="0" rtlCol="0" anchor="t"/>
+          <a:lstStyle/>
+          <a:p>
+            <a:pPr indent="0" marL="0">
+              <a:buNone/>
+            </a:pPr>
+            <a:r>
+              <a:rPr lang="en-US" sz="1100" dirty="0">
+                <a:solidFill>
+                  <a:srgbClr val="6E7175"/>
+                </a:solidFill>
+                <a:latin typeface="Montserrat" pitchFamily="34" charset="0"/>
+                <a:ea typeface="Montserrat" pitchFamily="34" charset="-122"/>
+                <a:cs typeface="Montserrat" pitchFamily="34" charset="-120"/>
+              </a:rPr>
+              <a:t>confirms the machine is real and reachable</a:t>
+            </a:r>
+            <a:endParaRPr lang="en-US" sz="1100" dirty="0"/>
+          </a:p>
+        </p:txBody>
+      </p:sp>
+      <p:sp>
+        <p:nvSpPr>
+          <p:cNvPr id="29" name="Text 26"/>
+          <p:cNvSpPr txBox="1"/>
+          <p:nvPr/>
+        </p:nvSpPr>
+        <p:spPr>
+          <a:xfrm>
+            <a:off x="777240" y="5632704"/>
+            <a:ext cx="4160520" cy="457200"/>
+          </a:xfrm>
+          <a:prstGeom prst="rect">
+            <a:avLst/>
+          </a:prstGeom>
+          <a:noFill/>
+          <a:ln/>
+        </p:spPr>
+        <p:txBody>
+          <a:bodyPr wrap="square" lIns="0" tIns="0" rIns="0" bIns="0" rtlCol="0" anchor="t"/>
+          <a:lstStyle/>
+          <a:p>
+            <a:pPr indent="0" marL="0">
+              <a:lnSpc>
+                <a:spcPct val="120000"/>
+              </a:lnSpc>
+              <a:buNone/>
+            </a:pPr>
+            <a:r>
+              <a:rPr lang="en-US" sz="1100" dirty="0">
+                <a:solidFill>
+                  <a:srgbClr val="942838"/>
+                </a:solidFill>
+                <a:latin typeface="Montserrat SemiBold" pitchFamily="34" charset="0"/>
+                <a:ea typeface="Montserrat SemiBold" pitchFamily="34" charset="-122"/>
+                <a:cs typeface="Montserrat SemiBold" pitchFamily="34" charset="-120"/>
+              </a:rPr>
+              <a:t>Flaw found → fix identified → ticket opened → patch confirmed, all in one place.</a:t>
+            </a:r>
+            <a:endParaRPr lang="en-US" sz="1100" dirty="0"/>
+          </a:p>
+        </p:txBody>
+      </p:sp>
+      <p:pic>
+        <p:nvPicPr>
+          <p:cNvPr id="30" name="Image 1" descr="/home/user/ai/assets/gen/dashboard-mock.png">    </p:cNvPr>
+          <p:cNvPicPr>
+            <a:picLocks noChangeAspect="1"/>
+          </p:cNvPicPr>
+          <p:nvPr/>
+        </p:nvPicPr>
+        <p:blipFill>
+          <a:blip r:embed="rId2"/>
+          <a:stretch>
+            <a:fillRect/>
+          </a:stretch>
+        </p:blipFill>
+        <p:spPr>
+          <a:xfrm>
+            <a:off x="5358384" y="2103120"/>
+            <a:ext cx="6056071" cy="3499063"/>
+          </a:xfrm>
+          <a:prstGeom prst="rect">
+            <a:avLst/>
+          </a:prstGeom>
+        </p:spPr>
+      </p:pic>
+      <p:sp>
+        <p:nvSpPr>
+          <p:cNvPr id="31" name="Text 27"/>
+          <p:cNvSpPr txBox="1"/>
+          <p:nvPr/>
+        </p:nvSpPr>
+        <p:spPr>
+          <a:xfrm>
+            <a:off x="5358384" y="5748487"/>
+            <a:ext cx="6056071" cy="237744"/>
+          </a:xfrm>
+          <a:prstGeom prst="rect">
+            <a:avLst/>
+          </a:prstGeom>
+          <a:noFill/>
+          <a:ln/>
+        </p:spPr>
+        <p:txBody>
+          <a:bodyPr wrap="square" lIns="0" tIns="0" rIns="0" bIns="0" rtlCol="0" anchor="t"/>
+          <a:lstStyle/>
+          <a:p>
+            <a:pPr algn="ctr" indent="0" marL="0">
+              <a:buNone/>
+            </a:pPr>
+            <a:r>
+              <a:rPr lang="en-US" sz="950" spc="30" kern="0" dirty="0">
+                <a:solidFill>
+                  <a:srgbClr val="C9C6C4"/>
+                </a:solidFill>
+                <a:latin typeface="Montserrat Medium" pitchFamily="34" charset="0"/>
+                <a:ea typeface="Montserrat Medium" pitchFamily="34" charset="-122"/>
+                <a:cs typeface="Montserrat Medium" pitchFamily="34" charset="-120"/>
+              </a:rPr>
+              <a:t>Concept — not a live system</a:t>
+            </a:r>
+            <a:endParaRPr lang="en-US" sz="950" dirty="0"/>
+          </a:p>
+        </p:txBody>
+      </p:sp>
+    </p:spTree>
+  </p:cSld>
+  <p:clrMapOvr>
+    <a:masterClrMapping/>
+  </p:clrMapOvr>
+</p:sld>
+</file>
+
+<file path=ppt/slides/slide22.xml><?xml version="1.0" encoding="utf-8"?>
+<p:sld xmlns:a="http://schemas.openxmlformats.org/drawingml/2006/main" xmlns:r="http://schemas.openxmlformats.org/officeDocument/2006/relationships" xmlns:p="http://schemas.openxmlformats.org/presentationml/2006/main">
+  <p:cSld name="Slide 22">
     <p:spTree>
       <p:nvGrpSpPr>
         <p:cNvPr id="1" name=""/>
@@ -14506,7 +15386,7 @@
                 <a:ea typeface="Montserrat" pitchFamily="34" charset="-122"/>
                 <a:cs typeface="Montserrat" pitchFamily="34" charset="-120"/>
               </a:rPr>
-              <a:t>Every number in this deck was independently checked before I put it on a slide.</a:t>
+              <a:t>Every number here is either measured and independently checked, or clearly labelled as an estimate.</a:t>
             </a:r>
             <a:endParaRPr lang="en-US" sz="1100" dirty="0"/>
           </a:p>
@@ -14792,7 +15672,7 @@
                 <a:ea typeface="Montserrat SemiBold" pitchFamily="34" charset="-122"/>
                 <a:cs typeface="Montserrat SemiBold" pitchFamily="34" charset="-120"/>
               </a:rPr>
-              <a:t>21</a:t>
+              <a:t>22</a:t>
             </a:r>
             <a:endParaRPr lang="en-US" sz="850" dirty="0"/>
           </a:p>
@@ -15015,7 +15895,7 @@
                 <a:ea typeface="Montserrat Medium" pitchFamily="34" charset="-122"/>
                 <a:cs typeface="Montserrat Medium" pitchFamily="34" charset="-120"/>
               </a:rPr>
-              <a:t>Security Analyst Intern</a:t>
+              <a:t>Information Security Analyst Intern</a:t>
             </a:r>
             <a:endParaRPr lang="en-US" sz="950" dirty="0"/>
           </a:p>
@@ -15135,7 +16015,7 @@
                 <a:ea typeface="Montserrat" pitchFamily="34" charset="-122"/>
                 <a:cs typeface="Montserrat" pitchFamily="34" charset="-120"/>
               </a:rPr>
-              <a:t>Security Analyst Intern — Information Security</a:t>
+              <a:t>Information Security Analyst Intern</a:t>
             </a:r>
             <a:endParaRPr lang="en-US" sz="1250" dirty="0"/>
           </a:p>

--- a/out/Internship_Exit_Presentation_Stewart.pptx
+++ b/out/Internship_Exit_Presentation_Stewart.pptx
@@ -14665,7 +14665,7 @@
         <p:spPr>
           <a:xfrm>
             <a:off x="777240" y="2011680"/>
-            <a:ext cx="4160520" cy="731520"/>
+            <a:ext cx="4160520" cy="822960"/>
           </a:xfrm>
           <a:prstGeom prst="rect">
             <a:avLst/>
@@ -14692,7 +14692,7 @@
                 <a:ea typeface="Montserrat" pitchFamily="34" charset="-122"/>
                 <a:cs typeface="Montserrat" pitchFamily="34" charset="-120"/>
               </a:rPr>
-              <a:t>Today these four systems each hold one piece of the story, and someone stitches them together by hand. A single view would close that gap.</a:t>
+              <a:t>Two views would close the gap: an SLA remediation dashboard showing whether flaws are fixed inside their deadline, and a patching dashboard showing how much of the fleet is current.</a:t>
             </a:r>
             <a:endParaRPr lang="en-US" sz="1250" dirty="0"/>
           </a:p>
@@ -14706,7 +14706,7 @@
         </p:nvSpPr>
         <p:spPr>
           <a:xfrm>
-            <a:off x="795528" y="3118104"/>
+            <a:off x="795528" y="3044952"/>
             <a:ext cx="182880" cy="182880"/>
           </a:xfrm>
           <a:prstGeom prst="ellipse">
@@ -14731,7 +14731,7 @@
         </p:nvSpPr>
         <p:spPr>
           <a:xfrm>
-            <a:off x="850392" y="3172968"/>
+            <a:off x="850392" y="3099816"/>
             <a:ext cx="73152" cy="73152"/>
           </a:xfrm>
           <a:prstGeom prst="ellipse">
@@ -14751,7 +14751,7 @@
         </p:nvSpPr>
         <p:spPr>
           <a:xfrm>
-            <a:off x="882396" y="3319272"/>
+            <a:off x="882396" y="3246120"/>
             <a:ext cx="10973" cy="457200"/>
           </a:xfrm>
           <a:prstGeom prst="rect">
@@ -14771,7 +14771,7 @@
         </p:nvSpPr>
         <p:spPr>
           <a:xfrm>
-            <a:off x="1143000" y="3054096"/>
+            <a:off x="1143000" y="2980944"/>
             <a:ext cx="3794760" cy="256032"/>
           </a:xfrm>
           <a:prstGeom prst="rect">
@@ -14810,7 +14810,7 @@
         </p:nvSpPr>
         <p:spPr>
           <a:xfrm>
-            <a:off x="1143000" y="3310128"/>
+            <a:off x="1143000" y="3236976"/>
             <a:ext cx="3749040" cy="274320"/>
           </a:xfrm>
           <a:prstGeom prst="rect">
@@ -14849,7 +14849,7 @@
         </p:nvSpPr>
         <p:spPr>
           <a:xfrm>
-            <a:off x="795528" y="3776472"/>
+            <a:off x="795528" y="3630168"/>
             <a:ext cx="182880" cy="182880"/>
           </a:xfrm>
           <a:prstGeom prst="ellipse">
@@ -14874,7 +14874,7 @@
         </p:nvSpPr>
         <p:spPr>
           <a:xfrm>
-            <a:off x="850392" y="3831336"/>
+            <a:off x="850392" y="3685032"/>
             <a:ext cx="73152" cy="73152"/>
           </a:xfrm>
           <a:prstGeom prst="ellipse">
@@ -14894,7 +14894,7 @@
         </p:nvSpPr>
         <p:spPr>
           <a:xfrm>
-            <a:off x="882396" y="3977640"/>
+            <a:off x="882396" y="3831336"/>
             <a:ext cx="10973" cy="457200"/>
           </a:xfrm>
           <a:prstGeom prst="rect">
@@ -14914,7 +14914,7 @@
         </p:nvSpPr>
         <p:spPr>
           <a:xfrm>
-            <a:off x="1143000" y="3712464"/>
+            <a:off x="1143000" y="3566160"/>
             <a:ext cx="3794760" cy="256032"/>
           </a:xfrm>
           <a:prstGeom prst="rect">
@@ -14953,7 +14953,7 @@
         </p:nvSpPr>
         <p:spPr>
           <a:xfrm>
-            <a:off x="1143000" y="3968496"/>
+            <a:off x="1143000" y="3822192"/>
             <a:ext cx="3749040" cy="274320"/>
           </a:xfrm>
           <a:prstGeom prst="rect">
@@ -14992,7 +14992,7 @@
         </p:nvSpPr>
         <p:spPr>
           <a:xfrm>
-            <a:off x="795528" y="4434840"/>
+            <a:off x="795528" y="4215384"/>
             <a:ext cx="182880" cy="182880"/>
           </a:xfrm>
           <a:prstGeom prst="ellipse">
@@ -15017,7 +15017,7 @@
         </p:nvSpPr>
         <p:spPr>
           <a:xfrm>
-            <a:off x="850392" y="4489704"/>
+            <a:off x="850392" y="4270248"/>
             <a:ext cx="73152" cy="73152"/>
           </a:xfrm>
           <a:prstGeom prst="ellipse">
@@ -15037,7 +15037,7 @@
         </p:nvSpPr>
         <p:spPr>
           <a:xfrm>
-            <a:off x="882396" y="4636008"/>
+            <a:off x="882396" y="4416552"/>
             <a:ext cx="10973" cy="457200"/>
           </a:xfrm>
           <a:prstGeom prst="rect">
@@ -15057,7 +15057,7 @@
         </p:nvSpPr>
         <p:spPr>
           <a:xfrm>
-            <a:off x="1143000" y="4370832"/>
+            <a:off x="1143000" y="4151376"/>
             <a:ext cx="3794760" cy="256032"/>
           </a:xfrm>
           <a:prstGeom prst="rect">
@@ -15096,7 +15096,7 @@
         </p:nvSpPr>
         <p:spPr>
           <a:xfrm>
-            <a:off x="1143000" y="4626864"/>
+            <a:off x="1143000" y="4407408"/>
             <a:ext cx="3749040" cy="274320"/>
           </a:xfrm>
           <a:prstGeom prst="rect">
@@ -15135,7 +15135,7 @@
         </p:nvSpPr>
         <p:spPr>
           <a:xfrm>
-            <a:off x="795528" y="5093208"/>
+            <a:off x="795528" y="4800600"/>
             <a:ext cx="182880" cy="182880"/>
           </a:xfrm>
           <a:prstGeom prst="ellipse">
@@ -15160,7 +15160,7 @@
         </p:nvSpPr>
         <p:spPr>
           <a:xfrm>
-            <a:off x="850392" y="5148072"/>
+            <a:off x="850392" y="4855464"/>
             <a:ext cx="73152" cy="73152"/>
           </a:xfrm>
           <a:prstGeom prst="ellipse">
@@ -15180,7 +15180,7 @@
         </p:nvSpPr>
         <p:spPr>
           <a:xfrm>
-            <a:off x="1143000" y="5029200"/>
+            <a:off x="1143000" y="4736592"/>
             <a:ext cx="3794760" cy="256032"/>
           </a:xfrm>
           <a:prstGeom prst="rect">
@@ -15219,7 +15219,7 @@
         </p:nvSpPr>
         <p:spPr>
           <a:xfrm>
-            <a:off x="1143000" y="5285232"/>
+            <a:off x="1143000" y="4992624"/>
             <a:ext cx="3749040" cy="274320"/>
           </a:xfrm>
           <a:prstGeom prst="rect">
@@ -15258,8 +15258,8 @@
         </p:nvSpPr>
         <p:spPr>
           <a:xfrm>
-            <a:off x="777240" y="5541264"/>
-            <a:ext cx="4160520" cy="566928"/>
+            <a:off x="777240" y="5449824"/>
+            <a:ext cx="4160520" cy="548640"/>
           </a:xfrm>
           <a:prstGeom prst="rect">
             <a:avLst/>
@@ -15326,7 +15326,7 @@
         <p:spPr>
           <a:xfrm>
             <a:off x="5358384" y="2103120"/>
-            <a:ext cx="6056071" cy="3499063"/>
+            <a:ext cx="6056071" cy="3633643"/>
           </a:xfrm>
           <a:prstGeom prst="rect">
             <a:avLst/>
@@ -15341,7 +15341,7 @@
         </p:nvSpPr>
         <p:spPr>
           <a:xfrm>
-            <a:off x="5358384" y="5748487"/>
+            <a:off x="5358384" y="5883067"/>
             <a:ext cx="6056071" cy="237744"/>
           </a:xfrm>
           <a:prstGeom prst="rect">
@@ -15437,8 +15437,8 @@
         </p:blipFill>
         <p:spPr>
           <a:xfrm>
-            <a:off x="8595360" y="2926080"/>
-            <a:ext cx="4754880" cy="4754880"/>
+            <a:off x="8595360" y="2377440"/>
+            <a:ext cx="5120640" cy="5120640"/>
           </a:xfrm>
           <a:prstGeom prst="rect">
             <a:avLst/>
@@ -15477,7 +15477,7 @@
         </p:nvSpPr>
         <p:spPr>
           <a:xfrm>
-            <a:off x="777240" y="658368"/>
+            <a:off x="777240" y="713232"/>
             <a:ext cx="5486400" cy="237744"/>
           </a:xfrm>
           <a:prstGeom prst="rect">
@@ -15502,7 +15502,7 @@
                 <a:ea typeface="Montserrat SemiBold" pitchFamily="34" charset="-122"/>
                 <a:cs typeface="Montserrat SemiBold" pitchFamily="34" charset="-120"/>
               </a:rPr>
-              <a:t>SUMMARY</a:t>
+              <a:t>IN CLOSING</a:t>
             </a:r>
             <a:endParaRPr lang="en-US" sz="1000" dirty="0"/>
           </a:p>
@@ -15516,27 +15516,24 @@
         </p:nvSpPr>
         <p:spPr>
           <a:xfrm>
-            <a:off x="777240" y="987552"/>
-            <a:ext cx="9509760" cy="1133856"/>
-          </a:xfrm>
-          <a:prstGeom prst="rect">
-            <a:avLst/>
-          </a:prstGeom>
-          <a:noFill/>
-          <a:ln/>
-        </p:spPr>
-        <p:txBody>
-          <a:bodyPr wrap="square" lIns="0" tIns="0" rIns="0" bIns="0" rtlCol="0" anchor="t"/>
-          <a:lstStyle/>
-          <a:p>
-            <a:pPr indent="0" marL="0">
-              <a:lnSpc>
-                <a:spcPct val="102000"/>
-              </a:lnSpc>
-              <a:buNone/>
-            </a:pPr>
-            <a:r>
-              <a:rPr lang="en-US" sz="3200" spc="-80" kern="0" dirty="0">
+            <a:off x="777240" y="1042416"/>
+            <a:ext cx="7315200" cy="896112"/>
+          </a:xfrm>
+          <a:prstGeom prst="rect">
+            <a:avLst/>
+          </a:prstGeom>
+          <a:noFill/>
+          <a:ln/>
+        </p:spPr>
+        <p:txBody>
+          <a:bodyPr wrap="square" lIns="0" tIns="0" rIns="0" bIns="0" rtlCol="0" anchor="t"/>
+          <a:lstStyle/>
+          <a:p>
+            <a:pPr indent="0" marL="0">
+              <a:buNone/>
+            </a:pPr>
+            <a:r>
+              <a:rPr lang="en-US" sz="4600" spc="-120" kern="0" dirty="0">
                 <a:solidFill>
                   <a:srgbClr val="FFFFFF"/>
                 </a:solidFill>
@@ -15544,29 +15541,9 @@
                 <a:ea typeface="Montserrat ExtraBold" pitchFamily="34" charset="-122"/>
                 <a:cs typeface="Montserrat ExtraBold" pitchFamily="34" charset="-120"/>
               </a:rPr>
-              <a:t>Not just a good intern for my team —</a:t>
-            </a:r>
-            <a:endParaRPr lang="en-US" sz="3200" dirty="0"/>
-          </a:p>
-          <a:p>
-            <a:pPr indent="0" marL="0">
-              <a:lnSpc>
-                <a:spcPct val="102000"/>
-              </a:lnSpc>
-              <a:buNone/>
-            </a:pPr>
-            <a:r>
-              <a:rPr lang="en-US" sz="3200" spc="-80" kern="0" dirty="0">
-                <a:solidFill>
-                  <a:srgbClr val="FFFFFF"/>
-                </a:solidFill>
-                <a:latin typeface="Montserrat ExtraBold" pitchFamily="34" charset="0"/>
-                <a:ea typeface="Montserrat ExtraBold" pitchFamily="34" charset="-122"/>
-                <a:cs typeface="Montserrat ExtraBold" pitchFamily="34" charset="-120"/>
-              </a:rPr>
-              <a:t>for the company</a:t>
-            </a:r>
-            <a:endParaRPr lang="en-US" sz="3200" dirty="0"/>
+              <a:t>Thank you</a:t>
+            </a:r>
+            <a:endParaRPr lang="en-US" sz="4600" dirty="0"/>
           </a:p>
         </p:txBody>
       </p:sp>
@@ -15578,7 +15555,7 @@
         </p:nvSpPr>
         <p:spPr>
           <a:xfrm>
-            <a:off x="777240" y="2249424"/>
+            <a:off x="777240" y="2066544"/>
             <a:ext cx="640080" cy="50292"/>
           </a:xfrm>
           <a:prstGeom prst="rect">
@@ -15592,32 +15569,45 @@
       </p:sp>
       <p:sp>
         <p:nvSpPr>
-          <p:cNvPr id="8" name="Shape 3"/>
-          <p:cNvSpPr/>
-          <p:nvPr/>
-        </p:nvSpPr>
-        <p:spPr>
-          <a:xfrm>
-            <a:off x="777240" y="2615184"/>
-            <a:ext cx="5175504" cy="1280160"/>
-          </a:xfrm>
-          <a:prstGeom prst="roundRect">
-            <a:avLst>
-              <a:gd name="adj" fmla="val 4286"/>
-            </a:avLst>
-          </a:prstGeom>
-          <a:solidFill>
-            <a:srgbClr val="FFFFFF">
-              <a:alpha val="12000"/>
-            </a:srgbClr>
-          </a:solidFill>
-          <a:ln w="9525">
-            <a:solidFill>
-              <a:srgbClr val="CA949C"/>
-            </a:solidFill>
-            <a:prstDash val="solid"/>
-          </a:ln>
-        </p:spPr>
+          <p:cNvPr id="8" name="Text 3"/>
+          <p:cNvSpPr txBox="1"/>
+          <p:nvPr/>
+        </p:nvSpPr>
+        <p:spPr>
+          <a:xfrm>
+            <a:off x="777240" y="2340864"/>
+            <a:ext cx="7863840" cy="566928"/>
+          </a:xfrm>
+          <a:prstGeom prst="rect">
+            <a:avLst/>
+          </a:prstGeom>
+          <a:noFill/>
+          <a:ln/>
+        </p:spPr>
+        <p:txBody>
+          <a:bodyPr wrap="square" lIns="0" tIns="0" rIns="0" bIns="0" rtlCol="0" anchor="t"/>
+          <a:lstStyle/>
+          <a:p>
+            <a:pPr indent="0" marL="0">
+              <a:lnSpc>
+                <a:spcPct val="130000"/>
+              </a:lnSpc>
+              <a:buNone/>
+            </a:pPr>
+            <a:r>
+              <a:rPr lang="en-US" sz="1400" dirty="0">
+                <a:solidFill>
+                  <a:srgbClr val="DAB4BA"/>
+                </a:solidFill>
+                <a:latin typeface="Montserrat Medium" pitchFamily="34" charset="0"/>
+                <a:ea typeface="Montserrat Medium" pitchFamily="34" charset="-122"/>
+                <a:cs typeface="Montserrat Medium" pitchFamily="34" charset="-120"/>
+              </a:rPr>
+              <a:t>Everything in this deck exists because people here made room for an intern to do real work — and because plenty of them pushed back on it until it was right.</a:t>
+            </a:r>
+            <a:endParaRPr lang="en-US" sz="1400" dirty="0"/>
+          </a:p>
+        </p:txBody>
       </p:sp>
       <p:sp>
         <p:nvSpPr>
@@ -15627,8 +15617,8 @@
         </p:nvSpPr>
         <p:spPr>
           <a:xfrm>
-            <a:off x="777240" y="2615184"/>
-            <a:ext cx="45720" cy="1280160"/>
+            <a:off x="777240" y="3182112"/>
+            <a:ext cx="45720" cy="384048"/>
           </a:xfrm>
           <a:prstGeom prst="rect">
             <a:avLst/>
@@ -15647,24 +15637,24 @@
         </p:nvSpPr>
         <p:spPr>
           <a:xfrm>
-            <a:off x="1033272" y="2816352"/>
-            <a:ext cx="4663440" cy="274320"/>
-          </a:xfrm>
-          <a:prstGeom prst="rect">
-            <a:avLst/>
-          </a:prstGeom>
-          <a:noFill/>
-          <a:ln/>
-        </p:spPr>
-        <p:txBody>
-          <a:bodyPr wrap="square" lIns="0" tIns="0" rIns="0" bIns="0" rtlCol="0" anchor="t"/>
-          <a:lstStyle/>
-          <a:p>
-            <a:pPr indent="0" marL="0">
-              <a:buNone/>
-            </a:pPr>
-            <a:r>
-              <a:rPr lang="en-US" sz="1350" dirty="0">
+            <a:off x="1014984" y="3127248"/>
+            <a:ext cx="9692640" cy="274320"/>
+          </a:xfrm>
+          <a:prstGeom prst="rect">
+            <a:avLst/>
+          </a:prstGeom>
+          <a:noFill/>
+          <a:ln/>
+        </p:spPr>
+        <p:txBody>
+          <a:bodyPr wrap="square" lIns="0" tIns="0" rIns="0" bIns="0" rtlCol="0" anchor="t"/>
+          <a:lstStyle/>
+          <a:p>
+            <a:pPr indent="0" marL="0">
+              <a:buNone/>
+            </a:pPr>
+            <a:r>
+              <a:rPr lang="en-US" sz="1400" dirty="0">
                 <a:solidFill>
                   <a:srgbClr val="FFFFFF"/>
                 </a:solidFill>
@@ -15672,9 +15662,9 @@
                 <a:ea typeface="Montserrat SemiBold" pitchFamily="34" charset="-122"/>
                 <a:cs typeface="Montserrat SemiBold" pitchFamily="34" charset="-120"/>
               </a:rPr>
-              <a:t>Left tools behind, not just results</a:t>
-            </a:r>
-            <a:endParaRPr lang="en-US" sz="1350" dirty="0"/>
+              <a:t>To the Information Security team</a:t>
+            </a:r>
+            <a:endParaRPr lang="en-US" sz="1400" dirty="0"/>
           </a:p>
         </p:txBody>
       </p:sp>
@@ -15686,8 +15676,8 @@
         </p:nvSpPr>
         <p:spPr>
           <a:xfrm>
-            <a:off x="1033272" y="3127248"/>
-            <a:ext cx="4663440" cy="603504"/>
+            <a:off x="1014984" y="3419856"/>
+            <a:ext cx="9326880" cy="310896"/>
           </a:xfrm>
           <a:prstGeom prst="rect">
             <a:avLst/>
@@ -15708,13 +15698,13 @@
             <a:r>
               <a:rPr lang="en-US" sz="1100" dirty="0">
                 <a:solidFill>
-                  <a:srgbClr val="E4C9CE"/>
+                  <a:srgbClr val="DAB4BA"/>
                 </a:solidFill>
                 <a:latin typeface="Montserrat" pitchFamily="34" charset="0"/>
                 <a:ea typeface="Montserrat" pitchFamily="34" charset="-122"/>
                 <a:cs typeface="Montserrat" pitchFamily="34" charset="-120"/>
               </a:rPr>
-              <a:t>The scripts and frameworks I built are still in use by the team after I go.</a:t>
+              <a:t>For handing me problems that actually mattered, and trusting me to work on them properly.</a:t>
             </a:r>
             <a:endParaRPr lang="en-US" sz="1100" dirty="0"/>
           </a:p>
@@ -15728,25 +15718,16 @@
         </p:nvSpPr>
         <p:spPr>
           <a:xfrm>
-            <a:off x="6236208" y="2615184"/>
-            <a:ext cx="5175504" cy="1280160"/>
-          </a:xfrm>
-          <a:prstGeom prst="roundRect">
-            <a:avLst>
-              <a:gd name="adj" fmla="val 4286"/>
-            </a:avLst>
+            <a:off x="777240" y="3858768"/>
+            <a:ext cx="10637215" cy="7315"/>
+          </a:xfrm>
+          <a:prstGeom prst="rect">
+            <a:avLst/>
           </a:prstGeom>
           <a:solidFill>
-            <a:srgbClr val="FFFFFF">
-              <a:alpha val="12000"/>
-            </a:srgbClr>
+            <a:srgbClr val="CA949C"/>
           </a:solidFill>
-          <a:ln w="9525">
-            <a:solidFill>
-              <a:srgbClr val="CA949C"/>
-            </a:solidFill>
-            <a:prstDash val="solid"/>
-          </a:ln>
+          <a:ln/>
         </p:spPr>
       </p:sp>
       <p:sp>
@@ -15757,8 +15738,8 @@
         </p:nvSpPr>
         <p:spPr>
           <a:xfrm>
-            <a:off x="6236208" y="2615184"/>
-            <a:ext cx="45720" cy="1280160"/>
+            <a:off x="777240" y="4041648"/>
+            <a:ext cx="45720" cy="384048"/>
           </a:xfrm>
           <a:prstGeom prst="rect">
             <a:avLst/>
@@ -15777,24 +15758,24 @@
         </p:nvSpPr>
         <p:spPr>
           <a:xfrm>
-            <a:off x="6492240" y="2816352"/>
-            <a:ext cx="4663440" cy="274320"/>
-          </a:xfrm>
-          <a:prstGeom prst="rect">
-            <a:avLst/>
-          </a:prstGeom>
-          <a:noFill/>
-          <a:ln/>
-        </p:spPr>
-        <p:txBody>
-          <a:bodyPr wrap="square" lIns="0" tIns="0" rIns="0" bIns="0" rtlCol="0" anchor="t"/>
-          <a:lstStyle/>
-          <a:p>
-            <a:pPr indent="0" marL="0">
-              <a:buNone/>
-            </a:pPr>
-            <a:r>
-              <a:rPr lang="en-US" sz="1350" dirty="0">
+            <a:off x="1014984" y="3986784"/>
+            <a:ext cx="9692640" cy="274320"/>
+          </a:xfrm>
+          <a:prstGeom prst="rect">
+            <a:avLst/>
+          </a:prstGeom>
+          <a:noFill/>
+          <a:ln/>
+        </p:spPr>
+        <p:txBody>
+          <a:bodyPr wrap="square" lIns="0" tIns="0" rIns="0" bIns="0" rtlCol="0" anchor="t"/>
+          <a:lstStyle/>
+          <a:p>
+            <a:pPr indent="0" marL="0">
+              <a:buNone/>
+            </a:pPr>
+            <a:r>
+              <a:rPr lang="en-US" sz="1400" dirty="0">
                 <a:solidFill>
                   <a:srgbClr val="FFFFFF"/>
                 </a:solidFill>
@@ -15802,9 +15783,9 @@
                 <a:ea typeface="Montserrat SemiBold" pitchFamily="34" charset="-122"/>
                 <a:cs typeface="Montserrat SemiBold" pitchFamily="34" charset="-120"/>
               </a:rPr>
-              <a:t>Worked across team lines</a:t>
-            </a:r>
-            <a:endParaRPr lang="en-US" sz="1350" dirty="0"/>
+              <a:t>To Vulnerability Management, Application Security and Network Security</a:t>
+            </a:r>
+            <a:endParaRPr lang="en-US" sz="1400" dirty="0"/>
           </a:p>
         </p:txBody>
       </p:sp>
@@ -15816,8 +15797,8 @@
         </p:nvSpPr>
         <p:spPr>
           <a:xfrm>
-            <a:off x="6492240" y="3127248"/>
-            <a:ext cx="4663440" cy="603504"/>
+            <a:off x="1014984" y="4279392"/>
+            <a:ext cx="9326880" cy="310896"/>
           </a:xfrm>
           <a:prstGeom prst="rect">
             <a:avLst/>
@@ -15838,13 +15819,13 @@
             <a:r>
               <a:rPr lang="en-US" sz="1100" dirty="0">
                 <a:solidFill>
-                  <a:srgbClr val="E4C9CE"/>
+                  <a:srgbClr val="DAB4BA"/>
                 </a:solidFill>
                 <a:latin typeface="Montserrat" pitchFamily="34" charset="0"/>
                 <a:ea typeface="Montserrat" pitchFamily="34" charset="-122"/>
                 <a:cs typeface="Montserrat" pitchFamily="34" charset="-120"/>
               </a:rPr>
-              <a:t>Vulnerability Management, Application Security and Network Security — plus Cloud Operations and Development.</a:t>
+              <a:t>Three rotations, three different ways of looking at the same job. I learned something distinct in each one.</a:t>
             </a:r>
             <a:endParaRPr lang="en-US" sz="1100" dirty="0"/>
           </a:p>
@@ -15858,25 +15839,16 @@
         </p:nvSpPr>
         <p:spPr>
           <a:xfrm>
-            <a:off x="777240" y="4133088"/>
-            <a:ext cx="5175504" cy="1280160"/>
-          </a:xfrm>
-          <a:prstGeom prst="roundRect">
-            <a:avLst>
-              <a:gd name="adj" fmla="val 4286"/>
-            </a:avLst>
+            <a:off x="777240" y="4718304"/>
+            <a:ext cx="10637215" cy="7315"/>
+          </a:xfrm>
+          <a:prstGeom prst="rect">
+            <a:avLst/>
           </a:prstGeom>
           <a:solidFill>
-            <a:srgbClr val="FFFFFF">
-              <a:alpha val="12000"/>
-            </a:srgbClr>
+            <a:srgbClr val="CA949C"/>
           </a:solidFill>
-          <a:ln w="9525">
-            <a:solidFill>
-              <a:srgbClr val="CA949C"/>
-            </a:solidFill>
-            <a:prstDash val="solid"/>
-          </a:ln>
+          <a:ln/>
         </p:spPr>
       </p:sp>
       <p:sp>
@@ -15887,8 +15859,8 @@
         </p:nvSpPr>
         <p:spPr>
           <a:xfrm>
-            <a:off x="777240" y="4133088"/>
-            <a:ext cx="45720" cy="1280160"/>
+            <a:off x="777240" y="4901184"/>
+            <a:ext cx="45720" cy="384048"/>
           </a:xfrm>
           <a:prstGeom prst="rect">
             <a:avLst/>
@@ -15907,24 +15879,24 @@
         </p:nvSpPr>
         <p:spPr>
           <a:xfrm>
-            <a:off x="1033272" y="4334256"/>
-            <a:ext cx="4663440" cy="274320"/>
-          </a:xfrm>
-          <a:prstGeom prst="rect">
-            <a:avLst/>
-          </a:prstGeom>
-          <a:noFill/>
-          <a:ln/>
-        </p:spPr>
-        <p:txBody>
-          <a:bodyPr wrap="square" lIns="0" tIns="0" rIns="0" bIns="0" rtlCol="0" anchor="t"/>
-          <a:lstStyle/>
-          <a:p>
-            <a:pPr indent="0" marL="0">
-              <a:buNone/>
-            </a:pPr>
-            <a:r>
-              <a:rPr lang="en-US" sz="1350" dirty="0">
+            <a:off x="1014984" y="4846320"/>
+            <a:ext cx="9692640" cy="274320"/>
+          </a:xfrm>
+          <a:prstGeom prst="rect">
+            <a:avLst/>
+          </a:prstGeom>
+          <a:noFill/>
+          <a:ln/>
+        </p:spPr>
+        <p:txBody>
+          <a:bodyPr wrap="square" lIns="0" tIns="0" rIns="0" bIns="0" rtlCol="0" anchor="t"/>
+          <a:lstStyle/>
+          <a:p>
+            <a:pPr indent="0" marL="0">
+              <a:buNone/>
+            </a:pPr>
+            <a:r>
+              <a:rPr lang="en-US" sz="1400" dirty="0">
                 <a:solidFill>
                   <a:srgbClr val="FFFFFF"/>
                 </a:solidFill>
@@ -15932,9 +15904,9 @@
                 <a:ea typeface="Montserrat SemiBold" pitchFamily="34" charset="-122"/>
                 <a:cs typeface="Montserrat SemiBold" pitchFamily="34" charset="-120"/>
               </a:rPr>
-              <a:t>Built proof, not opinions</a:t>
-            </a:r>
-            <a:endParaRPr lang="en-US" sz="1350" dirty="0"/>
+              <a:t>To Cloud Operations and Development</a:t>
+            </a:r>
+            <a:endParaRPr lang="en-US" sz="1400" dirty="0"/>
           </a:p>
         </p:txBody>
       </p:sp>
@@ -15946,8 +15918,8 @@
         </p:nvSpPr>
         <p:spPr>
           <a:xfrm>
-            <a:off x="1033272" y="4645152"/>
-            <a:ext cx="4663440" cy="603504"/>
+            <a:off x="1014984" y="5138928"/>
+            <a:ext cx="9326880" cy="310896"/>
           </a:xfrm>
           <a:prstGeom prst="rect">
             <a:avLst/>
@@ -15968,13 +15940,13 @@
             <a:r>
               <a:rPr lang="en-US" sz="1100" dirty="0">
                 <a:solidFill>
-                  <a:srgbClr val="E4C9CE"/>
+                  <a:srgbClr val="DAB4BA"/>
                 </a:solidFill>
                 <a:latin typeface="Montserrat" pitchFamily="34" charset="0"/>
                 <a:ea typeface="Montserrat" pitchFamily="34" charset="-122"/>
                 <a:cs typeface="Montserrat" pitchFamily="34" charset="-120"/>
               </a:rPr>
-              <a:t>Every number here is either measured and independently checked, or clearly labelled as an estimate.</a:t>
+              <a:t>For making time for someone from another team who kept turning up with questions.</a:t>
             </a:r>
             <a:endParaRPr lang="en-US" sz="1100" dirty="0"/>
           </a:p>
@@ -15982,79 +15954,30 @@
       </p:sp>
       <p:sp>
         <p:nvSpPr>
-          <p:cNvPr id="20" name="Shape 15"/>
-          <p:cNvSpPr/>
-          <p:nvPr/>
-        </p:nvSpPr>
-        <p:spPr>
-          <a:xfrm>
-            <a:off x="6236208" y="4133088"/>
-            <a:ext cx="5175504" cy="1280160"/>
-          </a:xfrm>
-          <a:prstGeom prst="roundRect">
-            <a:avLst>
-              <a:gd name="adj" fmla="val 4286"/>
-            </a:avLst>
-          </a:prstGeom>
-          <a:solidFill>
-            <a:srgbClr val="FFFFFF">
-              <a:alpha val="12000"/>
-            </a:srgbClr>
-          </a:solidFill>
-          <a:ln w="9525">
-            <a:solidFill>
-              <a:srgbClr val="CA949C"/>
-            </a:solidFill>
-            <a:prstDash val="solid"/>
-          </a:ln>
-        </p:spPr>
-      </p:sp>
-      <p:sp>
-        <p:nvSpPr>
-          <p:cNvPr id="21" name="Shape 16"/>
-          <p:cNvSpPr/>
-          <p:nvPr/>
-        </p:nvSpPr>
-        <p:spPr>
-          <a:xfrm>
-            <a:off x="6236208" y="4133088"/>
-            <a:ext cx="45720" cy="1280160"/>
-          </a:xfrm>
-          <a:prstGeom prst="rect">
-            <a:avLst/>
-          </a:prstGeom>
-          <a:solidFill>
-            <a:srgbClr val="FFFFFF"/>
-          </a:solidFill>
-          <a:ln/>
-        </p:spPr>
-      </p:sp>
-      <p:sp>
-        <p:nvSpPr>
-          <p:cNvPr id="22" name="Text 17"/>
-          <p:cNvSpPr txBox="1"/>
-          <p:nvPr/>
-        </p:nvSpPr>
-        <p:spPr>
-          <a:xfrm>
-            <a:off x="6492240" y="4334256"/>
-            <a:ext cx="4663440" cy="274320"/>
-          </a:xfrm>
-          <a:prstGeom prst="rect">
-            <a:avLst/>
-          </a:prstGeom>
-          <a:noFill/>
-          <a:ln/>
-        </p:spPr>
-        <p:txBody>
-          <a:bodyPr wrap="square" lIns="0" tIns="0" rIns="0" bIns="0" rtlCol="0" anchor="t"/>
-          <a:lstStyle/>
-          <a:p>
-            <a:pPr indent="0" marL="0">
-              <a:buNone/>
-            </a:pPr>
-            <a:r>
-              <a:rPr lang="en-US" sz="1350" dirty="0">
+          <p:cNvPr id="20" name="Text 15"/>
+          <p:cNvSpPr txBox="1"/>
+          <p:nvPr/>
+        </p:nvSpPr>
+        <p:spPr>
+          <a:xfrm>
+            <a:off x="777240" y="5669280"/>
+            <a:ext cx="6949440" cy="310896"/>
+          </a:xfrm>
+          <a:prstGeom prst="rect">
+            <a:avLst/>
+          </a:prstGeom>
+          <a:noFill/>
+          <a:ln/>
+        </p:spPr>
+        <p:txBody>
+          <a:bodyPr wrap="square" lIns="0" tIns="0" rIns="0" bIns="0" rtlCol="0" anchor="t"/>
+          <a:lstStyle/>
+          <a:p>
+            <a:pPr indent="0" marL="0">
+              <a:buNone/>
+            </a:pPr>
+            <a:r>
+              <a:rPr lang="en-US" sz="1600" dirty="0">
                 <a:solidFill>
                   <a:srgbClr val="FFFFFF"/>
                 </a:solidFill>
@@ -16062,166 +15985,85 @@
                 <a:ea typeface="Montserrat SemiBold" pitchFamily="34" charset="-122"/>
                 <a:cs typeface="Montserrat SemiBold" pitchFamily="34" charset="-120"/>
               </a:rPr>
-              <a:t>Built to scale beyond one team</a:t>
-            </a:r>
-            <a:endParaRPr lang="en-US" sz="1350" dirty="0"/>
-          </a:p>
-        </p:txBody>
-      </p:sp>
-      <p:sp>
-        <p:nvSpPr>
-          <p:cNvPr id="23" name="Text 18"/>
-          <p:cNvSpPr txBox="1"/>
-          <p:nvPr/>
-        </p:nvSpPr>
-        <p:spPr>
-          <a:xfrm>
-            <a:off x="6492240" y="4645152"/>
-            <a:ext cx="4663440" cy="603504"/>
-          </a:xfrm>
-          <a:prstGeom prst="rect">
-            <a:avLst/>
-          </a:prstGeom>
-          <a:noFill/>
-          <a:ln/>
-        </p:spPr>
-        <p:txBody>
-          <a:bodyPr wrap="square" lIns="0" tIns="0" rIns="0" bIns="0" rtlCol="0" anchor="t"/>
-          <a:lstStyle/>
-          <a:p>
-            <a:pPr indent="0" marL="0">
-              <a:lnSpc>
-                <a:spcPct val="120000"/>
-              </a:lnSpc>
-              <a:buNone/>
-            </a:pPr>
-            <a:r>
-              <a:rPr lang="en-US" sz="1100" dirty="0">
+              <a:t>Happy to take any questions.</a:t>
+            </a:r>
+            <a:endParaRPr lang="en-US" sz="1600" dirty="0"/>
+          </a:p>
+        </p:txBody>
+      </p:sp>
+      <p:sp>
+        <p:nvSpPr>
+          <p:cNvPr id="21" name="Text 16"/>
+          <p:cNvSpPr txBox="1"/>
+          <p:nvPr/>
+        </p:nvSpPr>
+        <p:spPr>
+          <a:xfrm>
+            <a:off x="777240" y="6016752"/>
+            <a:ext cx="7680960" cy="256032"/>
+          </a:xfrm>
+          <a:prstGeom prst="rect">
+            <a:avLst/>
+          </a:prstGeom>
+          <a:noFill/>
+          <a:ln/>
+        </p:spPr>
+        <p:txBody>
+          <a:bodyPr wrap="square" lIns="0" tIns="0" rIns="0" bIns="0" rtlCol="0" anchor="t"/>
+          <a:lstStyle/>
+          <a:p>
+            <a:pPr indent="0" marL="0">
+              <a:buNone/>
+            </a:pPr>
+            <a:r>
+              <a:rPr lang="en-US" sz="950" spc="30" kern="0" dirty="0">
+                <a:solidFill>
+                  <a:srgbClr val="DAB4BA"/>
+                </a:solidFill>
+                <a:latin typeface="Montserrat Medium" pitchFamily="34" charset="0"/>
+                <a:ea typeface="Montserrat Medium" pitchFamily="34" charset="-122"/>
+                <a:cs typeface="Montserrat Medium" pitchFamily="34" charset="-120"/>
+              </a:rPr>
+              <a:t>Next up: the PWPA and PJPT certifications, heading toward penetration testing.</a:t>
+            </a:r>
+            <a:endParaRPr lang="en-US" sz="950" dirty="0"/>
+          </a:p>
+        </p:txBody>
+      </p:sp>
+      <p:sp>
+        <p:nvSpPr>
+          <p:cNvPr id="22" name="Text 17"/>
+          <p:cNvSpPr txBox="1"/>
+          <p:nvPr/>
+        </p:nvSpPr>
+        <p:spPr>
+          <a:xfrm>
+            <a:off x="777240" y="6327648"/>
+            <a:ext cx="7315200" cy="201168"/>
+          </a:xfrm>
+          <a:prstGeom prst="rect">
+            <a:avLst/>
+          </a:prstGeom>
+          <a:noFill/>
+          <a:ln/>
+        </p:spPr>
+        <p:txBody>
+          <a:bodyPr wrap="square" lIns="0" tIns="0" rIns="0" bIns="0" rtlCol="0" anchor="t"/>
+          <a:lstStyle/>
+          <a:p>
+            <a:pPr indent="0" marL="0">
+              <a:buNone/>
+            </a:pPr>
+            <a:r>
+              <a:rPr lang="en-US" sz="850" spc="140" kern="0" dirty="0">
                 <a:solidFill>
                   <a:srgbClr val="E4C9CE"/>
-                </a:solidFill>
-                <a:latin typeface="Montserrat" pitchFamily="34" charset="0"/>
-                <a:ea typeface="Montserrat" pitchFamily="34" charset="-122"/>
-                <a:cs typeface="Montserrat" pitchFamily="34" charset="-120"/>
-              </a:rPr>
-              <a:t>Each project was designed so another group can pick it up and run it.</a:t>
-            </a:r>
-            <a:endParaRPr lang="en-US" sz="1100" dirty="0"/>
-          </a:p>
-        </p:txBody>
-      </p:sp>
-      <p:sp>
-        <p:nvSpPr>
-          <p:cNvPr id="24" name="Text 19"/>
-          <p:cNvSpPr txBox="1"/>
-          <p:nvPr/>
-        </p:nvSpPr>
-        <p:spPr>
-          <a:xfrm>
-            <a:off x="777240" y="5614416"/>
-            <a:ext cx="6949440" cy="329184"/>
-          </a:xfrm>
-          <a:prstGeom prst="rect">
-            <a:avLst/>
-          </a:prstGeom>
-          <a:noFill/>
-          <a:ln/>
-        </p:spPr>
-        <p:txBody>
-          <a:bodyPr wrap="square" lIns="0" tIns="0" rIns="0" bIns="0" rtlCol="0" anchor="t"/>
-          <a:lstStyle/>
-          <a:p>
-            <a:pPr indent="0" marL="0">
-              <a:buNone/>
-            </a:pPr>
-            <a:r>
-              <a:rPr lang="en-US" sz="1600" dirty="0">
-                <a:solidFill>
-                  <a:srgbClr val="FFFFFF"/>
                 </a:solidFill>
                 <a:latin typeface="Montserrat SemiBold" pitchFamily="34" charset="0"/>
                 <a:ea typeface="Montserrat SemiBold" pitchFamily="34" charset="-122"/>
                 <a:cs typeface="Montserrat SemiBold" pitchFamily="34" charset="-120"/>
               </a:rPr>
-              <a:t>Thank you — happy to take questions.</a:t>
-            </a:r>
-            <a:endParaRPr lang="en-US" sz="1600" dirty="0"/>
-          </a:p>
-        </p:txBody>
-      </p:sp>
-      <p:sp>
-        <p:nvSpPr>
-          <p:cNvPr id="25" name="Text 20"/>
-          <p:cNvSpPr txBox="1"/>
-          <p:nvPr/>
-        </p:nvSpPr>
-        <p:spPr>
-          <a:xfrm>
-            <a:off x="777240" y="5980176"/>
-            <a:ext cx="7680960" cy="256032"/>
-          </a:xfrm>
-          <a:prstGeom prst="rect">
-            <a:avLst/>
-          </a:prstGeom>
-          <a:noFill/>
-          <a:ln/>
-        </p:spPr>
-        <p:txBody>
-          <a:bodyPr wrap="square" lIns="0" tIns="0" rIns="0" bIns="0" rtlCol="0" anchor="t"/>
-          <a:lstStyle/>
-          <a:p>
-            <a:pPr indent="0" marL="0">
-              <a:buNone/>
-            </a:pPr>
-            <a:r>
-              <a:rPr lang="en-US" sz="950" spc="30" kern="0" dirty="0">
-                <a:solidFill>
-                  <a:srgbClr val="DAB4BA"/>
-                </a:solidFill>
-                <a:latin typeface="Montserrat Medium" pitchFamily="34" charset="0"/>
-                <a:ea typeface="Montserrat Medium" pitchFamily="34" charset="-122"/>
-                <a:cs typeface="Montserrat Medium" pitchFamily="34" charset="-120"/>
-              </a:rPr>
-              <a:t>Next up: the PWPA and PJPT certifications, heading toward penetration testing.</a:t>
-            </a:r>
-            <a:endParaRPr lang="en-US" sz="950" dirty="0"/>
-          </a:p>
-        </p:txBody>
-      </p:sp>
-      <p:sp>
-        <p:nvSpPr>
-          <p:cNvPr id="26" name="Text 21"/>
-          <p:cNvSpPr txBox="1"/>
-          <p:nvPr/>
-        </p:nvSpPr>
-        <p:spPr>
-          <a:xfrm>
-            <a:off x="777240" y="6327648"/>
-            <a:ext cx="7315200" cy="201168"/>
-          </a:xfrm>
-          <a:prstGeom prst="rect">
-            <a:avLst/>
-          </a:prstGeom>
-          <a:noFill/>
-          <a:ln/>
-        </p:spPr>
-        <p:txBody>
-          <a:bodyPr wrap="square" lIns="0" tIns="0" rIns="0" bIns="0" rtlCol="0" anchor="t"/>
-          <a:lstStyle/>
-          <a:p>
-            <a:pPr indent="0" marL="0">
-              <a:buNone/>
-            </a:pPr>
-            <a:r>
-              <a:rPr lang="en-US" sz="850" spc="140" kern="0" dirty="0">
-                <a:solidFill>
-                  <a:srgbClr val="E4C9CE"/>
-                </a:solidFill>
-                <a:latin typeface="Montserrat SemiBold" pitchFamily="34" charset="0"/>
-                <a:ea typeface="Montserrat SemiBold" pitchFamily="34" charset="-122"/>
-                <a:cs typeface="Montserrat SemiBold" pitchFamily="34" charset="-120"/>
-              </a:rPr>
-              <a:t>SUMMARY</a:t>
+              <a:t>THANK YOU</a:t>
             </a:r>
             <a:endParaRPr lang="en-US" sz="850" dirty="0"/>
           </a:p>
@@ -16229,7 +16071,7 @@
       </p:sp>
       <p:sp>
         <p:nvSpPr>
-          <p:cNvPr id="27" name="Text 22"/>
+          <p:cNvPr id="23" name="Text 18"/>
           <p:cNvSpPr txBox="1"/>
           <p:nvPr/>
         </p:nvSpPr>

--- a/out/Internship_Exit_Presentation_Stewart.pptx
+++ b/out/Internship_Exit_Presentation_Stewart.pptx
@@ -1932,7 +1932,7 @@
           <a:p>
             <a:r>
               <a:rPr lang="en-US" dirty="0"/>
-              <a:t>If you only take one thing from this: three separate problems, three working solutions, and I can show the evidence for each. The detail follows — feel free to tune in and out.</a:t>
+              <a:t/>
             </a:r>
             <a:endParaRPr lang="en-US" dirty="0"/>
           </a:p>
@@ -2108,7 +2108,7 @@
           <a:p>
             <a:r>
               <a:rPr lang="en-US" dirty="0"/>
-              <a:t/>
+              <a:t>If you only take one thing from this: three separate problems, three working solutions, and I can show the evidence for each. The detail follows — feel free to tune in and out.</a:t>
             </a:r>
             <a:endParaRPr lang="en-US" dirty="0"/>
           </a:p>
@@ -16142,7 +16142,7 @@
       </p:grpSpPr>
       <p:pic>
         <p:nvPicPr>
-          <p:cNvPr id="2" name="Image 0" descr="/home/user/ai/assets/gen/logo-red.png">    </p:cNvPr>
+          <p:cNvPr id="2" name="Image 0" descr="/home/user/ai/assets/gen/panel-red-left.png">    </p:cNvPr>
           <p:cNvPicPr>
             <a:picLocks noChangeAspect="1"/>
           </p:cNvPicPr>
@@ -16156,24 +16156,48 @@
         </p:blipFill>
         <p:spPr>
           <a:xfrm>
-            <a:off x="9768535" y="457200"/>
-            <a:ext cx="1645920" cy="166053"/>
+            <a:off x="0" y="0"/>
+            <a:ext cx="4343400" cy="6858000"/>
           </a:xfrm>
           <a:prstGeom prst="rect">
             <a:avLst/>
           </a:prstGeom>
         </p:spPr>
       </p:pic>
-      <p:sp>
-        <p:nvSpPr>
-          <p:cNvPr id="3" name="Text 0"/>
-          <p:cNvSpPr txBox="1"/>
-          <p:nvPr/>
-        </p:nvSpPr>
-        <p:spPr>
-          <a:xfrm>
-            <a:off x="777240" y="658368"/>
-            <a:ext cx="7315200" cy="219456"/>
+      <p:pic>
+        <p:nvPicPr>
+          <p:cNvPr id="3" name="Image 1" descr="/home/user/ai/assets/gen/mark-slash-faint.png">    </p:cNvPr>
+          <p:cNvPicPr>
+            <a:picLocks noChangeAspect="1"/>
+          </p:cNvPicPr>
+          <p:nvPr/>
+        </p:nvPicPr>
+        <p:blipFill>
+          <a:blip r:embed="rId2"/>
+          <a:stretch>
+            <a:fillRect/>
+          </a:stretch>
+        </p:blipFill>
+        <p:spPr>
+          <a:xfrm>
+            <a:off x="-640080" y="3931920"/>
+            <a:ext cx="3840480" cy="3840480"/>
+          </a:xfrm>
+          <a:prstGeom prst="rect">
+            <a:avLst/>
+          </a:prstGeom>
+        </p:spPr>
+      </p:pic>
+      <p:sp>
+        <p:nvSpPr>
+          <p:cNvPr id="4" name="Text 0"/>
+          <p:cNvSpPr txBox="1"/>
+          <p:nvPr/>
+        </p:nvSpPr>
+        <p:spPr>
+          <a:xfrm>
+            <a:off x="777240" y="1371600"/>
+            <a:ext cx="3108960" cy="237744"/>
           </a:xfrm>
           <a:prstGeom prst="rect">
             <a:avLst/>
@@ -16191,13 +16215,13 @@
             <a:r>
               <a:rPr lang="en-US" sz="1000" spc="220" kern="0" dirty="0">
                 <a:solidFill>
-                  <a:srgbClr val="942838"/>
+                  <a:srgbClr val="E4C9CE"/>
                 </a:solidFill>
                 <a:latin typeface="Montserrat SemiBold" pitchFamily="34" charset="0"/>
                 <a:ea typeface="Montserrat SemiBold" pitchFamily="34" charset="-122"/>
                 <a:cs typeface="Montserrat SemiBold" pitchFamily="34" charset="-120"/>
               </a:rPr>
-              <a:t>EXECUTIVE SUMMARY</a:t>
+              <a:t>ABOUT ME</a:t>
             </a:r>
             <a:endParaRPr lang="en-US" sz="1000" dirty="0"/>
           </a:p>
@@ -16205,14 +16229,14 @@
       </p:sp>
       <p:sp>
         <p:nvSpPr>
-          <p:cNvPr id="4" name="Text 1"/>
-          <p:cNvSpPr txBox="1"/>
-          <p:nvPr/>
-        </p:nvSpPr>
-        <p:spPr>
-          <a:xfrm>
-            <a:off x="777240" y="932688"/>
-            <a:ext cx="10515600" cy="868680"/>
+          <p:cNvPr id="5" name="Text 1"/>
+          <p:cNvSpPr txBox="1"/>
+          <p:nvPr/>
+        </p:nvSpPr>
+        <p:spPr>
+          <a:xfrm>
+            <a:off x="777240" y="1737360"/>
+            <a:ext cx="3291840" cy="1371600"/>
           </a:xfrm>
           <a:prstGeom prst="rect">
             <a:avLst/>
@@ -16231,50 +16255,212 @@
               <a:buNone/>
             </a:pPr>
             <a:r>
-              <a:rPr lang="en-US" sz="2900" spc="-50" kern="0" dirty="0">
-                <a:solidFill>
-                  <a:srgbClr val="2B2D30"/>
+              <a:rPr lang="en-US" sz="3300" spc="-70" kern="0" dirty="0">
+                <a:solidFill>
+                  <a:srgbClr val="FFFFFF"/>
                 </a:solidFill>
                 <a:latin typeface="Montserrat ExtraBold" pitchFamily="34" charset="0"/>
                 <a:ea typeface="Montserrat ExtraBold" pitchFamily="34" charset="-122"/>
                 <a:cs typeface="Montserrat ExtraBold" pitchFamily="34" charset="-120"/>
               </a:rPr>
-              <a:t>Three problems, three working solutions</a:t>
-            </a:r>
-            <a:endParaRPr lang="en-US" sz="2900" dirty="0"/>
-          </a:p>
-        </p:txBody>
-      </p:sp>
-      <p:sp>
-        <p:nvSpPr>
-          <p:cNvPr id="5" name="Shape 2"/>
+              <a:t>Jair Maldonado</a:t>
+            </a:r>
+            <a:endParaRPr lang="en-US" sz="3300" dirty="0"/>
+          </a:p>
+        </p:txBody>
+      </p:sp>
+      <p:sp>
+        <p:nvSpPr>
+          <p:cNvPr id="6" name="Shape 2"/>
           <p:cNvSpPr/>
           <p:nvPr/>
         </p:nvSpPr>
         <p:spPr>
           <a:xfrm>
-            <a:off x="777240" y="1700784"/>
-            <a:ext cx="566928" cy="50292"/>
+            <a:off x="777240" y="3127248"/>
+            <a:ext cx="548640" cy="45720"/>
           </a:xfrm>
           <a:prstGeom prst="rect">
             <a:avLst/>
           </a:prstGeom>
           <a:solidFill>
-            <a:srgbClr val="942838"/>
+            <a:srgbClr val="FFFFFF"/>
           </a:solidFill>
           <a:ln/>
         </p:spPr>
       </p:sp>
       <p:sp>
         <p:nvSpPr>
-          <p:cNvPr id="6" name="Shape 3"/>
+          <p:cNvPr id="7" name="Text 3"/>
+          <p:cNvSpPr txBox="1"/>
+          <p:nvPr/>
+        </p:nvSpPr>
+        <p:spPr>
+          <a:xfrm>
+            <a:off x="777240" y="3364992"/>
+            <a:ext cx="3200400" cy="548640"/>
+          </a:xfrm>
+          <a:prstGeom prst="rect">
+            <a:avLst/>
+          </a:prstGeom>
+          <a:noFill/>
+          <a:ln/>
+        </p:spPr>
+        <p:txBody>
+          <a:bodyPr wrap="square" lIns="0" tIns="0" rIns="0" bIns="0" rtlCol="0" anchor="t"/>
+          <a:lstStyle/>
+          <a:p>
+            <a:pPr indent="0" marL="0">
+              <a:lnSpc>
+                <a:spcPct val="120000"/>
+              </a:lnSpc>
+              <a:buNone/>
+            </a:pPr>
+            <a:r>
+              <a:rPr lang="en-US" sz="950" spc="30" kern="0" dirty="0">
+                <a:solidFill>
+                  <a:srgbClr val="E4C9CE"/>
+                </a:solidFill>
+                <a:latin typeface="Montserrat Medium" pitchFamily="34" charset="0"/>
+                <a:ea typeface="Montserrat Medium" pitchFamily="34" charset="-122"/>
+                <a:cs typeface="Montserrat Medium" pitchFamily="34" charset="-120"/>
+              </a:rPr>
+              <a:t>Information Security Analyst Intern</a:t>
+            </a:r>
+            <a:endParaRPr lang="en-US" sz="950" dirty="0"/>
+          </a:p>
+        </p:txBody>
+      </p:sp>
+      <p:sp>
+        <p:nvSpPr>
+          <p:cNvPr id="8" name="Text 4"/>
+          <p:cNvSpPr txBox="1"/>
+          <p:nvPr/>
+        </p:nvSpPr>
+        <p:spPr>
+          <a:xfrm>
+            <a:off x="5120640" y="868680"/>
+            <a:ext cx="6293815" cy="237744"/>
+          </a:xfrm>
+          <a:prstGeom prst="rect">
+            <a:avLst/>
+          </a:prstGeom>
+          <a:noFill/>
+          <a:ln/>
+        </p:spPr>
+        <p:txBody>
+          <a:bodyPr wrap="square" lIns="0" tIns="0" rIns="0" bIns="0" rtlCol="0" anchor="t"/>
+          <a:lstStyle/>
+          <a:p>
+            <a:pPr indent="0" marL="0">
+              <a:buNone/>
+            </a:pPr>
+            <a:r>
+              <a:rPr lang="en-US" sz="1000" spc="220" kern="0" dirty="0">
+                <a:solidFill>
+                  <a:srgbClr val="942838"/>
+                </a:solidFill>
+                <a:latin typeface="Montserrat SemiBold" pitchFamily="34" charset="0"/>
+                <a:ea typeface="Montserrat SemiBold" pitchFamily="34" charset="-122"/>
+                <a:cs typeface="Montserrat SemiBold" pitchFamily="34" charset="-120"/>
+              </a:rPr>
+              <a:t>BACKGROUND</a:t>
+            </a:r>
+            <a:endParaRPr lang="en-US" sz="1000" dirty="0"/>
+          </a:p>
+        </p:txBody>
+      </p:sp>
+      <p:sp>
+        <p:nvSpPr>
+          <p:cNvPr id="9" name="Text 5"/>
+          <p:cNvSpPr txBox="1"/>
+          <p:nvPr/>
+        </p:nvSpPr>
+        <p:spPr>
+          <a:xfrm>
+            <a:off x="5120640" y="1298448"/>
+            <a:ext cx="6293815" cy="219456"/>
+          </a:xfrm>
+          <a:prstGeom prst="rect">
+            <a:avLst/>
+          </a:prstGeom>
+          <a:noFill/>
+          <a:ln/>
+        </p:spPr>
+        <p:txBody>
+          <a:bodyPr wrap="square" lIns="0" tIns="0" rIns="0" bIns="0" rtlCol="0" anchor="t"/>
+          <a:lstStyle/>
+          <a:p>
+            <a:pPr indent="0" marL="0">
+              <a:buNone/>
+            </a:pPr>
+            <a:r>
+              <a:rPr lang="en-US" sz="850" spc="140" kern="0" dirty="0">
+                <a:solidFill>
+                  <a:srgbClr val="942838"/>
+                </a:solidFill>
+                <a:latin typeface="Montserrat SemiBold" pitchFamily="34" charset="0"/>
+                <a:ea typeface="Montserrat SemiBold" pitchFamily="34" charset="-122"/>
+                <a:cs typeface="Montserrat SemiBold" pitchFamily="34" charset="-120"/>
+              </a:rPr>
+              <a:t>POSITION</a:t>
+            </a:r>
+            <a:endParaRPr lang="en-US" sz="850" dirty="0"/>
+          </a:p>
+        </p:txBody>
+      </p:sp>
+      <p:sp>
+        <p:nvSpPr>
+          <p:cNvPr id="10" name="Text 6"/>
+          <p:cNvSpPr txBox="1"/>
+          <p:nvPr/>
+        </p:nvSpPr>
+        <p:spPr>
+          <a:xfrm>
+            <a:off x="5120640" y="1545336"/>
+            <a:ext cx="6293815" cy="475488"/>
+          </a:xfrm>
+          <a:prstGeom prst="rect">
+            <a:avLst/>
+          </a:prstGeom>
+          <a:noFill/>
+          <a:ln/>
+        </p:spPr>
+        <p:txBody>
+          <a:bodyPr wrap="square" lIns="0" tIns="0" rIns="0" bIns="0" rtlCol="0" anchor="t"/>
+          <a:lstStyle/>
+          <a:p>
+            <a:pPr indent="0" marL="0">
+              <a:lnSpc>
+                <a:spcPct val="120000"/>
+              </a:lnSpc>
+              <a:buNone/>
+            </a:pPr>
+            <a:r>
+              <a:rPr lang="en-US" sz="1250" dirty="0">
+                <a:solidFill>
+                  <a:srgbClr val="43464A"/>
+                </a:solidFill>
+                <a:latin typeface="Montserrat" pitchFamily="34" charset="0"/>
+                <a:ea typeface="Montserrat" pitchFamily="34" charset="-122"/>
+                <a:cs typeface="Montserrat" pitchFamily="34" charset="-120"/>
+              </a:rPr>
+              <a:t>Information Security Analyst Intern</a:t>
+            </a:r>
+            <a:endParaRPr lang="en-US" sz="1250" dirty="0"/>
+          </a:p>
+        </p:txBody>
+      </p:sp>
+      <p:sp>
+        <p:nvSpPr>
+          <p:cNvPr id="11" name="Shape 7"/>
           <p:cNvSpPr/>
           <p:nvPr/>
         </p:nvSpPr>
         <p:spPr>
           <a:xfrm>
-            <a:off x="777240" y="6181344"/>
-            <a:ext cx="10637215" cy="10973"/>
+            <a:off x="5120640" y="2084832"/>
+            <a:ext cx="6293815" cy="10973"/>
           </a:xfrm>
           <a:prstGeom prst="rect">
             <a:avLst/>
@@ -16287,14 +16473,14 @@
       </p:sp>
       <p:sp>
         <p:nvSpPr>
-          <p:cNvPr id="7" name="Text 4"/>
-          <p:cNvSpPr txBox="1"/>
-          <p:nvPr/>
-        </p:nvSpPr>
-        <p:spPr>
-          <a:xfrm>
-            <a:off x="777240" y="6327648"/>
-            <a:ext cx="7315200" cy="201168"/>
+          <p:cNvPr id="12" name="Text 8"/>
+          <p:cNvSpPr txBox="1"/>
+          <p:nvPr/>
+        </p:nvSpPr>
+        <p:spPr>
+          <a:xfrm>
+            <a:off x="5120640" y="2240280"/>
+            <a:ext cx="6293815" cy="219456"/>
           </a:xfrm>
           <a:prstGeom prst="rect">
             <a:avLst/>
@@ -16312,13 +16498,13 @@
             <a:r>
               <a:rPr lang="en-US" sz="850" spc="140" kern="0" dirty="0">
                 <a:solidFill>
-                  <a:srgbClr val="6E7175"/>
+                  <a:srgbClr val="942838"/>
                 </a:solidFill>
                 <a:latin typeface="Montserrat SemiBold" pitchFamily="34" charset="0"/>
                 <a:ea typeface="Montserrat SemiBold" pitchFamily="34" charset="-122"/>
                 <a:cs typeface="Montserrat SemiBold" pitchFamily="34" charset="-120"/>
               </a:rPr>
-              <a:t>EXECUTIVE SUMMARY</a:t>
+              <a:t>SCHOOL</a:t>
             </a:r>
             <a:endParaRPr lang="en-US" sz="850" dirty="0"/>
           </a:p>
@@ -16326,38 +16512,100 @@
       </p:sp>
       <p:sp>
         <p:nvSpPr>
-          <p:cNvPr id="8" name="Text 5"/>
-          <p:cNvSpPr txBox="1"/>
-          <p:nvPr/>
-        </p:nvSpPr>
-        <p:spPr>
-          <a:xfrm>
-            <a:off x="10317175" y="6327648"/>
-            <a:ext cx="1097280" cy="201168"/>
-          </a:xfrm>
-          <a:prstGeom prst="rect">
-            <a:avLst/>
-          </a:prstGeom>
-          <a:noFill/>
-          <a:ln/>
-        </p:spPr>
-        <p:txBody>
-          <a:bodyPr wrap="square" lIns="0" tIns="0" rIns="0" bIns="0" rtlCol="0" anchor="t"/>
-          <a:lstStyle/>
-          <a:p>
-            <a:pPr algn="r" indent="0" marL="0">
+          <p:cNvPr id="13" name="Text 9"/>
+          <p:cNvSpPr txBox="1"/>
+          <p:nvPr/>
+        </p:nvSpPr>
+        <p:spPr>
+          <a:xfrm>
+            <a:off x="5120640" y="2487168"/>
+            <a:ext cx="6293815" cy="475488"/>
+          </a:xfrm>
+          <a:prstGeom prst="rect">
+            <a:avLst/>
+          </a:prstGeom>
+          <a:noFill/>
+          <a:ln/>
+        </p:spPr>
+        <p:txBody>
+          <a:bodyPr wrap="square" lIns="0" tIns="0" rIns="0" bIns="0" rtlCol="0" anchor="t"/>
+          <a:lstStyle/>
+          <a:p>
+            <a:pPr indent="0" marL="0">
+              <a:lnSpc>
+                <a:spcPct val="120000"/>
+              </a:lnSpc>
+              <a:buNone/>
+            </a:pPr>
+            <a:r>
+              <a:rPr lang="en-US" sz="1250" dirty="0">
+                <a:solidFill>
+                  <a:srgbClr val="43464A"/>
+                </a:solidFill>
+                <a:latin typeface="Montserrat" pitchFamily="34" charset="0"/>
+                <a:ea typeface="Montserrat" pitchFamily="34" charset="-122"/>
+                <a:cs typeface="Montserrat" pitchFamily="34" charset="-120"/>
+              </a:rPr>
+              <a:t>Studying cybersecurity, with a focus on offensive security</a:t>
+            </a:r>
+            <a:endParaRPr lang="en-US" sz="1250" dirty="0"/>
+          </a:p>
+        </p:txBody>
+      </p:sp>
+      <p:sp>
+        <p:nvSpPr>
+          <p:cNvPr id="14" name="Shape 10"/>
+          <p:cNvSpPr/>
+          <p:nvPr/>
+        </p:nvSpPr>
+        <p:spPr>
+          <a:xfrm>
+            <a:off x="5120640" y="3026664"/>
+            <a:ext cx="6293815" cy="10973"/>
+          </a:xfrm>
+          <a:prstGeom prst="rect">
+            <a:avLst/>
+          </a:prstGeom>
+          <a:solidFill>
+            <a:srgbClr val="E6E4E2"/>
+          </a:solidFill>
+          <a:ln/>
+        </p:spPr>
+      </p:sp>
+      <p:sp>
+        <p:nvSpPr>
+          <p:cNvPr id="15" name="Text 11"/>
+          <p:cNvSpPr txBox="1"/>
+          <p:nvPr/>
+        </p:nvSpPr>
+        <p:spPr>
+          <a:xfrm>
+            <a:off x="5120640" y="3182112"/>
+            <a:ext cx="6293815" cy="219456"/>
+          </a:xfrm>
+          <a:prstGeom prst="rect">
+            <a:avLst/>
+          </a:prstGeom>
+          <a:noFill/>
+          <a:ln/>
+        </p:spPr>
+        <p:txBody>
+          <a:bodyPr wrap="square" lIns="0" tIns="0" rIns="0" bIns="0" rtlCol="0" anchor="t"/>
+          <a:lstStyle/>
+          <a:p>
+            <a:pPr indent="0" marL="0">
               <a:buNone/>
             </a:pPr>
             <a:r>
               <a:rPr lang="en-US" sz="850" spc="140" kern="0" dirty="0">
                 <a:solidFill>
-                  <a:srgbClr val="6E7175"/>
+                  <a:srgbClr val="942838"/>
                 </a:solidFill>
                 <a:latin typeface="Montserrat SemiBold" pitchFamily="34" charset="0"/>
                 <a:ea typeface="Montserrat SemiBold" pitchFamily="34" charset="-122"/>
                 <a:cs typeface="Montserrat SemiBold" pitchFamily="34" charset="-120"/>
               </a:rPr>
-              <a:t>03</a:t>
+              <a:t>BACKGROUND</a:t>
             </a:r>
             <a:endParaRPr lang="en-US" sz="850" dirty="0"/>
           </a:p>
@@ -16365,53 +16613,76 @@
       </p:sp>
       <p:sp>
         <p:nvSpPr>
-          <p:cNvPr id="9" name="Text 6"/>
-          <p:cNvSpPr txBox="1"/>
-          <p:nvPr/>
-        </p:nvSpPr>
-        <p:spPr>
-          <a:xfrm>
-            <a:off x="777240" y="1956816"/>
-            <a:ext cx="10241280" cy="310896"/>
-          </a:xfrm>
-          <a:prstGeom prst="rect">
-            <a:avLst/>
-          </a:prstGeom>
-          <a:noFill/>
-          <a:ln/>
-        </p:spPr>
-        <p:txBody>
-          <a:bodyPr wrap="square" lIns="0" tIns="0" rIns="0" bIns="0" rtlCol="0" anchor="t"/>
-          <a:lstStyle/>
-          <a:p>
-            <a:pPr indent="0" marL="0">
-              <a:buNone/>
-            </a:pPr>
-            <a:r>
-              <a:rPr lang="en-US" sz="1400" dirty="0">
-                <a:solidFill>
-                  <a:srgbClr val="6E7175"/>
-                </a:solidFill>
-                <a:latin typeface="Montserrat Medium" pitchFamily="34" charset="0"/>
-                <a:ea typeface="Montserrat Medium" pitchFamily="34" charset="-122"/>
-                <a:cs typeface="Montserrat Medium" pitchFamily="34" charset="-120"/>
-              </a:rPr>
-              <a:t>Three separate gaps, three things the team keeps using. This is the whole story on one slide.</a:t>
-            </a:r>
-            <a:endParaRPr lang="en-US" sz="1400" dirty="0"/>
-          </a:p>
-        </p:txBody>
-      </p:sp>
-      <p:sp>
-        <p:nvSpPr>
-          <p:cNvPr id="10" name="Text 7"/>
-          <p:cNvSpPr txBox="1"/>
-          <p:nvPr/>
-        </p:nvSpPr>
-        <p:spPr>
-          <a:xfrm>
-            <a:off x="777240" y="2487168"/>
-            <a:ext cx="3200400" cy="201168"/>
+          <p:cNvPr id="16" name="Text 12"/>
+          <p:cNvSpPr txBox="1"/>
+          <p:nvPr/>
+        </p:nvSpPr>
+        <p:spPr>
+          <a:xfrm>
+            <a:off x="5120640" y="3429000"/>
+            <a:ext cx="6293815" cy="475488"/>
+          </a:xfrm>
+          <a:prstGeom prst="rect">
+            <a:avLst/>
+          </a:prstGeom>
+          <a:noFill/>
+          <a:ln/>
+        </p:spPr>
+        <p:txBody>
+          <a:bodyPr wrap="square" lIns="0" tIns="0" rIns="0" bIns="0" rtlCol="0" anchor="t"/>
+          <a:lstStyle/>
+          <a:p>
+            <a:pPr indent="0" marL="0">
+              <a:lnSpc>
+                <a:spcPct val="120000"/>
+              </a:lnSpc>
+              <a:buNone/>
+            </a:pPr>
+            <a:r>
+              <a:rPr lang="en-US" sz="1250" dirty="0">
+                <a:solidFill>
+                  <a:srgbClr val="43464A"/>
+                </a:solidFill>
+                <a:latin typeface="Montserrat" pitchFamily="34" charset="0"/>
+                <a:ea typeface="Montserrat" pitchFamily="34" charset="-122"/>
+                <a:cs typeface="Montserrat" pitchFamily="34" charset="-120"/>
+              </a:rPr>
+              <a:t>Hands-on security work across vulnerability management, application security, and network security</a:t>
+            </a:r>
+            <a:endParaRPr lang="en-US" sz="1250" dirty="0"/>
+          </a:p>
+        </p:txBody>
+      </p:sp>
+      <p:sp>
+        <p:nvSpPr>
+          <p:cNvPr id="17" name="Shape 13"/>
+          <p:cNvSpPr/>
+          <p:nvPr/>
+        </p:nvSpPr>
+        <p:spPr>
+          <a:xfrm>
+            <a:off x="5120640" y="3968496"/>
+            <a:ext cx="6293815" cy="10973"/>
+          </a:xfrm>
+          <a:prstGeom prst="rect">
+            <a:avLst/>
+          </a:prstGeom>
+          <a:solidFill>
+            <a:srgbClr val="E6E4E2"/>
+          </a:solidFill>
+          <a:ln/>
+        </p:spPr>
+      </p:sp>
+      <p:sp>
+        <p:nvSpPr>
+          <p:cNvPr id="18" name="Text 14"/>
+          <p:cNvSpPr txBox="1"/>
+          <p:nvPr/>
+        </p:nvSpPr>
+        <p:spPr>
+          <a:xfrm>
+            <a:off x="5120640" y="4123944"/>
+            <a:ext cx="6293815" cy="219456"/>
           </a:xfrm>
           <a:prstGeom prst="rect">
             <a:avLst/>
@@ -16435,7 +16706,7 @@
                 <a:ea typeface="Montserrat SemiBold" pitchFamily="34" charset="-122"/>
                 <a:cs typeface="Montserrat SemiBold" pitchFamily="34" charset="-120"/>
               </a:rPr>
-              <a:t>THE PROBLEM</a:t>
+              <a:t>CERTIFICATIONS</a:t>
             </a:r>
             <a:endParaRPr lang="en-US" sz="850" dirty="0"/>
           </a:p>
@@ -16443,14 +16714,76 @@
       </p:sp>
       <p:sp>
         <p:nvSpPr>
-          <p:cNvPr id="11" name="Text 8"/>
-          <p:cNvSpPr txBox="1"/>
-          <p:nvPr/>
-        </p:nvSpPr>
-        <p:spPr>
-          <a:xfrm>
-            <a:off x="4224528" y="2487168"/>
-            <a:ext cx="3657600" cy="201168"/>
+          <p:cNvPr id="19" name="Text 15"/>
+          <p:cNvSpPr txBox="1"/>
+          <p:nvPr/>
+        </p:nvSpPr>
+        <p:spPr>
+          <a:xfrm>
+            <a:off x="5120640" y="4370832"/>
+            <a:ext cx="6293815" cy="475488"/>
+          </a:xfrm>
+          <a:prstGeom prst="rect">
+            <a:avLst/>
+          </a:prstGeom>
+          <a:noFill/>
+          <a:ln/>
+        </p:spPr>
+        <p:txBody>
+          <a:bodyPr wrap="square" lIns="0" tIns="0" rIns="0" bIns="0" rtlCol="0" anchor="t"/>
+          <a:lstStyle/>
+          <a:p>
+            <a:pPr indent="0" marL="0">
+              <a:lnSpc>
+                <a:spcPct val="120000"/>
+              </a:lnSpc>
+              <a:buNone/>
+            </a:pPr>
+            <a:r>
+              <a:rPr lang="en-US" sz="1250" dirty="0">
+                <a:solidFill>
+                  <a:srgbClr val="43464A"/>
+                </a:solidFill>
+                <a:latin typeface="Montserrat" pitchFamily="34" charset="0"/>
+                <a:ea typeface="Montserrat" pitchFamily="34" charset="-122"/>
+                <a:cs typeface="Montserrat" pitchFamily="34" charset="-120"/>
+              </a:rPr>
+              <a:t>Working toward the PWPA and PJPT practical certifications</a:t>
+            </a:r>
+            <a:endParaRPr lang="en-US" sz="1250" dirty="0"/>
+          </a:p>
+        </p:txBody>
+      </p:sp>
+      <p:sp>
+        <p:nvSpPr>
+          <p:cNvPr id="20" name="Shape 16"/>
+          <p:cNvSpPr/>
+          <p:nvPr/>
+        </p:nvSpPr>
+        <p:spPr>
+          <a:xfrm>
+            <a:off x="5120640" y="4910328"/>
+            <a:ext cx="6293815" cy="10973"/>
+          </a:xfrm>
+          <a:prstGeom prst="rect">
+            <a:avLst/>
+          </a:prstGeom>
+          <a:solidFill>
+            <a:srgbClr val="E6E4E2"/>
+          </a:solidFill>
+          <a:ln/>
+        </p:spPr>
+      </p:sp>
+      <p:sp>
+        <p:nvSpPr>
+          <p:cNvPr id="21" name="Text 17"/>
+          <p:cNvSpPr txBox="1"/>
+          <p:nvPr/>
+        </p:nvSpPr>
+        <p:spPr>
+          <a:xfrm>
+            <a:off x="5120640" y="5065776"/>
+            <a:ext cx="6293815" cy="219456"/>
           </a:xfrm>
           <a:prstGeom prst="rect">
             <a:avLst/>
@@ -16474,7 +16807,7 @@
                 <a:ea typeface="Montserrat SemiBold" pitchFamily="34" charset="-122"/>
                 <a:cs typeface="Montserrat SemiBold" pitchFamily="34" charset="-120"/>
               </a:rPr>
-              <a:t>WHAT I BUILT</a:t>
+              <a:t>CAREER DIRECTION</a:t>
             </a:r>
             <a:endParaRPr lang="en-US" sz="850" dirty="0"/>
           </a:p>
@@ -16482,14 +16815,100 @@
       </p:sp>
       <p:sp>
         <p:nvSpPr>
-          <p:cNvPr id="12" name="Text 9"/>
-          <p:cNvSpPr txBox="1"/>
-          <p:nvPr/>
-        </p:nvSpPr>
-        <p:spPr>
-          <a:xfrm>
-            <a:off x="8101584" y="2487168"/>
-            <a:ext cx="3312871" cy="201168"/>
+          <p:cNvPr id="22" name="Text 18"/>
+          <p:cNvSpPr txBox="1"/>
+          <p:nvPr/>
+        </p:nvSpPr>
+        <p:spPr>
+          <a:xfrm>
+            <a:off x="5120640" y="5312664"/>
+            <a:ext cx="6293815" cy="475488"/>
+          </a:xfrm>
+          <a:prstGeom prst="rect">
+            <a:avLst/>
+          </a:prstGeom>
+          <a:noFill/>
+          <a:ln/>
+        </p:spPr>
+        <p:txBody>
+          <a:bodyPr wrap="square" lIns="0" tIns="0" rIns="0" bIns="0" rtlCol="0" anchor="t"/>
+          <a:lstStyle/>
+          <a:p>
+            <a:pPr indent="0" marL="0">
+              <a:lnSpc>
+                <a:spcPct val="120000"/>
+              </a:lnSpc>
+              <a:buNone/>
+            </a:pPr>
+            <a:r>
+              <a:rPr lang="en-US" sz="1250" dirty="0">
+                <a:solidFill>
+                  <a:srgbClr val="43464A"/>
+                </a:solidFill>
+                <a:latin typeface="Montserrat" pitchFamily="34" charset="0"/>
+                <a:ea typeface="Montserrat" pitchFamily="34" charset="-122"/>
+                <a:cs typeface="Montserrat" pitchFamily="34" charset="-120"/>
+              </a:rPr>
+              <a:t>Penetration testing — finding weaknesses before an attacker does</a:t>
+            </a:r>
+            <a:endParaRPr lang="en-US" sz="1250" dirty="0"/>
+          </a:p>
+        </p:txBody>
+      </p:sp>
+      <p:pic>
+        <p:nvPicPr>
+          <p:cNvPr id="23" name="Image 2" descr="/home/user/ai/assets/gen/logo-red.png">    </p:cNvPr>
+          <p:cNvPicPr>
+            <a:picLocks noChangeAspect="1"/>
+          </p:cNvPicPr>
+          <p:nvPr/>
+        </p:nvPicPr>
+        <p:blipFill>
+          <a:blip r:embed="rId3"/>
+          <a:stretch>
+            <a:fillRect/>
+          </a:stretch>
+        </p:blipFill>
+        <p:spPr>
+          <a:xfrm>
+            <a:off x="9768535" y="457200"/>
+            <a:ext cx="1645920" cy="166053"/>
+          </a:xfrm>
+          <a:prstGeom prst="rect">
+            <a:avLst/>
+          </a:prstGeom>
+        </p:spPr>
+      </p:pic>
+      <p:sp>
+        <p:nvSpPr>
+          <p:cNvPr id="24" name="Shape 19"/>
+          <p:cNvSpPr/>
+          <p:nvPr/>
+        </p:nvSpPr>
+        <p:spPr>
+          <a:xfrm>
+            <a:off x="5120640" y="6181344"/>
+            <a:ext cx="6293815" cy="10973"/>
+          </a:xfrm>
+          <a:prstGeom prst="rect">
+            <a:avLst/>
+          </a:prstGeom>
+          <a:solidFill>
+            <a:srgbClr val="E6E4E2"/>
+          </a:solidFill>
+          <a:ln/>
+        </p:spPr>
+      </p:sp>
+      <p:sp>
+        <p:nvSpPr>
+          <p:cNvPr id="25" name="Text 20"/>
+          <p:cNvSpPr txBox="1"/>
+          <p:nvPr/>
+        </p:nvSpPr>
+        <p:spPr>
+          <a:xfrm>
+            <a:off x="5120640" y="6327648"/>
+            <a:ext cx="7315200" cy="201168"/>
           </a:xfrm>
           <a:prstGeom prst="rect">
             <a:avLst/>
@@ -16507,13 +16926,13 @@
             <a:r>
               <a:rPr lang="en-US" sz="850" spc="140" kern="0" dirty="0">
                 <a:solidFill>
-                  <a:srgbClr val="942838"/>
+                  <a:srgbClr val="6E7175"/>
                 </a:solidFill>
                 <a:latin typeface="Montserrat SemiBold" pitchFamily="34" charset="0"/>
                 <a:ea typeface="Montserrat SemiBold" pitchFamily="34" charset="-122"/>
                 <a:cs typeface="Montserrat SemiBold" pitchFamily="34" charset="-120"/>
               </a:rPr>
-              <a:t>THE PROOF</a:t>
+              <a:t>ABOUT ME</a:t>
             </a:r>
             <a:endParaRPr lang="en-US" sz="850" dirty="0"/>
           </a:p>
@@ -16521,505 +16940,40 @@
       </p:sp>
       <p:sp>
         <p:nvSpPr>
-          <p:cNvPr id="13" name="Shape 10"/>
-          <p:cNvSpPr/>
-          <p:nvPr/>
-        </p:nvSpPr>
-        <p:spPr>
-          <a:xfrm>
-            <a:off x="777240" y="2743200"/>
-            <a:ext cx="10637215" cy="10973"/>
-          </a:xfrm>
-          <a:prstGeom prst="rect">
-            <a:avLst/>
-          </a:prstGeom>
-          <a:solidFill>
-            <a:srgbClr val="E6E4E2"/>
-          </a:solidFill>
-          <a:ln/>
-        </p:spPr>
-      </p:sp>
-      <p:sp>
-        <p:nvSpPr>
-          <p:cNvPr id="14" name="Text 11"/>
-          <p:cNvSpPr txBox="1"/>
-          <p:nvPr/>
-        </p:nvSpPr>
-        <p:spPr>
-          <a:xfrm>
-            <a:off x="777240" y="2889504"/>
-            <a:ext cx="3200400" cy="822960"/>
-          </a:xfrm>
-          <a:prstGeom prst="rect">
-            <a:avLst/>
-          </a:prstGeom>
-          <a:noFill/>
-          <a:ln/>
-        </p:spPr>
-        <p:txBody>
-          <a:bodyPr wrap="square" lIns="0" tIns="0" rIns="0" bIns="0" rtlCol="0" anchor="t"/>
-          <a:lstStyle/>
-          <a:p>
-            <a:pPr indent="0" marL="0">
-              <a:lnSpc>
-                <a:spcPct val="124000"/>
-              </a:lnSpc>
-              <a:buNone/>
-            </a:pPr>
-            <a:r>
-              <a:rPr lang="en-US" sz="1100" dirty="0">
-                <a:solidFill>
-                  <a:srgbClr val="43464A"/>
-                </a:solidFill>
-                <a:latin typeface="Montserrat" pitchFamily="34" charset="0"/>
-                <a:ea typeface="Montserrat" pitchFamily="34" charset="-122"/>
-                <a:cs typeface="Montserrat" pitchFamily="34" charset="-120"/>
-              </a:rPr>
-              <a:t>New machines could ship without the security tools they need.</a:t>
-            </a:r>
-            <a:endParaRPr lang="en-US" sz="1100" dirty="0"/>
-          </a:p>
-        </p:txBody>
-      </p:sp>
-      <p:sp>
-        <p:nvSpPr>
-          <p:cNvPr id="15" name="Text 12"/>
-          <p:cNvSpPr txBox="1"/>
-          <p:nvPr/>
-        </p:nvSpPr>
-        <p:spPr>
-          <a:xfrm>
-            <a:off x="4224528" y="2889504"/>
-            <a:ext cx="3383280" cy="822960"/>
-          </a:xfrm>
-          <a:prstGeom prst="rect">
-            <a:avLst/>
-          </a:prstGeom>
-          <a:noFill/>
-          <a:ln/>
-        </p:spPr>
-        <p:txBody>
-          <a:bodyPr wrap="square" lIns="0" tIns="0" rIns="0" bIns="0" rtlCol="0" anchor="t"/>
-          <a:lstStyle/>
-          <a:p>
-            <a:pPr indent="0" marL="0">
-              <a:lnSpc>
-                <a:spcPct val="124000"/>
-              </a:lnSpc>
-              <a:buNone/>
-            </a:pPr>
-            <a:r>
-              <a:rPr lang="en-US" sz="1100" dirty="0">
-                <a:solidFill>
-                  <a:srgbClr val="2B2D30"/>
+          <p:cNvPr id="26" name="Text 21"/>
+          <p:cNvSpPr txBox="1"/>
+          <p:nvPr/>
+        </p:nvSpPr>
+        <p:spPr>
+          <a:xfrm>
+            <a:off x="10317175" y="6327648"/>
+            <a:ext cx="1097280" cy="201168"/>
+          </a:xfrm>
+          <a:prstGeom prst="rect">
+            <a:avLst/>
+          </a:prstGeom>
+          <a:noFill/>
+          <a:ln/>
+        </p:spPr>
+        <p:txBody>
+          <a:bodyPr wrap="square" lIns="0" tIns="0" rIns="0" bIns="0" rtlCol="0" anchor="t"/>
+          <a:lstStyle/>
+          <a:p>
+            <a:pPr algn="r" indent="0" marL="0">
+              <a:buNone/>
+            </a:pPr>
+            <a:r>
+              <a:rPr lang="en-US" sz="850" spc="140" kern="0" dirty="0">
+                <a:solidFill>
+                  <a:srgbClr val="6E7175"/>
                 </a:solidFill>
                 <a:latin typeface="Montserrat SemiBold" pitchFamily="34" charset="0"/>
                 <a:ea typeface="Montserrat SemiBold" pitchFamily="34" charset="-122"/>
                 <a:cs typeface="Montserrat SemiBold" pitchFamily="34" charset="-120"/>
               </a:rPr>
-              <a:t>A written framework naming all nine required tools and who owns each.</a:t>
-            </a:r>
-            <a:endParaRPr lang="en-US" sz="1100" dirty="0"/>
-          </a:p>
-        </p:txBody>
-      </p:sp>
-      <p:sp>
-        <p:nvSpPr>
-          <p:cNvPr id="16" name="Shape 13"/>
-          <p:cNvSpPr/>
-          <p:nvPr/>
-        </p:nvSpPr>
-        <p:spPr>
-          <a:xfrm>
-            <a:off x="7918704" y="2779776"/>
-            <a:ext cx="3495751" cy="859536"/>
-          </a:xfrm>
-          <a:prstGeom prst="roundRect">
-            <a:avLst>
-              <a:gd name="adj" fmla="val 5319"/>
-            </a:avLst>
-          </a:prstGeom>
-          <a:solidFill>
-            <a:srgbClr val="F6EEF0"/>
-          </a:solidFill>
-          <a:ln/>
-        </p:spPr>
-      </p:sp>
-      <p:sp>
-        <p:nvSpPr>
-          <p:cNvPr id="17" name="Text 14"/>
-          <p:cNvSpPr txBox="1"/>
-          <p:nvPr/>
-        </p:nvSpPr>
-        <p:spPr>
-          <a:xfrm>
-            <a:off x="8101584" y="2907792"/>
-            <a:ext cx="3129991" cy="658368"/>
-          </a:xfrm>
-          <a:prstGeom prst="rect">
-            <a:avLst/>
-          </a:prstGeom>
-          <a:noFill/>
-          <a:ln/>
-        </p:spPr>
-        <p:txBody>
-          <a:bodyPr wrap="square" lIns="0" tIns="0" rIns="0" bIns="0" rtlCol="0" anchor="t"/>
-          <a:lstStyle/>
-          <a:p>
-            <a:pPr indent="0" marL="0">
-              <a:lnSpc>
-                <a:spcPct val="124000"/>
-              </a:lnSpc>
-              <a:buNone/>
-            </a:pPr>
-            <a:r>
-              <a:rPr lang="en-US" sz="1100" dirty="0">
-                <a:solidFill>
-                  <a:srgbClr val="942838"/>
-                </a:solidFill>
-                <a:latin typeface="Montserrat SemiBold" pitchFamily="34" charset="0"/>
-                <a:ea typeface="Montserrat SemiBold" pitchFamily="34" charset="-122"/>
-                <a:cs typeface="Montserrat SemiBold" pitchFamily="34" charset="-120"/>
-              </a:rPr>
-              <a:t>Drafted and staged for Q4 sign-off</a:t>
-            </a:r>
-            <a:endParaRPr lang="en-US" sz="1100" dirty="0"/>
-          </a:p>
-        </p:txBody>
-      </p:sp>
-      <p:sp>
-        <p:nvSpPr>
-          <p:cNvPr id="18" name="Shape 15"/>
-          <p:cNvSpPr/>
-          <p:nvPr/>
-        </p:nvSpPr>
-        <p:spPr>
-          <a:xfrm>
-            <a:off x="777240" y="3858768"/>
-            <a:ext cx="10637215" cy="10973"/>
-          </a:xfrm>
-          <a:prstGeom prst="rect">
-            <a:avLst/>
-          </a:prstGeom>
-          <a:solidFill>
-            <a:srgbClr val="E6E4E2"/>
-          </a:solidFill>
-          <a:ln/>
-        </p:spPr>
-      </p:sp>
-      <p:sp>
-        <p:nvSpPr>
-          <p:cNvPr id="19" name="Text 16"/>
-          <p:cNvSpPr txBox="1"/>
-          <p:nvPr/>
-        </p:nvSpPr>
-        <p:spPr>
-          <a:xfrm>
-            <a:off x="777240" y="4023360"/>
-            <a:ext cx="3200400" cy="822960"/>
-          </a:xfrm>
-          <a:prstGeom prst="rect">
-            <a:avLst/>
-          </a:prstGeom>
-          <a:noFill/>
-          <a:ln/>
-        </p:spPr>
-        <p:txBody>
-          <a:bodyPr wrap="square" lIns="0" tIns="0" rIns="0" bIns="0" rtlCol="0" anchor="t"/>
-          <a:lstStyle/>
-          <a:p>
-            <a:pPr indent="0" marL="0">
-              <a:lnSpc>
-                <a:spcPct val="124000"/>
-              </a:lnSpc>
-              <a:buNone/>
-            </a:pPr>
-            <a:r>
-              <a:rPr lang="en-US" sz="1100" dirty="0">
-                <a:solidFill>
-                  <a:srgbClr val="43464A"/>
-                </a:solidFill>
-                <a:latin typeface="Montserrat" pitchFamily="34" charset="0"/>
-                <a:ea typeface="Montserrat" pitchFamily="34" charset="-122"/>
-                <a:cs typeface="Montserrat" pitchFamily="34" charset="-120"/>
-              </a:rPr>
-              <a:t>Attackers hide malicious code inside the open-source packages we depend on.</a:t>
-            </a:r>
-            <a:endParaRPr lang="en-US" sz="1100" dirty="0"/>
-          </a:p>
-        </p:txBody>
-      </p:sp>
-      <p:sp>
-        <p:nvSpPr>
-          <p:cNvPr id="20" name="Text 17"/>
-          <p:cNvSpPr txBox="1"/>
-          <p:nvPr/>
-        </p:nvSpPr>
-        <p:spPr>
-          <a:xfrm>
-            <a:off x="4224528" y="4023360"/>
-            <a:ext cx="3383280" cy="822960"/>
-          </a:xfrm>
-          <a:prstGeom prst="rect">
-            <a:avLst/>
-          </a:prstGeom>
-          <a:noFill/>
-          <a:ln/>
-        </p:spPr>
-        <p:txBody>
-          <a:bodyPr wrap="square" lIns="0" tIns="0" rIns="0" bIns="0" rtlCol="0" anchor="t"/>
-          <a:lstStyle/>
-          <a:p>
-            <a:pPr indent="0" marL="0">
-              <a:lnSpc>
-                <a:spcPct val="124000"/>
-              </a:lnSpc>
-              <a:buNone/>
-            </a:pPr>
-            <a:r>
-              <a:rPr lang="en-US" sz="1100" dirty="0">
-                <a:solidFill>
-                  <a:srgbClr val="2B2D30"/>
-                </a:solidFill>
-                <a:latin typeface="Montserrat SemiBold" pitchFamily="34" charset="0"/>
-                <a:ea typeface="Montserrat SemiBold" pitchFamily="34" charset="-122"/>
-                <a:cs typeface="Montserrat SemiBold" pitchFamily="34" charset="-120"/>
-              </a:rPr>
-              <a:t>AEGIS — a scanner that checks whether our code actually reaches the flaw.</a:t>
-            </a:r>
-            <a:endParaRPr lang="en-US" sz="1100" dirty="0"/>
-          </a:p>
-        </p:txBody>
-      </p:sp>
-      <p:sp>
-        <p:nvSpPr>
-          <p:cNvPr id="21" name="Shape 18"/>
-          <p:cNvSpPr/>
-          <p:nvPr/>
-        </p:nvSpPr>
-        <p:spPr>
-          <a:xfrm>
-            <a:off x="7918704" y="3913632"/>
-            <a:ext cx="3495751" cy="859536"/>
-          </a:xfrm>
-          <a:prstGeom prst="roundRect">
-            <a:avLst>
-              <a:gd name="adj" fmla="val 5319"/>
-            </a:avLst>
-          </a:prstGeom>
-          <a:solidFill>
-            <a:srgbClr val="F6EEF0"/>
-          </a:solidFill>
-          <a:ln/>
-        </p:spPr>
-      </p:sp>
-      <p:sp>
-        <p:nvSpPr>
-          <p:cNvPr id="22" name="Text 19"/>
-          <p:cNvSpPr txBox="1"/>
-          <p:nvPr/>
-        </p:nvSpPr>
-        <p:spPr>
-          <a:xfrm>
-            <a:off x="8101584" y="4041648"/>
-            <a:ext cx="3129991" cy="658368"/>
-          </a:xfrm>
-          <a:prstGeom prst="rect">
-            <a:avLst/>
-          </a:prstGeom>
-          <a:noFill/>
-          <a:ln/>
-        </p:spPr>
-        <p:txBody>
-          <a:bodyPr wrap="square" lIns="0" tIns="0" rIns="0" bIns="0" rtlCol="0" anchor="t"/>
-          <a:lstStyle/>
-          <a:p>
-            <a:pPr indent="0" marL="0">
-              <a:lnSpc>
-                <a:spcPct val="124000"/>
-              </a:lnSpc>
-              <a:buNone/>
-            </a:pPr>
-            <a:r>
-              <a:rPr lang="en-US" sz="1100" dirty="0">
-                <a:solidFill>
-                  <a:srgbClr val="942838"/>
-                </a:solidFill>
-                <a:latin typeface="Montserrat SemiBold" pitchFamily="34" charset="0"/>
-                <a:ea typeface="Montserrat SemiBold" pitchFamily="34" charset="-122"/>
-                <a:cs typeface="Montserrat SemiBold" pitchFamily="34" charset="-120"/>
-              </a:rPr>
-              <a:t>5,675 packages scanned in production by an earlier version</a:t>
-            </a:r>
-            <a:endParaRPr lang="en-US" sz="1100" dirty="0"/>
-          </a:p>
-        </p:txBody>
-      </p:sp>
-      <p:sp>
-        <p:nvSpPr>
-          <p:cNvPr id="23" name="Shape 20"/>
-          <p:cNvSpPr/>
-          <p:nvPr/>
-        </p:nvSpPr>
-        <p:spPr>
-          <a:xfrm>
-            <a:off x="777240" y="4992624"/>
-            <a:ext cx="10637215" cy="10973"/>
-          </a:xfrm>
-          <a:prstGeom prst="rect">
-            <a:avLst/>
-          </a:prstGeom>
-          <a:solidFill>
-            <a:srgbClr val="E6E4E2"/>
-          </a:solidFill>
-          <a:ln/>
-        </p:spPr>
-      </p:sp>
-      <p:sp>
-        <p:nvSpPr>
-          <p:cNvPr id="24" name="Text 21"/>
-          <p:cNvSpPr txBox="1"/>
-          <p:nvPr/>
-        </p:nvSpPr>
-        <p:spPr>
-          <a:xfrm>
-            <a:off x="777240" y="5157216"/>
-            <a:ext cx="3200400" cy="822960"/>
-          </a:xfrm>
-          <a:prstGeom prst="rect">
-            <a:avLst/>
-          </a:prstGeom>
-          <a:noFill/>
-          <a:ln/>
-        </p:spPr>
-        <p:txBody>
-          <a:bodyPr wrap="square" lIns="0" tIns="0" rIns="0" bIns="0" rtlCol="0" anchor="t"/>
-          <a:lstStyle/>
-          <a:p>
-            <a:pPr indent="0" marL="0">
-              <a:lnSpc>
-                <a:spcPct val="124000"/>
-              </a:lnSpc>
-              <a:buNone/>
-            </a:pPr>
-            <a:r>
-              <a:rPr lang="en-US" sz="1100" dirty="0">
-                <a:solidFill>
-                  <a:srgbClr val="43464A"/>
-                </a:solidFill>
-                <a:latin typeface="Montserrat" pitchFamily="34" charset="0"/>
-                <a:ea typeface="Montserrat" pitchFamily="34" charset="-122"/>
-                <a:cs typeface="Montserrat" pitchFamily="34" charset="-120"/>
-              </a:rPr>
-              <a:t>Matching every tracked flaw to its patch took about two days of analyst time.</a:t>
-            </a:r>
-            <a:endParaRPr lang="en-US" sz="1100" dirty="0"/>
-          </a:p>
-        </p:txBody>
-      </p:sp>
-      <p:sp>
-        <p:nvSpPr>
-          <p:cNvPr id="25" name="Text 22"/>
-          <p:cNvSpPr txBox="1"/>
-          <p:nvPr/>
-        </p:nvSpPr>
-        <p:spPr>
-          <a:xfrm>
-            <a:off x="4224528" y="5157216"/>
-            <a:ext cx="3383280" cy="822960"/>
-          </a:xfrm>
-          <a:prstGeom prst="rect">
-            <a:avLst/>
-          </a:prstGeom>
-          <a:noFill/>
-          <a:ln/>
-        </p:spPr>
-        <p:txBody>
-          <a:bodyPr wrap="square" lIns="0" tIns="0" rIns="0" bIns="0" rtlCol="0" anchor="t"/>
-          <a:lstStyle/>
-          <a:p>
-            <a:pPr indent="0" marL="0">
-              <a:lnSpc>
-                <a:spcPct val="124000"/>
-              </a:lnSpc>
-              <a:buNone/>
-            </a:pPr>
-            <a:r>
-              <a:rPr lang="en-US" sz="1100" dirty="0">
-                <a:solidFill>
-                  <a:srgbClr val="2B2D30"/>
-                </a:solidFill>
-                <a:latin typeface="Montserrat SemiBold" pitchFamily="34" charset="0"/>
-                <a:ea typeface="Montserrat SemiBold" pitchFamily="34" charset="-122"/>
-                <a:cs typeface="Montserrat SemiBold" pitchFamily="34" charset="-120"/>
-              </a:rPr>
-              <a:t>A script that does the matching automatically, then consolidates the result.</a:t>
-            </a:r>
-            <a:endParaRPr lang="en-US" sz="1100" dirty="0"/>
-          </a:p>
-        </p:txBody>
-      </p:sp>
-      <p:sp>
-        <p:nvSpPr>
-          <p:cNvPr id="26" name="Shape 23"/>
-          <p:cNvSpPr/>
-          <p:nvPr/>
-        </p:nvSpPr>
-        <p:spPr>
-          <a:xfrm>
-            <a:off x="7918704" y="5047488"/>
-            <a:ext cx="3495751" cy="859536"/>
-          </a:xfrm>
-          <a:prstGeom prst="roundRect">
-            <a:avLst>
-              <a:gd name="adj" fmla="val 5319"/>
-            </a:avLst>
-          </a:prstGeom>
-          <a:solidFill>
-            <a:srgbClr val="F6EEF0"/>
-          </a:solidFill>
-          <a:ln/>
-        </p:spPr>
-      </p:sp>
-      <p:sp>
-        <p:nvSpPr>
-          <p:cNvPr id="27" name="Text 24"/>
-          <p:cNvSpPr txBox="1"/>
-          <p:nvPr/>
-        </p:nvSpPr>
-        <p:spPr>
-          <a:xfrm>
-            <a:off x="8101584" y="5175504"/>
-            <a:ext cx="3129991" cy="658368"/>
-          </a:xfrm>
-          <a:prstGeom prst="rect">
-            <a:avLst/>
-          </a:prstGeom>
-          <a:noFill/>
-          <a:ln/>
-        </p:spPr>
-        <p:txBody>
-          <a:bodyPr wrap="square" lIns="0" tIns="0" rIns="0" bIns="0" rtlCol="0" anchor="t"/>
-          <a:lstStyle/>
-          <a:p>
-            <a:pPr indent="0" marL="0">
-              <a:lnSpc>
-                <a:spcPct val="124000"/>
-              </a:lnSpc>
-              <a:buNone/>
-            </a:pPr>
-            <a:r>
-              <a:rPr lang="en-US" sz="1100" dirty="0">
-                <a:solidFill>
-                  <a:srgbClr val="942838"/>
-                </a:solidFill>
-                <a:latin typeface="Montserrat SemiBold" pitchFamily="34" charset="0"/>
-                <a:ea typeface="Montserrat SemiBold" pitchFamily="34" charset="-122"/>
-                <a:cs typeface="Montserrat SemiBold" pitchFamily="34" charset="-120"/>
-              </a:rPr>
-              <a:t>117 matched in ~12 sec; 209 rows became 46 tickets</a:t>
-            </a:r>
-            <a:endParaRPr lang="en-US" sz="1100" dirty="0"/>
+              <a:t>03</a:t>
+            </a:r>
+            <a:endParaRPr lang="en-US" sz="850" dirty="0"/>
           </a:p>
         </p:txBody>
       </p:sp>
@@ -17057,7 +17011,7 @@
       </p:grpSpPr>
       <p:pic>
         <p:nvPicPr>
-          <p:cNvPr id="2" name="Image 0" descr="/home/user/ai/assets/gen/panel-red-left.png">    </p:cNvPr>
+          <p:cNvPr id="2" name="Image 0" descr="/home/user/ai/assets/gen/logo-red.png">    </p:cNvPr>
           <p:cNvPicPr>
             <a:picLocks noChangeAspect="1"/>
           </p:cNvPicPr>
@@ -17071,48 +17025,24 @@
         </p:blipFill>
         <p:spPr>
           <a:xfrm>
-            <a:off x="0" y="0"/>
-            <a:ext cx="4343400" cy="6858000"/>
+            <a:off x="9768535" y="457200"/>
+            <a:ext cx="1645920" cy="166053"/>
           </a:xfrm>
           <a:prstGeom prst="rect">
             <a:avLst/>
           </a:prstGeom>
         </p:spPr>
       </p:pic>
-      <p:pic>
-        <p:nvPicPr>
-          <p:cNvPr id="3" name="Image 1" descr="/home/user/ai/assets/gen/mark-slash-faint.png">    </p:cNvPr>
-          <p:cNvPicPr>
-            <a:picLocks noChangeAspect="1"/>
-          </p:cNvPicPr>
-          <p:nvPr/>
-        </p:nvPicPr>
-        <p:blipFill>
-          <a:blip r:embed="rId2"/>
-          <a:stretch>
-            <a:fillRect/>
-          </a:stretch>
-        </p:blipFill>
-        <p:spPr>
-          <a:xfrm>
-            <a:off x="-640080" y="3931920"/>
-            <a:ext cx="3840480" cy="3840480"/>
-          </a:xfrm>
-          <a:prstGeom prst="rect">
-            <a:avLst/>
-          </a:prstGeom>
-        </p:spPr>
-      </p:pic>
-      <p:sp>
-        <p:nvSpPr>
-          <p:cNvPr id="4" name="Text 0"/>
-          <p:cNvSpPr txBox="1"/>
-          <p:nvPr/>
-        </p:nvSpPr>
-        <p:spPr>
-          <a:xfrm>
-            <a:off x="777240" y="1371600"/>
-            <a:ext cx="3108960" cy="237744"/>
+      <p:sp>
+        <p:nvSpPr>
+          <p:cNvPr id="3" name="Text 0"/>
+          <p:cNvSpPr txBox="1"/>
+          <p:nvPr/>
+        </p:nvSpPr>
+        <p:spPr>
+          <a:xfrm>
+            <a:off x="777240" y="658368"/>
+            <a:ext cx="7315200" cy="219456"/>
           </a:xfrm>
           <a:prstGeom prst="rect">
             <a:avLst/>
@@ -17130,13 +17060,13 @@
             <a:r>
               <a:rPr lang="en-US" sz="1000" spc="220" kern="0" dirty="0">
                 <a:solidFill>
-                  <a:srgbClr val="E4C9CE"/>
+                  <a:srgbClr val="942838"/>
                 </a:solidFill>
                 <a:latin typeface="Montserrat SemiBold" pitchFamily="34" charset="0"/>
                 <a:ea typeface="Montserrat SemiBold" pitchFamily="34" charset="-122"/>
                 <a:cs typeface="Montserrat SemiBold" pitchFamily="34" charset="-120"/>
               </a:rPr>
-              <a:t>ABOUT ME</a:t>
+              <a:t>INTERNSHIP OVERVIEW</a:t>
             </a:r>
             <a:endParaRPr lang="en-US" sz="1000" dirty="0"/>
           </a:p>
@@ -17144,14 +17074,14 @@
       </p:sp>
       <p:sp>
         <p:nvSpPr>
-          <p:cNvPr id="5" name="Text 1"/>
-          <p:cNvSpPr txBox="1"/>
-          <p:nvPr/>
-        </p:nvSpPr>
-        <p:spPr>
-          <a:xfrm>
-            <a:off x="777240" y="1737360"/>
-            <a:ext cx="3291840" cy="1371600"/>
+          <p:cNvPr id="4" name="Text 1"/>
+          <p:cNvSpPr txBox="1"/>
+          <p:nvPr/>
+        </p:nvSpPr>
+        <p:spPr>
+          <a:xfrm>
+            <a:off x="777240" y="932688"/>
+            <a:ext cx="10515600" cy="868680"/>
           </a:xfrm>
           <a:prstGeom prst="rect">
             <a:avLst/>
@@ -17170,50 +17100,325 @@
               <a:buNone/>
             </a:pPr>
             <a:r>
-              <a:rPr lang="en-US" sz="3300" spc="-70" kern="0" dirty="0">
-                <a:solidFill>
-                  <a:srgbClr val="FFFFFF"/>
+              <a:rPr lang="en-US" sz="2900" spc="-50" kern="0" dirty="0">
+                <a:solidFill>
+                  <a:srgbClr val="2B2D30"/>
                 </a:solidFill>
                 <a:latin typeface="Montserrat ExtraBold" pitchFamily="34" charset="0"/>
                 <a:ea typeface="Montserrat ExtraBold" pitchFamily="34" charset="-122"/>
                 <a:cs typeface="Montserrat ExtraBold" pitchFamily="34" charset="-120"/>
               </a:rPr>
-              <a:t>Jair Maldonado</a:t>
-            </a:r>
-            <a:endParaRPr lang="en-US" sz="3300" dirty="0"/>
-          </a:p>
-        </p:txBody>
-      </p:sp>
-      <p:sp>
-        <p:nvSpPr>
-          <p:cNvPr id="6" name="Shape 2"/>
+              <a:t>Three rotations across the security team</a:t>
+            </a:r>
+            <a:endParaRPr lang="en-US" sz="2900" dirty="0"/>
+          </a:p>
+        </p:txBody>
+      </p:sp>
+      <p:sp>
+        <p:nvSpPr>
+          <p:cNvPr id="5" name="Shape 2"/>
           <p:cNvSpPr/>
           <p:nvPr/>
         </p:nvSpPr>
         <p:spPr>
           <a:xfrm>
-            <a:off x="777240" y="3127248"/>
-            <a:ext cx="548640" cy="45720"/>
-          </a:xfrm>
-          <a:prstGeom prst="rect">
-            <a:avLst/>
+            <a:off x="777240" y="1700784"/>
+            <a:ext cx="566928" cy="50292"/>
+          </a:xfrm>
+          <a:prstGeom prst="rect">
+            <a:avLst/>
+          </a:prstGeom>
+          <a:solidFill>
+            <a:srgbClr val="942838"/>
+          </a:solidFill>
+          <a:ln/>
+        </p:spPr>
+      </p:sp>
+      <p:sp>
+        <p:nvSpPr>
+          <p:cNvPr id="6" name="Shape 3"/>
+          <p:cNvSpPr/>
+          <p:nvPr/>
+        </p:nvSpPr>
+        <p:spPr>
+          <a:xfrm>
+            <a:off x="777240" y="6181344"/>
+            <a:ext cx="10637215" cy="10973"/>
+          </a:xfrm>
+          <a:prstGeom prst="rect">
+            <a:avLst/>
+          </a:prstGeom>
+          <a:solidFill>
+            <a:srgbClr val="E6E4E2"/>
+          </a:solidFill>
+          <a:ln/>
+        </p:spPr>
+      </p:sp>
+      <p:sp>
+        <p:nvSpPr>
+          <p:cNvPr id="7" name="Text 4"/>
+          <p:cNvSpPr txBox="1"/>
+          <p:nvPr/>
+        </p:nvSpPr>
+        <p:spPr>
+          <a:xfrm>
+            <a:off x="777240" y="6327648"/>
+            <a:ext cx="7315200" cy="201168"/>
+          </a:xfrm>
+          <a:prstGeom prst="rect">
+            <a:avLst/>
+          </a:prstGeom>
+          <a:noFill/>
+          <a:ln/>
+        </p:spPr>
+        <p:txBody>
+          <a:bodyPr wrap="square" lIns="0" tIns="0" rIns="0" bIns="0" rtlCol="0" anchor="t"/>
+          <a:lstStyle/>
+          <a:p>
+            <a:pPr indent="0" marL="0">
+              <a:buNone/>
+            </a:pPr>
+            <a:r>
+              <a:rPr lang="en-US" sz="850" spc="140" kern="0" dirty="0">
+                <a:solidFill>
+                  <a:srgbClr val="6E7175"/>
+                </a:solidFill>
+                <a:latin typeface="Montserrat SemiBold" pitchFamily="34" charset="0"/>
+                <a:ea typeface="Montserrat SemiBold" pitchFamily="34" charset="-122"/>
+                <a:cs typeface="Montserrat SemiBold" pitchFamily="34" charset="-120"/>
+              </a:rPr>
+              <a:t>INTERNSHIP OVERVIEW</a:t>
+            </a:r>
+            <a:endParaRPr lang="en-US" sz="850" dirty="0"/>
+          </a:p>
+        </p:txBody>
+      </p:sp>
+      <p:sp>
+        <p:nvSpPr>
+          <p:cNvPr id="8" name="Text 5"/>
+          <p:cNvSpPr txBox="1"/>
+          <p:nvPr/>
+        </p:nvSpPr>
+        <p:spPr>
+          <a:xfrm>
+            <a:off x="10317175" y="6327648"/>
+            <a:ext cx="1097280" cy="201168"/>
+          </a:xfrm>
+          <a:prstGeom prst="rect">
+            <a:avLst/>
+          </a:prstGeom>
+          <a:noFill/>
+          <a:ln/>
+        </p:spPr>
+        <p:txBody>
+          <a:bodyPr wrap="square" lIns="0" tIns="0" rIns="0" bIns="0" rtlCol="0" anchor="t"/>
+          <a:lstStyle/>
+          <a:p>
+            <a:pPr algn="r" indent="0" marL="0">
+              <a:buNone/>
+            </a:pPr>
+            <a:r>
+              <a:rPr lang="en-US" sz="850" spc="140" kern="0" dirty="0">
+                <a:solidFill>
+                  <a:srgbClr val="6E7175"/>
+                </a:solidFill>
+                <a:latin typeface="Montserrat SemiBold" pitchFamily="34" charset="0"/>
+                <a:ea typeface="Montserrat SemiBold" pitchFamily="34" charset="-122"/>
+                <a:cs typeface="Montserrat SemiBold" pitchFamily="34" charset="-120"/>
+              </a:rPr>
+              <a:t>04</a:t>
+            </a:r>
+            <a:endParaRPr lang="en-US" sz="850" dirty="0"/>
+          </a:p>
+        </p:txBody>
+      </p:sp>
+      <p:sp>
+        <p:nvSpPr>
+          <p:cNvPr id="9" name="Text 6"/>
+          <p:cNvSpPr txBox="1"/>
+          <p:nvPr/>
+        </p:nvSpPr>
+        <p:spPr>
+          <a:xfrm>
+            <a:off x="777240" y="1883664"/>
+            <a:ext cx="9052560" cy="310896"/>
+          </a:xfrm>
+          <a:prstGeom prst="rect">
+            <a:avLst/>
+          </a:prstGeom>
+          <a:noFill/>
+          <a:ln/>
+        </p:spPr>
+        <p:txBody>
+          <a:bodyPr wrap="square" lIns="0" tIns="0" rIns="0" bIns="0" rtlCol="0" anchor="t"/>
+          <a:lstStyle/>
+          <a:p>
+            <a:pPr indent="0" marL="0">
+              <a:buNone/>
+            </a:pPr>
+            <a:r>
+              <a:rPr lang="en-US" sz="1400" dirty="0">
+                <a:solidFill>
+                  <a:srgbClr val="6E7175"/>
+                </a:solidFill>
+                <a:latin typeface="Montserrat Medium" pitchFamily="34" charset="0"/>
+                <a:ea typeface="Montserrat Medium" pitchFamily="34" charset="-122"/>
+                <a:cs typeface="Montserrat Medium" pitchFamily="34" charset="-120"/>
+              </a:rPr>
+              <a:t>I moved through three different areas of Information Security. Each rotation produced one project.</a:t>
+            </a:r>
+            <a:endParaRPr lang="en-US" sz="1400" dirty="0"/>
+          </a:p>
+        </p:txBody>
+      </p:sp>
+      <p:sp>
+        <p:nvSpPr>
+          <p:cNvPr id="10" name="Shape 7"/>
+          <p:cNvSpPr/>
+          <p:nvPr/>
+        </p:nvSpPr>
+        <p:spPr>
+          <a:xfrm>
+            <a:off x="777240" y="2852928"/>
+            <a:ext cx="10637215" cy="10973"/>
+          </a:xfrm>
+          <a:prstGeom prst="rect">
+            <a:avLst/>
+          </a:prstGeom>
+          <a:solidFill>
+            <a:srgbClr val="C9C6C4"/>
+          </a:solidFill>
+          <a:ln/>
+        </p:spPr>
+      </p:sp>
+      <p:sp>
+        <p:nvSpPr>
+          <p:cNvPr id="11" name="Shape 8"/>
+          <p:cNvSpPr/>
+          <p:nvPr/>
+        </p:nvSpPr>
+        <p:spPr>
+          <a:xfrm>
+            <a:off x="1033272" y="2756916"/>
+            <a:ext cx="201168" cy="201168"/>
+          </a:xfrm>
+          <a:prstGeom prst="ellipse">
+            <a:avLst/>
+          </a:prstGeom>
+          <a:solidFill>
+            <a:srgbClr val="942838"/>
+          </a:solidFill>
+          <a:ln w="25400">
+            <a:solidFill>
+              <a:srgbClr val="FFFFFF"/>
+            </a:solidFill>
+            <a:prstDash val="solid"/>
+          </a:ln>
+        </p:spPr>
+      </p:sp>
+      <p:sp>
+        <p:nvSpPr>
+          <p:cNvPr id="12" name="Shape 9"/>
+          <p:cNvSpPr/>
+          <p:nvPr/>
+        </p:nvSpPr>
+        <p:spPr>
+          <a:xfrm>
+            <a:off x="777240" y="3310128"/>
+            <a:ext cx="3310128" cy="2286000"/>
+          </a:xfrm>
+          <a:prstGeom prst="roundRect">
+            <a:avLst>
+              <a:gd name="adj" fmla="val 2400"/>
+            </a:avLst>
           </a:prstGeom>
           <a:solidFill>
             <a:srgbClr val="FFFFFF"/>
           </a:solidFill>
-          <a:ln/>
-        </p:spPr>
-      </p:sp>
-      <p:sp>
-        <p:nvSpPr>
-          <p:cNvPr id="7" name="Text 3"/>
-          <p:cNvSpPr txBox="1"/>
-          <p:nvPr/>
-        </p:nvSpPr>
-        <p:spPr>
-          <a:xfrm>
-            <a:off x="777240" y="3364992"/>
-            <a:ext cx="3200400" cy="548640"/>
+          <a:ln w="9525">
+            <a:solidFill>
+              <a:srgbClr val="E6E4E2"/>
+            </a:solidFill>
+            <a:prstDash val="solid"/>
+          </a:ln>
+          <a:effectLst>
+            <a:outerShdw sx="100000" sy="100000" kx="0" ky="0" algn="bl" rotWithShape="0" blurRad="177800" dist="44450" dir="5400000">
+              <a:srgbClr val="959092">
+                <a:alpha val="22000"/>
+              </a:srgbClr>
+            </a:outerShdw>
+          </a:effectLst>
+        </p:spPr>
+      </p:sp>
+      <p:sp>
+        <p:nvSpPr>
+          <p:cNvPr id="13" name="Shape 10"/>
+          <p:cNvSpPr/>
+          <p:nvPr/>
+        </p:nvSpPr>
+        <p:spPr>
+          <a:xfrm>
+            <a:off x="777240" y="3310128"/>
+            <a:ext cx="3310128" cy="50292"/>
+          </a:xfrm>
+          <a:prstGeom prst="rect">
+            <a:avLst/>
+          </a:prstGeom>
+          <a:solidFill>
+            <a:srgbClr val="942838"/>
+          </a:solidFill>
+          <a:ln/>
+        </p:spPr>
+      </p:sp>
+      <p:sp>
+        <p:nvSpPr>
+          <p:cNvPr id="14" name="Text 11"/>
+          <p:cNvSpPr txBox="1"/>
+          <p:nvPr/>
+        </p:nvSpPr>
+        <p:spPr>
+          <a:xfrm>
+            <a:off x="1088136" y="3566160"/>
+            <a:ext cx="914400" cy="384048"/>
+          </a:xfrm>
+          <a:prstGeom prst="rect">
+            <a:avLst/>
+          </a:prstGeom>
+          <a:noFill/>
+          <a:ln/>
+        </p:spPr>
+        <p:txBody>
+          <a:bodyPr wrap="square" lIns="0" tIns="0" rIns="0" bIns="0" rtlCol="0" anchor="t"/>
+          <a:lstStyle/>
+          <a:p>
+            <a:pPr indent="0" marL="0">
+              <a:buNone/>
+            </a:pPr>
+            <a:r>
+              <a:rPr lang="en-US" sz="2400" spc="-50" kern="0" dirty="0">
+                <a:solidFill>
+                  <a:srgbClr val="DFBEC4"/>
+                </a:solidFill>
+                <a:latin typeface="Montserrat ExtraBold" pitchFamily="34" charset="0"/>
+                <a:ea typeface="Montserrat ExtraBold" pitchFamily="34" charset="-122"/>
+                <a:cs typeface="Montserrat ExtraBold" pitchFamily="34" charset="-120"/>
+              </a:rPr>
+              <a:t>01</a:t>
+            </a:r>
+            <a:endParaRPr lang="en-US" sz="2400" dirty="0"/>
+          </a:p>
+        </p:txBody>
+      </p:sp>
+      <p:sp>
+        <p:nvSpPr>
+          <p:cNvPr id="15" name="Text 12"/>
+          <p:cNvSpPr txBox="1"/>
+          <p:nvPr/>
+        </p:nvSpPr>
+        <p:spPr>
+          <a:xfrm>
+            <a:off x="1088136" y="4041648"/>
+            <a:ext cx="2688336" cy="329184"/>
           </a:xfrm>
           <a:prstGeom prst="rect">
             <a:avLst/>
@@ -17227,113 +17432,237 @@
           <a:p>
             <a:pPr indent="0" marL="0">
               <a:lnSpc>
-                <a:spcPct val="120000"/>
+                <a:spcPct val="105000"/>
               </a:lnSpc>
               <a:buNone/>
             </a:pPr>
             <a:r>
-              <a:rPr lang="en-US" sz="950" spc="30" kern="0" dirty="0">
-                <a:solidFill>
-                  <a:srgbClr val="E4C9CE"/>
-                </a:solidFill>
-                <a:latin typeface="Montserrat Medium" pitchFamily="34" charset="0"/>
-                <a:ea typeface="Montserrat Medium" pitchFamily="34" charset="-122"/>
-                <a:cs typeface="Montserrat Medium" pitchFamily="34" charset="-120"/>
-              </a:rPr>
-              <a:t>Information Security Analyst Intern</a:t>
-            </a:r>
-            <a:endParaRPr lang="en-US" sz="950" dirty="0"/>
-          </a:p>
-        </p:txBody>
-      </p:sp>
-      <p:sp>
-        <p:nvSpPr>
-          <p:cNvPr id="8" name="Text 4"/>
-          <p:cNvSpPr txBox="1"/>
-          <p:nvPr/>
-        </p:nvSpPr>
-        <p:spPr>
-          <a:xfrm>
-            <a:off x="5120640" y="868680"/>
-            <a:ext cx="6293815" cy="237744"/>
-          </a:xfrm>
-          <a:prstGeom prst="rect">
-            <a:avLst/>
-          </a:prstGeom>
-          <a:noFill/>
-          <a:ln/>
-        </p:spPr>
-        <p:txBody>
-          <a:bodyPr wrap="square" lIns="0" tIns="0" rIns="0" bIns="0" rtlCol="0" anchor="t"/>
-          <a:lstStyle/>
-          <a:p>
-            <a:pPr indent="0" marL="0">
-              <a:buNone/>
-            </a:pPr>
-            <a:r>
-              <a:rPr lang="en-US" sz="1000" spc="220" kern="0" dirty="0">
-                <a:solidFill>
-                  <a:srgbClr val="942838"/>
+              <a:rPr lang="en-US" sz="1500" dirty="0">
+                <a:solidFill>
+                  <a:srgbClr val="2B2D30"/>
                 </a:solidFill>
                 <a:latin typeface="Montserrat SemiBold" pitchFamily="34" charset="0"/>
                 <a:ea typeface="Montserrat SemiBold" pitchFamily="34" charset="-122"/>
                 <a:cs typeface="Montserrat SemiBold" pitchFamily="34" charset="-120"/>
               </a:rPr>
-              <a:t>BACKGROUND</a:t>
-            </a:r>
-            <a:endParaRPr lang="en-US" sz="1000" dirty="0"/>
-          </a:p>
-        </p:txBody>
-      </p:sp>
-      <p:sp>
-        <p:nvSpPr>
-          <p:cNvPr id="9" name="Text 5"/>
-          <p:cNvSpPr txBox="1"/>
-          <p:nvPr/>
-        </p:nvSpPr>
-        <p:spPr>
-          <a:xfrm>
-            <a:off x="5120640" y="1298448"/>
-            <a:ext cx="6293815" cy="219456"/>
-          </a:xfrm>
-          <a:prstGeom prst="rect">
-            <a:avLst/>
-          </a:prstGeom>
-          <a:noFill/>
-          <a:ln/>
-        </p:spPr>
-        <p:txBody>
-          <a:bodyPr wrap="square" lIns="0" tIns="0" rIns="0" bIns="0" rtlCol="0" anchor="t"/>
-          <a:lstStyle/>
-          <a:p>
-            <a:pPr indent="0" marL="0">
-              <a:buNone/>
-            </a:pPr>
-            <a:r>
-              <a:rPr lang="en-US" sz="850" spc="140" kern="0" dirty="0">
-                <a:solidFill>
-                  <a:srgbClr val="942838"/>
+              <a:t>Vulnerability Management</a:t>
+            </a:r>
+            <a:endParaRPr lang="en-US" sz="1500" dirty="0"/>
+          </a:p>
+        </p:txBody>
+      </p:sp>
+      <p:sp>
+        <p:nvSpPr>
+          <p:cNvPr id="16" name="Text 13"/>
+          <p:cNvSpPr txBox="1"/>
+          <p:nvPr/>
+        </p:nvSpPr>
+        <p:spPr>
+          <a:xfrm>
+            <a:off x="1088136" y="4462272"/>
+            <a:ext cx="2688336" cy="777240"/>
+          </a:xfrm>
+          <a:prstGeom prst="rect">
+            <a:avLst/>
+          </a:prstGeom>
+          <a:noFill/>
+          <a:ln/>
+        </p:spPr>
+        <p:txBody>
+          <a:bodyPr wrap="square" lIns="0" tIns="0" rIns="0" bIns="0" rtlCol="0" anchor="t"/>
+          <a:lstStyle/>
+          <a:p>
+            <a:pPr indent="0" marL="0">
+              <a:lnSpc>
+                <a:spcPct val="122000"/>
+              </a:lnSpc>
+              <a:buNone/>
+            </a:pPr>
+            <a:r>
+              <a:rPr lang="en-US" sz="1100" dirty="0">
+                <a:solidFill>
+                  <a:srgbClr val="6E7175"/>
+                </a:solidFill>
+                <a:latin typeface="Montserrat" pitchFamily="34" charset="0"/>
+                <a:ea typeface="Montserrat" pitchFamily="34" charset="-122"/>
+                <a:cs typeface="Montserrat" pitchFamily="34" charset="-120"/>
+              </a:rPr>
+              <a:t>Finding known weaknesses across company machines and making sure they actually get fixed.</a:t>
+            </a:r>
+            <a:endParaRPr lang="en-US" sz="1100" dirty="0"/>
+          </a:p>
+        </p:txBody>
+      </p:sp>
+      <p:sp>
+        <p:nvSpPr>
+          <p:cNvPr id="17" name="Shape 14"/>
+          <p:cNvSpPr/>
+          <p:nvPr/>
+        </p:nvSpPr>
+        <p:spPr>
+          <a:xfrm>
+            <a:off x="4696816" y="2756916"/>
+            <a:ext cx="201168" cy="201168"/>
+          </a:xfrm>
+          <a:prstGeom prst="ellipse">
+            <a:avLst/>
+          </a:prstGeom>
+          <a:solidFill>
+            <a:srgbClr val="942838"/>
+          </a:solidFill>
+          <a:ln w="25400">
+            <a:solidFill>
+              <a:srgbClr val="FFFFFF"/>
+            </a:solidFill>
+            <a:prstDash val="solid"/>
+          </a:ln>
+        </p:spPr>
+      </p:sp>
+      <p:sp>
+        <p:nvSpPr>
+          <p:cNvPr id="18" name="Shape 15"/>
+          <p:cNvSpPr/>
+          <p:nvPr/>
+        </p:nvSpPr>
+        <p:spPr>
+          <a:xfrm>
+            <a:off x="4440784" y="3310128"/>
+            <a:ext cx="3310128" cy="2286000"/>
+          </a:xfrm>
+          <a:prstGeom prst="roundRect">
+            <a:avLst>
+              <a:gd name="adj" fmla="val 2400"/>
+            </a:avLst>
+          </a:prstGeom>
+          <a:solidFill>
+            <a:srgbClr val="FFFFFF"/>
+          </a:solidFill>
+          <a:ln w="9525">
+            <a:solidFill>
+              <a:srgbClr val="E6E4E2"/>
+            </a:solidFill>
+            <a:prstDash val="solid"/>
+          </a:ln>
+          <a:effectLst>
+            <a:outerShdw sx="100000" sy="100000" kx="0" ky="0" algn="bl" rotWithShape="0" blurRad="2258060000" dist="564515000" dir="324000000000">
+              <a:srgbClr val="959092">
+                <a:alpha val="2200000000"/>
+              </a:srgbClr>
+            </a:outerShdw>
+          </a:effectLst>
+        </p:spPr>
+      </p:sp>
+      <p:sp>
+        <p:nvSpPr>
+          <p:cNvPr id="19" name="Shape 16"/>
+          <p:cNvSpPr/>
+          <p:nvPr/>
+        </p:nvSpPr>
+        <p:spPr>
+          <a:xfrm>
+            <a:off x="4440784" y="3310128"/>
+            <a:ext cx="3310128" cy="50292"/>
+          </a:xfrm>
+          <a:prstGeom prst="rect">
+            <a:avLst/>
+          </a:prstGeom>
+          <a:solidFill>
+            <a:srgbClr val="942838"/>
+          </a:solidFill>
+          <a:ln/>
+        </p:spPr>
+      </p:sp>
+      <p:sp>
+        <p:nvSpPr>
+          <p:cNvPr id="20" name="Text 17"/>
+          <p:cNvSpPr txBox="1"/>
+          <p:nvPr/>
+        </p:nvSpPr>
+        <p:spPr>
+          <a:xfrm>
+            <a:off x="4751680" y="3566160"/>
+            <a:ext cx="914400" cy="384048"/>
+          </a:xfrm>
+          <a:prstGeom prst="rect">
+            <a:avLst/>
+          </a:prstGeom>
+          <a:noFill/>
+          <a:ln/>
+        </p:spPr>
+        <p:txBody>
+          <a:bodyPr wrap="square" lIns="0" tIns="0" rIns="0" bIns="0" rtlCol="0" anchor="t"/>
+          <a:lstStyle/>
+          <a:p>
+            <a:pPr indent="0" marL="0">
+              <a:buNone/>
+            </a:pPr>
+            <a:r>
+              <a:rPr lang="en-US" sz="2400" spc="-50" kern="0" dirty="0">
+                <a:solidFill>
+                  <a:srgbClr val="DFBEC4"/>
+                </a:solidFill>
+                <a:latin typeface="Montserrat ExtraBold" pitchFamily="34" charset="0"/>
+                <a:ea typeface="Montserrat ExtraBold" pitchFamily="34" charset="-122"/>
+                <a:cs typeface="Montserrat ExtraBold" pitchFamily="34" charset="-120"/>
+              </a:rPr>
+              <a:t>02</a:t>
+            </a:r>
+            <a:endParaRPr lang="en-US" sz="2400" dirty="0"/>
+          </a:p>
+        </p:txBody>
+      </p:sp>
+      <p:sp>
+        <p:nvSpPr>
+          <p:cNvPr id="21" name="Text 18"/>
+          <p:cNvSpPr txBox="1"/>
+          <p:nvPr/>
+        </p:nvSpPr>
+        <p:spPr>
+          <a:xfrm>
+            <a:off x="4751680" y="4041648"/>
+            <a:ext cx="2688336" cy="329184"/>
+          </a:xfrm>
+          <a:prstGeom prst="rect">
+            <a:avLst/>
+          </a:prstGeom>
+          <a:noFill/>
+          <a:ln/>
+        </p:spPr>
+        <p:txBody>
+          <a:bodyPr wrap="square" lIns="0" tIns="0" rIns="0" bIns="0" rtlCol="0" anchor="t"/>
+          <a:lstStyle/>
+          <a:p>
+            <a:pPr indent="0" marL="0">
+              <a:lnSpc>
+                <a:spcPct val="105000"/>
+              </a:lnSpc>
+              <a:buNone/>
+            </a:pPr>
+            <a:r>
+              <a:rPr lang="en-US" sz="1500" dirty="0">
+                <a:solidFill>
+                  <a:srgbClr val="2B2D30"/>
                 </a:solidFill>
                 <a:latin typeface="Montserrat SemiBold" pitchFamily="34" charset="0"/>
                 <a:ea typeface="Montserrat SemiBold" pitchFamily="34" charset="-122"/>
                 <a:cs typeface="Montserrat SemiBold" pitchFamily="34" charset="-120"/>
               </a:rPr>
-              <a:t>POSITION</a:t>
-            </a:r>
-            <a:endParaRPr lang="en-US" sz="850" dirty="0"/>
-          </a:p>
-        </p:txBody>
-      </p:sp>
-      <p:sp>
-        <p:nvSpPr>
-          <p:cNvPr id="10" name="Text 6"/>
-          <p:cNvSpPr txBox="1"/>
-          <p:nvPr/>
-        </p:nvSpPr>
-        <p:spPr>
-          <a:xfrm>
-            <a:off x="5120640" y="1545336"/>
-            <a:ext cx="6293815" cy="475488"/>
+              <a:t>Application Security</a:t>
+            </a:r>
+            <a:endParaRPr lang="en-US" sz="1500" dirty="0"/>
+          </a:p>
+        </p:txBody>
+      </p:sp>
+      <p:sp>
+        <p:nvSpPr>
+          <p:cNvPr id="22" name="Text 19"/>
+          <p:cNvSpPr txBox="1"/>
+          <p:nvPr/>
+        </p:nvSpPr>
+        <p:spPr>
+          <a:xfrm>
+            <a:off x="4751680" y="4462272"/>
+            <a:ext cx="2688336" cy="777240"/>
           </a:xfrm>
           <a:prstGeom prst="rect">
             <a:avLst/>
@@ -17347,94 +17676,195 @@
           <a:p>
             <a:pPr indent="0" marL="0">
               <a:lnSpc>
-                <a:spcPct val="120000"/>
+                <a:spcPct val="122000"/>
               </a:lnSpc>
               <a:buNone/>
             </a:pPr>
             <a:r>
-              <a:rPr lang="en-US" sz="1250" dirty="0">
-                <a:solidFill>
-                  <a:srgbClr val="43464A"/>
+              <a:rPr lang="en-US" sz="1100" dirty="0">
+                <a:solidFill>
+                  <a:srgbClr val="6E7175"/>
                 </a:solidFill>
                 <a:latin typeface="Montserrat" pitchFamily="34" charset="0"/>
                 <a:ea typeface="Montserrat" pitchFamily="34" charset="-122"/>
                 <a:cs typeface="Montserrat" pitchFamily="34" charset="-120"/>
               </a:rPr>
-              <a:t>Information Security Analyst Intern</a:t>
-            </a:r>
-            <a:endParaRPr lang="en-US" sz="1250" dirty="0"/>
-          </a:p>
-        </p:txBody>
-      </p:sp>
-      <p:sp>
-        <p:nvSpPr>
-          <p:cNvPr id="11" name="Shape 7"/>
+              <a:t>Checking the software we build and the outside code we rely on for weaknesses.</a:t>
+            </a:r>
+            <a:endParaRPr lang="en-US" sz="1100" dirty="0"/>
+          </a:p>
+        </p:txBody>
+      </p:sp>
+      <p:sp>
+        <p:nvSpPr>
+          <p:cNvPr id="23" name="Shape 20"/>
           <p:cNvSpPr/>
           <p:nvPr/>
         </p:nvSpPr>
         <p:spPr>
           <a:xfrm>
-            <a:off x="5120640" y="2084832"/>
-            <a:ext cx="6293815" cy="10973"/>
-          </a:xfrm>
-          <a:prstGeom prst="rect">
+            <a:off x="8360359" y="2756916"/>
+            <a:ext cx="201168" cy="201168"/>
+          </a:xfrm>
+          <a:prstGeom prst="ellipse">
             <a:avLst/>
           </a:prstGeom>
           <a:solidFill>
-            <a:srgbClr val="E6E4E2"/>
+            <a:srgbClr val="942838"/>
           </a:solidFill>
-          <a:ln/>
-        </p:spPr>
-      </p:sp>
-      <p:sp>
-        <p:nvSpPr>
-          <p:cNvPr id="12" name="Text 8"/>
-          <p:cNvSpPr txBox="1"/>
-          <p:nvPr/>
-        </p:nvSpPr>
-        <p:spPr>
-          <a:xfrm>
-            <a:off x="5120640" y="2240280"/>
-            <a:ext cx="6293815" cy="219456"/>
-          </a:xfrm>
-          <a:prstGeom prst="rect">
-            <a:avLst/>
-          </a:prstGeom>
-          <a:noFill/>
-          <a:ln/>
-        </p:spPr>
-        <p:txBody>
-          <a:bodyPr wrap="square" lIns="0" tIns="0" rIns="0" bIns="0" rtlCol="0" anchor="t"/>
-          <a:lstStyle/>
-          <a:p>
-            <a:pPr indent="0" marL="0">
-              <a:buNone/>
-            </a:pPr>
-            <a:r>
-              <a:rPr lang="en-US" sz="850" spc="140" kern="0" dirty="0">
-                <a:solidFill>
-                  <a:srgbClr val="942838"/>
+          <a:ln w="25400">
+            <a:solidFill>
+              <a:srgbClr val="FFFFFF"/>
+            </a:solidFill>
+            <a:prstDash val="solid"/>
+          </a:ln>
+        </p:spPr>
+      </p:sp>
+      <p:sp>
+        <p:nvSpPr>
+          <p:cNvPr id="24" name="Shape 21"/>
+          <p:cNvSpPr/>
+          <p:nvPr/>
+        </p:nvSpPr>
+        <p:spPr>
+          <a:xfrm>
+            <a:off x="8104327" y="3310128"/>
+            <a:ext cx="3310128" cy="2286000"/>
+          </a:xfrm>
+          <a:prstGeom prst="roundRect">
+            <a:avLst>
+              <a:gd name="adj" fmla="val 2400"/>
+            </a:avLst>
+          </a:prstGeom>
+          <a:solidFill>
+            <a:srgbClr val="FFFFFF"/>
+          </a:solidFill>
+          <a:ln w="9525">
+            <a:solidFill>
+              <a:srgbClr val="E6E4E2"/>
+            </a:solidFill>
+            <a:prstDash val="solid"/>
+          </a:ln>
+          <a:effectLst>
+            <a:outerShdw sx="100000" sy="100000" kx="0" ky="0" algn="bl" rotWithShape="0" blurRad="28677362000000" dist="7169340500000" dir="19440000000000000">
+              <a:srgbClr val="959092">
+                <a:alpha val="220000000000000"/>
+              </a:srgbClr>
+            </a:outerShdw>
+          </a:effectLst>
+        </p:spPr>
+      </p:sp>
+      <p:sp>
+        <p:nvSpPr>
+          <p:cNvPr id="25" name="Shape 22"/>
+          <p:cNvSpPr/>
+          <p:nvPr/>
+        </p:nvSpPr>
+        <p:spPr>
+          <a:xfrm>
+            <a:off x="8104327" y="3310128"/>
+            <a:ext cx="3310128" cy="50292"/>
+          </a:xfrm>
+          <a:prstGeom prst="rect">
+            <a:avLst/>
+          </a:prstGeom>
+          <a:solidFill>
+            <a:srgbClr val="942838"/>
+          </a:solidFill>
+          <a:ln/>
+        </p:spPr>
+      </p:sp>
+      <p:sp>
+        <p:nvSpPr>
+          <p:cNvPr id="26" name="Text 23"/>
+          <p:cNvSpPr txBox="1"/>
+          <p:nvPr/>
+        </p:nvSpPr>
+        <p:spPr>
+          <a:xfrm>
+            <a:off x="8415223" y="3566160"/>
+            <a:ext cx="914400" cy="384048"/>
+          </a:xfrm>
+          <a:prstGeom prst="rect">
+            <a:avLst/>
+          </a:prstGeom>
+          <a:noFill/>
+          <a:ln/>
+        </p:spPr>
+        <p:txBody>
+          <a:bodyPr wrap="square" lIns="0" tIns="0" rIns="0" bIns="0" rtlCol="0" anchor="t"/>
+          <a:lstStyle/>
+          <a:p>
+            <a:pPr indent="0" marL="0">
+              <a:buNone/>
+            </a:pPr>
+            <a:r>
+              <a:rPr lang="en-US" sz="2400" spc="-50" kern="0" dirty="0">
+                <a:solidFill>
+                  <a:srgbClr val="DFBEC4"/>
+                </a:solidFill>
+                <a:latin typeface="Montserrat ExtraBold" pitchFamily="34" charset="0"/>
+                <a:ea typeface="Montserrat ExtraBold" pitchFamily="34" charset="-122"/>
+                <a:cs typeface="Montserrat ExtraBold" pitchFamily="34" charset="-120"/>
+              </a:rPr>
+              <a:t>03</a:t>
+            </a:r>
+            <a:endParaRPr lang="en-US" sz="2400" dirty="0"/>
+          </a:p>
+        </p:txBody>
+      </p:sp>
+      <p:sp>
+        <p:nvSpPr>
+          <p:cNvPr id="27" name="Text 24"/>
+          <p:cNvSpPr txBox="1"/>
+          <p:nvPr/>
+        </p:nvSpPr>
+        <p:spPr>
+          <a:xfrm>
+            <a:off x="8415223" y="4041648"/>
+            <a:ext cx="2688336" cy="329184"/>
+          </a:xfrm>
+          <a:prstGeom prst="rect">
+            <a:avLst/>
+          </a:prstGeom>
+          <a:noFill/>
+          <a:ln/>
+        </p:spPr>
+        <p:txBody>
+          <a:bodyPr wrap="square" lIns="0" tIns="0" rIns="0" bIns="0" rtlCol="0" anchor="t"/>
+          <a:lstStyle/>
+          <a:p>
+            <a:pPr indent="0" marL="0">
+              <a:lnSpc>
+                <a:spcPct val="105000"/>
+              </a:lnSpc>
+              <a:buNone/>
+            </a:pPr>
+            <a:r>
+              <a:rPr lang="en-US" sz="1500" dirty="0">
+                <a:solidFill>
+                  <a:srgbClr val="2B2D30"/>
                 </a:solidFill>
                 <a:latin typeface="Montserrat SemiBold" pitchFamily="34" charset="0"/>
                 <a:ea typeface="Montserrat SemiBold" pitchFamily="34" charset="-122"/>
                 <a:cs typeface="Montserrat SemiBold" pitchFamily="34" charset="-120"/>
               </a:rPr>
-              <a:t>SCHOOL</a:t>
-            </a:r>
-            <a:endParaRPr lang="en-US" sz="850" dirty="0"/>
-          </a:p>
-        </p:txBody>
-      </p:sp>
-      <p:sp>
-        <p:nvSpPr>
-          <p:cNvPr id="13" name="Text 9"/>
-          <p:cNvSpPr txBox="1"/>
-          <p:nvPr/>
-        </p:nvSpPr>
-        <p:spPr>
-          <a:xfrm>
-            <a:off x="5120640" y="2487168"/>
-            <a:ext cx="6293815" cy="475488"/>
+              <a:t>Network Security</a:t>
+            </a:r>
+            <a:endParaRPr lang="en-US" sz="1500" dirty="0"/>
+          </a:p>
+        </p:txBody>
+      </p:sp>
+      <p:sp>
+        <p:nvSpPr>
+          <p:cNvPr id="28" name="Text 25"/>
+          <p:cNvSpPr txBox="1"/>
+          <p:nvPr/>
+        </p:nvSpPr>
+        <p:spPr>
+          <a:xfrm>
+            <a:off x="8415223" y="4462272"/>
+            <a:ext cx="2688336" cy="777240"/>
           </a:xfrm>
           <a:prstGeom prst="rect">
             <a:avLst/>
@@ -17448,447 +17878,22 @@
           <a:p>
             <a:pPr indent="0" marL="0">
               <a:lnSpc>
-                <a:spcPct val="120000"/>
+                <a:spcPct val="122000"/>
               </a:lnSpc>
               <a:buNone/>
             </a:pPr>
             <a:r>
-              <a:rPr lang="en-US" sz="1250" dirty="0">
-                <a:solidFill>
-                  <a:srgbClr val="43464A"/>
+              <a:rPr lang="en-US" sz="1100" dirty="0">
+                <a:solidFill>
+                  <a:srgbClr val="6E7175"/>
                 </a:solidFill>
                 <a:latin typeface="Montserrat" pitchFamily="34" charset="0"/>
                 <a:ea typeface="Montserrat" pitchFamily="34" charset="-122"/>
                 <a:cs typeface="Montserrat" pitchFamily="34" charset="-120"/>
               </a:rPr>
-              <a:t>Studying cybersecurity, with a focus on offensive security</a:t>
-            </a:r>
-            <a:endParaRPr lang="en-US" sz="1250" dirty="0"/>
-          </a:p>
-        </p:txBody>
-      </p:sp>
-      <p:sp>
-        <p:nvSpPr>
-          <p:cNvPr id="14" name="Shape 10"/>
-          <p:cNvSpPr/>
-          <p:nvPr/>
-        </p:nvSpPr>
-        <p:spPr>
-          <a:xfrm>
-            <a:off x="5120640" y="3026664"/>
-            <a:ext cx="6293815" cy="10973"/>
-          </a:xfrm>
-          <a:prstGeom prst="rect">
-            <a:avLst/>
-          </a:prstGeom>
-          <a:solidFill>
-            <a:srgbClr val="E6E4E2"/>
-          </a:solidFill>
-          <a:ln/>
-        </p:spPr>
-      </p:sp>
-      <p:sp>
-        <p:nvSpPr>
-          <p:cNvPr id="15" name="Text 11"/>
-          <p:cNvSpPr txBox="1"/>
-          <p:nvPr/>
-        </p:nvSpPr>
-        <p:spPr>
-          <a:xfrm>
-            <a:off x="5120640" y="3182112"/>
-            <a:ext cx="6293815" cy="219456"/>
-          </a:xfrm>
-          <a:prstGeom prst="rect">
-            <a:avLst/>
-          </a:prstGeom>
-          <a:noFill/>
-          <a:ln/>
-        </p:spPr>
-        <p:txBody>
-          <a:bodyPr wrap="square" lIns="0" tIns="0" rIns="0" bIns="0" rtlCol="0" anchor="t"/>
-          <a:lstStyle/>
-          <a:p>
-            <a:pPr indent="0" marL="0">
-              <a:buNone/>
-            </a:pPr>
-            <a:r>
-              <a:rPr lang="en-US" sz="850" spc="140" kern="0" dirty="0">
-                <a:solidFill>
-                  <a:srgbClr val="942838"/>
-                </a:solidFill>
-                <a:latin typeface="Montserrat SemiBold" pitchFamily="34" charset="0"/>
-                <a:ea typeface="Montserrat SemiBold" pitchFamily="34" charset="-122"/>
-                <a:cs typeface="Montserrat SemiBold" pitchFamily="34" charset="-120"/>
-              </a:rPr>
-              <a:t>BACKGROUND</a:t>
-            </a:r>
-            <a:endParaRPr lang="en-US" sz="850" dirty="0"/>
-          </a:p>
-        </p:txBody>
-      </p:sp>
-      <p:sp>
-        <p:nvSpPr>
-          <p:cNvPr id="16" name="Text 12"/>
-          <p:cNvSpPr txBox="1"/>
-          <p:nvPr/>
-        </p:nvSpPr>
-        <p:spPr>
-          <a:xfrm>
-            <a:off x="5120640" y="3429000"/>
-            <a:ext cx="6293815" cy="475488"/>
-          </a:xfrm>
-          <a:prstGeom prst="rect">
-            <a:avLst/>
-          </a:prstGeom>
-          <a:noFill/>
-          <a:ln/>
-        </p:spPr>
-        <p:txBody>
-          <a:bodyPr wrap="square" lIns="0" tIns="0" rIns="0" bIns="0" rtlCol="0" anchor="t"/>
-          <a:lstStyle/>
-          <a:p>
-            <a:pPr indent="0" marL="0">
-              <a:lnSpc>
-                <a:spcPct val="120000"/>
-              </a:lnSpc>
-              <a:buNone/>
-            </a:pPr>
-            <a:r>
-              <a:rPr lang="en-US" sz="1250" dirty="0">
-                <a:solidFill>
-                  <a:srgbClr val="43464A"/>
-                </a:solidFill>
-                <a:latin typeface="Montserrat" pitchFamily="34" charset="0"/>
-                <a:ea typeface="Montserrat" pitchFamily="34" charset="-122"/>
-                <a:cs typeface="Montserrat" pitchFamily="34" charset="-120"/>
-              </a:rPr>
-              <a:t>Hands-on security work across vulnerability management, application security, and network security</a:t>
-            </a:r>
-            <a:endParaRPr lang="en-US" sz="1250" dirty="0"/>
-          </a:p>
-        </p:txBody>
-      </p:sp>
-      <p:sp>
-        <p:nvSpPr>
-          <p:cNvPr id="17" name="Shape 13"/>
-          <p:cNvSpPr/>
-          <p:nvPr/>
-        </p:nvSpPr>
-        <p:spPr>
-          <a:xfrm>
-            <a:off x="5120640" y="3968496"/>
-            <a:ext cx="6293815" cy="10973"/>
-          </a:xfrm>
-          <a:prstGeom prst="rect">
-            <a:avLst/>
-          </a:prstGeom>
-          <a:solidFill>
-            <a:srgbClr val="E6E4E2"/>
-          </a:solidFill>
-          <a:ln/>
-        </p:spPr>
-      </p:sp>
-      <p:sp>
-        <p:nvSpPr>
-          <p:cNvPr id="18" name="Text 14"/>
-          <p:cNvSpPr txBox="1"/>
-          <p:nvPr/>
-        </p:nvSpPr>
-        <p:spPr>
-          <a:xfrm>
-            <a:off x="5120640" y="4123944"/>
-            <a:ext cx="6293815" cy="219456"/>
-          </a:xfrm>
-          <a:prstGeom prst="rect">
-            <a:avLst/>
-          </a:prstGeom>
-          <a:noFill/>
-          <a:ln/>
-        </p:spPr>
-        <p:txBody>
-          <a:bodyPr wrap="square" lIns="0" tIns="0" rIns="0" bIns="0" rtlCol="0" anchor="t"/>
-          <a:lstStyle/>
-          <a:p>
-            <a:pPr indent="0" marL="0">
-              <a:buNone/>
-            </a:pPr>
-            <a:r>
-              <a:rPr lang="en-US" sz="850" spc="140" kern="0" dirty="0">
-                <a:solidFill>
-                  <a:srgbClr val="942838"/>
-                </a:solidFill>
-                <a:latin typeface="Montserrat SemiBold" pitchFamily="34" charset="0"/>
-                <a:ea typeface="Montserrat SemiBold" pitchFamily="34" charset="-122"/>
-                <a:cs typeface="Montserrat SemiBold" pitchFamily="34" charset="-120"/>
-              </a:rPr>
-              <a:t>CERTIFICATIONS</a:t>
-            </a:r>
-            <a:endParaRPr lang="en-US" sz="850" dirty="0"/>
-          </a:p>
-        </p:txBody>
-      </p:sp>
-      <p:sp>
-        <p:nvSpPr>
-          <p:cNvPr id="19" name="Text 15"/>
-          <p:cNvSpPr txBox="1"/>
-          <p:nvPr/>
-        </p:nvSpPr>
-        <p:spPr>
-          <a:xfrm>
-            <a:off x="5120640" y="4370832"/>
-            <a:ext cx="6293815" cy="475488"/>
-          </a:xfrm>
-          <a:prstGeom prst="rect">
-            <a:avLst/>
-          </a:prstGeom>
-          <a:noFill/>
-          <a:ln/>
-        </p:spPr>
-        <p:txBody>
-          <a:bodyPr wrap="square" lIns="0" tIns="0" rIns="0" bIns="0" rtlCol="0" anchor="t"/>
-          <a:lstStyle/>
-          <a:p>
-            <a:pPr indent="0" marL="0">
-              <a:lnSpc>
-                <a:spcPct val="120000"/>
-              </a:lnSpc>
-              <a:buNone/>
-            </a:pPr>
-            <a:r>
-              <a:rPr lang="en-US" sz="1250" dirty="0">
-                <a:solidFill>
-                  <a:srgbClr val="43464A"/>
-                </a:solidFill>
-                <a:latin typeface="Montserrat" pitchFamily="34" charset="0"/>
-                <a:ea typeface="Montserrat" pitchFamily="34" charset="-122"/>
-                <a:cs typeface="Montserrat" pitchFamily="34" charset="-120"/>
-              </a:rPr>
-              <a:t>Working toward the PWPA and PJPT practical certifications</a:t>
-            </a:r>
-            <a:endParaRPr lang="en-US" sz="1250" dirty="0"/>
-          </a:p>
-        </p:txBody>
-      </p:sp>
-      <p:sp>
-        <p:nvSpPr>
-          <p:cNvPr id="20" name="Shape 16"/>
-          <p:cNvSpPr/>
-          <p:nvPr/>
-        </p:nvSpPr>
-        <p:spPr>
-          <a:xfrm>
-            <a:off x="5120640" y="4910328"/>
-            <a:ext cx="6293815" cy="10973"/>
-          </a:xfrm>
-          <a:prstGeom prst="rect">
-            <a:avLst/>
-          </a:prstGeom>
-          <a:solidFill>
-            <a:srgbClr val="E6E4E2"/>
-          </a:solidFill>
-          <a:ln/>
-        </p:spPr>
-      </p:sp>
-      <p:sp>
-        <p:nvSpPr>
-          <p:cNvPr id="21" name="Text 17"/>
-          <p:cNvSpPr txBox="1"/>
-          <p:nvPr/>
-        </p:nvSpPr>
-        <p:spPr>
-          <a:xfrm>
-            <a:off x="5120640" y="5065776"/>
-            <a:ext cx="6293815" cy="219456"/>
-          </a:xfrm>
-          <a:prstGeom prst="rect">
-            <a:avLst/>
-          </a:prstGeom>
-          <a:noFill/>
-          <a:ln/>
-        </p:spPr>
-        <p:txBody>
-          <a:bodyPr wrap="square" lIns="0" tIns="0" rIns="0" bIns="0" rtlCol="0" anchor="t"/>
-          <a:lstStyle/>
-          <a:p>
-            <a:pPr indent="0" marL="0">
-              <a:buNone/>
-            </a:pPr>
-            <a:r>
-              <a:rPr lang="en-US" sz="850" spc="140" kern="0" dirty="0">
-                <a:solidFill>
-                  <a:srgbClr val="942838"/>
-                </a:solidFill>
-                <a:latin typeface="Montserrat SemiBold" pitchFamily="34" charset="0"/>
-                <a:ea typeface="Montserrat SemiBold" pitchFamily="34" charset="-122"/>
-                <a:cs typeface="Montserrat SemiBold" pitchFamily="34" charset="-120"/>
-              </a:rPr>
-              <a:t>CAREER DIRECTION</a:t>
-            </a:r>
-            <a:endParaRPr lang="en-US" sz="850" dirty="0"/>
-          </a:p>
-        </p:txBody>
-      </p:sp>
-      <p:sp>
-        <p:nvSpPr>
-          <p:cNvPr id="22" name="Text 18"/>
-          <p:cNvSpPr txBox="1"/>
-          <p:nvPr/>
-        </p:nvSpPr>
-        <p:spPr>
-          <a:xfrm>
-            <a:off x="5120640" y="5312664"/>
-            <a:ext cx="6293815" cy="475488"/>
-          </a:xfrm>
-          <a:prstGeom prst="rect">
-            <a:avLst/>
-          </a:prstGeom>
-          <a:noFill/>
-          <a:ln/>
-        </p:spPr>
-        <p:txBody>
-          <a:bodyPr wrap="square" lIns="0" tIns="0" rIns="0" bIns="0" rtlCol="0" anchor="t"/>
-          <a:lstStyle/>
-          <a:p>
-            <a:pPr indent="0" marL="0">
-              <a:lnSpc>
-                <a:spcPct val="120000"/>
-              </a:lnSpc>
-              <a:buNone/>
-            </a:pPr>
-            <a:r>
-              <a:rPr lang="en-US" sz="1250" dirty="0">
-                <a:solidFill>
-                  <a:srgbClr val="43464A"/>
-                </a:solidFill>
-                <a:latin typeface="Montserrat" pitchFamily="34" charset="0"/>
-                <a:ea typeface="Montserrat" pitchFamily="34" charset="-122"/>
-                <a:cs typeface="Montserrat" pitchFamily="34" charset="-120"/>
-              </a:rPr>
-              <a:t>Penetration testing — finding weaknesses before an attacker does</a:t>
-            </a:r>
-            <a:endParaRPr lang="en-US" sz="1250" dirty="0"/>
-          </a:p>
-        </p:txBody>
-      </p:sp>
-      <p:pic>
-        <p:nvPicPr>
-          <p:cNvPr id="23" name="Image 2" descr="/home/user/ai/assets/gen/logo-red.png">    </p:cNvPr>
-          <p:cNvPicPr>
-            <a:picLocks noChangeAspect="1"/>
-          </p:cNvPicPr>
-          <p:nvPr/>
-        </p:nvPicPr>
-        <p:blipFill>
-          <a:blip r:embed="rId3"/>
-          <a:stretch>
-            <a:fillRect/>
-          </a:stretch>
-        </p:blipFill>
-        <p:spPr>
-          <a:xfrm>
-            <a:off x="9768535" y="457200"/>
-            <a:ext cx="1645920" cy="166053"/>
-          </a:xfrm>
-          <a:prstGeom prst="rect">
-            <a:avLst/>
-          </a:prstGeom>
-        </p:spPr>
-      </p:pic>
-      <p:sp>
-        <p:nvSpPr>
-          <p:cNvPr id="24" name="Shape 19"/>
-          <p:cNvSpPr/>
-          <p:nvPr/>
-        </p:nvSpPr>
-        <p:spPr>
-          <a:xfrm>
-            <a:off x="5120640" y="6181344"/>
-            <a:ext cx="6293815" cy="10973"/>
-          </a:xfrm>
-          <a:prstGeom prst="rect">
-            <a:avLst/>
-          </a:prstGeom>
-          <a:solidFill>
-            <a:srgbClr val="E6E4E2"/>
-          </a:solidFill>
-          <a:ln/>
-        </p:spPr>
-      </p:sp>
-      <p:sp>
-        <p:nvSpPr>
-          <p:cNvPr id="25" name="Text 20"/>
-          <p:cNvSpPr txBox="1"/>
-          <p:nvPr/>
-        </p:nvSpPr>
-        <p:spPr>
-          <a:xfrm>
-            <a:off x="5120640" y="6327648"/>
-            <a:ext cx="7315200" cy="201168"/>
-          </a:xfrm>
-          <a:prstGeom prst="rect">
-            <a:avLst/>
-          </a:prstGeom>
-          <a:noFill/>
-          <a:ln/>
-        </p:spPr>
-        <p:txBody>
-          <a:bodyPr wrap="square" lIns="0" tIns="0" rIns="0" bIns="0" rtlCol="0" anchor="t"/>
-          <a:lstStyle/>
-          <a:p>
-            <a:pPr indent="0" marL="0">
-              <a:buNone/>
-            </a:pPr>
-            <a:r>
-              <a:rPr lang="en-US" sz="850" spc="140" kern="0" dirty="0">
-                <a:solidFill>
-                  <a:srgbClr val="6E7175"/>
-                </a:solidFill>
-                <a:latin typeface="Montserrat SemiBold" pitchFamily="34" charset="0"/>
-                <a:ea typeface="Montserrat SemiBold" pitchFamily="34" charset="-122"/>
-                <a:cs typeface="Montserrat SemiBold" pitchFamily="34" charset="-120"/>
-              </a:rPr>
-              <a:t>ABOUT ME</a:t>
-            </a:r>
-            <a:endParaRPr lang="en-US" sz="850" dirty="0"/>
-          </a:p>
-        </p:txBody>
-      </p:sp>
-      <p:sp>
-        <p:nvSpPr>
-          <p:cNvPr id="26" name="Text 21"/>
-          <p:cNvSpPr txBox="1"/>
-          <p:nvPr/>
-        </p:nvSpPr>
-        <p:spPr>
-          <a:xfrm>
-            <a:off x="10317175" y="6327648"/>
-            <a:ext cx="1097280" cy="201168"/>
-          </a:xfrm>
-          <a:prstGeom prst="rect">
-            <a:avLst/>
-          </a:prstGeom>
-          <a:noFill/>
-          <a:ln/>
-        </p:spPr>
-        <p:txBody>
-          <a:bodyPr wrap="square" lIns="0" tIns="0" rIns="0" bIns="0" rtlCol="0" anchor="t"/>
-          <a:lstStyle/>
-          <a:p>
-            <a:pPr algn="r" indent="0" marL="0">
-              <a:buNone/>
-            </a:pPr>
-            <a:r>
-              <a:rPr lang="en-US" sz="850" spc="140" kern="0" dirty="0">
-                <a:solidFill>
-                  <a:srgbClr val="6E7175"/>
-                </a:solidFill>
-                <a:latin typeface="Montserrat SemiBold" pitchFamily="34" charset="0"/>
-                <a:ea typeface="Montserrat SemiBold" pitchFamily="34" charset="-122"/>
-                <a:cs typeface="Montserrat SemiBold" pitchFamily="34" charset="-120"/>
-              </a:rPr>
-              <a:t>04</a:t>
-            </a:r>
-            <a:endParaRPr lang="en-US" sz="850" dirty="0"/>
+              <a:t>Protecting how machines talk to each other, and what is allowed in and out.</a:t>
+            </a:r>
+            <a:endParaRPr lang="en-US" sz="1100" dirty="0"/>
           </a:p>
         </p:txBody>
       </p:sp>
@@ -17981,7 +17986,7 @@
                 <a:ea typeface="Montserrat SemiBold" pitchFamily="34" charset="-122"/>
                 <a:cs typeface="Montserrat SemiBold" pitchFamily="34" charset="-120"/>
               </a:rPr>
-              <a:t>INTERNSHIP OVERVIEW</a:t>
+              <a:t>EXECUTIVE SUMMARY</a:t>
             </a:r>
             <a:endParaRPr lang="en-US" sz="1000" dirty="0"/>
           </a:p>
@@ -18023,7 +18028,7 @@
                 <a:ea typeface="Montserrat ExtraBold" pitchFamily="34" charset="-122"/>
                 <a:cs typeface="Montserrat ExtraBold" pitchFamily="34" charset="-120"/>
               </a:rPr>
-              <a:t>Three rotations across the security team</a:t>
+              <a:t>Three problems, three working solutions</a:t>
             </a:r>
             <a:endParaRPr lang="en-US" sz="2900" dirty="0"/>
           </a:p>
@@ -18102,7 +18107,7 @@
                 <a:ea typeface="Montserrat SemiBold" pitchFamily="34" charset="-122"/>
                 <a:cs typeface="Montserrat SemiBold" pitchFamily="34" charset="-120"/>
               </a:rPr>
-              <a:t>INTERNSHIP OVERVIEW</a:t>
+              <a:t>EXECUTIVE SUMMARY</a:t>
             </a:r>
             <a:endParaRPr lang="en-US" sz="850" dirty="0"/>
           </a:p>
@@ -18155,8 +18160,8 @@
         </p:nvSpPr>
         <p:spPr>
           <a:xfrm>
-            <a:off x="777240" y="1883664"/>
-            <a:ext cx="9052560" cy="310896"/>
+            <a:off x="777240" y="1956816"/>
+            <a:ext cx="10241280" cy="310896"/>
           </a:xfrm>
           <a:prstGeom prst="rect">
             <a:avLst/>
@@ -18180,7 +18185,7 @@
                 <a:ea typeface="Montserrat Medium" pitchFamily="34" charset="-122"/>
                 <a:cs typeface="Montserrat Medium" pitchFamily="34" charset="-120"/>
               </a:rPr>
-              <a:t>I moved through three different areas of Information Security. Each rotation produced one project.</a:t>
+              <a:t>One from each rotation. Three separate gaps, three things the team keeps using — then the detail on each.</a:t>
             </a:r>
             <a:endParaRPr lang="en-US" sz="1400" dirty="0"/>
           </a:p>
@@ -18188,194 +18193,151 @@
       </p:sp>
       <p:sp>
         <p:nvSpPr>
-          <p:cNvPr id="10" name="Shape 7"/>
-          <p:cNvSpPr/>
-          <p:nvPr/>
-        </p:nvSpPr>
-        <p:spPr>
-          <a:xfrm>
-            <a:off x="777240" y="2852928"/>
-            <a:ext cx="10637215" cy="10973"/>
-          </a:xfrm>
-          <a:prstGeom prst="rect">
-            <a:avLst/>
-          </a:prstGeom>
-          <a:solidFill>
-            <a:srgbClr val="C9C6C4"/>
-          </a:solidFill>
-          <a:ln/>
-        </p:spPr>
-      </p:sp>
-      <p:sp>
-        <p:nvSpPr>
-          <p:cNvPr id="11" name="Shape 8"/>
-          <p:cNvSpPr/>
-          <p:nvPr/>
-        </p:nvSpPr>
-        <p:spPr>
-          <a:xfrm>
-            <a:off x="1033272" y="2756916"/>
-            <a:ext cx="201168" cy="201168"/>
-          </a:xfrm>
-          <a:prstGeom prst="ellipse">
-            <a:avLst/>
-          </a:prstGeom>
-          <a:solidFill>
-            <a:srgbClr val="942838"/>
-          </a:solidFill>
-          <a:ln w="25400">
-            <a:solidFill>
-              <a:srgbClr val="FFFFFF"/>
-            </a:solidFill>
-            <a:prstDash val="solid"/>
-          </a:ln>
-        </p:spPr>
-      </p:sp>
-      <p:sp>
-        <p:nvSpPr>
-          <p:cNvPr id="12" name="Shape 9"/>
-          <p:cNvSpPr/>
-          <p:nvPr/>
-        </p:nvSpPr>
-        <p:spPr>
-          <a:xfrm>
-            <a:off x="777240" y="3310128"/>
-            <a:ext cx="3310128" cy="2286000"/>
-          </a:xfrm>
-          <a:prstGeom prst="roundRect">
-            <a:avLst>
-              <a:gd name="adj" fmla="val 2400"/>
-            </a:avLst>
-          </a:prstGeom>
-          <a:solidFill>
-            <a:srgbClr val="FFFFFF"/>
-          </a:solidFill>
-          <a:ln w="9525">
-            <a:solidFill>
-              <a:srgbClr val="E6E4E2"/>
-            </a:solidFill>
-            <a:prstDash val="solid"/>
-          </a:ln>
-          <a:effectLst>
-            <a:outerShdw sx="100000" sy="100000" kx="0" ky="0" algn="bl" rotWithShape="0" blurRad="177800" dist="44450" dir="5400000">
-              <a:srgbClr val="959092">
-                <a:alpha val="22000"/>
-              </a:srgbClr>
-            </a:outerShdw>
-          </a:effectLst>
-        </p:spPr>
-      </p:sp>
-      <p:sp>
-        <p:nvSpPr>
-          <p:cNvPr id="13" name="Shape 10"/>
-          <p:cNvSpPr/>
-          <p:nvPr/>
-        </p:nvSpPr>
-        <p:spPr>
-          <a:xfrm>
-            <a:off x="777240" y="3310128"/>
-            <a:ext cx="3310128" cy="50292"/>
-          </a:xfrm>
-          <a:prstGeom prst="rect">
-            <a:avLst/>
-          </a:prstGeom>
-          <a:solidFill>
-            <a:srgbClr val="942838"/>
-          </a:solidFill>
-          <a:ln/>
-        </p:spPr>
-      </p:sp>
-      <p:sp>
-        <p:nvSpPr>
-          <p:cNvPr id="14" name="Text 11"/>
-          <p:cNvSpPr txBox="1"/>
-          <p:nvPr/>
-        </p:nvSpPr>
-        <p:spPr>
-          <a:xfrm>
-            <a:off x="1088136" y="3566160"/>
-            <a:ext cx="914400" cy="384048"/>
-          </a:xfrm>
-          <a:prstGeom prst="rect">
-            <a:avLst/>
-          </a:prstGeom>
-          <a:noFill/>
-          <a:ln/>
-        </p:spPr>
-        <p:txBody>
-          <a:bodyPr wrap="square" lIns="0" tIns="0" rIns="0" bIns="0" rtlCol="0" anchor="t"/>
-          <a:lstStyle/>
-          <a:p>
-            <a:pPr indent="0" marL="0">
-              <a:buNone/>
-            </a:pPr>
-            <a:r>
-              <a:rPr lang="en-US" sz="2400" spc="-50" kern="0" dirty="0">
-                <a:solidFill>
-                  <a:srgbClr val="DFBEC4"/>
-                </a:solidFill>
-                <a:latin typeface="Montserrat ExtraBold" pitchFamily="34" charset="0"/>
-                <a:ea typeface="Montserrat ExtraBold" pitchFamily="34" charset="-122"/>
-                <a:cs typeface="Montserrat ExtraBold" pitchFamily="34" charset="-120"/>
-              </a:rPr>
-              <a:t>01</a:t>
-            </a:r>
-            <a:endParaRPr lang="en-US" sz="2400" dirty="0"/>
-          </a:p>
-        </p:txBody>
-      </p:sp>
-      <p:sp>
-        <p:nvSpPr>
-          <p:cNvPr id="15" name="Text 12"/>
-          <p:cNvSpPr txBox="1"/>
-          <p:nvPr/>
-        </p:nvSpPr>
-        <p:spPr>
-          <a:xfrm>
-            <a:off x="1088136" y="4041648"/>
-            <a:ext cx="2688336" cy="329184"/>
-          </a:xfrm>
-          <a:prstGeom prst="rect">
-            <a:avLst/>
-          </a:prstGeom>
-          <a:noFill/>
-          <a:ln/>
-        </p:spPr>
-        <p:txBody>
-          <a:bodyPr wrap="square" lIns="0" tIns="0" rIns="0" bIns="0" rtlCol="0" anchor="t"/>
-          <a:lstStyle/>
-          <a:p>
-            <a:pPr indent="0" marL="0">
-              <a:lnSpc>
-                <a:spcPct val="105000"/>
-              </a:lnSpc>
-              <a:buNone/>
-            </a:pPr>
-            <a:r>
-              <a:rPr lang="en-US" sz="1500" dirty="0">
-                <a:solidFill>
-                  <a:srgbClr val="2B2D30"/>
+          <p:cNvPr id="10" name="Text 7"/>
+          <p:cNvSpPr txBox="1"/>
+          <p:nvPr/>
+        </p:nvSpPr>
+        <p:spPr>
+          <a:xfrm>
+            <a:off x="777240" y="2487168"/>
+            <a:ext cx="3200400" cy="201168"/>
+          </a:xfrm>
+          <a:prstGeom prst="rect">
+            <a:avLst/>
+          </a:prstGeom>
+          <a:noFill/>
+          <a:ln/>
+        </p:spPr>
+        <p:txBody>
+          <a:bodyPr wrap="square" lIns="0" tIns="0" rIns="0" bIns="0" rtlCol="0" anchor="t"/>
+          <a:lstStyle/>
+          <a:p>
+            <a:pPr indent="0" marL="0">
+              <a:buNone/>
+            </a:pPr>
+            <a:r>
+              <a:rPr lang="en-US" sz="850" spc="140" kern="0" dirty="0">
+                <a:solidFill>
+                  <a:srgbClr val="942838"/>
                 </a:solidFill>
                 <a:latin typeface="Montserrat SemiBold" pitchFamily="34" charset="0"/>
                 <a:ea typeface="Montserrat SemiBold" pitchFamily="34" charset="-122"/>
                 <a:cs typeface="Montserrat SemiBold" pitchFamily="34" charset="-120"/>
               </a:rPr>
-              <a:t>Vulnerability Management</a:t>
-            </a:r>
-            <a:endParaRPr lang="en-US" sz="1500" dirty="0"/>
-          </a:p>
-        </p:txBody>
-      </p:sp>
-      <p:sp>
-        <p:nvSpPr>
-          <p:cNvPr id="16" name="Text 13"/>
-          <p:cNvSpPr txBox="1"/>
-          <p:nvPr/>
-        </p:nvSpPr>
-        <p:spPr>
-          <a:xfrm>
-            <a:off x="1088136" y="4462272"/>
-            <a:ext cx="2688336" cy="777240"/>
+              <a:t>THE PROBLEM</a:t>
+            </a:r>
+            <a:endParaRPr lang="en-US" sz="850" dirty="0"/>
+          </a:p>
+        </p:txBody>
+      </p:sp>
+      <p:sp>
+        <p:nvSpPr>
+          <p:cNvPr id="11" name="Text 8"/>
+          <p:cNvSpPr txBox="1"/>
+          <p:nvPr/>
+        </p:nvSpPr>
+        <p:spPr>
+          <a:xfrm>
+            <a:off x="4224528" y="2487168"/>
+            <a:ext cx="3657600" cy="201168"/>
+          </a:xfrm>
+          <a:prstGeom prst="rect">
+            <a:avLst/>
+          </a:prstGeom>
+          <a:noFill/>
+          <a:ln/>
+        </p:spPr>
+        <p:txBody>
+          <a:bodyPr wrap="square" lIns="0" tIns="0" rIns="0" bIns="0" rtlCol="0" anchor="t"/>
+          <a:lstStyle/>
+          <a:p>
+            <a:pPr indent="0" marL="0">
+              <a:buNone/>
+            </a:pPr>
+            <a:r>
+              <a:rPr lang="en-US" sz="850" spc="140" kern="0" dirty="0">
+                <a:solidFill>
+                  <a:srgbClr val="942838"/>
+                </a:solidFill>
+                <a:latin typeface="Montserrat SemiBold" pitchFamily="34" charset="0"/>
+                <a:ea typeface="Montserrat SemiBold" pitchFamily="34" charset="-122"/>
+                <a:cs typeface="Montserrat SemiBold" pitchFamily="34" charset="-120"/>
+              </a:rPr>
+              <a:t>WHAT I BUILT</a:t>
+            </a:r>
+            <a:endParaRPr lang="en-US" sz="850" dirty="0"/>
+          </a:p>
+        </p:txBody>
+      </p:sp>
+      <p:sp>
+        <p:nvSpPr>
+          <p:cNvPr id="12" name="Text 9"/>
+          <p:cNvSpPr txBox="1"/>
+          <p:nvPr/>
+        </p:nvSpPr>
+        <p:spPr>
+          <a:xfrm>
+            <a:off x="8101584" y="2487168"/>
+            <a:ext cx="3312871" cy="201168"/>
+          </a:xfrm>
+          <a:prstGeom prst="rect">
+            <a:avLst/>
+          </a:prstGeom>
+          <a:noFill/>
+          <a:ln/>
+        </p:spPr>
+        <p:txBody>
+          <a:bodyPr wrap="square" lIns="0" tIns="0" rIns="0" bIns="0" rtlCol="0" anchor="t"/>
+          <a:lstStyle/>
+          <a:p>
+            <a:pPr indent="0" marL="0">
+              <a:buNone/>
+            </a:pPr>
+            <a:r>
+              <a:rPr lang="en-US" sz="850" spc="140" kern="0" dirty="0">
+                <a:solidFill>
+                  <a:srgbClr val="942838"/>
+                </a:solidFill>
+                <a:latin typeface="Montserrat SemiBold" pitchFamily="34" charset="0"/>
+                <a:ea typeface="Montserrat SemiBold" pitchFamily="34" charset="-122"/>
+                <a:cs typeface="Montserrat SemiBold" pitchFamily="34" charset="-120"/>
+              </a:rPr>
+              <a:t>THE PROOF</a:t>
+            </a:r>
+            <a:endParaRPr lang="en-US" sz="850" dirty="0"/>
+          </a:p>
+        </p:txBody>
+      </p:sp>
+      <p:sp>
+        <p:nvSpPr>
+          <p:cNvPr id="13" name="Shape 10"/>
+          <p:cNvSpPr/>
+          <p:nvPr/>
+        </p:nvSpPr>
+        <p:spPr>
+          <a:xfrm>
+            <a:off x="777240" y="2743200"/>
+            <a:ext cx="10637215" cy="10973"/>
+          </a:xfrm>
+          <a:prstGeom prst="rect">
+            <a:avLst/>
+          </a:prstGeom>
+          <a:solidFill>
+            <a:srgbClr val="E6E4E2"/>
+          </a:solidFill>
+          <a:ln/>
+        </p:spPr>
+      </p:sp>
+      <p:sp>
+        <p:nvSpPr>
+          <p:cNvPr id="14" name="Text 11"/>
+          <p:cNvSpPr txBox="1"/>
+          <p:nvPr/>
+        </p:nvSpPr>
+        <p:spPr>
+          <a:xfrm>
+            <a:off x="777240" y="2889504"/>
+            <a:ext cx="3200400" cy="822960"/>
           </a:xfrm>
           <a:prstGeom prst="rect">
             <a:avLst/>
@@ -18389,20 +18351,20 @@
           <a:p>
             <a:pPr indent="0" marL="0">
               <a:lnSpc>
-                <a:spcPct val="122000"/>
+                <a:spcPct val="124000"/>
               </a:lnSpc>
               <a:buNone/>
             </a:pPr>
             <a:r>
               <a:rPr lang="en-US" sz="1100" dirty="0">
                 <a:solidFill>
-                  <a:srgbClr val="6E7175"/>
+                  <a:srgbClr val="43464A"/>
                 </a:solidFill>
                 <a:latin typeface="Montserrat" pitchFamily="34" charset="0"/>
                 <a:ea typeface="Montserrat" pitchFamily="34" charset="-122"/>
                 <a:cs typeface="Montserrat" pitchFamily="34" charset="-120"/>
               </a:rPr>
-              <a:t>Finding known weaknesses across company machines and making sure they actually get fixed.</a:t>
+              <a:t>New machines could ship without the security tools they need.</a:t>
             </a:r>
             <a:endParaRPr lang="en-US" sz="1100" dirty="0"/>
           </a:p>
@@ -18410,132 +18372,14 @@
       </p:sp>
       <p:sp>
         <p:nvSpPr>
-          <p:cNvPr id="17" name="Shape 14"/>
-          <p:cNvSpPr/>
-          <p:nvPr/>
-        </p:nvSpPr>
-        <p:spPr>
-          <a:xfrm>
-            <a:off x="4696816" y="2756916"/>
-            <a:ext cx="201168" cy="201168"/>
-          </a:xfrm>
-          <a:prstGeom prst="ellipse">
-            <a:avLst/>
-          </a:prstGeom>
-          <a:solidFill>
-            <a:srgbClr val="942838"/>
-          </a:solidFill>
-          <a:ln w="25400">
-            <a:solidFill>
-              <a:srgbClr val="FFFFFF"/>
-            </a:solidFill>
-            <a:prstDash val="solid"/>
-          </a:ln>
-        </p:spPr>
-      </p:sp>
-      <p:sp>
-        <p:nvSpPr>
-          <p:cNvPr id="18" name="Shape 15"/>
-          <p:cNvSpPr/>
-          <p:nvPr/>
-        </p:nvSpPr>
-        <p:spPr>
-          <a:xfrm>
-            <a:off x="4440784" y="3310128"/>
-            <a:ext cx="3310128" cy="2286000"/>
-          </a:xfrm>
-          <a:prstGeom prst="roundRect">
-            <a:avLst>
-              <a:gd name="adj" fmla="val 2400"/>
-            </a:avLst>
-          </a:prstGeom>
-          <a:solidFill>
-            <a:srgbClr val="FFFFFF"/>
-          </a:solidFill>
-          <a:ln w="9525">
-            <a:solidFill>
-              <a:srgbClr val="E6E4E2"/>
-            </a:solidFill>
-            <a:prstDash val="solid"/>
-          </a:ln>
-          <a:effectLst>
-            <a:outerShdw sx="100000" sy="100000" kx="0" ky="0" algn="bl" rotWithShape="0" blurRad="2258060000" dist="564515000" dir="324000000000">
-              <a:srgbClr val="959092">
-                <a:alpha val="2200000000"/>
-              </a:srgbClr>
-            </a:outerShdw>
-          </a:effectLst>
-        </p:spPr>
-      </p:sp>
-      <p:sp>
-        <p:nvSpPr>
-          <p:cNvPr id="19" name="Shape 16"/>
-          <p:cNvSpPr/>
-          <p:nvPr/>
-        </p:nvSpPr>
-        <p:spPr>
-          <a:xfrm>
-            <a:off x="4440784" y="3310128"/>
-            <a:ext cx="3310128" cy="50292"/>
-          </a:xfrm>
-          <a:prstGeom prst="rect">
-            <a:avLst/>
-          </a:prstGeom>
-          <a:solidFill>
-            <a:srgbClr val="942838"/>
-          </a:solidFill>
-          <a:ln/>
-        </p:spPr>
-      </p:sp>
-      <p:sp>
-        <p:nvSpPr>
-          <p:cNvPr id="20" name="Text 17"/>
-          <p:cNvSpPr txBox="1"/>
-          <p:nvPr/>
-        </p:nvSpPr>
-        <p:spPr>
-          <a:xfrm>
-            <a:off x="4751680" y="3566160"/>
-            <a:ext cx="914400" cy="384048"/>
-          </a:xfrm>
-          <a:prstGeom prst="rect">
-            <a:avLst/>
-          </a:prstGeom>
-          <a:noFill/>
-          <a:ln/>
-        </p:spPr>
-        <p:txBody>
-          <a:bodyPr wrap="square" lIns="0" tIns="0" rIns="0" bIns="0" rtlCol="0" anchor="t"/>
-          <a:lstStyle/>
-          <a:p>
-            <a:pPr indent="0" marL="0">
-              <a:buNone/>
-            </a:pPr>
-            <a:r>
-              <a:rPr lang="en-US" sz="2400" spc="-50" kern="0" dirty="0">
-                <a:solidFill>
-                  <a:srgbClr val="DFBEC4"/>
-                </a:solidFill>
-                <a:latin typeface="Montserrat ExtraBold" pitchFamily="34" charset="0"/>
-                <a:ea typeface="Montserrat ExtraBold" pitchFamily="34" charset="-122"/>
-                <a:cs typeface="Montserrat ExtraBold" pitchFamily="34" charset="-120"/>
-              </a:rPr>
-              <a:t>02</a:t>
-            </a:r>
-            <a:endParaRPr lang="en-US" sz="2400" dirty="0"/>
-          </a:p>
-        </p:txBody>
-      </p:sp>
-      <p:sp>
-        <p:nvSpPr>
-          <p:cNvPr id="21" name="Text 18"/>
-          <p:cNvSpPr txBox="1"/>
-          <p:nvPr/>
-        </p:nvSpPr>
-        <p:spPr>
-          <a:xfrm>
-            <a:off x="4751680" y="4041648"/>
-            <a:ext cx="2688336" cy="329184"/>
+          <p:cNvPr id="15" name="Text 12"/>
+          <p:cNvSpPr txBox="1"/>
+          <p:nvPr/>
+        </p:nvSpPr>
+        <p:spPr>
+          <a:xfrm>
+            <a:off x="4224528" y="2889504"/>
+            <a:ext cx="3383280" cy="822960"/>
           </a:xfrm>
           <a:prstGeom prst="rect">
             <a:avLst/>
@@ -18549,12 +18393,12 @@
           <a:p>
             <a:pPr indent="0" marL="0">
               <a:lnSpc>
-                <a:spcPct val="105000"/>
+                <a:spcPct val="124000"/>
               </a:lnSpc>
               <a:buNone/>
             </a:pPr>
             <a:r>
-              <a:rPr lang="en-US" sz="1500" dirty="0">
+              <a:rPr lang="en-US" sz="1100" dirty="0">
                 <a:solidFill>
                   <a:srgbClr val="2B2D30"/>
                 </a:solidFill>
@@ -18562,49 +18406,133 @@
                 <a:ea typeface="Montserrat SemiBold" pitchFamily="34" charset="-122"/>
                 <a:cs typeface="Montserrat SemiBold" pitchFamily="34" charset="-120"/>
               </a:rPr>
-              <a:t>Application Security</a:t>
-            </a:r>
-            <a:endParaRPr lang="en-US" sz="1500" dirty="0"/>
-          </a:p>
-        </p:txBody>
-      </p:sp>
-      <p:sp>
-        <p:nvSpPr>
-          <p:cNvPr id="22" name="Text 19"/>
-          <p:cNvSpPr txBox="1"/>
-          <p:nvPr/>
-        </p:nvSpPr>
-        <p:spPr>
-          <a:xfrm>
-            <a:off x="4751680" y="4462272"/>
-            <a:ext cx="2688336" cy="777240"/>
-          </a:xfrm>
-          <a:prstGeom prst="rect">
-            <a:avLst/>
-          </a:prstGeom>
-          <a:noFill/>
-          <a:ln/>
-        </p:spPr>
-        <p:txBody>
-          <a:bodyPr wrap="square" lIns="0" tIns="0" rIns="0" bIns="0" rtlCol="0" anchor="t"/>
+              <a:t>A written framework naming all nine required tools and who owns each.</a:t>
+            </a:r>
+            <a:endParaRPr lang="en-US" sz="1100" dirty="0"/>
+          </a:p>
+        </p:txBody>
+      </p:sp>
+      <p:sp>
+        <p:nvSpPr>
+          <p:cNvPr id="16" name="Shape 13"/>
+          <p:cNvSpPr/>
+          <p:nvPr/>
+        </p:nvSpPr>
+        <p:spPr>
+          <a:xfrm>
+            <a:off x="7918704" y="2779776"/>
+            <a:ext cx="3495751" cy="859536"/>
+          </a:xfrm>
+          <a:prstGeom prst="roundRect">
+            <a:avLst>
+              <a:gd name="adj" fmla="val 5319"/>
+            </a:avLst>
+          </a:prstGeom>
+          <a:solidFill>
+            <a:srgbClr val="F6EEF0"/>
+          </a:solidFill>
+          <a:ln/>
+        </p:spPr>
+      </p:sp>
+      <p:sp>
+        <p:nvSpPr>
+          <p:cNvPr id="17" name="Text 14"/>
+          <p:cNvSpPr txBox="1"/>
+          <p:nvPr/>
+        </p:nvSpPr>
+        <p:spPr>
+          <a:xfrm>
+            <a:off x="8101584" y="2779776"/>
+            <a:ext cx="3129991" cy="859536"/>
+          </a:xfrm>
+          <a:prstGeom prst="rect">
+            <a:avLst/>
+          </a:prstGeom>
+          <a:noFill/>
+          <a:ln/>
+        </p:spPr>
+        <p:txBody>
+          <a:bodyPr wrap="square" lIns="0" tIns="0" rIns="0" bIns="0" rtlCol="0" anchor="ctr"/>
           <a:lstStyle/>
           <a:p>
             <a:pPr indent="0" marL="0">
               <a:lnSpc>
-                <a:spcPct val="122000"/>
+                <a:spcPct val="124000"/>
               </a:lnSpc>
               <a:buNone/>
             </a:pPr>
             <a:r>
               <a:rPr lang="en-US" sz="1100" dirty="0">
                 <a:solidFill>
-                  <a:srgbClr val="6E7175"/>
+                  <a:srgbClr val="942838"/>
+                </a:solidFill>
+                <a:latin typeface="Montserrat SemiBold" pitchFamily="34" charset="0"/>
+                <a:ea typeface="Montserrat SemiBold" pitchFamily="34" charset="-122"/>
+                <a:cs typeface="Montserrat SemiBold" pitchFamily="34" charset="-120"/>
+              </a:rPr>
+              <a:t>Drafted and staged for Q4 sign-off</a:t>
+            </a:r>
+            <a:endParaRPr lang="en-US" sz="1100" dirty="0"/>
+          </a:p>
+        </p:txBody>
+      </p:sp>
+      <p:sp>
+        <p:nvSpPr>
+          <p:cNvPr id="18" name="Shape 15"/>
+          <p:cNvSpPr/>
+          <p:nvPr/>
+        </p:nvSpPr>
+        <p:spPr>
+          <a:xfrm>
+            <a:off x="777240" y="3858768"/>
+            <a:ext cx="10637215" cy="10973"/>
+          </a:xfrm>
+          <a:prstGeom prst="rect">
+            <a:avLst/>
+          </a:prstGeom>
+          <a:solidFill>
+            <a:srgbClr val="E6E4E2"/>
+          </a:solidFill>
+          <a:ln/>
+        </p:spPr>
+      </p:sp>
+      <p:sp>
+        <p:nvSpPr>
+          <p:cNvPr id="19" name="Text 16"/>
+          <p:cNvSpPr txBox="1"/>
+          <p:nvPr/>
+        </p:nvSpPr>
+        <p:spPr>
+          <a:xfrm>
+            <a:off x="777240" y="4023360"/>
+            <a:ext cx="3200400" cy="822960"/>
+          </a:xfrm>
+          <a:prstGeom prst="rect">
+            <a:avLst/>
+          </a:prstGeom>
+          <a:noFill/>
+          <a:ln/>
+        </p:spPr>
+        <p:txBody>
+          <a:bodyPr wrap="square" lIns="0" tIns="0" rIns="0" bIns="0" rtlCol="0" anchor="t"/>
+          <a:lstStyle/>
+          <a:p>
+            <a:pPr indent="0" marL="0">
+              <a:lnSpc>
+                <a:spcPct val="124000"/>
+              </a:lnSpc>
+              <a:buNone/>
+            </a:pPr>
+            <a:r>
+              <a:rPr lang="en-US" sz="1100" dirty="0">
+                <a:solidFill>
+                  <a:srgbClr val="43464A"/>
                 </a:solidFill>
                 <a:latin typeface="Montserrat" pitchFamily="34" charset="0"/>
                 <a:ea typeface="Montserrat" pitchFamily="34" charset="-122"/>
                 <a:cs typeface="Montserrat" pitchFamily="34" charset="-120"/>
               </a:rPr>
-              <a:t>Checking the software we build and the outside code we rely on for weaknesses.</a:t>
+              <a:t>Attackers hide malicious code inside the open-source packages we depend on.</a:t>
             </a:r>
             <a:endParaRPr lang="en-US" sz="1100" dirty="0"/>
           </a:p>
@@ -18612,132 +18540,14 @@
       </p:sp>
       <p:sp>
         <p:nvSpPr>
-          <p:cNvPr id="23" name="Shape 20"/>
-          <p:cNvSpPr/>
-          <p:nvPr/>
-        </p:nvSpPr>
-        <p:spPr>
-          <a:xfrm>
-            <a:off x="8360359" y="2756916"/>
-            <a:ext cx="201168" cy="201168"/>
-          </a:xfrm>
-          <a:prstGeom prst="ellipse">
-            <a:avLst/>
-          </a:prstGeom>
-          <a:solidFill>
-            <a:srgbClr val="942838"/>
-          </a:solidFill>
-          <a:ln w="25400">
-            <a:solidFill>
-              <a:srgbClr val="FFFFFF"/>
-            </a:solidFill>
-            <a:prstDash val="solid"/>
-          </a:ln>
-        </p:spPr>
-      </p:sp>
-      <p:sp>
-        <p:nvSpPr>
-          <p:cNvPr id="24" name="Shape 21"/>
-          <p:cNvSpPr/>
-          <p:nvPr/>
-        </p:nvSpPr>
-        <p:spPr>
-          <a:xfrm>
-            <a:off x="8104327" y="3310128"/>
-            <a:ext cx="3310128" cy="2286000"/>
-          </a:xfrm>
-          <a:prstGeom prst="roundRect">
-            <a:avLst>
-              <a:gd name="adj" fmla="val 2400"/>
-            </a:avLst>
-          </a:prstGeom>
-          <a:solidFill>
-            <a:srgbClr val="FFFFFF"/>
-          </a:solidFill>
-          <a:ln w="9525">
-            <a:solidFill>
-              <a:srgbClr val="E6E4E2"/>
-            </a:solidFill>
-            <a:prstDash val="solid"/>
-          </a:ln>
-          <a:effectLst>
-            <a:outerShdw sx="100000" sy="100000" kx="0" ky="0" algn="bl" rotWithShape="0" blurRad="28677362000000" dist="7169340500000" dir="19440000000000000">
-              <a:srgbClr val="959092">
-                <a:alpha val="220000000000000"/>
-              </a:srgbClr>
-            </a:outerShdw>
-          </a:effectLst>
-        </p:spPr>
-      </p:sp>
-      <p:sp>
-        <p:nvSpPr>
-          <p:cNvPr id="25" name="Shape 22"/>
-          <p:cNvSpPr/>
-          <p:nvPr/>
-        </p:nvSpPr>
-        <p:spPr>
-          <a:xfrm>
-            <a:off x="8104327" y="3310128"/>
-            <a:ext cx="3310128" cy="50292"/>
-          </a:xfrm>
-          <a:prstGeom prst="rect">
-            <a:avLst/>
-          </a:prstGeom>
-          <a:solidFill>
-            <a:srgbClr val="942838"/>
-          </a:solidFill>
-          <a:ln/>
-        </p:spPr>
-      </p:sp>
-      <p:sp>
-        <p:nvSpPr>
-          <p:cNvPr id="26" name="Text 23"/>
-          <p:cNvSpPr txBox="1"/>
-          <p:nvPr/>
-        </p:nvSpPr>
-        <p:spPr>
-          <a:xfrm>
-            <a:off x="8415223" y="3566160"/>
-            <a:ext cx="914400" cy="384048"/>
-          </a:xfrm>
-          <a:prstGeom prst="rect">
-            <a:avLst/>
-          </a:prstGeom>
-          <a:noFill/>
-          <a:ln/>
-        </p:spPr>
-        <p:txBody>
-          <a:bodyPr wrap="square" lIns="0" tIns="0" rIns="0" bIns="0" rtlCol="0" anchor="t"/>
-          <a:lstStyle/>
-          <a:p>
-            <a:pPr indent="0" marL="0">
-              <a:buNone/>
-            </a:pPr>
-            <a:r>
-              <a:rPr lang="en-US" sz="2400" spc="-50" kern="0" dirty="0">
-                <a:solidFill>
-                  <a:srgbClr val="DFBEC4"/>
-                </a:solidFill>
-                <a:latin typeface="Montserrat ExtraBold" pitchFamily="34" charset="0"/>
-                <a:ea typeface="Montserrat ExtraBold" pitchFamily="34" charset="-122"/>
-                <a:cs typeface="Montserrat ExtraBold" pitchFamily="34" charset="-120"/>
-              </a:rPr>
-              <a:t>03</a:t>
-            </a:r>
-            <a:endParaRPr lang="en-US" sz="2400" dirty="0"/>
-          </a:p>
-        </p:txBody>
-      </p:sp>
-      <p:sp>
-        <p:nvSpPr>
-          <p:cNvPr id="27" name="Text 24"/>
-          <p:cNvSpPr txBox="1"/>
-          <p:nvPr/>
-        </p:nvSpPr>
-        <p:spPr>
-          <a:xfrm>
-            <a:off x="8415223" y="4041648"/>
-            <a:ext cx="2688336" cy="329184"/>
+          <p:cNvPr id="20" name="Text 17"/>
+          <p:cNvSpPr txBox="1"/>
+          <p:nvPr/>
+        </p:nvSpPr>
+        <p:spPr>
+          <a:xfrm>
+            <a:off x="4224528" y="4023360"/>
+            <a:ext cx="3383280" cy="822960"/>
           </a:xfrm>
           <a:prstGeom prst="rect">
             <a:avLst/>
@@ -18751,12 +18561,12 @@
           <a:p>
             <a:pPr indent="0" marL="0">
               <a:lnSpc>
-                <a:spcPct val="105000"/>
+                <a:spcPct val="124000"/>
               </a:lnSpc>
               <a:buNone/>
             </a:pPr>
             <a:r>
-              <a:rPr lang="en-US" sz="1500" dirty="0">
+              <a:rPr lang="en-US" sz="1100" dirty="0">
                 <a:solidFill>
                   <a:srgbClr val="2B2D30"/>
                 </a:solidFill>
@@ -18764,49 +18574,239 @@
                 <a:ea typeface="Montserrat SemiBold" pitchFamily="34" charset="-122"/>
                 <a:cs typeface="Montserrat SemiBold" pitchFamily="34" charset="-120"/>
               </a:rPr>
-              <a:t>Network Security</a:t>
-            </a:r>
-            <a:endParaRPr lang="en-US" sz="1500" dirty="0"/>
-          </a:p>
-        </p:txBody>
-      </p:sp>
-      <p:sp>
-        <p:nvSpPr>
-          <p:cNvPr id="28" name="Text 25"/>
-          <p:cNvSpPr txBox="1"/>
-          <p:nvPr/>
-        </p:nvSpPr>
-        <p:spPr>
-          <a:xfrm>
-            <a:off x="8415223" y="4462272"/>
-            <a:ext cx="2688336" cy="777240"/>
-          </a:xfrm>
-          <a:prstGeom prst="rect">
-            <a:avLst/>
-          </a:prstGeom>
-          <a:noFill/>
-          <a:ln/>
-        </p:spPr>
-        <p:txBody>
-          <a:bodyPr wrap="square" lIns="0" tIns="0" rIns="0" bIns="0" rtlCol="0" anchor="t"/>
+              <a:t>AEGIS — a scanner that checks whether our code actually reaches the flaw.</a:t>
+            </a:r>
+            <a:endParaRPr lang="en-US" sz="1100" dirty="0"/>
+          </a:p>
+        </p:txBody>
+      </p:sp>
+      <p:sp>
+        <p:nvSpPr>
+          <p:cNvPr id="21" name="Shape 18"/>
+          <p:cNvSpPr/>
+          <p:nvPr/>
+        </p:nvSpPr>
+        <p:spPr>
+          <a:xfrm>
+            <a:off x="7918704" y="3913632"/>
+            <a:ext cx="3495751" cy="859536"/>
+          </a:xfrm>
+          <a:prstGeom prst="roundRect">
+            <a:avLst>
+              <a:gd name="adj" fmla="val 5319"/>
+            </a:avLst>
+          </a:prstGeom>
+          <a:solidFill>
+            <a:srgbClr val="F6EEF0"/>
+          </a:solidFill>
+          <a:ln/>
+        </p:spPr>
+      </p:sp>
+      <p:sp>
+        <p:nvSpPr>
+          <p:cNvPr id="22" name="Text 19"/>
+          <p:cNvSpPr txBox="1"/>
+          <p:nvPr/>
+        </p:nvSpPr>
+        <p:spPr>
+          <a:xfrm>
+            <a:off x="8101584" y="3913632"/>
+            <a:ext cx="3129991" cy="859536"/>
+          </a:xfrm>
+          <a:prstGeom prst="rect">
+            <a:avLst/>
+          </a:prstGeom>
+          <a:noFill/>
+          <a:ln/>
+        </p:spPr>
+        <p:txBody>
+          <a:bodyPr wrap="square" lIns="0" tIns="0" rIns="0" bIns="0" rtlCol="0" anchor="ctr"/>
           <a:lstStyle/>
           <a:p>
             <a:pPr indent="0" marL="0">
               <a:lnSpc>
-                <a:spcPct val="122000"/>
+                <a:spcPct val="124000"/>
               </a:lnSpc>
               <a:buNone/>
             </a:pPr>
             <a:r>
               <a:rPr lang="en-US" sz="1100" dirty="0">
                 <a:solidFill>
-                  <a:srgbClr val="6E7175"/>
+                  <a:srgbClr val="942838"/>
+                </a:solidFill>
+                <a:latin typeface="Montserrat SemiBold" pitchFamily="34" charset="0"/>
+                <a:ea typeface="Montserrat SemiBold" pitchFamily="34" charset="-122"/>
+                <a:cs typeface="Montserrat SemiBold" pitchFamily="34" charset="-120"/>
+              </a:rPr>
+              <a:t>5,675 packages scanned in production by an earlier version</a:t>
+            </a:r>
+            <a:endParaRPr lang="en-US" sz="1100" dirty="0"/>
+          </a:p>
+        </p:txBody>
+      </p:sp>
+      <p:sp>
+        <p:nvSpPr>
+          <p:cNvPr id="23" name="Shape 20"/>
+          <p:cNvSpPr/>
+          <p:nvPr/>
+        </p:nvSpPr>
+        <p:spPr>
+          <a:xfrm>
+            <a:off x="777240" y="4992624"/>
+            <a:ext cx="10637215" cy="10973"/>
+          </a:xfrm>
+          <a:prstGeom prst="rect">
+            <a:avLst/>
+          </a:prstGeom>
+          <a:solidFill>
+            <a:srgbClr val="E6E4E2"/>
+          </a:solidFill>
+          <a:ln/>
+        </p:spPr>
+      </p:sp>
+      <p:sp>
+        <p:nvSpPr>
+          <p:cNvPr id="24" name="Text 21"/>
+          <p:cNvSpPr txBox="1"/>
+          <p:nvPr/>
+        </p:nvSpPr>
+        <p:spPr>
+          <a:xfrm>
+            <a:off x="777240" y="5157216"/>
+            <a:ext cx="3200400" cy="822960"/>
+          </a:xfrm>
+          <a:prstGeom prst="rect">
+            <a:avLst/>
+          </a:prstGeom>
+          <a:noFill/>
+          <a:ln/>
+        </p:spPr>
+        <p:txBody>
+          <a:bodyPr wrap="square" lIns="0" tIns="0" rIns="0" bIns="0" rtlCol="0" anchor="t"/>
+          <a:lstStyle/>
+          <a:p>
+            <a:pPr indent="0" marL="0">
+              <a:lnSpc>
+                <a:spcPct val="124000"/>
+              </a:lnSpc>
+              <a:buNone/>
+            </a:pPr>
+            <a:r>
+              <a:rPr lang="en-US" sz="1100" dirty="0">
+                <a:solidFill>
+                  <a:srgbClr val="43464A"/>
                 </a:solidFill>
                 <a:latin typeface="Montserrat" pitchFamily="34" charset="0"/>
                 <a:ea typeface="Montserrat" pitchFamily="34" charset="-122"/>
                 <a:cs typeface="Montserrat" pitchFamily="34" charset="-120"/>
               </a:rPr>
-              <a:t>Protecting how machines talk to each other, and what is allowed in and out.</a:t>
+              <a:t>Matching every tracked flaw to its patch took about two days of analyst time.</a:t>
+            </a:r>
+            <a:endParaRPr lang="en-US" sz="1100" dirty="0"/>
+          </a:p>
+        </p:txBody>
+      </p:sp>
+      <p:sp>
+        <p:nvSpPr>
+          <p:cNvPr id="25" name="Text 22"/>
+          <p:cNvSpPr txBox="1"/>
+          <p:nvPr/>
+        </p:nvSpPr>
+        <p:spPr>
+          <a:xfrm>
+            <a:off x="4224528" y="5157216"/>
+            <a:ext cx="3383280" cy="822960"/>
+          </a:xfrm>
+          <a:prstGeom prst="rect">
+            <a:avLst/>
+          </a:prstGeom>
+          <a:noFill/>
+          <a:ln/>
+        </p:spPr>
+        <p:txBody>
+          <a:bodyPr wrap="square" lIns="0" tIns="0" rIns="0" bIns="0" rtlCol="0" anchor="t"/>
+          <a:lstStyle/>
+          <a:p>
+            <a:pPr indent="0" marL="0">
+              <a:lnSpc>
+                <a:spcPct val="124000"/>
+              </a:lnSpc>
+              <a:buNone/>
+            </a:pPr>
+            <a:r>
+              <a:rPr lang="en-US" sz="1100" dirty="0">
+                <a:solidFill>
+                  <a:srgbClr val="2B2D30"/>
+                </a:solidFill>
+                <a:latin typeface="Montserrat SemiBold" pitchFamily="34" charset="0"/>
+                <a:ea typeface="Montserrat SemiBold" pitchFamily="34" charset="-122"/>
+                <a:cs typeface="Montserrat SemiBold" pitchFamily="34" charset="-120"/>
+              </a:rPr>
+              <a:t>A script that does the matching automatically, then consolidates the result.</a:t>
+            </a:r>
+            <a:endParaRPr lang="en-US" sz="1100" dirty="0"/>
+          </a:p>
+        </p:txBody>
+      </p:sp>
+      <p:sp>
+        <p:nvSpPr>
+          <p:cNvPr id="26" name="Shape 23"/>
+          <p:cNvSpPr/>
+          <p:nvPr/>
+        </p:nvSpPr>
+        <p:spPr>
+          <a:xfrm>
+            <a:off x="7918704" y="5047488"/>
+            <a:ext cx="3495751" cy="859536"/>
+          </a:xfrm>
+          <a:prstGeom prst="roundRect">
+            <a:avLst>
+              <a:gd name="adj" fmla="val 5319"/>
+            </a:avLst>
+          </a:prstGeom>
+          <a:solidFill>
+            <a:srgbClr val="F6EEF0"/>
+          </a:solidFill>
+          <a:ln/>
+        </p:spPr>
+      </p:sp>
+      <p:sp>
+        <p:nvSpPr>
+          <p:cNvPr id="27" name="Text 24"/>
+          <p:cNvSpPr txBox="1"/>
+          <p:nvPr/>
+        </p:nvSpPr>
+        <p:spPr>
+          <a:xfrm>
+            <a:off x="8101584" y="5047488"/>
+            <a:ext cx="3129991" cy="859536"/>
+          </a:xfrm>
+          <a:prstGeom prst="rect">
+            <a:avLst/>
+          </a:prstGeom>
+          <a:noFill/>
+          <a:ln/>
+        </p:spPr>
+        <p:txBody>
+          <a:bodyPr wrap="square" lIns="0" tIns="0" rIns="0" bIns="0" rtlCol="0" anchor="ctr"/>
+          <a:lstStyle/>
+          <a:p>
+            <a:pPr indent="0" marL="0">
+              <a:lnSpc>
+                <a:spcPct val="124000"/>
+              </a:lnSpc>
+              <a:buNone/>
+            </a:pPr>
+            <a:r>
+              <a:rPr lang="en-US" sz="1100" dirty="0">
+                <a:solidFill>
+                  <a:srgbClr val="942838"/>
+                </a:solidFill>
+                <a:latin typeface="Montserrat SemiBold" pitchFamily="34" charset="0"/>
+                <a:ea typeface="Montserrat SemiBold" pitchFamily="34" charset="-122"/>
+                <a:cs typeface="Montserrat SemiBold" pitchFamily="34" charset="-120"/>
+              </a:rPr>
+              <a:t>117 matched in ~12 sec; 209 rows became 46 tickets</a:t>
             </a:r>
             <a:endParaRPr lang="en-US" sz="1100" dirty="0"/>
           </a:p>

--- a/out/Internship_Exit_Presentation_Stewart.pptx
+++ b/out/Internship_Exit_Presentation_Stewart.pptx
@@ -10644,7 +10644,7 @@
                 <a:ea typeface="Montserrat ExtraBold" pitchFamily="34" charset="-122"/>
                 <a:cs typeface="Montserrat ExtraBold" pitchFamily="34" charset="-120"/>
               </a:rPr>
-              <a:t>52 of the 117 needed no action at all</a:t>
+              <a:t>52 of the 117 were already fixed</a:t>
             </a:r>
             <a:endParaRPr lang="en-US" sz="2900" dirty="0"/>
           </a:p>
@@ -10770,30 +10770,264 @@
       </p:sp>
       <p:sp>
         <p:nvSpPr>
-          <p:cNvPr id="9" name="Text 6"/>
-          <p:cNvSpPr txBox="1"/>
-          <p:nvPr/>
-        </p:nvSpPr>
-        <p:spPr>
-          <a:xfrm>
-            <a:off x="777240" y="1956816"/>
-            <a:ext cx="10241280" cy="310896"/>
-          </a:xfrm>
-          <a:prstGeom prst="rect">
-            <a:avLst/>
-          </a:prstGeom>
-          <a:noFill/>
-          <a:ln/>
-        </p:spPr>
-        <p:txBody>
-          <a:bodyPr wrap="square" lIns="0" tIns="0" rIns="0" bIns="0" rtlCol="0" anchor="t"/>
-          <a:lstStyle/>
-          <a:p>
-            <a:pPr indent="0" marL="0">
-              <a:buNone/>
-            </a:pPr>
-            <a:r>
-              <a:rPr lang="en-US" sz="1400" dirty="0">
+          <p:cNvPr id="9" name="Shape 6"/>
+          <p:cNvSpPr/>
+          <p:nvPr/>
+        </p:nvSpPr>
+        <p:spPr>
+          <a:xfrm>
+            <a:off x="777240" y="1847088"/>
+            <a:ext cx="10637215" cy="603504"/>
+          </a:xfrm>
+          <a:prstGeom prst="roundRect">
+            <a:avLst>
+              <a:gd name="adj" fmla="val 9091"/>
+            </a:avLst>
+          </a:prstGeom>
+          <a:solidFill>
+            <a:srgbClr val="F6EEF0"/>
+          </a:solidFill>
+          <a:ln/>
+        </p:spPr>
+      </p:sp>
+      <p:sp>
+        <p:nvSpPr>
+          <p:cNvPr id="10" name="Shape 7"/>
+          <p:cNvSpPr/>
+          <p:nvPr/>
+        </p:nvSpPr>
+        <p:spPr>
+          <a:xfrm>
+            <a:off x="777240" y="1847088"/>
+            <a:ext cx="50292" cy="603504"/>
+          </a:xfrm>
+          <a:prstGeom prst="rect">
+            <a:avLst/>
+          </a:prstGeom>
+          <a:solidFill>
+            <a:srgbClr val="942838"/>
+          </a:solidFill>
+          <a:ln/>
+        </p:spPr>
+      </p:sp>
+      <p:sp>
+        <p:nvSpPr>
+          <p:cNvPr id="11" name="Text 8"/>
+          <p:cNvSpPr txBox="1"/>
+          <p:nvPr/>
+        </p:nvSpPr>
+        <p:spPr>
+          <a:xfrm>
+            <a:off x="1014984" y="2048256"/>
+            <a:ext cx="10180015" cy="310896"/>
+          </a:xfrm>
+          <a:prstGeom prst="rect">
+            <a:avLst/>
+          </a:prstGeom>
+          <a:noFill/>
+          <a:ln/>
+        </p:spPr>
+        <p:txBody>
+          <a:bodyPr wrap="square" lIns="0" tIns="0" rIns="0" bIns="0" rtlCol="0" anchor="t"/>
+          <a:lstStyle/>
+          <a:p>
+            <a:pPr indent="0" marL="0">
+              <a:buNone/>
+            </a:pPr>
+            <a:r>
+              <a:rPr lang="en-US" sz="900" spc="140" kern="0" dirty="0">
+                <a:solidFill>
+                  <a:srgbClr val="942838"/>
+                </a:solidFill>
+                <a:latin typeface="Montserrat SemiBold" pitchFamily="34" charset="0"/>
+                <a:ea typeface="Montserrat SemiBold" pitchFamily="34" charset="-122"/>
+                <a:cs typeface="Montserrat SemiBold" pitchFamily="34" charset="-120"/>
+              </a:rPr>
+              <a:t>THE ONE FACT   </a:t>
+            </a:r>
+            <a:pPr indent="0" marL="0">
+              <a:buNone/>
+            </a:pPr>
+            <a:r>
+              <a:rPr lang="en-US" sz="1250" dirty="0">
+                <a:solidFill>
+                  <a:srgbClr val="2B2D30"/>
+                </a:solidFill>
+                <a:latin typeface="Montserrat SemiBold" pitchFamily="34" charset="0"/>
+                <a:ea typeface="Montserrat SemiBold" pitchFamily="34" charset="-122"/>
+                <a:cs typeface="Montserrat SemiBold" pitchFamily="34" charset="-120"/>
+              </a:rPr>
+              <a:t>Windows updates are cumulative. Installing the newest one automatically includes every older fix — exactly like a phone update.</a:t>
+            </a:r>
+            <a:endParaRPr lang="en-US" sz="900" dirty="0"/>
+          </a:p>
+        </p:txBody>
+      </p:sp>
+      <p:pic>
+        <p:nvPicPr>
+          <p:cNvPr id="12" name="Image 1" descr="/home/user/ai/assets/gen/cumulative-patch.png">    </p:cNvPr>
+          <p:cNvPicPr>
+            <a:picLocks noChangeAspect="1"/>
+          </p:cNvPicPr>
+          <p:nvPr/>
+        </p:nvPicPr>
+        <p:blipFill>
+          <a:blip r:embed="rId2"/>
+          <a:stretch>
+            <a:fillRect/>
+          </a:stretch>
+        </p:blipFill>
+        <p:spPr>
+          <a:xfrm>
+            <a:off x="777240" y="2670048"/>
+            <a:ext cx="6537960" cy="1641445"/>
+          </a:xfrm>
+          <a:prstGeom prst="rect">
+            <a:avLst/>
+          </a:prstGeom>
+        </p:spPr>
+      </p:pic>
+      <p:sp>
+        <p:nvSpPr>
+          <p:cNvPr id="13" name="Text 9"/>
+          <p:cNvSpPr txBox="1"/>
+          <p:nvPr/>
+        </p:nvSpPr>
+        <p:spPr>
+          <a:xfrm>
+            <a:off x="7680960" y="2706624"/>
+            <a:ext cx="3733495" cy="201168"/>
+          </a:xfrm>
+          <a:prstGeom prst="rect">
+            <a:avLst/>
+          </a:prstGeom>
+          <a:noFill/>
+          <a:ln/>
+        </p:spPr>
+        <p:txBody>
+          <a:bodyPr wrap="square" lIns="0" tIns="0" rIns="0" bIns="0" rtlCol="0" anchor="t"/>
+          <a:lstStyle/>
+          <a:p>
+            <a:pPr indent="0" marL="0">
+              <a:buNone/>
+            </a:pPr>
+            <a:r>
+              <a:rPr lang="en-US" sz="850" spc="140" kern="0" dirty="0">
+                <a:solidFill>
+                  <a:srgbClr val="942838"/>
+                </a:solidFill>
+                <a:latin typeface="Montserrat SemiBold" pitchFamily="34" charset="0"/>
+                <a:ea typeface="Montserrat SemiBold" pitchFamily="34" charset="-122"/>
+                <a:cs typeface="Montserrat SemiBold" pitchFamily="34" charset="-120"/>
+              </a:rPr>
+              <a:t>SO WHEN WE CHECKED ALL 117</a:t>
+            </a:r>
+            <a:endParaRPr lang="en-US" sz="850" dirty="0"/>
+          </a:p>
+        </p:txBody>
+      </p:sp>
+      <p:sp>
+        <p:nvSpPr>
+          <p:cNvPr id="14" name="Shape 10"/>
+          <p:cNvSpPr/>
+          <p:nvPr/>
+        </p:nvSpPr>
+        <p:spPr>
+          <a:xfrm>
+            <a:off x="7680960" y="3035808"/>
+            <a:ext cx="3733495" cy="859536"/>
+          </a:xfrm>
+          <a:prstGeom prst="roundRect">
+            <a:avLst>
+              <a:gd name="adj" fmla="val 6383"/>
+            </a:avLst>
+          </a:prstGeom>
+          <a:solidFill>
+            <a:srgbClr val="F5F4F3"/>
+          </a:solidFill>
+          <a:ln w="9525">
+            <a:solidFill>
+              <a:srgbClr val="E6E4E2"/>
+            </a:solidFill>
+            <a:prstDash val="solid"/>
+          </a:ln>
+          <a:effectLst>
+            <a:outerShdw sx="100000" sy="100000" kx="0" ky="0" algn="bl" rotWithShape="0" blurRad="2.1183912589765324e+87" dist="5.295978147441331e+86" dir="1.9743255576340073e+102">
+              <a:srgbClr val="959092">
+                <a:alpha val="2.2000000000000003e+104"/>
+              </a:srgbClr>
+            </a:outerShdw>
+          </a:effectLst>
+        </p:spPr>
+      </p:sp>
+      <p:sp>
+        <p:nvSpPr>
+          <p:cNvPr id="15" name="Text 11"/>
+          <p:cNvSpPr txBox="1"/>
+          <p:nvPr/>
+        </p:nvSpPr>
+        <p:spPr>
+          <a:xfrm>
+            <a:off x="7882128" y="3182112"/>
+            <a:ext cx="1097280" cy="566928"/>
+          </a:xfrm>
+          <a:prstGeom prst="rect">
+            <a:avLst/>
+          </a:prstGeom>
+          <a:noFill/>
+          <a:ln/>
+        </p:spPr>
+        <p:txBody>
+          <a:bodyPr wrap="square" lIns="0" tIns="0" rIns="0" bIns="0" rtlCol="0" anchor="t"/>
+          <a:lstStyle/>
+          <a:p>
+            <a:pPr indent="0" marL="0">
+              <a:buNone/>
+            </a:pPr>
+            <a:r>
+              <a:rPr lang="en-US" sz="3600" spc="-140" kern="0" dirty="0">
+                <a:solidFill>
+                  <a:srgbClr val="2B2D30"/>
+                </a:solidFill>
+                <a:latin typeface="Montserrat ExtraBold" pitchFamily="34" charset="0"/>
+                <a:ea typeface="Montserrat ExtraBold" pitchFamily="34" charset="-122"/>
+                <a:cs typeface="Montserrat ExtraBold" pitchFamily="34" charset="-120"/>
+              </a:rPr>
+              <a:t>52</a:t>
+            </a:r>
+            <a:endParaRPr lang="en-US" sz="3600" dirty="0"/>
+          </a:p>
+        </p:txBody>
+      </p:sp>
+      <p:sp>
+        <p:nvSpPr>
+          <p:cNvPr id="16" name="Text 12"/>
+          <p:cNvSpPr txBox="1"/>
+          <p:nvPr/>
+        </p:nvSpPr>
+        <p:spPr>
+          <a:xfrm>
+            <a:off x="9052560" y="3218688"/>
+            <a:ext cx="2160727" cy="530352"/>
+          </a:xfrm>
+          <a:prstGeom prst="rect">
+            <a:avLst/>
+          </a:prstGeom>
+          <a:noFill/>
+          <a:ln/>
+        </p:spPr>
+        <p:txBody>
+          <a:bodyPr wrap="square" lIns="0" tIns="0" rIns="0" bIns="0" rtlCol="0" anchor="t"/>
+          <a:lstStyle/>
+          <a:p>
+            <a:pPr indent="0" marL="0">
+              <a:lnSpc>
+                <a:spcPct val="120000"/>
+              </a:lnSpc>
+              <a:buNone/>
+            </a:pPr>
+            <a:r>
+              <a:rPr lang="en-US" sz="950" spc="30" kern="0" dirty="0">
                 <a:solidFill>
                   <a:srgbClr val="6E7175"/>
                 </a:solidFill>
@@ -10801,26 +11035,46 @@
                 <a:ea typeface="Montserrat Medium" pitchFamily="34" charset="-122"/>
                 <a:cs typeface="Montserrat Medium" pitchFamily="34" charset="-120"/>
               </a:rPr>
-              <a:t>Cross-referencing the matched patches against the real fleet turned up something better than a faster process: a large share of the work did not need doing in the first place.</a:t>
-            </a:r>
-            <a:endParaRPr lang="en-US" sz="1400" dirty="0"/>
-          </a:p>
-        </p:txBody>
-      </p:sp>
-      <p:sp>
-        <p:nvSpPr>
-          <p:cNvPr id="10" name="Shape 7"/>
+              <a:t>were already fixed on every</a:t>
+            </a:r>
+            <a:endParaRPr lang="en-US" sz="950" dirty="0"/>
+          </a:p>
+          <a:p>
+            <a:pPr indent="0" marL="0">
+              <a:lnSpc>
+                <a:spcPct val="120000"/>
+              </a:lnSpc>
+              <a:buNone/>
+            </a:pPr>
+            <a:r>
+              <a:rPr lang="en-US" sz="950" spc="30" kern="0" dirty="0">
+                <a:solidFill>
+                  <a:srgbClr val="6E7175"/>
+                </a:solidFill>
+                <a:latin typeface="Montserrat Medium" pitchFamily="34" charset="0"/>
+                <a:ea typeface="Montserrat Medium" pitchFamily="34" charset="-122"/>
+                <a:cs typeface="Montserrat Medium" pitchFamily="34" charset="-120"/>
+              </a:rPr>
+              <a:t>machine — nothing to do</a:t>
+            </a:r>
+            <a:endParaRPr lang="en-US" sz="950" dirty="0"/>
+          </a:p>
+        </p:txBody>
+      </p:sp>
+      <p:sp>
+        <p:nvSpPr>
+          <p:cNvPr id="17" name="Shape 13"/>
           <p:cNvSpPr/>
           <p:nvPr/>
         </p:nvSpPr>
         <p:spPr>
           <a:xfrm>
-            <a:off x="777240" y="2432304"/>
-            <a:ext cx="5175504" cy="1316736"/>
+            <a:off x="7680960" y="4005072"/>
+            <a:ext cx="3733495" cy="859536"/>
           </a:xfrm>
           <a:prstGeom prst="roundRect">
             <a:avLst>
-              <a:gd name="adj" fmla="val 4167"/>
+              <a:gd name="adj" fmla="val 6383"/>
             </a:avLst>
           </a:prstGeom>
           <a:solidFill>
@@ -10833,121 +11087,6 @@
             <a:prstDash val="solid"/>
           </a:ln>
           <a:effectLst>
-            <a:outerShdw sx="100000" sy="100000" kx="0" ky="0" algn="bl" rotWithShape="0" blurRad="2.1183912589765324e+87" dist="5.295978147441331e+86" dir="1.9743255576340073e+102">
-              <a:srgbClr val="959092">
-                <a:alpha val="2.2000000000000003e+104"/>
-              </a:srgbClr>
-            </a:outerShdw>
-          </a:effectLst>
-        </p:spPr>
-      </p:sp>
-      <p:sp>
-        <p:nvSpPr>
-          <p:cNvPr id="11" name="Text 8"/>
-          <p:cNvSpPr txBox="1"/>
-          <p:nvPr/>
-        </p:nvSpPr>
-        <p:spPr>
-          <a:xfrm>
-            <a:off x="1088136" y="2670048"/>
-            <a:ext cx="1737360" cy="694944"/>
-          </a:xfrm>
-          <a:prstGeom prst="rect">
-            <a:avLst/>
-          </a:prstGeom>
-          <a:noFill/>
-          <a:ln/>
-        </p:spPr>
-        <p:txBody>
-          <a:bodyPr wrap="square" lIns="0" tIns="0" rIns="0" bIns="0" rtlCol="0" anchor="t"/>
-          <a:lstStyle/>
-          <a:p>
-            <a:pPr indent="0" marL="0">
-              <a:buNone/>
-            </a:pPr>
-            <a:r>
-              <a:rPr lang="en-US" sz="4600" spc="-180" kern="0" dirty="0">
-                <a:solidFill>
-                  <a:srgbClr val="942838"/>
-                </a:solidFill>
-                <a:latin typeface="Montserrat ExtraBold" pitchFamily="34" charset="0"/>
-                <a:ea typeface="Montserrat ExtraBold" pitchFamily="34" charset="-122"/>
-                <a:cs typeface="Montserrat ExtraBold" pitchFamily="34" charset="-120"/>
-              </a:rPr>
-              <a:t>65</a:t>
-            </a:r>
-            <a:endParaRPr lang="en-US" sz="4600" dirty="0"/>
-          </a:p>
-        </p:txBody>
-      </p:sp>
-      <p:sp>
-        <p:nvSpPr>
-          <p:cNvPr id="12" name="Text 9"/>
-          <p:cNvSpPr txBox="1"/>
-          <p:nvPr/>
-        </p:nvSpPr>
-        <p:spPr>
-          <a:xfrm>
-            <a:off x="2880360" y="2889504"/>
-            <a:ext cx="2761488" cy="457200"/>
-          </a:xfrm>
-          <a:prstGeom prst="rect">
-            <a:avLst/>
-          </a:prstGeom>
-          <a:noFill/>
-          <a:ln/>
-        </p:spPr>
-        <p:txBody>
-          <a:bodyPr wrap="square" lIns="0" tIns="0" rIns="0" bIns="0" rtlCol="0" anchor="t"/>
-          <a:lstStyle/>
-          <a:p>
-            <a:pPr indent="0" marL="0">
-              <a:lnSpc>
-                <a:spcPct val="115000"/>
-              </a:lnSpc>
-              <a:buNone/>
-            </a:pPr>
-            <a:r>
-              <a:rPr lang="en-US" sz="1300" dirty="0">
-                <a:solidFill>
-                  <a:srgbClr val="2B2D30"/>
-                </a:solidFill>
-                <a:latin typeface="Montserrat SemiBold" pitchFamily="34" charset="0"/>
-                <a:ea typeface="Montserrat SemiBold" pitchFamily="34" charset="-122"/>
-                <a:cs typeface="Montserrat SemiBold" pitchFamily="34" charset="-120"/>
-              </a:rPr>
-              <a:t>flaws genuinely outstanding</a:t>
-            </a:r>
-            <a:endParaRPr lang="en-US" sz="1300" dirty="0"/>
-          </a:p>
-        </p:txBody>
-      </p:sp>
-      <p:sp>
-        <p:nvSpPr>
-          <p:cNvPr id="13" name="Shape 10"/>
-          <p:cNvSpPr/>
-          <p:nvPr/>
-        </p:nvSpPr>
-        <p:spPr>
-          <a:xfrm>
-            <a:off x="6236208" y="2432304"/>
-            <a:ext cx="5175504" cy="1316736"/>
-          </a:xfrm>
-          <a:prstGeom prst="roundRect">
-            <a:avLst>
-              <a:gd name="adj" fmla="val 4167"/>
-            </a:avLst>
-          </a:prstGeom>
-          <a:solidFill>
-            <a:srgbClr val="F5F4F3"/>
-          </a:solidFill>
-          <a:ln w="9525">
-            <a:solidFill>
-              <a:srgbClr val="E6E4E2"/>
-            </a:solidFill>
-            <a:prstDash val="solid"/>
-          </a:ln>
-          <a:effectLst>
             <a:outerShdw sx="100000" sy="100000" kx="0" ky="0" algn="bl" rotWithShape="0" blurRad="2.6903568989001962e+91" dist="6.7258922472504905e+90" dir="1.1845953345804043e+107">
               <a:srgbClr val="959092">
                 <a:alpha val="2.2000000000000003e+109"/>
@@ -10958,53 +11097,53 @@
       </p:sp>
       <p:sp>
         <p:nvSpPr>
-          <p:cNvPr id="14" name="Text 11"/>
-          <p:cNvSpPr txBox="1"/>
-          <p:nvPr/>
-        </p:nvSpPr>
-        <p:spPr>
-          <a:xfrm>
-            <a:off x="6547104" y="2670048"/>
-            <a:ext cx="1737360" cy="694944"/>
-          </a:xfrm>
-          <a:prstGeom prst="rect">
-            <a:avLst/>
-          </a:prstGeom>
-          <a:noFill/>
-          <a:ln/>
-        </p:spPr>
-        <p:txBody>
-          <a:bodyPr wrap="square" lIns="0" tIns="0" rIns="0" bIns="0" rtlCol="0" anchor="t"/>
-          <a:lstStyle/>
-          <a:p>
-            <a:pPr indent="0" marL="0">
-              <a:buNone/>
-            </a:pPr>
-            <a:r>
-              <a:rPr lang="en-US" sz="4600" spc="-180" kern="0" dirty="0">
-                <a:solidFill>
-                  <a:srgbClr val="2B2D30"/>
+          <p:cNvPr id="18" name="Text 14"/>
+          <p:cNvSpPr txBox="1"/>
+          <p:nvPr/>
+        </p:nvSpPr>
+        <p:spPr>
+          <a:xfrm>
+            <a:off x="7882128" y="4151376"/>
+            <a:ext cx="1097280" cy="566928"/>
+          </a:xfrm>
+          <a:prstGeom prst="rect">
+            <a:avLst/>
+          </a:prstGeom>
+          <a:noFill/>
+          <a:ln/>
+        </p:spPr>
+        <p:txBody>
+          <a:bodyPr wrap="square" lIns="0" tIns="0" rIns="0" bIns="0" rtlCol="0" anchor="t"/>
+          <a:lstStyle/>
+          <a:p>
+            <a:pPr indent="0" marL="0">
+              <a:buNone/>
+            </a:pPr>
+            <a:r>
+              <a:rPr lang="en-US" sz="3600" spc="-140" kern="0" dirty="0">
+                <a:solidFill>
+                  <a:srgbClr val="942838"/>
                 </a:solidFill>
                 <a:latin typeface="Montserrat ExtraBold" pitchFamily="34" charset="0"/>
                 <a:ea typeface="Montserrat ExtraBold" pitchFamily="34" charset="-122"/>
                 <a:cs typeface="Montserrat ExtraBold" pitchFamily="34" charset="-120"/>
               </a:rPr>
-              <a:t>52</a:t>
-            </a:r>
-            <a:endParaRPr lang="en-US" sz="4600" dirty="0"/>
-          </a:p>
-        </p:txBody>
-      </p:sp>
-      <p:sp>
-        <p:nvSpPr>
-          <p:cNvPr id="15" name="Text 12"/>
-          <p:cNvSpPr txBox="1"/>
-          <p:nvPr/>
-        </p:nvSpPr>
-        <p:spPr>
-          <a:xfrm>
-            <a:off x="8339328" y="2889504"/>
-            <a:ext cx="2761488" cy="457200"/>
+              <a:t>65</a:t>
+            </a:r>
+            <a:endParaRPr lang="en-US" sz="3600" dirty="0"/>
+          </a:p>
+        </p:txBody>
+      </p:sp>
+      <p:sp>
+        <p:nvSpPr>
+          <p:cNvPr id="19" name="Text 15"/>
+          <p:cNvSpPr txBox="1"/>
+          <p:nvPr/>
+        </p:nvSpPr>
+        <p:spPr>
+          <a:xfrm>
+            <a:off x="9052560" y="4187952"/>
+            <a:ext cx="2160727" cy="530352"/>
           </a:xfrm>
           <a:prstGeom prst="rect">
             <a:avLst/>
@@ -11018,81 +11157,62 @@
           <a:p>
             <a:pPr indent="0" marL="0">
               <a:lnSpc>
-                <a:spcPct val="115000"/>
+                <a:spcPct val="120000"/>
               </a:lnSpc>
               <a:buNone/>
             </a:pPr>
             <a:r>
-              <a:rPr lang="en-US" sz="1300" dirty="0">
+              <a:rPr lang="en-US" sz="950" spc="30" kern="0" dirty="0">
                 <a:solidFill>
                   <a:srgbClr val="6E7175"/>
                 </a:solidFill>
-                <a:latin typeface="Montserrat SemiBold" pitchFamily="34" charset="0"/>
-                <a:ea typeface="Montserrat SemiBold" pitchFamily="34" charset="-122"/>
-                <a:cs typeface="Montserrat SemiBold" pitchFamily="34" charset="-120"/>
-              </a:rPr>
-              <a:t>flaws needing no action at all</a:t>
-            </a:r>
-            <a:endParaRPr lang="en-US" sz="1300" dirty="0"/>
-          </a:p>
-        </p:txBody>
-      </p:sp>
-      <p:sp>
-        <p:nvSpPr>
-          <p:cNvPr id="16" name="Text 13"/>
-          <p:cNvSpPr txBox="1"/>
-          <p:nvPr/>
-        </p:nvSpPr>
-        <p:spPr>
-          <a:xfrm>
-            <a:off x="777240" y="3986784"/>
-            <a:ext cx="6400800" cy="201168"/>
-          </a:xfrm>
-          <a:prstGeom prst="rect">
-            <a:avLst/>
-          </a:prstGeom>
-          <a:noFill/>
-          <a:ln/>
-        </p:spPr>
-        <p:txBody>
-          <a:bodyPr wrap="square" lIns="0" tIns="0" rIns="0" bIns="0" rtlCol="0" anchor="t"/>
-          <a:lstStyle/>
-          <a:p>
-            <a:pPr indent="0" marL="0">
-              <a:buNone/>
-            </a:pPr>
-            <a:r>
-              <a:rPr lang="en-US" sz="850" spc="140" kern="0" dirty="0">
-                <a:solidFill>
-                  <a:srgbClr val="942838"/>
-                </a:solidFill>
-                <a:latin typeface="Montserrat SemiBold" pitchFamily="34" charset="0"/>
-                <a:ea typeface="Montserrat SemiBold" pitchFamily="34" charset="-122"/>
-                <a:cs typeface="Montserrat SemiBold" pitchFamily="34" charset="-120"/>
-              </a:rPr>
-              <a:t>EVERY SQUARE IS ONE TRACKED FLAW</a:t>
-            </a:r>
-            <a:endParaRPr lang="en-US" sz="850" dirty="0"/>
+                <a:latin typeface="Montserrat Medium" pitchFamily="34" charset="0"/>
+                <a:ea typeface="Montserrat Medium" pitchFamily="34" charset="-122"/>
+                <a:cs typeface="Montserrat Medium" pitchFamily="34" charset="-120"/>
+              </a:rPr>
+              <a:t>were genuinely still open</a:t>
+            </a:r>
+            <a:endParaRPr lang="en-US" sz="950" dirty="0"/>
+          </a:p>
+          <a:p>
+            <a:pPr indent="0" marL="0">
+              <a:lnSpc>
+                <a:spcPct val="120000"/>
+              </a:lnSpc>
+              <a:buNone/>
+            </a:pPr>
+            <a:r>
+              <a:rPr lang="en-US" sz="950" spc="30" kern="0" dirty="0">
+                <a:solidFill>
+                  <a:srgbClr val="6E7175"/>
+                </a:solidFill>
+                <a:latin typeface="Montserrat Medium" pitchFamily="34" charset="0"/>
+                <a:ea typeface="Montserrat Medium" pitchFamily="34" charset="-122"/>
+                <a:cs typeface="Montserrat Medium" pitchFamily="34" charset="-120"/>
+              </a:rPr>
+              <a:t>somewhere</a:t>
+            </a:r>
+            <a:endParaRPr lang="en-US" sz="950" dirty="0"/>
           </a:p>
         </p:txBody>
       </p:sp>
       <p:pic>
         <p:nvPicPr>
-          <p:cNvPr id="17" name="Image 1" descr="/home/user/ai/assets/gen/chart-no-action.png">    </p:cNvPr>
+          <p:cNvPr id="20" name="Image 2" descr="/home/user/ai/assets/gen/chart-no-action.png">    </p:cNvPr>
           <p:cNvPicPr>
             <a:picLocks noChangeAspect="1"/>
           </p:cNvPicPr>
           <p:nvPr/>
         </p:nvPicPr>
         <p:blipFill>
-          <a:blip r:embed="rId2"/>
+          <a:blip r:embed="rId3"/>
           <a:stretch>
             <a:fillRect/>
           </a:stretch>
         </p:blipFill>
         <p:spPr>
           <a:xfrm>
-            <a:off x="777240" y="4242816"/>
+            <a:off x="777240" y="5029200"/>
             <a:ext cx="10637215" cy="767634"/>
           </a:xfrm>
           <a:prstGeom prst="rect">
@@ -11102,13 +11222,13 @@
       </p:pic>
       <p:sp>
         <p:nvSpPr>
-          <p:cNvPr id="18" name="Text 14"/>
-          <p:cNvSpPr txBox="1"/>
-          <p:nvPr/>
-        </p:nvSpPr>
-        <p:spPr>
-          <a:xfrm>
-            <a:off x="777240" y="5101890"/>
+          <p:cNvPr id="21" name="Text 16"/>
+          <p:cNvSpPr txBox="1"/>
+          <p:nvPr/>
+        </p:nvSpPr>
+        <p:spPr>
+          <a:xfrm>
+            <a:off x="777240" y="5869986"/>
             <a:ext cx="4572000" cy="256032"/>
           </a:xfrm>
           <a:prstGeom prst="rect">
@@ -11141,14 +11261,14 @@
       </p:sp>
       <p:sp>
         <p:nvSpPr>
-          <p:cNvPr id="19" name="Text 15"/>
-          <p:cNvSpPr txBox="1"/>
-          <p:nvPr/>
-        </p:nvSpPr>
-        <p:spPr>
-          <a:xfrm>
-            <a:off x="5928055" y="5101890"/>
-            <a:ext cx="5486400" cy="256032"/>
+          <p:cNvPr id="22" name="Text 17"/>
+          <p:cNvSpPr txBox="1"/>
+          <p:nvPr/>
+        </p:nvSpPr>
+        <p:spPr>
+          <a:xfrm>
+            <a:off x="5013655" y="5869986"/>
+            <a:ext cx="6400800" cy="256032"/>
           </a:xfrm>
           <a:prstGeom prst="rect">
             <a:avLst/>
@@ -11172,60 +11292,7 @@
                 <a:ea typeface="Montserrat SemiBold" pitchFamily="34" charset="-122"/>
                 <a:cs typeface="Montserrat SemiBold" pitchFamily="34" charset="-120"/>
               </a:rPr>
-              <a:t>52 already covered by routine monthly patching</a:t>
-            </a:r>
-            <a:endParaRPr lang="en-US" sz="1150" dirty="0"/>
-          </a:p>
-        </p:txBody>
-      </p:sp>
-      <p:sp>
-        <p:nvSpPr>
-          <p:cNvPr id="20" name="Text 16"/>
-          <p:cNvSpPr txBox="1"/>
-          <p:nvPr/>
-        </p:nvSpPr>
-        <p:spPr>
-          <a:xfrm>
-            <a:off x="777240" y="5687568"/>
-            <a:ext cx="10637215" cy="310896"/>
-          </a:xfrm>
-          <a:prstGeom prst="rect">
-            <a:avLst/>
-          </a:prstGeom>
-          <a:noFill/>
-          <a:ln/>
-        </p:spPr>
-        <p:txBody>
-          <a:bodyPr wrap="square" lIns="0" tIns="0" rIns="0" bIns="0" rtlCol="0" anchor="t"/>
-          <a:lstStyle/>
-          <a:p>
-            <a:pPr indent="0" marL="0">
-              <a:buNone/>
-            </a:pPr>
-            <a:r>
-              <a:rPr lang="en-US" sz="1150" dirty="0">
-                <a:solidFill>
-                  <a:srgbClr val="2B2D30"/>
-                </a:solidFill>
-                <a:latin typeface="Montserrat SemiBold" pitchFamily="34" charset="0"/>
-                <a:ea typeface="Montserrat SemiBold" pitchFamily="34" charset="-122"/>
-                <a:cs typeface="Montserrat SemiBold" pitchFamily="34" charset="-120"/>
-              </a:rPr>
-              <a:t>Why: </a:t>
-            </a:r>
-            <a:pPr indent="0" marL="0">
-              <a:buNone/>
-            </a:pPr>
-            <a:r>
-              <a:rPr lang="en-US" sz="1150" dirty="0">
-                <a:solidFill>
-                  <a:srgbClr val="6E7175"/>
-                </a:solidFill>
-                <a:latin typeface="Montserrat" pitchFamily="34" charset="0"/>
-                <a:ea typeface="Montserrat" pitchFamily="34" charset="-122"/>
-                <a:cs typeface="Montserrat" pitchFamily="34" charset="-120"/>
-              </a:rPr>
-              <a:t>routine monthly patching had already carried every machine past the fix for those 52 — so the patching process is working better than we assumed. We were tracking work that was already done.</a:t>
+              <a:t>52 already covered — nobody had to do anything for these</a:t>
             </a:r>
             <a:endParaRPr lang="en-US" sz="1150" dirty="0"/>
           </a:p>
@@ -12419,7 +12486,7 @@
                 <a:ea typeface="Montserrat ExtraBold" pitchFamily="34" charset="-122"/>
                 <a:cs typeface="Montserrat ExtraBold" pitchFamily="34" charset="-120"/>
               </a:rPr>
-              <a:t>Matching the flaws was only half the job</a:t>
+              <a:t>Why 65 flaws turn into 209 rows</a:t>
             </a:r>
             <a:endParaRPr lang="en-US" sz="2900" dirty="0"/>
           </a:p>
@@ -12545,14 +12612,77 @@
       </p:sp>
       <p:sp>
         <p:nvSpPr>
-          <p:cNvPr id="9" name="Shape 6"/>
+          <p:cNvPr id="9" name="Text 6"/>
+          <p:cNvSpPr txBox="1"/>
+          <p:nvPr/>
+        </p:nvSpPr>
+        <p:spPr>
+          <a:xfrm>
+            <a:off x="777240" y="1956816"/>
+            <a:ext cx="10241280" cy="310896"/>
+          </a:xfrm>
+          <a:prstGeom prst="rect">
+            <a:avLst/>
+          </a:prstGeom>
+          <a:noFill/>
+          <a:ln/>
+        </p:spPr>
+        <p:txBody>
+          <a:bodyPr wrap="square" lIns="0" tIns="0" rIns="0" bIns="0" rtlCol="0" anchor="t"/>
+          <a:lstStyle/>
+          <a:p>
+            <a:pPr indent="0" marL="0">
+              <a:buNone/>
+            </a:pPr>
+            <a:r>
+              <a:rPr lang="en-US" sz="1400" dirty="0">
+                <a:solidFill>
+                  <a:srgbClr val="6E7175"/>
+                </a:solidFill>
+                <a:latin typeface="Montserrat Medium" pitchFamily="34" charset="0"/>
+                <a:ea typeface="Montserrat Medium" pitchFamily="34" charset="-122"/>
+                <a:cs typeface="Montserrat Medium" pitchFamily="34" charset="-120"/>
+              </a:rPr>
+              <a:t>One flaw does not mean one patch. The same flaw needs a differently numbered patch on each version of Windows we run — so one flaw becomes several rows on the list.</a:t>
+            </a:r>
+            <a:endParaRPr lang="en-US" sz="1400" dirty="0"/>
+          </a:p>
+        </p:txBody>
+      </p:sp>
+      <p:pic>
+        <p:nvPicPr>
+          <p:cNvPr id="10" name="Image 1" descr="/home/user/ai/assets/gen/one-flaw-many-patches.png">    </p:cNvPr>
+          <p:cNvPicPr>
+            <a:picLocks noChangeAspect="1"/>
+          </p:cNvPicPr>
+          <p:nvPr/>
+        </p:nvPicPr>
+        <p:blipFill>
+          <a:blip r:embed="rId2"/>
+          <a:stretch>
+            <a:fillRect/>
+          </a:stretch>
+        </p:blipFill>
+        <p:spPr>
+          <a:xfrm>
+            <a:off x="685800" y="2450592"/>
+            <a:ext cx="5943600" cy="2286000"/>
+          </a:xfrm>
+          <a:prstGeom prst="rect">
+            <a:avLst/>
+          </a:prstGeom>
+        </p:spPr>
+      </p:pic>
+      <p:sp>
+        <p:nvSpPr>
+          <p:cNvPr id="11" name="Shape 7"/>
           <p:cNvSpPr/>
           <p:nvPr/>
         </p:nvSpPr>
         <p:spPr>
           <a:xfrm>
-            <a:off x="777240" y="2029968"/>
-            <a:ext cx="5175504" cy="2212848"/>
+            <a:off x="6949440" y="2450592"/>
+            <a:ext cx="4465015" cy="2212848"/>
           </a:xfrm>
           <a:prstGeom prst="roundRect">
             <a:avLst>
@@ -12579,14 +12709,14 @@
       </p:sp>
       <p:sp>
         <p:nvSpPr>
-          <p:cNvPr id="10" name="Text 7"/>
-          <p:cNvSpPr txBox="1"/>
-          <p:nvPr/>
-        </p:nvSpPr>
-        <p:spPr>
-          <a:xfrm>
-            <a:off x="1088136" y="2304288"/>
-            <a:ext cx="4553712" cy="201168"/>
+          <p:cNvPr id="12" name="Text 8"/>
+          <p:cNvSpPr txBox="1"/>
+          <p:nvPr/>
+        </p:nvSpPr>
+        <p:spPr>
+          <a:xfrm>
+            <a:off x="7242048" y="2688336"/>
+            <a:ext cx="3879799" cy="201168"/>
           </a:xfrm>
           <a:prstGeom prst="rect">
             <a:avLst/>
@@ -12618,30 +12748,30 @@
       </p:sp>
       <p:sp>
         <p:nvSpPr>
-          <p:cNvPr id="11" name="Text 8"/>
-          <p:cNvSpPr txBox="1"/>
-          <p:nvPr/>
-        </p:nvSpPr>
-        <p:spPr>
-          <a:xfrm>
-            <a:off x="1088136" y="2578608"/>
-            <a:ext cx="4553712" cy="384048"/>
-          </a:xfrm>
-          <a:prstGeom prst="rect">
-            <a:avLst/>
-          </a:prstGeom>
-          <a:noFill/>
-          <a:ln/>
-        </p:spPr>
-        <p:txBody>
-          <a:bodyPr wrap="square" lIns="0" tIns="0" rIns="0" bIns="0" rtlCol="0" anchor="t"/>
-          <a:lstStyle/>
-          <a:p>
-            <a:pPr indent="0" marL="0">
-              <a:buNone/>
-            </a:pPr>
-            <a:r>
-              <a:rPr lang="en-US" sz="2400" spc="-70" kern="0" dirty="0">
+          <p:cNvPr id="13" name="Text 9"/>
+          <p:cNvSpPr txBox="1"/>
+          <p:nvPr/>
+        </p:nvSpPr>
+        <p:spPr>
+          <a:xfrm>
+            <a:off x="7242048" y="2944368"/>
+            <a:ext cx="3879799" cy="384048"/>
+          </a:xfrm>
+          <a:prstGeom prst="rect">
+            <a:avLst/>
+          </a:prstGeom>
+          <a:noFill/>
+          <a:ln/>
+        </p:spPr>
+        <p:txBody>
+          <a:bodyPr wrap="square" lIns="0" tIns="0" rIns="0" bIns="0" rtlCol="0" anchor="t"/>
+          <a:lstStyle/>
+          <a:p>
+            <a:pPr indent="0" marL="0">
+              <a:buNone/>
+            </a:pPr>
+            <a:r>
+              <a:rPr lang="en-US" sz="2200" spc="-70" kern="0" dirty="0">
                 <a:solidFill>
                   <a:srgbClr val="2B2D30"/>
                 </a:solidFill>
@@ -12649,22 +12779,22 @@
                 <a:ea typeface="Montserrat ExtraBold" pitchFamily="34" charset="-122"/>
                 <a:cs typeface="Montserrat ExtraBold" pitchFamily="34" charset="-120"/>
               </a:rPr>
-              <a:t>Kevlar's own report</a:t>
-            </a:r>
-            <a:endParaRPr lang="en-US" sz="2400" dirty="0"/>
-          </a:p>
-        </p:txBody>
-      </p:sp>
-      <p:sp>
-        <p:nvSpPr>
-          <p:cNvPr id="12" name="Text 9"/>
-          <p:cNvSpPr txBox="1"/>
-          <p:nvPr/>
-        </p:nvSpPr>
-        <p:spPr>
-          <a:xfrm>
-            <a:off x="1088136" y="3108960"/>
-            <a:ext cx="4553712" cy="914400"/>
+              <a:t>Kevlar’s own report</a:t>
+            </a:r>
+            <a:endParaRPr lang="en-US" sz="2200" dirty="0"/>
+          </a:p>
+        </p:txBody>
+      </p:sp>
+      <p:sp>
+        <p:nvSpPr>
+          <p:cNvPr id="14" name="Text 10"/>
+          <p:cNvSpPr txBox="1"/>
+          <p:nvPr/>
+        </p:nvSpPr>
+        <p:spPr>
+          <a:xfrm>
+            <a:off x="7242048" y="3438144"/>
+            <a:ext cx="3879799" cy="1005840"/>
           </a:xfrm>
           <a:prstGeom prst="rect">
             <a:avLst/>
@@ -12691,7 +12821,7 @@
                 <a:ea typeface="Montserrat" pitchFamily="34" charset="-122"/>
                 <a:cs typeface="Montserrat" pitchFamily="34" charset="-120"/>
               </a:rPr>
-              <a:t>Kevlar publishes its own prioritisation report, and its KB Priority tab already held 209 rows — one for each unique pairing of flaw-set and operating-system product. I found that number in the data; I did not calculate it.</a:t>
+              <a:t>Do that fan-out for all 65 open flaws, across every Windows version in the fleet, and it adds up to 209 rows. Kevlar already publishes that list — I opened it and counted, I did not calculate it.</a:t>
             </a:r>
             <a:endParaRPr lang="en-US" sz="1100" dirty="0"/>
           </a:p>
@@ -12699,48 +12829,14 @@
       </p:sp>
       <p:sp>
         <p:nvSpPr>
-          <p:cNvPr id="13" name="Shape 10"/>
-          <p:cNvSpPr/>
-          <p:nvPr/>
-        </p:nvSpPr>
-        <p:spPr>
-          <a:xfrm>
-            <a:off x="6236208" y="2029968"/>
-            <a:ext cx="5175504" cy="2212848"/>
-          </a:xfrm>
-          <a:prstGeom prst="roundRect">
-            <a:avLst>
-              <a:gd name="adj" fmla="val 2479"/>
-            </a:avLst>
-          </a:prstGeom>
-          <a:solidFill>
-            <a:srgbClr val="FFFFFF"/>
-          </a:solidFill>
-          <a:ln w="9525">
-            <a:solidFill>
-              <a:srgbClr val="E6E4E2"/>
-            </a:solidFill>
-            <a:prstDash val="solid"/>
-          </a:ln>
-          <a:effectLst>
-            <a:outerShdw sx="100000" sy="100000" kx="0" ky="0" algn="bl" rotWithShape="0" blurRad="4.3392766422361264e+99" dist="1.0848191605590316e+99" dir="4.2645432044894554e+116">
-              <a:srgbClr val="959092">
-                <a:alpha val="2.2000000000000005e+119"/>
-              </a:srgbClr>
-            </a:outerShdw>
-          </a:effectLst>
-        </p:spPr>
-      </p:sp>
-      <p:sp>
-        <p:nvSpPr>
-          <p:cNvPr id="14" name="Text 11"/>
-          <p:cNvSpPr txBox="1"/>
-          <p:nvPr/>
-        </p:nvSpPr>
-        <p:spPr>
-          <a:xfrm>
-            <a:off x="6547104" y="2304288"/>
-            <a:ext cx="4553712" cy="201168"/>
+          <p:cNvPr id="15" name="Text 11"/>
+          <p:cNvSpPr txBox="1"/>
+          <p:nvPr/>
+        </p:nvSpPr>
+        <p:spPr>
+          <a:xfrm>
+            <a:off x="777240" y="4846320"/>
+            <a:ext cx="5486400" cy="201168"/>
           </a:xfrm>
           <a:prstGeom prst="rect">
             <a:avLst/>
@@ -12764,7 +12860,7 @@
                 <a:ea typeface="Montserrat SemiBold" pitchFamily="34" charset="-122"/>
                 <a:cs typeface="Montserrat SemiBold" pitchFamily="34" charset="-120"/>
               </a:rPr>
-              <a:t>WHAT I ACTUALLY DID</a:t>
+              <a:t>THE WHOLE CHAIN</a:t>
             </a:r>
             <a:endParaRPr lang="en-US" sz="850" dirty="0"/>
           </a:p>
@@ -12772,138 +12868,18 @@
       </p:sp>
       <p:sp>
         <p:nvSpPr>
-          <p:cNvPr id="15" name="Text 12"/>
-          <p:cNvSpPr txBox="1"/>
-          <p:nvPr/>
-        </p:nvSpPr>
-        <p:spPr>
-          <a:xfrm>
-            <a:off x="6547104" y="2578608"/>
-            <a:ext cx="4553712" cy="384048"/>
-          </a:xfrm>
-          <a:prstGeom prst="rect">
-            <a:avLst/>
-          </a:prstGeom>
-          <a:noFill/>
-          <a:ln/>
-        </p:spPr>
-        <p:txBody>
-          <a:bodyPr wrap="square" lIns="0" tIns="0" rIns="0" bIns="0" rtlCol="0" anchor="t"/>
-          <a:lstStyle/>
-          <a:p>
-            <a:pPr indent="0" marL="0">
-              <a:buNone/>
-            </a:pPr>
-            <a:r>
-              <a:rPr lang="en-US" sz="2400" spc="-70" kern="0" dirty="0">
-                <a:solidFill>
-                  <a:srgbClr val="2B2D30"/>
-                </a:solidFill>
-                <a:latin typeface="Montserrat ExtraBold" pitchFamily="34" charset="0"/>
-                <a:ea typeface="Montserrat ExtraBold" pitchFamily="34" charset="-122"/>
-                <a:cs typeface="Montserrat ExtraBold" pitchFamily="34" charset="-120"/>
-              </a:rPr>
-              <a:t>Highest build wins</a:t>
-            </a:r>
-            <a:endParaRPr lang="en-US" sz="2400" dirty="0"/>
-          </a:p>
-        </p:txBody>
-      </p:sp>
-      <p:sp>
-        <p:nvSpPr>
-          <p:cNvPr id="16" name="Text 13"/>
-          <p:cNvSpPr txBox="1"/>
-          <p:nvPr/>
-        </p:nvSpPr>
-        <p:spPr>
-          <a:xfrm>
-            <a:off x="6547104" y="3108960"/>
-            <a:ext cx="4553712" cy="914400"/>
-          </a:xfrm>
-          <a:prstGeom prst="rect">
-            <a:avLst/>
-          </a:prstGeom>
-          <a:noFill/>
-          <a:ln/>
-        </p:spPr>
-        <p:txBody>
-          <a:bodyPr wrap="square" lIns="0" tIns="0" rIns="0" bIns="0" rtlCol="0" anchor="t"/>
-          <a:lstStyle/>
-          <a:p>
-            <a:pPr indent="0" marL="0">
-              <a:lnSpc>
-                <a:spcPct val="126000"/>
-              </a:lnSpc>
-              <a:buNone/>
-            </a:pPr>
-            <a:r>
-              <a:rPr lang="en-US" sz="1100" dirty="0">
-                <a:solidFill>
-                  <a:srgbClr val="43464A"/>
-                </a:solidFill>
-                <a:latin typeface="Montserrat" pitchFamily="34" charset="0"/>
-                <a:ea typeface="Montserrat" pitchFamily="34" charset="-122"/>
-                <a:cs typeface="Montserrat" pitchFamily="34" charset="-120"/>
-              </a:rPr>
-              <a:t>Windows updates supersede every earlier fix on that branch, so for each machine-and-product pair only the highest fixed-build patch is needed. Applying that rule — and proving it lost nothing — collapsed the 209 rows to 46.</a:t>
-            </a:r>
-            <a:endParaRPr lang="en-US" sz="1100" dirty="0"/>
-          </a:p>
-        </p:txBody>
-      </p:sp>
-      <p:sp>
-        <p:nvSpPr>
-          <p:cNvPr id="17" name="Text 14"/>
-          <p:cNvSpPr txBox="1"/>
-          <p:nvPr/>
-        </p:nvSpPr>
-        <p:spPr>
-          <a:xfrm>
-            <a:off x="777240" y="4681728"/>
-            <a:ext cx="5486400" cy="201168"/>
-          </a:xfrm>
-          <a:prstGeom prst="rect">
-            <a:avLst/>
-          </a:prstGeom>
-          <a:noFill/>
-          <a:ln/>
-        </p:spPr>
-        <p:txBody>
-          <a:bodyPr wrap="square" lIns="0" tIns="0" rIns="0" bIns="0" rtlCol="0" anchor="t"/>
-          <a:lstStyle/>
-          <a:p>
-            <a:pPr indent="0" marL="0">
-              <a:buNone/>
-            </a:pPr>
-            <a:r>
-              <a:rPr lang="en-US" sz="850" spc="140" kern="0" dirty="0">
-                <a:solidFill>
-                  <a:srgbClr val="942838"/>
-                </a:solidFill>
-                <a:latin typeface="Montserrat SemiBold" pitchFamily="34" charset="0"/>
-                <a:ea typeface="Montserrat SemiBold" pitchFamily="34" charset="-122"/>
-                <a:cs typeface="Montserrat SemiBold" pitchFamily="34" charset="-120"/>
-              </a:rPr>
-              <a:t>HOW THE NUMBERS RELATE</a:t>
-            </a:r>
-            <a:endParaRPr lang="en-US" sz="850" dirty="0"/>
-          </a:p>
-        </p:txBody>
-      </p:sp>
-      <p:sp>
-        <p:nvSpPr>
-          <p:cNvPr id="18" name="Shape 15"/>
+          <p:cNvPr id="16" name="Shape 12"/>
           <p:cNvSpPr/>
           <p:nvPr/>
         </p:nvSpPr>
         <p:spPr>
           <a:xfrm>
-            <a:off x="777240" y="4974336"/>
-            <a:ext cx="2487168" cy="1060704"/>
+            <a:off x="777240" y="5138928"/>
+            <a:ext cx="2487168" cy="932688"/>
           </a:xfrm>
           <a:prstGeom prst="roundRect">
             <a:avLst>
-              <a:gd name="adj" fmla="val 5172"/>
+              <a:gd name="adj" fmla="val 5882"/>
             </a:avLst>
           </a:prstGeom>
           <a:solidFill>
@@ -12926,14 +12902,14 @@
       </p:sp>
       <p:sp>
         <p:nvSpPr>
-          <p:cNvPr id="19" name="Text 16"/>
-          <p:cNvSpPr txBox="1"/>
-          <p:nvPr/>
-        </p:nvSpPr>
-        <p:spPr>
-          <a:xfrm>
-            <a:off x="960120" y="5120640"/>
-            <a:ext cx="2121408" cy="420624"/>
+          <p:cNvPr id="17" name="Text 13"/>
+          <p:cNvSpPr txBox="1"/>
+          <p:nvPr/>
+        </p:nvSpPr>
+        <p:spPr>
+          <a:xfrm>
+            <a:off x="960120" y="5248656"/>
+            <a:ext cx="2121408" cy="402336"/>
           </a:xfrm>
           <a:prstGeom prst="rect">
             <a:avLst/>
@@ -12949,7 +12925,7 @@
               <a:buNone/>
             </a:pPr>
             <a:r>
-              <a:rPr lang="en-US" sz="2600" spc="-90" kern="0" dirty="0">
+              <a:rPr lang="en-US" sz="2500" spc="-90" kern="0" dirty="0">
                 <a:solidFill>
                   <a:srgbClr val="2B2D30"/>
                 </a:solidFill>
@@ -12957,22 +12933,22 @@
                 <a:ea typeface="Montserrat ExtraBold" pitchFamily="34" charset="-122"/>
                 <a:cs typeface="Montserrat ExtraBold" pitchFamily="34" charset="-120"/>
               </a:rPr>
-              <a:t>2,658</a:t>
-            </a:r>
-            <a:endParaRPr lang="en-US" sz="2600" dirty="0"/>
-          </a:p>
-        </p:txBody>
-      </p:sp>
-      <p:sp>
-        <p:nvSpPr>
-          <p:cNvPr id="20" name="Text 17"/>
-          <p:cNvSpPr txBox="1"/>
-          <p:nvPr/>
-        </p:nvSpPr>
-        <p:spPr>
-          <a:xfrm>
-            <a:off x="923544" y="5559552"/>
-            <a:ext cx="2194560" cy="402336"/>
+              <a:t>117</a:t>
+            </a:r>
+            <a:endParaRPr lang="en-US" sz="2500" dirty="0"/>
+          </a:p>
+        </p:txBody>
+      </p:sp>
+      <p:sp>
+        <p:nvSpPr>
+          <p:cNvPr id="18" name="Text 14"/>
+          <p:cNvSpPr txBox="1"/>
+          <p:nvPr/>
+        </p:nvSpPr>
+        <p:spPr>
+          <a:xfrm>
+            <a:off x="923544" y="5669280"/>
+            <a:ext cx="2194560" cy="365760"/>
           </a:xfrm>
           <a:prstGeom prst="rect">
             <a:avLst/>
@@ -12999,41 +12975,21 @@
                 <a:ea typeface="Montserrat Medium" pitchFamily="34" charset="-122"/>
                 <a:cs typeface="Montserrat Medium" pitchFamily="34" charset="-120"/>
               </a:rPr>
-              <a:t>host and product</a:t>
+              <a:t>flaws tracked</a:t>
             </a:r>
             <a:endParaRPr lang="en-US" sz="950" dirty="0"/>
           </a:p>
-          <a:p>
-            <a:pPr algn="ctr" indent="0" marL="0">
-              <a:lnSpc>
-                <a:spcPct val="115000"/>
-              </a:lnSpc>
-              <a:buNone/>
-            </a:pPr>
-            <a:r>
-              <a:rPr lang="en-US" sz="950" spc="30" kern="0" dirty="0">
-                <a:solidFill>
-                  <a:srgbClr val="6E7175"/>
-                </a:solidFill>
-                <a:latin typeface="Montserrat Medium" pitchFamily="34" charset="0"/>
-                <a:ea typeface="Montserrat Medium" pitchFamily="34" charset="-122"/>
-                <a:cs typeface="Montserrat Medium" pitchFamily="34" charset="-120"/>
-              </a:rPr>
-              <a:t>assignments in the fleet</a:t>
-            </a:r>
-            <a:endParaRPr lang="en-US" sz="950" dirty="0"/>
-          </a:p>
-        </p:txBody>
-      </p:sp>
-      <p:sp>
-        <p:nvSpPr>
-          <p:cNvPr id="21" name="Text 18"/>
-          <p:cNvSpPr txBox="1"/>
-          <p:nvPr/>
-        </p:nvSpPr>
-        <p:spPr>
-          <a:xfrm>
-            <a:off x="3196285" y="5294376"/>
+        </p:txBody>
+      </p:sp>
+      <p:sp>
+        <p:nvSpPr>
+          <p:cNvPr id="19" name="Text 15"/>
+          <p:cNvSpPr txBox="1"/>
+          <p:nvPr/>
+        </p:nvSpPr>
+        <p:spPr>
+          <a:xfrm>
+            <a:off x="3196285" y="5394960"/>
             <a:ext cx="365760" cy="420624"/>
           </a:xfrm>
           <a:prstGeom prst="rect">
@@ -13066,18 +13022,18 @@
       </p:sp>
       <p:sp>
         <p:nvSpPr>
-          <p:cNvPr id="22" name="Shape 19"/>
+          <p:cNvPr id="20" name="Shape 16"/>
           <p:cNvSpPr/>
           <p:nvPr/>
         </p:nvSpPr>
         <p:spPr>
           <a:xfrm>
-            <a:off x="3493922" y="4974336"/>
-            <a:ext cx="2487168" cy="1060704"/>
+            <a:off x="3493922" y="5138928"/>
+            <a:ext cx="2487168" cy="932688"/>
           </a:xfrm>
           <a:prstGeom prst="roundRect">
             <a:avLst>
-              <a:gd name="adj" fmla="val 5172"/>
+              <a:gd name="adj" fmla="val 5882"/>
             </a:avLst>
           </a:prstGeom>
           <a:solidFill>
@@ -13100,14 +13056,14 @@
       </p:sp>
       <p:sp>
         <p:nvSpPr>
-          <p:cNvPr id="23" name="Text 20"/>
-          <p:cNvSpPr txBox="1"/>
-          <p:nvPr/>
-        </p:nvSpPr>
-        <p:spPr>
-          <a:xfrm>
-            <a:off x="3676802" y="5120640"/>
-            <a:ext cx="2121408" cy="420624"/>
+          <p:cNvPr id="21" name="Text 17"/>
+          <p:cNvSpPr txBox="1"/>
+          <p:nvPr/>
+        </p:nvSpPr>
+        <p:spPr>
+          <a:xfrm>
+            <a:off x="3676802" y="5248656"/>
+            <a:ext cx="2121408" cy="402336"/>
           </a:xfrm>
           <a:prstGeom prst="rect">
             <a:avLst/>
@@ -13123,7 +13079,7 @@
               <a:buNone/>
             </a:pPr>
             <a:r>
-              <a:rPr lang="en-US" sz="2600" spc="-90" kern="0" dirty="0">
+              <a:rPr lang="en-US" sz="2500" spc="-90" kern="0" dirty="0">
                 <a:solidFill>
                   <a:srgbClr val="2B2D30"/>
                 </a:solidFill>
@@ -13131,22 +13087,22 @@
                 <a:ea typeface="Montserrat ExtraBold" pitchFamily="34" charset="-122"/>
                 <a:cs typeface="Montserrat ExtraBold" pitchFamily="34" charset="-120"/>
               </a:rPr>
-              <a:t>209</a:t>
-            </a:r>
-            <a:endParaRPr lang="en-US" sz="2600" dirty="0"/>
-          </a:p>
-        </p:txBody>
-      </p:sp>
-      <p:sp>
-        <p:nvSpPr>
-          <p:cNvPr id="24" name="Text 21"/>
-          <p:cNvSpPr txBox="1"/>
-          <p:nvPr/>
-        </p:nvSpPr>
-        <p:spPr>
-          <a:xfrm>
-            <a:off x="3640226" y="5559552"/>
-            <a:ext cx="2194560" cy="402336"/>
+              <a:t>65</a:t>
+            </a:r>
+            <a:endParaRPr lang="en-US" sz="2500" dirty="0"/>
+          </a:p>
+        </p:txBody>
+      </p:sp>
+      <p:sp>
+        <p:nvSpPr>
+          <p:cNvPr id="22" name="Text 18"/>
+          <p:cNvSpPr txBox="1"/>
+          <p:nvPr/>
+        </p:nvSpPr>
+        <p:spPr>
+          <a:xfrm>
+            <a:off x="3640226" y="5669280"/>
+            <a:ext cx="2194560" cy="365760"/>
           </a:xfrm>
           <a:prstGeom prst="rect">
             <a:avLst/>
@@ -13173,41 +13129,21 @@
                 <a:ea typeface="Montserrat Medium" pitchFamily="34" charset="-122"/>
                 <a:cs typeface="Montserrat Medium" pitchFamily="34" charset="-120"/>
               </a:rPr>
-              <a:t>rows Kevlar grouped</a:t>
+              <a:t>still open</a:t>
             </a:r>
             <a:endParaRPr lang="en-US" sz="950" dirty="0"/>
           </a:p>
-          <a:p>
-            <a:pPr algn="ctr" indent="0" marL="0">
-              <a:lnSpc>
-                <a:spcPct val="115000"/>
-              </a:lnSpc>
-              <a:buNone/>
-            </a:pPr>
-            <a:r>
-              <a:rPr lang="en-US" sz="950" spc="30" kern="0" dirty="0">
-                <a:solidFill>
-                  <a:srgbClr val="6E7175"/>
-                </a:solidFill>
-                <a:latin typeface="Montserrat Medium" pitchFamily="34" charset="0"/>
-                <a:ea typeface="Montserrat Medium" pitchFamily="34" charset="-122"/>
-                <a:cs typeface="Montserrat Medium" pitchFamily="34" charset="-120"/>
-              </a:rPr>
-              <a:t>them into</a:t>
-            </a:r>
-            <a:endParaRPr lang="en-US" sz="950" dirty="0"/>
-          </a:p>
-        </p:txBody>
-      </p:sp>
-      <p:sp>
-        <p:nvSpPr>
-          <p:cNvPr id="25" name="Text 22"/>
-          <p:cNvSpPr txBox="1"/>
-          <p:nvPr/>
-        </p:nvSpPr>
-        <p:spPr>
-          <a:xfrm>
-            <a:off x="5912968" y="5294376"/>
+        </p:txBody>
+      </p:sp>
+      <p:sp>
+        <p:nvSpPr>
+          <p:cNvPr id="23" name="Text 19"/>
+          <p:cNvSpPr txBox="1"/>
+          <p:nvPr/>
+        </p:nvSpPr>
+        <p:spPr>
+          <a:xfrm>
+            <a:off x="5912968" y="5394960"/>
             <a:ext cx="365760" cy="420624"/>
           </a:xfrm>
           <a:prstGeom prst="rect">
@@ -13240,18 +13176,18 @@
       </p:sp>
       <p:sp>
         <p:nvSpPr>
-          <p:cNvPr id="26" name="Shape 23"/>
+          <p:cNvPr id="24" name="Shape 20"/>
           <p:cNvSpPr/>
           <p:nvPr/>
         </p:nvSpPr>
         <p:spPr>
           <a:xfrm>
-            <a:off x="6210605" y="4974336"/>
-            <a:ext cx="2487168" cy="1060704"/>
+            <a:off x="6210605" y="5138928"/>
+            <a:ext cx="2487168" cy="932688"/>
           </a:xfrm>
           <a:prstGeom prst="roundRect">
             <a:avLst>
-              <a:gd name="adj" fmla="val 5172"/>
+              <a:gd name="adj" fmla="val 5882"/>
             </a:avLst>
           </a:prstGeom>
           <a:solidFill>
@@ -13274,14 +13210,14 @@
       </p:sp>
       <p:sp>
         <p:nvSpPr>
-          <p:cNvPr id="27" name="Text 24"/>
-          <p:cNvSpPr txBox="1"/>
-          <p:nvPr/>
-        </p:nvSpPr>
-        <p:spPr>
-          <a:xfrm>
-            <a:off x="6393485" y="5120640"/>
-            <a:ext cx="2121408" cy="420624"/>
+          <p:cNvPr id="25" name="Text 21"/>
+          <p:cNvSpPr txBox="1"/>
+          <p:nvPr/>
+        </p:nvSpPr>
+        <p:spPr>
+          <a:xfrm>
+            <a:off x="6393485" y="5248656"/>
+            <a:ext cx="2121408" cy="402336"/>
           </a:xfrm>
           <a:prstGeom prst="rect">
             <a:avLst/>
@@ -13297,7 +13233,7 @@
               <a:buNone/>
             </a:pPr>
             <a:r>
-              <a:rPr lang="en-US" sz="1700" spc="120" kern="0" dirty="0">
+              <a:rPr lang="en-US" sz="2500" spc="-90" kern="0" dirty="0">
                 <a:solidFill>
                   <a:srgbClr val="2B2D30"/>
                 </a:solidFill>
@@ -13305,22 +13241,22 @@
                 <a:ea typeface="Montserrat ExtraBold" pitchFamily="34" charset="-122"/>
                 <a:cs typeface="Montserrat ExtraBold" pitchFamily="34" charset="-120"/>
               </a:rPr>
-              <a:t>RULE</a:t>
-            </a:r>
-            <a:endParaRPr lang="en-US" sz="1700" dirty="0"/>
-          </a:p>
-        </p:txBody>
-      </p:sp>
-      <p:sp>
-        <p:nvSpPr>
-          <p:cNvPr id="28" name="Text 25"/>
-          <p:cNvSpPr txBox="1"/>
-          <p:nvPr/>
-        </p:nvSpPr>
-        <p:spPr>
-          <a:xfrm>
-            <a:off x="6356909" y="5559552"/>
-            <a:ext cx="2194560" cy="402336"/>
+              <a:t>209</a:t>
+            </a:r>
+            <a:endParaRPr lang="en-US" sz="2500" dirty="0"/>
+          </a:p>
+        </p:txBody>
+      </p:sp>
+      <p:sp>
+        <p:nvSpPr>
+          <p:cNvPr id="26" name="Text 22"/>
+          <p:cNvSpPr txBox="1"/>
+          <p:nvPr/>
+        </p:nvSpPr>
+        <p:spPr>
+          <a:xfrm>
+            <a:off x="6356909" y="5669280"/>
+            <a:ext cx="2194560" cy="365760"/>
           </a:xfrm>
           <a:prstGeom prst="rect">
             <a:avLst/>
@@ -13347,7 +13283,7 @@
                 <a:ea typeface="Montserrat Medium" pitchFamily="34" charset="-122"/>
                 <a:cs typeface="Montserrat Medium" pitchFamily="34" charset="-120"/>
               </a:rPr>
-              <a:t>highest build</a:t>
+              <a:t>rows once split</a:t>
             </a:r>
             <a:endParaRPr lang="en-US" sz="950" dirty="0"/>
           </a:p>
@@ -13367,7 +13303,7 @@
                 <a:ea typeface="Montserrat Medium" pitchFamily="34" charset="-122"/>
                 <a:cs typeface="Montserrat Medium" pitchFamily="34" charset="-120"/>
               </a:rPr>
-              <a:t>wins</a:t>
+              <a:t>by Windows version</a:t>
             </a:r>
             <a:endParaRPr lang="en-US" sz="950" dirty="0"/>
           </a:p>
@@ -13375,13 +13311,13 @@
       </p:sp>
       <p:sp>
         <p:nvSpPr>
-          <p:cNvPr id="29" name="Text 26"/>
-          <p:cNvSpPr txBox="1"/>
-          <p:nvPr/>
-        </p:nvSpPr>
-        <p:spPr>
-          <a:xfrm>
-            <a:off x="8629650" y="5294376"/>
+          <p:cNvPr id="27" name="Text 23"/>
+          <p:cNvSpPr txBox="1"/>
+          <p:nvPr/>
+        </p:nvSpPr>
+        <p:spPr>
+          <a:xfrm>
+            <a:off x="8629650" y="5394960"/>
             <a:ext cx="365760" cy="420624"/>
           </a:xfrm>
           <a:prstGeom prst="rect">
@@ -13414,18 +13350,18 @@
       </p:sp>
       <p:sp>
         <p:nvSpPr>
-          <p:cNvPr id="30" name="Shape 27"/>
+          <p:cNvPr id="28" name="Shape 24"/>
           <p:cNvSpPr/>
           <p:nvPr/>
         </p:nvSpPr>
         <p:spPr>
           <a:xfrm>
-            <a:off x="8927287" y="4974336"/>
-            <a:ext cx="2487168" cy="1060704"/>
+            <a:off x="8927287" y="5138928"/>
+            <a:ext cx="2487168" cy="932688"/>
           </a:xfrm>
           <a:prstGeom prst="roundRect">
             <a:avLst>
-              <a:gd name="adj" fmla="val 5172"/>
+              <a:gd name="adj" fmla="val 5882"/>
             </a:avLst>
           </a:prstGeom>
           <a:solidFill>
@@ -13448,14 +13384,14 @@
       </p:sp>
       <p:sp>
         <p:nvSpPr>
-          <p:cNvPr id="31" name="Text 28"/>
-          <p:cNvSpPr txBox="1"/>
-          <p:nvPr/>
-        </p:nvSpPr>
-        <p:spPr>
-          <a:xfrm>
-            <a:off x="9110167" y="5120640"/>
-            <a:ext cx="2121408" cy="420624"/>
+          <p:cNvPr id="29" name="Text 25"/>
+          <p:cNvSpPr txBox="1"/>
+          <p:nvPr/>
+        </p:nvSpPr>
+        <p:spPr>
+          <a:xfrm>
+            <a:off x="9110167" y="5248656"/>
+            <a:ext cx="2121408" cy="402336"/>
           </a:xfrm>
           <a:prstGeom prst="rect">
             <a:avLst/>
@@ -13471,7 +13407,7 @@
               <a:buNone/>
             </a:pPr>
             <a:r>
-              <a:rPr lang="en-US" sz="2600" spc="-90" kern="0" dirty="0">
+              <a:rPr lang="en-US" sz="2500" spc="-90" kern="0" dirty="0">
                 <a:solidFill>
                   <a:srgbClr val="FFFFFF"/>
                 </a:solidFill>
@@ -13481,20 +13417,20 @@
               </a:rPr>
               <a:t>46</a:t>
             </a:r>
-            <a:endParaRPr lang="en-US" sz="2600" dirty="0"/>
-          </a:p>
-        </p:txBody>
-      </p:sp>
-      <p:sp>
-        <p:nvSpPr>
-          <p:cNvPr id="32" name="Text 29"/>
-          <p:cNvSpPr txBox="1"/>
-          <p:nvPr/>
-        </p:nvSpPr>
-        <p:spPr>
-          <a:xfrm>
-            <a:off x="9073591" y="5559552"/>
-            <a:ext cx="2194560" cy="402336"/>
+            <a:endParaRPr lang="en-US" sz="2500" dirty="0"/>
+          </a:p>
+        </p:txBody>
+      </p:sp>
+      <p:sp>
+        <p:nvSpPr>
+          <p:cNvPr id="30" name="Text 26"/>
+          <p:cNvSpPr txBox="1"/>
+          <p:nvPr/>
+        </p:nvSpPr>
+        <p:spPr>
+          <a:xfrm>
+            <a:off x="9073591" y="5669280"/>
+            <a:ext cx="2194560" cy="365760"/>
           </a:xfrm>
           <a:prstGeom prst="rect">
             <a:avLst/>
@@ -13521,7 +13457,7 @@
                 <a:ea typeface="Montserrat Medium" pitchFamily="34" charset="-122"/>
                 <a:cs typeface="Montserrat Medium" pitchFamily="34" charset="-120"/>
               </a:rPr>
-              <a:t>tickets actually</a:t>
+              <a:t>tickets, after the</a:t>
             </a:r>
             <a:endParaRPr lang="en-US" sz="950" dirty="0"/>
           </a:p>
@@ -13541,7 +13477,7 @@
                 <a:ea typeface="Montserrat Medium" pitchFamily="34" charset="-122"/>
                 <a:cs typeface="Montserrat Medium" pitchFamily="34" charset="-120"/>
               </a:rPr>
-              <a:t>opened</a:t>
+              <a:t>next slide’s rule</a:t>
             </a:r>
             <a:endParaRPr lang="en-US" sz="950" dirty="0"/>
           </a:p>
@@ -13810,12 +13746,495 @@
         </p:nvSpPr>
         <p:spPr>
           <a:xfrm>
-            <a:off x="777240" y="2011680"/>
-            <a:ext cx="3310128" cy="1481328"/>
+            <a:off x="777240" y="1847088"/>
+            <a:ext cx="10637215" cy="603504"/>
           </a:xfrm>
           <a:prstGeom prst="roundRect">
             <a:avLst>
-              <a:gd name="adj" fmla="val 3704"/>
+              <a:gd name="adj" fmla="val 9091"/>
+            </a:avLst>
+          </a:prstGeom>
+          <a:solidFill>
+            <a:srgbClr val="F6EEF0"/>
+          </a:solidFill>
+          <a:ln/>
+        </p:spPr>
+      </p:sp>
+      <p:sp>
+        <p:nvSpPr>
+          <p:cNvPr id="10" name="Shape 7"/>
+          <p:cNvSpPr/>
+          <p:nvPr/>
+        </p:nvSpPr>
+        <p:spPr>
+          <a:xfrm>
+            <a:off x="777240" y="1847088"/>
+            <a:ext cx="50292" cy="603504"/>
+          </a:xfrm>
+          <a:prstGeom prst="rect">
+            <a:avLst/>
+          </a:prstGeom>
+          <a:solidFill>
+            <a:srgbClr val="942838"/>
+          </a:solidFill>
+          <a:ln/>
+        </p:spPr>
+      </p:sp>
+      <p:sp>
+        <p:nvSpPr>
+          <p:cNvPr id="11" name="Text 8"/>
+          <p:cNvSpPr txBox="1"/>
+          <p:nvPr/>
+        </p:nvSpPr>
+        <p:spPr>
+          <a:xfrm>
+            <a:off x="1014984" y="2048256"/>
+            <a:ext cx="10180015" cy="310896"/>
+          </a:xfrm>
+          <a:prstGeom prst="rect">
+            <a:avLst/>
+          </a:prstGeom>
+          <a:noFill/>
+          <a:ln/>
+        </p:spPr>
+        <p:txBody>
+          <a:bodyPr wrap="square" lIns="0" tIns="0" rIns="0" bIns="0" rtlCol="0" anchor="t"/>
+          <a:lstStyle/>
+          <a:p>
+            <a:pPr indent="0" marL="0">
+              <a:buNone/>
+            </a:pPr>
+            <a:r>
+              <a:rPr lang="en-US" sz="900" spc="140" kern="0" dirty="0">
+                <a:solidFill>
+                  <a:srgbClr val="942838"/>
+                </a:solidFill>
+                <a:latin typeface="Montserrat SemiBold" pitchFamily="34" charset="0"/>
+                <a:ea typeface="Montserrat SemiBold" pitchFamily="34" charset="-122"/>
+                <a:cs typeface="Montserrat SemiBold" pitchFamily="34" charset="-120"/>
+              </a:rPr>
+              <a:t>THE SAME FACT AGAIN   </a:t>
+            </a:r>
+            <a:pPr indent="0" marL="0">
+              <a:buNone/>
+            </a:pPr>
+            <a:r>
+              <a:rPr lang="en-US" sz="1250" dirty="0">
+                <a:solidFill>
+                  <a:srgbClr val="2B2D30"/>
+                </a:solidFill>
+                <a:latin typeface="Montserrat SemiBold" pitchFamily="34" charset="0"/>
+                <a:ea typeface="Montserrat SemiBold" pitchFamily="34" charset="-122"/>
+                <a:cs typeface="Montserrat SemiBold" pitchFamily="34" charset="-120"/>
+              </a:rPr>
+              <a:t>Only now applied to one machine at a time — because the newest patch already contains the older ones, most of those rows are the same job twice.</a:t>
+            </a:r>
+            <a:endParaRPr lang="en-US" sz="900" dirty="0"/>
+          </a:p>
+        </p:txBody>
+      </p:sp>
+      <p:sp>
+        <p:nvSpPr>
+          <p:cNvPr id="12" name="Shape 9"/>
+          <p:cNvSpPr/>
+          <p:nvPr/>
+        </p:nvSpPr>
+        <p:spPr>
+          <a:xfrm>
+            <a:off x="777240" y="2633472"/>
+            <a:ext cx="5577840" cy="1627632"/>
+          </a:xfrm>
+          <a:prstGeom prst="roundRect">
+            <a:avLst>
+              <a:gd name="adj" fmla="val 3371"/>
+            </a:avLst>
+          </a:prstGeom>
+          <a:solidFill>
+            <a:srgbClr val="FFFFFF"/>
+          </a:solidFill>
+          <a:ln w="9525">
+            <a:solidFill>
+              <a:srgbClr val="E6E4E2"/>
+            </a:solidFill>
+            <a:prstDash val="solid"/>
+          </a:ln>
+          <a:effectLst>
+            <a:outerShdw sx="100000" sy="100000" kx="0" ky="0" algn="bl" rotWithShape="0" blurRad="4.3392766422361264e+99" dist="1.0848191605590316e+99" dir="4.2645432044894554e+116">
+              <a:srgbClr val="959092">
+                <a:alpha val="2.2000000000000005e+119"/>
+              </a:srgbClr>
+            </a:outerShdw>
+          </a:effectLst>
+        </p:spPr>
+      </p:sp>
+      <p:sp>
+        <p:nvSpPr>
+          <p:cNvPr id="13" name="Text 10"/>
+          <p:cNvSpPr txBox="1"/>
+          <p:nvPr/>
+        </p:nvSpPr>
+        <p:spPr>
+          <a:xfrm>
+            <a:off x="1051560" y="2852928"/>
+            <a:ext cx="5029200" cy="201168"/>
+          </a:xfrm>
+          <a:prstGeom prst="rect">
+            <a:avLst/>
+          </a:prstGeom>
+          <a:noFill/>
+          <a:ln/>
+        </p:spPr>
+        <p:txBody>
+          <a:bodyPr wrap="square" lIns="0" tIns="0" rIns="0" bIns="0" rtlCol="0" anchor="t"/>
+          <a:lstStyle/>
+          <a:p>
+            <a:pPr indent="0" marL="0">
+              <a:buNone/>
+            </a:pPr>
+            <a:r>
+              <a:rPr lang="en-US" sz="850" spc="140" kern="0" dirty="0">
+                <a:solidFill>
+                  <a:srgbClr val="942838"/>
+                </a:solidFill>
+                <a:latin typeface="Montserrat SemiBold" pitchFamily="34" charset="0"/>
+                <a:ea typeface="Montserrat SemiBold" pitchFamily="34" charset="-122"/>
+                <a:cs typeface="Montserrat SemiBold" pitchFamily="34" charset="-120"/>
+              </a:rPr>
+              <a:t>ONE SERVER, THREE ROWS ON THE LIST</a:t>
+            </a:r>
+            <a:endParaRPr lang="en-US" sz="850" dirty="0"/>
+          </a:p>
+        </p:txBody>
+      </p:sp>
+      <p:sp>
+        <p:nvSpPr>
+          <p:cNvPr id="14" name="Text 11"/>
+          <p:cNvSpPr txBox="1"/>
+          <p:nvPr/>
+        </p:nvSpPr>
+        <p:spPr>
+          <a:xfrm>
+            <a:off x="1051560" y="3145536"/>
+            <a:ext cx="219456" cy="237744"/>
+          </a:xfrm>
+          <a:prstGeom prst="rect">
+            <a:avLst/>
+          </a:prstGeom>
+          <a:noFill/>
+          <a:ln/>
+        </p:spPr>
+        <p:txBody>
+          <a:bodyPr wrap="square" lIns="0" tIns="0" rIns="0" bIns="0" rtlCol="0" anchor="t"/>
+          <a:lstStyle/>
+          <a:p>
+            <a:pPr indent="0" marL="0">
+              <a:buNone/>
+            </a:pPr>
+            <a:r>
+              <a:rPr lang="en-US" sz="1200" dirty="0">
+                <a:solidFill>
+                  <a:srgbClr val="C9C6C4"/>
+                </a:solidFill>
+                <a:latin typeface="Montserrat SemiBold" pitchFamily="34" charset="0"/>
+                <a:ea typeface="Montserrat SemiBold" pitchFamily="34" charset="-122"/>
+                <a:cs typeface="Montserrat SemiBold" pitchFamily="34" charset="-120"/>
+              </a:rPr>
+              <a:t>—</a:t>
+            </a:r>
+            <a:endParaRPr lang="en-US" sz="1200" dirty="0"/>
+          </a:p>
+        </p:txBody>
+      </p:sp>
+      <p:sp>
+        <p:nvSpPr>
+          <p:cNvPr id="15" name="Text 12"/>
+          <p:cNvSpPr txBox="1"/>
+          <p:nvPr/>
+        </p:nvSpPr>
+        <p:spPr>
+          <a:xfrm>
+            <a:off x="1325880" y="3145536"/>
+            <a:ext cx="4754880" cy="237744"/>
+          </a:xfrm>
+          <a:prstGeom prst="rect">
+            <a:avLst/>
+          </a:prstGeom>
+          <a:noFill/>
+          <a:ln/>
+        </p:spPr>
+        <p:txBody>
+          <a:bodyPr wrap="square" lIns="0" tIns="0" rIns="0" bIns="0" rtlCol="0" anchor="t"/>
+          <a:lstStyle/>
+          <a:p>
+            <a:pPr indent="0" marL="0">
+              <a:buNone/>
+            </a:pPr>
+            <a:r>
+              <a:rPr lang="en-US" sz="1200" dirty="0">
+                <a:solidFill>
+                  <a:srgbClr val="6E7175"/>
+                </a:solidFill>
+                <a:latin typeface="Montserrat" pitchFamily="34" charset="0"/>
+                <a:ea typeface="Montserrat" pitchFamily="34" charset="-122"/>
+                <a:cs typeface="Montserrat" pitchFamily="34" charset="-120"/>
+              </a:rPr>
+              <a:t>March patch</a:t>
+            </a:r>
+            <a:pPr indent="0" marL="0">
+              <a:buNone/>
+            </a:pPr>
+            <a:r>
+              <a:rPr lang="en-US" sz="1100" dirty="0">
+                <a:solidFill>
+                  <a:srgbClr val="6E7175"/>
+                </a:solidFill>
+                <a:latin typeface="Montserrat" pitchFamily="34" charset="0"/>
+                <a:ea typeface="Montserrat" pitchFamily="34" charset="-122"/>
+                <a:cs typeface="Montserrat" pitchFamily="34" charset="-120"/>
+              </a:rPr>
+              <a:t>   for flaw 1</a:t>
+            </a:r>
+            <a:endParaRPr lang="en-US" sz="1200" dirty="0"/>
+          </a:p>
+        </p:txBody>
+      </p:sp>
+      <p:sp>
+        <p:nvSpPr>
+          <p:cNvPr id="16" name="Text 13"/>
+          <p:cNvSpPr txBox="1"/>
+          <p:nvPr/>
+        </p:nvSpPr>
+        <p:spPr>
+          <a:xfrm>
+            <a:off x="1051560" y="3456432"/>
+            <a:ext cx="219456" cy="237744"/>
+          </a:xfrm>
+          <a:prstGeom prst="rect">
+            <a:avLst/>
+          </a:prstGeom>
+          <a:noFill/>
+          <a:ln/>
+        </p:spPr>
+        <p:txBody>
+          <a:bodyPr wrap="square" lIns="0" tIns="0" rIns="0" bIns="0" rtlCol="0" anchor="t"/>
+          <a:lstStyle/>
+          <a:p>
+            <a:pPr indent="0" marL="0">
+              <a:buNone/>
+            </a:pPr>
+            <a:r>
+              <a:rPr lang="en-US" sz="1200" dirty="0">
+                <a:solidFill>
+                  <a:srgbClr val="C9C6C4"/>
+                </a:solidFill>
+                <a:latin typeface="Montserrat SemiBold" pitchFamily="34" charset="0"/>
+                <a:ea typeface="Montserrat SemiBold" pitchFamily="34" charset="-122"/>
+                <a:cs typeface="Montserrat SemiBold" pitchFamily="34" charset="-120"/>
+              </a:rPr>
+              <a:t>—</a:t>
+            </a:r>
+            <a:endParaRPr lang="en-US" sz="1200" dirty="0"/>
+          </a:p>
+        </p:txBody>
+      </p:sp>
+      <p:sp>
+        <p:nvSpPr>
+          <p:cNvPr id="17" name="Text 14"/>
+          <p:cNvSpPr txBox="1"/>
+          <p:nvPr/>
+        </p:nvSpPr>
+        <p:spPr>
+          <a:xfrm>
+            <a:off x="1325880" y="3456432"/>
+            <a:ext cx="4754880" cy="237744"/>
+          </a:xfrm>
+          <a:prstGeom prst="rect">
+            <a:avLst/>
+          </a:prstGeom>
+          <a:noFill/>
+          <a:ln/>
+        </p:spPr>
+        <p:txBody>
+          <a:bodyPr wrap="square" lIns="0" tIns="0" rIns="0" bIns="0" rtlCol="0" anchor="t"/>
+          <a:lstStyle/>
+          <a:p>
+            <a:pPr indent="0" marL="0">
+              <a:buNone/>
+            </a:pPr>
+            <a:r>
+              <a:rPr lang="en-US" sz="1200" dirty="0">
+                <a:solidFill>
+                  <a:srgbClr val="6E7175"/>
+                </a:solidFill>
+                <a:latin typeface="Montserrat" pitchFamily="34" charset="0"/>
+                <a:ea typeface="Montserrat" pitchFamily="34" charset="-122"/>
+                <a:cs typeface="Montserrat" pitchFamily="34" charset="-120"/>
+              </a:rPr>
+              <a:t>June patch</a:t>
+            </a:r>
+            <a:pPr indent="0" marL="0">
+              <a:buNone/>
+            </a:pPr>
+            <a:r>
+              <a:rPr lang="en-US" sz="1100" dirty="0">
+                <a:solidFill>
+                  <a:srgbClr val="6E7175"/>
+                </a:solidFill>
+                <a:latin typeface="Montserrat" pitchFamily="34" charset="0"/>
+                <a:ea typeface="Montserrat" pitchFamily="34" charset="-122"/>
+                <a:cs typeface="Montserrat" pitchFamily="34" charset="-120"/>
+              </a:rPr>
+              <a:t>   for flaw 2</a:t>
+            </a:r>
+            <a:endParaRPr lang="en-US" sz="1200" dirty="0"/>
+          </a:p>
+        </p:txBody>
+      </p:sp>
+      <p:sp>
+        <p:nvSpPr>
+          <p:cNvPr id="18" name="Text 15"/>
+          <p:cNvSpPr txBox="1"/>
+          <p:nvPr/>
+        </p:nvSpPr>
+        <p:spPr>
+          <a:xfrm>
+            <a:off x="1051560" y="3767328"/>
+            <a:ext cx="219456" cy="237744"/>
+          </a:xfrm>
+          <a:prstGeom prst="rect">
+            <a:avLst/>
+          </a:prstGeom>
+          <a:noFill/>
+          <a:ln/>
+        </p:spPr>
+        <p:txBody>
+          <a:bodyPr wrap="square" lIns="0" tIns="0" rIns="0" bIns="0" rtlCol="0" anchor="t"/>
+          <a:lstStyle/>
+          <a:p>
+            <a:pPr indent="0" marL="0">
+              <a:buNone/>
+            </a:pPr>
+            <a:r>
+              <a:rPr lang="en-US" sz="1200" dirty="0">
+                <a:solidFill>
+                  <a:srgbClr val="942838"/>
+                </a:solidFill>
+                <a:latin typeface="Montserrat SemiBold" pitchFamily="34" charset="0"/>
+                <a:ea typeface="Montserrat SemiBold" pitchFamily="34" charset="-122"/>
+                <a:cs typeface="Montserrat SemiBold" pitchFamily="34" charset="-120"/>
+              </a:rPr>
+              <a:t>✓</a:t>
+            </a:r>
+            <a:endParaRPr lang="en-US" sz="1200" dirty="0"/>
+          </a:p>
+        </p:txBody>
+      </p:sp>
+      <p:sp>
+        <p:nvSpPr>
+          <p:cNvPr id="19" name="Text 16"/>
+          <p:cNvSpPr txBox="1"/>
+          <p:nvPr/>
+        </p:nvSpPr>
+        <p:spPr>
+          <a:xfrm>
+            <a:off x="1325880" y="3767328"/>
+            <a:ext cx="4754880" cy="237744"/>
+          </a:xfrm>
+          <a:prstGeom prst="rect">
+            <a:avLst/>
+          </a:prstGeom>
+          <a:noFill/>
+          <a:ln/>
+        </p:spPr>
+        <p:txBody>
+          <a:bodyPr wrap="square" lIns="0" tIns="0" rIns="0" bIns="0" rtlCol="0" anchor="t"/>
+          <a:lstStyle/>
+          <a:p>
+            <a:pPr indent="0" marL="0">
+              <a:buNone/>
+            </a:pPr>
+            <a:r>
+              <a:rPr lang="en-US" sz="1200" dirty="0">
+                <a:solidFill>
+                  <a:srgbClr val="2B2D30"/>
+                </a:solidFill>
+                <a:latin typeface="Montserrat SemiBold" pitchFamily="34" charset="0"/>
+                <a:ea typeface="Montserrat SemiBold" pitchFamily="34" charset="-122"/>
+                <a:cs typeface="Montserrat SemiBold" pitchFamily="34" charset="-120"/>
+              </a:rPr>
+              <a:t>September patch</a:t>
+            </a:r>
+            <a:pPr indent="0" marL="0">
+              <a:buNone/>
+            </a:pPr>
+            <a:r>
+              <a:rPr lang="en-US" sz="1100" dirty="0">
+                <a:solidFill>
+                  <a:srgbClr val="6E7175"/>
+                </a:solidFill>
+                <a:latin typeface="Montserrat" pitchFamily="34" charset="0"/>
+                <a:ea typeface="Montserrat" pitchFamily="34" charset="-122"/>
+                <a:cs typeface="Montserrat" pitchFamily="34" charset="-120"/>
+              </a:rPr>
+              <a:t>   for flaw 3</a:t>
+            </a:r>
+            <a:endParaRPr lang="en-US" sz="1200" dirty="0"/>
+          </a:p>
+        </p:txBody>
+      </p:sp>
+      <p:sp>
+        <p:nvSpPr>
+          <p:cNvPr id="20" name="Text 17"/>
+          <p:cNvSpPr txBox="1"/>
+          <p:nvPr/>
+        </p:nvSpPr>
+        <p:spPr>
+          <a:xfrm>
+            <a:off x="1051560" y="3950208"/>
+            <a:ext cx="5029200" cy="237744"/>
+          </a:xfrm>
+          <a:prstGeom prst="rect">
+            <a:avLst/>
+          </a:prstGeom>
+          <a:noFill/>
+          <a:ln/>
+        </p:spPr>
+        <p:txBody>
+          <a:bodyPr wrap="square" lIns="0" tIns="0" rIns="0" bIns="0" rtlCol="0" anchor="t"/>
+          <a:lstStyle/>
+          <a:p>
+            <a:pPr indent="0" marL="0">
+              <a:buNone/>
+            </a:pPr>
+            <a:r>
+              <a:rPr lang="en-US" sz="1100" dirty="0">
+                <a:solidFill>
+                  <a:srgbClr val="942838"/>
+                </a:solidFill>
+                <a:latin typeface="Montserrat SemiBold" pitchFamily="34" charset="0"/>
+                <a:ea typeface="Montserrat SemiBold" pitchFamily="34" charset="-122"/>
+                <a:cs typeface="Montserrat SemiBold" pitchFamily="34" charset="-120"/>
+              </a:rPr>
+              <a:t>September already contains March and June — one action, not three.</a:t>
+            </a:r>
+            <a:endParaRPr lang="en-US" sz="1100" dirty="0"/>
+          </a:p>
+        </p:txBody>
+      </p:sp>
+      <p:sp>
+        <p:nvSpPr>
+          <p:cNvPr id="21" name="Shape 18"/>
+          <p:cNvSpPr/>
+          <p:nvPr/>
+        </p:nvSpPr>
+        <p:spPr>
+          <a:xfrm>
+            <a:off x="6766560" y="2633472"/>
+            <a:ext cx="1402994" cy="1627632"/>
+          </a:xfrm>
+          <a:prstGeom prst="roundRect">
+            <a:avLst>
+              <a:gd name="adj" fmla="val 3910"/>
             </a:avLst>
           </a:prstGeom>
           <a:solidFill>
@@ -13838,14 +14257,14 @@
       </p:sp>
       <p:sp>
         <p:nvSpPr>
-          <p:cNvPr id="10" name="Text 7"/>
-          <p:cNvSpPr txBox="1"/>
-          <p:nvPr/>
-        </p:nvSpPr>
-        <p:spPr>
-          <a:xfrm>
-            <a:off x="996696" y="2194560"/>
-            <a:ext cx="2871216" cy="676656"/>
+          <p:cNvPr id="22" name="Text 19"/>
+          <p:cNvSpPr txBox="1"/>
+          <p:nvPr/>
+        </p:nvSpPr>
+        <p:spPr>
+          <a:xfrm>
+            <a:off x="6894576" y="3017520"/>
+            <a:ext cx="1146962" cy="640080"/>
           </a:xfrm>
           <a:prstGeom prst="rect">
             <a:avLst/>
@@ -13861,7 +14280,7 @@
               <a:buNone/>
             </a:pPr>
             <a:r>
-              <a:rPr lang="en-US" sz="4600" spc="-180" kern="0" dirty="0">
+              <a:rPr lang="en-US" sz="4000" spc="-160" kern="0" dirty="0">
                 <a:solidFill>
                   <a:srgbClr val="2B2D30"/>
                 </a:solidFill>
@@ -13871,20 +14290,20 @@
               </a:rPr>
               <a:t>209</a:t>
             </a:r>
-            <a:endParaRPr lang="en-US" sz="4600" dirty="0"/>
-          </a:p>
-        </p:txBody>
-      </p:sp>
-      <p:sp>
-        <p:nvSpPr>
-          <p:cNvPr id="11" name="Text 8"/>
-          <p:cNvSpPr txBox="1"/>
-          <p:nvPr/>
-        </p:nvSpPr>
-        <p:spPr>
-          <a:xfrm>
-            <a:off x="996696" y="2907792"/>
-            <a:ext cx="2871216" cy="512064"/>
+            <a:endParaRPr lang="en-US" sz="4000" dirty="0"/>
+          </a:p>
+        </p:txBody>
+      </p:sp>
+      <p:sp>
+        <p:nvSpPr>
+          <p:cNvPr id="23" name="Text 20"/>
+          <p:cNvSpPr txBox="1"/>
+          <p:nvPr/>
+        </p:nvSpPr>
+        <p:spPr>
+          <a:xfrm>
+            <a:off x="6894576" y="3730752"/>
+            <a:ext cx="1146962" cy="457200"/>
           </a:xfrm>
           <a:prstGeom prst="rect">
             <a:avLst/>
@@ -13911,46 +14330,26 @@
                 <a:ea typeface="Montserrat Medium" pitchFamily="34" charset="-122"/>
                 <a:cs typeface="Montserrat Medium" pitchFamily="34" charset="-120"/>
               </a:rPr>
-              <a:t>rows in Kevlar’s own</a:t>
+              <a:t>rows on Kevlar’s list</a:t>
             </a:r>
             <a:endParaRPr lang="en-US" sz="950" dirty="0"/>
           </a:p>
-          <a:p>
-            <a:pPr algn="ctr" indent="0" marL="0">
-              <a:lnSpc>
-                <a:spcPct val="120000"/>
-              </a:lnSpc>
-              <a:buNone/>
-            </a:pPr>
-            <a:r>
-              <a:rPr lang="en-US" sz="950" spc="30" kern="0" dirty="0">
-                <a:solidFill>
-                  <a:srgbClr val="6E7175"/>
-                </a:solidFill>
-                <a:latin typeface="Montserrat Medium" pitchFamily="34" charset="0"/>
-                <a:ea typeface="Montserrat Medium" pitchFamily="34" charset="-122"/>
-                <a:cs typeface="Montserrat Medium" pitchFamily="34" charset="-120"/>
-              </a:rPr>
-              <a:t>KB Priority report</a:t>
-            </a:r>
-            <a:endParaRPr lang="en-US" sz="950" dirty="0"/>
-          </a:p>
-        </p:txBody>
-      </p:sp>
-      <p:sp>
-        <p:nvSpPr>
-          <p:cNvPr id="12" name="Shape 9"/>
+        </p:txBody>
+      </p:sp>
+      <p:sp>
+        <p:nvSpPr>
+          <p:cNvPr id="24" name="Shape 21"/>
           <p:cNvSpPr/>
           <p:nvPr/>
         </p:nvSpPr>
         <p:spPr>
           <a:xfrm>
-            <a:off x="4440784" y="2011680"/>
-            <a:ext cx="3310128" cy="1481328"/>
+            <a:off x="8389010" y="2633472"/>
+            <a:ext cx="1402994" cy="1627632"/>
           </a:xfrm>
           <a:prstGeom prst="roundRect">
             <a:avLst>
-              <a:gd name="adj" fmla="val 3704"/>
+              <a:gd name="adj" fmla="val 3910"/>
             </a:avLst>
           </a:prstGeom>
           <a:solidFill>
@@ -13973,14 +14372,14 @@
       </p:sp>
       <p:sp>
         <p:nvSpPr>
-          <p:cNvPr id="13" name="Text 10"/>
-          <p:cNvSpPr txBox="1"/>
-          <p:nvPr/>
-        </p:nvSpPr>
-        <p:spPr>
-          <a:xfrm>
-            <a:off x="4660240" y="2194560"/>
-            <a:ext cx="2871216" cy="676656"/>
+          <p:cNvPr id="25" name="Text 22"/>
+          <p:cNvSpPr txBox="1"/>
+          <p:nvPr/>
+        </p:nvSpPr>
+        <p:spPr>
+          <a:xfrm>
+            <a:off x="8517026" y="3017520"/>
+            <a:ext cx="1146962" cy="640080"/>
           </a:xfrm>
           <a:prstGeom prst="rect">
             <a:avLst/>
@@ -13996,7 +14395,7 @@
               <a:buNone/>
             </a:pPr>
             <a:r>
-              <a:rPr lang="en-US" sz="4600" spc="-180" kern="0" dirty="0">
+              <a:rPr lang="en-US" sz="4000" spc="-160" kern="0" dirty="0">
                 <a:solidFill>
                   <a:srgbClr val="942838"/>
                 </a:solidFill>
@@ -14006,20 +14405,20 @@
               </a:rPr>
               <a:t>46</a:t>
             </a:r>
-            <a:endParaRPr lang="en-US" sz="4600" dirty="0"/>
-          </a:p>
-        </p:txBody>
-      </p:sp>
-      <p:sp>
-        <p:nvSpPr>
-          <p:cNvPr id="14" name="Text 11"/>
-          <p:cNvSpPr txBox="1"/>
-          <p:nvPr/>
-        </p:nvSpPr>
-        <p:spPr>
-          <a:xfrm>
-            <a:off x="4660240" y="2907792"/>
-            <a:ext cx="2871216" cy="512064"/>
+            <a:endParaRPr lang="en-US" sz="4000" dirty="0"/>
+          </a:p>
+        </p:txBody>
+      </p:sp>
+      <p:sp>
+        <p:nvSpPr>
+          <p:cNvPr id="26" name="Text 23"/>
+          <p:cNvSpPr txBox="1"/>
+          <p:nvPr/>
+        </p:nvSpPr>
+        <p:spPr>
+          <a:xfrm>
+            <a:off x="8517026" y="3730752"/>
+            <a:ext cx="1146962" cy="457200"/>
           </a:xfrm>
           <a:prstGeom prst="rect">
             <a:avLst/>
@@ -14050,42 +14449,22 @@
             </a:r>
             <a:endParaRPr lang="en-US" sz="950" dirty="0"/>
           </a:p>
-          <a:p>
-            <a:pPr algn="ctr" indent="0" marL="0">
-              <a:lnSpc>
-                <a:spcPct val="120000"/>
-              </a:lnSpc>
-              <a:buNone/>
-            </a:pPr>
-            <a:r>
-              <a:rPr lang="en-US" sz="950" spc="30" kern="0" dirty="0">
-                <a:solidFill>
-                  <a:srgbClr val="6E7175"/>
-                </a:solidFill>
-                <a:latin typeface="Montserrat Medium" pitchFamily="34" charset="0"/>
-                <a:ea typeface="Montserrat Medium" pitchFamily="34" charset="-122"/>
-                <a:cs typeface="Montserrat Medium" pitchFamily="34" charset="-120"/>
-              </a:rPr>
-              <a:t>after applying the rule</a:t>
-            </a:r>
-            <a:endParaRPr lang="en-US" sz="950" dirty="0"/>
-          </a:p>
-        </p:txBody>
-      </p:sp>
-      <p:sp>
-        <p:nvSpPr>
-          <p:cNvPr id="15" name="Shape 12"/>
+        </p:txBody>
+      </p:sp>
+      <p:sp>
+        <p:nvSpPr>
+          <p:cNvPr id="27" name="Shape 24"/>
           <p:cNvSpPr/>
           <p:nvPr/>
         </p:nvSpPr>
         <p:spPr>
           <a:xfrm>
-            <a:off x="8104327" y="2011680"/>
-            <a:ext cx="3310128" cy="1481328"/>
+            <a:off x="10011461" y="2633472"/>
+            <a:ext cx="1402994" cy="1627632"/>
           </a:xfrm>
           <a:prstGeom prst="roundRect">
             <a:avLst>
-              <a:gd name="adj" fmla="val 3704"/>
+              <a:gd name="adj" fmla="val 3910"/>
             </a:avLst>
           </a:prstGeom>
           <a:solidFill>
@@ -14108,14 +14487,14 @@
       </p:sp>
       <p:sp>
         <p:nvSpPr>
-          <p:cNvPr id="16" name="Text 13"/>
-          <p:cNvSpPr txBox="1"/>
-          <p:nvPr/>
-        </p:nvSpPr>
-        <p:spPr>
-          <a:xfrm>
-            <a:off x="8323783" y="2194560"/>
-            <a:ext cx="2871216" cy="676656"/>
+          <p:cNvPr id="28" name="Text 25"/>
+          <p:cNvSpPr txBox="1"/>
+          <p:nvPr/>
+        </p:nvSpPr>
+        <p:spPr>
+          <a:xfrm>
+            <a:off x="10139477" y="3017520"/>
+            <a:ext cx="1146962" cy="640080"/>
           </a:xfrm>
           <a:prstGeom prst="rect">
             <a:avLst/>
@@ -14131,7 +14510,7 @@
               <a:buNone/>
             </a:pPr>
             <a:r>
-              <a:rPr lang="en-US" sz="4600" spc="-180" kern="0" dirty="0">
+              <a:rPr lang="en-US" sz="4000" spc="-160" kern="0" dirty="0">
                 <a:solidFill>
                   <a:srgbClr val="942838"/>
                 </a:solidFill>
@@ -14141,20 +14520,20 @@
               </a:rPr>
               <a:t>78%</a:t>
             </a:r>
-            <a:endParaRPr lang="en-US" sz="4600" dirty="0"/>
-          </a:p>
-        </p:txBody>
-      </p:sp>
-      <p:sp>
-        <p:nvSpPr>
-          <p:cNvPr id="17" name="Text 14"/>
-          <p:cNvSpPr txBox="1"/>
-          <p:nvPr/>
-        </p:nvSpPr>
-        <p:spPr>
-          <a:xfrm>
-            <a:off x="8323783" y="2907792"/>
-            <a:ext cx="2871216" cy="512064"/>
+            <a:endParaRPr lang="en-US" sz="4000" dirty="0"/>
+          </a:p>
+        </p:txBody>
+      </p:sp>
+      <p:sp>
+        <p:nvSpPr>
+          <p:cNvPr id="29" name="Text 26"/>
+          <p:cNvSpPr txBox="1"/>
+          <p:nvPr/>
+        </p:nvSpPr>
+        <p:spPr>
+          <a:xfrm>
+            <a:off x="10139477" y="3730752"/>
+            <a:ext cx="1146962" cy="457200"/>
           </a:xfrm>
           <a:prstGeom prst="rect">
             <a:avLst/>
@@ -14181,42 +14560,22 @@
                 <a:ea typeface="Montserrat Medium" pitchFamily="34" charset="-122"/>
                 <a:cs typeface="Montserrat Medium" pitchFamily="34" charset="-120"/>
               </a:rPr>
-              <a:t>fewer than the report</a:t>
+              <a:t>fewer — 163 absorbed</a:t>
             </a:r>
             <a:endParaRPr lang="en-US" sz="950" dirty="0"/>
           </a:p>
-          <a:p>
-            <a:pPr algn="ctr" indent="0" marL="0">
-              <a:lnSpc>
-                <a:spcPct val="120000"/>
-              </a:lnSpc>
-              <a:buNone/>
-            </a:pPr>
-            <a:r>
-              <a:rPr lang="en-US" sz="950" spc="30" kern="0" dirty="0">
-                <a:solidFill>
-                  <a:srgbClr val="6E7175"/>
-                </a:solidFill>
-                <a:latin typeface="Montserrat Medium" pitchFamily="34" charset="0"/>
-                <a:ea typeface="Montserrat Medium" pitchFamily="34" charset="-122"/>
-                <a:cs typeface="Montserrat Medium" pitchFamily="34" charset="-120"/>
-              </a:rPr>
-              <a:t>implied — 163 absorbed</a:t>
-            </a:r>
-            <a:endParaRPr lang="en-US" sz="950" dirty="0"/>
-          </a:p>
-        </p:txBody>
-      </p:sp>
-      <p:sp>
-        <p:nvSpPr>
-          <p:cNvPr id="18" name="Text 15"/>
-          <p:cNvSpPr txBox="1"/>
-          <p:nvPr/>
-        </p:nvSpPr>
-        <p:spPr>
-          <a:xfrm>
-            <a:off x="777240" y="3803904"/>
-            <a:ext cx="6400800" cy="201168"/>
+        </p:txBody>
+      </p:sp>
+      <p:sp>
+        <p:nvSpPr>
+          <p:cNvPr id="30" name="Text 27"/>
+          <p:cNvSpPr txBox="1"/>
+          <p:nvPr/>
+        </p:nvSpPr>
+        <p:spPr>
+          <a:xfrm>
+            <a:off x="777240" y="4462272"/>
+            <a:ext cx="7315200" cy="201168"/>
           </a:xfrm>
           <a:prstGeom prst="rect">
             <a:avLst/>
@@ -14240,7 +14599,7 @@
                 <a:ea typeface="Montserrat SemiBold" pitchFamily="34" charset="-122"/>
                 <a:cs typeface="Montserrat SemiBold" pitchFamily="34" charset="-120"/>
               </a:rPr>
-              <a:t>EVERY SQUARE IS ONE ROW IN KEVLAR’S REPORT</a:t>
+              <a:t>EVERY SQUARE IS ONE ROW ON KEVLAR’S LIST  ·  RED BECAME A TICKET</a:t>
             </a:r>
             <a:endParaRPr lang="en-US" sz="850" dirty="0"/>
           </a:p>
@@ -14248,7 +14607,7 @@
       </p:sp>
       <p:pic>
         <p:nvPicPr>
-          <p:cNvPr id="19" name="Image 1" descr="/home/user/ai/assets/gen/chart-consolidation.png">    </p:cNvPr>
+          <p:cNvPr id="31" name="Image 1" descr="/home/user/ai/assets/gen/chart-consolidation.png">    </p:cNvPr>
           <p:cNvPicPr>
             <a:picLocks noChangeAspect="1"/>
           </p:cNvPicPr>
@@ -14262,8 +14621,8 @@
         </p:blipFill>
         <p:spPr>
           <a:xfrm>
-            <a:off x="777240" y="4096512"/>
-            <a:ext cx="10637215" cy="1221498"/>
+            <a:off x="1340968" y="4736592"/>
+            <a:ext cx="9509760" cy="1092030"/>
           </a:xfrm>
           <a:prstGeom prst="rect">
             <a:avLst/>
@@ -14272,14 +14631,14 @@
       </p:pic>
       <p:sp>
         <p:nvSpPr>
-          <p:cNvPr id="20" name="Text 16"/>
-          <p:cNvSpPr txBox="1"/>
-          <p:nvPr/>
-        </p:nvSpPr>
-        <p:spPr>
-          <a:xfrm>
-            <a:off x="777240" y="5409450"/>
-            <a:ext cx="4572000" cy="256032"/>
+          <p:cNvPr id="32" name="Text 28"/>
+          <p:cNvSpPr txBox="1"/>
+          <p:nvPr/>
+        </p:nvSpPr>
+        <p:spPr>
+          <a:xfrm>
+            <a:off x="777240" y="5907024"/>
+            <a:ext cx="10637215" cy="274320"/>
           </a:xfrm>
           <a:prstGeom prst="rect">
             <a:avLst/>
@@ -14297,91 +14656,13 @@
             <a:r>
               <a:rPr lang="en-US" sz="1150" dirty="0">
                 <a:solidFill>
-                  <a:srgbClr val="942838"/>
+                  <a:srgbClr val="2B2D30"/>
                 </a:solidFill>
                 <a:latin typeface="Montserrat SemiBold" pitchFamily="34" charset="0"/>
                 <a:ea typeface="Montserrat SemiBold" pitchFamily="34" charset="-122"/>
                 <a:cs typeface="Montserrat SemiBold" pitchFamily="34" charset="-120"/>
               </a:rPr>
-              <a:t>46 opened as tickets</a:t>
-            </a:r>
-            <a:endParaRPr lang="en-US" sz="1150" dirty="0"/>
-          </a:p>
-        </p:txBody>
-      </p:sp>
-      <p:sp>
-        <p:nvSpPr>
-          <p:cNvPr id="21" name="Text 17"/>
-          <p:cNvSpPr txBox="1"/>
-          <p:nvPr/>
-        </p:nvSpPr>
-        <p:spPr>
-          <a:xfrm>
-            <a:off x="5928055" y="5409450"/>
-            <a:ext cx="5486400" cy="256032"/>
-          </a:xfrm>
-          <a:prstGeom prst="rect">
-            <a:avLst/>
-          </a:prstGeom>
-          <a:noFill/>
-          <a:ln/>
-        </p:spPr>
-        <p:txBody>
-          <a:bodyPr wrap="square" lIns="0" tIns="0" rIns="0" bIns="0" rtlCol="0" anchor="t"/>
-          <a:lstStyle/>
-          <a:p>
-            <a:pPr algn="r" indent="0" marL="0">
-              <a:buNone/>
-            </a:pPr>
-            <a:r>
-              <a:rPr lang="en-US" sz="1150" dirty="0">
-                <a:solidFill>
-                  <a:srgbClr val="6E7175"/>
-                </a:solidFill>
-                <a:latin typeface="Montserrat SemiBold" pitchFamily="34" charset="0"/>
-                <a:ea typeface="Montserrat SemiBold" pitchFamily="34" charset="-122"/>
-                <a:cs typeface="Montserrat SemiBold" pitchFamily="34" charset="-120"/>
-              </a:rPr>
-              <a:t>163 absorbed by a higher build already being installed</a:t>
-            </a:r>
-            <a:endParaRPr lang="en-US" sz="1150" dirty="0"/>
-          </a:p>
-        </p:txBody>
-      </p:sp>
-      <p:sp>
-        <p:nvSpPr>
-          <p:cNvPr id="22" name="Text 18"/>
-          <p:cNvSpPr txBox="1"/>
-          <p:nvPr/>
-        </p:nvSpPr>
-        <p:spPr>
-          <a:xfrm>
-            <a:off x="777240" y="5852160"/>
-            <a:ext cx="10637215" cy="274320"/>
-          </a:xfrm>
-          <a:prstGeom prst="rect">
-            <a:avLst/>
-          </a:prstGeom>
-          <a:noFill/>
-          <a:ln/>
-        </p:spPr>
-        <p:txBody>
-          <a:bodyPr wrap="square" lIns="0" tIns="0" rIns="0" bIns="0" rtlCol="0" anchor="t"/>
-          <a:lstStyle/>
-          <a:p>
-            <a:pPr indent="0" marL="0">
-              <a:buNone/>
-            </a:pPr>
-            <a:r>
-              <a:rPr lang="en-US" sz="1150" dirty="0">
-                <a:solidFill>
-                  <a:srgbClr val="2B2D30"/>
-                </a:solidFill>
-                <a:latin typeface="Montserrat SemiBold" pitchFamily="34" charset="0"/>
-                <a:ea typeface="Montserrat SemiBold" pitchFamily="34" charset="-122"/>
-                <a:cs typeface="Montserrat SemiBold" pitchFamily="34" charset="-120"/>
-              </a:rPr>
-              <a:t>Zero coverage loss</a:t>
+              <a:t>Nothing was skipped. </a:t>
             </a:r>
             <a:pPr indent="0" marL="0">
               <a:buNone/>
@@ -14395,7 +14676,7 @@
                 <a:ea typeface="Montserrat" pitchFamily="34" charset="-122"/>
                 <a:cs typeface="Montserrat" pitchFamily="34" charset="-120"/>
               </a:rPr>
-              <a:t>  —  verified across all 2,658 host-and-product combinations, not a sample.</a:t>
+              <a:t> Checked across all 2,658 machine-and-product combinations, not a sample.</a:t>
             </a:r>
             <a:endParaRPr lang="en-US" sz="1150" dirty="0"/>
           </a:p>

--- a/out/Internship_Exit_Presentation_Stewart.pptx
+++ b/out/Internship_Exit_Presentation_Stewart.pptx
@@ -28,9 +28,10 @@
     <p:sldId id="276" r:id="rId22"/>
     <p:sldId id="277" r:id="rId23"/>
     <p:sldId id="278" r:id="rId24"/>
+    <p:sldId id="279" r:id="rId25"/>
   </p:sldIdLst>
   <p:notesMasterIdLst>
-    <p:notesMasterId r:id="rId25"/>
+    <p:notesMasterId r:id="rId26"/>
   </p:notesMasterIdLst>
   <p:sldSz cx="12191695" cy="6858000"/>
   <p:notesSz cx="6858000" cy="12191695"/>
@@ -1868,6 +1869,94 @@
             <a:fld id="{F7021451-1387-4CA6-816F-3879F97B5CBC}" type="slidenum">
               <a:rPr lang="en-US"/>
               <a:t>23</a:t>
+            </a:fld>
+            <a:endParaRPr lang="en-US"/>
+          </a:p>
+        </p:txBody>
+      </p:sp>
+    </p:spTree>
+    <p:extLst>
+      <p:ext uri="{BB962C8B-B14F-4D97-AF65-F5344CB8AC3E}">
+        <p14:creationId xmlns:p14="http://schemas.microsoft.com/office/powerpoint/2010/main" val="1024086991"/>
+      </p:ext>
+    </p:extLst>
+  </p:cSld>
+  <p:clrMapOvr>
+    <a:masterClrMapping/>
+  </p:clrMapOvr>
+</p:notes>
+</file>
+
+<file path=ppt/notesSlides/notesSlide24.xml><?xml version="1.0" encoding="utf-8"?>
+<p:notes xmlns:a="http://schemas.openxmlformats.org/drawingml/2006/main" xmlns:r="http://schemas.openxmlformats.org/officeDocument/2006/relationships" xmlns:p="http://schemas.openxmlformats.org/presentationml/2006/main">
+  <p:cSld>
+    <p:spTree>
+      <p:nvGrpSpPr>
+        <p:cNvPr id="1" name=""/>
+        <p:cNvGrpSpPr/>
+        <p:nvPr/>
+      </p:nvGrpSpPr>
+      <p:grpSpPr>
+        <a:xfrm>
+          <a:off x="0" y="0"/>
+          <a:ext cx="0" cy="0"/>
+          <a:chOff x="0" y="0"/>
+          <a:chExt cx="0" cy="0"/>
+        </a:xfrm>
+      </p:grpSpPr>
+      <p:sp>
+        <p:nvSpPr>
+          <p:cNvPr id="2" name="Slide Image Placeholder 1"/>
+          <p:cNvSpPr>
+            <a:spLocks noGrp="1" noRot="1" noChangeAspect="1"/>
+          </p:cNvSpPr>
+          <p:nvPr>
+            <p:ph type="sldImg"/>
+          </p:nvPr>
+        </p:nvSpPr>
+        <p:spPr/>
+      </p:sp>
+      <p:sp>
+        <p:nvSpPr>
+          <p:cNvPr id="3" name="Notes Placeholder 2"/>
+          <p:cNvSpPr>
+            <a:spLocks noGrp="1"/>
+          </p:cNvSpPr>
+          <p:nvPr>
+            <p:ph type="body" idx="1"/>
+          </p:nvPr>
+        </p:nvSpPr>
+        <p:spPr/>
+        <p:txBody>
+          <a:bodyPr/>
+          <a:lstStyle/>
+          <a:p>
+            <a:r>
+              <a:rPr lang="en-US" dirty="0"/>
+              <a:t/>
+            </a:r>
+            <a:endParaRPr lang="en-US" dirty="0"/>
+          </a:p>
+        </p:txBody>
+      </p:sp>
+      <p:sp>
+        <p:nvSpPr>
+          <p:cNvPr id="4" name="Slide Number Placeholder 3"/>
+          <p:cNvSpPr>
+            <a:spLocks noGrp="1"/>
+          </p:cNvSpPr>
+          <p:nvPr>
+            <p:ph type="sldNum" sz="quarter" idx="10"/>
+          </p:nvPr>
+        </p:nvSpPr>
+        <p:spPr/>
+        <p:txBody>
+          <a:bodyPr/>
+          <a:lstStyle/>
+          <a:p>
+            <a:fld id="{F7021451-1387-4CA6-816F-3879F97B5CBC}" type="slidenum">
+              <a:rPr lang="en-US"/>
+              <a:t>24</a:t>
             </a:fld>
             <a:endParaRPr lang="en-US"/>
           </a:p>
@@ -15664,6 +15753,1225 @@
 <file path=ppt/slides/slide23.xml><?xml version="1.0" encoding="utf-8"?>
 <p:sld xmlns:a="http://schemas.openxmlformats.org/drawingml/2006/main" xmlns:r="http://schemas.openxmlformats.org/officeDocument/2006/relationships" xmlns:p="http://schemas.openxmlformats.org/presentationml/2006/main">
   <p:cSld name="Slide 23">
+    <p:bg>
+      <p:bgPr>
+        <a:solidFill>
+          <a:srgbClr val="FFFFFF"/>
+        </a:solidFill>
+      </p:bgPr>
+    </p:bg>
+    <p:spTree>
+      <p:nvGrpSpPr>
+        <p:cNvPr id="1" name=""/>
+        <p:cNvGrpSpPr/>
+        <p:nvPr/>
+      </p:nvGrpSpPr>
+      <p:grpSpPr>
+        <a:xfrm>
+          <a:off x="0" y="0"/>
+          <a:ext cx="0" cy="0"/>
+          <a:chOff x="0" y="0"/>
+          <a:chExt cx="0" cy="0"/>
+        </a:xfrm>
+      </p:grpSpPr>
+      <p:pic>
+        <p:nvPicPr>
+          <p:cNvPr id="2" name="Image 0" descr="/home/user/ai/assets/gen/logo-red.png">    </p:cNvPr>
+          <p:cNvPicPr>
+            <a:picLocks noChangeAspect="1"/>
+          </p:cNvPicPr>
+          <p:nvPr/>
+        </p:nvPicPr>
+        <p:blipFill>
+          <a:blip r:embed="rId1"/>
+          <a:stretch>
+            <a:fillRect/>
+          </a:stretch>
+        </p:blipFill>
+        <p:spPr>
+          <a:xfrm>
+            <a:off x="9768535" y="457200"/>
+            <a:ext cx="1645920" cy="166053"/>
+          </a:xfrm>
+          <a:prstGeom prst="rect">
+            <a:avLst/>
+          </a:prstGeom>
+        </p:spPr>
+      </p:pic>
+      <p:sp>
+        <p:nvSpPr>
+          <p:cNvPr id="3" name="Text 0"/>
+          <p:cNvSpPr txBox="1"/>
+          <p:nvPr/>
+        </p:nvSpPr>
+        <p:spPr>
+          <a:xfrm>
+            <a:off x="777240" y="658368"/>
+            <a:ext cx="7315200" cy="219456"/>
+          </a:xfrm>
+          <a:prstGeom prst="rect">
+            <a:avLst/>
+          </a:prstGeom>
+          <a:noFill/>
+          <a:ln/>
+        </p:spPr>
+        <p:txBody>
+          <a:bodyPr wrap="square" lIns="0" tIns="0" rIns="0" bIns="0" rtlCol="0" anchor="t"/>
+          <a:lstStyle/>
+          <a:p>
+            <a:pPr indent="0" marL="0">
+              <a:buNone/>
+            </a:pPr>
+            <a:r>
+              <a:rPr lang="en-US" sz="1000" spc="220" kern="0" dirty="0">
+                <a:solidFill>
+                  <a:srgbClr val="942838"/>
+                </a:solidFill>
+                <a:latin typeface="Montserrat SemiBold" pitchFamily="34" charset="0"/>
+                <a:ea typeface="Montserrat SemiBold" pitchFamily="34" charset="-122"/>
+                <a:cs typeface="Montserrat SemiBold" pitchFamily="34" charset="-120"/>
+              </a:rPr>
+              <a:t>SUMMARY</a:t>
+            </a:r>
+            <a:endParaRPr lang="en-US" sz="1000" dirty="0"/>
+          </a:p>
+        </p:txBody>
+      </p:sp>
+      <p:sp>
+        <p:nvSpPr>
+          <p:cNvPr id="4" name="Text 1"/>
+          <p:cNvSpPr txBox="1"/>
+          <p:nvPr/>
+        </p:nvSpPr>
+        <p:spPr>
+          <a:xfrm>
+            <a:off x="777240" y="932688"/>
+            <a:ext cx="10515600" cy="868680"/>
+          </a:xfrm>
+          <a:prstGeom prst="rect">
+            <a:avLst/>
+          </a:prstGeom>
+          <a:noFill/>
+          <a:ln/>
+        </p:spPr>
+        <p:txBody>
+          <a:bodyPr wrap="square" lIns="0" tIns="0" rIns="0" bIns="0" rtlCol="0" anchor="t"/>
+          <a:lstStyle/>
+          <a:p>
+            <a:pPr indent="0" marL="0">
+              <a:lnSpc>
+                <a:spcPct val="98000"/>
+              </a:lnSpc>
+              <a:buNone/>
+            </a:pPr>
+            <a:r>
+              <a:rPr lang="en-US" sz="2900" spc="-50" kern="0" dirty="0">
+                <a:solidFill>
+                  <a:srgbClr val="2B2D30"/>
+                </a:solidFill>
+                <a:latin typeface="Montserrat ExtraBold" pitchFamily="34" charset="0"/>
+                <a:ea typeface="Montserrat ExtraBold" pitchFamily="34" charset="-122"/>
+                <a:cs typeface="Montserrat ExtraBold" pitchFamily="34" charset="-120"/>
+              </a:rPr>
+              <a:t>What this means for Stewart</a:t>
+            </a:r>
+            <a:endParaRPr lang="en-US" sz="2900" dirty="0"/>
+          </a:p>
+        </p:txBody>
+      </p:sp>
+      <p:sp>
+        <p:nvSpPr>
+          <p:cNvPr id="5" name="Shape 2"/>
+          <p:cNvSpPr/>
+          <p:nvPr/>
+        </p:nvSpPr>
+        <p:spPr>
+          <a:xfrm>
+            <a:off x="777240" y="1700784"/>
+            <a:ext cx="566928" cy="50292"/>
+          </a:xfrm>
+          <a:prstGeom prst="rect">
+            <a:avLst/>
+          </a:prstGeom>
+          <a:solidFill>
+            <a:srgbClr val="942838"/>
+          </a:solidFill>
+          <a:ln/>
+        </p:spPr>
+      </p:sp>
+      <p:sp>
+        <p:nvSpPr>
+          <p:cNvPr id="6" name="Shape 3"/>
+          <p:cNvSpPr/>
+          <p:nvPr/>
+        </p:nvSpPr>
+        <p:spPr>
+          <a:xfrm>
+            <a:off x="777240" y="6181344"/>
+            <a:ext cx="10637215" cy="10973"/>
+          </a:xfrm>
+          <a:prstGeom prst="rect">
+            <a:avLst/>
+          </a:prstGeom>
+          <a:solidFill>
+            <a:srgbClr val="E6E4E2"/>
+          </a:solidFill>
+          <a:ln/>
+        </p:spPr>
+      </p:sp>
+      <p:sp>
+        <p:nvSpPr>
+          <p:cNvPr id="7" name="Text 4"/>
+          <p:cNvSpPr txBox="1"/>
+          <p:nvPr/>
+        </p:nvSpPr>
+        <p:spPr>
+          <a:xfrm>
+            <a:off x="777240" y="6327648"/>
+            <a:ext cx="7315200" cy="201168"/>
+          </a:xfrm>
+          <a:prstGeom prst="rect">
+            <a:avLst/>
+          </a:prstGeom>
+          <a:noFill/>
+          <a:ln/>
+        </p:spPr>
+        <p:txBody>
+          <a:bodyPr wrap="square" lIns="0" tIns="0" rIns="0" bIns="0" rtlCol="0" anchor="t"/>
+          <a:lstStyle/>
+          <a:p>
+            <a:pPr indent="0" marL="0">
+              <a:buNone/>
+            </a:pPr>
+            <a:r>
+              <a:rPr lang="en-US" sz="850" spc="140" kern="0" dirty="0">
+                <a:solidFill>
+                  <a:srgbClr val="6E7175"/>
+                </a:solidFill>
+                <a:latin typeface="Montserrat SemiBold" pitchFamily="34" charset="0"/>
+                <a:ea typeface="Montserrat SemiBold" pitchFamily="34" charset="-122"/>
+                <a:cs typeface="Montserrat SemiBold" pitchFamily="34" charset="-120"/>
+              </a:rPr>
+              <a:t>SUMMARY</a:t>
+            </a:r>
+            <a:endParaRPr lang="en-US" sz="850" dirty="0"/>
+          </a:p>
+        </p:txBody>
+      </p:sp>
+      <p:sp>
+        <p:nvSpPr>
+          <p:cNvPr id="8" name="Text 5"/>
+          <p:cNvSpPr txBox="1"/>
+          <p:nvPr/>
+        </p:nvSpPr>
+        <p:spPr>
+          <a:xfrm>
+            <a:off x="10317175" y="6327648"/>
+            <a:ext cx="1097280" cy="201168"/>
+          </a:xfrm>
+          <a:prstGeom prst="rect">
+            <a:avLst/>
+          </a:prstGeom>
+          <a:noFill/>
+          <a:ln/>
+        </p:spPr>
+        <p:txBody>
+          <a:bodyPr wrap="square" lIns="0" tIns="0" rIns="0" bIns="0" rtlCol="0" anchor="t"/>
+          <a:lstStyle/>
+          <a:p>
+            <a:pPr algn="r" indent="0" marL="0">
+              <a:buNone/>
+            </a:pPr>
+            <a:r>
+              <a:rPr lang="en-US" sz="850" spc="140" kern="0" dirty="0">
+                <a:solidFill>
+                  <a:srgbClr val="6E7175"/>
+                </a:solidFill>
+                <a:latin typeface="Montserrat SemiBold" pitchFamily="34" charset="0"/>
+                <a:ea typeface="Montserrat SemiBold" pitchFamily="34" charset="-122"/>
+                <a:cs typeface="Montserrat SemiBold" pitchFamily="34" charset="-120"/>
+              </a:rPr>
+              <a:t>23</a:t>
+            </a:r>
+            <a:endParaRPr lang="en-US" sz="850" dirty="0"/>
+          </a:p>
+        </p:txBody>
+      </p:sp>
+      <p:sp>
+        <p:nvSpPr>
+          <p:cNvPr id="9" name="Text 6"/>
+          <p:cNvSpPr txBox="1"/>
+          <p:nvPr/>
+        </p:nvSpPr>
+        <p:spPr>
+          <a:xfrm>
+            <a:off x="777240" y="1956816"/>
+            <a:ext cx="10241280" cy="310896"/>
+          </a:xfrm>
+          <a:prstGeom prst="rect">
+            <a:avLst/>
+          </a:prstGeom>
+          <a:noFill/>
+          <a:ln/>
+        </p:spPr>
+        <p:txBody>
+          <a:bodyPr wrap="square" lIns="0" tIns="0" rIns="0" bIns="0" rtlCol="0" anchor="t"/>
+          <a:lstStyle/>
+          <a:p>
+            <a:pPr indent="0" marL="0">
+              <a:buNone/>
+            </a:pPr>
+            <a:r>
+              <a:rPr lang="en-US" sz="1400" dirty="0">
+                <a:solidFill>
+                  <a:srgbClr val="6E7175"/>
+                </a:solidFill>
+                <a:latin typeface="Montserrat Medium" pitchFamily="34" charset="0"/>
+                <a:ea typeface="Montserrat Medium" pitchFamily="34" charset="-122"/>
+                <a:cs typeface="Montserrat Medium" pitchFamily="34" charset="-120"/>
+              </a:rPr>
+              <a:t>Three gaps going in. Where each one stands now.</a:t>
+            </a:r>
+            <a:endParaRPr lang="en-US" sz="1400" dirty="0"/>
+          </a:p>
+        </p:txBody>
+      </p:sp>
+      <p:sp>
+        <p:nvSpPr>
+          <p:cNvPr id="10" name="Text 7"/>
+          <p:cNvSpPr txBox="1"/>
+          <p:nvPr/>
+        </p:nvSpPr>
+        <p:spPr>
+          <a:xfrm>
+            <a:off x="777240" y="2505456"/>
+            <a:ext cx="640080" cy="365760"/>
+          </a:xfrm>
+          <a:prstGeom prst="rect">
+            <a:avLst/>
+          </a:prstGeom>
+          <a:noFill/>
+          <a:ln/>
+        </p:spPr>
+        <p:txBody>
+          <a:bodyPr wrap="square" lIns="0" tIns="0" rIns="0" bIns="0" rtlCol="0" anchor="t"/>
+          <a:lstStyle/>
+          <a:p>
+            <a:pPr indent="0" marL="0">
+              <a:buNone/>
+            </a:pPr>
+            <a:r>
+              <a:rPr lang="en-US" sz="2400" spc="-40" kern="0" dirty="0">
+                <a:solidFill>
+                  <a:srgbClr val="DFBEC4"/>
+                </a:solidFill>
+                <a:latin typeface="Montserrat ExtraBold" pitchFamily="34" charset="0"/>
+                <a:ea typeface="Montserrat ExtraBold" pitchFamily="34" charset="-122"/>
+                <a:cs typeface="Montserrat ExtraBold" pitchFamily="34" charset="-120"/>
+              </a:rPr>
+              <a:t>01</a:t>
+            </a:r>
+            <a:endParaRPr lang="en-US" sz="2400" dirty="0"/>
+          </a:p>
+        </p:txBody>
+      </p:sp>
+      <p:sp>
+        <p:nvSpPr>
+          <p:cNvPr id="11" name="Text 8"/>
+          <p:cNvSpPr txBox="1"/>
+          <p:nvPr/>
+        </p:nvSpPr>
+        <p:spPr>
+          <a:xfrm>
+            <a:off x="1527048" y="2450592"/>
+            <a:ext cx="1828800" cy="182880"/>
+          </a:xfrm>
+          <a:prstGeom prst="rect">
+            <a:avLst/>
+          </a:prstGeom>
+          <a:noFill/>
+          <a:ln/>
+        </p:spPr>
+        <p:txBody>
+          <a:bodyPr wrap="square" lIns="0" tIns="0" rIns="0" bIns="0" rtlCol="0" anchor="t"/>
+          <a:lstStyle/>
+          <a:p>
+            <a:pPr indent="0" marL="0">
+              <a:buNone/>
+            </a:pPr>
+            <a:r>
+              <a:rPr lang="en-US" sz="850" spc="140" kern="0" dirty="0">
+                <a:solidFill>
+                  <a:srgbClr val="6E7175"/>
+                </a:solidFill>
+                <a:latin typeface="Montserrat SemiBold" pitchFamily="34" charset="0"/>
+                <a:ea typeface="Montserrat SemiBold" pitchFamily="34" charset="-122"/>
+                <a:cs typeface="Montserrat SemiBold" pitchFamily="34" charset="-120"/>
+              </a:rPr>
+              <a:t>WAS</a:t>
+            </a:r>
+            <a:endParaRPr lang="en-US" sz="850" dirty="0"/>
+          </a:p>
+        </p:txBody>
+      </p:sp>
+      <p:sp>
+        <p:nvSpPr>
+          <p:cNvPr id="12" name="Text 9"/>
+          <p:cNvSpPr txBox="1"/>
+          <p:nvPr/>
+        </p:nvSpPr>
+        <p:spPr>
+          <a:xfrm>
+            <a:off x="1527048" y="2670048"/>
+            <a:ext cx="3310128" cy="603504"/>
+          </a:xfrm>
+          <a:prstGeom prst="rect">
+            <a:avLst/>
+          </a:prstGeom>
+          <a:noFill/>
+          <a:ln/>
+        </p:spPr>
+        <p:txBody>
+          <a:bodyPr wrap="square" lIns="0" tIns="0" rIns="0" bIns="0" rtlCol="0" anchor="t"/>
+          <a:lstStyle/>
+          <a:p>
+            <a:pPr indent="0" marL="0">
+              <a:lnSpc>
+                <a:spcPct val="122000"/>
+              </a:lnSpc>
+              <a:buNone/>
+            </a:pPr>
+            <a:r>
+              <a:rPr lang="en-US" sz="1100" dirty="0">
+                <a:solidFill>
+                  <a:srgbClr val="43464A"/>
+                </a:solidFill>
+                <a:latin typeface="Montserrat" pitchFamily="34" charset="0"/>
+                <a:ea typeface="Montserrat" pitchFamily="34" charset="-122"/>
+                <a:cs typeface="Montserrat" pitchFamily="34" charset="-120"/>
+              </a:rPr>
+              <a:t>Machines could ship without their security baseline.</a:t>
+            </a:r>
+            <a:endParaRPr lang="en-US" sz="1100" dirty="0"/>
+          </a:p>
+        </p:txBody>
+      </p:sp>
+      <p:sp>
+        <p:nvSpPr>
+          <p:cNvPr id="13" name="Text 10"/>
+          <p:cNvSpPr txBox="1"/>
+          <p:nvPr/>
+        </p:nvSpPr>
+        <p:spPr>
+          <a:xfrm>
+            <a:off x="4882896" y="2615184"/>
+            <a:ext cx="365760" cy="420624"/>
+          </a:xfrm>
+          <a:prstGeom prst="rect">
+            <a:avLst/>
+          </a:prstGeom>
+          <a:noFill/>
+          <a:ln/>
+        </p:spPr>
+        <p:txBody>
+          <a:bodyPr wrap="square" lIns="0" tIns="0" rIns="0" bIns="0" rtlCol="0" anchor="ctr"/>
+          <a:lstStyle/>
+          <a:p>
+            <a:pPr algn="ctr" indent="0" marL="0">
+              <a:buNone/>
+            </a:pPr>
+            <a:r>
+              <a:rPr lang="en-US" sz="2600" b="1" dirty="0">
+                <a:solidFill>
+                  <a:srgbClr val="C9C6C4"/>
+                </a:solidFill>
+                <a:latin typeface="Montserrat" pitchFamily="34" charset="0"/>
+                <a:ea typeface="Montserrat" pitchFamily="34" charset="-122"/>
+                <a:cs typeface="Montserrat" pitchFamily="34" charset="-120"/>
+              </a:rPr>
+              <a:t>›</a:t>
+            </a:r>
+            <a:endParaRPr lang="en-US" sz="2600" dirty="0"/>
+          </a:p>
+        </p:txBody>
+      </p:sp>
+      <p:sp>
+        <p:nvSpPr>
+          <p:cNvPr id="14" name="Shape 11"/>
+          <p:cNvSpPr/>
+          <p:nvPr/>
+        </p:nvSpPr>
+        <p:spPr>
+          <a:xfrm>
+            <a:off x="5486400" y="2395728"/>
+            <a:ext cx="5928055" cy="914400"/>
+          </a:xfrm>
+          <a:prstGeom prst="roundRect">
+            <a:avLst>
+              <a:gd name="adj" fmla="val 5000"/>
+            </a:avLst>
+          </a:prstGeom>
+          <a:solidFill>
+            <a:srgbClr val="F6EEF0"/>
+          </a:solidFill>
+          <a:ln/>
+        </p:spPr>
+      </p:sp>
+      <p:sp>
+        <p:nvSpPr>
+          <p:cNvPr id="15" name="Shape 12"/>
+          <p:cNvSpPr/>
+          <p:nvPr/>
+        </p:nvSpPr>
+        <p:spPr>
+          <a:xfrm>
+            <a:off x="5486400" y="2395728"/>
+            <a:ext cx="45720" cy="914400"/>
+          </a:xfrm>
+          <a:prstGeom prst="rect">
+            <a:avLst/>
+          </a:prstGeom>
+          <a:solidFill>
+            <a:srgbClr val="942838"/>
+          </a:solidFill>
+          <a:ln/>
+        </p:spPr>
+      </p:sp>
+      <p:sp>
+        <p:nvSpPr>
+          <p:cNvPr id="16" name="Text 13"/>
+          <p:cNvSpPr txBox="1"/>
+          <p:nvPr/>
+        </p:nvSpPr>
+        <p:spPr>
+          <a:xfrm>
+            <a:off x="5724144" y="2523744"/>
+            <a:ext cx="1828800" cy="182880"/>
+          </a:xfrm>
+          <a:prstGeom prst="rect">
+            <a:avLst/>
+          </a:prstGeom>
+          <a:noFill/>
+          <a:ln/>
+        </p:spPr>
+        <p:txBody>
+          <a:bodyPr wrap="square" lIns="0" tIns="0" rIns="0" bIns="0" rtlCol="0" anchor="t"/>
+          <a:lstStyle/>
+          <a:p>
+            <a:pPr indent="0" marL="0">
+              <a:buNone/>
+            </a:pPr>
+            <a:r>
+              <a:rPr lang="en-US" sz="850" spc="140" kern="0" dirty="0">
+                <a:solidFill>
+                  <a:srgbClr val="942838"/>
+                </a:solidFill>
+                <a:latin typeface="Montserrat SemiBold" pitchFamily="34" charset="0"/>
+                <a:ea typeface="Montserrat SemiBold" pitchFamily="34" charset="-122"/>
+                <a:cs typeface="Montserrat SemiBold" pitchFamily="34" charset="-120"/>
+              </a:rPr>
+              <a:t>NOW</a:t>
+            </a:r>
+            <a:endParaRPr lang="en-US" sz="850" dirty="0"/>
+          </a:p>
+        </p:txBody>
+      </p:sp>
+      <p:sp>
+        <p:nvSpPr>
+          <p:cNvPr id="17" name="Text 14"/>
+          <p:cNvSpPr txBox="1"/>
+          <p:nvPr/>
+        </p:nvSpPr>
+        <p:spPr>
+          <a:xfrm>
+            <a:off x="5724144" y="2743200"/>
+            <a:ext cx="5452567" cy="548640"/>
+          </a:xfrm>
+          <a:prstGeom prst="rect">
+            <a:avLst/>
+          </a:prstGeom>
+          <a:noFill/>
+          <a:ln/>
+        </p:spPr>
+        <p:txBody>
+          <a:bodyPr wrap="square" lIns="0" tIns="0" rIns="0" bIns="0" rtlCol="0" anchor="t"/>
+          <a:lstStyle/>
+          <a:p>
+            <a:pPr indent="0" marL="0">
+              <a:lnSpc>
+                <a:spcPct val="122000"/>
+              </a:lnSpc>
+              <a:buNone/>
+            </a:pPr>
+            <a:r>
+              <a:rPr lang="en-US" sz="1150" dirty="0">
+                <a:solidFill>
+                  <a:srgbClr val="2B2D30"/>
+                </a:solidFill>
+                <a:latin typeface="Montserrat SemiBold" pitchFamily="34" charset="0"/>
+                <a:ea typeface="Montserrat SemiBold" pitchFamily="34" charset="-122"/>
+                <a:cs typeface="Montserrat SemiBold" pitchFamily="34" charset="-120"/>
+              </a:rPr>
+              <a:t>Nine required tools named, owners assigned, and a written framework staged for Q4 sign-off.</a:t>
+            </a:r>
+            <a:endParaRPr lang="en-US" sz="1150" dirty="0"/>
+          </a:p>
+        </p:txBody>
+      </p:sp>
+      <p:sp>
+        <p:nvSpPr>
+          <p:cNvPr id="18" name="Shape 15"/>
+          <p:cNvSpPr/>
+          <p:nvPr/>
+        </p:nvSpPr>
+        <p:spPr>
+          <a:xfrm>
+            <a:off x="777240" y="3419856"/>
+            <a:ext cx="10637215" cy="10973"/>
+          </a:xfrm>
+          <a:prstGeom prst="rect">
+            <a:avLst/>
+          </a:prstGeom>
+          <a:solidFill>
+            <a:srgbClr val="E6E4E2"/>
+          </a:solidFill>
+          <a:ln/>
+        </p:spPr>
+      </p:sp>
+      <p:sp>
+        <p:nvSpPr>
+          <p:cNvPr id="19" name="Text 16"/>
+          <p:cNvSpPr txBox="1"/>
+          <p:nvPr/>
+        </p:nvSpPr>
+        <p:spPr>
+          <a:xfrm>
+            <a:off x="777240" y="3602736"/>
+            <a:ext cx="640080" cy="365760"/>
+          </a:xfrm>
+          <a:prstGeom prst="rect">
+            <a:avLst/>
+          </a:prstGeom>
+          <a:noFill/>
+          <a:ln/>
+        </p:spPr>
+        <p:txBody>
+          <a:bodyPr wrap="square" lIns="0" tIns="0" rIns="0" bIns="0" rtlCol="0" anchor="t"/>
+          <a:lstStyle/>
+          <a:p>
+            <a:pPr indent="0" marL="0">
+              <a:buNone/>
+            </a:pPr>
+            <a:r>
+              <a:rPr lang="en-US" sz="2400" spc="-40" kern="0" dirty="0">
+                <a:solidFill>
+                  <a:srgbClr val="DFBEC4"/>
+                </a:solidFill>
+                <a:latin typeface="Montserrat ExtraBold" pitchFamily="34" charset="0"/>
+                <a:ea typeface="Montserrat ExtraBold" pitchFamily="34" charset="-122"/>
+                <a:cs typeface="Montserrat ExtraBold" pitchFamily="34" charset="-120"/>
+              </a:rPr>
+              <a:t>02</a:t>
+            </a:r>
+            <a:endParaRPr lang="en-US" sz="2400" dirty="0"/>
+          </a:p>
+        </p:txBody>
+      </p:sp>
+      <p:sp>
+        <p:nvSpPr>
+          <p:cNvPr id="20" name="Text 17"/>
+          <p:cNvSpPr txBox="1"/>
+          <p:nvPr/>
+        </p:nvSpPr>
+        <p:spPr>
+          <a:xfrm>
+            <a:off x="1527048" y="3547872"/>
+            <a:ext cx="1828800" cy="182880"/>
+          </a:xfrm>
+          <a:prstGeom prst="rect">
+            <a:avLst/>
+          </a:prstGeom>
+          <a:noFill/>
+          <a:ln/>
+        </p:spPr>
+        <p:txBody>
+          <a:bodyPr wrap="square" lIns="0" tIns="0" rIns="0" bIns="0" rtlCol="0" anchor="t"/>
+          <a:lstStyle/>
+          <a:p>
+            <a:pPr indent="0" marL="0">
+              <a:buNone/>
+            </a:pPr>
+            <a:r>
+              <a:rPr lang="en-US" sz="850" spc="140" kern="0" dirty="0">
+                <a:solidFill>
+                  <a:srgbClr val="6E7175"/>
+                </a:solidFill>
+                <a:latin typeface="Montserrat SemiBold" pitchFamily="34" charset="0"/>
+                <a:ea typeface="Montserrat SemiBold" pitchFamily="34" charset="-122"/>
+                <a:cs typeface="Montserrat SemiBold" pitchFamily="34" charset="-120"/>
+              </a:rPr>
+              <a:t>WAS</a:t>
+            </a:r>
+            <a:endParaRPr lang="en-US" sz="850" dirty="0"/>
+          </a:p>
+        </p:txBody>
+      </p:sp>
+      <p:sp>
+        <p:nvSpPr>
+          <p:cNvPr id="21" name="Text 18"/>
+          <p:cNvSpPr txBox="1"/>
+          <p:nvPr/>
+        </p:nvSpPr>
+        <p:spPr>
+          <a:xfrm>
+            <a:off x="1527048" y="3767328"/>
+            <a:ext cx="3310128" cy="603504"/>
+          </a:xfrm>
+          <a:prstGeom prst="rect">
+            <a:avLst/>
+          </a:prstGeom>
+          <a:noFill/>
+          <a:ln/>
+        </p:spPr>
+        <p:txBody>
+          <a:bodyPr wrap="square" lIns="0" tIns="0" rIns="0" bIns="0" rtlCol="0" anchor="t"/>
+          <a:lstStyle/>
+          <a:p>
+            <a:pPr indent="0" marL="0">
+              <a:lnSpc>
+                <a:spcPct val="122000"/>
+              </a:lnSpc>
+              <a:buNone/>
+            </a:pPr>
+            <a:r>
+              <a:rPr lang="en-US" sz="1100" dirty="0">
+                <a:solidFill>
+                  <a:srgbClr val="43464A"/>
+                </a:solidFill>
+                <a:latin typeface="Montserrat" pitchFamily="34" charset="0"/>
+                <a:ea typeface="Montserrat" pitchFamily="34" charset="-122"/>
+                <a:cs typeface="Montserrat" pitchFamily="34" charset="-120"/>
+              </a:rPr>
+              <a:t>Attackers hide malicious code inside the open-source packages we depend on.</a:t>
+            </a:r>
+            <a:endParaRPr lang="en-US" sz="1100" dirty="0"/>
+          </a:p>
+        </p:txBody>
+      </p:sp>
+      <p:sp>
+        <p:nvSpPr>
+          <p:cNvPr id="22" name="Text 19"/>
+          <p:cNvSpPr txBox="1"/>
+          <p:nvPr/>
+        </p:nvSpPr>
+        <p:spPr>
+          <a:xfrm>
+            <a:off x="4882896" y="3712464"/>
+            <a:ext cx="365760" cy="420624"/>
+          </a:xfrm>
+          <a:prstGeom prst="rect">
+            <a:avLst/>
+          </a:prstGeom>
+          <a:noFill/>
+          <a:ln/>
+        </p:spPr>
+        <p:txBody>
+          <a:bodyPr wrap="square" lIns="0" tIns="0" rIns="0" bIns="0" rtlCol="0" anchor="ctr"/>
+          <a:lstStyle/>
+          <a:p>
+            <a:pPr algn="ctr" indent="0" marL="0">
+              <a:buNone/>
+            </a:pPr>
+            <a:r>
+              <a:rPr lang="en-US" sz="2600" b="1" dirty="0">
+                <a:solidFill>
+                  <a:srgbClr val="C9C6C4"/>
+                </a:solidFill>
+                <a:latin typeface="Montserrat" pitchFamily="34" charset="0"/>
+                <a:ea typeface="Montserrat" pitchFamily="34" charset="-122"/>
+                <a:cs typeface="Montserrat" pitchFamily="34" charset="-120"/>
+              </a:rPr>
+              <a:t>›</a:t>
+            </a:r>
+            <a:endParaRPr lang="en-US" sz="2600" dirty="0"/>
+          </a:p>
+        </p:txBody>
+      </p:sp>
+      <p:sp>
+        <p:nvSpPr>
+          <p:cNvPr id="23" name="Shape 20"/>
+          <p:cNvSpPr/>
+          <p:nvPr/>
+        </p:nvSpPr>
+        <p:spPr>
+          <a:xfrm>
+            <a:off x="5486400" y="3493008"/>
+            <a:ext cx="5928055" cy="914400"/>
+          </a:xfrm>
+          <a:prstGeom prst="roundRect">
+            <a:avLst>
+              <a:gd name="adj" fmla="val 5000"/>
+            </a:avLst>
+          </a:prstGeom>
+          <a:solidFill>
+            <a:srgbClr val="F6EEF0"/>
+          </a:solidFill>
+          <a:ln/>
+        </p:spPr>
+      </p:sp>
+      <p:sp>
+        <p:nvSpPr>
+          <p:cNvPr id="24" name="Shape 21"/>
+          <p:cNvSpPr/>
+          <p:nvPr/>
+        </p:nvSpPr>
+        <p:spPr>
+          <a:xfrm>
+            <a:off x="5486400" y="3493008"/>
+            <a:ext cx="45720" cy="914400"/>
+          </a:xfrm>
+          <a:prstGeom prst="rect">
+            <a:avLst/>
+          </a:prstGeom>
+          <a:solidFill>
+            <a:srgbClr val="942838"/>
+          </a:solidFill>
+          <a:ln/>
+        </p:spPr>
+      </p:sp>
+      <p:sp>
+        <p:nvSpPr>
+          <p:cNvPr id="25" name="Text 22"/>
+          <p:cNvSpPr txBox="1"/>
+          <p:nvPr/>
+        </p:nvSpPr>
+        <p:spPr>
+          <a:xfrm>
+            <a:off x="5724144" y="3621024"/>
+            <a:ext cx="1828800" cy="182880"/>
+          </a:xfrm>
+          <a:prstGeom prst="rect">
+            <a:avLst/>
+          </a:prstGeom>
+          <a:noFill/>
+          <a:ln/>
+        </p:spPr>
+        <p:txBody>
+          <a:bodyPr wrap="square" lIns="0" tIns="0" rIns="0" bIns="0" rtlCol="0" anchor="t"/>
+          <a:lstStyle/>
+          <a:p>
+            <a:pPr indent="0" marL="0">
+              <a:buNone/>
+            </a:pPr>
+            <a:r>
+              <a:rPr lang="en-US" sz="850" spc="140" kern="0" dirty="0">
+                <a:solidFill>
+                  <a:srgbClr val="942838"/>
+                </a:solidFill>
+                <a:latin typeface="Montserrat SemiBold" pitchFamily="34" charset="0"/>
+                <a:ea typeface="Montserrat SemiBold" pitchFamily="34" charset="-122"/>
+                <a:cs typeface="Montserrat SemiBold" pitchFamily="34" charset="-120"/>
+              </a:rPr>
+              <a:t>NOW</a:t>
+            </a:r>
+            <a:endParaRPr lang="en-US" sz="850" dirty="0"/>
+          </a:p>
+        </p:txBody>
+      </p:sp>
+      <p:sp>
+        <p:nvSpPr>
+          <p:cNvPr id="26" name="Text 23"/>
+          <p:cNvSpPr txBox="1"/>
+          <p:nvPr/>
+        </p:nvSpPr>
+        <p:spPr>
+          <a:xfrm>
+            <a:off x="5724144" y="3840480"/>
+            <a:ext cx="5452567" cy="548640"/>
+          </a:xfrm>
+          <a:prstGeom prst="rect">
+            <a:avLst/>
+          </a:prstGeom>
+          <a:noFill/>
+          <a:ln/>
+        </p:spPr>
+        <p:txBody>
+          <a:bodyPr wrap="square" lIns="0" tIns="0" rIns="0" bIns="0" rtlCol="0" anchor="t"/>
+          <a:lstStyle/>
+          <a:p>
+            <a:pPr indent="0" marL="0">
+              <a:lnSpc>
+                <a:spcPct val="122000"/>
+              </a:lnSpc>
+              <a:buNone/>
+            </a:pPr>
+            <a:r>
+              <a:rPr lang="en-US" sz="1150" dirty="0">
+                <a:solidFill>
+                  <a:srgbClr val="2B2D30"/>
+                </a:solidFill>
+                <a:latin typeface="Montserrat SemiBold" pitchFamily="34" charset="0"/>
+                <a:ea typeface="Montserrat SemiBold" pitchFamily="34" charset="-122"/>
+                <a:cs typeface="Montserrat SemiBold" pitchFamily="34" charset="-120"/>
+              </a:rPr>
+              <a:t>AEGIS built and its safety rails tested — five stages, and 5,675 packages scanned in production by an earlier version.</a:t>
+            </a:r>
+            <a:endParaRPr lang="en-US" sz="1150" dirty="0"/>
+          </a:p>
+        </p:txBody>
+      </p:sp>
+      <p:sp>
+        <p:nvSpPr>
+          <p:cNvPr id="27" name="Shape 24"/>
+          <p:cNvSpPr/>
+          <p:nvPr/>
+        </p:nvSpPr>
+        <p:spPr>
+          <a:xfrm>
+            <a:off x="777240" y="4517136"/>
+            <a:ext cx="10637215" cy="10973"/>
+          </a:xfrm>
+          <a:prstGeom prst="rect">
+            <a:avLst/>
+          </a:prstGeom>
+          <a:solidFill>
+            <a:srgbClr val="E6E4E2"/>
+          </a:solidFill>
+          <a:ln/>
+        </p:spPr>
+      </p:sp>
+      <p:sp>
+        <p:nvSpPr>
+          <p:cNvPr id="28" name="Text 25"/>
+          <p:cNvSpPr txBox="1"/>
+          <p:nvPr/>
+        </p:nvSpPr>
+        <p:spPr>
+          <a:xfrm>
+            <a:off x="777240" y="4700016"/>
+            <a:ext cx="640080" cy="365760"/>
+          </a:xfrm>
+          <a:prstGeom prst="rect">
+            <a:avLst/>
+          </a:prstGeom>
+          <a:noFill/>
+          <a:ln/>
+        </p:spPr>
+        <p:txBody>
+          <a:bodyPr wrap="square" lIns="0" tIns="0" rIns="0" bIns="0" rtlCol="0" anchor="t"/>
+          <a:lstStyle/>
+          <a:p>
+            <a:pPr indent="0" marL="0">
+              <a:buNone/>
+            </a:pPr>
+            <a:r>
+              <a:rPr lang="en-US" sz="2400" spc="-40" kern="0" dirty="0">
+                <a:solidFill>
+                  <a:srgbClr val="DFBEC4"/>
+                </a:solidFill>
+                <a:latin typeface="Montserrat ExtraBold" pitchFamily="34" charset="0"/>
+                <a:ea typeface="Montserrat ExtraBold" pitchFamily="34" charset="-122"/>
+                <a:cs typeface="Montserrat ExtraBold" pitchFamily="34" charset="-120"/>
+              </a:rPr>
+              <a:t>03</a:t>
+            </a:r>
+            <a:endParaRPr lang="en-US" sz="2400" dirty="0"/>
+          </a:p>
+        </p:txBody>
+      </p:sp>
+      <p:sp>
+        <p:nvSpPr>
+          <p:cNvPr id="29" name="Text 26"/>
+          <p:cNvSpPr txBox="1"/>
+          <p:nvPr/>
+        </p:nvSpPr>
+        <p:spPr>
+          <a:xfrm>
+            <a:off x="1527048" y="4645152"/>
+            <a:ext cx="1828800" cy="182880"/>
+          </a:xfrm>
+          <a:prstGeom prst="rect">
+            <a:avLst/>
+          </a:prstGeom>
+          <a:noFill/>
+          <a:ln/>
+        </p:spPr>
+        <p:txBody>
+          <a:bodyPr wrap="square" lIns="0" tIns="0" rIns="0" bIns="0" rtlCol="0" anchor="t"/>
+          <a:lstStyle/>
+          <a:p>
+            <a:pPr indent="0" marL="0">
+              <a:buNone/>
+            </a:pPr>
+            <a:r>
+              <a:rPr lang="en-US" sz="850" spc="140" kern="0" dirty="0">
+                <a:solidFill>
+                  <a:srgbClr val="6E7175"/>
+                </a:solidFill>
+                <a:latin typeface="Montserrat SemiBold" pitchFamily="34" charset="0"/>
+                <a:ea typeface="Montserrat SemiBold" pitchFamily="34" charset="-122"/>
+                <a:cs typeface="Montserrat SemiBold" pitchFamily="34" charset="-120"/>
+              </a:rPr>
+              <a:t>WAS</a:t>
+            </a:r>
+            <a:endParaRPr lang="en-US" sz="850" dirty="0"/>
+          </a:p>
+        </p:txBody>
+      </p:sp>
+      <p:sp>
+        <p:nvSpPr>
+          <p:cNvPr id="30" name="Text 27"/>
+          <p:cNvSpPr txBox="1"/>
+          <p:nvPr/>
+        </p:nvSpPr>
+        <p:spPr>
+          <a:xfrm>
+            <a:off x="1527048" y="4864608"/>
+            <a:ext cx="3310128" cy="603504"/>
+          </a:xfrm>
+          <a:prstGeom prst="rect">
+            <a:avLst/>
+          </a:prstGeom>
+          <a:noFill/>
+          <a:ln/>
+        </p:spPr>
+        <p:txBody>
+          <a:bodyPr wrap="square" lIns="0" tIns="0" rIns="0" bIns="0" rtlCol="0" anchor="t"/>
+          <a:lstStyle/>
+          <a:p>
+            <a:pPr indent="0" marL="0">
+              <a:lnSpc>
+                <a:spcPct val="122000"/>
+              </a:lnSpc>
+              <a:buNone/>
+            </a:pPr>
+            <a:r>
+              <a:rPr lang="en-US" sz="1100" dirty="0">
+                <a:solidFill>
+                  <a:srgbClr val="43464A"/>
+                </a:solidFill>
+                <a:latin typeface="Montserrat" pitchFamily="34" charset="0"/>
+                <a:ea typeface="Montserrat" pitchFamily="34" charset="-122"/>
+                <a:cs typeface="Montserrat" pitchFamily="34" charset="-120"/>
+              </a:rPr>
+              <a:t>Matching every tracked flaw to its patch took about two days of analyst time.</a:t>
+            </a:r>
+            <a:endParaRPr lang="en-US" sz="1100" dirty="0"/>
+          </a:p>
+        </p:txBody>
+      </p:sp>
+      <p:sp>
+        <p:nvSpPr>
+          <p:cNvPr id="31" name="Text 28"/>
+          <p:cNvSpPr txBox="1"/>
+          <p:nvPr/>
+        </p:nvSpPr>
+        <p:spPr>
+          <a:xfrm>
+            <a:off x="4882896" y="4809744"/>
+            <a:ext cx="365760" cy="420624"/>
+          </a:xfrm>
+          <a:prstGeom prst="rect">
+            <a:avLst/>
+          </a:prstGeom>
+          <a:noFill/>
+          <a:ln/>
+        </p:spPr>
+        <p:txBody>
+          <a:bodyPr wrap="square" lIns="0" tIns="0" rIns="0" bIns="0" rtlCol="0" anchor="ctr"/>
+          <a:lstStyle/>
+          <a:p>
+            <a:pPr algn="ctr" indent="0" marL="0">
+              <a:buNone/>
+            </a:pPr>
+            <a:r>
+              <a:rPr lang="en-US" sz="2600" b="1" dirty="0">
+                <a:solidFill>
+                  <a:srgbClr val="C9C6C4"/>
+                </a:solidFill>
+                <a:latin typeface="Montserrat" pitchFamily="34" charset="0"/>
+                <a:ea typeface="Montserrat" pitchFamily="34" charset="-122"/>
+                <a:cs typeface="Montserrat" pitchFamily="34" charset="-120"/>
+              </a:rPr>
+              <a:t>›</a:t>
+            </a:r>
+            <a:endParaRPr lang="en-US" sz="2600" dirty="0"/>
+          </a:p>
+        </p:txBody>
+      </p:sp>
+      <p:sp>
+        <p:nvSpPr>
+          <p:cNvPr id="32" name="Shape 29"/>
+          <p:cNvSpPr/>
+          <p:nvPr/>
+        </p:nvSpPr>
+        <p:spPr>
+          <a:xfrm>
+            <a:off x="5486400" y="4590288"/>
+            <a:ext cx="5928055" cy="914400"/>
+          </a:xfrm>
+          <a:prstGeom prst="roundRect">
+            <a:avLst>
+              <a:gd name="adj" fmla="val 5000"/>
+            </a:avLst>
+          </a:prstGeom>
+          <a:solidFill>
+            <a:srgbClr val="F6EEF0"/>
+          </a:solidFill>
+          <a:ln/>
+        </p:spPr>
+      </p:sp>
+      <p:sp>
+        <p:nvSpPr>
+          <p:cNvPr id="33" name="Shape 30"/>
+          <p:cNvSpPr/>
+          <p:nvPr/>
+        </p:nvSpPr>
+        <p:spPr>
+          <a:xfrm>
+            <a:off x="5486400" y="4590288"/>
+            <a:ext cx="45720" cy="914400"/>
+          </a:xfrm>
+          <a:prstGeom prst="rect">
+            <a:avLst/>
+          </a:prstGeom>
+          <a:solidFill>
+            <a:srgbClr val="942838"/>
+          </a:solidFill>
+          <a:ln/>
+        </p:spPr>
+      </p:sp>
+      <p:sp>
+        <p:nvSpPr>
+          <p:cNvPr id="34" name="Text 31"/>
+          <p:cNvSpPr txBox="1"/>
+          <p:nvPr/>
+        </p:nvSpPr>
+        <p:spPr>
+          <a:xfrm>
+            <a:off x="5724144" y="4718304"/>
+            <a:ext cx="1828800" cy="182880"/>
+          </a:xfrm>
+          <a:prstGeom prst="rect">
+            <a:avLst/>
+          </a:prstGeom>
+          <a:noFill/>
+          <a:ln/>
+        </p:spPr>
+        <p:txBody>
+          <a:bodyPr wrap="square" lIns="0" tIns="0" rIns="0" bIns="0" rtlCol="0" anchor="t"/>
+          <a:lstStyle/>
+          <a:p>
+            <a:pPr indent="0" marL="0">
+              <a:buNone/>
+            </a:pPr>
+            <a:r>
+              <a:rPr lang="en-US" sz="850" spc="140" kern="0" dirty="0">
+                <a:solidFill>
+                  <a:srgbClr val="942838"/>
+                </a:solidFill>
+                <a:latin typeface="Montserrat SemiBold" pitchFamily="34" charset="0"/>
+                <a:ea typeface="Montserrat SemiBold" pitchFamily="34" charset="-122"/>
+                <a:cs typeface="Montserrat SemiBold" pitchFamily="34" charset="-120"/>
+              </a:rPr>
+              <a:t>NOW</a:t>
+            </a:r>
+            <a:endParaRPr lang="en-US" sz="850" dirty="0"/>
+          </a:p>
+        </p:txBody>
+      </p:sp>
+      <p:sp>
+        <p:nvSpPr>
+          <p:cNvPr id="35" name="Text 32"/>
+          <p:cNvSpPr txBox="1"/>
+          <p:nvPr/>
+        </p:nvSpPr>
+        <p:spPr>
+          <a:xfrm>
+            <a:off x="5724144" y="4937760"/>
+            <a:ext cx="5452567" cy="548640"/>
+          </a:xfrm>
+          <a:prstGeom prst="rect">
+            <a:avLst/>
+          </a:prstGeom>
+          <a:noFill/>
+          <a:ln/>
+        </p:spPr>
+        <p:txBody>
+          <a:bodyPr wrap="square" lIns="0" tIns="0" rIns="0" bIns="0" rtlCol="0" anchor="t"/>
+          <a:lstStyle/>
+          <a:p>
+            <a:pPr indent="0" marL="0">
+              <a:lnSpc>
+                <a:spcPct val="122000"/>
+              </a:lnSpc>
+              <a:buNone/>
+            </a:pPr>
+            <a:r>
+              <a:rPr lang="en-US" sz="1150" dirty="0">
+                <a:solidFill>
+                  <a:srgbClr val="2B2D30"/>
+                </a:solidFill>
+                <a:latin typeface="Montserrat SemiBold" pitchFamily="34" charset="0"/>
+                <a:ea typeface="Montserrat SemiBold" pitchFamily="34" charset="-122"/>
+                <a:cs typeface="Montserrat SemiBold" pitchFamily="34" charset="-120"/>
+              </a:rPr>
+              <a:t>117 matched in ~12 seconds, and 209 rows collapsed to 46 tickets with nothing skipped.</a:t>
+            </a:r>
+            <a:endParaRPr lang="en-US" sz="1150" dirty="0"/>
+          </a:p>
+        </p:txBody>
+      </p:sp>
+      <p:sp>
+        <p:nvSpPr>
+          <p:cNvPr id="36" name="Text 33"/>
+          <p:cNvSpPr txBox="1"/>
+          <p:nvPr/>
+        </p:nvSpPr>
+        <p:spPr>
+          <a:xfrm>
+            <a:off x="777240" y="5797296"/>
+            <a:ext cx="10637215" cy="310896"/>
+          </a:xfrm>
+          <a:prstGeom prst="rect">
+            <a:avLst/>
+          </a:prstGeom>
+          <a:noFill/>
+          <a:ln/>
+        </p:spPr>
+        <p:txBody>
+          <a:bodyPr wrap="square" lIns="0" tIns="0" rIns="0" bIns="0" rtlCol="0" anchor="t"/>
+          <a:lstStyle/>
+          <a:p>
+            <a:pPr indent="0" marL="0">
+              <a:buNone/>
+            </a:pPr>
+            <a:r>
+              <a:rPr lang="en-US" sz="1250" dirty="0">
+                <a:solidFill>
+                  <a:srgbClr val="942838"/>
+                </a:solidFill>
+                <a:latin typeface="Montserrat SemiBold" pitchFamily="34" charset="0"/>
+                <a:ea typeface="Montserrat SemiBold" pitchFamily="34" charset="-122"/>
+                <a:cs typeface="Montserrat SemiBold" pitchFamily="34" charset="-120"/>
+              </a:rPr>
+              <a:t>All three leave something behind: a written framework, a working scanner, and a script the team can run every cycle.</a:t>
+            </a:r>
+            <a:endParaRPr lang="en-US" sz="1250" dirty="0"/>
+          </a:p>
+        </p:txBody>
+      </p:sp>
+    </p:spTree>
+  </p:cSld>
+  <p:clrMapOvr>
+    <a:masterClrMapping/>
+  </p:clrMapOvr>
+</p:sld>
+</file>
+
+<file path=ppt/slides/slide24.xml><?xml version="1.0" encoding="utf-8"?>
+<p:sld xmlns:a="http://schemas.openxmlformats.org/drawingml/2006/main" xmlns:r="http://schemas.openxmlformats.org/officeDocument/2006/relationships" xmlns:p="http://schemas.openxmlformats.org/presentationml/2006/main">
+  <p:cSld name="Slide 24">
     <p:spTree>
       <p:nvGrpSpPr>
         <p:cNvPr id="1" name=""/>
@@ -16383,7 +17691,7 @@
                 <a:ea typeface="Montserrat SemiBold" pitchFamily="34" charset="-122"/>
                 <a:cs typeface="Montserrat SemiBold" pitchFamily="34" charset="-120"/>
               </a:rPr>
-              <a:t>23</a:t>
+              <a:t>24</a:t>
             </a:r>
             <a:endParaRPr lang="en-US" sz="850" dirty="0"/>
           </a:p>

--- a/out/Internship_Exit_Presentation_Stewart.pptx
+++ b/out/Internship_Exit_Presentation_Stewart.pptx
@@ -15753,13 +15753,6 @@
 <file path=ppt/slides/slide23.xml><?xml version="1.0" encoding="utf-8"?>
 <p:sld xmlns:a="http://schemas.openxmlformats.org/drawingml/2006/main" xmlns:r="http://schemas.openxmlformats.org/officeDocument/2006/relationships" xmlns:p="http://schemas.openxmlformats.org/presentationml/2006/main">
   <p:cSld name="Slide 23">
-    <p:bg>
-      <p:bgPr>
-        <a:solidFill>
-          <a:srgbClr val="FFFFFF"/>
-        </a:solidFill>
-      </p:bgPr>
-    </p:bg>
     <p:spTree>
       <p:nvGrpSpPr>
         <p:cNvPr id="1" name=""/>
@@ -15776,7 +15769,7 @@
       </p:grpSpPr>
       <p:pic>
         <p:nvPicPr>
-          <p:cNvPr id="2" name="Image 0" descr="/home/user/ai/assets/gen/logo-red.png">    </p:cNvPr>
+          <p:cNvPr id="2" name="Image 0" descr="/home/user/ai/assets/gen/panel-red.png">    </p:cNvPr>
           <p:cNvPicPr>
             <a:picLocks noChangeAspect="1"/>
           </p:cNvPicPr>
@@ -15790,6 +15783,54 @@
         </p:blipFill>
         <p:spPr>
           <a:xfrm>
+            <a:off x="0" y="0"/>
+            <a:ext cx="12191695" cy="6858000"/>
+          </a:xfrm>
+          <a:prstGeom prst="rect">
+            <a:avLst/>
+          </a:prstGeom>
+        </p:spPr>
+      </p:pic>
+      <p:pic>
+        <p:nvPicPr>
+          <p:cNvPr id="3" name="Image 1" descr="/home/user/ai/assets/gen/mark-slash-faint.png">    </p:cNvPr>
+          <p:cNvPicPr>
+            <a:picLocks noChangeAspect="1"/>
+          </p:cNvPicPr>
+          <p:nvPr/>
+        </p:nvPicPr>
+        <p:blipFill>
+          <a:blip r:embed="rId2"/>
+          <a:stretch>
+            <a:fillRect/>
+          </a:stretch>
+        </p:blipFill>
+        <p:spPr>
+          <a:xfrm>
+            <a:off x="8412480" y="-548640"/>
+            <a:ext cx="4937760" cy="4937760"/>
+          </a:xfrm>
+          <a:prstGeom prst="rect">
+            <a:avLst/>
+          </a:prstGeom>
+        </p:spPr>
+      </p:pic>
+      <p:pic>
+        <p:nvPicPr>
+          <p:cNvPr id="4" name="Image 2" descr="/home/user/ai/assets/gen/logo-white.png">    </p:cNvPr>
+          <p:cNvPicPr>
+            <a:picLocks noChangeAspect="1"/>
+          </p:cNvPicPr>
+          <p:nvPr/>
+        </p:nvPicPr>
+        <p:blipFill>
+          <a:blip r:embed="rId3"/>
+          <a:stretch>
+            <a:fillRect/>
+          </a:stretch>
+        </p:blipFill>
+        <p:spPr>
+          <a:xfrm>
             <a:off x="9768535" y="457200"/>
             <a:ext cx="1645920" cy="166053"/>
           </a:xfrm>
@@ -15800,14 +15841,14 @@
       </p:pic>
       <p:sp>
         <p:nvSpPr>
-          <p:cNvPr id="3" name="Text 0"/>
-          <p:cNvSpPr txBox="1"/>
-          <p:nvPr/>
-        </p:nvSpPr>
-        <p:spPr>
-          <a:xfrm>
-            <a:off x="777240" y="658368"/>
-            <a:ext cx="7315200" cy="219456"/>
+          <p:cNvPr id="5" name="Text 0"/>
+          <p:cNvSpPr txBox="1"/>
+          <p:nvPr/>
+        </p:nvSpPr>
+        <p:spPr>
+          <a:xfrm>
+            <a:off x="777240" y="676656"/>
+            <a:ext cx="5486400" cy="237744"/>
           </a:xfrm>
           <a:prstGeom prst="rect">
             <a:avLst/>
@@ -15825,7 +15866,7 @@
             <a:r>
               <a:rPr lang="en-US" sz="1000" spc="220" kern="0" dirty="0">
                 <a:solidFill>
-                  <a:srgbClr val="942838"/>
+                  <a:srgbClr val="E4C9CE"/>
                 </a:solidFill>
                 <a:latin typeface="Montserrat SemiBold" pitchFamily="34" charset="0"/>
                 <a:ea typeface="Montserrat SemiBold" pitchFamily="34" charset="-122"/>
@@ -15839,35 +15880,32 @@
       </p:sp>
       <p:sp>
         <p:nvSpPr>
-          <p:cNvPr id="4" name="Text 1"/>
-          <p:cNvSpPr txBox="1"/>
-          <p:nvPr/>
-        </p:nvSpPr>
-        <p:spPr>
-          <a:xfrm>
-            <a:off x="777240" y="932688"/>
-            <a:ext cx="10515600" cy="868680"/>
-          </a:xfrm>
-          <a:prstGeom prst="rect">
-            <a:avLst/>
-          </a:prstGeom>
-          <a:noFill/>
-          <a:ln/>
-        </p:spPr>
-        <p:txBody>
-          <a:bodyPr wrap="square" lIns="0" tIns="0" rIns="0" bIns="0" rtlCol="0" anchor="t"/>
-          <a:lstStyle/>
-          <a:p>
-            <a:pPr indent="0" marL="0">
-              <a:lnSpc>
-                <a:spcPct val="98000"/>
-              </a:lnSpc>
-              <a:buNone/>
-            </a:pPr>
-            <a:r>
-              <a:rPr lang="en-US" sz="2900" spc="-50" kern="0" dirty="0">
-                <a:solidFill>
-                  <a:srgbClr val="2B2D30"/>
+          <p:cNvPr id="6" name="Text 1"/>
+          <p:cNvSpPr txBox="1"/>
+          <p:nvPr/>
+        </p:nvSpPr>
+        <p:spPr>
+          <a:xfrm>
+            <a:off x="777240" y="969264"/>
+            <a:ext cx="9509760" cy="749808"/>
+          </a:xfrm>
+          <a:prstGeom prst="rect">
+            <a:avLst/>
+          </a:prstGeom>
+          <a:noFill/>
+          <a:ln/>
+        </p:spPr>
+        <p:txBody>
+          <a:bodyPr wrap="square" lIns="0" tIns="0" rIns="0" bIns="0" rtlCol="0" anchor="t"/>
+          <a:lstStyle/>
+          <a:p>
+            <a:pPr indent="0" marL="0">
+              <a:buNone/>
+            </a:pPr>
+            <a:r>
+              <a:rPr lang="en-US" sz="3600" spc="-90" kern="0" dirty="0">
+                <a:solidFill>
+                  <a:srgbClr val="FFFFFF"/>
                 </a:solidFill>
                 <a:latin typeface="Montserrat ExtraBold" pitchFamily="34" charset="0"/>
                 <a:ea typeface="Montserrat ExtraBold" pitchFamily="34" charset="-122"/>
@@ -15875,60 +15913,118 @@
               </a:rPr>
               <a:t>What this means for Stewart</a:t>
             </a:r>
-            <a:endParaRPr lang="en-US" sz="2900" dirty="0"/>
-          </a:p>
-        </p:txBody>
-      </p:sp>
-      <p:sp>
-        <p:nvSpPr>
-          <p:cNvPr id="5" name="Shape 2"/>
+            <a:endParaRPr lang="en-US" sz="3600" dirty="0"/>
+          </a:p>
+        </p:txBody>
+      </p:sp>
+      <p:sp>
+        <p:nvSpPr>
+          <p:cNvPr id="7" name="Shape 2"/>
           <p:cNvSpPr/>
           <p:nvPr/>
         </p:nvSpPr>
         <p:spPr>
           <a:xfrm>
-            <a:off x="777240" y="1700784"/>
-            <a:ext cx="566928" cy="50292"/>
+            <a:off x="777240" y="1810512"/>
+            <a:ext cx="640080" cy="50292"/>
           </a:xfrm>
           <a:prstGeom prst="rect">
             <a:avLst/>
           </a:prstGeom>
           <a:solidFill>
-            <a:srgbClr val="942838"/>
+            <a:srgbClr val="FFFFFF"/>
           </a:solidFill>
           <a:ln/>
         </p:spPr>
       </p:sp>
       <p:sp>
         <p:nvSpPr>
-          <p:cNvPr id="6" name="Shape 3"/>
-          <p:cNvSpPr/>
-          <p:nvPr/>
-        </p:nvSpPr>
-        <p:spPr>
-          <a:xfrm>
-            <a:off x="777240" y="6181344"/>
-            <a:ext cx="10637215" cy="10973"/>
-          </a:xfrm>
-          <a:prstGeom prst="rect">
-            <a:avLst/>
-          </a:prstGeom>
-          <a:solidFill>
-            <a:srgbClr val="E6E4E2"/>
-          </a:solidFill>
-          <a:ln/>
-        </p:spPr>
-      </p:sp>
-      <p:sp>
-        <p:nvSpPr>
-          <p:cNvPr id="7" name="Text 4"/>
-          <p:cNvSpPr txBox="1"/>
-          <p:nvPr/>
-        </p:nvSpPr>
-        <p:spPr>
-          <a:xfrm>
-            <a:off x="777240" y="6327648"/>
-            <a:ext cx="7315200" cy="201168"/>
+          <p:cNvPr id="8" name="Text 3"/>
+          <p:cNvSpPr txBox="1"/>
+          <p:nvPr/>
+        </p:nvSpPr>
+        <p:spPr>
+          <a:xfrm>
+            <a:off x="777240" y="2029968"/>
+            <a:ext cx="10241280" cy="310896"/>
+          </a:xfrm>
+          <a:prstGeom prst="rect">
+            <a:avLst/>
+          </a:prstGeom>
+          <a:noFill/>
+          <a:ln/>
+        </p:spPr>
+        <p:txBody>
+          <a:bodyPr wrap="square" lIns="0" tIns="0" rIns="0" bIns="0" rtlCol="0" anchor="t"/>
+          <a:lstStyle/>
+          <a:p>
+            <a:pPr indent="0" marL="0">
+              <a:buNone/>
+            </a:pPr>
+            <a:r>
+              <a:rPr lang="en-US" sz="1400" dirty="0">
+                <a:solidFill>
+                  <a:srgbClr val="DAB4BA"/>
+                </a:solidFill>
+                <a:latin typeface="Montserrat Medium" pitchFamily="34" charset="0"/>
+                <a:ea typeface="Montserrat Medium" pitchFamily="34" charset="-122"/>
+                <a:cs typeface="Montserrat Medium" pitchFamily="34" charset="-120"/>
+              </a:rPr>
+              <a:t>Three gaps going in. Where each one stands now.</a:t>
+            </a:r>
+            <a:endParaRPr lang="en-US" sz="1400" dirty="0"/>
+          </a:p>
+        </p:txBody>
+      </p:sp>
+      <p:sp>
+        <p:nvSpPr>
+          <p:cNvPr id="9" name="Text 4"/>
+          <p:cNvSpPr txBox="1"/>
+          <p:nvPr/>
+        </p:nvSpPr>
+        <p:spPr>
+          <a:xfrm>
+            <a:off x="777240" y="2542032"/>
+            <a:ext cx="640080" cy="365760"/>
+          </a:xfrm>
+          <a:prstGeom prst="rect">
+            <a:avLst/>
+          </a:prstGeom>
+          <a:noFill/>
+          <a:ln/>
+        </p:spPr>
+        <p:txBody>
+          <a:bodyPr wrap="square" lIns="0" tIns="0" rIns="0" bIns="0" rtlCol="0" anchor="t"/>
+          <a:lstStyle/>
+          <a:p>
+            <a:pPr indent="0" marL="0">
+              <a:buNone/>
+            </a:pPr>
+            <a:r>
+              <a:rPr lang="en-US" sz="2400" spc="-40" kern="0" dirty="0">
+                <a:solidFill>
+                  <a:srgbClr val="B9737E"/>
+                </a:solidFill>
+                <a:latin typeface="Montserrat ExtraBold" pitchFamily="34" charset="0"/>
+                <a:ea typeface="Montserrat ExtraBold" pitchFamily="34" charset="-122"/>
+                <a:cs typeface="Montserrat ExtraBold" pitchFamily="34" charset="-120"/>
+              </a:rPr>
+              <a:t>01</a:t>
+            </a:r>
+            <a:endParaRPr lang="en-US" sz="2400" dirty="0"/>
+          </a:p>
+        </p:txBody>
+      </p:sp>
+      <p:sp>
+        <p:nvSpPr>
+          <p:cNvPr id="10" name="Text 5"/>
+          <p:cNvSpPr txBox="1"/>
+          <p:nvPr/>
+        </p:nvSpPr>
+        <p:spPr>
+          <a:xfrm>
+            <a:off x="1527048" y="2487168"/>
+            <a:ext cx="1828800" cy="182880"/>
           </a:xfrm>
           <a:prstGeom prst="rect">
             <a:avLst/>
@@ -15946,13 +16042,13 @@
             <a:r>
               <a:rPr lang="en-US" sz="850" spc="140" kern="0" dirty="0">
                 <a:solidFill>
-                  <a:srgbClr val="6E7175"/>
+                  <a:srgbClr val="CA949C"/>
                 </a:solidFill>
                 <a:latin typeface="Montserrat SemiBold" pitchFamily="34" charset="0"/>
                 <a:ea typeface="Montserrat SemiBold" pitchFamily="34" charset="-122"/>
                 <a:cs typeface="Montserrat SemiBold" pitchFamily="34" charset="-120"/>
               </a:rPr>
-              <a:t>SUMMARY</a:t>
+              <a:t>WAS</a:t>
             </a:r>
             <a:endParaRPr lang="en-US" sz="850" dirty="0"/>
           </a:p>
@@ -15960,169 +16056,13 @@
       </p:sp>
       <p:sp>
         <p:nvSpPr>
-          <p:cNvPr id="8" name="Text 5"/>
-          <p:cNvSpPr txBox="1"/>
-          <p:nvPr/>
-        </p:nvSpPr>
-        <p:spPr>
-          <a:xfrm>
-            <a:off x="10317175" y="6327648"/>
-            <a:ext cx="1097280" cy="201168"/>
-          </a:xfrm>
-          <a:prstGeom prst="rect">
-            <a:avLst/>
-          </a:prstGeom>
-          <a:noFill/>
-          <a:ln/>
-        </p:spPr>
-        <p:txBody>
-          <a:bodyPr wrap="square" lIns="0" tIns="0" rIns="0" bIns="0" rtlCol="0" anchor="t"/>
-          <a:lstStyle/>
-          <a:p>
-            <a:pPr algn="r" indent="0" marL="0">
-              <a:buNone/>
-            </a:pPr>
-            <a:r>
-              <a:rPr lang="en-US" sz="850" spc="140" kern="0" dirty="0">
-                <a:solidFill>
-                  <a:srgbClr val="6E7175"/>
-                </a:solidFill>
-                <a:latin typeface="Montserrat SemiBold" pitchFamily="34" charset="0"/>
-                <a:ea typeface="Montserrat SemiBold" pitchFamily="34" charset="-122"/>
-                <a:cs typeface="Montserrat SemiBold" pitchFamily="34" charset="-120"/>
-              </a:rPr>
-              <a:t>23</a:t>
-            </a:r>
-            <a:endParaRPr lang="en-US" sz="850" dirty="0"/>
-          </a:p>
-        </p:txBody>
-      </p:sp>
-      <p:sp>
-        <p:nvSpPr>
-          <p:cNvPr id="9" name="Text 6"/>
-          <p:cNvSpPr txBox="1"/>
-          <p:nvPr/>
-        </p:nvSpPr>
-        <p:spPr>
-          <a:xfrm>
-            <a:off x="777240" y="1956816"/>
-            <a:ext cx="10241280" cy="310896"/>
-          </a:xfrm>
-          <a:prstGeom prst="rect">
-            <a:avLst/>
-          </a:prstGeom>
-          <a:noFill/>
-          <a:ln/>
-        </p:spPr>
-        <p:txBody>
-          <a:bodyPr wrap="square" lIns="0" tIns="0" rIns="0" bIns="0" rtlCol="0" anchor="t"/>
-          <a:lstStyle/>
-          <a:p>
-            <a:pPr indent="0" marL="0">
-              <a:buNone/>
-            </a:pPr>
-            <a:r>
-              <a:rPr lang="en-US" sz="1400" dirty="0">
-                <a:solidFill>
-                  <a:srgbClr val="6E7175"/>
-                </a:solidFill>
-                <a:latin typeface="Montserrat Medium" pitchFamily="34" charset="0"/>
-                <a:ea typeface="Montserrat Medium" pitchFamily="34" charset="-122"/>
-                <a:cs typeface="Montserrat Medium" pitchFamily="34" charset="-120"/>
-              </a:rPr>
-              <a:t>Three gaps going in. Where each one stands now.</a:t>
-            </a:r>
-            <a:endParaRPr lang="en-US" sz="1400" dirty="0"/>
-          </a:p>
-        </p:txBody>
-      </p:sp>
-      <p:sp>
-        <p:nvSpPr>
-          <p:cNvPr id="10" name="Text 7"/>
-          <p:cNvSpPr txBox="1"/>
-          <p:nvPr/>
-        </p:nvSpPr>
-        <p:spPr>
-          <a:xfrm>
-            <a:off x="777240" y="2505456"/>
-            <a:ext cx="640080" cy="365760"/>
-          </a:xfrm>
-          <a:prstGeom prst="rect">
-            <a:avLst/>
-          </a:prstGeom>
-          <a:noFill/>
-          <a:ln/>
-        </p:spPr>
-        <p:txBody>
-          <a:bodyPr wrap="square" lIns="0" tIns="0" rIns="0" bIns="0" rtlCol="0" anchor="t"/>
-          <a:lstStyle/>
-          <a:p>
-            <a:pPr indent="0" marL="0">
-              <a:buNone/>
-            </a:pPr>
-            <a:r>
-              <a:rPr lang="en-US" sz="2400" spc="-40" kern="0" dirty="0">
-                <a:solidFill>
-                  <a:srgbClr val="DFBEC4"/>
-                </a:solidFill>
-                <a:latin typeface="Montserrat ExtraBold" pitchFamily="34" charset="0"/>
-                <a:ea typeface="Montserrat ExtraBold" pitchFamily="34" charset="-122"/>
-                <a:cs typeface="Montserrat ExtraBold" pitchFamily="34" charset="-120"/>
-              </a:rPr>
-              <a:t>01</a:t>
-            </a:r>
-            <a:endParaRPr lang="en-US" sz="2400" dirty="0"/>
-          </a:p>
-        </p:txBody>
-      </p:sp>
-      <p:sp>
-        <p:nvSpPr>
-          <p:cNvPr id="11" name="Text 8"/>
-          <p:cNvSpPr txBox="1"/>
-          <p:nvPr/>
-        </p:nvSpPr>
-        <p:spPr>
-          <a:xfrm>
-            <a:off x="1527048" y="2450592"/>
-            <a:ext cx="1828800" cy="182880"/>
-          </a:xfrm>
-          <a:prstGeom prst="rect">
-            <a:avLst/>
-          </a:prstGeom>
-          <a:noFill/>
-          <a:ln/>
-        </p:spPr>
-        <p:txBody>
-          <a:bodyPr wrap="square" lIns="0" tIns="0" rIns="0" bIns="0" rtlCol="0" anchor="t"/>
-          <a:lstStyle/>
-          <a:p>
-            <a:pPr indent="0" marL="0">
-              <a:buNone/>
-            </a:pPr>
-            <a:r>
-              <a:rPr lang="en-US" sz="850" spc="140" kern="0" dirty="0">
-                <a:solidFill>
-                  <a:srgbClr val="6E7175"/>
-                </a:solidFill>
-                <a:latin typeface="Montserrat SemiBold" pitchFamily="34" charset="0"/>
-                <a:ea typeface="Montserrat SemiBold" pitchFamily="34" charset="-122"/>
-                <a:cs typeface="Montserrat SemiBold" pitchFamily="34" charset="-120"/>
-              </a:rPr>
-              <a:t>WAS</a:t>
-            </a:r>
-            <a:endParaRPr lang="en-US" sz="850" dirty="0"/>
-          </a:p>
-        </p:txBody>
-      </p:sp>
-      <p:sp>
-        <p:nvSpPr>
-          <p:cNvPr id="12" name="Text 9"/>
-          <p:cNvSpPr txBox="1"/>
-          <p:nvPr/>
-        </p:nvSpPr>
-        <p:spPr>
-          <a:xfrm>
-            <a:off x="1527048" y="2670048"/>
+          <p:cNvPr id="11" name="Text 6"/>
+          <p:cNvSpPr txBox="1"/>
+          <p:nvPr/>
+        </p:nvSpPr>
+        <p:spPr>
+          <a:xfrm>
+            <a:off x="1527048" y="2706624"/>
             <a:ext cx="3310128" cy="603504"/>
           </a:xfrm>
           <a:prstGeom prst="rect">
@@ -16144,7 +16084,7 @@
             <a:r>
               <a:rPr lang="en-US" sz="1100" dirty="0">
                 <a:solidFill>
-                  <a:srgbClr val="43464A"/>
+                  <a:srgbClr val="DAB4BA"/>
                 </a:solidFill>
                 <a:latin typeface="Montserrat" pitchFamily="34" charset="0"/>
                 <a:ea typeface="Montserrat" pitchFamily="34" charset="-122"/>
@@ -16158,13 +16098,13 @@
       </p:sp>
       <p:sp>
         <p:nvSpPr>
-          <p:cNvPr id="13" name="Text 10"/>
-          <p:cNvSpPr txBox="1"/>
-          <p:nvPr/>
-        </p:nvSpPr>
-        <p:spPr>
-          <a:xfrm>
-            <a:off x="4882896" y="2615184"/>
+          <p:cNvPr id="12" name="Text 7"/>
+          <p:cNvSpPr txBox="1"/>
+          <p:nvPr/>
+        </p:nvSpPr>
+        <p:spPr>
+          <a:xfrm>
+            <a:off x="4882896" y="2651760"/>
             <a:ext cx="365760" cy="420624"/>
           </a:xfrm>
           <a:prstGeom prst="rect">
@@ -16183,7 +16123,7 @@
             <a:r>
               <a:rPr lang="en-US" sz="2600" b="1" dirty="0">
                 <a:solidFill>
-                  <a:srgbClr val="C9C6C4"/>
+                  <a:srgbClr val="CA949C"/>
                 </a:solidFill>
                 <a:latin typeface="Montserrat" pitchFamily="34" charset="0"/>
                 <a:ea typeface="Montserrat" pitchFamily="34" charset="-122"/>
@@ -16197,13 +16137,13 @@
       </p:sp>
       <p:sp>
         <p:nvSpPr>
-          <p:cNvPr id="14" name="Shape 11"/>
+          <p:cNvPr id="13" name="Shape 8"/>
           <p:cNvSpPr/>
           <p:nvPr/>
         </p:nvSpPr>
         <p:spPr>
           <a:xfrm>
-            <a:off x="5486400" y="2395728"/>
+            <a:off x="5486400" y="2432304"/>
             <a:ext cx="5928055" cy="914400"/>
           </a:xfrm>
           <a:prstGeom prst="roundRect">
@@ -16212,20 +16152,27 @@
             </a:avLst>
           </a:prstGeom>
           <a:solidFill>
-            <a:srgbClr val="F6EEF0"/>
+            <a:srgbClr val="FFFFFF"/>
           </a:solidFill>
           <a:ln/>
-        </p:spPr>
-      </p:sp>
-      <p:sp>
-        <p:nvSpPr>
-          <p:cNvPr id="15" name="Shape 12"/>
+          <a:effectLst>
+            <a:outerShdw sx="100000" sy="100000" kx="0" ky="0" algn="bl" rotWithShape="0" blurRad="2580640000" dist="645160000" dir="324000000000">
+              <a:srgbClr val="5D1923">
+                <a:alpha val="3400000000"/>
+              </a:srgbClr>
+            </a:outerShdw>
+          </a:effectLst>
+        </p:spPr>
+      </p:sp>
+      <p:sp>
+        <p:nvSpPr>
+          <p:cNvPr id="14" name="Shape 9"/>
           <p:cNvSpPr/>
           <p:nvPr/>
         </p:nvSpPr>
         <p:spPr>
           <a:xfrm>
-            <a:off x="5486400" y="2395728"/>
+            <a:off x="5486400" y="2432304"/>
             <a:ext cx="45720" cy="914400"/>
           </a:xfrm>
           <a:prstGeom prst="rect">
@@ -16239,13 +16186,13 @@
       </p:sp>
       <p:sp>
         <p:nvSpPr>
-          <p:cNvPr id="16" name="Text 13"/>
-          <p:cNvSpPr txBox="1"/>
-          <p:nvPr/>
-        </p:nvSpPr>
-        <p:spPr>
-          <a:xfrm>
-            <a:off x="5724144" y="2523744"/>
+          <p:cNvPr id="15" name="Text 10"/>
+          <p:cNvSpPr txBox="1"/>
+          <p:nvPr/>
+        </p:nvSpPr>
+        <p:spPr>
+          <a:xfrm>
+            <a:off x="5724144" y="2560320"/>
             <a:ext cx="1828800" cy="182880"/>
           </a:xfrm>
           <a:prstGeom prst="rect">
@@ -16278,13 +16225,13 @@
       </p:sp>
       <p:sp>
         <p:nvSpPr>
-          <p:cNvPr id="17" name="Text 14"/>
-          <p:cNvSpPr txBox="1"/>
-          <p:nvPr/>
-        </p:nvSpPr>
-        <p:spPr>
-          <a:xfrm>
-            <a:off x="5724144" y="2743200"/>
+          <p:cNvPr id="16" name="Text 11"/>
+          <p:cNvSpPr txBox="1"/>
+          <p:nvPr/>
+        </p:nvSpPr>
+        <p:spPr>
+          <a:xfrm>
+            <a:off x="5724144" y="2779776"/>
             <a:ext cx="5452567" cy="548640"/>
           </a:xfrm>
           <a:prstGeom prst="rect">
@@ -16320,33 +16267,13 @@
       </p:sp>
       <p:sp>
         <p:nvSpPr>
-          <p:cNvPr id="18" name="Shape 15"/>
-          <p:cNvSpPr/>
-          <p:nvPr/>
-        </p:nvSpPr>
-        <p:spPr>
-          <a:xfrm>
-            <a:off x="777240" y="3419856"/>
-            <a:ext cx="10637215" cy="10973"/>
-          </a:xfrm>
-          <a:prstGeom prst="rect">
-            <a:avLst/>
-          </a:prstGeom>
-          <a:solidFill>
-            <a:srgbClr val="E6E4E2"/>
-          </a:solidFill>
-          <a:ln/>
-        </p:spPr>
-      </p:sp>
-      <p:sp>
-        <p:nvSpPr>
-          <p:cNvPr id="19" name="Text 16"/>
-          <p:cNvSpPr txBox="1"/>
-          <p:nvPr/>
-        </p:nvSpPr>
-        <p:spPr>
-          <a:xfrm>
-            <a:off x="777240" y="3602736"/>
+          <p:cNvPr id="17" name="Text 12"/>
+          <p:cNvSpPr txBox="1"/>
+          <p:nvPr/>
+        </p:nvSpPr>
+        <p:spPr>
+          <a:xfrm>
+            <a:off x="777240" y="3621024"/>
             <a:ext cx="640080" cy="365760"/>
           </a:xfrm>
           <a:prstGeom prst="rect">
@@ -16365,7 +16292,7 @@
             <a:r>
               <a:rPr lang="en-US" sz="2400" spc="-40" kern="0" dirty="0">
                 <a:solidFill>
-                  <a:srgbClr val="DFBEC4"/>
+                  <a:srgbClr val="B9737E"/>
                 </a:solidFill>
                 <a:latin typeface="Montserrat ExtraBold" pitchFamily="34" charset="0"/>
                 <a:ea typeface="Montserrat ExtraBold" pitchFamily="34" charset="-122"/>
@@ -16379,13 +16306,13 @@
       </p:sp>
       <p:sp>
         <p:nvSpPr>
-          <p:cNvPr id="20" name="Text 17"/>
-          <p:cNvSpPr txBox="1"/>
-          <p:nvPr/>
-        </p:nvSpPr>
-        <p:spPr>
-          <a:xfrm>
-            <a:off x="1527048" y="3547872"/>
+          <p:cNvPr id="18" name="Text 13"/>
+          <p:cNvSpPr txBox="1"/>
+          <p:nvPr/>
+        </p:nvSpPr>
+        <p:spPr>
+          <a:xfrm>
+            <a:off x="1527048" y="3566160"/>
             <a:ext cx="1828800" cy="182880"/>
           </a:xfrm>
           <a:prstGeom prst="rect">
@@ -16404,7 +16331,7 @@
             <a:r>
               <a:rPr lang="en-US" sz="850" spc="140" kern="0" dirty="0">
                 <a:solidFill>
-                  <a:srgbClr val="6E7175"/>
+                  <a:srgbClr val="CA949C"/>
                 </a:solidFill>
                 <a:latin typeface="Montserrat SemiBold" pitchFamily="34" charset="0"/>
                 <a:ea typeface="Montserrat SemiBold" pitchFamily="34" charset="-122"/>
@@ -16418,13 +16345,13 @@
       </p:sp>
       <p:sp>
         <p:nvSpPr>
-          <p:cNvPr id="21" name="Text 18"/>
-          <p:cNvSpPr txBox="1"/>
-          <p:nvPr/>
-        </p:nvSpPr>
-        <p:spPr>
-          <a:xfrm>
-            <a:off x="1527048" y="3767328"/>
+          <p:cNvPr id="19" name="Text 14"/>
+          <p:cNvSpPr txBox="1"/>
+          <p:nvPr/>
+        </p:nvSpPr>
+        <p:spPr>
+          <a:xfrm>
+            <a:off x="1527048" y="3785616"/>
             <a:ext cx="3310128" cy="603504"/>
           </a:xfrm>
           <a:prstGeom prst="rect">
@@ -16446,7 +16373,7 @@
             <a:r>
               <a:rPr lang="en-US" sz="1100" dirty="0">
                 <a:solidFill>
-                  <a:srgbClr val="43464A"/>
+                  <a:srgbClr val="DAB4BA"/>
                 </a:solidFill>
                 <a:latin typeface="Montserrat" pitchFamily="34" charset="0"/>
                 <a:ea typeface="Montserrat" pitchFamily="34" charset="-122"/>
@@ -16460,13 +16387,13 @@
       </p:sp>
       <p:sp>
         <p:nvSpPr>
-          <p:cNvPr id="22" name="Text 19"/>
-          <p:cNvSpPr txBox="1"/>
-          <p:nvPr/>
-        </p:nvSpPr>
-        <p:spPr>
-          <a:xfrm>
-            <a:off x="4882896" y="3712464"/>
+          <p:cNvPr id="20" name="Text 15"/>
+          <p:cNvSpPr txBox="1"/>
+          <p:nvPr/>
+        </p:nvSpPr>
+        <p:spPr>
+          <a:xfrm>
+            <a:off x="4882896" y="3730752"/>
             <a:ext cx="365760" cy="420624"/>
           </a:xfrm>
           <a:prstGeom prst="rect">
@@ -16485,7 +16412,7 @@
             <a:r>
               <a:rPr lang="en-US" sz="2600" b="1" dirty="0">
                 <a:solidFill>
-                  <a:srgbClr val="C9C6C4"/>
+                  <a:srgbClr val="CA949C"/>
                 </a:solidFill>
                 <a:latin typeface="Montserrat" pitchFamily="34" charset="0"/>
                 <a:ea typeface="Montserrat" pitchFamily="34" charset="-122"/>
@@ -16499,13 +16426,13 @@
       </p:sp>
       <p:sp>
         <p:nvSpPr>
-          <p:cNvPr id="23" name="Shape 20"/>
+          <p:cNvPr id="21" name="Shape 16"/>
           <p:cNvSpPr/>
           <p:nvPr/>
         </p:nvSpPr>
         <p:spPr>
           <a:xfrm>
-            <a:off x="5486400" y="3493008"/>
+            <a:off x="5486400" y="3511296"/>
             <a:ext cx="5928055" cy="914400"/>
           </a:xfrm>
           <a:prstGeom prst="roundRect">
@@ -16514,20 +16441,27 @@
             </a:avLst>
           </a:prstGeom>
           <a:solidFill>
-            <a:srgbClr val="F6EEF0"/>
+            <a:srgbClr val="FFFFFF"/>
           </a:solidFill>
           <a:ln/>
-        </p:spPr>
-      </p:sp>
-      <p:sp>
-        <p:nvSpPr>
-          <p:cNvPr id="24" name="Shape 21"/>
+          <a:effectLst>
+            <a:outerShdw sx="100000" sy="100000" kx="0" ky="0" algn="bl" rotWithShape="0" blurRad="32774128000000" dist="8193532000000" dir="19440000000000000">
+              <a:srgbClr val="5D1923">
+                <a:alpha val="340000000000000"/>
+              </a:srgbClr>
+            </a:outerShdw>
+          </a:effectLst>
+        </p:spPr>
+      </p:sp>
+      <p:sp>
+        <p:nvSpPr>
+          <p:cNvPr id="22" name="Shape 17"/>
           <p:cNvSpPr/>
           <p:nvPr/>
         </p:nvSpPr>
         <p:spPr>
           <a:xfrm>
-            <a:off x="5486400" y="3493008"/>
+            <a:off x="5486400" y="3511296"/>
             <a:ext cx="45720" cy="914400"/>
           </a:xfrm>
           <a:prstGeom prst="rect">
@@ -16541,13 +16475,13 @@
       </p:sp>
       <p:sp>
         <p:nvSpPr>
-          <p:cNvPr id="25" name="Text 22"/>
-          <p:cNvSpPr txBox="1"/>
-          <p:nvPr/>
-        </p:nvSpPr>
-        <p:spPr>
-          <a:xfrm>
-            <a:off x="5724144" y="3621024"/>
+          <p:cNvPr id="23" name="Text 18"/>
+          <p:cNvSpPr txBox="1"/>
+          <p:nvPr/>
+        </p:nvSpPr>
+        <p:spPr>
+          <a:xfrm>
+            <a:off x="5724144" y="3639312"/>
             <a:ext cx="1828800" cy="182880"/>
           </a:xfrm>
           <a:prstGeom prst="rect">
@@ -16580,13 +16514,13 @@
       </p:sp>
       <p:sp>
         <p:nvSpPr>
-          <p:cNvPr id="26" name="Text 23"/>
-          <p:cNvSpPr txBox="1"/>
-          <p:nvPr/>
-        </p:nvSpPr>
-        <p:spPr>
-          <a:xfrm>
-            <a:off x="5724144" y="3840480"/>
+          <p:cNvPr id="24" name="Text 19"/>
+          <p:cNvSpPr txBox="1"/>
+          <p:nvPr/>
+        </p:nvSpPr>
+        <p:spPr>
+          <a:xfrm>
+            <a:off x="5724144" y="3858768"/>
             <a:ext cx="5452567" cy="548640"/>
           </a:xfrm>
           <a:prstGeom prst="rect">
@@ -16622,27 +16556,7 @@
       </p:sp>
       <p:sp>
         <p:nvSpPr>
-          <p:cNvPr id="27" name="Shape 24"/>
-          <p:cNvSpPr/>
-          <p:nvPr/>
-        </p:nvSpPr>
-        <p:spPr>
-          <a:xfrm>
-            <a:off x="777240" y="4517136"/>
-            <a:ext cx="10637215" cy="10973"/>
-          </a:xfrm>
-          <a:prstGeom prst="rect">
-            <a:avLst/>
-          </a:prstGeom>
-          <a:solidFill>
-            <a:srgbClr val="E6E4E2"/>
-          </a:solidFill>
-          <a:ln/>
-        </p:spPr>
-      </p:sp>
-      <p:sp>
-        <p:nvSpPr>
-          <p:cNvPr id="28" name="Text 25"/>
+          <p:cNvPr id="25" name="Text 20"/>
           <p:cNvSpPr txBox="1"/>
           <p:nvPr/>
         </p:nvSpPr>
@@ -16667,7 +16581,7 @@
             <a:r>
               <a:rPr lang="en-US" sz="2400" spc="-40" kern="0" dirty="0">
                 <a:solidFill>
-                  <a:srgbClr val="DFBEC4"/>
+                  <a:srgbClr val="B9737E"/>
                 </a:solidFill>
                 <a:latin typeface="Montserrat ExtraBold" pitchFamily="34" charset="0"/>
                 <a:ea typeface="Montserrat ExtraBold" pitchFamily="34" charset="-122"/>
@@ -16681,7 +16595,7 @@
       </p:sp>
       <p:sp>
         <p:nvSpPr>
-          <p:cNvPr id="29" name="Text 26"/>
+          <p:cNvPr id="26" name="Text 21"/>
           <p:cNvSpPr txBox="1"/>
           <p:nvPr/>
         </p:nvSpPr>
@@ -16706,7 +16620,7 @@
             <a:r>
               <a:rPr lang="en-US" sz="850" spc="140" kern="0" dirty="0">
                 <a:solidFill>
-                  <a:srgbClr val="6E7175"/>
+                  <a:srgbClr val="CA949C"/>
                 </a:solidFill>
                 <a:latin typeface="Montserrat SemiBold" pitchFamily="34" charset="0"/>
                 <a:ea typeface="Montserrat SemiBold" pitchFamily="34" charset="-122"/>
@@ -16720,7 +16634,7 @@
       </p:sp>
       <p:sp>
         <p:nvSpPr>
-          <p:cNvPr id="30" name="Text 27"/>
+          <p:cNvPr id="27" name="Text 22"/>
           <p:cNvSpPr txBox="1"/>
           <p:nvPr/>
         </p:nvSpPr>
@@ -16748,7 +16662,7 @@
             <a:r>
               <a:rPr lang="en-US" sz="1100" dirty="0">
                 <a:solidFill>
-                  <a:srgbClr val="43464A"/>
+                  <a:srgbClr val="DAB4BA"/>
                 </a:solidFill>
                 <a:latin typeface="Montserrat" pitchFamily="34" charset="0"/>
                 <a:ea typeface="Montserrat" pitchFamily="34" charset="-122"/>
@@ -16762,7 +16676,7 @@
       </p:sp>
       <p:sp>
         <p:nvSpPr>
-          <p:cNvPr id="31" name="Text 28"/>
+          <p:cNvPr id="28" name="Text 23"/>
           <p:cNvSpPr txBox="1"/>
           <p:nvPr/>
         </p:nvSpPr>
@@ -16787,7 +16701,7 @@
             <a:r>
               <a:rPr lang="en-US" sz="2600" b="1" dirty="0">
                 <a:solidFill>
-                  <a:srgbClr val="C9C6C4"/>
+                  <a:srgbClr val="CA949C"/>
                 </a:solidFill>
                 <a:latin typeface="Montserrat" pitchFamily="34" charset="0"/>
                 <a:ea typeface="Montserrat" pitchFamily="34" charset="-122"/>
@@ -16801,7 +16715,7 @@
       </p:sp>
       <p:sp>
         <p:nvSpPr>
-          <p:cNvPr id="32" name="Shape 29"/>
+          <p:cNvPr id="29" name="Shape 24"/>
           <p:cNvSpPr/>
           <p:nvPr/>
         </p:nvSpPr>
@@ -16816,14 +16730,21 @@
             </a:avLst>
           </a:prstGeom>
           <a:solidFill>
-            <a:srgbClr val="F6EEF0"/>
+            <a:srgbClr val="FFFFFF"/>
           </a:solidFill>
           <a:ln/>
-        </p:spPr>
-      </p:sp>
-      <p:sp>
-        <p:nvSpPr>
-          <p:cNvPr id="33" name="Shape 30"/>
+          <a:effectLst>
+            <a:outerShdw sx="100000" sy="100000" kx="0" ky="0" algn="bl" rotWithShape="0" blurRad="416231425600000000" dist="104057856400000000" dir="1.1664e+21">
+              <a:srgbClr val="5D1923">
+                <a:alpha val="34000000000000000000"/>
+              </a:srgbClr>
+            </a:outerShdw>
+          </a:effectLst>
+        </p:spPr>
+      </p:sp>
+      <p:sp>
+        <p:nvSpPr>
+          <p:cNvPr id="30" name="Shape 25"/>
           <p:cNvSpPr/>
           <p:nvPr/>
         </p:nvSpPr>
@@ -16843,7 +16764,7 @@
       </p:sp>
       <p:sp>
         <p:nvSpPr>
-          <p:cNvPr id="34" name="Text 31"/>
+          <p:cNvPr id="31" name="Text 26"/>
           <p:cNvSpPr txBox="1"/>
           <p:nvPr/>
         </p:nvSpPr>
@@ -16882,7 +16803,7 @@
       </p:sp>
       <p:sp>
         <p:nvSpPr>
-          <p:cNvPr id="35" name="Text 32"/>
+          <p:cNvPr id="32" name="Text 27"/>
           <p:cNvSpPr txBox="1"/>
           <p:nvPr/>
         </p:nvSpPr>
@@ -16924,13 +16845,13 @@
       </p:sp>
       <p:sp>
         <p:nvSpPr>
-          <p:cNvPr id="36" name="Text 33"/>
-          <p:cNvSpPr txBox="1"/>
-          <p:nvPr/>
-        </p:nvSpPr>
-        <p:spPr>
-          <a:xfrm>
-            <a:off x="777240" y="5797296"/>
+          <p:cNvPr id="33" name="Text 28"/>
+          <p:cNvSpPr txBox="1"/>
+          <p:nvPr/>
+        </p:nvSpPr>
+        <p:spPr>
+          <a:xfrm>
+            <a:off x="777240" y="5833872"/>
             <a:ext cx="10637215" cy="310896"/>
           </a:xfrm>
           <a:prstGeom prst="rect">
@@ -16947,9 +16868,9 @@
               <a:buNone/>
             </a:pPr>
             <a:r>
-              <a:rPr lang="en-US" sz="1250" dirty="0">
-                <a:solidFill>
-                  <a:srgbClr val="942838"/>
+              <a:rPr lang="en-US" sz="1300" dirty="0">
+                <a:solidFill>
+                  <a:srgbClr val="FFFFFF"/>
                 </a:solidFill>
                 <a:latin typeface="Montserrat SemiBold" pitchFamily="34" charset="0"/>
                 <a:ea typeface="Montserrat SemiBold" pitchFamily="34" charset="-122"/>
@@ -16957,7 +16878,85 @@
               </a:rPr>
               <a:t>All three leave something behind: a written framework, a working scanner, and a script the team can run every cycle.</a:t>
             </a:r>
-            <a:endParaRPr lang="en-US" sz="1250" dirty="0"/>
+            <a:endParaRPr lang="en-US" sz="1300" dirty="0"/>
+          </a:p>
+        </p:txBody>
+      </p:sp>
+      <p:sp>
+        <p:nvSpPr>
+          <p:cNvPr id="34" name="Text 29"/>
+          <p:cNvSpPr txBox="1"/>
+          <p:nvPr/>
+        </p:nvSpPr>
+        <p:spPr>
+          <a:xfrm>
+            <a:off x="777240" y="6327648"/>
+            <a:ext cx="7315200" cy="201168"/>
+          </a:xfrm>
+          <a:prstGeom prst="rect">
+            <a:avLst/>
+          </a:prstGeom>
+          <a:noFill/>
+          <a:ln/>
+        </p:spPr>
+        <p:txBody>
+          <a:bodyPr wrap="square" lIns="0" tIns="0" rIns="0" bIns="0" rtlCol="0" anchor="t"/>
+          <a:lstStyle/>
+          <a:p>
+            <a:pPr indent="0" marL="0">
+              <a:buNone/>
+            </a:pPr>
+            <a:r>
+              <a:rPr lang="en-US" sz="850" spc="140" kern="0" dirty="0">
+                <a:solidFill>
+                  <a:srgbClr val="E4C9CE"/>
+                </a:solidFill>
+                <a:latin typeface="Montserrat SemiBold" pitchFamily="34" charset="0"/>
+                <a:ea typeface="Montserrat SemiBold" pitchFamily="34" charset="-122"/>
+                <a:cs typeface="Montserrat SemiBold" pitchFamily="34" charset="-120"/>
+              </a:rPr>
+              <a:t>SUMMARY</a:t>
+            </a:r>
+            <a:endParaRPr lang="en-US" sz="850" dirty="0"/>
+          </a:p>
+        </p:txBody>
+      </p:sp>
+      <p:sp>
+        <p:nvSpPr>
+          <p:cNvPr id="35" name="Text 30"/>
+          <p:cNvSpPr txBox="1"/>
+          <p:nvPr/>
+        </p:nvSpPr>
+        <p:spPr>
+          <a:xfrm>
+            <a:off x="10317175" y="6327648"/>
+            <a:ext cx="1097280" cy="201168"/>
+          </a:xfrm>
+          <a:prstGeom prst="rect">
+            <a:avLst/>
+          </a:prstGeom>
+          <a:noFill/>
+          <a:ln/>
+        </p:spPr>
+        <p:txBody>
+          <a:bodyPr wrap="square" lIns="0" tIns="0" rIns="0" bIns="0" rtlCol="0" anchor="t"/>
+          <a:lstStyle/>
+          <a:p>
+            <a:pPr algn="r" indent="0" marL="0">
+              <a:buNone/>
+            </a:pPr>
+            <a:r>
+              <a:rPr lang="en-US" sz="850" spc="140" kern="0" dirty="0">
+                <a:solidFill>
+                  <a:srgbClr val="E4C9CE"/>
+                </a:solidFill>
+                <a:latin typeface="Montserrat SemiBold" pitchFamily="34" charset="0"/>
+                <a:ea typeface="Montserrat SemiBold" pitchFamily="34" charset="-122"/>
+                <a:cs typeface="Montserrat SemiBold" pitchFamily="34" charset="-120"/>
+              </a:rPr>
+              <a:t>23</a:t>
+            </a:r>
+            <a:endParaRPr lang="en-US" sz="850" dirty="0"/>
           </a:p>
         </p:txBody>
       </p:sp>

--- a/out/Internship_Exit_Presentation_Stewart.pptx
+++ b/out/Internship_Exit_Presentation_Stewart.pptx
@@ -965,7 +965,7 @@
           <a:p>
             <a:r>
               <a:rPr lang="en-US" dirty="0"/>
-              <a:t>This is the slide for the security folks. The short version for everyone else: I tried to make the tool report a clean result it had not earned, and it refused.</a:t>
+              <a:t>The short version: it found real flaws in a real Stewart repository, and where it could not be certain it said so rather than guessing. Q: Why "can't prove" and not yes or no? — AEGIS has a hand-curated list of about nine packages where the exact dangerous function is documented. Angular is not on it yet, so the tool can confirm the app uses the package but not whether the vulnerable function specifically is called. That is a known limitation, not a bug, and it is why those two need a person. Earlier, testing against an open-source project, I also found and fixed two bugs in my own code — one where a "can't prove" result was being described as a confirmed absence.</a:t>
             </a:r>
             <a:endParaRPr lang="en-US" dirty="0"/>
           </a:p>
@@ -6948,7 +6948,7 @@
                 <a:ea typeface="Montserrat SemiBold" pitchFamily="34" charset="-122"/>
                 <a:cs typeface="Montserrat SemiBold" pitchFamily="34" charset="-120"/>
               </a:rPr>
-              <a:t>PROJECT 02  ·  PROVING IT WORKS</a:t>
+              <a:t>PROJECT 02  ·  A REAL RUN</a:t>
             </a:r>
             <a:endParaRPr lang="en-US" sz="1000" dirty="0"/>
           </a:p>
@@ -6990,7 +6990,7 @@
                 <a:ea typeface="Montserrat ExtraBold" pitchFamily="34" charset="-122"/>
                 <a:cs typeface="Montserrat ExtraBold" pitchFamily="34" charset="-120"/>
               </a:rPr>
-              <a:t>I tried to catch it lying, and it held</a:t>
+              <a:t>1,518 packages, 28 real flaws, nothing guessed</a:t>
             </a:r>
             <a:endParaRPr lang="en-US" sz="2900" dirty="0"/>
           </a:p>
@@ -7123,7 +7123,7 @@
         <p:spPr>
           <a:xfrm>
             <a:off x="777240" y="1956816"/>
-            <a:ext cx="10241280" cy="329184"/>
+            <a:ext cx="10424160" cy="310896"/>
           </a:xfrm>
           <a:prstGeom prst="rect">
             <a:avLst/>
@@ -7147,7 +7147,35 @@
                 <a:ea typeface="Montserrat Medium" pitchFamily="34" charset="-122"/>
                 <a:cs typeface="Montserrat Medium" pitchFamily="34" charset="-120"/>
               </a:rPr>
-              <a:t>A security tool that quietly reports "clean" when it actually failed is worse than no tool at all. So I tested the failure paths, not just the happy path.</a:t>
+              <a:t>Not a test project — the </a:t>
+            </a:r>
+            <a:pPr indent="0" marL="0">
+              <a:buNone/>
+            </a:pPr>
+            <a:r>
+              <a:rPr lang="en-US" sz="1400" dirty="0">
+                <a:solidFill>
+                  <a:srgbClr val="2B2D30"/>
+                </a:solidFill>
+                <a:latin typeface="Montserrat SemiBold" pitchFamily="34" charset="0"/>
+                <a:ea typeface="Montserrat SemiBold" pitchFamily="34" charset="-122"/>
+                <a:cs typeface="Montserrat SemiBold" pitchFamily="34" charset="-120"/>
+              </a:rPr>
+              <a:t>Stewart.STEPS.Frontend</a:t>
+            </a:r>
+            <a:pPr indent="0" marL="0">
+              <a:buNone/>
+            </a:pPr>
+            <a:r>
+              <a:rPr lang="en-US" sz="1400" dirty="0">
+                <a:solidFill>
+                  <a:srgbClr val="6E7175"/>
+                </a:solidFill>
+                <a:latin typeface="Montserrat Medium" pitchFamily="34" charset="0"/>
+                <a:ea typeface="Montserrat Medium" pitchFamily="34" charset="-122"/>
+                <a:cs typeface="Montserrat Medium" pitchFamily="34" charset="-120"/>
+              </a:rPr>
+              <a:t> repository. Every flaw is genuine, pulled live.</a:t>
             </a:r>
             <a:endParaRPr lang="en-US" sz="1400" dirty="0"/>
           </a:p>
@@ -7155,68 +7183,99 @@
       </p:sp>
       <p:sp>
         <p:nvSpPr>
-          <p:cNvPr id="10" name="Text 7"/>
-          <p:cNvSpPr txBox="1"/>
-          <p:nvPr/>
-        </p:nvSpPr>
-        <p:spPr>
-          <a:xfrm>
-            <a:off x="777240" y="2487168"/>
-            <a:ext cx="2103120" cy="603504"/>
-          </a:xfrm>
-          <a:prstGeom prst="rect">
-            <a:avLst/>
-          </a:prstGeom>
-          <a:noFill/>
-          <a:ln/>
-        </p:spPr>
-        <p:txBody>
-          <a:bodyPr wrap="square" lIns="0" tIns="0" rIns="0" bIns="0" rtlCol="0" anchor="t"/>
-          <a:lstStyle/>
-          <a:p>
-            <a:pPr indent="0" marL="0">
-              <a:buNone/>
-            </a:pPr>
-            <a:r>
-              <a:rPr lang="en-US" sz="4000" spc="-140" kern="0" dirty="0">
-                <a:solidFill>
-                  <a:srgbClr val="942838"/>
+          <p:cNvPr id="10" name="Shape 7"/>
+          <p:cNvSpPr/>
+          <p:nvPr/>
+        </p:nvSpPr>
+        <p:spPr>
+          <a:xfrm>
+            <a:off x="777240" y="2432304"/>
+            <a:ext cx="3310128" cy="1207008"/>
+          </a:xfrm>
+          <a:prstGeom prst="roundRect">
+            <a:avLst>
+              <a:gd name="adj" fmla="val 4545"/>
+            </a:avLst>
+          </a:prstGeom>
+          <a:solidFill>
+            <a:srgbClr val="F5F4F3"/>
+          </a:solidFill>
+          <a:ln w="9525">
+            <a:solidFill>
+              <a:srgbClr val="E6E4E2"/>
+            </a:solidFill>
+            <a:prstDash val="solid"/>
+          </a:ln>
+          <a:effectLst>
+            <a:outerShdw sx="100000" sy="100000" kx="0" ky="0" algn="bl" rotWithShape="0" blurRad="5.048749812131878e+62" dist="1.2621874530329695e+62" dir="4.2316648611840007e+73">
+              <a:srgbClr val="959092">
+                <a:alpha val="2.2e+74"/>
+              </a:srgbClr>
+            </a:outerShdw>
+          </a:effectLst>
+        </p:spPr>
+      </p:sp>
+      <p:sp>
+        <p:nvSpPr>
+          <p:cNvPr id="11" name="Text 8"/>
+          <p:cNvSpPr txBox="1"/>
+          <p:nvPr/>
+        </p:nvSpPr>
+        <p:spPr>
+          <a:xfrm>
+            <a:off x="960120" y="2633472"/>
+            <a:ext cx="2944368" cy="566928"/>
+          </a:xfrm>
+          <a:prstGeom prst="rect">
+            <a:avLst/>
+          </a:prstGeom>
+          <a:noFill/>
+          <a:ln/>
+        </p:spPr>
+        <p:txBody>
+          <a:bodyPr wrap="square" lIns="0" tIns="0" rIns="0" bIns="0" rtlCol="0" anchor="t"/>
+          <a:lstStyle/>
+          <a:p>
+            <a:pPr algn="ctr" indent="0" marL="0">
+              <a:buNone/>
+            </a:pPr>
+            <a:r>
+              <a:rPr lang="en-US" sz="3800" spc="-140" kern="0" dirty="0">
+                <a:solidFill>
+                  <a:srgbClr val="2B2D30"/>
                 </a:solidFill>
                 <a:latin typeface="Montserrat ExtraBold" pitchFamily="34" charset="0"/>
                 <a:ea typeface="Montserrat ExtraBold" pitchFamily="34" charset="-122"/>
                 <a:cs typeface="Montserrat ExtraBold" pitchFamily="34" charset="-120"/>
               </a:rPr>
-              <a:t>733</a:t>
-            </a:r>
-            <a:endParaRPr lang="en-US" sz="4000" dirty="0"/>
-          </a:p>
-        </p:txBody>
-      </p:sp>
-      <p:sp>
-        <p:nvSpPr>
-          <p:cNvPr id="11" name="Text 8"/>
-          <p:cNvSpPr txBox="1"/>
-          <p:nvPr/>
-        </p:nvSpPr>
-        <p:spPr>
-          <a:xfrm>
-            <a:off x="777240" y="3127248"/>
-            <a:ext cx="2103120" cy="512064"/>
-          </a:xfrm>
-          <a:prstGeom prst="rect">
-            <a:avLst/>
-          </a:prstGeom>
-          <a:noFill/>
-          <a:ln/>
-        </p:spPr>
-        <p:txBody>
-          <a:bodyPr wrap="square" lIns="0" tIns="0" rIns="0" bIns="0" rtlCol="0" anchor="t"/>
-          <a:lstStyle/>
-          <a:p>
-            <a:pPr indent="0" marL="0">
-              <a:lnSpc>
-                <a:spcPct val="120000"/>
-              </a:lnSpc>
+              <a:t>1,518</a:t>
+            </a:r>
+            <a:endParaRPr lang="en-US" sz="3800" dirty="0"/>
+          </a:p>
+        </p:txBody>
+      </p:sp>
+      <p:sp>
+        <p:nvSpPr>
+          <p:cNvPr id="12" name="Text 9"/>
+          <p:cNvSpPr txBox="1"/>
+          <p:nvPr/>
+        </p:nvSpPr>
+        <p:spPr>
+          <a:xfrm>
+            <a:off x="960120" y="3255264"/>
+            <a:ext cx="2944368" cy="274320"/>
+          </a:xfrm>
+          <a:prstGeom prst="rect">
+            <a:avLst/>
+          </a:prstGeom>
+          <a:noFill/>
+          <a:ln/>
+        </p:spPr>
+        <p:txBody>
+          <a:bodyPr wrap="square" lIns="0" tIns="0" rIns="0" bIns="0" rtlCol="0" anchor="t"/>
+          <a:lstStyle/>
+          <a:p>
+            <a:pPr algn="ctr" indent="0" marL="0">
               <a:buNone/>
             </a:pPr>
             <a:r>
@@ -7228,15 +7287,146 @@
                 <a:ea typeface="Montserrat Medium" pitchFamily="34" charset="-122"/>
                 <a:cs typeface="Montserrat Medium" pitchFamily="34" charset="-120"/>
               </a:rPr>
-              <a:t>packages read from a real</a:t>
+              <a:t>packages scanned</a:t>
             </a:r>
             <a:endParaRPr lang="en-US" sz="950" dirty="0"/>
           </a:p>
-          <a:p>
-            <a:pPr indent="0" marL="0">
-              <a:lnSpc>
-                <a:spcPct val="120000"/>
-              </a:lnSpc>
+        </p:txBody>
+      </p:sp>
+      <p:sp>
+        <p:nvSpPr>
+          <p:cNvPr id="13" name="Text 10"/>
+          <p:cNvSpPr txBox="1"/>
+          <p:nvPr/>
+        </p:nvSpPr>
+        <p:spPr>
+          <a:xfrm>
+            <a:off x="4081196" y="2816352"/>
+            <a:ext cx="365760" cy="420624"/>
+          </a:xfrm>
+          <a:prstGeom prst="rect">
+            <a:avLst/>
+          </a:prstGeom>
+          <a:noFill/>
+          <a:ln/>
+        </p:spPr>
+        <p:txBody>
+          <a:bodyPr wrap="square" lIns="0" tIns="0" rIns="0" bIns="0" rtlCol="0" anchor="ctr"/>
+          <a:lstStyle/>
+          <a:p>
+            <a:pPr algn="ctr" indent="0" marL="0">
+              <a:buNone/>
+            </a:pPr>
+            <a:r>
+              <a:rPr lang="en-US" sz="2600" b="1" dirty="0">
+                <a:solidFill>
+                  <a:srgbClr val="C9C6C4"/>
+                </a:solidFill>
+                <a:latin typeface="Montserrat" pitchFamily="34" charset="0"/>
+                <a:ea typeface="Montserrat" pitchFamily="34" charset="-122"/>
+                <a:cs typeface="Montserrat" pitchFamily="34" charset="-120"/>
+              </a:rPr>
+              <a:t>›</a:t>
+            </a:r>
+            <a:endParaRPr lang="en-US" sz="2600" dirty="0"/>
+          </a:p>
+        </p:txBody>
+      </p:sp>
+      <p:sp>
+        <p:nvSpPr>
+          <p:cNvPr id="14" name="Shape 11"/>
+          <p:cNvSpPr/>
+          <p:nvPr/>
+        </p:nvSpPr>
+        <p:spPr>
+          <a:xfrm>
+            <a:off x="4440784" y="2432304"/>
+            <a:ext cx="3310128" cy="1207008"/>
+          </a:xfrm>
+          <a:prstGeom prst="roundRect">
+            <a:avLst>
+              <a:gd name="adj" fmla="val 4545"/>
+            </a:avLst>
+          </a:prstGeom>
+          <a:solidFill>
+            <a:srgbClr val="F5F4F3"/>
+          </a:solidFill>
+          <a:ln w="9525">
+            <a:solidFill>
+              <a:srgbClr val="E6E4E2"/>
+            </a:solidFill>
+            <a:prstDash val="solid"/>
+          </a:ln>
+          <a:effectLst>
+            <a:outerShdw sx="100000" sy="100000" kx="0" ky="0" algn="bl" rotWithShape="0" blurRad="6.411912261407485e+66" dist="1.6029780653518713e+66" dir="2.5389989167104004e+78">
+              <a:srgbClr val="959092">
+                <a:alpha val="2.2000000000000002e+79"/>
+              </a:srgbClr>
+            </a:outerShdw>
+          </a:effectLst>
+        </p:spPr>
+      </p:sp>
+      <p:sp>
+        <p:nvSpPr>
+          <p:cNvPr id="15" name="Text 12"/>
+          <p:cNvSpPr txBox="1"/>
+          <p:nvPr/>
+        </p:nvSpPr>
+        <p:spPr>
+          <a:xfrm>
+            <a:off x="4623664" y="2633472"/>
+            <a:ext cx="2944368" cy="566928"/>
+          </a:xfrm>
+          <a:prstGeom prst="rect">
+            <a:avLst/>
+          </a:prstGeom>
+          <a:noFill/>
+          <a:ln/>
+        </p:spPr>
+        <p:txBody>
+          <a:bodyPr wrap="square" lIns="0" tIns="0" rIns="0" bIns="0" rtlCol="0" anchor="t"/>
+          <a:lstStyle/>
+          <a:p>
+            <a:pPr algn="ctr" indent="0" marL="0">
+              <a:buNone/>
+            </a:pPr>
+            <a:r>
+              <a:rPr lang="en-US" sz="3800" spc="-140" kern="0" dirty="0">
+                <a:solidFill>
+                  <a:srgbClr val="2B2D30"/>
+                </a:solidFill>
+                <a:latin typeface="Montserrat ExtraBold" pitchFamily="34" charset="0"/>
+                <a:ea typeface="Montserrat ExtraBold" pitchFamily="34" charset="-122"/>
+                <a:cs typeface="Montserrat ExtraBold" pitchFamily="34" charset="-120"/>
+              </a:rPr>
+              <a:t>28</a:t>
+            </a:r>
+            <a:endParaRPr lang="en-US" sz="3800" dirty="0"/>
+          </a:p>
+        </p:txBody>
+      </p:sp>
+      <p:sp>
+        <p:nvSpPr>
+          <p:cNvPr id="16" name="Text 13"/>
+          <p:cNvSpPr txBox="1"/>
+          <p:nvPr/>
+        </p:nvSpPr>
+        <p:spPr>
+          <a:xfrm>
+            <a:off x="4623664" y="3255264"/>
+            <a:ext cx="2944368" cy="274320"/>
+          </a:xfrm>
+          <a:prstGeom prst="rect">
+            <a:avLst/>
+          </a:prstGeom>
+          <a:noFill/>
+          <a:ln/>
+        </p:spPr>
+        <p:txBody>
+          <a:bodyPr wrap="square" lIns="0" tIns="0" rIns="0" bIns="0" rtlCol="0" anchor="t"/>
+          <a:lstStyle/>
+          <a:p>
+            <a:pPr algn="ctr" indent="0" marL="0">
               <a:buNone/>
             </a:pPr>
             <a:r>
@@ -7248,7 +7438,7 @@
                 <a:ea typeface="Montserrat Medium" pitchFamily="34" charset="-122"/>
                 <a:cs typeface="Montserrat Medium" pitchFamily="34" charset="-120"/>
               </a:rPr>
-              <a:t>project's lockfile</a:t>
+              <a:t>carrying a known flaw</a:t>
             </a:r>
             <a:endParaRPr lang="en-US" sz="950" dirty="0"/>
           </a:p>
@@ -7256,30 +7446,103 @@
       </p:sp>
       <p:sp>
         <p:nvSpPr>
-          <p:cNvPr id="12" name="Text 9"/>
-          <p:cNvSpPr txBox="1"/>
-          <p:nvPr/>
-        </p:nvSpPr>
-        <p:spPr>
-          <a:xfrm>
-            <a:off x="3063240" y="2487168"/>
-            <a:ext cx="2103120" cy="603504"/>
-          </a:xfrm>
-          <a:prstGeom prst="rect">
-            <a:avLst/>
-          </a:prstGeom>
-          <a:noFill/>
-          <a:ln/>
-        </p:spPr>
-        <p:txBody>
-          <a:bodyPr wrap="square" lIns="0" tIns="0" rIns="0" bIns="0" rtlCol="0" anchor="t"/>
-          <a:lstStyle/>
-          <a:p>
-            <a:pPr indent="0" marL="0">
-              <a:buNone/>
-            </a:pPr>
-            <a:r>
-              <a:rPr lang="en-US" sz="4000" spc="-140" kern="0" dirty="0">
+          <p:cNvPr id="17" name="Text 14"/>
+          <p:cNvSpPr txBox="1"/>
+          <p:nvPr/>
+        </p:nvSpPr>
+        <p:spPr>
+          <a:xfrm>
+            <a:off x="7744739" y="2816352"/>
+            <a:ext cx="365760" cy="420624"/>
+          </a:xfrm>
+          <a:prstGeom prst="rect">
+            <a:avLst/>
+          </a:prstGeom>
+          <a:noFill/>
+          <a:ln/>
+        </p:spPr>
+        <p:txBody>
+          <a:bodyPr wrap="square" lIns="0" tIns="0" rIns="0" bIns="0" rtlCol="0" anchor="ctr"/>
+          <a:lstStyle/>
+          <a:p>
+            <a:pPr algn="ctr" indent="0" marL="0">
+              <a:buNone/>
+            </a:pPr>
+            <a:r>
+              <a:rPr lang="en-US" sz="2600" b="1" dirty="0">
+                <a:solidFill>
+                  <a:srgbClr val="C9C6C4"/>
+                </a:solidFill>
+                <a:latin typeface="Montserrat" pitchFamily="34" charset="0"/>
+                <a:ea typeface="Montserrat" pitchFamily="34" charset="-122"/>
+                <a:cs typeface="Montserrat" pitchFamily="34" charset="-120"/>
+              </a:rPr>
+              <a:t>›</a:t>
+            </a:r>
+            <a:endParaRPr lang="en-US" sz="2600" dirty="0"/>
+          </a:p>
+        </p:txBody>
+      </p:sp>
+      <p:sp>
+        <p:nvSpPr>
+          <p:cNvPr id="18" name="Shape 15"/>
+          <p:cNvSpPr/>
+          <p:nvPr/>
+        </p:nvSpPr>
+        <p:spPr>
+          <a:xfrm>
+            <a:off x="8104327" y="2432304"/>
+            <a:ext cx="3310128" cy="1207008"/>
+          </a:xfrm>
+          <a:prstGeom prst="roundRect">
+            <a:avLst>
+              <a:gd name="adj" fmla="val 4545"/>
+            </a:avLst>
+          </a:prstGeom>
+          <a:solidFill>
+            <a:srgbClr val="F6EEF0"/>
+          </a:solidFill>
+          <a:ln w="9525">
+            <a:solidFill>
+              <a:srgbClr val="942838"/>
+            </a:solidFill>
+            <a:prstDash val="solid"/>
+          </a:ln>
+          <a:effectLst>
+            <a:outerShdw sx="100000" sy="100000" kx="0" ky="0" algn="bl" rotWithShape="0" blurRad="8.143128571987506e+70" dist="2.0357821429968766e+70" dir="1.5233993500262402e+83">
+              <a:srgbClr val="959092">
+                <a:alpha val="2.2000000000000003e+84"/>
+              </a:srgbClr>
+            </a:outerShdw>
+          </a:effectLst>
+        </p:spPr>
+      </p:sp>
+      <p:sp>
+        <p:nvSpPr>
+          <p:cNvPr id="19" name="Text 16"/>
+          <p:cNvSpPr txBox="1"/>
+          <p:nvPr/>
+        </p:nvSpPr>
+        <p:spPr>
+          <a:xfrm>
+            <a:off x="8287207" y="2633472"/>
+            <a:ext cx="2944368" cy="566928"/>
+          </a:xfrm>
+          <a:prstGeom prst="rect">
+            <a:avLst/>
+          </a:prstGeom>
+          <a:noFill/>
+          <a:ln/>
+        </p:spPr>
+        <p:txBody>
+          <a:bodyPr wrap="square" lIns="0" tIns="0" rIns="0" bIns="0" rtlCol="0" anchor="t"/>
+          <a:lstStyle/>
+          <a:p>
+            <a:pPr algn="ctr" indent="0" marL="0">
+              <a:buNone/>
+            </a:pPr>
+            <a:r>
+              <a:rPr lang="en-US" sz="3800" spc="-140" kern="0" dirty="0">
                 <a:solidFill>
                   <a:srgbClr val="942838"/>
                 </a:solidFill>
@@ -7287,37 +7550,34 @@
                 <a:ea typeface="Montserrat ExtraBold" pitchFamily="34" charset="-122"/>
                 <a:cs typeface="Montserrat ExtraBold" pitchFamily="34" charset="-120"/>
               </a:rPr>
-              <a:t>2</a:t>
-            </a:r>
-            <a:endParaRPr lang="en-US" sz="4000" dirty="0"/>
-          </a:p>
-        </p:txBody>
-      </p:sp>
-      <p:sp>
-        <p:nvSpPr>
-          <p:cNvPr id="13" name="Text 10"/>
-          <p:cNvSpPr txBox="1"/>
-          <p:nvPr/>
-        </p:nvSpPr>
-        <p:spPr>
-          <a:xfrm>
-            <a:off x="3063240" y="3127248"/>
-            <a:ext cx="2103120" cy="512064"/>
-          </a:xfrm>
-          <a:prstGeom prst="rect">
-            <a:avLst/>
-          </a:prstGeom>
-          <a:noFill/>
-          <a:ln/>
-        </p:spPr>
-        <p:txBody>
-          <a:bodyPr wrap="square" lIns="0" tIns="0" rIns="0" bIns="0" rtlCol="0" anchor="t"/>
-          <a:lstStyle/>
-          <a:p>
-            <a:pPr indent="0" marL="0">
-              <a:lnSpc>
-                <a:spcPct val="120000"/>
-              </a:lnSpc>
+              <a:t>3</a:t>
+            </a:r>
+            <a:endParaRPr lang="en-US" sz="3800" dirty="0"/>
+          </a:p>
+        </p:txBody>
+      </p:sp>
+      <p:sp>
+        <p:nvSpPr>
+          <p:cNvPr id="20" name="Text 17"/>
+          <p:cNvSpPr txBox="1"/>
+          <p:nvPr/>
+        </p:nvSpPr>
+        <p:spPr>
+          <a:xfrm>
+            <a:off x="8287207" y="3255264"/>
+            <a:ext cx="2944368" cy="274320"/>
+          </a:xfrm>
+          <a:prstGeom prst="rect">
+            <a:avLst/>
+          </a:prstGeom>
+          <a:noFill/>
+          <a:ln/>
+        </p:spPr>
+        <p:txBody>
+          <a:bodyPr wrap="square" lIns="0" tIns="0" rIns="0" bIns="0" rtlCol="0" anchor="t"/>
+          <a:lstStyle/>
+          <a:p>
+            <a:pPr algn="ctr" indent="0" marL="0">
               <a:buNone/>
             </a:pPr>
             <a:r>
@@ -7329,89 +7589,142 @@
                 <a:ea typeface="Montserrat Medium" pitchFamily="34" charset="-122"/>
                 <a:cs typeface="Montserrat Medium" pitchFamily="34" charset="-120"/>
               </a:rPr>
-              <a:t>real bugs found in my own</a:t>
+              <a:t>needing a human decision</a:t>
             </a:r>
             <a:endParaRPr lang="en-US" sz="950" dirty="0"/>
           </a:p>
+        </p:txBody>
+      </p:sp>
+      <p:sp>
+        <p:nvSpPr>
+          <p:cNvPr id="21" name="Shape 18"/>
+          <p:cNvSpPr/>
+          <p:nvPr/>
+        </p:nvSpPr>
+        <p:spPr>
+          <a:xfrm>
+            <a:off x="777240" y="3931920"/>
+            <a:ext cx="5175504" cy="1371600"/>
+          </a:xfrm>
+          <a:prstGeom prst="roundRect">
+            <a:avLst>
+              <a:gd name="adj" fmla="val 4000"/>
+            </a:avLst>
+          </a:prstGeom>
+          <a:solidFill>
+            <a:srgbClr val="FFFFFF"/>
+          </a:solidFill>
+          <a:ln w="9525">
+            <a:solidFill>
+              <a:srgbClr val="E6E4E2"/>
+            </a:solidFill>
+            <a:prstDash val="solid"/>
+          </a:ln>
+          <a:effectLst>
+            <a:outerShdw sx="100000" sy="100000" kx="0" ky="0" algn="bl" rotWithShape="0" blurRad="1.0341773286424134e+75" dist="2.5854433216060334e+74" dir="9.14039610015744e+87">
+              <a:srgbClr val="959092">
+                <a:alpha val="2.2000000000000003e+89"/>
+              </a:srgbClr>
+            </a:outerShdw>
+          </a:effectLst>
+        </p:spPr>
+      </p:sp>
+      <p:sp>
+        <p:nvSpPr>
+          <p:cNvPr id="22" name="Shape 19"/>
+          <p:cNvSpPr/>
+          <p:nvPr/>
+        </p:nvSpPr>
+        <p:spPr>
+          <a:xfrm>
+            <a:off x="777240" y="3931920"/>
+            <a:ext cx="5175504" cy="45720"/>
+          </a:xfrm>
+          <a:prstGeom prst="rect">
+            <a:avLst/>
+          </a:prstGeom>
+          <a:solidFill>
+            <a:srgbClr val="C9C6C4"/>
+          </a:solidFill>
+          <a:ln/>
+        </p:spPr>
+      </p:sp>
+      <p:sp>
+        <p:nvSpPr>
+          <p:cNvPr id="23" name="Text 20"/>
+          <p:cNvSpPr txBox="1"/>
+          <p:nvPr/>
+        </p:nvSpPr>
+        <p:spPr>
+          <a:xfrm>
+            <a:off x="1069848" y="4187952"/>
+            <a:ext cx="4590288" cy="274320"/>
+          </a:xfrm>
+          <a:prstGeom prst="rect">
+            <a:avLst/>
+          </a:prstGeom>
+          <a:noFill/>
+          <a:ln/>
+        </p:spPr>
+        <p:txBody>
+          <a:bodyPr wrap="square" lIns="0" tIns="0" rIns="0" bIns="0" rtlCol="0" anchor="t"/>
+          <a:lstStyle/>
+          <a:p>
+            <a:pPr indent="0" marL="0">
+              <a:buNone/>
+            </a:pPr>
+            <a:r>
+              <a:rPr lang="en-US" sz="1350" dirty="0">
+                <a:solidFill>
+                  <a:srgbClr val="2B2D30"/>
+                </a:solidFill>
+                <a:latin typeface="Montserrat SemiBold" pitchFamily="34" charset="0"/>
+                <a:ea typeface="Montserrat SemiBold" pitchFamily="34" charset="-122"/>
+                <a:cs typeface="Montserrat SemiBold" pitchFamily="34" charset="-120"/>
+              </a:rPr>
+              <a:t>25 confirmed not called by our code</a:t>
+            </a:r>
+            <a:endParaRPr lang="en-US" sz="1350" dirty="0"/>
+          </a:p>
+        </p:txBody>
+      </p:sp>
+      <p:sp>
+        <p:nvSpPr>
+          <p:cNvPr id="24" name="Text 21"/>
+          <p:cNvSpPr txBox="1"/>
+          <p:nvPr/>
+        </p:nvSpPr>
+        <p:spPr>
+          <a:xfrm>
+            <a:off x="1069848" y="4517136"/>
+            <a:ext cx="4590288" cy="676656"/>
+          </a:xfrm>
+          <a:prstGeom prst="rect">
+            <a:avLst/>
+          </a:prstGeom>
+          <a:noFill/>
+          <a:ln/>
+        </p:spPr>
+        <p:txBody>
+          <a:bodyPr wrap="square" lIns="0" tIns="0" rIns="0" bIns="0" rtlCol="0" anchor="t"/>
+          <a:lstStyle/>
           <a:p>
             <a:pPr indent="0" marL="0">
               <a:lnSpc>
-                <a:spcPct val="120000"/>
+                <a:spcPct val="122000"/>
               </a:lnSpc>
               <a:buNone/>
             </a:pPr>
             <a:r>
-              <a:rPr lang="en-US" sz="950" spc="30" kern="0" dirty="0">
+              <a:rPr lang="en-US" sz="1100" dirty="0">
                 <a:solidFill>
                   <a:srgbClr val="6E7175"/>
-                </a:solidFill>
-                <a:latin typeface="Montserrat Medium" pitchFamily="34" charset="0"/>
-                <a:ea typeface="Montserrat Medium" pitchFamily="34" charset="-122"/>
-                <a:cs typeface="Montserrat Medium" pitchFamily="34" charset="-120"/>
-              </a:rPr>
-              <a:t>code, and fixed</a:t>
-            </a:r>
-            <a:endParaRPr lang="en-US" sz="950" dirty="0"/>
-          </a:p>
-        </p:txBody>
-      </p:sp>
-      <p:sp>
-        <p:nvSpPr>
-          <p:cNvPr id="14" name="Shape 11"/>
-          <p:cNvSpPr/>
-          <p:nvPr/>
-        </p:nvSpPr>
-        <p:spPr>
-          <a:xfrm>
-            <a:off x="777240" y="3858768"/>
-            <a:ext cx="4114800" cy="10973"/>
-          </a:xfrm>
-          <a:prstGeom prst="rect">
-            <a:avLst/>
-          </a:prstGeom>
-          <a:solidFill>
-            <a:srgbClr val="E6E4E2"/>
-          </a:solidFill>
-          <a:ln/>
-        </p:spPr>
-      </p:sp>
-      <p:sp>
-        <p:nvSpPr>
-          <p:cNvPr id="15" name="Text 12"/>
-          <p:cNvSpPr txBox="1"/>
-          <p:nvPr/>
-        </p:nvSpPr>
-        <p:spPr>
-          <a:xfrm>
-            <a:off x="777240" y="4041648"/>
-            <a:ext cx="4023360" cy="1005840"/>
-          </a:xfrm>
-          <a:prstGeom prst="rect">
-            <a:avLst/>
-          </a:prstGeom>
-          <a:noFill/>
-          <a:ln/>
-        </p:spPr>
-        <p:txBody>
-          <a:bodyPr wrap="square" lIns="0" tIns="0" rIns="0" bIns="0" rtlCol="0" anchor="t"/>
-          <a:lstStyle/>
-          <a:p>
-            <a:pPr indent="0" marL="0">
-              <a:lnSpc>
-                <a:spcPct val="126000"/>
-              </a:lnSpc>
-              <a:buNone/>
-            </a:pPr>
-            <a:r>
-              <a:rPr lang="en-US" sz="1100" dirty="0">
-                <a:solidFill>
-                  <a:srgbClr val="43464A"/>
                 </a:solidFill>
                 <a:latin typeface="Montserrat" pitchFamily="34" charset="0"/>
                 <a:ea typeface="Montserrat" pitchFamily="34" charset="-122"/>
                 <a:cs typeface="Montserrat" pitchFamily="34" charset="-120"/>
               </a:rPr>
-              <a:t>The bugs are the interesting part: one was an honesty bug — a "can't prove" result was being described as if the flaw had been confirmed absent. Exactly the failure the tool exists to prevent.</a:t>
+              <a:t>Dev and build tooling, resolved with a real code parser rather than a text search — so this is a confident answer, not a guess.</a:t>
             </a:r>
             <a:endParaRPr lang="en-US" sz="1100" dirty="0"/>
           </a:p>
@@ -7419,55 +7732,151 @@
       </p:sp>
       <p:sp>
         <p:nvSpPr>
-          <p:cNvPr id="16" name="Text 13"/>
-          <p:cNvSpPr txBox="1"/>
-          <p:nvPr/>
-        </p:nvSpPr>
-        <p:spPr>
-          <a:xfrm>
-            <a:off x="5358384" y="2432304"/>
-            <a:ext cx="6056071" cy="201168"/>
-          </a:xfrm>
-          <a:prstGeom prst="rect">
-            <a:avLst/>
-          </a:prstGeom>
-          <a:noFill/>
-          <a:ln/>
-        </p:spPr>
-        <p:txBody>
-          <a:bodyPr wrap="square" lIns="0" tIns="0" rIns="0" bIns="0" rtlCol="0" anchor="t"/>
-          <a:lstStyle/>
-          <a:p>
-            <a:pPr indent="0" marL="0">
-              <a:buNone/>
-            </a:pPr>
-            <a:r>
-              <a:rPr lang="en-US" sz="850" spc="140" kern="0" dirty="0">
-                <a:solidFill>
-                  <a:srgbClr val="942838"/>
+          <p:cNvPr id="25" name="Shape 22"/>
+          <p:cNvSpPr/>
+          <p:nvPr/>
+        </p:nvSpPr>
+        <p:spPr>
+          <a:xfrm>
+            <a:off x="6236208" y="3931920"/>
+            <a:ext cx="5175504" cy="1371600"/>
+          </a:xfrm>
+          <a:prstGeom prst="roundRect">
+            <a:avLst>
+              <a:gd name="adj" fmla="val 4000"/>
+            </a:avLst>
+          </a:prstGeom>
+          <a:solidFill>
+            <a:srgbClr val="FFFFFF"/>
+          </a:solidFill>
+          <a:ln w="9525">
+            <a:solidFill>
+              <a:srgbClr val="942838"/>
+            </a:solidFill>
+            <a:prstDash val="solid"/>
+          </a:ln>
+          <a:effectLst>
+            <a:outerShdw sx="100000" sy="100000" kx="0" ky="0" algn="bl" rotWithShape="0" blurRad="1.313405207375865e+79" dist="3.2835130184396625e+78" dir="5.484237660094465e+92">
+              <a:srgbClr val="959092">
+                <a:alpha val="2.2e+94"/>
+              </a:srgbClr>
+            </a:outerShdw>
+          </a:effectLst>
+        </p:spPr>
+      </p:sp>
+      <p:sp>
+        <p:nvSpPr>
+          <p:cNvPr id="26" name="Shape 23"/>
+          <p:cNvSpPr/>
+          <p:nvPr/>
+        </p:nvSpPr>
+        <p:spPr>
+          <a:xfrm>
+            <a:off x="6236208" y="3931920"/>
+            <a:ext cx="5175504" cy="45720"/>
+          </a:xfrm>
+          <a:prstGeom prst="rect">
+            <a:avLst/>
+          </a:prstGeom>
+          <a:solidFill>
+            <a:srgbClr val="942838"/>
+          </a:solidFill>
+          <a:ln/>
+        </p:spPr>
+      </p:sp>
+      <p:sp>
+        <p:nvSpPr>
+          <p:cNvPr id="27" name="Text 24"/>
+          <p:cNvSpPr txBox="1"/>
+          <p:nvPr/>
+        </p:nvSpPr>
+        <p:spPr>
+          <a:xfrm>
+            <a:off x="6528816" y="4187952"/>
+            <a:ext cx="4590288" cy="274320"/>
+          </a:xfrm>
+          <a:prstGeom prst="rect">
+            <a:avLst/>
+          </a:prstGeom>
+          <a:noFill/>
+          <a:ln/>
+        </p:spPr>
+        <p:txBody>
+          <a:bodyPr wrap="square" lIns="0" tIns="0" rIns="0" bIns="0" rtlCol="0" anchor="t"/>
+          <a:lstStyle/>
+          <a:p>
+            <a:pPr indent="0" marL="0">
+              <a:buNone/>
+            </a:pPr>
+            <a:r>
+              <a:rPr lang="en-US" sz="1350" dirty="0">
+                <a:solidFill>
+                  <a:srgbClr val="2B2D30"/>
                 </a:solidFill>
                 <a:latin typeface="Montserrat SemiBold" pitchFamily="34" charset="0"/>
                 <a:ea typeface="Montserrat SemiBold" pitchFamily="34" charset="-122"/>
                 <a:cs typeface="Montserrat SemiBold" pitchFamily="34" charset="-120"/>
               </a:rPr>
-              <a:t>WHAT I ACTUALLY TESTED</a:t>
-            </a:r>
-            <a:endParaRPr lang="en-US" sz="850" dirty="0"/>
-          </a:p>
-        </p:txBody>
-      </p:sp>
-      <p:sp>
-        <p:nvSpPr>
-          <p:cNvPr id="17" name="Shape 14"/>
+              <a:t>2 could not be proven either way</a:t>
+            </a:r>
+            <a:endParaRPr lang="en-US" sz="1350" dirty="0"/>
+          </a:p>
+        </p:txBody>
+      </p:sp>
+      <p:sp>
+        <p:nvSpPr>
+          <p:cNvPr id="28" name="Text 25"/>
+          <p:cNvSpPr txBox="1"/>
+          <p:nvPr/>
+        </p:nvSpPr>
+        <p:spPr>
+          <a:xfrm>
+            <a:off x="6528816" y="4517136"/>
+            <a:ext cx="4590288" cy="676656"/>
+          </a:xfrm>
+          <a:prstGeom prst="rect">
+            <a:avLst/>
+          </a:prstGeom>
+          <a:noFill/>
+          <a:ln/>
+        </p:spPr>
+        <p:txBody>
+          <a:bodyPr wrap="square" lIns="0" tIns="0" rIns="0" bIns="0" rtlCol="0" anchor="t"/>
+          <a:lstStyle/>
+          <a:p>
+            <a:pPr indent="0" marL="0">
+              <a:lnSpc>
+                <a:spcPct val="122000"/>
+              </a:lnSpc>
+              <a:buNone/>
+            </a:pPr>
+            <a:r>
+              <a:rPr lang="en-US" sz="1100" dirty="0">
+                <a:solidFill>
+                  <a:srgbClr val="6E7175"/>
+                </a:solidFill>
+                <a:latin typeface="Montserrat" pitchFamily="34" charset="0"/>
+                <a:ea typeface="Montserrat" pitchFamily="34" charset="-122"/>
+                <a:cs typeface="Montserrat" pitchFamily="34" charset="-120"/>
+              </a:rPr>
+              <a:t>Both actively used by the app. AEGIS reported them as unproven rather than safe — the exact behaviour it exists to have.</a:t>
+            </a:r>
+            <a:endParaRPr lang="en-US" sz="1100" dirty="0"/>
+          </a:p>
+        </p:txBody>
+      </p:sp>
+      <p:sp>
+        <p:nvSpPr>
+          <p:cNvPr id="29" name="Shape 26"/>
           <p:cNvSpPr/>
           <p:nvPr/>
         </p:nvSpPr>
         <p:spPr>
           <a:xfrm>
-            <a:off x="5358384" y="2779776"/>
-            <a:ext cx="45720" cy="182880"/>
-          </a:xfrm>
-          <a:prstGeom prst="rect">
+            <a:off x="795528" y="5568696"/>
+            <a:ext cx="73152" cy="73152"/>
+          </a:xfrm>
+          <a:prstGeom prst="ellipse">
             <a:avLst/>
           </a:prstGeom>
           <a:solidFill>
@@ -7478,72 +7887,30 @@
       </p:sp>
       <p:sp>
         <p:nvSpPr>
-          <p:cNvPr id="18" name="Text 15"/>
-          <p:cNvSpPr txBox="1"/>
-          <p:nvPr/>
-        </p:nvSpPr>
-        <p:spPr>
-          <a:xfrm>
-            <a:off x="5541264" y="2724912"/>
-            <a:ext cx="5873191" cy="237744"/>
-          </a:xfrm>
-          <a:prstGeom prst="rect">
-            <a:avLst/>
-          </a:prstGeom>
-          <a:noFill/>
-          <a:ln/>
-        </p:spPr>
-        <p:txBody>
-          <a:bodyPr wrap="square" lIns="0" tIns="0" rIns="0" bIns="0" rtlCol="0" anchor="t"/>
-          <a:lstStyle/>
-          <a:p>
-            <a:pPr indent="0" marL="0">
-              <a:buNone/>
-            </a:pPr>
-            <a:r>
-              <a:rPr lang="en-US" sz="1200" dirty="0">
-                <a:solidFill>
-                  <a:srgbClr val="2B2D30"/>
-                </a:solidFill>
-                <a:latin typeface="Montserrat SemiBold" pitchFamily="34" charset="0"/>
-                <a:ea typeface="Montserrat SemiBold" pitchFamily="34" charset="-122"/>
-                <a:cs typeface="Montserrat SemiBold" pitchFamily="34" charset="-120"/>
-              </a:rPr>
-              <a:t>Tested end to end, not just reviewed</a:t>
-            </a:r>
-            <a:endParaRPr lang="en-US" sz="1200" dirty="0"/>
-          </a:p>
-        </p:txBody>
-      </p:sp>
-      <p:sp>
-        <p:nvSpPr>
-          <p:cNvPr id="19" name="Text 16"/>
-          <p:cNvSpPr txBox="1"/>
-          <p:nvPr/>
-        </p:nvSpPr>
-        <p:spPr>
-          <a:xfrm>
-            <a:off x="5541264" y="2980944"/>
-            <a:ext cx="5836615" cy="548640"/>
-          </a:xfrm>
-          <a:prstGeom prst="rect">
-            <a:avLst/>
-          </a:prstGeom>
-          <a:noFill/>
-          <a:ln/>
-        </p:spPr>
-        <p:txBody>
-          <a:bodyPr wrap="square" lIns="0" tIns="0" rIns="0" bIns="0" rtlCol="0" anchor="t"/>
-          <a:lstStyle/>
-          <a:p>
-            <a:pPr indent="0" marL="0">
-              <a:lnSpc>
-                <a:spcPct val="120000"/>
-              </a:lnSpc>
-              <a:buNone/>
-            </a:pPr>
-            <a:r>
-              <a:rPr lang="en-US" sz="1100" dirty="0">
+          <p:cNvPr id="30" name="Text 27"/>
+          <p:cNvSpPr txBox="1"/>
+          <p:nvPr/>
+        </p:nvSpPr>
+        <p:spPr>
+          <a:xfrm>
+            <a:off x="996696" y="5504688"/>
+            <a:ext cx="10417759" cy="219456"/>
+          </a:xfrm>
+          <a:prstGeom prst="rect">
+            <a:avLst/>
+          </a:prstGeom>
+          <a:noFill/>
+          <a:ln/>
+        </p:spPr>
+        <p:txBody>
+          <a:bodyPr wrap="square" lIns="0" tIns="0" rIns="0" bIns="0" rtlCol="0" anchor="t"/>
+          <a:lstStyle/>
+          <a:p>
+            <a:pPr indent="0" marL="0">
+              <a:buNone/>
+            </a:pPr>
+            <a:r>
+              <a:rPr lang="en-US" sz="1050" dirty="0">
                 <a:solidFill>
                   <a:srgbClr val="6E7175"/>
                 </a:solidFill>
@@ -7551,24 +7918,24 @@
                 <a:ea typeface="Montserrat" pitchFamily="34" charset="-122"/>
                 <a:cs typeface="Montserrat" pitchFamily="34" charset="-120"/>
               </a:rPr>
-              <a:t>Ran the whole pipeline against a real open-source project and read all 733 packages out of its lockfile.</a:t>
-            </a:r>
-            <a:endParaRPr lang="en-US" sz="1100" dirty="0"/>
-          </a:p>
-        </p:txBody>
-      </p:sp>
-      <p:sp>
-        <p:nvSpPr>
-          <p:cNvPr id="20" name="Shape 17"/>
+              <a:t>None of the 28 are on the US government's actively-exploited list.</a:t>
+            </a:r>
+            <a:endParaRPr lang="en-US" sz="1050" dirty="0"/>
+          </a:p>
+        </p:txBody>
+      </p:sp>
+      <p:sp>
+        <p:nvSpPr>
+          <p:cNvPr id="31" name="Shape 28"/>
           <p:cNvSpPr/>
           <p:nvPr/>
         </p:nvSpPr>
         <p:spPr>
           <a:xfrm>
-            <a:off x="5358384" y="3648456"/>
-            <a:ext cx="45720" cy="182880"/>
-          </a:xfrm>
-          <a:prstGeom prst="rect">
+            <a:off x="795528" y="5797296"/>
+            <a:ext cx="73152" cy="73152"/>
+          </a:xfrm>
+          <a:prstGeom prst="ellipse">
             <a:avLst/>
           </a:prstGeom>
           <a:solidFill>
@@ -7579,72 +7946,30 @@
       </p:sp>
       <p:sp>
         <p:nvSpPr>
-          <p:cNvPr id="21" name="Text 18"/>
-          <p:cNvSpPr txBox="1"/>
-          <p:nvPr/>
-        </p:nvSpPr>
-        <p:spPr>
-          <a:xfrm>
-            <a:off x="5541264" y="3593592"/>
-            <a:ext cx="5873191" cy="237744"/>
-          </a:xfrm>
-          <a:prstGeom prst="rect">
-            <a:avLst/>
-          </a:prstGeom>
-          <a:noFill/>
-          <a:ln/>
-        </p:spPr>
-        <p:txBody>
-          <a:bodyPr wrap="square" lIns="0" tIns="0" rIns="0" bIns="0" rtlCol="0" anchor="t"/>
-          <a:lstStyle/>
-          <a:p>
-            <a:pPr indent="0" marL="0">
-              <a:buNone/>
-            </a:pPr>
-            <a:r>
-              <a:rPr lang="en-US" sz="1200" dirty="0">
-                <a:solidFill>
-                  <a:srgbClr val="2B2D30"/>
-                </a:solidFill>
-                <a:latin typeface="Montserrat SemiBold" pitchFamily="34" charset="0"/>
-                <a:ea typeface="Montserrat SemiBold" pitchFamily="34" charset="-122"/>
-                <a:cs typeface="Montserrat SemiBold" pitchFamily="34" charset="-120"/>
-              </a:rPr>
-              <a:t>It failed loudly, which is the point</a:t>
-            </a:r>
-            <a:endParaRPr lang="en-US" sz="1200" dirty="0"/>
-          </a:p>
-        </p:txBody>
-      </p:sp>
-      <p:sp>
-        <p:nvSpPr>
-          <p:cNvPr id="22" name="Text 19"/>
-          <p:cNvSpPr txBox="1"/>
-          <p:nvPr/>
-        </p:nvSpPr>
-        <p:spPr>
-          <a:xfrm>
-            <a:off x="5541264" y="3849624"/>
-            <a:ext cx="5836615" cy="548640"/>
-          </a:xfrm>
-          <a:prstGeom prst="rect">
-            <a:avLst/>
-          </a:prstGeom>
-          <a:noFill/>
-          <a:ln/>
-        </p:spPr>
-        <p:txBody>
-          <a:bodyPr wrap="square" lIns="0" tIns="0" rIns="0" bIns="0" rtlCol="0" anchor="t"/>
-          <a:lstStyle/>
-          <a:p>
-            <a:pPr indent="0" marL="0">
-              <a:lnSpc>
-                <a:spcPct val="120000"/>
-              </a:lnSpc>
-              <a:buNone/>
-            </a:pPr>
-            <a:r>
-              <a:rPr lang="en-US" sz="1100" dirty="0">
+          <p:cNvPr id="32" name="Text 29"/>
+          <p:cNvSpPr txBox="1"/>
+          <p:nvPr/>
+        </p:nvSpPr>
+        <p:spPr>
+          <a:xfrm>
+            <a:off x="996696" y="5733288"/>
+            <a:ext cx="10417759" cy="219456"/>
+          </a:xfrm>
+          <a:prstGeom prst="rect">
+            <a:avLst/>
+          </a:prstGeom>
+          <a:noFill/>
+          <a:ln/>
+        </p:spPr>
+        <p:txBody>
+          <a:bodyPr wrap="square" lIns="0" tIns="0" rIns="0" bIns="0" rtlCol="0" anchor="t"/>
+          <a:lstStyle/>
+          <a:p>
+            <a:pPr indent="0" marL="0">
+              <a:buNone/>
+            </a:pPr>
+            <a:r>
+              <a:rPr lang="en-US" sz="1050" dirty="0">
                 <a:solidFill>
                   <a:srgbClr val="6E7175"/>
                 </a:solidFill>
@@ -7652,24 +7977,24 @@
                 <a:ea typeface="Montserrat" pitchFamily="34" charset="-122"/>
                 <a:cs typeface="Montserrat" pitchFamily="34" charset="-120"/>
               </a:rPr>
-              <a:t>When the company network blocked the flaw-database lookup, SCAN reported an error instead of reporting "clean."</a:t>
-            </a:r>
-            <a:endParaRPr lang="en-US" sz="1100" dirty="0"/>
-          </a:p>
-        </p:txBody>
-      </p:sp>
-      <p:sp>
-        <p:nvSpPr>
-          <p:cNvPr id="23" name="Shape 20"/>
+              <a:t>All three needing a decision have a non-breaking upgrade available, and the repo's own tests can verify it.</a:t>
+            </a:r>
+            <a:endParaRPr lang="en-US" sz="1050" dirty="0"/>
+          </a:p>
+        </p:txBody>
+      </p:sp>
+      <p:sp>
+        <p:nvSpPr>
+          <p:cNvPr id="33" name="Shape 30"/>
           <p:cNvSpPr/>
           <p:nvPr/>
         </p:nvSpPr>
         <p:spPr>
           <a:xfrm>
-            <a:off x="5358384" y="4517136"/>
-            <a:ext cx="45720" cy="182880"/>
-          </a:xfrm>
-          <a:prstGeom prst="rect">
+            <a:off x="795528" y="6025896"/>
+            <a:ext cx="73152" cy="73152"/>
+          </a:xfrm>
+          <a:prstGeom prst="ellipse">
             <a:avLst/>
           </a:prstGeom>
           <a:solidFill>
@@ -7680,72 +8005,30 @@
       </p:sp>
       <p:sp>
         <p:nvSpPr>
-          <p:cNvPr id="24" name="Text 21"/>
-          <p:cNvSpPr txBox="1"/>
-          <p:nvPr/>
-        </p:nvSpPr>
-        <p:spPr>
-          <a:xfrm>
-            <a:off x="5541264" y="4462272"/>
-            <a:ext cx="5873191" cy="237744"/>
-          </a:xfrm>
-          <a:prstGeom prst="rect">
-            <a:avLst/>
-          </a:prstGeom>
-          <a:noFill/>
-          <a:ln/>
-        </p:spPr>
-        <p:txBody>
-          <a:bodyPr wrap="square" lIns="0" tIns="0" rIns="0" bIns="0" rtlCol="0" anchor="t"/>
-          <a:lstStyle/>
-          <a:p>
-            <a:pPr indent="0" marL="0">
-              <a:buNone/>
-            </a:pPr>
-            <a:r>
-              <a:rPr lang="en-US" sz="1200" dirty="0">
-                <a:solidFill>
-                  <a:srgbClr val="2B2D30"/>
-                </a:solidFill>
-                <a:latin typeface="Montserrat SemiBold" pitchFamily="34" charset="0"/>
-                <a:ea typeface="Montserrat SemiBold" pitchFamily="34" charset="-122"/>
-                <a:cs typeface="Montserrat SemiBold" pitchFamily="34" charset="-120"/>
-              </a:rPr>
-              <a:t>It refused to guess</a:t>
-            </a:r>
-            <a:endParaRPr lang="en-US" sz="1200" dirty="0"/>
-          </a:p>
-        </p:txBody>
-      </p:sp>
-      <p:sp>
-        <p:nvSpPr>
-          <p:cNvPr id="25" name="Text 22"/>
-          <p:cNvSpPr txBox="1"/>
-          <p:nvPr/>
-        </p:nvSpPr>
-        <p:spPr>
-          <a:xfrm>
-            <a:off x="5541264" y="4718304"/>
-            <a:ext cx="5836615" cy="548640"/>
-          </a:xfrm>
-          <a:prstGeom prst="rect">
-            <a:avLst/>
-          </a:prstGeom>
-          <a:noFill/>
-          <a:ln/>
-        </p:spPr>
-        <p:txBody>
-          <a:bodyPr wrap="square" lIns="0" tIns="0" rIns="0" bIns="0" rtlCol="0" anchor="t"/>
-          <a:lstStyle/>
-          <a:p>
-            <a:pPr indent="0" marL="0">
-              <a:lnSpc>
-                <a:spcPct val="120000"/>
-              </a:lnSpc>
-              <a:buNone/>
-            </a:pPr>
-            <a:r>
-              <a:rPr lang="en-US" sz="1100" dirty="0">
+          <p:cNvPr id="34" name="Text 31"/>
+          <p:cNvSpPr txBox="1"/>
+          <p:nvPr/>
+        </p:nvSpPr>
+        <p:spPr>
+          <a:xfrm>
+            <a:off x="996696" y="5961888"/>
+            <a:ext cx="10417759" cy="219456"/>
+          </a:xfrm>
+          <a:prstGeom prst="rect">
+            <a:avLst/>
+          </a:prstGeom>
+          <a:noFill/>
+          <a:ln/>
+        </p:spPr>
+        <p:txBody>
+          <a:bodyPr wrap="square" lIns="0" tIns="0" rIns="0" bIns="0" rtlCol="0" anchor="t"/>
+          <a:lstStyle/>
+          <a:p>
+            <a:pPr indent="0" marL="0">
+              <a:buNone/>
+            </a:pPr>
+            <a:r>
+              <a:rPr lang="en-US" sz="1050" dirty="0">
                 <a:solidFill>
                   <a:srgbClr val="6E7175"/>
                 </a:solidFill>
@@ -7753,110 +8036,9 @@
                 <a:ea typeface="Montserrat" pitchFamily="34" charset="-122"/>
                 <a:cs typeface="Montserrat" pitchFamily="34" charset="-120"/>
               </a:rPr>
-              <a:t>Forced onto its weakest analysis method, REACH answered "can't prove" rather than calling anything safe.</a:t>
-            </a:r>
-            <a:endParaRPr lang="en-US" sz="1100" dirty="0"/>
-          </a:p>
-        </p:txBody>
-      </p:sp>
-      <p:sp>
-        <p:nvSpPr>
-          <p:cNvPr id="26" name="Shape 23"/>
-          <p:cNvSpPr/>
-          <p:nvPr/>
-        </p:nvSpPr>
-        <p:spPr>
-          <a:xfrm>
-            <a:off x="5358384" y="5385816"/>
-            <a:ext cx="45720" cy="182880"/>
-          </a:xfrm>
-          <a:prstGeom prst="rect">
-            <a:avLst/>
-          </a:prstGeom>
-          <a:solidFill>
-            <a:srgbClr val="942838"/>
-          </a:solidFill>
-          <a:ln/>
-        </p:spPr>
-      </p:sp>
-      <p:sp>
-        <p:nvSpPr>
-          <p:cNvPr id="27" name="Text 24"/>
-          <p:cNvSpPr txBox="1"/>
-          <p:nvPr/>
-        </p:nvSpPr>
-        <p:spPr>
-          <a:xfrm>
-            <a:off x="5541264" y="5330952"/>
-            <a:ext cx="5873191" cy="237744"/>
-          </a:xfrm>
-          <a:prstGeom prst="rect">
-            <a:avLst/>
-          </a:prstGeom>
-          <a:noFill/>
-          <a:ln/>
-        </p:spPr>
-        <p:txBody>
-          <a:bodyPr wrap="square" lIns="0" tIns="0" rIns="0" bIns="0" rtlCol="0" anchor="t"/>
-          <a:lstStyle/>
-          <a:p>
-            <a:pPr indent="0" marL="0">
-              <a:buNone/>
-            </a:pPr>
-            <a:r>
-              <a:rPr lang="en-US" sz="1200" dirty="0">
-                <a:solidFill>
-                  <a:srgbClr val="2B2D30"/>
-                </a:solidFill>
-                <a:latin typeface="Montserrat SemiBold" pitchFamily="34" charset="0"/>
-                <a:ea typeface="Montserrat SemiBold" pitchFamily="34" charset="-122"/>
-                <a:cs typeface="Montserrat SemiBold" pitchFamily="34" charset="-120"/>
-              </a:rPr>
-              <a:t>The safety rails hold</a:t>
-            </a:r>
-            <a:endParaRPr lang="en-US" sz="1200" dirty="0"/>
-          </a:p>
-        </p:txBody>
-      </p:sp>
-      <p:sp>
-        <p:nvSpPr>
-          <p:cNvPr id="28" name="Text 25"/>
-          <p:cNvSpPr txBox="1"/>
-          <p:nvPr/>
-        </p:nvSpPr>
-        <p:spPr>
-          <a:xfrm>
-            <a:off x="5541264" y="5586984"/>
-            <a:ext cx="5836615" cy="548640"/>
-          </a:xfrm>
-          <a:prstGeom prst="rect">
-            <a:avLst/>
-          </a:prstGeom>
-          <a:noFill/>
-          <a:ln/>
-        </p:spPr>
-        <p:txBody>
-          <a:bodyPr wrap="square" lIns="0" tIns="0" rIns="0" bIns="0" rtlCol="0" anchor="t"/>
-          <a:lstStyle/>
-          <a:p>
-            <a:pPr indent="0" marL="0">
-              <a:lnSpc>
-                <a:spcPct val="120000"/>
-              </a:lnSpc>
-              <a:buNone/>
-            </a:pPr>
-            <a:r>
-              <a:rPr lang="en-US" sz="1100" dirty="0">
-                <a:solidFill>
-                  <a:srgbClr val="6E7175"/>
-                </a:solidFill>
-                <a:latin typeface="Montserrat" pitchFamily="34" charset="0"/>
-                <a:ea typeface="Montserrat" pitchFamily="34" charset="-122"/>
-                <a:cs typeface="Montserrat" pitchFamily="34" charset="-120"/>
-              </a:rPr>
-              <a:t>FIX refused to run without explicit approval, and refused to touch a protected branch even once approved.</a:t>
-            </a:r>
-            <a:endParaRPr lang="en-US" sz="1100" dirty="0"/>
+              <a:t>The scan was read-only. Nothing in the repository was changed.</a:t>
+            </a:r>
+            <a:endParaRPr lang="en-US" sz="1050" dirty="0"/>
           </a:p>
         </p:txBody>
       </p:sp>
@@ -8148,7 +8330,7 @@
                 <a:ea typeface="Montserrat Medium" pitchFamily="34" charset="-122"/>
                 <a:cs typeface="Montserrat Medium" pitchFamily="34" charset="-120"/>
               </a:rPr>
-              <a:t>The pipeline is built and its safety rails are tested. Three things still need a real run before I would call it finished.</a:t>
+              <a:t>Built, safety-rail tested, and already run against a real repository. Three things would take it further.</a:t>
             </a:r>
             <a:endParaRPr lang="en-US" sz="1400" dirty="0"/>
           </a:p>
@@ -8180,9 +8362,9 @@
             <a:prstDash val="solid"/>
           </a:ln>
           <a:effectLst>
-            <a:outerShdw sx="100000" sy="100000" kx="0" ky="0" algn="bl" rotWithShape="0" blurRad="5.048749812131878e+62" dist="1.2621874530329695e+62" dir="4.2316648611840007e+73">
+            <a:outerShdw sx="100000" sy="100000" kx="0" ky="0" algn="bl" rotWithShape="0" blurRad="1.6680246133673485e+83" dist="4.170061533418371e+82" dir="3.2905425960566786e+97">
               <a:srgbClr val="959092">
-                <a:alpha val="2.2e+74"/>
+                <a:alpha val="2.2000000000000003e+99"/>
               </a:srgbClr>
             </a:outerShdw>
           </a:effectLst>
@@ -8283,7 +8465,7 @@
                 <a:ea typeface="Montserrat SemiBold" pitchFamily="34" charset="-122"/>
                 <a:cs typeface="Montserrat SemiBold" pitchFamily="34" charset="-120"/>
               </a:rPr>
-              <a:t>Unblock the live lookups</a:t>
+              <a:t>Teach it the framework packages</a:t>
             </a:r>
             <a:endParaRPr lang="en-US" sz="1450" dirty="0"/>
           </a:p>
@@ -8325,7 +8507,7 @@
                 <a:ea typeface="Montserrat" pitchFamily="34" charset="-122"/>
                 <a:cs typeface="Montserrat" pitchFamily="34" charset="-120"/>
               </a:rPr>
-              <a:t>The company security proxy presents a malformed certificate that modern security libraries correctly reject, so the lookups fail. The real fix is an inspection bypass. Meanwhile I built the workaround: the scan splits in two, so the lookup can run from an unblocked network.</a:t>
+              <a:t>AEGIS knows exactly which function is the dangerous one for about nine packages. Angular is not among them yet — which is why two findings came back "can't prove" instead of a straight answer. Extending that list turns those into a verdict.</a:t>
             </a:r>
             <a:endParaRPr lang="en-US" sz="1100" dirty="0"/>
           </a:p>
@@ -8357,9 +8539,9 @@
             <a:prstDash val="solid"/>
           </a:ln>
           <a:effectLst>
-            <a:outerShdw sx="100000" sy="100000" kx="0" ky="0" algn="bl" rotWithShape="0" blurRad="6.411912261407485e+66" dist="1.6029780653518713e+66" dir="2.5389989167104004e+78">
+            <a:outerShdw sx="100000" sy="100000" kx="0" ky="0" algn="bl" rotWithShape="0" blurRad="2.1183912589765324e+87" dist="5.295978147441331e+86" dir="1.9743255576340073e+102">
               <a:srgbClr val="959092">
-                <a:alpha val="2.2000000000000002e+79"/>
+                <a:alpha val="2.2000000000000003e+104"/>
               </a:srgbClr>
             </a:outerShdw>
           </a:effectLst>
@@ -8460,7 +8642,7 @@
                 <a:ea typeface="Montserrat SemiBold" pitchFamily="34" charset="-122"/>
                 <a:cs typeface="Montserrat SemiBold" pitchFamily="34" charset="-120"/>
               </a:rPr>
-              <a:t>Read code structure, not just text</a:t>
+              <a:t>Keep the live lookups working everywhere</a:t>
             </a:r>
             <a:endParaRPr lang="en-US" sz="1450" dirty="0"/>
           </a:p>
@@ -8502,7 +8684,7 @@
                 <a:ea typeface="Montserrat" pitchFamily="34" charset="-122"/>
                 <a:cs typeface="Montserrat" pitchFamily="34" charset="-120"/>
               </a:rPr>
-              <a:t>Reachability currently falls back to searching text. With the right tooling present it reads the code's actual structure, which is far more accurate. That still needs a real run.</a:t>
+              <a:t>This run pulled real flaw data live. On networks where the security proxy inspects traffic it still fails, so the split-scan workaround stays until an inspection bypass is in place.</a:t>
             </a:r>
             <a:endParaRPr lang="en-US" sz="1100" dirty="0"/>
           </a:p>
@@ -8534,9 +8716,9 @@
             <a:prstDash val="solid"/>
           </a:ln>
           <a:effectLst>
-            <a:outerShdw sx="100000" sy="100000" kx="0" ky="0" algn="bl" rotWithShape="0" blurRad="8.143128571987506e+70" dist="2.0357821429968766e+70" dir="1.5233993500262402e+83">
+            <a:outerShdw sx="100000" sy="100000" kx="0" ky="0" algn="bl" rotWithShape="0" blurRad="2.6903568989001962e+91" dist="6.7258922472504905e+90" dir="1.1845953345804043e+107">
               <a:srgbClr val="959092">
-                <a:alpha val="2.2000000000000003e+84"/>
+                <a:alpha val="2.2000000000000003e+109"/>
               </a:srgbClr>
             </a:outerShdw>
           </a:effectLst>
@@ -8732,7 +8914,7 @@
                 <a:ea typeface="Montserrat" pitchFamily="34" charset="-122"/>
                 <a:cs typeface="Montserrat" pitchFamily="34" charset="-120"/>
               </a:rPr>
-              <a:t>  the parts that judge risk are built and tested. The parts that depend on the corporate network are not proven yet.</a:t>
+              <a:t>  it works, and it has been run for real. What is left is widening what it can answer with certainty, and getting it into other hands.</a:t>
             </a:r>
             <a:endParaRPr lang="en-US" sz="1150" dirty="0"/>
           </a:p>
@@ -10283,9 +10465,9 @@
             <a:prstDash val="solid"/>
           </a:ln>
           <a:effectLst>
-            <a:outerShdw sx="100000" sy="100000" kx="0" ky="0" algn="bl" rotWithShape="0" blurRad="1.0341773286424134e+75" dist="2.5854433216060334e+74" dir="9.14039610015744e+87">
+            <a:outerShdw sx="100000" sy="100000" kx="0" ky="0" algn="bl" rotWithShape="0" blurRad="3.416753261603249e+95" dist="8.541883154008123e+94" dir="7.107572007482426e+111">
               <a:srgbClr val="959092">
-                <a:alpha val="2.2000000000000003e+89"/>
+                <a:alpha val="2.2000000000000003e+114"/>
               </a:srgbClr>
             </a:outerShdw>
           </a:effectLst>
@@ -10398,9 +10580,9 @@
             <a:prstDash val="solid"/>
           </a:ln>
           <a:effectLst>
-            <a:outerShdw sx="100000" sy="100000" kx="0" ky="0" algn="bl" rotWithShape="0" blurRad="1.313405207375865e+79" dist="3.2835130184396625e+78" dir="5.484237660094465e+92">
+            <a:outerShdw sx="100000" sy="100000" kx="0" ky="0" algn="bl" rotWithShape="0" blurRad="4.3392766422361264e+99" dist="1.0848191605590316e+99" dir="4.2645432044894554e+116">
               <a:srgbClr val="959092">
-                <a:alpha val="2.2e+94"/>
+                <a:alpha val="2.2000000000000005e+119"/>
               </a:srgbClr>
             </a:outerShdw>
           </a:effectLst>
@@ -10513,9 +10695,9 @@
             <a:prstDash val="solid"/>
           </a:ln>
           <a:effectLst>
-            <a:outerShdw sx="100000" sy="100000" kx="0" ky="0" algn="bl" rotWithShape="0" blurRad="1.6680246133673485e+83" dist="4.170061533418371e+82" dir="3.2905425960566786e+97">
+            <a:outerShdw sx="100000" sy="100000" kx="0" ky="0" algn="bl" rotWithShape="0" blurRad="5.510881335639881e+103" dist="1.3777203339099702e+103" dir="2.5587259226936733e+121">
               <a:srgbClr val="959092">
-                <a:alpha val="2.2000000000000003e+99"/>
+                <a:alpha val="2.2000000000000006e+124"/>
               </a:srgbClr>
             </a:outerShdw>
           </a:effectLst>
@@ -11041,9 +11223,9 @@
             <a:prstDash val="solid"/>
           </a:ln>
           <a:effectLst>
-            <a:outerShdw sx="100000" sy="100000" kx="0" ky="0" algn="bl" rotWithShape="0" blurRad="2.1183912589765324e+87" dist="5.295978147441331e+86" dir="1.9743255576340073e+102">
+            <a:outerShdw sx="100000" sy="100000" kx="0" ky="0" algn="bl" rotWithShape="0" blurRad="6.998819296262648e+107" dist="1.749704824065662e+107" dir="1.535235553616204e+126">
               <a:srgbClr val="959092">
-                <a:alpha val="2.2000000000000003e+104"/>
+                <a:alpha val="2.2000000000000006e+129"/>
               </a:srgbClr>
             </a:outerShdw>
           </a:effectLst>
@@ -11176,9 +11358,9 @@
             <a:prstDash val="solid"/>
           </a:ln>
           <a:effectLst>
-            <a:outerShdw sx="100000" sy="100000" kx="0" ky="0" algn="bl" rotWithShape="0" blurRad="2.6903568989001962e+91" dist="6.7258922472504905e+90" dir="1.1845953345804043e+107">
+            <a:outerShdw sx="100000" sy="100000" kx="0" ky="0" algn="bl" rotWithShape="0" blurRad="8.888500506253563e+111" dist="2.2221251265633907e+111" dir="9.211413321697224e+130">
               <a:srgbClr val="959092">
-                <a:alpha val="2.2000000000000003e+109"/>
+                <a:alpha val="2.2000000000000004e+134"/>
               </a:srgbClr>
             </a:outerShdw>
           </a:effectLst>
@@ -12788,9 +12970,9 @@
             <a:prstDash val="solid"/>
           </a:ln>
           <a:effectLst>
-            <a:outerShdw sx="100000" sy="100000" kx="0" ky="0" algn="bl" rotWithShape="0" blurRad="3.416753261603249e+95" dist="8.541883154008123e+94" dir="7.107572007482426e+111">
+            <a:outerShdw sx="100000" sy="100000" kx="0" ky="0" algn="bl" rotWithShape="0" blurRad="1.1288395642942025e+116" dist="2.822098910735506e+115" dir="5.526847993018334e+135">
               <a:srgbClr val="959092">
-                <a:alpha val="2.2000000000000003e+114"/>
+                <a:alpha val="2.2000000000000005e+139"/>
               </a:srgbClr>
             </a:outerShdw>
           </a:effectLst>
@@ -13948,9 +14130,9 @@
             <a:prstDash val="solid"/>
           </a:ln>
           <a:effectLst>
-            <a:outerShdw sx="100000" sy="100000" kx="0" ky="0" algn="bl" rotWithShape="0" blurRad="4.3392766422361264e+99" dist="1.0848191605590316e+99" dir="4.2645432044894554e+116">
+            <a:outerShdw sx="100000" sy="100000" kx="0" ky="0" algn="bl" rotWithShape="0" blurRad="1.433626246653637e+120" dist="3.584065616634093e+119" dir="3.3161087958110005e+140">
               <a:srgbClr val="959092">
-                <a:alpha val="2.2000000000000005e+119"/>
+                <a:alpha val="2.2000000000000006e+144"/>
               </a:srgbClr>
             </a:outerShdw>
           </a:effectLst>
@@ -14336,9 +14518,9 @@
             <a:prstDash val="solid"/>
           </a:ln>
           <a:effectLst>
-            <a:outerShdw sx="100000" sy="100000" kx="0" ky="0" algn="bl" rotWithShape="0" blurRad="5.510881335639881e+103" dist="1.3777203339099702e+103" dir="2.5587259226936733e+121">
+            <a:outerShdw sx="100000" sy="100000" kx="0" ky="0" algn="bl" rotWithShape="0" blurRad="1.8207053332501191e+124" dist="4.551763333125298e+123" dir="1.9896652774866004e+145">
               <a:srgbClr val="959092">
-                <a:alpha val="2.2000000000000006e+124"/>
+                <a:alpha val="2.2000000000000004e+149"/>
               </a:srgbClr>
             </a:outerShdw>
           </a:effectLst>
@@ -14451,9 +14633,9 @@
             <a:prstDash val="solid"/>
           </a:ln>
           <a:effectLst>
-            <a:outerShdw sx="100000" sy="100000" kx="0" ky="0" algn="bl" rotWithShape="0" blurRad="6.998819296262648e+107" dist="1.749704824065662e+107" dir="1.535235553616204e+126">
+            <a:outerShdw sx="100000" sy="100000" kx="0" ky="0" algn="bl" rotWithShape="0" blurRad="2.312295773227651e+128" dist="5.780739433069128e+127" dir="1.1937991664919603e+150">
               <a:srgbClr val="959092">
-                <a:alpha val="2.2000000000000006e+129"/>
+                <a:alpha val="2.2000000000000004e+154"/>
               </a:srgbClr>
             </a:outerShdw>
           </a:effectLst>
@@ -14566,9 +14748,9 @@
             <a:prstDash val="solid"/>
           </a:ln>
           <a:effectLst>
-            <a:outerShdw sx="100000" sy="100000" kx="0" ky="0" algn="bl" rotWithShape="0" blurRad="8.888500506253563e+111" dist="2.2221251265633907e+111" dir="9.211413321697224e+130">
+            <a:outerShdw sx="100000" sy="100000" kx="0" ky="0" algn="bl" rotWithShape="0" blurRad="2.936615631999117e+132" dist="7.341539079997793e+131" dir="7.162794998951762e+154">
               <a:srgbClr val="959092">
-                <a:alpha val="2.2000000000000004e+134"/>
+                <a:alpha val="2.2000000000000003e+159"/>
               </a:srgbClr>
             </a:outerShdw>
           </a:effectLst>

--- a/out/Internship_Exit_Presentation_Stewart.pptx
+++ b/out/Internship_Exit_Presentation_Stewart.pptx
@@ -877,7 +877,7 @@
           <a:p>
             <a:r>
               <a:rPr lang="en-US" dirty="0"/>
-              <a:t/>
+              <a:t>The point of the split: stages 00 to 03 only read. They cannot edit a file, open a pull request or touch a branch, so running AEGIS on a repository can never break it. Stage 04 is the only one that writes, and it will not start without someone asking for it. Q: What stops it running away with a fix? — It does one approved step at a time, refuses protected branches, never merges, and never marks its own work resolved.</a:t>
             </a:r>
             <a:endParaRPr lang="en-US" dirty="0"/>
           </a:p>
@@ -3836,7 +3836,7 @@
                 <a:ea typeface="Montserrat Medium" pitchFamily="34" charset="-122"/>
                 <a:cs typeface="Montserrat Medium" pitchFamily="34" charset="-120"/>
               </a:rPr>
-              <a:t>In a supply-chain attack, an attacker hides malicious code inside a legitimate, widely-used open-source package. Everyone who installs it inherits the compromise — including us. Real campaigns in 2025 and 2026 worked exactly this way, including a self-spreading family that reused each victim to infect the next.</a:t>
+              <a:t>In a supply-chain attack, an attacker hides malicious code inside a legitimate open-source package. Everyone who installs it inherits the compromise — including us. Real campaigns in 2025 and 2026 worked this way.</a:t>
             </a:r>
             <a:endParaRPr lang="en-US" sz="1400" dirty="0"/>
           </a:p>
@@ -3858,8 +3858,8 @@
         </p:blipFill>
         <p:spPr>
           <a:xfrm>
-            <a:off x="1170432" y="2798064"/>
-            <a:ext cx="9875520" cy="2880360"/>
+            <a:off x="2209648" y="2633472"/>
+            <a:ext cx="7772400" cy="2266950"/>
           </a:xfrm>
           <a:prstGeom prst="rect">
             <a:avLst/>
@@ -3874,7 +3874,7 @@
         </p:nvSpPr>
         <p:spPr>
           <a:xfrm>
-            <a:off x="528523" y="5769864"/>
+            <a:off x="1441552" y="4662678"/>
             <a:ext cx="2468880" cy="292608"/>
           </a:xfrm>
           <a:prstGeom prst="rect">
@@ -3916,7 +3916,7 @@
         </p:nvSpPr>
         <p:spPr>
           <a:xfrm>
-            <a:off x="2365370" y="5769864"/>
+            <a:off x="2887218" y="4662678"/>
             <a:ext cx="2468880" cy="292608"/>
           </a:xfrm>
           <a:prstGeom prst="rect">
@@ -3958,7 +3958,7 @@
         </p:nvSpPr>
         <p:spPr>
           <a:xfrm>
-            <a:off x="4587362" y="5769864"/>
+            <a:off x="4636008" y="4662678"/>
             <a:ext cx="2468880" cy="292608"/>
           </a:xfrm>
           <a:prstGeom prst="rect">
@@ -4000,7 +4000,7 @@
         </p:nvSpPr>
         <p:spPr>
           <a:xfrm>
-            <a:off x="8024043" y="5769864"/>
+            <a:off x="7340803" y="4662678"/>
             <a:ext cx="2468880" cy="292608"/>
           </a:xfrm>
           <a:prstGeom prst="rect">
@@ -4042,12 +4042,12 @@
         </p:nvSpPr>
         <p:spPr>
           <a:xfrm>
-            <a:off x="777240" y="5138928"/>
-            <a:ext cx="10637215" cy="859536"/>
+            <a:off x="777240" y="5340096"/>
+            <a:ext cx="10637215" cy="786384"/>
           </a:xfrm>
           <a:prstGeom prst="roundRect">
             <a:avLst>
-              <a:gd name="adj" fmla="val 6383"/>
+              <a:gd name="adj" fmla="val 6977"/>
             </a:avLst>
           </a:prstGeom>
           <a:solidFill>
@@ -4064,8 +4064,8 @@
         </p:nvSpPr>
         <p:spPr>
           <a:xfrm>
-            <a:off x="777240" y="5138928"/>
-            <a:ext cx="50292" cy="859536"/>
+            <a:off x="777240" y="5340096"/>
+            <a:ext cx="50292" cy="786384"/>
           </a:xfrm>
           <a:prstGeom prst="rect">
             <a:avLst/>
@@ -4084,7 +4084,7 @@
         </p:nvSpPr>
         <p:spPr>
           <a:xfrm>
-            <a:off x="1014984" y="5276088"/>
+            <a:off x="1014984" y="5458968"/>
             <a:ext cx="7315200" cy="201168"/>
           </a:xfrm>
           <a:prstGeom prst="rect">
@@ -4123,7 +4123,7 @@
         </p:nvSpPr>
         <p:spPr>
           <a:xfrm>
-            <a:off x="1014984" y="5513832"/>
+            <a:off x="1014984" y="5678424"/>
             <a:ext cx="10134295" cy="384048"/>
           </a:xfrm>
           <a:prstGeom prst="rect">
@@ -4420,24 +4420,525 @@
         </p:nvSpPr>
         <p:spPr>
           <a:xfrm>
-            <a:off x="777240" y="2011680"/>
-            <a:ext cx="3931920" cy="1133856"/>
-          </a:xfrm>
-          <a:prstGeom prst="rect">
-            <a:avLst/>
-          </a:prstGeom>
-          <a:noFill/>
-          <a:ln/>
-        </p:spPr>
-        <p:txBody>
-          <a:bodyPr wrap="square" lIns="0" tIns="0" rIns="0" bIns="0" rtlCol="0" anchor="t"/>
-          <a:lstStyle/>
-          <a:p>
-            <a:pPr algn="l" indent="0" marL="0">
-              <a:buNone/>
-            </a:pPr>
-            <a:r>
-              <a:rPr lang="en-US" sz="7200" spc="-250" kern="0" dirty="0">
+            <a:off x="777240" y="1975104"/>
+            <a:ext cx="10424160" cy="310896"/>
+          </a:xfrm>
+          <a:prstGeom prst="rect">
+            <a:avLst/>
+          </a:prstGeom>
+          <a:noFill/>
+          <a:ln/>
+        </p:spPr>
+        <p:txBody>
+          <a:bodyPr wrap="square" lIns="0" tIns="0" rIns="0" bIns="0" rtlCol="0" anchor="t"/>
+          <a:lstStyle/>
+          <a:p>
+            <a:pPr indent="0" marL="0">
+              <a:buNone/>
+            </a:pPr>
+            <a:r>
+              <a:rPr lang="en-US" sz="1400" dirty="0">
+                <a:solidFill>
+                  <a:srgbClr val="6E7175"/>
+                </a:solidFill>
+                <a:latin typeface="Montserrat Medium" pitchFamily="34" charset="0"/>
+                <a:ea typeface="Montserrat Medium" pitchFamily="34" charset="-122"/>
+                <a:cs typeface="Montserrat Medium" pitchFamily="34" charset="-120"/>
+              </a:rPr>
+              <a:t>Knowing a flawed package is installed is not the same as knowing you are exposed.</a:t>
+            </a:r>
+            <a:endParaRPr lang="en-US" sz="1400" dirty="0"/>
+          </a:p>
+        </p:txBody>
+      </p:sp>
+      <p:sp>
+        <p:nvSpPr>
+          <p:cNvPr id="10" name="Text 7"/>
+          <p:cNvSpPr txBox="1"/>
+          <p:nvPr/>
+        </p:nvSpPr>
+        <p:spPr>
+          <a:xfrm>
+            <a:off x="777240" y="2487168"/>
+            <a:ext cx="3657600" cy="201168"/>
+          </a:xfrm>
+          <a:prstGeom prst="rect">
+            <a:avLst/>
+          </a:prstGeom>
+          <a:noFill/>
+          <a:ln/>
+        </p:spPr>
+        <p:txBody>
+          <a:bodyPr wrap="square" lIns="0" tIns="0" rIns="0" bIns="0" rtlCol="0" anchor="t"/>
+          <a:lstStyle/>
+          <a:p>
+            <a:pPr indent="0" marL="0">
+              <a:buNone/>
+            </a:pPr>
+            <a:r>
+              <a:rPr lang="en-US" sz="850" spc="140" kern="0" dirty="0">
+                <a:solidFill>
+                  <a:srgbClr val="6E7175"/>
+                </a:solidFill>
+                <a:latin typeface="Montserrat SemiBold" pitchFamily="34" charset="0"/>
+                <a:ea typeface="Montserrat SemiBold" pitchFamily="34" charset="-122"/>
+                <a:cs typeface="Montserrat SemiBold" pitchFamily="34" charset="-120"/>
+              </a:rPr>
+              <a:t>THE SHIFT</a:t>
+            </a:r>
+            <a:endParaRPr lang="en-US" sz="850" dirty="0"/>
+          </a:p>
+        </p:txBody>
+      </p:sp>
+      <p:sp>
+        <p:nvSpPr>
+          <p:cNvPr id="11" name="Shape 8"/>
+          <p:cNvSpPr/>
+          <p:nvPr/>
+        </p:nvSpPr>
+        <p:spPr>
+          <a:xfrm>
+            <a:off x="777240" y="2743200"/>
+            <a:ext cx="4937760" cy="960120"/>
+          </a:xfrm>
+          <a:prstGeom prst="roundRect">
+            <a:avLst>
+              <a:gd name="adj" fmla="val 5714"/>
+            </a:avLst>
+          </a:prstGeom>
+          <a:solidFill>
+            <a:srgbClr val="F5F4F3"/>
+          </a:solidFill>
+          <a:ln/>
+        </p:spPr>
+      </p:sp>
+      <p:sp>
+        <p:nvSpPr>
+          <p:cNvPr id="12" name="Shape 9"/>
+          <p:cNvSpPr/>
+          <p:nvPr/>
+        </p:nvSpPr>
+        <p:spPr>
+          <a:xfrm>
+            <a:off x="777240" y="2743200"/>
+            <a:ext cx="50292" cy="960120"/>
+          </a:xfrm>
+          <a:prstGeom prst="rect">
+            <a:avLst/>
+          </a:prstGeom>
+          <a:solidFill>
+            <a:srgbClr val="C9C6C4"/>
+          </a:solidFill>
+          <a:ln/>
+        </p:spPr>
+      </p:sp>
+      <p:sp>
+        <p:nvSpPr>
+          <p:cNvPr id="13" name="Text 10"/>
+          <p:cNvSpPr txBox="1"/>
+          <p:nvPr/>
+        </p:nvSpPr>
+        <p:spPr>
+          <a:xfrm>
+            <a:off x="1014984" y="2862072"/>
+            <a:ext cx="3108960" cy="182880"/>
+          </a:xfrm>
+          <a:prstGeom prst="rect">
+            <a:avLst/>
+          </a:prstGeom>
+          <a:noFill/>
+          <a:ln/>
+        </p:spPr>
+        <p:txBody>
+          <a:bodyPr wrap="square" lIns="0" tIns="0" rIns="0" bIns="0" rtlCol="0" anchor="t"/>
+          <a:lstStyle/>
+          <a:p>
+            <a:pPr indent="0" marL="0">
+              <a:buNone/>
+            </a:pPr>
+            <a:r>
+              <a:rPr lang="en-US" sz="850" spc="140" kern="0" dirty="0">
+                <a:solidFill>
+                  <a:srgbClr val="6E7175"/>
+                </a:solidFill>
+                <a:latin typeface="Montserrat SemiBold" pitchFamily="34" charset="0"/>
+                <a:ea typeface="Montserrat SemiBold" pitchFamily="34" charset="-122"/>
+                <a:cs typeface="Montserrat SemiBold" pitchFamily="34" charset="-120"/>
+              </a:rPr>
+              <a:t>MOST SCANNERS</a:t>
+            </a:r>
+            <a:endParaRPr lang="en-US" sz="850" dirty="0"/>
+          </a:p>
+        </p:txBody>
+      </p:sp>
+      <p:sp>
+        <p:nvSpPr>
+          <p:cNvPr id="14" name="Text 11"/>
+          <p:cNvSpPr txBox="1"/>
+          <p:nvPr/>
+        </p:nvSpPr>
+        <p:spPr>
+          <a:xfrm>
+            <a:off x="1014984" y="3063240"/>
+            <a:ext cx="4480560" cy="237744"/>
+          </a:xfrm>
+          <a:prstGeom prst="rect">
+            <a:avLst/>
+          </a:prstGeom>
+          <a:noFill/>
+          <a:ln/>
+        </p:spPr>
+        <p:txBody>
+          <a:bodyPr wrap="square" lIns="0" tIns="0" rIns="0" bIns="0" rtlCol="0" anchor="t"/>
+          <a:lstStyle/>
+          <a:p>
+            <a:pPr indent="0" marL="0">
+              <a:buNone/>
+            </a:pPr>
+            <a:r>
+              <a:rPr lang="en-US" sz="1250" dirty="0">
+                <a:solidFill>
+                  <a:srgbClr val="2B2D30"/>
+                </a:solidFill>
+                <a:latin typeface="Montserrat SemiBold" pitchFamily="34" charset="0"/>
+                <a:ea typeface="Montserrat SemiBold" pitchFamily="34" charset="-122"/>
+                <a:cs typeface="Montserrat SemiBold" pitchFamily="34" charset="-120"/>
+              </a:rPr>
+              <a:t>"This package has a known flaw."</a:t>
+            </a:r>
+            <a:endParaRPr lang="en-US" sz="1250" dirty="0"/>
+          </a:p>
+        </p:txBody>
+      </p:sp>
+      <p:sp>
+        <p:nvSpPr>
+          <p:cNvPr id="15" name="Text 12"/>
+          <p:cNvSpPr txBox="1"/>
+          <p:nvPr/>
+        </p:nvSpPr>
+        <p:spPr>
+          <a:xfrm>
+            <a:off x="1014984" y="3319272"/>
+            <a:ext cx="4480560" cy="329184"/>
+          </a:xfrm>
+          <a:prstGeom prst="rect">
+            <a:avLst/>
+          </a:prstGeom>
+          <a:noFill/>
+          <a:ln/>
+        </p:spPr>
+        <p:txBody>
+          <a:bodyPr wrap="square" lIns="0" tIns="0" rIns="0" bIns="0" rtlCol="0" anchor="t"/>
+          <a:lstStyle/>
+          <a:p>
+            <a:pPr indent="0" marL="0">
+              <a:lnSpc>
+                <a:spcPct val="116000"/>
+              </a:lnSpc>
+              <a:buNone/>
+            </a:pPr>
+            <a:r>
+              <a:rPr lang="en-US" sz="950" dirty="0">
+                <a:solidFill>
+                  <a:srgbClr val="43464A"/>
+                </a:solidFill>
+                <a:latin typeface="Montserrat" pitchFamily="34" charset="0"/>
+                <a:ea typeface="Montserrat" pitchFamily="34" charset="-122"/>
+                <a:cs typeface="Montserrat" pitchFamily="34" charset="-120"/>
+              </a:rPr>
+              <a:t>True, but the list runs to hundreds and everything on it looks equally urgent.</a:t>
+            </a:r>
+            <a:endParaRPr lang="en-US" sz="950" dirty="0"/>
+          </a:p>
+        </p:txBody>
+      </p:sp>
+      <p:sp>
+        <p:nvSpPr>
+          <p:cNvPr id="16" name="Shape 13"/>
+          <p:cNvSpPr/>
+          <p:nvPr/>
+        </p:nvSpPr>
+        <p:spPr>
+          <a:xfrm>
+            <a:off x="777240" y="3977640"/>
+            <a:ext cx="4937760" cy="960120"/>
+          </a:xfrm>
+          <a:prstGeom prst="roundRect">
+            <a:avLst>
+              <a:gd name="adj" fmla="val 5714"/>
+            </a:avLst>
+          </a:prstGeom>
+          <a:solidFill>
+            <a:srgbClr val="F6EEF0"/>
+          </a:solidFill>
+          <a:ln/>
+        </p:spPr>
+      </p:sp>
+      <p:sp>
+        <p:nvSpPr>
+          <p:cNvPr id="17" name="Shape 14"/>
+          <p:cNvSpPr/>
+          <p:nvPr/>
+        </p:nvSpPr>
+        <p:spPr>
+          <a:xfrm>
+            <a:off x="777240" y="3977640"/>
+            <a:ext cx="50292" cy="960120"/>
+          </a:xfrm>
+          <a:prstGeom prst="rect">
+            <a:avLst/>
+          </a:prstGeom>
+          <a:solidFill>
+            <a:srgbClr val="942838"/>
+          </a:solidFill>
+          <a:ln/>
+        </p:spPr>
+      </p:sp>
+      <p:sp>
+        <p:nvSpPr>
+          <p:cNvPr id="18" name="Text 15"/>
+          <p:cNvSpPr txBox="1"/>
+          <p:nvPr/>
+        </p:nvSpPr>
+        <p:spPr>
+          <a:xfrm>
+            <a:off x="1014984" y="4096512"/>
+            <a:ext cx="3108960" cy="182880"/>
+          </a:xfrm>
+          <a:prstGeom prst="rect">
+            <a:avLst/>
+          </a:prstGeom>
+          <a:noFill/>
+          <a:ln/>
+        </p:spPr>
+        <p:txBody>
+          <a:bodyPr wrap="square" lIns="0" tIns="0" rIns="0" bIns="0" rtlCol="0" anchor="t"/>
+          <a:lstStyle/>
+          <a:p>
+            <a:pPr indent="0" marL="0">
+              <a:buNone/>
+            </a:pPr>
+            <a:r>
+              <a:rPr lang="en-US" sz="850" spc="140" kern="0" dirty="0">
+                <a:solidFill>
+                  <a:srgbClr val="942838"/>
+                </a:solidFill>
+                <a:latin typeface="Montserrat SemiBold" pitchFamily="34" charset="0"/>
+                <a:ea typeface="Montserrat SemiBold" pitchFamily="34" charset="-122"/>
+                <a:cs typeface="Montserrat SemiBold" pitchFamily="34" charset="-120"/>
+              </a:rPr>
+              <a:t>AEGIS</a:t>
+            </a:r>
+            <a:endParaRPr lang="en-US" sz="850" dirty="0"/>
+          </a:p>
+        </p:txBody>
+      </p:sp>
+      <p:sp>
+        <p:nvSpPr>
+          <p:cNvPr id="19" name="Text 16"/>
+          <p:cNvSpPr txBox="1"/>
+          <p:nvPr/>
+        </p:nvSpPr>
+        <p:spPr>
+          <a:xfrm>
+            <a:off x="1014984" y="4297680"/>
+            <a:ext cx="4480560" cy="237744"/>
+          </a:xfrm>
+          <a:prstGeom prst="rect">
+            <a:avLst/>
+          </a:prstGeom>
+          <a:noFill/>
+          <a:ln/>
+        </p:spPr>
+        <p:txBody>
+          <a:bodyPr wrap="square" lIns="0" tIns="0" rIns="0" bIns="0" rtlCol="0" anchor="t"/>
+          <a:lstStyle/>
+          <a:p>
+            <a:pPr indent="0" marL="0">
+              <a:buNone/>
+            </a:pPr>
+            <a:r>
+              <a:rPr lang="en-US" sz="1250" dirty="0">
+                <a:solidFill>
+                  <a:srgbClr val="2B2D30"/>
+                </a:solidFill>
+                <a:latin typeface="Montserrat SemiBold" pitchFamily="34" charset="0"/>
+                <a:ea typeface="Montserrat SemiBold" pitchFamily="34" charset="-122"/>
+                <a:cs typeface="Montserrat SemiBold" pitchFamily="34" charset="-120"/>
+              </a:rPr>
+              <a:t>"Does our code actually call the flawed part?"</a:t>
+            </a:r>
+            <a:endParaRPr lang="en-US" sz="1250" dirty="0"/>
+          </a:p>
+        </p:txBody>
+      </p:sp>
+      <p:sp>
+        <p:nvSpPr>
+          <p:cNvPr id="20" name="Text 17"/>
+          <p:cNvSpPr txBox="1"/>
+          <p:nvPr/>
+        </p:nvSpPr>
+        <p:spPr>
+          <a:xfrm>
+            <a:off x="1014984" y="4553712"/>
+            <a:ext cx="4480560" cy="329184"/>
+          </a:xfrm>
+          <a:prstGeom prst="rect">
+            <a:avLst/>
+          </a:prstGeom>
+          <a:noFill/>
+          <a:ln/>
+        </p:spPr>
+        <p:txBody>
+          <a:bodyPr wrap="square" lIns="0" tIns="0" rIns="0" bIns="0" rtlCol="0" anchor="t"/>
+          <a:lstStyle/>
+          <a:p>
+            <a:pPr indent="0" marL="0">
+              <a:lnSpc>
+                <a:spcPct val="116000"/>
+              </a:lnSpc>
+              <a:buNone/>
+            </a:pPr>
+            <a:r>
+              <a:rPr lang="en-US" sz="950" dirty="0">
+                <a:solidFill>
+                  <a:srgbClr val="43464A"/>
+                </a:solidFill>
+                <a:latin typeface="Montserrat" pitchFamily="34" charset="0"/>
+                <a:ea typeface="Montserrat" pitchFamily="34" charset="-122"/>
+                <a:cs typeface="Montserrat" pitchFamily="34" charset="-120"/>
+              </a:rPr>
+              <a:t>The list collapses to the few that can genuinely be reached — and those get worked first.</a:t>
+            </a:r>
+            <a:endParaRPr lang="en-US" sz="950" dirty="0"/>
+          </a:p>
+        </p:txBody>
+      </p:sp>
+      <p:sp>
+        <p:nvSpPr>
+          <p:cNvPr id="21" name="Shape 18"/>
+          <p:cNvSpPr/>
+          <p:nvPr/>
+        </p:nvSpPr>
+        <p:spPr>
+          <a:xfrm>
+            <a:off x="3232404" y="3730752"/>
+            <a:ext cx="27432" cy="100584"/>
+          </a:xfrm>
+          <a:prstGeom prst="rect">
+            <a:avLst/>
+          </a:prstGeom>
+          <a:solidFill>
+            <a:srgbClr val="C9C6C4"/>
+          </a:solidFill>
+          <a:ln/>
+        </p:spPr>
+      </p:sp>
+      <p:sp>
+        <p:nvSpPr>
+          <p:cNvPr id="22" name="Shape 19"/>
+          <p:cNvSpPr/>
+          <p:nvPr/>
+        </p:nvSpPr>
+        <p:spPr>
+          <a:xfrm rot="10800000">
+            <a:off x="3200400" y="3831336"/>
+            <a:ext cx="91440" cy="118872"/>
+          </a:xfrm>
+          <a:prstGeom prst="triangle">
+            <a:avLst/>
+          </a:prstGeom>
+          <a:solidFill>
+            <a:srgbClr val="C9C6C4"/>
+          </a:solidFill>
+          <a:ln/>
+        </p:spPr>
+      </p:sp>
+      <p:sp>
+        <p:nvSpPr>
+          <p:cNvPr id="23" name="Shape 20"/>
+          <p:cNvSpPr/>
+          <p:nvPr/>
+        </p:nvSpPr>
+        <p:spPr>
+          <a:xfrm>
+            <a:off x="777240" y="5230368"/>
+            <a:ext cx="4937760" cy="10973"/>
+          </a:xfrm>
+          <a:prstGeom prst="rect">
+            <a:avLst/>
+          </a:prstGeom>
+          <a:solidFill>
+            <a:srgbClr val="E6E4E2"/>
+          </a:solidFill>
+          <a:ln/>
+        </p:spPr>
+      </p:sp>
+      <p:sp>
+        <p:nvSpPr>
+          <p:cNvPr id="24" name="Text 21"/>
+          <p:cNvSpPr txBox="1"/>
+          <p:nvPr/>
+        </p:nvSpPr>
+        <p:spPr>
+          <a:xfrm>
+            <a:off x="777240" y="5376672"/>
+            <a:ext cx="3657600" cy="182880"/>
+          </a:xfrm>
+          <a:prstGeom prst="rect">
+            <a:avLst/>
+          </a:prstGeom>
+          <a:noFill/>
+          <a:ln/>
+        </p:spPr>
+        <p:txBody>
+          <a:bodyPr wrap="square" lIns="0" tIns="0" rIns="0" bIns="0" rtlCol="0" anchor="t"/>
+          <a:lstStyle/>
+          <a:p>
+            <a:pPr indent="0" marL="0">
+              <a:buNone/>
+            </a:pPr>
+            <a:r>
+              <a:rPr lang="en-US" sz="850" spc="140" kern="0" dirty="0">
+                <a:solidFill>
+                  <a:srgbClr val="6E7175"/>
+                </a:solidFill>
+                <a:latin typeface="Montserrat SemiBold" pitchFamily="34" charset="0"/>
+                <a:ea typeface="Montserrat SemiBold" pitchFamily="34" charset="-122"/>
+                <a:cs typeface="Montserrat SemiBold" pitchFamily="34" charset="-120"/>
+              </a:rPr>
+              <a:t>PROVEN AT SCALE</a:t>
+            </a:r>
+            <a:endParaRPr lang="en-US" sz="850" dirty="0"/>
+          </a:p>
+        </p:txBody>
+      </p:sp>
+      <p:sp>
+        <p:nvSpPr>
+          <p:cNvPr id="25" name="Text 22"/>
+          <p:cNvSpPr txBox="1"/>
+          <p:nvPr/>
+        </p:nvSpPr>
+        <p:spPr>
+          <a:xfrm>
+            <a:off x="777240" y="5577840"/>
+            <a:ext cx="1371600" cy="384048"/>
+          </a:xfrm>
+          <a:prstGeom prst="rect">
+            <a:avLst/>
+          </a:prstGeom>
+          <a:noFill/>
+          <a:ln/>
+        </p:spPr>
+        <p:txBody>
+          <a:bodyPr wrap="square" lIns="0" tIns="0" rIns="0" bIns="0" rtlCol="0" anchor="t"/>
+          <a:lstStyle/>
+          <a:p>
+            <a:pPr indent="0" marL="0">
+              <a:buNone/>
+            </a:pPr>
+            <a:r>
+              <a:rPr lang="en-US" sz="2400" spc="-60" kern="0" dirty="0">
                 <a:solidFill>
                   <a:srgbClr val="942838"/>
                 </a:solidFill>
@@ -4447,389 +4948,125 @@
               </a:rPr>
               <a:t>5,675</a:t>
             </a:r>
-            <a:endParaRPr lang="en-US" sz="7200" dirty="0"/>
-          </a:p>
-        </p:txBody>
-      </p:sp>
-      <p:sp>
-        <p:nvSpPr>
-          <p:cNvPr id="10" name="Text 7"/>
-          <p:cNvSpPr txBox="1"/>
-          <p:nvPr/>
-        </p:nvSpPr>
-        <p:spPr>
-          <a:xfrm>
-            <a:off x="777240" y="3145536"/>
-            <a:ext cx="3931920" cy="457200"/>
-          </a:xfrm>
-          <a:prstGeom prst="rect">
-            <a:avLst/>
-          </a:prstGeom>
-          <a:noFill/>
-          <a:ln/>
-        </p:spPr>
-        <p:txBody>
-          <a:bodyPr wrap="square" lIns="0" tIns="0" rIns="0" bIns="0" rtlCol="0" anchor="t"/>
-          <a:lstStyle/>
-          <a:p>
-            <a:pPr algn="l" indent="0" marL="0">
+            <a:endParaRPr lang="en-US" sz="2400" dirty="0"/>
+          </a:p>
+        </p:txBody>
+      </p:sp>
+      <p:sp>
+        <p:nvSpPr>
+          <p:cNvPr id="26" name="Text 23"/>
+          <p:cNvSpPr txBox="1"/>
+          <p:nvPr/>
+        </p:nvSpPr>
+        <p:spPr>
+          <a:xfrm>
+            <a:off x="2240280" y="5596128"/>
+            <a:ext cx="3474720" cy="384048"/>
+          </a:xfrm>
+          <a:prstGeom prst="rect">
+            <a:avLst/>
+          </a:prstGeom>
+          <a:noFill/>
+          <a:ln/>
+        </p:spPr>
+        <p:txBody>
+          <a:bodyPr wrap="square" lIns="0" tIns="0" rIns="0" bIns="0" rtlCol="0" anchor="t"/>
+          <a:lstStyle/>
+          <a:p>
+            <a:pPr indent="0" marL="0">
               <a:lnSpc>
-                <a:spcPct val="115000"/>
+                <a:spcPct val="120000"/>
               </a:lnSpc>
               <a:buNone/>
             </a:pPr>
             <a:r>
-              <a:rPr lang="en-US" sz="950" spc="30" kern="0" dirty="0">
+              <a:rPr lang="en-US" sz="1000" dirty="0">
                 <a:solidFill>
                   <a:srgbClr val="6E7175"/>
                 </a:solidFill>
-                <a:latin typeface="Montserrat Medium" pitchFamily="34" charset="0"/>
-                <a:ea typeface="Montserrat Medium" pitchFamily="34" charset="-122"/>
-                <a:cs typeface="Montserrat Medium" pitchFamily="34" charset="-120"/>
-              </a:rPr>
-              <a:t>packages scanned in production</a:t>
-            </a:r>
-            <a:endParaRPr lang="en-US" sz="950" dirty="0"/>
-          </a:p>
-          <a:p>
-            <a:pPr algn="l" indent="0" marL="0">
+                <a:latin typeface="Montserrat" pitchFamily="34" charset="0"/>
+                <a:ea typeface="Montserrat" pitchFamily="34" charset="-122"/>
+                <a:cs typeface="Montserrat" pitchFamily="34" charset="-120"/>
+              </a:rPr>
+              <a:t>packages read in a single production run,</a:t>
+            </a:r>
+            <a:endParaRPr lang="en-US" sz="1000" dirty="0"/>
+          </a:p>
+          <a:p>
+            <a:pPr indent="0" marL="0">
               <a:lnSpc>
-                <a:spcPct val="115000"/>
+                <a:spcPct val="120000"/>
               </a:lnSpc>
               <a:buNone/>
             </a:pPr>
             <a:r>
-              <a:rPr lang="en-US" sz="950" spc="30" kern="0" dirty="0">
+              <a:rPr lang="en-US" sz="1000" dirty="0">
                 <a:solidFill>
                   <a:srgbClr val="6E7175"/>
                 </a:solidFill>
-                <a:latin typeface="Montserrat Medium" pitchFamily="34" charset="0"/>
-                <a:ea typeface="Montserrat Medium" pitchFamily="34" charset="-122"/>
-                <a:cs typeface="Montserrat Medium" pitchFamily="34" charset="-120"/>
-              </a:rPr>
-              <a:t>by an earlier version of the tool</a:t>
-            </a:r>
-            <a:endParaRPr lang="en-US" sz="950" dirty="0"/>
-          </a:p>
-        </p:txBody>
-      </p:sp>
-      <p:sp>
-        <p:nvSpPr>
-          <p:cNvPr id="11" name="Shape 8"/>
-          <p:cNvSpPr/>
-          <p:nvPr/>
-        </p:nvSpPr>
-        <p:spPr>
-          <a:xfrm>
-            <a:off x="795528" y="3602736"/>
-            <a:ext cx="109728" cy="109728"/>
-          </a:xfrm>
-          <a:prstGeom prst="ellipse">
-            <a:avLst/>
-          </a:prstGeom>
-          <a:solidFill>
-            <a:srgbClr val="942838"/>
-          </a:solidFill>
-          <a:ln/>
-        </p:spPr>
-      </p:sp>
-      <p:sp>
-        <p:nvSpPr>
-          <p:cNvPr id="12" name="Text 9"/>
-          <p:cNvSpPr txBox="1"/>
-          <p:nvPr/>
-        </p:nvSpPr>
-        <p:spPr>
-          <a:xfrm>
-            <a:off x="1033272" y="3529584"/>
-            <a:ext cx="3749040" cy="256032"/>
-          </a:xfrm>
-          <a:prstGeom prst="rect">
-            <a:avLst/>
-          </a:prstGeom>
-          <a:noFill/>
-          <a:ln/>
-        </p:spPr>
-        <p:txBody>
-          <a:bodyPr wrap="square" lIns="0" tIns="0" rIns="0" bIns="0" rtlCol="0" anchor="t"/>
-          <a:lstStyle/>
-          <a:p>
-            <a:pPr indent="0" marL="0">
-              <a:buNone/>
-            </a:pPr>
-            <a:r>
-              <a:rPr lang="en-US" sz="1250" dirty="0">
-                <a:solidFill>
-                  <a:srgbClr val="2B2D30"/>
+                <a:latin typeface="Montserrat" pitchFamily="34" charset="0"/>
+                <a:ea typeface="Montserrat" pitchFamily="34" charset="-122"/>
+                <a:cs typeface="Montserrat" pitchFamily="34" charset="-120"/>
+              </a:rPr>
+              <a:t>by an earlier version of the tool.</a:t>
+            </a:r>
+            <a:endParaRPr lang="en-US" sz="1000" dirty="0"/>
+          </a:p>
+        </p:txBody>
+      </p:sp>
+      <p:sp>
+        <p:nvSpPr>
+          <p:cNvPr id="27" name="Text 24"/>
+          <p:cNvSpPr txBox="1"/>
+          <p:nvPr/>
+        </p:nvSpPr>
+        <p:spPr>
+          <a:xfrm>
+            <a:off x="6062472" y="2487168"/>
+            <a:ext cx="5351983" cy="201168"/>
+          </a:xfrm>
+          <a:prstGeom prst="rect">
+            <a:avLst/>
+          </a:prstGeom>
+          <a:noFill/>
+          <a:ln/>
+        </p:spPr>
+        <p:txBody>
+          <a:bodyPr wrap="square" lIns="0" tIns="0" rIns="0" bIns="0" rtlCol="0" anchor="t"/>
+          <a:lstStyle/>
+          <a:p>
+            <a:pPr indent="0" marL="0">
+              <a:buNone/>
+            </a:pPr>
+            <a:r>
+              <a:rPr lang="en-US" sz="850" spc="140" kern="0" dirty="0">
+                <a:solidFill>
+                  <a:srgbClr val="942838"/>
                 </a:solidFill>
                 <a:latin typeface="Montserrat SemiBold" pitchFamily="34" charset="0"/>
                 <a:ea typeface="Montserrat SemiBold" pitchFamily="34" charset="-122"/>
                 <a:cs typeface="Montserrat SemiBold" pitchFamily="34" charset="-120"/>
               </a:rPr>
-              <a:t>Reachability, not just presence</a:t>
-            </a:r>
-            <a:endParaRPr lang="en-US" sz="1250" dirty="0"/>
-          </a:p>
-        </p:txBody>
-      </p:sp>
-      <p:sp>
-        <p:nvSpPr>
-          <p:cNvPr id="13" name="Text 10"/>
-          <p:cNvSpPr txBox="1"/>
-          <p:nvPr/>
-        </p:nvSpPr>
-        <p:spPr>
-          <a:xfrm>
-            <a:off x="1033272" y="3785616"/>
-            <a:ext cx="3703320" cy="548640"/>
-          </a:xfrm>
-          <a:prstGeom prst="rect">
-            <a:avLst/>
-          </a:prstGeom>
-          <a:noFill/>
-          <a:ln/>
-        </p:spPr>
-        <p:txBody>
-          <a:bodyPr wrap="square" lIns="0" tIns="0" rIns="0" bIns="0" rtlCol="0" anchor="t"/>
-          <a:lstStyle/>
-          <a:p>
-            <a:pPr indent="0" marL="0">
-              <a:lnSpc>
-                <a:spcPct val="120000"/>
-              </a:lnSpc>
-              <a:buNone/>
-            </a:pPr>
-            <a:r>
-              <a:rPr lang="en-US" sz="1100" dirty="0">
-                <a:solidFill>
-                  <a:srgbClr val="6E7175"/>
-                </a:solidFill>
-                <a:latin typeface="Montserrat" pitchFamily="34" charset="0"/>
-                <a:ea typeface="Montserrat" pitchFamily="34" charset="-122"/>
-                <a:cs typeface="Montserrat" pitchFamily="34" charset="-120"/>
-              </a:rPr>
-              <a:t>Not "you have a flawed package" but "your code actually calls the flawed part".</a:t>
-            </a:r>
-            <a:endParaRPr lang="en-US" sz="1100" dirty="0"/>
-          </a:p>
-        </p:txBody>
-      </p:sp>
-      <p:sp>
-        <p:nvSpPr>
-          <p:cNvPr id="14" name="Shape 11"/>
+              <a:t>THREE HONEST ANSWERS  ·  NEVER COLLAPSED INTO ONE "SAFE"</a:t>
+            </a:r>
+            <a:endParaRPr lang="en-US" sz="850" dirty="0"/>
+          </a:p>
+        </p:txBody>
+      </p:sp>
+      <p:sp>
+        <p:nvSpPr>
+          <p:cNvPr id="28" name="Shape 25"/>
           <p:cNvSpPr/>
           <p:nvPr/>
         </p:nvSpPr>
         <p:spPr>
           <a:xfrm>
-            <a:off x="795528" y="4370832"/>
-            <a:ext cx="109728" cy="109728"/>
-          </a:xfrm>
-          <a:prstGeom prst="ellipse">
-            <a:avLst/>
-          </a:prstGeom>
-          <a:solidFill>
-            <a:srgbClr val="942838"/>
-          </a:solidFill>
-          <a:ln/>
-        </p:spPr>
-      </p:sp>
-      <p:sp>
-        <p:nvSpPr>
-          <p:cNvPr id="15" name="Text 12"/>
-          <p:cNvSpPr txBox="1"/>
-          <p:nvPr/>
-        </p:nvSpPr>
-        <p:spPr>
-          <a:xfrm>
-            <a:off x="1033272" y="4297680"/>
-            <a:ext cx="3749040" cy="256032"/>
-          </a:xfrm>
-          <a:prstGeom prst="rect">
-            <a:avLst/>
-          </a:prstGeom>
-          <a:noFill/>
-          <a:ln/>
-        </p:spPr>
-        <p:txBody>
-          <a:bodyPr wrap="square" lIns="0" tIns="0" rIns="0" bIns="0" rtlCol="0" anchor="t"/>
-          <a:lstStyle/>
-          <a:p>
-            <a:pPr indent="0" marL="0">
-              <a:buNone/>
-            </a:pPr>
-            <a:r>
-              <a:rPr lang="en-US" sz="1250" dirty="0">
-                <a:solidFill>
-                  <a:srgbClr val="2B2D30"/>
-                </a:solidFill>
-                <a:latin typeface="Montserrat SemiBold" pitchFamily="34" charset="0"/>
-                <a:ea typeface="Montserrat SemiBold" pitchFamily="34" charset="-122"/>
-                <a:cs typeface="Montserrat SemiBold" pitchFamily="34" charset="-120"/>
-              </a:rPr>
-              <a:t>Three honest answers</a:t>
-            </a:r>
-            <a:endParaRPr lang="en-US" sz="1250" dirty="0"/>
-          </a:p>
-        </p:txBody>
-      </p:sp>
-      <p:sp>
-        <p:nvSpPr>
-          <p:cNvPr id="16" name="Text 13"/>
-          <p:cNvSpPr txBox="1"/>
-          <p:nvPr/>
-        </p:nvSpPr>
-        <p:spPr>
-          <a:xfrm>
-            <a:off x="1033272" y="4553712"/>
-            <a:ext cx="3703320" cy="548640"/>
-          </a:xfrm>
-          <a:prstGeom prst="rect">
-            <a:avLst/>
-          </a:prstGeom>
-          <a:noFill/>
-          <a:ln/>
-        </p:spPr>
-        <p:txBody>
-          <a:bodyPr wrap="square" lIns="0" tIns="0" rIns="0" bIns="0" rtlCol="0" anchor="t"/>
-          <a:lstStyle/>
-          <a:p>
-            <a:pPr indent="0" marL="0">
-              <a:lnSpc>
-                <a:spcPct val="120000"/>
-              </a:lnSpc>
-              <a:buNone/>
-            </a:pPr>
-            <a:r>
-              <a:rPr lang="en-US" sz="1100" dirty="0">
-                <a:solidFill>
-                  <a:srgbClr val="6E7175"/>
-                </a:solidFill>
-                <a:latin typeface="Montserrat" pitchFamily="34" charset="0"/>
-                <a:ea typeface="Montserrat" pitchFamily="34" charset="-122"/>
-                <a:cs typeface="Montserrat" pitchFamily="34" charset="-120"/>
-              </a:rPr>
-              <a:t>Reachable, no call site found, or can't prove. They are never collapsed together into a single "safe".</a:t>
-            </a:r>
-            <a:endParaRPr lang="en-US" sz="1100" dirty="0"/>
-          </a:p>
-        </p:txBody>
-      </p:sp>
-      <p:sp>
-        <p:nvSpPr>
-          <p:cNvPr id="17" name="Shape 14"/>
-          <p:cNvSpPr/>
-          <p:nvPr/>
-        </p:nvSpPr>
-        <p:spPr>
-          <a:xfrm>
-            <a:off x="795528" y="5138928"/>
-            <a:ext cx="109728" cy="109728"/>
-          </a:xfrm>
-          <a:prstGeom prst="ellipse">
-            <a:avLst/>
-          </a:prstGeom>
-          <a:solidFill>
-            <a:srgbClr val="942838"/>
-          </a:solidFill>
-          <a:ln/>
-        </p:spPr>
-      </p:sp>
-      <p:sp>
-        <p:nvSpPr>
-          <p:cNvPr id="18" name="Text 15"/>
-          <p:cNvSpPr txBox="1"/>
-          <p:nvPr/>
-        </p:nvSpPr>
-        <p:spPr>
-          <a:xfrm>
-            <a:off x="1033272" y="5065776"/>
-            <a:ext cx="3749040" cy="256032"/>
-          </a:xfrm>
-          <a:prstGeom prst="rect">
-            <a:avLst/>
-          </a:prstGeom>
-          <a:noFill/>
-          <a:ln/>
-        </p:spPr>
-        <p:txBody>
-          <a:bodyPr wrap="square" lIns="0" tIns="0" rIns="0" bIns="0" rtlCol="0" anchor="t"/>
-          <a:lstStyle/>
-          <a:p>
-            <a:pPr indent="0" marL="0">
-              <a:buNone/>
-            </a:pPr>
-            <a:r>
-              <a:rPr lang="en-US" sz="1250" dirty="0">
-                <a:solidFill>
-                  <a:srgbClr val="2B2D30"/>
-                </a:solidFill>
-                <a:latin typeface="Montserrat SemiBold" pitchFamily="34" charset="0"/>
-                <a:ea typeface="Montserrat SemiBold" pitchFamily="34" charset="-122"/>
-                <a:cs typeface="Montserrat SemiBold" pitchFamily="34" charset="-120"/>
-              </a:rPr>
-              <a:t>Unknown is never "safe"</a:t>
-            </a:r>
-            <a:endParaRPr lang="en-US" sz="1250" dirty="0"/>
-          </a:p>
-        </p:txBody>
-      </p:sp>
-      <p:sp>
-        <p:nvSpPr>
-          <p:cNvPr id="19" name="Text 16"/>
-          <p:cNvSpPr txBox="1"/>
-          <p:nvPr/>
-        </p:nvSpPr>
-        <p:spPr>
-          <a:xfrm>
-            <a:off x="1033272" y="5321808"/>
-            <a:ext cx="3703320" cy="548640"/>
-          </a:xfrm>
-          <a:prstGeom prst="rect">
-            <a:avLst/>
-          </a:prstGeom>
-          <a:noFill/>
-          <a:ln/>
-        </p:spPr>
-        <p:txBody>
-          <a:bodyPr wrap="square" lIns="0" tIns="0" rIns="0" bIns="0" rtlCol="0" anchor="t"/>
-          <a:lstStyle/>
-          <a:p>
-            <a:pPr indent="0" marL="0">
-              <a:lnSpc>
-                <a:spcPct val="120000"/>
-              </a:lnSpc>
-              <a:buNone/>
-            </a:pPr>
-            <a:r>
-              <a:rPr lang="en-US" sz="1100" dirty="0">
-                <a:solidFill>
-                  <a:srgbClr val="6E7175"/>
-                </a:solidFill>
-                <a:latin typeface="Montserrat" pitchFamily="34" charset="0"/>
-                <a:ea typeface="Montserrat" pitchFamily="34" charset="-122"/>
-                <a:cs typeface="Montserrat" pitchFamily="34" charset="-120"/>
-              </a:rPr>
-              <a:t>If the tool cannot tell, it says so. It never reports a clean result it has not earned.</a:t>
-            </a:r>
-            <a:endParaRPr lang="en-US" sz="1100" dirty="0"/>
-          </a:p>
-        </p:txBody>
-      </p:sp>
-      <p:sp>
-        <p:nvSpPr>
-          <p:cNvPr id="20" name="Shape 17"/>
-          <p:cNvSpPr/>
-          <p:nvPr/>
-        </p:nvSpPr>
-        <p:spPr>
-          <a:xfrm>
-            <a:off x="5175504" y="2066544"/>
-            <a:ext cx="6238951" cy="3035808"/>
+            <a:off x="6062472" y="2743200"/>
+            <a:ext cx="5351983" cy="960120"/>
           </a:xfrm>
           <a:prstGeom prst="roundRect">
             <a:avLst>
-              <a:gd name="adj" fmla="val 1807"/>
+              <a:gd name="adj" fmla="val 5714"/>
             </a:avLst>
           </a:prstGeom>
           <a:solidFill>
@@ -4852,187 +5089,411 @@
       </p:sp>
       <p:sp>
         <p:nvSpPr>
-          <p:cNvPr id="21" name="Text 18"/>
-          <p:cNvSpPr txBox="1"/>
-          <p:nvPr/>
-        </p:nvSpPr>
-        <p:spPr>
-          <a:xfrm>
-            <a:off x="5486400" y="2322576"/>
-            <a:ext cx="5617159" cy="219456"/>
-          </a:xfrm>
-          <a:prstGeom prst="rect">
-            <a:avLst/>
-          </a:prstGeom>
-          <a:noFill/>
-          <a:ln/>
-        </p:spPr>
-        <p:txBody>
-          <a:bodyPr wrap="square" lIns="0" tIns="0" rIns="0" bIns="0" rtlCol="0" anchor="t"/>
-          <a:lstStyle/>
-          <a:p>
-            <a:pPr indent="0" marL="0">
-              <a:buNone/>
-            </a:pPr>
-            <a:r>
-              <a:rPr lang="en-US" sz="850" spc="140" kern="0" dirty="0">
-                <a:solidFill>
-                  <a:srgbClr val="942838"/>
+          <p:cNvPr id="29" name="Shape 26"/>
+          <p:cNvSpPr/>
+          <p:nvPr/>
+        </p:nvSpPr>
+        <p:spPr>
+          <a:xfrm>
+            <a:off x="6062472" y="2743200"/>
+            <a:ext cx="50292" cy="960120"/>
+          </a:xfrm>
+          <a:prstGeom prst="rect">
+            <a:avLst/>
+          </a:prstGeom>
+          <a:solidFill>
+            <a:srgbClr val="942838"/>
+          </a:solidFill>
+          <a:ln/>
+        </p:spPr>
+      </p:sp>
+      <p:sp>
+        <p:nvSpPr>
+          <p:cNvPr id="30" name="Text 27"/>
+          <p:cNvSpPr txBox="1"/>
+          <p:nvPr/>
+        </p:nvSpPr>
+        <p:spPr>
+          <a:xfrm>
+            <a:off x="6318504" y="2889504"/>
+            <a:ext cx="4894783" cy="237744"/>
+          </a:xfrm>
+          <a:prstGeom prst="rect">
+            <a:avLst/>
+          </a:prstGeom>
+          <a:noFill/>
+          <a:ln/>
+        </p:spPr>
+        <p:txBody>
+          <a:bodyPr wrap="square" lIns="0" tIns="0" rIns="0" bIns="0" rtlCol="0" anchor="t"/>
+          <a:lstStyle/>
+          <a:p>
+            <a:pPr indent="0" marL="0">
+              <a:buNone/>
+            </a:pPr>
+            <a:r>
+              <a:rPr lang="en-US" sz="1300" spc="40" kern="0" dirty="0">
+                <a:solidFill>
+                  <a:srgbClr val="2B2D30"/>
+                </a:solidFill>
+                <a:latin typeface="Montserrat ExtraBold" pitchFamily="34" charset="0"/>
+                <a:ea typeface="Montserrat ExtraBold" pitchFamily="34" charset="-122"/>
+                <a:cs typeface="Montserrat ExtraBold" pitchFamily="34" charset="-120"/>
+              </a:rPr>
+              <a:t>REACHABLE</a:t>
+            </a:r>
+            <a:endParaRPr lang="en-US" sz="1300" dirty="0"/>
+          </a:p>
+        </p:txBody>
+      </p:sp>
+      <p:sp>
+        <p:nvSpPr>
+          <p:cNvPr id="31" name="Text 28"/>
+          <p:cNvSpPr txBox="1"/>
+          <p:nvPr/>
+        </p:nvSpPr>
+        <p:spPr>
+          <a:xfrm>
+            <a:off x="6318504" y="3172968"/>
+            <a:ext cx="4839919" cy="420624"/>
+          </a:xfrm>
+          <a:prstGeom prst="rect">
+            <a:avLst/>
+          </a:prstGeom>
+          <a:noFill/>
+          <a:ln/>
+        </p:spPr>
+        <p:txBody>
+          <a:bodyPr wrap="square" lIns="0" tIns="0" rIns="0" bIns="0" rtlCol="0" anchor="t"/>
+          <a:lstStyle/>
+          <a:p>
+            <a:pPr indent="0" marL="0">
+              <a:lnSpc>
+                <a:spcPct val="116000"/>
+              </a:lnSpc>
+              <a:buNone/>
+            </a:pPr>
+            <a:r>
+              <a:rPr lang="en-US" sz="950" dirty="0">
+                <a:solidFill>
+                  <a:srgbClr val="6E7175"/>
+                </a:solidFill>
+                <a:latin typeface="Montserrat" pitchFamily="34" charset="0"/>
+                <a:ea typeface="Montserrat" pitchFamily="34" charset="-122"/>
+                <a:cs typeface="Montserrat" pitchFamily="34" charset="-120"/>
+              </a:rPr>
+              <a:t>Our code does call the vulnerable part. This one is real exposure, and it gets worked.</a:t>
+            </a:r>
+            <a:endParaRPr lang="en-US" sz="950" dirty="0"/>
+          </a:p>
+        </p:txBody>
+      </p:sp>
+      <p:sp>
+        <p:nvSpPr>
+          <p:cNvPr id="32" name="Shape 29"/>
+          <p:cNvSpPr/>
+          <p:nvPr/>
+        </p:nvSpPr>
+        <p:spPr>
+          <a:xfrm>
+            <a:off x="6062472" y="3813048"/>
+            <a:ext cx="5351983" cy="960120"/>
+          </a:xfrm>
+          <a:prstGeom prst="roundRect">
+            <a:avLst>
+              <a:gd name="adj" fmla="val 5714"/>
+            </a:avLst>
+          </a:prstGeom>
+          <a:solidFill>
+            <a:srgbClr val="FFFFFF"/>
+          </a:solidFill>
+          <a:ln w="9525">
+            <a:solidFill>
+              <a:srgbClr val="E6E4E2"/>
+            </a:solidFill>
+            <a:prstDash val="solid"/>
+          </a:ln>
+          <a:effectLst>
+            <a:outerShdw sx="100000" sy="100000" kx="0" ky="0" algn="bl" rotWithShape="0" blurRad="1.9407471907644937e+46" dist="4.851867976911234e+45" dir="3.2651735040000005e+54">
+              <a:srgbClr val="959092">
+                <a:alpha val="2.2e+54"/>
+              </a:srgbClr>
+            </a:outerShdw>
+          </a:effectLst>
+        </p:spPr>
+      </p:sp>
+      <p:sp>
+        <p:nvSpPr>
+          <p:cNvPr id="33" name="Shape 30"/>
+          <p:cNvSpPr/>
+          <p:nvPr/>
+        </p:nvSpPr>
+        <p:spPr>
+          <a:xfrm>
+            <a:off x="6062472" y="3813048"/>
+            <a:ext cx="50292" cy="960120"/>
+          </a:xfrm>
+          <a:prstGeom prst="rect">
+            <a:avLst/>
+          </a:prstGeom>
+          <a:solidFill>
+            <a:srgbClr val="C9C6C4"/>
+          </a:solidFill>
+          <a:ln/>
+        </p:spPr>
+      </p:sp>
+      <p:sp>
+        <p:nvSpPr>
+          <p:cNvPr id="34" name="Text 31"/>
+          <p:cNvSpPr txBox="1"/>
+          <p:nvPr/>
+        </p:nvSpPr>
+        <p:spPr>
+          <a:xfrm>
+            <a:off x="6318504" y="3959352"/>
+            <a:ext cx="4894783" cy="237744"/>
+          </a:xfrm>
+          <a:prstGeom prst="rect">
+            <a:avLst/>
+          </a:prstGeom>
+          <a:noFill/>
+          <a:ln/>
+        </p:spPr>
+        <p:txBody>
+          <a:bodyPr wrap="square" lIns="0" tIns="0" rIns="0" bIns="0" rtlCol="0" anchor="t"/>
+          <a:lstStyle/>
+          <a:p>
+            <a:pPr indent="0" marL="0">
+              <a:buNone/>
+            </a:pPr>
+            <a:r>
+              <a:rPr lang="en-US" sz="1300" spc="40" kern="0" dirty="0">
+                <a:solidFill>
+                  <a:srgbClr val="2B2D30"/>
+                </a:solidFill>
+                <a:latin typeface="Montserrat ExtraBold" pitchFamily="34" charset="0"/>
+                <a:ea typeface="Montserrat ExtraBold" pitchFamily="34" charset="-122"/>
+                <a:cs typeface="Montserrat ExtraBold" pitchFamily="34" charset="-120"/>
+              </a:rPr>
+              <a:t>NO CALL SITE FOUND</a:t>
+            </a:r>
+            <a:endParaRPr lang="en-US" sz="1300" dirty="0"/>
+          </a:p>
+        </p:txBody>
+      </p:sp>
+      <p:sp>
+        <p:nvSpPr>
+          <p:cNvPr id="35" name="Text 32"/>
+          <p:cNvSpPr txBox="1"/>
+          <p:nvPr/>
+        </p:nvSpPr>
+        <p:spPr>
+          <a:xfrm>
+            <a:off x="6318504" y="4242816"/>
+            <a:ext cx="4839919" cy="420624"/>
+          </a:xfrm>
+          <a:prstGeom prst="rect">
+            <a:avLst/>
+          </a:prstGeom>
+          <a:noFill/>
+          <a:ln/>
+        </p:spPr>
+        <p:txBody>
+          <a:bodyPr wrap="square" lIns="0" tIns="0" rIns="0" bIns="0" rtlCol="0" anchor="t"/>
+          <a:lstStyle/>
+          <a:p>
+            <a:pPr indent="0" marL="0">
+              <a:lnSpc>
+                <a:spcPct val="116000"/>
+              </a:lnSpc>
+              <a:buNone/>
+            </a:pPr>
+            <a:r>
+              <a:rPr lang="en-US" sz="950" dirty="0">
+                <a:solidFill>
+                  <a:srgbClr val="6E7175"/>
+                </a:solidFill>
+                <a:latin typeface="Montserrat" pitchFamily="34" charset="0"/>
+                <a:ea typeface="Montserrat" pitchFamily="34" charset="-122"/>
+                <a:cs typeface="Montserrat" pitchFamily="34" charset="-120"/>
+              </a:rPr>
+              <a:t>Nothing in our code reaches it. Read with a real code parser rather than a text search, so it is a confident answer.</a:t>
+            </a:r>
+            <a:endParaRPr lang="en-US" sz="950" dirty="0"/>
+          </a:p>
+        </p:txBody>
+      </p:sp>
+      <p:sp>
+        <p:nvSpPr>
+          <p:cNvPr id="36" name="Shape 33"/>
+          <p:cNvSpPr/>
+          <p:nvPr/>
+        </p:nvSpPr>
+        <p:spPr>
+          <a:xfrm>
+            <a:off x="6062472" y="4882896"/>
+            <a:ext cx="5351983" cy="960120"/>
+          </a:xfrm>
+          <a:prstGeom prst="roundRect">
+            <a:avLst>
+              <a:gd name="adj" fmla="val 5714"/>
+            </a:avLst>
+          </a:prstGeom>
+          <a:solidFill>
+            <a:srgbClr val="FFFFFF"/>
+          </a:solidFill>
+          <a:ln w="9525">
+            <a:solidFill>
+              <a:srgbClr val="E6E4E2"/>
+            </a:solidFill>
+            <a:prstDash val="solid"/>
+          </a:ln>
+          <a:effectLst>
+            <a:outerShdw sx="100000" sy="100000" kx="0" ky="0" algn="bl" rotWithShape="0" blurRad="2.464748932270907e+50" dist="6.161872330677268e+49" dir="1.9591041024000004e+59">
+              <a:srgbClr val="959092">
+                <a:alpha val="2.2e+59"/>
+              </a:srgbClr>
+            </a:outerShdw>
+          </a:effectLst>
+        </p:spPr>
+      </p:sp>
+      <p:sp>
+        <p:nvSpPr>
+          <p:cNvPr id="37" name="Shape 34"/>
+          <p:cNvSpPr/>
+          <p:nvPr/>
+        </p:nvSpPr>
+        <p:spPr>
+          <a:xfrm>
+            <a:off x="6062472" y="4882896"/>
+            <a:ext cx="50292" cy="960120"/>
+          </a:xfrm>
+          <a:prstGeom prst="rect">
+            <a:avLst/>
+          </a:prstGeom>
+          <a:solidFill>
+            <a:srgbClr val="43464A"/>
+          </a:solidFill>
+          <a:ln/>
+        </p:spPr>
+      </p:sp>
+      <p:sp>
+        <p:nvSpPr>
+          <p:cNvPr id="38" name="Text 35"/>
+          <p:cNvSpPr txBox="1"/>
+          <p:nvPr/>
+        </p:nvSpPr>
+        <p:spPr>
+          <a:xfrm>
+            <a:off x="6318504" y="5029200"/>
+            <a:ext cx="4894783" cy="237744"/>
+          </a:xfrm>
+          <a:prstGeom prst="rect">
+            <a:avLst/>
+          </a:prstGeom>
+          <a:noFill/>
+          <a:ln/>
+        </p:spPr>
+        <p:txBody>
+          <a:bodyPr wrap="square" lIns="0" tIns="0" rIns="0" bIns="0" rtlCol="0" anchor="t"/>
+          <a:lstStyle/>
+          <a:p>
+            <a:pPr indent="0" marL="0">
+              <a:buNone/>
+            </a:pPr>
+            <a:r>
+              <a:rPr lang="en-US" sz="1300" spc="40" kern="0" dirty="0">
+                <a:solidFill>
+                  <a:srgbClr val="2B2D30"/>
+                </a:solidFill>
+                <a:latin typeface="Montserrat ExtraBold" pitchFamily="34" charset="0"/>
+                <a:ea typeface="Montserrat ExtraBold" pitchFamily="34" charset="-122"/>
+                <a:cs typeface="Montserrat ExtraBold" pitchFamily="34" charset="-120"/>
+              </a:rPr>
+              <a:t>CAN'T PROVE</a:t>
+            </a:r>
+            <a:endParaRPr lang="en-US" sz="1300" dirty="0"/>
+          </a:p>
+        </p:txBody>
+      </p:sp>
+      <p:sp>
+        <p:nvSpPr>
+          <p:cNvPr id="39" name="Text 36"/>
+          <p:cNvSpPr txBox="1"/>
+          <p:nvPr/>
+        </p:nvSpPr>
+        <p:spPr>
+          <a:xfrm>
+            <a:off x="6318504" y="5312664"/>
+            <a:ext cx="4839919" cy="420624"/>
+          </a:xfrm>
+          <a:prstGeom prst="rect">
+            <a:avLst/>
+          </a:prstGeom>
+          <a:noFill/>
+          <a:ln/>
+        </p:spPr>
+        <p:txBody>
+          <a:bodyPr wrap="square" lIns="0" tIns="0" rIns="0" bIns="0" rtlCol="0" anchor="t"/>
+          <a:lstStyle/>
+          <a:p>
+            <a:pPr indent="0" marL="0">
+              <a:lnSpc>
+                <a:spcPct val="116000"/>
+              </a:lnSpc>
+              <a:buNone/>
+            </a:pPr>
+            <a:r>
+              <a:rPr lang="en-US" sz="950" dirty="0">
+                <a:solidFill>
+                  <a:srgbClr val="6E7175"/>
+                </a:solidFill>
+                <a:latin typeface="Montserrat" pitchFamily="34" charset="0"/>
+                <a:ea typeface="Montserrat" pitchFamily="34" charset="-122"/>
+                <a:cs typeface="Montserrat" pitchFamily="34" charset="-120"/>
+              </a:rPr>
+              <a:t>The tool cannot be certain either way — so it says exactly that, and a person makes the call.</a:t>
+            </a:r>
+            <a:endParaRPr lang="en-US" sz="950" dirty="0"/>
+          </a:p>
+        </p:txBody>
+      </p:sp>
+      <p:sp>
+        <p:nvSpPr>
+          <p:cNvPr id="40" name="Text 37"/>
+          <p:cNvSpPr txBox="1"/>
+          <p:nvPr/>
+        </p:nvSpPr>
+        <p:spPr>
+          <a:xfrm>
+            <a:off x="6062472" y="5943600"/>
+            <a:ext cx="5351983" cy="237744"/>
+          </a:xfrm>
+          <a:prstGeom prst="rect">
+            <a:avLst/>
+          </a:prstGeom>
+          <a:noFill/>
+          <a:ln/>
+        </p:spPr>
+        <p:txBody>
+          <a:bodyPr wrap="square" lIns="0" tIns="0" rIns="0" bIns="0" rtlCol="0" anchor="t"/>
+          <a:lstStyle/>
+          <a:p>
+            <a:pPr indent="0" marL="0">
+              <a:buNone/>
+            </a:pPr>
+            <a:r>
+              <a:rPr lang="en-US" sz="1050" dirty="0">
+                <a:solidFill>
+                  <a:srgbClr val="43464A"/>
                 </a:solidFill>
                 <a:latin typeface="Montserrat SemiBold" pitchFamily="34" charset="0"/>
                 <a:ea typeface="Montserrat SemiBold" pitchFamily="34" charset="-122"/>
                 <a:cs typeface="Montserrat SemiBold" pitchFamily="34" charset="-120"/>
               </a:rPr>
-              <a:t>PACKAGES SCANNED PER RUN  ·  EARLIER VERSION</a:t>
-            </a:r>
-            <a:endParaRPr lang="en-US" sz="850" dirty="0"/>
-          </a:p>
-        </p:txBody>
-      </p:sp>
-      <p:pic>
-        <p:nvPicPr>
-          <p:cNvPr id="22" name="Image 1" descr="/home/user/ai/assets/gen/chart-packages.png">    </p:cNvPr>
-          <p:cNvPicPr>
-            <a:picLocks noChangeAspect="1"/>
-          </p:cNvPicPr>
-          <p:nvPr/>
-        </p:nvPicPr>
-        <p:blipFill>
-          <a:blip r:embed="rId2"/>
-          <a:stretch>
-            <a:fillRect/>
-          </a:stretch>
-        </p:blipFill>
-        <p:spPr>
-          <a:xfrm>
-            <a:off x="6164428" y="2578608"/>
-            <a:ext cx="4261104" cy="2410888"/>
-          </a:xfrm>
-          <a:prstGeom prst="rect">
-            <a:avLst/>
-          </a:prstGeom>
-        </p:spPr>
-      </p:pic>
-      <p:sp>
-        <p:nvSpPr>
-          <p:cNvPr id="23" name="Shape 19"/>
-          <p:cNvSpPr/>
-          <p:nvPr/>
-        </p:nvSpPr>
-        <p:spPr>
-          <a:xfrm>
-            <a:off x="5175504" y="5266944"/>
-            <a:ext cx="6238951" cy="877824"/>
-          </a:xfrm>
-          <a:prstGeom prst="roundRect">
-            <a:avLst>
-              <a:gd name="adj" fmla="val 6250"/>
-            </a:avLst>
-          </a:prstGeom>
-          <a:solidFill>
-            <a:srgbClr val="F6EEF0"/>
-          </a:solidFill>
-          <a:ln/>
-        </p:spPr>
-      </p:sp>
-      <p:sp>
-        <p:nvSpPr>
-          <p:cNvPr id="24" name="Shape 20"/>
-          <p:cNvSpPr/>
-          <p:nvPr/>
-        </p:nvSpPr>
-        <p:spPr>
-          <a:xfrm>
-            <a:off x="5175504" y="5266944"/>
-            <a:ext cx="50292" cy="877824"/>
-          </a:xfrm>
-          <a:prstGeom prst="rect">
-            <a:avLst/>
-          </a:prstGeom>
-          <a:solidFill>
-            <a:srgbClr val="942838"/>
-          </a:solidFill>
-          <a:ln/>
-        </p:spPr>
-      </p:sp>
-      <p:sp>
-        <p:nvSpPr>
-          <p:cNvPr id="25" name="Text 21"/>
-          <p:cNvSpPr txBox="1"/>
-          <p:nvPr/>
-        </p:nvSpPr>
-        <p:spPr>
-          <a:xfrm>
-            <a:off x="5413248" y="5394960"/>
-            <a:ext cx="3657600" cy="201168"/>
-          </a:xfrm>
-          <a:prstGeom prst="rect">
-            <a:avLst/>
-          </a:prstGeom>
-          <a:noFill/>
-          <a:ln/>
-        </p:spPr>
-        <p:txBody>
-          <a:bodyPr wrap="square" lIns="0" tIns="0" rIns="0" bIns="0" rtlCol="0" anchor="t"/>
-          <a:lstStyle/>
-          <a:p>
-            <a:pPr indent="0" marL="0">
-              <a:buNone/>
-            </a:pPr>
-            <a:r>
-              <a:rPr lang="en-US" sz="850" spc="140" kern="0" dirty="0">
-                <a:solidFill>
-                  <a:srgbClr val="942838"/>
-                </a:solidFill>
-                <a:latin typeface="Montserrat SemiBold" pitchFamily="34" charset="0"/>
-                <a:ea typeface="Montserrat SemiBold" pitchFamily="34" charset="-122"/>
-                <a:cs typeface="Montserrat SemiBold" pitchFamily="34" charset="-120"/>
-              </a:rPr>
-              <a:t>IN PRACTICE</a:t>
-            </a:r>
-            <a:endParaRPr lang="en-US" sz="850" dirty="0"/>
-          </a:p>
-        </p:txBody>
-      </p:sp>
-      <p:sp>
-        <p:nvSpPr>
-          <p:cNvPr id="26" name="Text 22"/>
-          <p:cNvSpPr txBox="1"/>
-          <p:nvPr/>
-        </p:nvSpPr>
-        <p:spPr>
-          <a:xfrm>
-            <a:off x="5413248" y="5614416"/>
-            <a:ext cx="5781751" cy="457200"/>
-          </a:xfrm>
-          <a:prstGeom prst="rect">
-            <a:avLst/>
-          </a:prstGeom>
-          <a:noFill/>
-          <a:ln/>
-        </p:spPr>
-        <p:txBody>
-          <a:bodyPr wrap="square" lIns="0" tIns="0" rIns="0" bIns="0" rtlCol="0" anchor="t"/>
-          <a:lstStyle/>
-          <a:p>
-            <a:pPr indent="0" marL="0">
-              <a:lnSpc>
-                <a:spcPct val="120000"/>
-              </a:lnSpc>
-              <a:buNone/>
-            </a:pPr>
-            <a:r>
-              <a:rPr lang="en-US" sz="1000" dirty="0">
-                <a:solidFill>
-                  <a:srgbClr val="43464A"/>
-                </a:solidFill>
-                <a:latin typeface="Montserrat" pitchFamily="34" charset="0"/>
-                <a:ea typeface="Montserrat" pitchFamily="34" charset="-122"/>
-                <a:cs typeface="Montserrat" pitchFamily="34" charset="-120"/>
-              </a:rPr>
-              <a:t>A package we use has a known flaw. AEGIS answers three things: does our code actually call it, how much would be affected, and how risky is the fix. Then the team decides whether it is urgent — instead of guessing.</a:t>
-            </a:r>
-            <a:endParaRPr lang="en-US" sz="1000" dirty="0"/>
+              <a:t>The third answer is why the other two can be trusted.</a:t>
+            </a:r>
+            <a:endParaRPr lang="en-US" sz="1050" dirty="0"/>
           </a:p>
         </p:txBody>
       </p:sp>
@@ -5451,512 +5912,6 @@
             <a:prstDash val="solid"/>
           </a:ln>
           <a:effectLst>
-            <a:outerShdw sx="100000" sy="100000" kx="0" ky="0" algn="bl" rotWithShape="0" blurRad="1.9407471907644937e+46" dist="4.851867976911234e+45" dir="3.2651735040000005e+54">
-              <a:srgbClr val="959092">
-                <a:alpha val="2.2e+54"/>
-              </a:srgbClr>
-            </a:outerShdw>
-          </a:effectLst>
-        </p:spPr>
-      </p:sp>
-      <p:sp>
-        <p:nvSpPr>
-          <p:cNvPr id="14" name="Shape 11"/>
-          <p:cNvSpPr/>
-          <p:nvPr/>
-        </p:nvSpPr>
-        <p:spPr>
-          <a:xfrm>
-            <a:off x="777240" y="2798064"/>
-            <a:ext cx="2412416" cy="45720"/>
-          </a:xfrm>
-          <a:prstGeom prst="rect">
-            <a:avLst/>
-          </a:prstGeom>
-          <a:solidFill>
-            <a:srgbClr val="942838"/>
-          </a:solidFill>
-          <a:ln/>
-        </p:spPr>
-      </p:sp>
-      <p:sp>
-        <p:nvSpPr>
-          <p:cNvPr id="15" name="Text 12"/>
-          <p:cNvSpPr txBox="1"/>
-          <p:nvPr/>
-        </p:nvSpPr>
-        <p:spPr>
-          <a:xfrm>
-            <a:off x="996696" y="2962656"/>
-            <a:ext cx="914400" cy="219456"/>
-          </a:xfrm>
-          <a:prstGeom prst="rect">
-            <a:avLst/>
-          </a:prstGeom>
-          <a:noFill/>
-          <a:ln/>
-        </p:spPr>
-        <p:txBody>
-          <a:bodyPr wrap="square" lIns="0" tIns="0" rIns="0" bIns="0" rtlCol="0" anchor="t"/>
-          <a:lstStyle/>
-          <a:p>
-            <a:pPr indent="0" marL="0">
-              <a:buNone/>
-            </a:pPr>
-            <a:r>
-              <a:rPr lang="en-US" sz="1300" spc="40" kern="0" dirty="0">
-                <a:solidFill>
-                  <a:srgbClr val="DFBEC4"/>
-                </a:solidFill>
-                <a:latin typeface="Montserrat ExtraBold" pitchFamily="34" charset="0"/>
-                <a:ea typeface="Montserrat ExtraBold" pitchFamily="34" charset="-122"/>
-                <a:cs typeface="Montserrat ExtraBold" pitchFamily="34" charset="-120"/>
-              </a:rPr>
-              <a:t>00</a:t>
-            </a:r>
-            <a:endParaRPr lang="en-US" sz="1300" dirty="0"/>
-          </a:p>
-        </p:txBody>
-      </p:sp>
-      <p:sp>
-        <p:nvSpPr>
-          <p:cNvPr id="16" name="Text 13"/>
-          <p:cNvSpPr txBox="1"/>
-          <p:nvPr/>
-        </p:nvSpPr>
-        <p:spPr>
-          <a:xfrm>
-            <a:off x="996696" y="3200400"/>
-            <a:ext cx="1973504" cy="274320"/>
-          </a:xfrm>
-          <a:prstGeom prst="rect">
-            <a:avLst/>
-          </a:prstGeom>
-          <a:noFill/>
-          <a:ln/>
-        </p:spPr>
-        <p:txBody>
-          <a:bodyPr wrap="square" lIns="0" tIns="0" rIns="0" bIns="0" rtlCol="0" anchor="t"/>
-          <a:lstStyle/>
-          <a:p>
-            <a:pPr indent="0" marL="0">
-              <a:buNone/>
-            </a:pPr>
-            <a:r>
-              <a:rPr lang="en-US" sz="1600" spc="30" kern="0" dirty="0">
-                <a:solidFill>
-                  <a:srgbClr val="2B2D30"/>
-                </a:solidFill>
-                <a:latin typeface="Montserrat ExtraBold" pitchFamily="34" charset="0"/>
-                <a:ea typeface="Montserrat ExtraBold" pitchFamily="34" charset="-122"/>
-                <a:cs typeface="Montserrat ExtraBold" pitchFamily="34" charset="-120"/>
-              </a:rPr>
-              <a:t>SCAN</a:t>
-            </a:r>
-            <a:endParaRPr lang="en-US" sz="1600" dirty="0"/>
-          </a:p>
-        </p:txBody>
-      </p:sp>
-      <p:sp>
-        <p:nvSpPr>
-          <p:cNvPr id="17" name="Text 14"/>
-          <p:cNvSpPr txBox="1"/>
-          <p:nvPr/>
-        </p:nvSpPr>
-        <p:spPr>
-          <a:xfrm>
-            <a:off x="996696" y="3529584"/>
-            <a:ext cx="1973504" cy="713232"/>
-          </a:xfrm>
-          <a:prstGeom prst="rect">
-            <a:avLst/>
-          </a:prstGeom>
-          <a:noFill/>
-          <a:ln/>
-        </p:spPr>
-        <p:txBody>
-          <a:bodyPr wrap="square" lIns="0" tIns="0" rIns="0" bIns="0" rtlCol="0" anchor="t"/>
-          <a:lstStyle/>
-          <a:p>
-            <a:pPr indent="0" marL="0">
-              <a:lnSpc>
-                <a:spcPct val="118000"/>
-              </a:lnSpc>
-              <a:buNone/>
-            </a:pPr>
-            <a:r>
-              <a:rPr lang="en-US" sz="950" dirty="0">
-                <a:solidFill>
-                  <a:srgbClr val="6E7175"/>
-                </a:solidFill>
-                <a:latin typeface="Montserrat" pitchFamily="34" charset="0"/>
-                <a:ea typeface="Montserrat" pitchFamily="34" charset="-122"/>
-                <a:cs typeface="Montserrat" pitchFamily="34" charset="-120"/>
-              </a:rPr>
-              <a:t>Checks every package version the project installs — its "lockfile" — against public records of known flaws.</a:t>
-            </a:r>
-            <a:endParaRPr lang="en-US" sz="950" dirty="0"/>
-          </a:p>
-        </p:txBody>
-      </p:sp>
-      <p:sp>
-        <p:nvSpPr>
-          <p:cNvPr id="18" name="Text 15"/>
-          <p:cNvSpPr txBox="1"/>
-          <p:nvPr/>
-        </p:nvSpPr>
-        <p:spPr>
-          <a:xfrm>
-            <a:off x="996696" y="4261104"/>
-            <a:ext cx="1973504" cy="201168"/>
-          </a:xfrm>
-          <a:prstGeom prst="rect">
-            <a:avLst/>
-          </a:prstGeom>
-          <a:noFill/>
-          <a:ln/>
-        </p:spPr>
-        <p:txBody>
-          <a:bodyPr wrap="square" lIns="0" tIns="0" rIns="0" bIns="0" rtlCol="0" anchor="t"/>
-          <a:lstStyle/>
-          <a:p>
-            <a:pPr indent="0" marL="0">
-              <a:buNone/>
-            </a:pPr>
-            <a:r>
-              <a:rPr lang="en-US" sz="850" spc="60" kern="0" dirty="0">
-                <a:solidFill>
-                  <a:srgbClr val="942838"/>
-                </a:solidFill>
-                <a:latin typeface="Montserrat SemiBold" pitchFamily="34" charset="0"/>
-                <a:ea typeface="Montserrat SemiBold" pitchFamily="34" charset="-122"/>
-                <a:cs typeface="Montserrat SemiBold" pitchFamily="34" charset="-120"/>
-              </a:rPr>
-              <a:t>Checks public flaw records</a:t>
-            </a:r>
-            <a:endParaRPr lang="en-US" sz="850" dirty="0"/>
-          </a:p>
-        </p:txBody>
-      </p:sp>
-      <p:sp>
-        <p:nvSpPr>
-          <p:cNvPr id="19" name="Shape 16"/>
-          <p:cNvSpPr/>
-          <p:nvPr/>
-        </p:nvSpPr>
-        <p:spPr>
-          <a:xfrm>
-            <a:off x="3235376" y="3656686"/>
-            <a:ext cx="146304" cy="20117"/>
-          </a:xfrm>
-          <a:prstGeom prst="rect">
-            <a:avLst/>
-          </a:prstGeom>
-          <a:solidFill>
-            <a:srgbClr val="43464A"/>
-          </a:solidFill>
-          <a:ln/>
-        </p:spPr>
-      </p:sp>
-      <p:sp>
-        <p:nvSpPr>
-          <p:cNvPr id="20" name="Shape 17"/>
-          <p:cNvSpPr/>
-          <p:nvPr/>
-        </p:nvSpPr>
-        <p:spPr>
-          <a:xfrm rot="5400000">
-            <a:off x="3381680" y="3607308"/>
-            <a:ext cx="91440" cy="118872"/>
-          </a:xfrm>
-          <a:prstGeom prst="triangle">
-            <a:avLst/>
-          </a:prstGeom>
-          <a:solidFill>
-            <a:srgbClr val="43464A"/>
-          </a:solidFill>
-          <a:ln/>
-        </p:spPr>
-      </p:sp>
-      <p:sp>
-        <p:nvSpPr>
-          <p:cNvPr id="21" name="Shape 18"/>
-          <p:cNvSpPr/>
-          <p:nvPr/>
-        </p:nvSpPr>
-        <p:spPr>
-          <a:xfrm>
-            <a:off x="3518840" y="2798064"/>
-            <a:ext cx="2412416" cy="1737360"/>
-          </a:xfrm>
-          <a:prstGeom prst="roundRect">
-            <a:avLst>
-              <a:gd name="adj" fmla="val 3158"/>
-            </a:avLst>
-          </a:prstGeom>
-          <a:solidFill>
-            <a:srgbClr val="FFFFFF"/>
-          </a:solidFill>
-          <a:ln w="9525">
-            <a:solidFill>
-              <a:srgbClr val="E6E4E2"/>
-            </a:solidFill>
-            <a:prstDash val="solid"/>
-          </a:ln>
-          <a:effectLst>
-            <a:outerShdw sx="100000" sy="100000" kx="0" ky="0" algn="bl" rotWithShape="0" blurRad="2.464748932270907e+50" dist="6.161872330677268e+49" dir="1.9591041024000004e+59">
-              <a:srgbClr val="959092">
-                <a:alpha val="2.2e+59"/>
-              </a:srgbClr>
-            </a:outerShdw>
-          </a:effectLst>
-        </p:spPr>
-      </p:sp>
-      <p:sp>
-        <p:nvSpPr>
-          <p:cNvPr id="22" name="Shape 19"/>
-          <p:cNvSpPr/>
-          <p:nvPr/>
-        </p:nvSpPr>
-        <p:spPr>
-          <a:xfrm>
-            <a:off x="3518840" y="2798064"/>
-            <a:ext cx="2412416" cy="45720"/>
-          </a:xfrm>
-          <a:prstGeom prst="rect">
-            <a:avLst/>
-          </a:prstGeom>
-          <a:solidFill>
-            <a:srgbClr val="942838"/>
-          </a:solidFill>
-          <a:ln/>
-        </p:spPr>
-      </p:sp>
-      <p:sp>
-        <p:nvSpPr>
-          <p:cNvPr id="23" name="Text 20"/>
-          <p:cNvSpPr txBox="1"/>
-          <p:nvPr/>
-        </p:nvSpPr>
-        <p:spPr>
-          <a:xfrm>
-            <a:off x="3738296" y="2962656"/>
-            <a:ext cx="914400" cy="219456"/>
-          </a:xfrm>
-          <a:prstGeom prst="rect">
-            <a:avLst/>
-          </a:prstGeom>
-          <a:noFill/>
-          <a:ln/>
-        </p:spPr>
-        <p:txBody>
-          <a:bodyPr wrap="square" lIns="0" tIns="0" rIns="0" bIns="0" rtlCol="0" anchor="t"/>
-          <a:lstStyle/>
-          <a:p>
-            <a:pPr indent="0" marL="0">
-              <a:buNone/>
-            </a:pPr>
-            <a:r>
-              <a:rPr lang="en-US" sz="1300" spc="40" kern="0" dirty="0">
-                <a:solidFill>
-                  <a:srgbClr val="DFBEC4"/>
-                </a:solidFill>
-                <a:latin typeface="Montserrat ExtraBold" pitchFamily="34" charset="0"/>
-                <a:ea typeface="Montserrat ExtraBold" pitchFamily="34" charset="-122"/>
-                <a:cs typeface="Montserrat ExtraBold" pitchFamily="34" charset="-120"/>
-              </a:rPr>
-              <a:t>01</a:t>
-            </a:r>
-            <a:endParaRPr lang="en-US" sz="1300" dirty="0"/>
-          </a:p>
-        </p:txBody>
-      </p:sp>
-      <p:sp>
-        <p:nvSpPr>
-          <p:cNvPr id="24" name="Text 21"/>
-          <p:cNvSpPr txBox="1"/>
-          <p:nvPr/>
-        </p:nvSpPr>
-        <p:spPr>
-          <a:xfrm>
-            <a:off x="3738296" y="3200400"/>
-            <a:ext cx="1973504" cy="274320"/>
-          </a:xfrm>
-          <a:prstGeom prst="rect">
-            <a:avLst/>
-          </a:prstGeom>
-          <a:noFill/>
-          <a:ln/>
-        </p:spPr>
-        <p:txBody>
-          <a:bodyPr wrap="square" lIns="0" tIns="0" rIns="0" bIns="0" rtlCol="0" anchor="t"/>
-          <a:lstStyle/>
-          <a:p>
-            <a:pPr indent="0" marL="0">
-              <a:buNone/>
-            </a:pPr>
-            <a:r>
-              <a:rPr lang="en-US" sz="1600" spc="30" kern="0" dirty="0">
-                <a:solidFill>
-                  <a:srgbClr val="2B2D30"/>
-                </a:solidFill>
-                <a:latin typeface="Montserrat ExtraBold" pitchFamily="34" charset="0"/>
-                <a:ea typeface="Montserrat ExtraBold" pitchFamily="34" charset="-122"/>
-                <a:cs typeface="Montserrat ExtraBold" pitchFamily="34" charset="-120"/>
-              </a:rPr>
-              <a:t>REACH</a:t>
-            </a:r>
-            <a:endParaRPr lang="en-US" sz="1600" dirty="0"/>
-          </a:p>
-        </p:txBody>
-      </p:sp>
-      <p:sp>
-        <p:nvSpPr>
-          <p:cNvPr id="25" name="Text 22"/>
-          <p:cNvSpPr txBox="1"/>
-          <p:nvPr/>
-        </p:nvSpPr>
-        <p:spPr>
-          <a:xfrm>
-            <a:off x="3738296" y="3529584"/>
-            <a:ext cx="1973504" cy="713232"/>
-          </a:xfrm>
-          <a:prstGeom prst="rect">
-            <a:avLst/>
-          </a:prstGeom>
-          <a:noFill/>
-          <a:ln/>
-        </p:spPr>
-        <p:txBody>
-          <a:bodyPr wrap="square" lIns="0" tIns="0" rIns="0" bIns="0" rtlCol="0" anchor="t"/>
-          <a:lstStyle/>
-          <a:p>
-            <a:pPr indent="0" marL="0">
-              <a:lnSpc>
-                <a:spcPct val="118000"/>
-              </a:lnSpc>
-              <a:buNone/>
-            </a:pPr>
-            <a:r>
-              <a:rPr lang="en-US" sz="950" dirty="0">
-                <a:solidFill>
-                  <a:srgbClr val="6E7175"/>
-                </a:solidFill>
-                <a:latin typeface="Montserrat" pitchFamily="34" charset="0"/>
-                <a:ea typeface="Montserrat" pitchFamily="34" charset="-122"/>
-                <a:cs typeface="Montserrat" pitchFamily="34" charset="-120"/>
-              </a:rPr>
-              <a:t>Finds whether our own code actually calls the vulnerable part — and answers reachable, no call site, or can't prove.</a:t>
-            </a:r>
-            <a:endParaRPr lang="en-US" sz="950" dirty="0"/>
-          </a:p>
-        </p:txBody>
-      </p:sp>
-      <p:sp>
-        <p:nvSpPr>
-          <p:cNvPr id="26" name="Text 23"/>
-          <p:cNvSpPr txBox="1"/>
-          <p:nvPr/>
-        </p:nvSpPr>
-        <p:spPr>
-          <a:xfrm>
-            <a:off x="3738296" y="4261104"/>
-            <a:ext cx="1973504" cy="201168"/>
-          </a:xfrm>
-          <a:prstGeom prst="rect">
-            <a:avLst/>
-          </a:prstGeom>
-          <a:noFill/>
-          <a:ln/>
-        </p:spPr>
-        <p:txBody>
-          <a:bodyPr wrap="square" lIns="0" tIns="0" rIns="0" bIns="0" rtlCol="0" anchor="t"/>
-          <a:lstStyle/>
-          <a:p>
-            <a:pPr indent="0" marL="0">
-              <a:buNone/>
-            </a:pPr>
-            <a:r>
-              <a:rPr lang="en-US" sz="850" spc="60" kern="0" dirty="0">
-                <a:solidFill>
-                  <a:srgbClr val="942838"/>
-                </a:solidFill>
-                <a:latin typeface="Montserrat SemiBold" pitchFamily="34" charset="0"/>
-                <a:ea typeface="Montserrat SemiBold" pitchFamily="34" charset="-122"/>
-                <a:cs typeface="Montserrat SemiBold" pitchFamily="34" charset="-120"/>
-              </a:rPr>
-              <a:t>Analyses local code only</a:t>
-            </a:r>
-            <a:endParaRPr lang="en-US" sz="850" dirty="0"/>
-          </a:p>
-        </p:txBody>
-      </p:sp>
-      <p:sp>
-        <p:nvSpPr>
-          <p:cNvPr id="27" name="Shape 24"/>
-          <p:cNvSpPr/>
-          <p:nvPr/>
-        </p:nvSpPr>
-        <p:spPr>
-          <a:xfrm>
-            <a:off x="5976976" y="3656686"/>
-            <a:ext cx="146304" cy="20117"/>
-          </a:xfrm>
-          <a:prstGeom prst="rect">
-            <a:avLst/>
-          </a:prstGeom>
-          <a:solidFill>
-            <a:srgbClr val="43464A"/>
-          </a:solidFill>
-          <a:ln/>
-        </p:spPr>
-      </p:sp>
-      <p:sp>
-        <p:nvSpPr>
-          <p:cNvPr id="28" name="Shape 25"/>
-          <p:cNvSpPr/>
-          <p:nvPr/>
-        </p:nvSpPr>
-        <p:spPr>
-          <a:xfrm rot="5400000">
-            <a:off x="6123280" y="3607308"/>
-            <a:ext cx="91440" cy="118872"/>
-          </a:xfrm>
-          <a:prstGeom prst="triangle">
-            <a:avLst/>
-          </a:prstGeom>
-          <a:solidFill>
-            <a:srgbClr val="43464A"/>
-          </a:solidFill>
-          <a:ln/>
-        </p:spPr>
-      </p:sp>
-      <p:sp>
-        <p:nvSpPr>
-          <p:cNvPr id="29" name="Shape 26"/>
-          <p:cNvSpPr/>
-          <p:nvPr/>
-        </p:nvSpPr>
-        <p:spPr>
-          <a:xfrm>
-            <a:off x="6260440" y="2798064"/>
-            <a:ext cx="2412416" cy="1737360"/>
-          </a:xfrm>
-          <a:prstGeom prst="roundRect">
-            <a:avLst>
-              <a:gd name="adj" fmla="val 3158"/>
-            </a:avLst>
-          </a:prstGeom>
-          <a:solidFill>
-            <a:srgbClr val="FFFFFF"/>
-          </a:solidFill>
-          <a:ln w="9525">
-            <a:solidFill>
-              <a:srgbClr val="E6E4E2"/>
-            </a:solidFill>
-            <a:prstDash val="solid"/>
-          </a:ln>
-          <a:effectLst>
             <a:outerShdw sx="100000" sy="100000" kx="0" ky="0" algn="bl" rotWithShape="0" blurRad="3.1302311439840524e+54" dist="7.825577859960131e+53" dir="1.1754624614400003e+64">
               <a:srgbClr val="959092">
                 <a:alpha val="2.2e+64"/>
@@ -5967,13 +5922,13 @@
       </p:sp>
       <p:sp>
         <p:nvSpPr>
-          <p:cNvPr id="30" name="Shape 27"/>
+          <p:cNvPr id="14" name="Shape 11"/>
           <p:cNvSpPr/>
           <p:nvPr/>
         </p:nvSpPr>
         <p:spPr>
           <a:xfrm>
-            <a:off x="6260440" y="2798064"/>
+            <a:off x="777240" y="2798064"/>
             <a:ext cx="2412416" cy="45720"/>
           </a:xfrm>
           <a:prstGeom prst="rect">
@@ -5987,13 +5942,13 @@
       </p:sp>
       <p:sp>
         <p:nvSpPr>
-          <p:cNvPr id="31" name="Text 28"/>
-          <p:cNvSpPr txBox="1"/>
-          <p:nvPr/>
-        </p:nvSpPr>
-        <p:spPr>
-          <a:xfrm>
-            <a:off x="6479896" y="2962656"/>
+          <p:cNvPr id="15" name="Text 12"/>
+          <p:cNvSpPr txBox="1"/>
+          <p:nvPr/>
+        </p:nvSpPr>
+        <p:spPr>
+          <a:xfrm>
+            <a:off x="996696" y="2962656"/>
             <a:ext cx="914400" cy="219456"/>
           </a:xfrm>
           <a:prstGeom prst="rect">
@@ -6018,7 +5973,7 @@
                 <a:ea typeface="Montserrat ExtraBold" pitchFamily="34" charset="-122"/>
                 <a:cs typeface="Montserrat ExtraBold" pitchFamily="34" charset="-120"/>
               </a:rPr>
-              <a:t>02</a:t>
+              <a:t>00</a:t>
             </a:r>
             <a:endParaRPr lang="en-US" sz="1300" dirty="0"/>
           </a:p>
@@ -6026,13 +5981,13 @@
       </p:sp>
       <p:sp>
         <p:nvSpPr>
-          <p:cNvPr id="32" name="Text 29"/>
-          <p:cNvSpPr txBox="1"/>
-          <p:nvPr/>
-        </p:nvSpPr>
-        <p:spPr>
-          <a:xfrm>
-            <a:off x="6479896" y="3200400"/>
+          <p:cNvPr id="16" name="Text 13"/>
+          <p:cNvSpPr txBox="1"/>
+          <p:nvPr/>
+        </p:nvSpPr>
+        <p:spPr>
+          <a:xfrm>
+            <a:off x="996696" y="3200400"/>
             <a:ext cx="1973504" cy="274320"/>
           </a:xfrm>
           <a:prstGeom prst="rect">
@@ -6057,7 +6012,7 @@
                 <a:ea typeface="Montserrat ExtraBold" pitchFamily="34" charset="-122"/>
                 <a:cs typeface="Montserrat ExtraBold" pitchFamily="34" charset="-120"/>
               </a:rPr>
-              <a:t>BLAST</a:t>
+              <a:t>SCAN</a:t>
             </a:r>
             <a:endParaRPr lang="en-US" sz="1600" dirty="0"/>
           </a:p>
@@ -6065,13 +6020,13 @@
       </p:sp>
       <p:sp>
         <p:nvSpPr>
-          <p:cNvPr id="33" name="Text 30"/>
-          <p:cNvSpPr txBox="1"/>
-          <p:nvPr/>
-        </p:nvSpPr>
-        <p:spPr>
-          <a:xfrm>
-            <a:off x="6479896" y="3529584"/>
+          <p:cNvPr id="17" name="Text 14"/>
+          <p:cNvSpPr txBox="1"/>
+          <p:nvPr/>
+        </p:nvSpPr>
+        <p:spPr>
+          <a:xfrm>
+            <a:off x="996696" y="3529584"/>
             <a:ext cx="1973504" cy="713232"/>
           </a:xfrm>
           <a:prstGeom prst="rect">
@@ -6099,7 +6054,7 @@
                 <a:ea typeface="Montserrat" pitchFamily="34" charset="-122"/>
                 <a:cs typeface="Montserrat" pitchFamily="34" charset="-120"/>
               </a:rPr>
-              <a:t>Measures how much could be affected — how much of the codebase sits downstream, and whether it runs in production.</a:t>
+              <a:t>Checks every package version the project installs — its "lockfile" — against public records of known flaws.</a:t>
             </a:r>
             <a:endParaRPr lang="en-US" sz="950" dirty="0"/>
           </a:p>
@@ -6107,13 +6062,13 @@
       </p:sp>
       <p:sp>
         <p:nvSpPr>
-          <p:cNvPr id="34" name="Text 31"/>
-          <p:cNvSpPr txBox="1"/>
-          <p:nvPr/>
-        </p:nvSpPr>
-        <p:spPr>
-          <a:xfrm>
-            <a:off x="6479896" y="4261104"/>
+          <p:cNvPr id="18" name="Text 15"/>
+          <p:cNvSpPr txBox="1"/>
+          <p:nvPr/>
+        </p:nvSpPr>
+        <p:spPr>
+          <a:xfrm>
+            <a:off x="996696" y="4261104"/>
             <a:ext cx="1973504" cy="201168"/>
           </a:xfrm>
           <a:prstGeom prst="rect">
@@ -6138,7 +6093,7 @@
                 <a:ea typeface="Montserrat SemiBold" pitchFamily="34" charset="-122"/>
                 <a:cs typeface="Montserrat SemiBold" pitchFamily="34" charset="-120"/>
               </a:rPr>
-              <a:t>Analyses local code only</a:t>
+              <a:t>Checks public flaw records</a:t>
             </a:r>
             <a:endParaRPr lang="en-US" sz="850" dirty="0"/>
           </a:p>
@@ -6146,13 +6101,13 @@
       </p:sp>
       <p:sp>
         <p:nvSpPr>
-          <p:cNvPr id="35" name="Shape 32"/>
+          <p:cNvPr id="19" name="Shape 16"/>
           <p:cNvSpPr/>
           <p:nvPr/>
         </p:nvSpPr>
         <p:spPr>
           <a:xfrm>
-            <a:off x="8718575" y="3656686"/>
+            <a:off x="3235376" y="3656686"/>
             <a:ext cx="146304" cy="20117"/>
           </a:xfrm>
           <a:prstGeom prst="rect">
@@ -6166,13 +6121,13 @@
       </p:sp>
       <p:sp>
         <p:nvSpPr>
-          <p:cNvPr id="36" name="Shape 33"/>
+          <p:cNvPr id="20" name="Shape 17"/>
           <p:cNvSpPr/>
           <p:nvPr/>
         </p:nvSpPr>
         <p:spPr>
           <a:xfrm rot="5400000">
-            <a:off x="8864879" y="3607308"/>
+            <a:off x="3381680" y="3607308"/>
             <a:ext cx="91440" cy="118872"/>
           </a:xfrm>
           <a:prstGeom prst="triangle">
@@ -6186,13 +6141,13 @@
       </p:sp>
       <p:sp>
         <p:nvSpPr>
-          <p:cNvPr id="37" name="Shape 34"/>
+          <p:cNvPr id="21" name="Shape 18"/>
           <p:cNvSpPr/>
           <p:nvPr/>
         </p:nvSpPr>
         <p:spPr>
           <a:xfrm>
-            <a:off x="9002039" y="2798064"/>
+            <a:off x="3518840" y="2798064"/>
             <a:ext cx="2412416" cy="1737360"/>
           </a:xfrm>
           <a:prstGeom prst="roundRect">
@@ -6213,6 +6168,512 @@
             <a:outerShdw sx="100000" sy="100000" kx="0" ky="0" algn="bl" rotWithShape="0" blurRad="3.9753935528597466e+58" dist="9.938483882149366e+57" dir="7.052774768640002e+68">
               <a:srgbClr val="959092">
                 <a:alpha val="2.2e+69"/>
+              </a:srgbClr>
+            </a:outerShdw>
+          </a:effectLst>
+        </p:spPr>
+      </p:sp>
+      <p:sp>
+        <p:nvSpPr>
+          <p:cNvPr id="22" name="Shape 19"/>
+          <p:cNvSpPr/>
+          <p:nvPr/>
+        </p:nvSpPr>
+        <p:spPr>
+          <a:xfrm>
+            <a:off x="3518840" y="2798064"/>
+            <a:ext cx="2412416" cy="45720"/>
+          </a:xfrm>
+          <a:prstGeom prst="rect">
+            <a:avLst/>
+          </a:prstGeom>
+          <a:solidFill>
+            <a:srgbClr val="942838"/>
+          </a:solidFill>
+          <a:ln/>
+        </p:spPr>
+      </p:sp>
+      <p:sp>
+        <p:nvSpPr>
+          <p:cNvPr id="23" name="Text 20"/>
+          <p:cNvSpPr txBox="1"/>
+          <p:nvPr/>
+        </p:nvSpPr>
+        <p:spPr>
+          <a:xfrm>
+            <a:off x="3738296" y="2962656"/>
+            <a:ext cx="914400" cy="219456"/>
+          </a:xfrm>
+          <a:prstGeom prst="rect">
+            <a:avLst/>
+          </a:prstGeom>
+          <a:noFill/>
+          <a:ln/>
+        </p:spPr>
+        <p:txBody>
+          <a:bodyPr wrap="square" lIns="0" tIns="0" rIns="0" bIns="0" rtlCol="0" anchor="t"/>
+          <a:lstStyle/>
+          <a:p>
+            <a:pPr indent="0" marL="0">
+              <a:buNone/>
+            </a:pPr>
+            <a:r>
+              <a:rPr lang="en-US" sz="1300" spc="40" kern="0" dirty="0">
+                <a:solidFill>
+                  <a:srgbClr val="DFBEC4"/>
+                </a:solidFill>
+                <a:latin typeface="Montserrat ExtraBold" pitchFamily="34" charset="0"/>
+                <a:ea typeface="Montserrat ExtraBold" pitchFamily="34" charset="-122"/>
+                <a:cs typeface="Montserrat ExtraBold" pitchFamily="34" charset="-120"/>
+              </a:rPr>
+              <a:t>01</a:t>
+            </a:r>
+            <a:endParaRPr lang="en-US" sz="1300" dirty="0"/>
+          </a:p>
+        </p:txBody>
+      </p:sp>
+      <p:sp>
+        <p:nvSpPr>
+          <p:cNvPr id="24" name="Text 21"/>
+          <p:cNvSpPr txBox="1"/>
+          <p:nvPr/>
+        </p:nvSpPr>
+        <p:spPr>
+          <a:xfrm>
+            <a:off x="3738296" y="3200400"/>
+            <a:ext cx="1973504" cy="274320"/>
+          </a:xfrm>
+          <a:prstGeom prst="rect">
+            <a:avLst/>
+          </a:prstGeom>
+          <a:noFill/>
+          <a:ln/>
+        </p:spPr>
+        <p:txBody>
+          <a:bodyPr wrap="square" lIns="0" tIns="0" rIns="0" bIns="0" rtlCol="0" anchor="t"/>
+          <a:lstStyle/>
+          <a:p>
+            <a:pPr indent="0" marL="0">
+              <a:buNone/>
+            </a:pPr>
+            <a:r>
+              <a:rPr lang="en-US" sz="1600" spc="30" kern="0" dirty="0">
+                <a:solidFill>
+                  <a:srgbClr val="2B2D30"/>
+                </a:solidFill>
+                <a:latin typeface="Montserrat ExtraBold" pitchFamily="34" charset="0"/>
+                <a:ea typeface="Montserrat ExtraBold" pitchFamily="34" charset="-122"/>
+                <a:cs typeface="Montserrat ExtraBold" pitchFamily="34" charset="-120"/>
+              </a:rPr>
+              <a:t>REACH</a:t>
+            </a:r>
+            <a:endParaRPr lang="en-US" sz="1600" dirty="0"/>
+          </a:p>
+        </p:txBody>
+      </p:sp>
+      <p:sp>
+        <p:nvSpPr>
+          <p:cNvPr id="25" name="Text 22"/>
+          <p:cNvSpPr txBox="1"/>
+          <p:nvPr/>
+        </p:nvSpPr>
+        <p:spPr>
+          <a:xfrm>
+            <a:off x="3738296" y="3529584"/>
+            <a:ext cx="1973504" cy="713232"/>
+          </a:xfrm>
+          <a:prstGeom prst="rect">
+            <a:avLst/>
+          </a:prstGeom>
+          <a:noFill/>
+          <a:ln/>
+        </p:spPr>
+        <p:txBody>
+          <a:bodyPr wrap="square" lIns="0" tIns="0" rIns="0" bIns="0" rtlCol="0" anchor="t"/>
+          <a:lstStyle/>
+          <a:p>
+            <a:pPr indent="0" marL="0">
+              <a:lnSpc>
+                <a:spcPct val="118000"/>
+              </a:lnSpc>
+              <a:buNone/>
+            </a:pPr>
+            <a:r>
+              <a:rPr lang="en-US" sz="950" dirty="0">
+                <a:solidFill>
+                  <a:srgbClr val="6E7175"/>
+                </a:solidFill>
+                <a:latin typeface="Montserrat" pitchFamily="34" charset="0"/>
+                <a:ea typeface="Montserrat" pitchFamily="34" charset="-122"/>
+                <a:cs typeface="Montserrat" pitchFamily="34" charset="-120"/>
+              </a:rPr>
+              <a:t>Finds whether our own code calls the vulnerable part — and answers reachable, no call site, or can't prove.</a:t>
+            </a:r>
+            <a:endParaRPr lang="en-US" sz="950" dirty="0"/>
+          </a:p>
+        </p:txBody>
+      </p:sp>
+      <p:sp>
+        <p:nvSpPr>
+          <p:cNvPr id="26" name="Text 23"/>
+          <p:cNvSpPr txBox="1"/>
+          <p:nvPr/>
+        </p:nvSpPr>
+        <p:spPr>
+          <a:xfrm>
+            <a:off x="3738296" y="4261104"/>
+            <a:ext cx="1973504" cy="201168"/>
+          </a:xfrm>
+          <a:prstGeom prst="rect">
+            <a:avLst/>
+          </a:prstGeom>
+          <a:noFill/>
+          <a:ln/>
+        </p:spPr>
+        <p:txBody>
+          <a:bodyPr wrap="square" lIns="0" tIns="0" rIns="0" bIns="0" rtlCol="0" anchor="t"/>
+          <a:lstStyle/>
+          <a:p>
+            <a:pPr indent="0" marL="0">
+              <a:buNone/>
+            </a:pPr>
+            <a:r>
+              <a:rPr lang="en-US" sz="850" spc="60" kern="0" dirty="0">
+                <a:solidFill>
+                  <a:srgbClr val="942838"/>
+                </a:solidFill>
+                <a:latin typeface="Montserrat SemiBold" pitchFamily="34" charset="0"/>
+                <a:ea typeface="Montserrat SemiBold" pitchFamily="34" charset="-122"/>
+                <a:cs typeface="Montserrat SemiBold" pitchFamily="34" charset="-120"/>
+              </a:rPr>
+              <a:t>Analyses local code only</a:t>
+            </a:r>
+            <a:endParaRPr lang="en-US" sz="850" dirty="0"/>
+          </a:p>
+        </p:txBody>
+      </p:sp>
+      <p:sp>
+        <p:nvSpPr>
+          <p:cNvPr id="27" name="Shape 24"/>
+          <p:cNvSpPr/>
+          <p:nvPr/>
+        </p:nvSpPr>
+        <p:spPr>
+          <a:xfrm>
+            <a:off x="5976976" y="3656686"/>
+            <a:ext cx="146304" cy="20117"/>
+          </a:xfrm>
+          <a:prstGeom prst="rect">
+            <a:avLst/>
+          </a:prstGeom>
+          <a:solidFill>
+            <a:srgbClr val="43464A"/>
+          </a:solidFill>
+          <a:ln/>
+        </p:spPr>
+      </p:sp>
+      <p:sp>
+        <p:nvSpPr>
+          <p:cNvPr id="28" name="Shape 25"/>
+          <p:cNvSpPr/>
+          <p:nvPr/>
+        </p:nvSpPr>
+        <p:spPr>
+          <a:xfrm rot="5400000">
+            <a:off x="6123280" y="3607308"/>
+            <a:ext cx="91440" cy="118872"/>
+          </a:xfrm>
+          <a:prstGeom prst="triangle">
+            <a:avLst/>
+          </a:prstGeom>
+          <a:solidFill>
+            <a:srgbClr val="43464A"/>
+          </a:solidFill>
+          <a:ln/>
+        </p:spPr>
+      </p:sp>
+      <p:sp>
+        <p:nvSpPr>
+          <p:cNvPr id="29" name="Shape 26"/>
+          <p:cNvSpPr/>
+          <p:nvPr/>
+        </p:nvSpPr>
+        <p:spPr>
+          <a:xfrm>
+            <a:off x="6260440" y="2798064"/>
+            <a:ext cx="2412416" cy="1737360"/>
+          </a:xfrm>
+          <a:prstGeom prst="roundRect">
+            <a:avLst>
+              <a:gd name="adj" fmla="val 3158"/>
+            </a:avLst>
+          </a:prstGeom>
+          <a:solidFill>
+            <a:srgbClr val="FFFFFF"/>
+          </a:solidFill>
+          <a:ln w="9525">
+            <a:solidFill>
+              <a:srgbClr val="E6E4E2"/>
+            </a:solidFill>
+            <a:prstDash val="solid"/>
+          </a:ln>
+          <a:effectLst>
+            <a:outerShdw sx="100000" sy="100000" kx="0" ky="0" algn="bl" rotWithShape="0" blurRad="5.048749812131878e+62" dist="1.2621874530329695e+62" dir="4.2316648611840007e+73">
+              <a:srgbClr val="959092">
+                <a:alpha val="2.2e+74"/>
+              </a:srgbClr>
+            </a:outerShdw>
+          </a:effectLst>
+        </p:spPr>
+      </p:sp>
+      <p:sp>
+        <p:nvSpPr>
+          <p:cNvPr id="30" name="Shape 27"/>
+          <p:cNvSpPr/>
+          <p:nvPr/>
+        </p:nvSpPr>
+        <p:spPr>
+          <a:xfrm>
+            <a:off x="6260440" y="2798064"/>
+            <a:ext cx="2412416" cy="45720"/>
+          </a:xfrm>
+          <a:prstGeom prst="rect">
+            <a:avLst/>
+          </a:prstGeom>
+          <a:solidFill>
+            <a:srgbClr val="942838"/>
+          </a:solidFill>
+          <a:ln/>
+        </p:spPr>
+      </p:sp>
+      <p:sp>
+        <p:nvSpPr>
+          <p:cNvPr id="31" name="Text 28"/>
+          <p:cNvSpPr txBox="1"/>
+          <p:nvPr/>
+        </p:nvSpPr>
+        <p:spPr>
+          <a:xfrm>
+            <a:off x="6479896" y="2962656"/>
+            <a:ext cx="914400" cy="219456"/>
+          </a:xfrm>
+          <a:prstGeom prst="rect">
+            <a:avLst/>
+          </a:prstGeom>
+          <a:noFill/>
+          <a:ln/>
+        </p:spPr>
+        <p:txBody>
+          <a:bodyPr wrap="square" lIns="0" tIns="0" rIns="0" bIns="0" rtlCol="0" anchor="t"/>
+          <a:lstStyle/>
+          <a:p>
+            <a:pPr indent="0" marL="0">
+              <a:buNone/>
+            </a:pPr>
+            <a:r>
+              <a:rPr lang="en-US" sz="1300" spc="40" kern="0" dirty="0">
+                <a:solidFill>
+                  <a:srgbClr val="DFBEC4"/>
+                </a:solidFill>
+                <a:latin typeface="Montserrat ExtraBold" pitchFamily="34" charset="0"/>
+                <a:ea typeface="Montserrat ExtraBold" pitchFamily="34" charset="-122"/>
+                <a:cs typeface="Montserrat ExtraBold" pitchFamily="34" charset="-120"/>
+              </a:rPr>
+              <a:t>02</a:t>
+            </a:r>
+            <a:endParaRPr lang="en-US" sz="1300" dirty="0"/>
+          </a:p>
+        </p:txBody>
+      </p:sp>
+      <p:sp>
+        <p:nvSpPr>
+          <p:cNvPr id="32" name="Text 29"/>
+          <p:cNvSpPr txBox="1"/>
+          <p:nvPr/>
+        </p:nvSpPr>
+        <p:spPr>
+          <a:xfrm>
+            <a:off x="6479896" y="3200400"/>
+            <a:ext cx="1973504" cy="274320"/>
+          </a:xfrm>
+          <a:prstGeom prst="rect">
+            <a:avLst/>
+          </a:prstGeom>
+          <a:noFill/>
+          <a:ln/>
+        </p:spPr>
+        <p:txBody>
+          <a:bodyPr wrap="square" lIns="0" tIns="0" rIns="0" bIns="0" rtlCol="0" anchor="t"/>
+          <a:lstStyle/>
+          <a:p>
+            <a:pPr indent="0" marL="0">
+              <a:buNone/>
+            </a:pPr>
+            <a:r>
+              <a:rPr lang="en-US" sz="1600" spc="30" kern="0" dirty="0">
+                <a:solidFill>
+                  <a:srgbClr val="2B2D30"/>
+                </a:solidFill>
+                <a:latin typeface="Montserrat ExtraBold" pitchFamily="34" charset="0"/>
+                <a:ea typeface="Montserrat ExtraBold" pitchFamily="34" charset="-122"/>
+                <a:cs typeface="Montserrat ExtraBold" pitchFamily="34" charset="-120"/>
+              </a:rPr>
+              <a:t>BLAST</a:t>
+            </a:r>
+            <a:endParaRPr lang="en-US" sz="1600" dirty="0"/>
+          </a:p>
+        </p:txBody>
+      </p:sp>
+      <p:sp>
+        <p:nvSpPr>
+          <p:cNvPr id="33" name="Text 30"/>
+          <p:cNvSpPr txBox="1"/>
+          <p:nvPr/>
+        </p:nvSpPr>
+        <p:spPr>
+          <a:xfrm>
+            <a:off x="6479896" y="3529584"/>
+            <a:ext cx="1973504" cy="713232"/>
+          </a:xfrm>
+          <a:prstGeom prst="rect">
+            <a:avLst/>
+          </a:prstGeom>
+          <a:noFill/>
+          <a:ln/>
+        </p:spPr>
+        <p:txBody>
+          <a:bodyPr wrap="square" lIns="0" tIns="0" rIns="0" bIns="0" rtlCol="0" anchor="t"/>
+          <a:lstStyle/>
+          <a:p>
+            <a:pPr indent="0" marL="0">
+              <a:lnSpc>
+                <a:spcPct val="118000"/>
+              </a:lnSpc>
+              <a:buNone/>
+            </a:pPr>
+            <a:r>
+              <a:rPr lang="en-US" sz="950" dirty="0">
+                <a:solidFill>
+                  <a:srgbClr val="6E7175"/>
+                </a:solidFill>
+                <a:latin typeface="Montserrat" pitchFamily="34" charset="0"/>
+                <a:ea typeface="Montserrat" pitchFamily="34" charset="-122"/>
+                <a:cs typeface="Montserrat" pitchFamily="34" charset="-120"/>
+              </a:rPr>
+              <a:t>Measures how much could be affected — how much of the codebase sits downstream, and whether it runs in production.</a:t>
+            </a:r>
+            <a:endParaRPr lang="en-US" sz="950" dirty="0"/>
+          </a:p>
+        </p:txBody>
+      </p:sp>
+      <p:sp>
+        <p:nvSpPr>
+          <p:cNvPr id="34" name="Text 31"/>
+          <p:cNvSpPr txBox="1"/>
+          <p:nvPr/>
+        </p:nvSpPr>
+        <p:spPr>
+          <a:xfrm>
+            <a:off x="6479896" y="4261104"/>
+            <a:ext cx="1973504" cy="201168"/>
+          </a:xfrm>
+          <a:prstGeom prst="rect">
+            <a:avLst/>
+          </a:prstGeom>
+          <a:noFill/>
+          <a:ln/>
+        </p:spPr>
+        <p:txBody>
+          <a:bodyPr wrap="square" lIns="0" tIns="0" rIns="0" bIns="0" rtlCol="0" anchor="t"/>
+          <a:lstStyle/>
+          <a:p>
+            <a:pPr indent="0" marL="0">
+              <a:buNone/>
+            </a:pPr>
+            <a:r>
+              <a:rPr lang="en-US" sz="850" spc="60" kern="0" dirty="0">
+                <a:solidFill>
+                  <a:srgbClr val="942838"/>
+                </a:solidFill>
+                <a:latin typeface="Montserrat SemiBold" pitchFamily="34" charset="0"/>
+                <a:ea typeface="Montserrat SemiBold" pitchFamily="34" charset="-122"/>
+                <a:cs typeface="Montserrat SemiBold" pitchFamily="34" charset="-120"/>
+              </a:rPr>
+              <a:t>Analyses local code only</a:t>
+            </a:r>
+            <a:endParaRPr lang="en-US" sz="850" dirty="0"/>
+          </a:p>
+        </p:txBody>
+      </p:sp>
+      <p:sp>
+        <p:nvSpPr>
+          <p:cNvPr id="35" name="Shape 32"/>
+          <p:cNvSpPr/>
+          <p:nvPr/>
+        </p:nvSpPr>
+        <p:spPr>
+          <a:xfrm>
+            <a:off x="8718575" y="3656686"/>
+            <a:ext cx="146304" cy="20117"/>
+          </a:xfrm>
+          <a:prstGeom prst="rect">
+            <a:avLst/>
+          </a:prstGeom>
+          <a:solidFill>
+            <a:srgbClr val="43464A"/>
+          </a:solidFill>
+          <a:ln/>
+        </p:spPr>
+      </p:sp>
+      <p:sp>
+        <p:nvSpPr>
+          <p:cNvPr id="36" name="Shape 33"/>
+          <p:cNvSpPr/>
+          <p:nvPr/>
+        </p:nvSpPr>
+        <p:spPr>
+          <a:xfrm rot="5400000">
+            <a:off x="8864879" y="3607308"/>
+            <a:ext cx="91440" cy="118872"/>
+          </a:xfrm>
+          <a:prstGeom prst="triangle">
+            <a:avLst/>
+          </a:prstGeom>
+          <a:solidFill>
+            <a:srgbClr val="43464A"/>
+          </a:solidFill>
+          <a:ln/>
+        </p:spPr>
+      </p:sp>
+      <p:sp>
+        <p:nvSpPr>
+          <p:cNvPr id="37" name="Shape 34"/>
+          <p:cNvSpPr/>
+          <p:nvPr/>
+        </p:nvSpPr>
+        <p:spPr>
+          <a:xfrm>
+            <a:off x="9002039" y="2798064"/>
+            <a:ext cx="2412416" cy="1737360"/>
+          </a:xfrm>
+          <a:prstGeom prst="roundRect">
+            <a:avLst>
+              <a:gd name="adj" fmla="val 3158"/>
+            </a:avLst>
+          </a:prstGeom>
+          <a:solidFill>
+            <a:srgbClr val="FFFFFF"/>
+          </a:solidFill>
+          <a:ln w="9525">
+            <a:solidFill>
+              <a:srgbClr val="E6E4E2"/>
+            </a:solidFill>
+            <a:prstDash val="solid"/>
+          </a:ln>
+          <a:effectLst>
+            <a:outerShdw sx="100000" sy="100000" kx="0" ky="0" algn="bl" rotWithShape="0" blurRad="6.411912261407485e+66" dist="1.6029780653518713e+66" dir="2.5389989167104004e+78">
+              <a:srgbClr val="959092">
+                <a:alpha val="2.2000000000000002e+79"/>
               </a:srgbClr>
             </a:outerShdw>
           </a:effectLst>
@@ -7207,308 +7668,6 @@
             <a:prstDash val="solid"/>
           </a:ln>
           <a:effectLst>
-            <a:outerShdw sx="100000" sy="100000" kx="0" ky="0" algn="bl" rotWithShape="0" blurRad="5.048749812131878e+62" dist="1.2621874530329695e+62" dir="4.2316648611840007e+73">
-              <a:srgbClr val="959092">
-                <a:alpha val="2.2e+74"/>
-              </a:srgbClr>
-            </a:outerShdw>
-          </a:effectLst>
-        </p:spPr>
-      </p:sp>
-      <p:sp>
-        <p:nvSpPr>
-          <p:cNvPr id="11" name="Text 8"/>
-          <p:cNvSpPr txBox="1"/>
-          <p:nvPr/>
-        </p:nvSpPr>
-        <p:spPr>
-          <a:xfrm>
-            <a:off x="960120" y="2633472"/>
-            <a:ext cx="2944368" cy="566928"/>
-          </a:xfrm>
-          <a:prstGeom prst="rect">
-            <a:avLst/>
-          </a:prstGeom>
-          <a:noFill/>
-          <a:ln/>
-        </p:spPr>
-        <p:txBody>
-          <a:bodyPr wrap="square" lIns="0" tIns="0" rIns="0" bIns="0" rtlCol="0" anchor="t"/>
-          <a:lstStyle/>
-          <a:p>
-            <a:pPr algn="ctr" indent="0" marL="0">
-              <a:buNone/>
-            </a:pPr>
-            <a:r>
-              <a:rPr lang="en-US" sz="3800" spc="-140" kern="0" dirty="0">
-                <a:solidFill>
-                  <a:srgbClr val="2B2D30"/>
-                </a:solidFill>
-                <a:latin typeface="Montserrat ExtraBold" pitchFamily="34" charset="0"/>
-                <a:ea typeface="Montserrat ExtraBold" pitchFamily="34" charset="-122"/>
-                <a:cs typeface="Montserrat ExtraBold" pitchFamily="34" charset="-120"/>
-              </a:rPr>
-              <a:t>1,518</a:t>
-            </a:r>
-            <a:endParaRPr lang="en-US" sz="3800" dirty="0"/>
-          </a:p>
-        </p:txBody>
-      </p:sp>
-      <p:sp>
-        <p:nvSpPr>
-          <p:cNvPr id="12" name="Text 9"/>
-          <p:cNvSpPr txBox="1"/>
-          <p:nvPr/>
-        </p:nvSpPr>
-        <p:spPr>
-          <a:xfrm>
-            <a:off x="960120" y="3255264"/>
-            <a:ext cx="2944368" cy="274320"/>
-          </a:xfrm>
-          <a:prstGeom prst="rect">
-            <a:avLst/>
-          </a:prstGeom>
-          <a:noFill/>
-          <a:ln/>
-        </p:spPr>
-        <p:txBody>
-          <a:bodyPr wrap="square" lIns="0" tIns="0" rIns="0" bIns="0" rtlCol="0" anchor="t"/>
-          <a:lstStyle/>
-          <a:p>
-            <a:pPr algn="ctr" indent="0" marL="0">
-              <a:buNone/>
-            </a:pPr>
-            <a:r>
-              <a:rPr lang="en-US" sz="950" spc="30" kern="0" dirty="0">
-                <a:solidFill>
-                  <a:srgbClr val="6E7175"/>
-                </a:solidFill>
-                <a:latin typeface="Montserrat Medium" pitchFamily="34" charset="0"/>
-                <a:ea typeface="Montserrat Medium" pitchFamily="34" charset="-122"/>
-                <a:cs typeface="Montserrat Medium" pitchFamily="34" charset="-120"/>
-              </a:rPr>
-              <a:t>packages scanned</a:t>
-            </a:r>
-            <a:endParaRPr lang="en-US" sz="950" dirty="0"/>
-          </a:p>
-        </p:txBody>
-      </p:sp>
-      <p:sp>
-        <p:nvSpPr>
-          <p:cNvPr id="13" name="Text 10"/>
-          <p:cNvSpPr txBox="1"/>
-          <p:nvPr/>
-        </p:nvSpPr>
-        <p:spPr>
-          <a:xfrm>
-            <a:off x="4081196" y="2816352"/>
-            <a:ext cx="365760" cy="420624"/>
-          </a:xfrm>
-          <a:prstGeom prst="rect">
-            <a:avLst/>
-          </a:prstGeom>
-          <a:noFill/>
-          <a:ln/>
-        </p:spPr>
-        <p:txBody>
-          <a:bodyPr wrap="square" lIns="0" tIns="0" rIns="0" bIns="0" rtlCol="0" anchor="ctr"/>
-          <a:lstStyle/>
-          <a:p>
-            <a:pPr algn="ctr" indent="0" marL="0">
-              <a:buNone/>
-            </a:pPr>
-            <a:r>
-              <a:rPr lang="en-US" sz="2600" b="1" dirty="0">
-                <a:solidFill>
-                  <a:srgbClr val="C9C6C4"/>
-                </a:solidFill>
-                <a:latin typeface="Montserrat" pitchFamily="34" charset="0"/>
-                <a:ea typeface="Montserrat" pitchFamily="34" charset="-122"/>
-                <a:cs typeface="Montserrat" pitchFamily="34" charset="-120"/>
-              </a:rPr>
-              <a:t>›</a:t>
-            </a:r>
-            <a:endParaRPr lang="en-US" sz="2600" dirty="0"/>
-          </a:p>
-        </p:txBody>
-      </p:sp>
-      <p:sp>
-        <p:nvSpPr>
-          <p:cNvPr id="14" name="Shape 11"/>
-          <p:cNvSpPr/>
-          <p:nvPr/>
-        </p:nvSpPr>
-        <p:spPr>
-          <a:xfrm>
-            <a:off x="4440784" y="2432304"/>
-            <a:ext cx="3310128" cy="1207008"/>
-          </a:xfrm>
-          <a:prstGeom prst="roundRect">
-            <a:avLst>
-              <a:gd name="adj" fmla="val 4545"/>
-            </a:avLst>
-          </a:prstGeom>
-          <a:solidFill>
-            <a:srgbClr val="F5F4F3"/>
-          </a:solidFill>
-          <a:ln w="9525">
-            <a:solidFill>
-              <a:srgbClr val="E6E4E2"/>
-            </a:solidFill>
-            <a:prstDash val="solid"/>
-          </a:ln>
-          <a:effectLst>
-            <a:outerShdw sx="100000" sy="100000" kx="0" ky="0" algn="bl" rotWithShape="0" blurRad="6.411912261407485e+66" dist="1.6029780653518713e+66" dir="2.5389989167104004e+78">
-              <a:srgbClr val="959092">
-                <a:alpha val="2.2000000000000002e+79"/>
-              </a:srgbClr>
-            </a:outerShdw>
-          </a:effectLst>
-        </p:spPr>
-      </p:sp>
-      <p:sp>
-        <p:nvSpPr>
-          <p:cNvPr id="15" name="Text 12"/>
-          <p:cNvSpPr txBox="1"/>
-          <p:nvPr/>
-        </p:nvSpPr>
-        <p:spPr>
-          <a:xfrm>
-            <a:off x="4623664" y="2633472"/>
-            <a:ext cx="2944368" cy="566928"/>
-          </a:xfrm>
-          <a:prstGeom prst="rect">
-            <a:avLst/>
-          </a:prstGeom>
-          <a:noFill/>
-          <a:ln/>
-        </p:spPr>
-        <p:txBody>
-          <a:bodyPr wrap="square" lIns="0" tIns="0" rIns="0" bIns="0" rtlCol="0" anchor="t"/>
-          <a:lstStyle/>
-          <a:p>
-            <a:pPr algn="ctr" indent="0" marL="0">
-              <a:buNone/>
-            </a:pPr>
-            <a:r>
-              <a:rPr lang="en-US" sz="3800" spc="-140" kern="0" dirty="0">
-                <a:solidFill>
-                  <a:srgbClr val="2B2D30"/>
-                </a:solidFill>
-                <a:latin typeface="Montserrat ExtraBold" pitchFamily="34" charset="0"/>
-                <a:ea typeface="Montserrat ExtraBold" pitchFamily="34" charset="-122"/>
-                <a:cs typeface="Montserrat ExtraBold" pitchFamily="34" charset="-120"/>
-              </a:rPr>
-              <a:t>28</a:t>
-            </a:r>
-            <a:endParaRPr lang="en-US" sz="3800" dirty="0"/>
-          </a:p>
-        </p:txBody>
-      </p:sp>
-      <p:sp>
-        <p:nvSpPr>
-          <p:cNvPr id="16" name="Text 13"/>
-          <p:cNvSpPr txBox="1"/>
-          <p:nvPr/>
-        </p:nvSpPr>
-        <p:spPr>
-          <a:xfrm>
-            <a:off x="4623664" y="3255264"/>
-            <a:ext cx="2944368" cy="274320"/>
-          </a:xfrm>
-          <a:prstGeom prst="rect">
-            <a:avLst/>
-          </a:prstGeom>
-          <a:noFill/>
-          <a:ln/>
-        </p:spPr>
-        <p:txBody>
-          <a:bodyPr wrap="square" lIns="0" tIns="0" rIns="0" bIns="0" rtlCol="0" anchor="t"/>
-          <a:lstStyle/>
-          <a:p>
-            <a:pPr algn="ctr" indent="0" marL="0">
-              <a:buNone/>
-            </a:pPr>
-            <a:r>
-              <a:rPr lang="en-US" sz="950" spc="30" kern="0" dirty="0">
-                <a:solidFill>
-                  <a:srgbClr val="6E7175"/>
-                </a:solidFill>
-                <a:latin typeface="Montserrat Medium" pitchFamily="34" charset="0"/>
-                <a:ea typeface="Montserrat Medium" pitchFamily="34" charset="-122"/>
-                <a:cs typeface="Montserrat Medium" pitchFamily="34" charset="-120"/>
-              </a:rPr>
-              <a:t>carrying a known flaw</a:t>
-            </a:r>
-            <a:endParaRPr lang="en-US" sz="950" dirty="0"/>
-          </a:p>
-        </p:txBody>
-      </p:sp>
-      <p:sp>
-        <p:nvSpPr>
-          <p:cNvPr id="17" name="Text 14"/>
-          <p:cNvSpPr txBox="1"/>
-          <p:nvPr/>
-        </p:nvSpPr>
-        <p:spPr>
-          <a:xfrm>
-            <a:off x="7744739" y="2816352"/>
-            <a:ext cx="365760" cy="420624"/>
-          </a:xfrm>
-          <a:prstGeom prst="rect">
-            <a:avLst/>
-          </a:prstGeom>
-          <a:noFill/>
-          <a:ln/>
-        </p:spPr>
-        <p:txBody>
-          <a:bodyPr wrap="square" lIns="0" tIns="0" rIns="0" bIns="0" rtlCol="0" anchor="ctr"/>
-          <a:lstStyle/>
-          <a:p>
-            <a:pPr algn="ctr" indent="0" marL="0">
-              <a:buNone/>
-            </a:pPr>
-            <a:r>
-              <a:rPr lang="en-US" sz="2600" b="1" dirty="0">
-                <a:solidFill>
-                  <a:srgbClr val="C9C6C4"/>
-                </a:solidFill>
-                <a:latin typeface="Montserrat" pitchFamily="34" charset="0"/>
-                <a:ea typeface="Montserrat" pitchFamily="34" charset="-122"/>
-                <a:cs typeface="Montserrat" pitchFamily="34" charset="-120"/>
-              </a:rPr>
-              <a:t>›</a:t>
-            </a:r>
-            <a:endParaRPr lang="en-US" sz="2600" dirty="0"/>
-          </a:p>
-        </p:txBody>
-      </p:sp>
-      <p:sp>
-        <p:nvSpPr>
-          <p:cNvPr id="18" name="Shape 15"/>
-          <p:cNvSpPr/>
-          <p:nvPr/>
-        </p:nvSpPr>
-        <p:spPr>
-          <a:xfrm>
-            <a:off x="8104327" y="2432304"/>
-            <a:ext cx="3310128" cy="1207008"/>
-          </a:xfrm>
-          <a:prstGeom prst="roundRect">
-            <a:avLst>
-              <a:gd name="adj" fmla="val 4545"/>
-            </a:avLst>
-          </a:prstGeom>
-          <a:solidFill>
-            <a:srgbClr val="F6EEF0"/>
-          </a:solidFill>
-          <a:ln w="9525">
-            <a:solidFill>
-              <a:srgbClr val="942838"/>
-            </a:solidFill>
-            <a:prstDash val="solid"/>
-          </a:ln>
-          <a:effectLst>
             <a:outerShdw sx="100000" sy="100000" kx="0" ky="0" algn="bl" rotWithShape="0" blurRad="8.143128571987506e+70" dist="2.0357821429968766e+70" dir="1.5233993500262402e+83">
               <a:srgbClr val="959092">
                 <a:alpha val="2.2000000000000003e+84"/>
@@ -7519,13 +7678,13 @@
       </p:sp>
       <p:sp>
         <p:nvSpPr>
-          <p:cNvPr id="19" name="Text 16"/>
-          <p:cNvSpPr txBox="1"/>
-          <p:nvPr/>
-        </p:nvSpPr>
-        <p:spPr>
-          <a:xfrm>
-            <a:off x="8287207" y="2633472"/>
+          <p:cNvPr id="11" name="Text 8"/>
+          <p:cNvSpPr txBox="1"/>
+          <p:nvPr/>
+        </p:nvSpPr>
+        <p:spPr>
+          <a:xfrm>
+            <a:off x="960120" y="2633472"/>
             <a:ext cx="2944368" cy="566928"/>
           </a:xfrm>
           <a:prstGeom prst="rect">
@@ -7544,13 +7703,13 @@
             <a:r>
               <a:rPr lang="en-US" sz="3800" spc="-140" kern="0" dirty="0">
                 <a:solidFill>
-                  <a:srgbClr val="942838"/>
+                  <a:srgbClr val="2B2D30"/>
                 </a:solidFill>
                 <a:latin typeface="Montserrat ExtraBold" pitchFamily="34" charset="0"/>
                 <a:ea typeface="Montserrat ExtraBold" pitchFamily="34" charset="-122"/>
                 <a:cs typeface="Montserrat ExtraBold" pitchFamily="34" charset="-120"/>
               </a:rPr>
-              <a:t>3</a:t>
+              <a:t>1,518</a:t>
             </a:r>
             <a:endParaRPr lang="en-US" sz="3800" dirty="0"/>
           </a:p>
@@ -7558,13 +7717,13 @@
       </p:sp>
       <p:sp>
         <p:nvSpPr>
-          <p:cNvPr id="20" name="Text 17"/>
-          <p:cNvSpPr txBox="1"/>
-          <p:nvPr/>
-        </p:nvSpPr>
-        <p:spPr>
-          <a:xfrm>
-            <a:off x="8287207" y="3255264"/>
+          <p:cNvPr id="12" name="Text 9"/>
+          <p:cNvSpPr txBox="1"/>
+          <p:nvPr/>
+        </p:nvSpPr>
+        <p:spPr>
+          <a:xfrm>
+            <a:off x="960120" y="3255264"/>
             <a:ext cx="2944368" cy="274320"/>
           </a:xfrm>
           <a:prstGeom prst="rect">
@@ -7589,7 +7748,7 @@
                 <a:ea typeface="Montserrat Medium" pitchFamily="34" charset="-122"/>
                 <a:cs typeface="Montserrat Medium" pitchFamily="34" charset="-120"/>
               </a:rPr>
-              <a:t>needing a human decision</a:t>
+              <a:t>packages scanned</a:t>
             </a:r>
             <a:endParaRPr lang="en-US" sz="950" dirty="0"/>
           </a:p>
@@ -7597,22 +7756,61 @@
       </p:sp>
       <p:sp>
         <p:nvSpPr>
-          <p:cNvPr id="21" name="Shape 18"/>
+          <p:cNvPr id="13" name="Text 10"/>
+          <p:cNvSpPr txBox="1"/>
+          <p:nvPr/>
+        </p:nvSpPr>
+        <p:spPr>
+          <a:xfrm>
+            <a:off x="4081196" y="2816352"/>
+            <a:ext cx="365760" cy="420624"/>
+          </a:xfrm>
+          <a:prstGeom prst="rect">
+            <a:avLst/>
+          </a:prstGeom>
+          <a:noFill/>
+          <a:ln/>
+        </p:spPr>
+        <p:txBody>
+          <a:bodyPr wrap="square" lIns="0" tIns="0" rIns="0" bIns="0" rtlCol="0" anchor="ctr"/>
+          <a:lstStyle/>
+          <a:p>
+            <a:pPr algn="ctr" indent="0" marL="0">
+              <a:buNone/>
+            </a:pPr>
+            <a:r>
+              <a:rPr lang="en-US" sz="2600" b="1" dirty="0">
+                <a:solidFill>
+                  <a:srgbClr val="C9C6C4"/>
+                </a:solidFill>
+                <a:latin typeface="Montserrat" pitchFamily="34" charset="0"/>
+                <a:ea typeface="Montserrat" pitchFamily="34" charset="-122"/>
+                <a:cs typeface="Montserrat" pitchFamily="34" charset="-120"/>
+              </a:rPr>
+              <a:t>›</a:t>
+            </a:r>
+            <a:endParaRPr lang="en-US" sz="2600" dirty="0"/>
+          </a:p>
+        </p:txBody>
+      </p:sp>
+      <p:sp>
+        <p:nvSpPr>
+          <p:cNvPr id="14" name="Shape 11"/>
           <p:cNvSpPr/>
           <p:nvPr/>
         </p:nvSpPr>
         <p:spPr>
           <a:xfrm>
-            <a:off x="777240" y="3931920"/>
-            <a:ext cx="5175504" cy="1371600"/>
+            <a:off x="4440784" y="2432304"/>
+            <a:ext cx="3310128" cy="1207008"/>
           </a:xfrm>
           <a:prstGeom prst="roundRect">
             <a:avLst>
-              <a:gd name="adj" fmla="val 4000"/>
+              <a:gd name="adj" fmla="val 4545"/>
             </a:avLst>
           </a:prstGeom>
           <a:solidFill>
-            <a:srgbClr val="FFFFFF"/>
+            <a:srgbClr val="F5F4F3"/>
           </a:solidFill>
           <a:ln w="9525">
             <a:solidFill>
@@ -7631,123 +7829,139 @@
       </p:sp>
       <p:sp>
         <p:nvSpPr>
-          <p:cNvPr id="22" name="Shape 19"/>
-          <p:cNvSpPr/>
-          <p:nvPr/>
-        </p:nvSpPr>
-        <p:spPr>
-          <a:xfrm>
-            <a:off x="777240" y="3931920"/>
-            <a:ext cx="5175504" cy="45720"/>
-          </a:xfrm>
-          <a:prstGeom prst="rect">
-            <a:avLst/>
-          </a:prstGeom>
-          <a:solidFill>
-            <a:srgbClr val="C9C6C4"/>
-          </a:solidFill>
-          <a:ln/>
-        </p:spPr>
-      </p:sp>
-      <p:sp>
-        <p:nvSpPr>
-          <p:cNvPr id="23" name="Text 20"/>
-          <p:cNvSpPr txBox="1"/>
-          <p:nvPr/>
-        </p:nvSpPr>
-        <p:spPr>
-          <a:xfrm>
-            <a:off x="1069848" y="4187952"/>
-            <a:ext cx="4590288" cy="274320"/>
-          </a:xfrm>
-          <a:prstGeom prst="rect">
-            <a:avLst/>
-          </a:prstGeom>
-          <a:noFill/>
-          <a:ln/>
-        </p:spPr>
-        <p:txBody>
-          <a:bodyPr wrap="square" lIns="0" tIns="0" rIns="0" bIns="0" rtlCol="0" anchor="t"/>
-          <a:lstStyle/>
-          <a:p>
-            <a:pPr indent="0" marL="0">
-              <a:buNone/>
-            </a:pPr>
-            <a:r>
-              <a:rPr lang="en-US" sz="1350" dirty="0">
+          <p:cNvPr id="15" name="Text 12"/>
+          <p:cNvSpPr txBox="1"/>
+          <p:nvPr/>
+        </p:nvSpPr>
+        <p:spPr>
+          <a:xfrm>
+            <a:off x="4623664" y="2633472"/>
+            <a:ext cx="2944368" cy="566928"/>
+          </a:xfrm>
+          <a:prstGeom prst="rect">
+            <a:avLst/>
+          </a:prstGeom>
+          <a:noFill/>
+          <a:ln/>
+        </p:spPr>
+        <p:txBody>
+          <a:bodyPr wrap="square" lIns="0" tIns="0" rIns="0" bIns="0" rtlCol="0" anchor="t"/>
+          <a:lstStyle/>
+          <a:p>
+            <a:pPr algn="ctr" indent="0" marL="0">
+              <a:buNone/>
+            </a:pPr>
+            <a:r>
+              <a:rPr lang="en-US" sz="3800" spc="-140" kern="0" dirty="0">
                 <a:solidFill>
                   <a:srgbClr val="2B2D30"/>
                 </a:solidFill>
-                <a:latin typeface="Montserrat SemiBold" pitchFamily="34" charset="0"/>
-                <a:ea typeface="Montserrat SemiBold" pitchFamily="34" charset="-122"/>
-                <a:cs typeface="Montserrat SemiBold" pitchFamily="34" charset="-120"/>
-              </a:rPr>
-              <a:t>25 confirmed not called by our code</a:t>
-            </a:r>
-            <a:endParaRPr lang="en-US" sz="1350" dirty="0"/>
-          </a:p>
-        </p:txBody>
-      </p:sp>
-      <p:sp>
-        <p:nvSpPr>
-          <p:cNvPr id="24" name="Text 21"/>
-          <p:cNvSpPr txBox="1"/>
-          <p:nvPr/>
-        </p:nvSpPr>
-        <p:spPr>
-          <a:xfrm>
-            <a:off x="1069848" y="4517136"/>
-            <a:ext cx="4590288" cy="676656"/>
-          </a:xfrm>
-          <a:prstGeom prst="rect">
-            <a:avLst/>
-          </a:prstGeom>
-          <a:noFill/>
-          <a:ln/>
-        </p:spPr>
-        <p:txBody>
-          <a:bodyPr wrap="square" lIns="0" tIns="0" rIns="0" bIns="0" rtlCol="0" anchor="t"/>
-          <a:lstStyle/>
-          <a:p>
-            <a:pPr indent="0" marL="0">
-              <a:lnSpc>
-                <a:spcPct val="122000"/>
-              </a:lnSpc>
-              <a:buNone/>
-            </a:pPr>
-            <a:r>
-              <a:rPr lang="en-US" sz="1100" dirty="0">
+                <a:latin typeface="Montserrat ExtraBold" pitchFamily="34" charset="0"/>
+                <a:ea typeface="Montserrat ExtraBold" pitchFamily="34" charset="-122"/>
+                <a:cs typeface="Montserrat ExtraBold" pitchFamily="34" charset="-120"/>
+              </a:rPr>
+              <a:t>28</a:t>
+            </a:r>
+            <a:endParaRPr lang="en-US" sz="3800" dirty="0"/>
+          </a:p>
+        </p:txBody>
+      </p:sp>
+      <p:sp>
+        <p:nvSpPr>
+          <p:cNvPr id="16" name="Text 13"/>
+          <p:cNvSpPr txBox="1"/>
+          <p:nvPr/>
+        </p:nvSpPr>
+        <p:spPr>
+          <a:xfrm>
+            <a:off x="4623664" y="3255264"/>
+            <a:ext cx="2944368" cy="274320"/>
+          </a:xfrm>
+          <a:prstGeom prst="rect">
+            <a:avLst/>
+          </a:prstGeom>
+          <a:noFill/>
+          <a:ln/>
+        </p:spPr>
+        <p:txBody>
+          <a:bodyPr wrap="square" lIns="0" tIns="0" rIns="0" bIns="0" rtlCol="0" anchor="t"/>
+          <a:lstStyle/>
+          <a:p>
+            <a:pPr algn="ctr" indent="0" marL="0">
+              <a:buNone/>
+            </a:pPr>
+            <a:r>
+              <a:rPr lang="en-US" sz="950" spc="30" kern="0" dirty="0">
                 <a:solidFill>
                   <a:srgbClr val="6E7175"/>
+                </a:solidFill>
+                <a:latin typeface="Montserrat Medium" pitchFamily="34" charset="0"/>
+                <a:ea typeface="Montserrat Medium" pitchFamily="34" charset="-122"/>
+                <a:cs typeface="Montserrat Medium" pitchFamily="34" charset="-120"/>
+              </a:rPr>
+              <a:t>carrying a known flaw</a:t>
+            </a:r>
+            <a:endParaRPr lang="en-US" sz="950" dirty="0"/>
+          </a:p>
+        </p:txBody>
+      </p:sp>
+      <p:sp>
+        <p:nvSpPr>
+          <p:cNvPr id="17" name="Text 14"/>
+          <p:cNvSpPr txBox="1"/>
+          <p:nvPr/>
+        </p:nvSpPr>
+        <p:spPr>
+          <a:xfrm>
+            <a:off x="7744739" y="2816352"/>
+            <a:ext cx="365760" cy="420624"/>
+          </a:xfrm>
+          <a:prstGeom prst="rect">
+            <a:avLst/>
+          </a:prstGeom>
+          <a:noFill/>
+          <a:ln/>
+        </p:spPr>
+        <p:txBody>
+          <a:bodyPr wrap="square" lIns="0" tIns="0" rIns="0" bIns="0" rtlCol="0" anchor="ctr"/>
+          <a:lstStyle/>
+          <a:p>
+            <a:pPr algn="ctr" indent="0" marL="0">
+              <a:buNone/>
+            </a:pPr>
+            <a:r>
+              <a:rPr lang="en-US" sz="2600" b="1" dirty="0">
+                <a:solidFill>
+                  <a:srgbClr val="C9C6C4"/>
                 </a:solidFill>
                 <a:latin typeface="Montserrat" pitchFamily="34" charset="0"/>
                 <a:ea typeface="Montserrat" pitchFamily="34" charset="-122"/>
                 <a:cs typeface="Montserrat" pitchFamily="34" charset="-120"/>
               </a:rPr>
-              <a:t>Dev and build tooling, resolved with a real code parser rather than a text search — so this is a confident answer, not a guess.</a:t>
-            </a:r>
-            <a:endParaRPr lang="en-US" sz="1100" dirty="0"/>
-          </a:p>
-        </p:txBody>
-      </p:sp>
-      <p:sp>
-        <p:nvSpPr>
-          <p:cNvPr id="25" name="Shape 22"/>
+              <a:t>›</a:t>
+            </a:r>
+            <a:endParaRPr lang="en-US" sz="2600" dirty="0"/>
+          </a:p>
+        </p:txBody>
+      </p:sp>
+      <p:sp>
+        <p:nvSpPr>
+          <p:cNvPr id="18" name="Shape 15"/>
           <p:cNvSpPr/>
           <p:nvPr/>
         </p:nvSpPr>
         <p:spPr>
           <a:xfrm>
-            <a:off x="6236208" y="3931920"/>
-            <a:ext cx="5175504" cy="1371600"/>
+            <a:off x="8104327" y="2432304"/>
+            <a:ext cx="3310128" cy="1207008"/>
           </a:xfrm>
           <a:prstGeom prst="roundRect">
             <a:avLst>
-              <a:gd name="adj" fmla="val 4000"/>
+              <a:gd name="adj" fmla="val 4545"/>
             </a:avLst>
           </a:prstGeom>
           <a:solidFill>
-            <a:srgbClr val="FFFFFF"/>
+            <a:srgbClr val="F6EEF0"/>
           </a:solidFill>
           <a:ln w="9525">
             <a:solidFill>
@@ -7759,6 +7973,253 @@
             <a:outerShdw sx="100000" sy="100000" kx="0" ky="0" algn="bl" rotWithShape="0" blurRad="1.313405207375865e+79" dist="3.2835130184396625e+78" dir="5.484237660094465e+92">
               <a:srgbClr val="959092">
                 <a:alpha val="2.2e+94"/>
+              </a:srgbClr>
+            </a:outerShdw>
+          </a:effectLst>
+        </p:spPr>
+      </p:sp>
+      <p:sp>
+        <p:nvSpPr>
+          <p:cNvPr id="19" name="Text 16"/>
+          <p:cNvSpPr txBox="1"/>
+          <p:nvPr/>
+        </p:nvSpPr>
+        <p:spPr>
+          <a:xfrm>
+            <a:off x="8287207" y="2633472"/>
+            <a:ext cx="2944368" cy="566928"/>
+          </a:xfrm>
+          <a:prstGeom prst="rect">
+            <a:avLst/>
+          </a:prstGeom>
+          <a:noFill/>
+          <a:ln/>
+        </p:spPr>
+        <p:txBody>
+          <a:bodyPr wrap="square" lIns="0" tIns="0" rIns="0" bIns="0" rtlCol="0" anchor="t"/>
+          <a:lstStyle/>
+          <a:p>
+            <a:pPr algn="ctr" indent="0" marL="0">
+              <a:buNone/>
+            </a:pPr>
+            <a:r>
+              <a:rPr lang="en-US" sz="3800" spc="-140" kern="0" dirty="0">
+                <a:solidFill>
+                  <a:srgbClr val="942838"/>
+                </a:solidFill>
+                <a:latin typeface="Montserrat ExtraBold" pitchFamily="34" charset="0"/>
+                <a:ea typeface="Montserrat ExtraBold" pitchFamily="34" charset="-122"/>
+                <a:cs typeface="Montserrat ExtraBold" pitchFamily="34" charset="-120"/>
+              </a:rPr>
+              <a:t>3</a:t>
+            </a:r>
+            <a:endParaRPr lang="en-US" sz="3800" dirty="0"/>
+          </a:p>
+        </p:txBody>
+      </p:sp>
+      <p:sp>
+        <p:nvSpPr>
+          <p:cNvPr id="20" name="Text 17"/>
+          <p:cNvSpPr txBox="1"/>
+          <p:nvPr/>
+        </p:nvSpPr>
+        <p:spPr>
+          <a:xfrm>
+            <a:off x="8287207" y="3255264"/>
+            <a:ext cx="2944368" cy="274320"/>
+          </a:xfrm>
+          <a:prstGeom prst="rect">
+            <a:avLst/>
+          </a:prstGeom>
+          <a:noFill/>
+          <a:ln/>
+        </p:spPr>
+        <p:txBody>
+          <a:bodyPr wrap="square" lIns="0" tIns="0" rIns="0" bIns="0" rtlCol="0" anchor="t"/>
+          <a:lstStyle/>
+          <a:p>
+            <a:pPr algn="ctr" indent="0" marL="0">
+              <a:buNone/>
+            </a:pPr>
+            <a:r>
+              <a:rPr lang="en-US" sz="950" spc="30" kern="0" dirty="0">
+                <a:solidFill>
+                  <a:srgbClr val="6E7175"/>
+                </a:solidFill>
+                <a:latin typeface="Montserrat Medium" pitchFamily="34" charset="0"/>
+                <a:ea typeface="Montserrat Medium" pitchFamily="34" charset="-122"/>
+                <a:cs typeface="Montserrat Medium" pitchFamily="34" charset="-120"/>
+              </a:rPr>
+              <a:t>needing a human decision</a:t>
+            </a:r>
+            <a:endParaRPr lang="en-US" sz="950" dirty="0"/>
+          </a:p>
+        </p:txBody>
+      </p:sp>
+      <p:sp>
+        <p:nvSpPr>
+          <p:cNvPr id="21" name="Shape 18"/>
+          <p:cNvSpPr/>
+          <p:nvPr/>
+        </p:nvSpPr>
+        <p:spPr>
+          <a:xfrm>
+            <a:off x="777240" y="3931920"/>
+            <a:ext cx="5175504" cy="1371600"/>
+          </a:xfrm>
+          <a:prstGeom prst="roundRect">
+            <a:avLst>
+              <a:gd name="adj" fmla="val 4000"/>
+            </a:avLst>
+          </a:prstGeom>
+          <a:solidFill>
+            <a:srgbClr val="FFFFFF"/>
+          </a:solidFill>
+          <a:ln w="9525">
+            <a:solidFill>
+              <a:srgbClr val="E6E4E2"/>
+            </a:solidFill>
+            <a:prstDash val="solid"/>
+          </a:ln>
+          <a:effectLst>
+            <a:outerShdw sx="100000" sy="100000" kx="0" ky="0" algn="bl" rotWithShape="0" blurRad="1.6680246133673485e+83" dist="4.170061533418371e+82" dir="3.2905425960566786e+97">
+              <a:srgbClr val="959092">
+                <a:alpha val="2.2000000000000003e+99"/>
+              </a:srgbClr>
+            </a:outerShdw>
+          </a:effectLst>
+        </p:spPr>
+      </p:sp>
+      <p:sp>
+        <p:nvSpPr>
+          <p:cNvPr id="22" name="Shape 19"/>
+          <p:cNvSpPr/>
+          <p:nvPr/>
+        </p:nvSpPr>
+        <p:spPr>
+          <a:xfrm>
+            <a:off x="777240" y="3931920"/>
+            <a:ext cx="5175504" cy="45720"/>
+          </a:xfrm>
+          <a:prstGeom prst="rect">
+            <a:avLst/>
+          </a:prstGeom>
+          <a:solidFill>
+            <a:srgbClr val="C9C6C4"/>
+          </a:solidFill>
+          <a:ln/>
+        </p:spPr>
+      </p:sp>
+      <p:sp>
+        <p:nvSpPr>
+          <p:cNvPr id="23" name="Text 20"/>
+          <p:cNvSpPr txBox="1"/>
+          <p:nvPr/>
+        </p:nvSpPr>
+        <p:spPr>
+          <a:xfrm>
+            <a:off x="1069848" y="4187952"/>
+            <a:ext cx="4590288" cy="274320"/>
+          </a:xfrm>
+          <a:prstGeom prst="rect">
+            <a:avLst/>
+          </a:prstGeom>
+          <a:noFill/>
+          <a:ln/>
+        </p:spPr>
+        <p:txBody>
+          <a:bodyPr wrap="square" lIns="0" tIns="0" rIns="0" bIns="0" rtlCol="0" anchor="t"/>
+          <a:lstStyle/>
+          <a:p>
+            <a:pPr indent="0" marL="0">
+              <a:buNone/>
+            </a:pPr>
+            <a:r>
+              <a:rPr lang="en-US" sz="1350" dirty="0">
+                <a:solidFill>
+                  <a:srgbClr val="2B2D30"/>
+                </a:solidFill>
+                <a:latin typeface="Montserrat SemiBold" pitchFamily="34" charset="0"/>
+                <a:ea typeface="Montserrat SemiBold" pitchFamily="34" charset="-122"/>
+                <a:cs typeface="Montserrat SemiBold" pitchFamily="34" charset="-120"/>
+              </a:rPr>
+              <a:t>25 confirmed not called by our code</a:t>
+            </a:r>
+            <a:endParaRPr lang="en-US" sz="1350" dirty="0"/>
+          </a:p>
+        </p:txBody>
+      </p:sp>
+      <p:sp>
+        <p:nvSpPr>
+          <p:cNvPr id="24" name="Text 21"/>
+          <p:cNvSpPr txBox="1"/>
+          <p:nvPr/>
+        </p:nvSpPr>
+        <p:spPr>
+          <a:xfrm>
+            <a:off x="1069848" y="4517136"/>
+            <a:ext cx="4590288" cy="676656"/>
+          </a:xfrm>
+          <a:prstGeom prst="rect">
+            <a:avLst/>
+          </a:prstGeom>
+          <a:noFill/>
+          <a:ln/>
+        </p:spPr>
+        <p:txBody>
+          <a:bodyPr wrap="square" lIns="0" tIns="0" rIns="0" bIns="0" rtlCol="0" anchor="t"/>
+          <a:lstStyle/>
+          <a:p>
+            <a:pPr indent="0" marL="0">
+              <a:lnSpc>
+                <a:spcPct val="122000"/>
+              </a:lnSpc>
+              <a:buNone/>
+            </a:pPr>
+            <a:r>
+              <a:rPr lang="en-US" sz="1100" dirty="0">
+                <a:solidFill>
+                  <a:srgbClr val="6E7175"/>
+                </a:solidFill>
+                <a:latin typeface="Montserrat" pitchFamily="34" charset="0"/>
+                <a:ea typeface="Montserrat" pitchFamily="34" charset="-122"/>
+                <a:cs typeface="Montserrat" pitchFamily="34" charset="-120"/>
+              </a:rPr>
+              <a:t>Dev and build tooling, resolved with a real code parser rather than a text search — so this is a confident answer, not a guess.</a:t>
+            </a:r>
+            <a:endParaRPr lang="en-US" sz="1100" dirty="0"/>
+          </a:p>
+        </p:txBody>
+      </p:sp>
+      <p:sp>
+        <p:nvSpPr>
+          <p:cNvPr id="25" name="Shape 22"/>
+          <p:cNvSpPr/>
+          <p:nvPr/>
+        </p:nvSpPr>
+        <p:spPr>
+          <a:xfrm>
+            <a:off x="6236208" y="3931920"/>
+            <a:ext cx="5175504" cy="1371600"/>
+          </a:xfrm>
+          <a:prstGeom prst="roundRect">
+            <a:avLst>
+              <a:gd name="adj" fmla="val 4000"/>
+            </a:avLst>
+          </a:prstGeom>
+          <a:solidFill>
+            <a:srgbClr val="FFFFFF"/>
+          </a:solidFill>
+          <a:ln w="9525">
+            <a:solidFill>
+              <a:srgbClr val="942838"/>
+            </a:solidFill>
+            <a:prstDash val="solid"/>
+          </a:ln>
+          <a:effectLst>
+            <a:outerShdw sx="100000" sy="100000" kx="0" ky="0" algn="bl" rotWithShape="0" blurRad="2.1183912589765324e+87" dist="5.295978147441331e+86" dir="1.9743255576340073e+102">
+              <a:srgbClr val="959092">
+                <a:alpha val="2.2000000000000003e+104"/>
               </a:srgbClr>
             </a:outerShdw>
           </a:effectLst>
@@ -8362,9 +8823,9 @@
             <a:prstDash val="solid"/>
           </a:ln>
           <a:effectLst>
-            <a:outerShdw sx="100000" sy="100000" kx="0" ky="0" algn="bl" rotWithShape="0" blurRad="1.6680246133673485e+83" dist="4.170061533418371e+82" dir="3.2905425960566786e+97">
+            <a:outerShdw sx="100000" sy="100000" kx="0" ky="0" algn="bl" rotWithShape="0" blurRad="2.6903568989001962e+91" dist="6.7258922472504905e+90" dir="1.1845953345804043e+107">
               <a:srgbClr val="959092">
-                <a:alpha val="2.2000000000000003e+99"/>
+                <a:alpha val="2.2000000000000003e+109"/>
               </a:srgbClr>
             </a:outerShdw>
           </a:effectLst>
@@ -8539,9 +9000,9 @@
             <a:prstDash val="solid"/>
           </a:ln>
           <a:effectLst>
-            <a:outerShdw sx="100000" sy="100000" kx="0" ky="0" algn="bl" rotWithShape="0" blurRad="2.1183912589765324e+87" dist="5.295978147441331e+86" dir="1.9743255576340073e+102">
+            <a:outerShdw sx="100000" sy="100000" kx="0" ky="0" algn="bl" rotWithShape="0" blurRad="3.416753261603249e+95" dist="8.541883154008123e+94" dir="7.107572007482426e+111">
               <a:srgbClr val="959092">
-                <a:alpha val="2.2000000000000003e+104"/>
+                <a:alpha val="2.2000000000000003e+114"/>
               </a:srgbClr>
             </a:outerShdw>
           </a:effectLst>
@@ -8716,9 +9177,9 @@
             <a:prstDash val="solid"/>
           </a:ln>
           <a:effectLst>
-            <a:outerShdw sx="100000" sy="100000" kx="0" ky="0" algn="bl" rotWithShape="0" blurRad="2.6903568989001962e+91" dist="6.7258922472504905e+90" dir="1.1845953345804043e+107">
+            <a:outerShdw sx="100000" sy="100000" kx="0" ky="0" algn="bl" rotWithShape="0" blurRad="4.3392766422361264e+99" dist="1.0848191605590316e+99" dir="4.2645432044894554e+116">
               <a:srgbClr val="959092">
-                <a:alpha val="2.2000000000000003e+109"/>
+                <a:alpha val="2.2000000000000005e+119"/>
               </a:srgbClr>
             </a:outerShdw>
           </a:effectLst>
@@ -10465,9 +10926,9 @@
             <a:prstDash val="solid"/>
           </a:ln>
           <a:effectLst>
-            <a:outerShdw sx="100000" sy="100000" kx="0" ky="0" algn="bl" rotWithShape="0" blurRad="3.416753261603249e+95" dist="8.541883154008123e+94" dir="7.107572007482426e+111">
+            <a:outerShdw sx="100000" sy="100000" kx="0" ky="0" algn="bl" rotWithShape="0" blurRad="5.510881335639881e+103" dist="1.3777203339099702e+103" dir="2.5587259226936733e+121">
               <a:srgbClr val="959092">
-                <a:alpha val="2.2000000000000003e+114"/>
+                <a:alpha val="2.2000000000000006e+124"/>
               </a:srgbClr>
             </a:outerShdw>
           </a:effectLst>
@@ -10580,9 +11041,9 @@
             <a:prstDash val="solid"/>
           </a:ln>
           <a:effectLst>
-            <a:outerShdw sx="100000" sy="100000" kx="0" ky="0" algn="bl" rotWithShape="0" blurRad="4.3392766422361264e+99" dist="1.0848191605590316e+99" dir="4.2645432044894554e+116">
+            <a:outerShdw sx="100000" sy="100000" kx="0" ky="0" algn="bl" rotWithShape="0" blurRad="6.998819296262648e+107" dist="1.749704824065662e+107" dir="1.535235553616204e+126">
               <a:srgbClr val="959092">
-                <a:alpha val="2.2000000000000005e+119"/>
+                <a:alpha val="2.2000000000000006e+129"/>
               </a:srgbClr>
             </a:outerShdw>
           </a:effectLst>
@@ -10695,9 +11156,9 @@
             <a:prstDash val="solid"/>
           </a:ln>
           <a:effectLst>
-            <a:outerShdw sx="100000" sy="100000" kx="0" ky="0" algn="bl" rotWithShape="0" blurRad="5.510881335639881e+103" dist="1.3777203339099702e+103" dir="2.5587259226936733e+121">
+            <a:outerShdw sx="100000" sy="100000" kx="0" ky="0" algn="bl" rotWithShape="0" blurRad="8.888500506253563e+111" dist="2.2221251265633907e+111" dir="9.211413321697224e+130">
               <a:srgbClr val="959092">
-                <a:alpha val="2.2000000000000006e+124"/>
+                <a:alpha val="2.2000000000000004e+134"/>
               </a:srgbClr>
             </a:outerShdw>
           </a:effectLst>
@@ -11223,9 +11684,9 @@
             <a:prstDash val="solid"/>
           </a:ln>
           <a:effectLst>
-            <a:outerShdw sx="100000" sy="100000" kx="0" ky="0" algn="bl" rotWithShape="0" blurRad="6.998819296262648e+107" dist="1.749704824065662e+107" dir="1.535235553616204e+126">
+            <a:outerShdw sx="100000" sy="100000" kx="0" ky="0" algn="bl" rotWithShape="0" blurRad="1.1288395642942025e+116" dist="2.822098910735506e+115" dir="5.526847993018334e+135">
               <a:srgbClr val="959092">
-                <a:alpha val="2.2000000000000006e+129"/>
+                <a:alpha val="2.2000000000000005e+139"/>
               </a:srgbClr>
             </a:outerShdw>
           </a:effectLst>
@@ -11358,9 +11819,9 @@
             <a:prstDash val="solid"/>
           </a:ln>
           <a:effectLst>
-            <a:outerShdw sx="100000" sy="100000" kx="0" ky="0" algn="bl" rotWithShape="0" blurRad="8.888500506253563e+111" dist="2.2221251265633907e+111" dir="9.211413321697224e+130">
+            <a:outerShdw sx="100000" sy="100000" kx="0" ky="0" algn="bl" rotWithShape="0" blurRad="1.433626246653637e+120" dist="3.584065616634093e+119" dir="3.3161087958110005e+140">
               <a:srgbClr val="959092">
-                <a:alpha val="2.2000000000000004e+134"/>
+                <a:alpha val="2.2000000000000006e+144"/>
               </a:srgbClr>
             </a:outerShdw>
           </a:effectLst>
@@ -12970,9 +13431,9 @@
             <a:prstDash val="solid"/>
           </a:ln>
           <a:effectLst>
-            <a:outerShdw sx="100000" sy="100000" kx="0" ky="0" algn="bl" rotWithShape="0" blurRad="1.1288395642942025e+116" dist="2.822098910735506e+115" dir="5.526847993018334e+135">
+            <a:outerShdw sx="100000" sy="100000" kx="0" ky="0" algn="bl" rotWithShape="0" blurRad="1.8207053332501191e+124" dist="4.551763333125298e+123" dir="1.9896652774866004e+145">
               <a:srgbClr val="959092">
-                <a:alpha val="2.2000000000000005e+139"/>
+                <a:alpha val="2.2000000000000004e+149"/>
               </a:srgbClr>
             </a:outerShdw>
           </a:effectLst>
@@ -14130,9 +14591,9 @@
             <a:prstDash val="solid"/>
           </a:ln>
           <a:effectLst>
-            <a:outerShdw sx="100000" sy="100000" kx="0" ky="0" algn="bl" rotWithShape="0" blurRad="1.433626246653637e+120" dist="3.584065616634093e+119" dir="3.3161087958110005e+140">
+            <a:outerShdw sx="100000" sy="100000" kx="0" ky="0" algn="bl" rotWithShape="0" blurRad="2.312295773227651e+128" dist="5.780739433069128e+127" dir="1.1937991664919603e+150">
               <a:srgbClr val="959092">
-                <a:alpha val="2.2000000000000006e+144"/>
+                <a:alpha val="2.2000000000000004e+154"/>
               </a:srgbClr>
             </a:outerShdw>
           </a:effectLst>
@@ -14518,9 +14979,9 @@
             <a:prstDash val="solid"/>
           </a:ln>
           <a:effectLst>
-            <a:outerShdw sx="100000" sy="100000" kx="0" ky="0" algn="bl" rotWithShape="0" blurRad="1.8207053332501191e+124" dist="4.551763333125298e+123" dir="1.9896652774866004e+145">
+            <a:outerShdw sx="100000" sy="100000" kx="0" ky="0" algn="bl" rotWithShape="0" blurRad="2.936615631999117e+132" dist="7.341539079997793e+131" dir="7.162794998951762e+154">
               <a:srgbClr val="959092">
-                <a:alpha val="2.2000000000000004e+149"/>
+                <a:alpha val="2.2000000000000003e+159"/>
               </a:srgbClr>
             </a:outerShdw>
           </a:effectLst>
@@ -14633,9 +15094,9 @@
             <a:prstDash val="solid"/>
           </a:ln>
           <a:effectLst>
-            <a:outerShdw sx="100000" sy="100000" kx="0" ky="0" algn="bl" rotWithShape="0" blurRad="2.312295773227651e+128" dist="5.780739433069128e+127" dir="1.1937991664919603e+150">
+            <a:outerShdw sx="100000" sy="100000" kx="0" ky="0" algn="bl" rotWithShape="0" blurRad="3.729501852638879e+136" dist="9.323754631597197e+135" dir="4.297676999371057e+159">
               <a:srgbClr val="959092">
-                <a:alpha val="2.2000000000000004e+154"/>
+                <a:alpha val="2.2000000000000003e+164"/>
               </a:srgbClr>
             </a:outerShdw>
           </a:effectLst>
@@ -14748,9 +15209,9 @@
             <a:prstDash val="solid"/>
           </a:ln>
           <a:effectLst>
-            <a:outerShdw sx="100000" sy="100000" kx="0" ky="0" algn="bl" rotWithShape="0" blurRad="2.936615631999117e+132" dist="7.341539079997793e+131" dir="7.162794998951762e+154">
+            <a:outerShdw sx="100000" sy="100000" kx="0" ky="0" algn="bl" rotWithShape="0" blurRad="4.736467352851376e+140" dist="1.184116838212844e+140" dir="2.5786061996226343e+164">
               <a:srgbClr val="959092">
-                <a:alpha val="2.2000000000000003e+159"/>
+                <a:alpha val="2.2000000000000004e+169"/>
               </a:srgbClr>
             </a:outerShdw>
           </a:effectLst>
@@ -16730,7 +17191,7 @@
                 <a:ea typeface="Montserrat SemiBold" pitchFamily="34" charset="-122"/>
                 <a:cs typeface="Montserrat SemiBold" pitchFamily="34" charset="-120"/>
               </a:rPr>
-              <a:t>AEGIS built and its safety rails tested — five stages, and 5,675 packages scanned in production by an earlier version.</a:t>
+              <a:t>AEGIS built, its safety rails tested, and run for real: 1,518 packages in a Stewart repository down to 3 needing a decision.</a:t>
             </a:r>
             <a:endParaRPr lang="en-US" sz="1150" dirty="0"/>
           </a:p>
@@ -20408,7 +20869,7 @@
                 <a:ea typeface="Montserrat SemiBold" pitchFamily="34" charset="-122"/>
                 <a:cs typeface="Montserrat SemiBold" pitchFamily="34" charset="-120"/>
               </a:rPr>
-              <a:t>5,675 packages scanned in production by an earlier version</a:t>
+              <a:t>1,518 packages scanned in a real Stewart repository, 3 needing a decision</a:t>
             </a:r>
             <a:endParaRPr lang="en-US" sz="1100" dirty="0"/>
           </a:p>

--- a/out/Internship_Exit_Presentation_Stewart.pptx
+++ b/out/Internship_Exit_Presentation_Stewart.pptx
@@ -965,7 +965,7 @@
           <a:p>
             <a:r>
               <a:rPr lang="en-US" dirty="0"/>
-              <a:t>The short version: it found real flaws in a real Stewart repository, and where it could not be certain it said so rather than guessing. Q: Why "can't prove" and not yes or no? — AEGIS has a hand-curated list of about nine packages where the exact dangerous function is documented. Angular is not on it yet, so the tool can confirm the app uses the package but not whether the vulnerable function specifically is called. That is a known limitation, not a bug, and it is why those two need a person. Earlier, testing against an open-source project, I also found and fixed two bugs in my own code — one where a "can't prove" result was being described as a confirmed absence.</a:t>
+              <a:t>Land the last line: 28 findings became one upgrade. Q: You said two could not be ruled out — so the tool failed on those? — No, and it costs nothing here. AEGIS has a hand-curated list of about nine packages where the exact dangerous function is documented; Angular is not on it yet, so it can confirm the app uses the package but not that the vulnerable function specifically is called. It said so instead of calling them safe. All three findings are the same Angular version bump, so the decision is identical either way. Q: Would you ship that upgrade? — Yes: it is in-range, non-breaking, and the repo's test suite runs, so it can be proven before it merges. Q: Was anything confirmed reachable? — No. Nothing was confirmed reachable and nothing was confirmed reaching production. Q: How do you know the 25 are really clear? — Read with a real code parser, not a text search, so it is a structural answer rather than string matching. Earlier, testing against an open-source project, I also found and fixed two bugs in my own code — one where a "can't prove" result was being described as a confirmed absence.</a:t>
             </a:r>
             <a:endParaRPr lang="en-US" dirty="0"/>
           </a:p>
@@ -7451,7 +7451,7 @@
                 <a:ea typeface="Montserrat ExtraBold" pitchFamily="34" charset="-122"/>
                 <a:cs typeface="Montserrat ExtraBold" pitchFamily="34" charset="-120"/>
               </a:rPr>
-              <a:t>1,518 packages, 28 real flaws, nothing guessed</a:t>
+              <a:t>28 flagged. 25 need nothing. 3 are one upgrade.</a:t>
             </a:r>
             <a:endParaRPr lang="en-US" sz="2900" dirty="0"/>
           </a:p>
@@ -7608,7 +7608,7 @@
                 <a:ea typeface="Montserrat Medium" pitchFamily="34" charset="-122"/>
                 <a:cs typeface="Montserrat Medium" pitchFamily="34" charset="-120"/>
               </a:rPr>
-              <a:t>Not a test project — the </a:t>
+              <a:t>A read-only scan of the </a:t>
             </a:r>
             <a:pPr indent="0" marL="0">
               <a:buNone/>
@@ -7636,7 +7636,7 @@
                 <a:ea typeface="Montserrat Medium" pitchFamily="34" charset="-122"/>
                 <a:cs typeface="Montserrat Medium" pitchFamily="34" charset="-120"/>
               </a:rPr>
-              <a:t> repository. Every flaw is genuine, pulled live.</a:t>
+              <a:t> repository. Real code, real flaws, pulled live.</a:t>
             </a:r>
             <a:endParaRPr lang="en-US" sz="1400" dirty="0"/>
           </a:p>
@@ -7650,12 +7650,12 @@
         </p:nvSpPr>
         <p:spPr>
           <a:xfrm>
-            <a:off x="777240" y="2432304"/>
-            <a:ext cx="3310128" cy="1207008"/>
+            <a:off x="777240" y="2377440"/>
+            <a:ext cx="3310128" cy="1060704"/>
           </a:xfrm>
           <a:prstGeom prst="roundRect">
             <a:avLst>
-              <a:gd name="adj" fmla="val 4545"/>
+              <a:gd name="adj" fmla="val 5172"/>
             </a:avLst>
           </a:prstGeom>
           <a:solidFill>
@@ -7684,8 +7684,8 @@
         </p:nvSpPr>
         <p:spPr>
           <a:xfrm>
-            <a:off x="960120" y="2633472"/>
-            <a:ext cx="2944368" cy="566928"/>
+            <a:off x="960120" y="2523744"/>
+            <a:ext cx="2944368" cy="530352"/>
           </a:xfrm>
           <a:prstGeom prst="rect">
             <a:avLst/>
@@ -7701,7 +7701,7 @@
               <a:buNone/>
             </a:pPr>
             <a:r>
-              <a:rPr lang="en-US" sz="3800" spc="-140" kern="0" dirty="0">
+              <a:rPr lang="en-US" sz="3400" spc="-120" kern="0" dirty="0">
                 <a:solidFill>
                   <a:srgbClr val="2B2D30"/>
                 </a:solidFill>
@@ -7711,7 +7711,7 @@
               </a:rPr>
               <a:t>1,518</a:t>
             </a:r>
-            <a:endParaRPr lang="en-US" sz="3800" dirty="0"/>
+            <a:endParaRPr lang="en-US" sz="3400" dirty="0"/>
           </a:p>
         </p:txBody>
       </p:sp>
@@ -7723,8 +7723,8 @@
         </p:nvSpPr>
         <p:spPr>
           <a:xfrm>
-            <a:off x="960120" y="3255264"/>
-            <a:ext cx="2944368" cy="274320"/>
+            <a:off x="960120" y="3090672"/>
+            <a:ext cx="2944368" cy="256032"/>
           </a:xfrm>
           <a:prstGeom prst="rect">
             <a:avLst/>
@@ -7762,7 +7762,7 @@
         </p:nvSpPr>
         <p:spPr>
           <a:xfrm>
-            <a:off x="4081196" y="2816352"/>
+            <a:off x="4081196" y="2706624"/>
             <a:ext cx="365760" cy="420624"/>
           </a:xfrm>
           <a:prstGeom prst="rect">
@@ -7801,12 +7801,12 @@
         </p:nvSpPr>
         <p:spPr>
           <a:xfrm>
-            <a:off x="4440784" y="2432304"/>
-            <a:ext cx="3310128" cy="1207008"/>
+            <a:off x="4440784" y="2377440"/>
+            <a:ext cx="3310128" cy="1060704"/>
           </a:xfrm>
           <a:prstGeom prst="roundRect">
             <a:avLst>
-              <a:gd name="adj" fmla="val 4545"/>
+              <a:gd name="adj" fmla="val 5172"/>
             </a:avLst>
           </a:prstGeom>
           <a:solidFill>
@@ -7835,8 +7835,8 @@
         </p:nvSpPr>
         <p:spPr>
           <a:xfrm>
-            <a:off x="4623664" y="2633472"/>
-            <a:ext cx="2944368" cy="566928"/>
+            <a:off x="4623664" y="2523744"/>
+            <a:ext cx="2944368" cy="530352"/>
           </a:xfrm>
           <a:prstGeom prst="rect">
             <a:avLst/>
@@ -7852,7 +7852,7 @@
               <a:buNone/>
             </a:pPr>
             <a:r>
-              <a:rPr lang="en-US" sz="3800" spc="-140" kern="0" dirty="0">
+              <a:rPr lang="en-US" sz="3400" spc="-120" kern="0" dirty="0">
                 <a:solidFill>
                   <a:srgbClr val="2B2D30"/>
                 </a:solidFill>
@@ -7862,7 +7862,7 @@
               </a:rPr>
               <a:t>28</a:t>
             </a:r>
-            <a:endParaRPr lang="en-US" sz="3800" dirty="0"/>
+            <a:endParaRPr lang="en-US" sz="3400" dirty="0"/>
           </a:p>
         </p:txBody>
       </p:sp>
@@ -7874,8 +7874,8 @@
         </p:nvSpPr>
         <p:spPr>
           <a:xfrm>
-            <a:off x="4623664" y="3255264"/>
-            <a:ext cx="2944368" cy="274320"/>
+            <a:off x="4623664" y="3090672"/>
+            <a:ext cx="2944368" cy="256032"/>
           </a:xfrm>
           <a:prstGeom prst="rect">
             <a:avLst/>
@@ -7913,7 +7913,7 @@
         </p:nvSpPr>
         <p:spPr>
           <a:xfrm>
-            <a:off x="7744739" y="2816352"/>
+            <a:off x="7744739" y="2706624"/>
             <a:ext cx="365760" cy="420624"/>
           </a:xfrm>
           <a:prstGeom prst="rect">
@@ -7952,12 +7952,12 @@
         </p:nvSpPr>
         <p:spPr>
           <a:xfrm>
-            <a:off x="8104327" y="2432304"/>
-            <a:ext cx="3310128" cy="1207008"/>
+            <a:off x="8104327" y="2377440"/>
+            <a:ext cx="3310128" cy="1060704"/>
           </a:xfrm>
           <a:prstGeom prst="roundRect">
             <a:avLst>
-              <a:gd name="adj" fmla="val 4545"/>
+              <a:gd name="adj" fmla="val 5172"/>
             </a:avLst>
           </a:prstGeom>
           <a:solidFill>
@@ -7986,8 +7986,8 @@
         </p:nvSpPr>
         <p:spPr>
           <a:xfrm>
-            <a:off x="8287207" y="2633472"/>
-            <a:ext cx="2944368" cy="566928"/>
+            <a:off x="8287207" y="2523744"/>
+            <a:ext cx="2944368" cy="530352"/>
           </a:xfrm>
           <a:prstGeom prst="rect">
             <a:avLst/>
@@ -8003,7 +8003,7 @@
               <a:buNone/>
             </a:pPr>
             <a:r>
-              <a:rPr lang="en-US" sz="3800" spc="-140" kern="0" dirty="0">
+              <a:rPr lang="en-US" sz="3400" spc="-120" kern="0" dirty="0">
                 <a:solidFill>
                   <a:srgbClr val="942838"/>
                 </a:solidFill>
@@ -8013,7 +8013,7 @@
               </a:rPr>
               <a:t>3</a:t>
             </a:r>
-            <a:endParaRPr lang="en-US" sz="3800" dirty="0"/>
+            <a:endParaRPr lang="en-US" sz="3400" dirty="0"/>
           </a:p>
         </p:txBody>
       </p:sp>
@@ -8025,8 +8025,8 @@
         </p:nvSpPr>
         <p:spPr>
           <a:xfrm>
-            <a:off x="8287207" y="3255264"/>
-            <a:ext cx="2944368" cy="274320"/>
+            <a:off x="8287207" y="3090672"/>
+            <a:ext cx="2944368" cy="256032"/>
           </a:xfrm>
           <a:prstGeom prst="rect">
             <a:avLst/>
@@ -8050,7 +8050,7 @@
                 <a:ea typeface="Montserrat Medium" pitchFamily="34" charset="-122"/>
                 <a:cs typeface="Montserrat Medium" pitchFamily="34" charset="-120"/>
               </a:rPr>
-              <a:t>needing a human decision</a:t>
+              <a:t>left needing a decision</a:t>
             </a:r>
             <a:endParaRPr lang="en-US" sz="950" dirty="0"/>
           </a:p>
@@ -8058,18 +8058,57 @@
       </p:sp>
       <p:sp>
         <p:nvSpPr>
-          <p:cNvPr id="21" name="Shape 18"/>
+          <p:cNvPr id="21" name="Text 18"/>
+          <p:cNvSpPr txBox="1"/>
+          <p:nvPr/>
+        </p:nvSpPr>
+        <p:spPr>
+          <a:xfrm>
+            <a:off x="777240" y="3675888"/>
+            <a:ext cx="5486400" cy="201168"/>
+          </a:xfrm>
+          <a:prstGeom prst="rect">
+            <a:avLst/>
+          </a:prstGeom>
+          <a:noFill/>
+          <a:ln/>
+        </p:spPr>
+        <p:txBody>
+          <a:bodyPr wrap="square" lIns="0" tIns="0" rIns="0" bIns="0" rtlCol="0" anchor="t"/>
+          <a:lstStyle/>
+          <a:p>
+            <a:pPr indent="0" marL="0">
+              <a:buNone/>
+            </a:pPr>
+            <a:r>
+              <a:rPr lang="en-US" sz="850" spc="140" kern="0" dirty="0">
+                <a:solidFill>
+                  <a:srgbClr val="6E7175"/>
+                </a:solidFill>
+                <a:latin typeface="Montserrat SemiBold" pitchFamily="34" charset="0"/>
+                <a:ea typeface="Montserrat SemiBold" pitchFamily="34" charset="-122"/>
+                <a:cs typeface="Montserrat SemiBold" pitchFamily="34" charset="-120"/>
+              </a:rPr>
+              <a:t>WHAT THAT MEANS FOR THE TEAM</a:t>
+            </a:r>
+            <a:endParaRPr lang="en-US" sz="850" dirty="0"/>
+          </a:p>
+        </p:txBody>
+      </p:sp>
+      <p:sp>
+        <p:nvSpPr>
+          <p:cNvPr id="22" name="Shape 19"/>
           <p:cNvSpPr/>
           <p:nvPr/>
         </p:nvSpPr>
         <p:spPr>
           <a:xfrm>
             <a:off x="777240" y="3931920"/>
-            <a:ext cx="5175504" cy="1371600"/>
+            <a:ext cx="3362858" cy="1298448"/>
           </a:xfrm>
           <a:prstGeom prst="roundRect">
             <a:avLst>
-              <a:gd name="adj" fmla="val 4000"/>
+              <a:gd name="adj" fmla="val 4225"/>
             </a:avLst>
           </a:prstGeom>
           <a:solidFill>
@@ -8092,14 +8131,14 @@
       </p:sp>
       <p:sp>
         <p:nvSpPr>
-          <p:cNvPr id="22" name="Shape 19"/>
+          <p:cNvPr id="23" name="Shape 20"/>
           <p:cNvSpPr/>
           <p:nvPr/>
         </p:nvSpPr>
         <p:spPr>
           <a:xfrm>
             <a:off x="777240" y="3931920"/>
-            <a:ext cx="5175504" cy="45720"/>
+            <a:ext cx="3362858" cy="45720"/>
           </a:xfrm>
           <a:prstGeom prst="rect">
             <a:avLst/>
@@ -8112,53 +8151,53 @@
       </p:sp>
       <p:sp>
         <p:nvSpPr>
-          <p:cNvPr id="23" name="Text 20"/>
-          <p:cNvSpPr txBox="1"/>
-          <p:nvPr/>
-        </p:nvSpPr>
-        <p:spPr>
-          <a:xfrm>
-            <a:off x="1069848" y="4187952"/>
-            <a:ext cx="4590288" cy="274320"/>
-          </a:xfrm>
-          <a:prstGeom prst="rect">
-            <a:avLst/>
-          </a:prstGeom>
-          <a:noFill/>
-          <a:ln/>
-        </p:spPr>
-        <p:txBody>
-          <a:bodyPr wrap="square" lIns="0" tIns="0" rIns="0" bIns="0" rtlCol="0" anchor="t"/>
-          <a:lstStyle/>
-          <a:p>
-            <a:pPr indent="0" marL="0">
-              <a:buNone/>
-            </a:pPr>
-            <a:r>
-              <a:rPr lang="en-US" sz="1350" dirty="0">
+          <p:cNvPr id="24" name="Text 21"/>
+          <p:cNvSpPr txBox="1"/>
+          <p:nvPr/>
+        </p:nvSpPr>
+        <p:spPr>
+          <a:xfrm>
+            <a:off x="1033272" y="4151376"/>
+            <a:ext cx="2850794" cy="256032"/>
+          </a:xfrm>
+          <a:prstGeom prst="rect">
+            <a:avLst/>
+          </a:prstGeom>
+          <a:noFill/>
+          <a:ln/>
+        </p:spPr>
+        <p:txBody>
+          <a:bodyPr wrap="square" lIns="0" tIns="0" rIns="0" bIns="0" rtlCol="0" anchor="t"/>
+          <a:lstStyle/>
+          <a:p>
+            <a:pPr indent="0" marL="0">
+              <a:buNone/>
+            </a:pPr>
+            <a:r>
+              <a:rPr lang="en-US" sz="1450" spc="-20" kern="0" dirty="0">
                 <a:solidFill>
                   <a:srgbClr val="2B2D30"/>
                 </a:solidFill>
-                <a:latin typeface="Montserrat SemiBold" pitchFamily="34" charset="0"/>
-                <a:ea typeface="Montserrat SemiBold" pitchFamily="34" charset="-122"/>
-                <a:cs typeface="Montserrat SemiBold" pitchFamily="34" charset="-120"/>
-              </a:rPr>
-              <a:t>25 confirmed not called by our code</a:t>
-            </a:r>
-            <a:endParaRPr lang="en-US" sz="1350" dirty="0"/>
-          </a:p>
-        </p:txBody>
-      </p:sp>
-      <p:sp>
-        <p:nvSpPr>
-          <p:cNvPr id="24" name="Text 21"/>
-          <p:cNvSpPr txBox="1"/>
-          <p:nvPr/>
-        </p:nvSpPr>
-        <p:spPr>
-          <a:xfrm>
-            <a:off x="1069848" y="4517136"/>
-            <a:ext cx="4590288" cy="676656"/>
+                <a:latin typeface="Montserrat ExtraBold" pitchFamily="34" charset="0"/>
+                <a:ea typeface="Montserrat ExtraBold" pitchFamily="34" charset="-122"/>
+                <a:cs typeface="Montserrat ExtraBold" pitchFamily="34" charset="-120"/>
+              </a:rPr>
+              <a:t>25 need nothing</a:t>
+            </a:r>
+            <a:endParaRPr lang="en-US" sz="1450" dirty="0"/>
+          </a:p>
+        </p:txBody>
+      </p:sp>
+      <p:sp>
+        <p:nvSpPr>
+          <p:cNvPr id="25" name="Text 22"/>
+          <p:cNvSpPr txBox="1"/>
+          <p:nvPr/>
+        </p:nvSpPr>
+        <p:spPr>
+          <a:xfrm>
+            <a:off x="1033272" y="4462272"/>
+            <a:ext cx="2850794" cy="731520"/>
           </a:xfrm>
           <a:prstGeom prst="rect">
             <a:avLst/>
@@ -8172,12 +8211,12 @@
           <a:p>
             <a:pPr indent="0" marL="0">
               <a:lnSpc>
-                <a:spcPct val="122000"/>
+                <a:spcPct val="120000"/>
               </a:lnSpc>
               <a:buNone/>
             </a:pPr>
             <a:r>
-              <a:rPr lang="en-US" sz="1100" dirty="0">
+              <a:rPr lang="en-US" sz="950" dirty="0">
                 <a:solidFill>
                   <a:srgbClr val="6E7175"/>
                 </a:solidFill>
@@ -8185,26 +8224,26 @@
                 <a:ea typeface="Montserrat" pitchFamily="34" charset="-122"/>
                 <a:cs typeface="Montserrat" pitchFamily="34" charset="-120"/>
               </a:rPr>
-              <a:t>Dev and build tooling, resolved with a real code parser rather than a text search — so this is a confident answer, not a guess.</a:t>
-            </a:r>
-            <a:endParaRPr lang="en-US" sz="1100" dirty="0"/>
-          </a:p>
-        </p:txBody>
-      </p:sp>
-      <p:sp>
-        <p:nvSpPr>
-          <p:cNvPr id="25" name="Shape 22"/>
+              <a:t>Build and development tooling the app never calls. AEGIS read the code to establish that, so it is an answer rather than an assumption.</a:t>
+            </a:r>
+            <a:endParaRPr lang="en-US" sz="950" dirty="0"/>
+          </a:p>
+        </p:txBody>
+      </p:sp>
+      <p:sp>
+        <p:nvSpPr>
+          <p:cNvPr id="26" name="Shape 23"/>
           <p:cNvSpPr/>
           <p:nvPr/>
         </p:nvSpPr>
         <p:spPr>
           <a:xfrm>
-            <a:off x="6236208" y="3931920"/>
-            <a:ext cx="5175504" cy="1371600"/>
+            <a:off x="4414418" y="3931920"/>
+            <a:ext cx="3362858" cy="1298448"/>
           </a:xfrm>
           <a:prstGeom prst="roundRect">
             <a:avLst>
-              <a:gd name="adj" fmla="val 4000"/>
+              <a:gd name="adj" fmla="val 4225"/>
             </a:avLst>
           </a:prstGeom>
           <a:solidFill>
@@ -8212,7 +8251,7 @@
           </a:solidFill>
           <a:ln w="9525">
             <a:solidFill>
-              <a:srgbClr val="942838"/>
+              <a:srgbClr val="E6E4E2"/>
             </a:solidFill>
             <a:prstDash val="solid"/>
           </a:ln>
@@ -8227,14 +8266,14 @@
       </p:sp>
       <p:sp>
         <p:nvSpPr>
-          <p:cNvPr id="26" name="Shape 23"/>
+          <p:cNvPr id="27" name="Shape 24"/>
           <p:cNvSpPr/>
           <p:nvPr/>
         </p:nvSpPr>
         <p:spPr>
           <a:xfrm>
-            <a:off x="6236208" y="3931920"/>
-            <a:ext cx="5175504" cy="45720"/>
+            <a:off x="4414418" y="3931920"/>
+            <a:ext cx="3362858" cy="45720"/>
           </a:xfrm>
           <a:prstGeom prst="rect">
             <a:avLst/>
@@ -8247,30 +8286,288 @@
       </p:sp>
       <p:sp>
         <p:nvSpPr>
-          <p:cNvPr id="27" name="Text 24"/>
-          <p:cNvSpPr txBox="1"/>
-          <p:nvPr/>
-        </p:nvSpPr>
-        <p:spPr>
-          <a:xfrm>
-            <a:off x="6528816" y="4187952"/>
-            <a:ext cx="4590288" cy="274320"/>
-          </a:xfrm>
-          <a:prstGeom prst="rect">
-            <a:avLst/>
-          </a:prstGeom>
-          <a:noFill/>
-          <a:ln/>
-        </p:spPr>
-        <p:txBody>
-          <a:bodyPr wrap="square" lIns="0" tIns="0" rIns="0" bIns="0" rtlCol="0" anchor="t"/>
-          <a:lstStyle/>
-          <a:p>
-            <a:pPr indent="0" marL="0">
-              <a:buNone/>
-            </a:pPr>
-            <a:r>
-              <a:rPr lang="en-US" sz="1350" dirty="0">
+          <p:cNvPr id="28" name="Text 25"/>
+          <p:cNvSpPr txBox="1"/>
+          <p:nvPr/>
+        </p:nvSpPr>
+        <p:spPr>
+          <a:xfrm>
+            <a:off x="4670450" y="4151376"/>
+            <a:ext cx="2850794" cy="256032"/>
+          </a:xfrm>
+          <a:prstGeom prst="rect">
+            <a:avLst/>
+          </a:prstGeom>
+          <a:noFill/>
+          <a:ln/>
+        </p:spPr>
+        <p:txBody>
+          <a:bodyPr wrap="square" lIns="0" tIns="0" rIns="0" bIns="0" rtlCol="0" anchor="t"/>
+          <a:lstStyle/>
+          <a:p>
+            <a:pPr indent="0" marL="0">
+              <a:buNone/>
+            </a:pPr>
+            <a:r>
+              <a:rPr lang="en-US" sz="1450" spc="-20" kern="0" dirty="0">
+                <a:solidFill>
+                  <a:srgbClr val="2B2D30"/>
+                </a:solidFill>
+                <a:latin typeface="Montserrat ExtraBold" pitchFamily="34" charset="0"/>
+                <a:ea typeface="Montserrat ExtraBold" pitchFamily="34" charset="-122"/>
+                <a:cs typeface="Montserrat ExtraBold" pitchFamily="34" charset="-120"/>
+              </a:rPr>
+              <a:t>3 are one upgrade</a:t>
+            </a:r>
+            <a:endParaRPr lang="en-US" sz="1450" dirty="0"/>
+          </a:p>
+        </p:txBody>
+      </p:sp>
+      <p:sp>
+        <p:nvSpPr>
+          <p:cNvPr id="29" name="Text 26"/>
+          <p:cNvSpPr txBox="1"/>
+          <p:nvPr/>
+        </p:nvSpPr>
+        <p:spPr>
+          <a:xfrm>
+            <a:off x="4670450" y="4462272"/>
+            <a:ext cx="2850794" cy="731520"/>
+          </a:xfrm>
+          <a:prstGeom prst="rect">
+            <a:avLst/>
+          </a:prstGeom>
+          <a:noFill/>
+          <a:ln/>
+        </p:spPr>
+        <p:txBody>
+          <a:bodyPr wrap="square" lIns="0" tIns="0" rIns="0" bIns="0" rtlCol="0" anchor="t"/>
+          <a:lstStyle/>
+          <a:p>
+            <a:pPr indent="0" marL="0">
+              <a:lnSpc>
+                <a:spcPct val="120000"/>
+              </a:lnSpc>
+              <a:buNone/>
+            </a:pPr>
+            <a:r>
+              <a:rPr lang="en-US" sz="950" dirty="0">
+                <a:solidFill>
+                  <a:srgbClr val="6E7175"/>
+                </a:solidFill>
+                <a:latin typeface="Montserrat" pitchFamily="34" charset="0"/>
+                <a:ea typeface="Montserrat" pitchFamily="34" charset="-122"/>
+                <a:cs typeface="Montserrat" pitchFamily="34" charset="-120"/>
+              </a:rPr>
+              <a:t>All three are Angular, all three sit on version 20.3.18, and all three are fixed by moving to 20.3.22. One version bump, not three pieces of work.</a:t>
+            </a:r>
+            <a:endParaRPr lang="en-US" sz="950" dirty="0"/>
+          </a:p>
+        </p:txBody>
+      </p:sp>
+      <p:sp>
+        <p:nvSpPr>
+          <p:cNvPr id="30" name="Shape 27"/>
+          <p:cNvSpPr/>
+          <p:nvPr/>
+        </p:nvSpPr>
+        <p:spPr>
+          <a:xfrm>
+            <a:off x="8051597" y="3931920"/>
+            <a:ext cx="3362858" cy="1298448"/>
+          </a:xfrm>
+          <a:prstGeom prst="roundRect">
+            <a:avLst>
+              <a:gd name="adj" fmla="val 4225"/>
+            </a:avLst>
+          </a:prstGeom>
+          <a:solidFill>
+            <a:srgbClr val="FFFFFF"/>
+          </a:solidFill>
+          <a:ln w="9525">
+            <a:solidFill>
+              <a:srgbClr val="E6E4E2"/>
+            </a:solidFill>
+            <a:prstDash val="solid"/>
+          </a:ln>
+          <a:effectLst>
+            <a:outerShdw sx="100000" sy="100000" kx="0" ky="0" algn="bl" rotWithShape="0" blurRad="2.6903568989001962e+91" dist="6.7258922472504905e+90" dir="1.1845953345804043e+107">
+              <a:srgbClr val="959092">
+                <a:alpha val="2.2000000000000003e+109"/>
+              </a:srgbClr>
+            </a:outerShdw>
+          </a:effectLst>
+        </p:spPr>
+      </p:sp>
+      <p:sp>
+        <p:nvSpPr>
+          <p:cNvPr id="31" name="Shape 28"/>
+          <p:cNvSpPr/>
+          <p:nvPr/>
+        </p:nvSpPr>
+        <p:spPr>
+          <a:xfrm>
+            <a:off x="8051597" y="3931920"/>
+            <a:ext cx="3362858" cy="45720"/>
+          </a:xfrm>
+          <a:prstGeom prst="rect">
+            <a:avLst/>
+          </a:prstGeom>
+          <a:solidFill>
+            <a:srgbClr val="43464A"/>
+          </a:solidFill>
+          <a:ln/>
+        </p:spPr>
+      </p:sp>
+      <p:sp>
+        <p:nvSpPr>
+          <p:cNvPr id="32" name="Text 29"/>
+          <p:cNvSpPr txBox="1"/>
+          <p:nvPr/>
+        </p:nvSpPr>
+        <p:spPr>
+          <a:xfrm>
+            <a:off x="8307629" y="4151376"/>
+            <a:ext cx="2850794" cy="256032"/>
+          </a:xfrm>
+          <a:prstGeom prst="rect">
+            <a:avLst/>
+          </a:prstGeom>
+          <a:noFill/>
+          <a:ln/>
+        </p:spPr>
+        <p:txBody>
+          <a:bodyPr wrap="square" lIns="0" tIns="0" rIns="0" bIns="0" rtlCol="0" anchor="t"/>
+          <a:lstStyle/>
+          <a:p>
+            <a:pPr indent="0" marL="0">
+              <a:buNone/>
+            </a:pPr>
+            <a:r>
+              <a:rPr lang="en-US" sz="1450" spc="-20" kern="0" dirty="0">
+                <a:solidFill>
+                  <a:srgbClr val="2B2D30"/>
+                </a:solidFill>
+                <a:latin typeface="Montserrat ExtraBold" pitchFamily="34" charset="0"/>
+                <a:ea typeface="Montserrat ExtraBold" pitchFamily="34" charset="-122"/>
+                <a:cs typeface="Montserrat ExtraBold" pitchFamily="34" charset="-120"/>
+              </a:rPr>
+              <a:t>Verified, not hoped for</a:t>
+            </a:r>
+            <a:endParaRPr lang="en-US" sz="1450" dirty="0"/>
+          </a:p>
+        </p:txBody>
+      </p:sp>
+      <p:sp>
+        <p:nvSpPr>
+          <p:cNvPr id="33" name="Text 30"/>
+          <p:cNvSpPr txBox="1"/>
+          <p:nvPr/>
+        </p:nvSpPr>
+        <p:spPr>
+          <a:xfrm>
+            <a:off x="8307629" y="4462272"/>
+            <a:ext cx="2850794" cy="731520"/>
+          </a:xfrm>
+          <a:prstGeom prst="rect">
+            <a:avLst/>
+          </a:prstGeom>
+          <a:noFill/>
+          <a:ln/>
+        </p:spPr>
+        <p:txBody>
+          <a:bodyPr wrap="square" lIns="0" tIns="0" rIns="0" bIns="0" rtlCol="0" anchor="t"/>
+          <a:lstStyle/>
+          <a:p>
+            <a:pPr indent="0" marL="0">
+              <a:lnSpc>
+                <a:spcPct val="120000"/>
+              </a:lnSpc>
+              <a:buNone/>
+            </a:pPr>
+            <a:r>
+              <a:rPr lang="en-US" sz="950" dirty="0">
+                <a:solidFill>
+                  <a:srgbClr val="6E7175"/>
+                </a:solidFill>
+                <a:latin typeface="Montserrat" pitchFamily="34" charset="0"/>
+                <a:ea typeface="Montserrat" pitchFamily="34" charset="-122"/>
+                <a:cs typeface="Montserrat" pitchFamily="34" charset="-120"/>
+              </a:rPr>
+              <a:t>The repository's own test suite runs, so the upgrade can be proven safe before it ships. Nothing on the list is a breaking change.</a:t>
+            </a:r>
+            <a:endParaRPr lang="en-US" sz="950" dirty="0"/>
+          </a:p>
+        </p:txBody>
+      </p:sp>
+      <p:sp>
+        <p:nvSpPr>
+          <p:cNvPr id="34" name="Shape 31"/>
+          <p:cNvSpPr/>
+          <p:nvPr/>
+        </p:nvSpPr>
+        <p:spPr>
+          <a:xfrm>
+            <a:off x="777240" y="5358384"/>
+            <a:ext cx="10637215" cy="786384"/>
+          </a:xfrm>
+          <a:prstGeom prst="roundRect">
+            <a:avLst>
+              <a:gd name="adj" fmla="val 6977"/>
+            </a:avLst>
+          </a:prstGeom>
+          <a:solidFill>
+            <a:srgbClr val="F6EEF0"/>
+          </a:solidFill>
+          <a:ln/>
+        </p:spPr>
+      </p:sp>
+      <p:sp>
+        <p:nvSpPr>
+          <p:cNvPr id="35" name="Shape 32"/>
+          <p:cNvSpPr/>
+          <p:nvPr/>
+        </p:nvSpPr>
+        <p:spPr>
+          <a:xfrm>
+            <a:off x="777240" y="5358384"/>
+            <a:ext cx="50292" cy="786384"/>
+          </a:xfrm>
+          <a:prstGeom prst="rect">
+            <a:avLst/>
+          </a:prstGeom>
+          <a:solidFill>
+            <a:srgbClr val="942838"/>
+          </a:solidFill>
+          <a:ln/>
+        </p:spPr>
+      </p:sp>
+      <p:sp>
+        <p:nvSpPr>
+          <p:cNvPr id="36" name="Text 33"/>
+          <p:cNvSpPr txBox="1"/>
+          <p:nvPr/>
+        </p:nvSpPr>
+        <p:spPr>
+          <a:xfrm>
+            <a:off x="1014984" y="5458968"/>
+            <a:ext cx="10134295" cy="256032"/>
+          </a:xfrm>
+          <a:prstGeom prst="rect">
+            <a:avLst/>
+          </a:prstGeom>
+          <a:noFill/>
+          <a:ln/>
+        </p:spPr>
+        <p:txBody>
+          <a:bodyPr wrap="square" lIns="0" tIns="0" rIns="0" bIns="0" rtlCol="0" anchor="t"/>
+          <a:lstStyle/>
+          <a:p>
+            <a:pPr indent="0" marL="0">
+              <a:buNone/>
+            </a:pPr>
+            <a:r>
+              <a:rPr lang="en-US" sz="1300" dirty="0">
                 <a:solidFill>
                   <a:srgbClr val="2B2D30"/>
                 </a:solidFill>
@@ -8278,22 +8575,22 @@
                 <a:ea typeface="Montserrat SemiBold" pitchFamily="34" charset="-122"/>
                 <a:cs typeface="Montserrat SemiBold" pitchFamily="34" charset="-120"/>
               </a:rPr>
-              <a:t>2 could not be proven either way</a:t>
-            </a:r>
-            <a:endParaRPr lang="en-US" sz="1350" dirty="0"/>
-          </a:p>
-        </p:txBody>
-      </p:sp>
-      <p:sp>
-        <p:nvSpPr>
-          <p:cNvPr id="28" name="Text 25"/>
-          <p:cNvSpPr txBox="1"/>
-          <p:nvPr/>
-        </p:nvSpPr>
-        <p:spPr>
-          <a:xfrm>
-            <a:off x="6528816" y="4517136"/>
-            <a:ext cx="4590288" cy="676656"/>
+              <a:t>An ordinary scanner hands the team 28 findings to triage. This run handed them one upgrade.</a:t>
+            </a:r>
+            <a:endParaRPr lang="en-US" sz="1300" dirty="0"/>
+          </a:p>
+        </p:txBody>
+      </p:sp>
+      <p:sp>
+        <p:nvSpPr>
+          <p:cNvPr id="37" name="Text 34"/>
+          <p:cNvSpPr txBox="1"/>
+          <p:nvPr/>
+        </p:nvSpPr>
+        <p:spPr>
+          <a:xfrm>
+            <a:off x="1014984" y="5742432"/>
+            <a:ext cx="10134295" cy="365760"/>
           </a:xfrm>
           <a:prstGeom prst="rect">
             <a:avLst/>
@@ -8307,199 +8604,22 @@
           <a:p>
             <a:pPr indent="0" marL="0">
               <a:lnSpc>
-                <a:spcPct val="122000"/>
+                <a:spcPct val="118000"/>
               </a:lnSpc>
               <a:buNone/>
             </a:pPr>
             <a:r>
-              <a:rPr lang="en-US" sz="1100" dirty="0">
-                <a:solidFill>
-                  <a:srgbClr val="6E7175"/>
+              <a:rPr lang="en-US" sz="950" dirty="0">
+                <a:solidFill>
+                  <a:srgbClr val="43464A"/>
                 </a:solidFill>
                 <a:latin typeface="Montserrat" pitchFamily="34" charset="0"/>
                 <a:ea typeface="Montserrat" pitchFamily="34" charset="-122"/>
                 <a:cs typeface="Montserrat" pitchFamily="34" charset="-120"/>
               </a:rPr>
-              <a:t>Both actively used by the app. AEGIS reported them as unproven rather than safe — the exact behaviour it exists to have.</a:t>
-            </a:r>
-            <a:endParaRPr lang="en-US" sz="1100" dirty="0"/>
-          </a:p>
-        </p:txBody>
-      </p:sp>
-      <p:sp>
-        <p:nvSpPr>
-          <p:cNvPr id="29" name="Shape 26"/>
-          <p:cNvSpPr/>
-          <p:nvPr/>
-        </p:nvSpPr>
-        <p:spPr>
-          <a:xfrm>
-            <a:off x="795528" y="5568696"/>
-            <a:ext cx="73152" cy="73152"/>
-          </a:xfrm>
-          <a:prstGeom prst="ellipse">
-            <a:avLst/>
-          </a:prstGeom>
-          <a:solidFill>
-            <a:srgbClr val="942838"/>
-          </a:solidFill>
-          <a:ln/>
-        </p:spPr>
-      </p:sp>
-      <p:sp>
-        <p:nvSpPr>
-          <p:cNvPr id="30" name="Text 27"/>
-          <p:cNvSpPr txBox="1"/>
-          <p:nvPr/>
-        </p:nvSpPr>
-        <p:spPr>
-          <a:xfrm>
-            <a:off x="996696" y="5504688"/>
-            <a:ext cx="10417759" cy="219456"/>
-          </a:xfrm>
-          <a:prstGeom prst="rect">
-            <a:avLst/>
-          </a:prstGeom>
-          <a:noFill/>
-          <a:ln/>
-        </p:spPr>
-        <p:txBody>
-          <a:bodyPr wrap="square" lIns="0" tIns="0" rIns="0" bIns="0" rtlCol="0" anchor="t"/>
-          <a:lstStyle/>
-          <a:p>
-            <a:pPr indent="0" marL="0">
-              <a:buNone/>
-            </a:pPr>
-            <a:r>
-              <a:rPr lang="en-US" sz="1050" dirty="0">
-                <a:solidFill>
-                  <a:srgbClr val="6E7175"/>
-                </a:solidFill>
-                <a:latin typeface="Montserrat" pitchFamily="34" charset="0"/>
-                <a:ea typeface="Montserrat" pitchFamily="34" charset="-122"/>
-                <a:cs typeface="Montserrat" pitchFamily="34" charset="-120"/>
-              </a:rPr>
-              <a:t>None of the 28 are on the US government's actively-exploited list.</a:t>
-            </a:r>
-            <a:endParaRPr lang="en-US" sz="1050" dirty="0"/>
-          </a:p>
-        </p:txBody>
-      </p:sp>
-      <p:sp>
-        <p:nvSpPr>
-          <p:cNvPr id="31" name="Shape 28"/>
-          <p:cNvSpPr/>
-          <p:nvPr/>
-        </p:nvSpPr>
-        <p:spPr>
-          <a:xfrm>
-            <a:off x="795528" y="5797296"/>
-            <a:ext cx="73152" cy="73152"/>
-          </a:xfrm>
-          <a:prstGeom prst="ellipse">
-            <a:avLst/>
-          </a:prstGeom>
-          <a:solidFill>
-            <a:srgbClr val="942838"/>
-          </a:solidFill>
-          <a:ln/>
-        </p:spPr>
-      </p:sp>
-      <p:sp>
-        <p:nvSpPr>
-          <p:cNvPr id="32" name="Text 29"/>
-          <p:cNvSpPr txBox="1"/>
-          <p:nvPr/>
-        </p:nvSpPr>
-        <p:spPr>
-          <a:xfrm>
-            <a:off x="996696" y="5733288"/>
-            <a:ext cx="10417759" cy="219456"/>
-          </a:xfrm>
-          <a:prstGeom prst="rect">
-            <a:avLst/>
-          </a:prstGeom>
-          <a:noFill/>
-          <a:ln/>
-        </p:spPr>
-        <p:txBody>
-          <a:bodyPr wrap="square" lIns="0" tIns="0" rIns="0" bIns="0" rtlCol="0" anchor="t"/>
-          <a:lstStyle/>
-          <a:p>
-            <a:pPr indent="0" marL="0">
-              <a:buNone/>
-            </a:pPr>
-            <a:r>
-              <a:rPr lang="en-US" sz="1050" dirty="0">
-                <a:solidFill>
-                  <a:srgbClr val="6E7175"/>
-                </a:solidFill>
-                <a:latin typeface="Montserrat" pitchFamily="34" charset="0"/>
-                <a:ea typeface="Montserrat" pitchFamily="34" charset="-122"/>
-                <a:cs typeface="Montserrat" pitchFamily="34" charset="-120"/>
-              </a:rPr>
-              <a:t>All three needing a decision have a non-breaking upgrade available, and the repo's own tests can verify it.</a:t>
-            </a:r>
-            <a:endParaRPr lang="en-US" sz="1050" dirty="0"/>
-          </a:p>
-        </p:txBody>
-      </p:sp>
-      <p:sp>
-        <p:nvSpPr>
-          <p:cNvPr id="33" name="Shape 30"/>
-          <p:cNvSpPr/>
-          <p:nvPr/>
-        </p:nvSpPr>
-        <p:spPr>
-          <a:xfrm>
-            <a:off x="795528" y="6025896"/>
-            <a:ext cx="73152" cy="73152"/>
-          </a:xfrm>
-          <a:prstGeom prst="ellipse">
-            <a:avLst/>
-          </a:prstGeom>
-          <a:solidFill>
-            <a:srgbClr val="942838"/>
-          </a:solidFill>
-          <a:ln/>
-        </p:spPr>
-      </p:sp>
-      <p:sp>
-        <p:nvSpPr>
-          <p:cNvPr id="34" name="Text 31"/>
-          <p:cNvSpPr txBox="1"/>
-          <p:nvPr/>
-        </p:nvSpPr>
-        <p:spPr>
-          <a:xfrm>
-            <a:off x="996696" y="5961888"/>
-            <a:ext cx="10417759" cy="219456"/>
-          </a:xfrm>
-          <a:prstGeom prst="rect">
-            <a:avLst/>
-          </a:prstGeom>
-          <a:noFill/>
-          <a:ln/>
-        </p:spPr>
-        <p:txBody>
-          <a:bodyPr wrap="square" lIns="0" tIns="0" rIns="0" bIns="0" rtlCol="0" anchor="t"/>
-          <a:lstStyle/>
-          <a:p>
-            <a:pPr indent="0" marL="0">
-              <a:buNone/>
-            </a:pPr>
-            <a:r>
-              <a:rPr lang="en-US" sz="1050" dirty="0">
-                <a:solidFill>
-                  <a:srgbClr val="6E7175"/>
-                </a:solidFill>
-                <a:latin typeface="Montserrat" pitchFamily="34" charset="0"/>
-                <a:ea typeface="Montserrat" pitchFamily="34" charset="-122"/>
-                <a:cs typeface="Montserrat" pitchFamily="34" charset="-120"/>
-              </a:rPr>
-              <a:t>The scan was read-only. Nothing in the repository was changed.</a:t>
-            </a:r>
-            <a:endParaRPr lang="en-US" sz="1050" dirty="0"/>
+              <a:t>Two of the three could not be ruled out, and AEGIS kept them on the list rather than calling them safe — but the same upgrade covers them, so the caution costs nothing. None of the 28 appear on the US government's actively-exploited list.</a:t>
+            </a:r>
+            <a:endParaRPr lang="en-US" sz="950" dirty="0"/>
           </a:p>
         </p:txBody>
       </p:sp>
@@ -8823,183 +8943,6 @@
             <a:prstDash val="solid"/>
           </a:ln>
           <a:effectLst>
-            <a:outerShdw sx="100000" sy="100000" kx="0" ky="0" algn="bl" rotWithShape="0" blurRad="2.6903568989001962e+91" dist="6.7258922472504905e+90" dir="1.1845953345804043e+107">
-              <a:srgbClr val="959092">
-                <a:alpha val="2.2000000000000003e+109"/>
-              </a:srgbClr>
-            </a:outerShdw>
-          </a:effectLst>
-        </p:spPr>
-      </p:sp>
-      <p:sp>
-        <p:nvSpPr>
-          <p:cNvPr id="11" name="Shape 8"/>
-          <p:cNvSpPr/>
-          <p:nvPr/>
-        </p:nvSpPr>
-        <p:spPr>
-          <a:xfrm>
-            <a:off x="777240" y="2523744"/>
-            <a:ext cx="3356762" cy="45720"/>
-          </a:xfrm>
-          <a:prstGeom prst="rect">
-            <a:avLst/>
-          </a:prstGeom>
-          <a:solidFill>
-            <a:srgbClr val="942838"/>
-          </a:solidFill>
-          <a:ln/>
-        </p:spPr>
-      </p:sp>
-      <p:sp>
-        <p:nvSpPr>
-          <p:cNvPr id="12" name="Text 9"/>
-          <p:cNvSpPr txBox="1"/>
-          <p:nvPr/>
-        </p:nvSpPr>
-        <p:spPr>
-          <a:xfrm>
-            <a:off x="1088136" y="2798064"/>
-            <a:ext cx="914400" cy="310896"/>
-          </a:xfrm>
-          <a:prstGeom prst="rect">
-            <a:avLst/>
-          </a:prstGeom>
-          <a:noFill/>
-          <a:ln/>
-        </p:spPr>
-        <p:txBody>
-          <a:bodyPr wrap="square" lIns="0" tIns="0" rIns="0" bIns="0" rtlCol="0" anchor="t"/>
-          <a:lstStyle/>
-          <a:p>
-            <a:pPr indent="0" marL="0">
-              <a:buNone/>
-            </a:pPr>
-            <a:r>
-              <a:rPr lang="en-US" sz="2000" spc="-30" kern="0" dirty="0">
-                <a:solidFill>
-                  <a:srgbClr val="DFBEC4"/>
-                </a:solidFill>
-                <a:latin typeface="Montserrat ExtraBold" pitchFamily="34" charset="0"/>
-                <a:ea typeface="Montserrat ExtraBold" pitchFamily="34" charset="-122"/>
-                <a:cs typeface="Montserrat ExtraBold" pitchFamily="34" charset="-120"/>
-              </a:rPr>
-              <a:t>01</a:t>
-            </a:r>
-            <a:endParaRPr lang="en-US" sz="2000" dirty="0"/>
-          </a:p>
-        </p:txBody>
-      </p:sp>
-      <p:sp>
-        <p:nvSpPr>
-          <p:cNvPr id="13" name="Text 10"/>
-          <p:cNvSpPr txBox="1"/>
-          <p:nvPr/>
-        </p:nvSpPr>
-        <p:spPr>
-          <a:xfrm>
-            <a:off x="1088136" y="3182112"/>
-            <a:ext cx="2734970" cy="566928"/>
-          </a:xfrm>
-          <a:prstGeom prst="rect">
-            <a:avLst/>
-          </a:prstGeom>
-          <a:noFill/>
-          <a:ln/>
-        </p:spPr>
-        <p:txBody>
-          <a:bodyPr wrap="square" lIns="0" tIns="0" rIns="0" bIns="0" rtlCol="0" anchor="t"/>
-          <a:lstStyle/>
-          <a:p>
-            <a:pPr indent="0" marL="0">
-              <a:lnSpc>
-                <a:spcPct val="108000"/>
-              </a:lnSpc>
-              <a:buNone/>
-            </a:pPr>
-            <a:r>
-              <a:rPr lang="en-US" sz="1450" dirty="0">
-                <a:solidFill>
-                  <a:srgbClr val="2B2D30"/>
-                </a:solidFill>
-                <a:latin typeface="Montserrat SemiBold" pitchFamily="34" charset="0"/>
-                <a:ea typeface="Montserrat SemiBold" pitchFamily="34" charset="-122"/>
-                <a:cs typeface="Montserrat SemiBold" pitchFamily="34" charset="-120"/>
-              </a:rPr>
-              <a:t>Teach it the framework packages</a:t>
-            </a:r>
-            <a:endParaRPr lang="en-US" sz="1450" dirty="0"/>
-          </a:p>
-        </p:txBody>
-      </p:sp>
-      <p:sp>
-        <p:nvSpPr>
-          <p:cNvPr id="14" name="Text 11"/>
-          <p:cNvSpPr txBox="1"/>
-          <p:nvPr/>
-        </p:nvSpPr>
-        <p:spPr>
-          <a:xfrm>
-            <a:off x="1088136" y="3822192"/>
-            <a:ext cx="2734970" cy="1737360"/>
-          </a:xfrm>
-          <a:prstGeom prst="rect">
-            <a:avLst/>
-          </a:prstGeom>
-          <a:noFill/>
-          <a:ln/>
-        </p:spPr>
-        <p:txBody>
-          <a:bodyPr wrap="square" lIns="0" tIns="0" rIns="0" bIns="0" rtlCol="0" anchor="t"/>
-          <a:lstStyle/>
-          <a:p>
-            <a:pPr indent="0" marL="0">
-              <a:lnSpc>
-                <a:spcPct val="126000"/>
-              </a:lnSpc>
-              <a:buNone/>
-            </a:pPr>
-            <a:r>
-              <a:rPr lang="en-US" sz="1100" dirty="0">
-                <a:solidFill>
-                  <a:srgbClr val="6E7175"/>
-                </a:solidFill>
-                <a:latin typeface="Montserrat" pitchFamily="34" charset="0"/>
-                <a:ea typeface="Montserrat" pitchFamily="34" charset="-122"/>
-                <a:cs typeface="Montserrat" pitchFamily="34" charset="-120"/>
-              </a:rPr>
-              <a:t>AEGIS knows exactly which function is the dangerous one for about nine packages. Angular is not among them yet — which is why two findings came back "can't prove" instead of a straight answer. Extending that list turns those into a verdict.</a:t>
-            </a:r>
-            <a:endParaRPr lang="en-US" sz="1100" dirty="0"/>
-          </a:p>
-        </p:txBody>
-      </p:sp>
-      <p:sp>
-        <p:nvSpPr>
-          <p:cNvPr id="15" name="Shape 12"/>
-          <p:cNvSpPr/>
-          <p:nvPr/>
-        </p:nvSpPr>
-        <p:spPr>
-          <a:xfrm>
-            <a:off x="4417466" y="2523744"/>
-            <a:ext cx="3356762" cy="3145536"/>
-          </a:xfrm>
-          <a:prstGeom prst="roundRect">
-            <a:avLst>
-              <a:gd name="adj" fmla="val 1744"/>
-            </a:avLst>
-          </a:prstGeom>
-          <a:solidFill>
-            <a:srgbClr val="FFFFFF"/>
-          </a:solidFill>
-          <a:ln w="9525">
-            <a:solidFill>
-              <a:srgbClr val="E6E4E2"/>
-            </a:solidFill>
-            <a:prstDash val="solid"/>
-          </a:ln>
-          <a:effectLst>
             <a:outerShdw sx="100000" sy="100000" kx="0" ky="0" algn="bl" rotWithShape="0" blurRad="3.416753261603249e+95" dist="8.541883154008123e+94" dir="7.107572007482426e+111">
               <a:srgbClr val="959092">
                 <a:alpha val="2.2000000000000003e+114"/>
@@ -9010,13 +8953,13 @@
       </p:sp>
       <p:sp>
         <p:nvSpPr>
-          <p:cNvPr id="16" name="Shape 13"/>
+          <p:cNvPr id="11" name="Shape 8"/>
           <p:cNvSpPr/>
           <p:nvPr/>
         </p:nvSpPr>
         <p:spPr>
           <a:xfrm>
-            <a:off x="4417466" y="2523744"/>
+            <a:off x="777240" y="2523744"/>
             <a:ext cx="3356762" cy="45720"/>
           </a:xfrm>
           <a:prstGeom prst="rect">
@@ -9030,13 +8973,13 @@
       </p:sp>
       <p:sp>
         <p:nvSpPr>
-          <p:cNvPr id="17" name="Text 14"/>
-          <p:cNvSpPr txBox="1"/>
-          <p:nvPr/>
-        </p:nvSpPr>
-        <p:spPr>
-          <a:xfrm>
-            <a:off x="4728362" y="2798064"/>
+          <p:cNvPr id="12" name="Text 9"/>
+          <p:cNvSpPr txBox="1"/>
+          <p:nvPr/>
+        </p:nvSpPr>
+        <p:spPr>
+          <a:xfrm>
+            <a:off x="1088136" y="2798064"/>
             <a:ext cx="914400" cy="310896"/>
           </a:xfrm>
           <a:prstGeom prst="rect">
@@ -9061,7 +9004,7 @@
                 <a:ea typeface="Montserrat ExtraBold" pitchFamily="34" charset="-122"/>
                 <a:cs typeface="Montserrat ExtraBold" pitchFamily="34" charset="-120"/>
               </a:rPr>
-              <a:t>02</a:t>
+              <a:t>01</a:t>
             </a:r>
             <a:endParaRPr lang="en-US" sz="2000" dirty="0"/>
           </a:p>
@@ -9069,13 +9012,13 @@
       </p:sp>
       <p:sp>
         <p:nvSpPr>
-          <p:cNvPr id="18" name="Text 15"/>
-          <p:cNvSpPr txBox="1"/>
-          <p:nvPr/>
-        </p:nvSpPr>
-        <p:spPr>
-          <a:xfrm>
-            <a:off x="4728362" y="3182112"/>
+          <p:cNvPr id="13" name="Text 10"/>
+          <p:cNvSpPr txBox="1"/>
+          <p:nvPr/>
+        </p:nvSpPr>
+        <p:spPr>
+          <a:xfrm>
+            <a:off x="1088136" y="3182112"/>
             <a:ext cx="2734970" cy="566928"/>
           </a:xfrm>
           <a:prstGeom prst="rect">
@@ -9103,7 +9046,7 @@
                 <a:ea typeface="Montserrat SemiBold" pitchFamily="34" charset="-122"/>
                 <a:cs typeface="Montserrat SemiBold" pitchFamily="34" charset="-120"/>
               </a:rPr>
-              <a:t>Keep the live lookups working everywhere</a:t>
+              <a:t>Teach it the framework packages</a:t>
             </a:r>
             <a:endParaRPr lang="en-US" sz="1450" dirty="0"/>
           </a:p>
@@ -9111,13 +9054,13 @@
       </p:sp>
       <p:sp>
         <p:nvSpPr>
-          <p:cNvPr id="19" name="Text 16"/>
-          <p:cNvSpPr txBox="1"/>
-          <p:nvPr/>
-        </p:nvSpPr>
-        <p:spPr>
-          <a:xfrm>
-            <a:off x="4728362" y="3822192"/>
+          <p:cNvPr id="14" name="Text 11"/>
+          <p:cNvSpPr txBox="1"/>
+          <p:nvPr/>
+        </p:nvSpPr>
+        <p:spPr>
+          <a:xfrm>
+            <a:off x="1088136" y="3822192"/>
             <a:ext cx="2734970" cy="1737360"/>
           </a:xfrm>
           <a:prstGeom prst="rect">
@@ -9145,7 +9088,7 @@
                 <a:ea typeface="Montserrat" pitchFamily="34" charset="-122"/>
                 <a:cs typeface="Montserrat" pitchFamily="34" charset="-120"/>
               </a:rPr>
-              <a:t>This run pulled real flaw data live. On networks where the security proxy inspects traffic it still fails, so the split-scan workaround stays until an inspection bypass is in place.</a:t>
+              <a:t>AEGIS knows exactly which function is the dangerous one for about nine packages. Angular is not among them yet — which is why two findings came back "can't prove" instead of a straight answer. Extending that list turns those into a verdict.</a:t>
             </a:r>
             <a:endParaRPr lang="en-US" sz="1100" dirty="0"/>
           </a:p>
@@ -9153,13 +9096,13 @@
       </p:sp>
       <p:sp>
         <p:nvSpPr>
-          <p:cNvPr id="20" name="Shape 17"/>
+          <p:cNvPr id="15" name="Shape 12"/>
           <p:cNvSpPr/>
           <p:nvPr/>
         </p:nvSpPr>
         <p:spPr>
           <a:xfrm>
-            <a:off x="8057693" y="2523744"/>
+            <a:off x="4417466" y="2523744"/>
             <a:ext cx="3356762" cy="3145536"/>
           </a:xfrm>
           <a:prstGeom prst="roundRect">
@@ -9180,6 +9123,183 @@
             <a:outerShdw sx="100000" sy="100000" kx="0" ky="0" algn="bl" rotWithShape="0" blurRad="4.3392766422361264e+99" dist="1.0848191605590316e+99" dir="4.2645432044894554e+116">
               <a:srgbClr val="959092">
                 <a:alpha val="2.2000000000000005e+119"/>
+              </a:srgbClr>
+            </a:outerShdw>
+          </a:effectLst>
+        </p:spPr>
+      </p:sp>
+      <p:sp>
+        <p:nvSpPr>
+          <p:cNvPr id="16" name="Shape 13"/>
+          <p:cNvSpPr/>
+          <p:nvPr/>
+        </p:nvSpPr>
+        <p:spPr>
+          <a:xfrm>
+            <a:off x="4417466" y="2523744"/>
+            <a:ext cx="3356762" cy="45720"/>
+          </a:xfrm>
+          <a:prstGeom prst="rect">
+            <a:avLst/>
+          </a:prstGeom>
+          <a:solidFill>
+            <a:srgbClr val="942838"/>
+          </a:solidFill>
+          <a:ln/>
+        </p:spPr>
+      </p:sp>
+      <p:sp>
+        <p:nvSpPr>
+          <p:cNvPr id="17" name="Text 14"/>
+          <p:cNvSpPr txBox="1"/>
+          <p:nvPr/>
+        </p:nvSpPr>
+        <p:spPr>
+          <a:xfrm>
+            <a:off x="4728362" y="2798064"/>
+            <a:ext cx="914400" cy="310896"/>
+          </a:xfrm>
+          <a:prstGeom prst="rect">
+            <a:avLst/>
+          </a:prstGeom>
+          <a:noFill/>
+          <a:ln/>
+        </p:spPr>
+        <p:txBody>
+          <a:bodyPr wrap="square" lIns="0" tIns="0" rIns="0" bIns="0" rtlCol="0" anchor="t"/>
+          <a:lstStyle/>
+          <a:p>
+            <a:pPr indent="0" marL="0">
+              <a:buNone/>
+            </a:pPr>
+            <a:r>
+              <a:rPr lang="en-US" sz="2000" spc="-30" kern="0" dirty="0">
+                <a:solidFill>
+                  <a:srgbClr val="DFBEC4"/>
+                </a:solidFill>
+                <a:latin typeface="Montserrat ExtraBold" pitchFamily="34" charset="0"/>
+                <a:ea typeface="Montserrat ExtraBold" pitchFamily="34" charset="-122"/>
+                <a:cs typeface="Montserrat ExtraBold" pitchFamily="34" charset="-120"/>
+              </a:rPr>
+              <a:t>02</a:t>
+            </a:r>
+            <a:endParaRPr lang="en-US" sz="2000" dirty="0"/>
+          </a:p>
+        </p:txBody>
+      </p:sp>
+      <p:sp>
+        <p:nvSpPr>
+          <p:cNvPr id="18" name="Text 15"/>
+          <p:cNvSpPr txBox="1"/>
+          <p:nvPr/>
+        </p:nvSpPr>
+        <p:spPr>
+          <a:xfrm>
+            <a:off x="4728362" y="3182112"/>
+            <a:ext cx="2734970" cy="566928"/>
+          </a:xfrm>
+          <a:prstGeom prst="rect">
+            <a:avLst/>
+          </a:prstGeom>
+          <a:noFill/>
+          <a:ln/>
+        </p:spPr>
+        <p:txBody>
+          <a:bodyPr wrap="square" lIns="0" tIns="0" rIns="0" bIns="0" rtlCol="0" anchor="t"/>
+          <a:lstStyle/>
+          <a:p>
+            <a:pPr indent="0" marL="0">
+              <a:lnSpc>
+                <a:spcPct val="108000"/>
+              </a:lnSpc>
+              <a:buNone/>
+            </a:pPr>
+            <a:r>
+              <a:rPr lang="en-US" sz="1450" dirty="0">
+                <a:solidFill>
+                  <a:srgbClr val="2B2D30"/>
+                </a:solidFill>
+                <a:latin typeface="Montserrat SemiBold" pitchFamily="34" charset="0"/>
+                <a:ea typeface="Montserrat SemiBold" pitchFamily="34" charset="-122"/>
+                <a:cs typeface="Montserrat SemiBold" pitchFamily="34" charset="-120"/>
+              </a:rPr>
+              <a:t>Keep the live lookups working everywhere</a:t>
+            </a:r>
+            <a:endParaRPr lang="en-US" sz="1450" dirty="0"/>
+          </a:p>
+        </p:txBody>
+      </p:sp>
+      <p:sp>
+        <p:nvSpPr>
+          <p:cNvPr id="19" name="Text 16"/>
+          <p:cNvSpPr txBox="1"/>
+          <p:nvPr/>
+        </p:nvSpPr>
+        <p:spPr>
+          <a:xfrm>
+            <a:off x="4728362" y="3822192"/>
+            <a:ext cx="2734970" cy="1737360"/>
+          </a:xfrm>
+          <a:prstGeom prst="rect">
+            <a:avLst/>
+          </a:prstGeom>
+          <a:noFill/>
+          <a:ln/>
+        </p:spPr>
+        <p:txBody>
+          <a:bodyPr wrap="square" lIns="0" tIns="0" rIns="0" bIns="0" rtlCol="0" anchor="t"/>
+          <a:lstStyle/>
+          <a:p>
+            <a:pPr indent="0" marL="0">
+              <a:lnSpc>
+                <a:spcPct val="126000"/>
+              </a:lnSpc>
+              <a:buNone/>
+            </a:pPr>
+            <a:r>
+              <a:rPr lang="en-US" sz="1100" dirty="0">
+                <a:solidFill>
+                  <a:srgbClr val="6E7175"/>
+                </a:solidFill>
+                <a:latin typeface="Montserrat" pitchFamily="34" charset="0"/>
+                <a:ea typeface="Montserrat" pitchFamily="34" charset="-122"/>
+                <a:cs typeface="Montserrat" pitchFamily="34" charset="-120"/>
+              </a:rPr>
+              <a:t>This run pulled real flaw data live. On networks where the security proxy inspects traffic it still fails, so the split-scan workaround stays until an inspection bypass is in place.</a:t>
+            </a:r>
+            <a:endParaRPr lang="en-US" sz="1100" dirty="0"/>
+          </a:p>
+        </p:txBody>
+      </p:sp>
+      <p:sp>
+        <p:nvSpPr>
+          <p:cNvPr id="20" name="Shape 17"/>
+          <p:cNvSpPr/>
+          <p:nvPr/>
+        </p:nvSpPr>
+        <p:spPr>
+          <a:xfrm>
+            <a:off x="8057693" y="2523744"/>
+            <a:ext cx="3356762" cy="3145536"/>
+          </a:xfrm>
+          <a:prstGeom prst="roundRect">
+            <a:avLst>
+              <a:gd name="adj" fmla="val 1744"/>
+            </a:avLst>
+          </a:prstGeom>
+          <a:solidFill>
+            <a:srgbClr val="FFFFFF"/>
+          </a:solidFill>
+          <a:ln w="9525">
+            <a:solidFill>
+              <a:srgbClr val="E6E4E2"/>
+            </a:solidFill>
+            <a:prstDash val="solid"/>
+          </a:ln>
+          <a:effectLst>
+            <a:outerShdw sx="100000" sy="100000" kx="0" ky="0" algn="bl" rotWithShape="0" blurRad="5.510881335639881e+103" dist="1.3777203339099702e+103" dir="2.5587259226936733e+121">
+              <a:srgbClr val="959092">
+                <a:alpha val="2.2000000000000006e+124"/>
               </a:srgbClr>
             </a:outerShdw>
           </a:effectLst>
@@ -10926,9 +11046,9 @@
             <a:prstDash val="solid"/>
           </a:ln>
           <a:effectLst>
-            <a:outerShdw sx="100000" sy="100000" kx="0" ky="0" algn="bl" rotWithShape="0" blurRad="5.510881335639881e+103" dist="1.3777203339099702e+103" dir="2.5587259226936733e+121">
+            <a:outerShdw sx="100000" sy="100000" kx="0" ky="0" algn="bl" rotWithShape="0" blurRad="6.998819296262648e+107" dist="1.749704824065662e+107" dir="1.535235553616204e+126">
               <a:srgbClr val="959092">
-                <a:alpha val="2.2000000000000006e+124"/>
+                <a:alpha val="2.2000000000000006e+129"/>
               </a:srgbClr>
             </a:outerShdw>
           </a:effectLst>
@@ -11041,9 +11161,9 @@
             <a:prstDash val="solid"/>
           </a:ln>
           <a:effectLst>
-            <a:outerShdw sx="100000" sy="100000" kx="0" ky="0" algn="bl" rotWithShape="0" blurRad="6.998819296262648e+107" dist="1.749704824065662e+107" dir="1.535235553616204e+126">
+            <a:outerShdw sx="100000" sy="100000" kx="0" ky="0" algn="bl" rotWithShape="0" blurRad="8.888500506253563e+111" dist="2.2221251265633907e+111" dir="9.211413321697224e+130">
               <a:srgbClr val="959092">
-                <a:alpha val="2.2000000000000006e+129"/>
+                <a:alpha val="2.2000000000000004e+134"/>
               </a:srgbClr>
             </a:outerShdw>
           </a:effectLst>
@@ -11156,9 +11276,9 @@
             <a:prstDash val="solid"/>
           </a:ln>
           <a:effectLst>
-            <a:outerShdw sx="100000" sy="100000" kx="0" ky="0" algn="bl" rotWithShape="0" blurRad="8.888500506253563e+111" dist="2.2221251265633907e+111" dir="9.211413321697224e+130">
+            <a:outerShdw sx="100000" sy="100000" kx="0" ky="0" algn="bl" rotWithShape="0" blurRad="1.1288395642942025e+116" dist="2.822098910735506e+115" dir="5.526847993018334e+135">
               <a:srgbClr val="959092">
-                <a:alpha val="2.2000000000000004e+134"/>
+                <a:alpha val="2.2000000000000005e+139"/>
               </a:srgbClr>
             </a:outerShdw>
           </a:effectLst>
@@ -11684,9 +11804,9 @@
             <a:prstDash val="solid"/>
           </a:ln>
           <a:effectLst>
-            <a:outerShdw sx="100000" sy="100000" kx="0" ky="0" algn="bl" rotWithShape="0" blurRad="1.1288395642942025e+116" dist="2.822098910735506e+115" dir="5.526847993018334e+135">
+            <a:outerShdw sx="100000" sy="100000" kx="0" ky="0" algn="bl" rotWithShape="0" blurRad="1.433626246653637e+120" dist="3.584065616634093e+119" dir="3.3161087958110005e+140">
               <a:srgbClr val="959092">
-                <a:alpha val="2.2000000000000005e+139"/>
+                <a:alpha val="2.2000000000000006e+144"/>
               </a:srgbClr>
             </a:outerShdw>
           </a:effectLst>
@@ -11819,9 +11939,9 @@
             <a:prstDash val="solid"/>
           </a:ln>
           <a:effectLst>
-            <a:outerShdw sx="100000" sy="100000" kx="0" ky="0" algn="bl" rotWithShape="0" blurRad="1.433626246653637e+120" dist="3.584065616634093e+119" dir="3.3161087958110005e+140">
+            <a:outerShdw sx="100000" sy="100000" kx="0" ky="0" algn="bl" rotWithShape="0" blurRad="1.8207053332501191e+124" dist="4.551763333125298e+123" dir="1.9896652774866004e+145">
               <a:srgbClr val="959092">
-                <a:alpha val="2.2000000000000006e+144"/>
+                <a:alpha val="2.2000000000000004e+149"/>
               </a:srgbClr>
             </a:outerShdw>
           </a:effectLst>
@@ -13431,9 +13551,9 @@
             <a:prstDash val="solid"/>
           </a:ln>
           <a:effectLst>
-            <a:outerShdw sx="100000" sy="100000" kx="0" ky="0" algn="bl" rotWithShape="0" blurRad="1.8207053332501191e+124" dist="4.551763333125298e+123" dir="1.9896652774866004e+145">
+            <a:outerShdw sx="100000" sy="100000" kx="0" ky="0" algn="bl" rotWithShape="0" blurRad="2.312295773227651e+128" dist="5.780739433069128e+127" dir="1.1937991664919603e+150">
               <a:srgbClr val="959092">
-                <a:alpha val="2.2000000000000004e+149"/>
+                <a:alpha val="2.2000000000000004e+154"/>
               </a:srgbClr>
             </a:outerShdw>
           </a:effectLst>
@@ -14591,9 +14711,9 @@
             <a:prstDash val="solid"/>
           </a:ln>
           <a:effectLst>
-            <a:outerShdw sx="100000" sy="100000" kx="0" ky="0" algn="bl" rotWithShape="0" blurRad="2.312295773227651e+128" dist="5.780739433069128e+127" dir="1.1937991664919603e+150">
+            <a:outerShdw sx="100000" sy="100000" kx="0" ky="0" algn="bl" rotWithShape="0" blurRad="2.936615631999117e+132" dist="7.341539079997793e+131" dir="7.162794998951762e+154">
               <a:srgbClr val="959092">
-                <a:alpha val="2.2000000000000004e+154"/>
+                <a:alpha val="2.2000000000000003e+159"/>
               </a:srgbClr>
             </a:outerShdw>
           </a:effectLst>
@@ -14979,121 +15099,6 @@
             <a:prstDash val="solid"/>
           </a:ln>
           <a:effectLst>
-            <a:outerShdw sx="100000" sy="100000" kx="0" ky="0" algn="bl" rotWithShape="0" blurRad="2.936615631999117e+132" dist="7.341539079997793e+131" dir="7.162794998951762e+154">
-              <a:srgbClr val="959092">
-                <a:alpha val="2.2000000000000003e+159"/>
-              </a:srgbClr>
-            </a:outerShdw>
-          </a:effectLst>
-        </p:spPr>
-      </p:sp>
-      <p:sp>
-        <p:nvSpPr>
-          <p:cNvPr id="22" name="Text 19"/>
-          <p:cNvSpPr txBox="1"/>
-          <p:nvPr/>
-        </p:nvSpPr>
-        <p:spPr>
-          <a:xfrm>
-            <a:off x="6894576" y="3017520"/>
-            <a:ext cx="1146962" cy="640080"/>
-          </a:xfrm>
-          <a:prstGeom prst="rect">
-            <a:avLst/>
-          </a:prstGeom>
-          <a:noFill/>
-          <a:ln/>
-        </p:spPr>
-        <p:txBody>
-          <a:bodyPr wrap="square" lIns="0" tIns="0" rIns="0" bIns="0" rtlCol="0" anchor="t"/>
-          <a:lstStyle/>
-          <a:p>
-            <a:pPr algn="ctr" indent="0" marL="0">
-              <a:buNone/>
-            </a:pPr>
-            <a:r>
-              <a:rPr lang="en-US" sz="4000" spc="-160" kern="0" dirty="0">
-                <a:solidFill>
-                  <a:srgbClr val="2B2D30"/>
-                </a:solidFill>
-                <a:latin typeface="Montserrat ExtraBold" pitchFamily="34" charset="0"/>
-                <a:ea typeface="Montserrat ExtraBold" pitchFamily="34" charset="-122"/>
-                <a:cs typeface="Montserrat ExtraBold" pitchFamily="34" charset="-120"/>
-              </a:rPr>
-              <a:t>209</a:t>
-            </a:r>
-            <a:endParaRPr lang="en-US" sz="4000" dirty="0"/>
-          </a:p>
-        </p:txBody>
-      </p:sp>
-      <p:sp>
-        <p:nvSpPr>
-          <p:cNvPr id="23" name="Text 20"/>
-          <p:cNvSpPr txBox="1"/>
-          <p:nvPr/>
-        </p:nvSpPr>
-        <p:spPr>
-          <a:xfrm>
-            <a:off x="6894576" y="3730752"/>
-            <a:ext cx="1146962" cy="457200"/>
-          </a:xfrm>
-          <a:prstGeom prst="rect">
-            <a:avLst/>
-          </a:prstGeom>
-          <a:noFill/>
-          <a:ln/>
-        </p:spPr>
-        <p:txBody>
-          <a:bodyPr wrap="square" lIns="0" tIns="0" rIns="0" bIns="0" rtlCol="0" anchor="t"/>
-          <a:lstStyle/>
-          <a:p>
-            <a:pPr algn="ctr" indent="0" marL="0">
-              <a:lnSpc>
-                <a:spcPct val="120000"/>
-              </a:lnSpc>
-              <a:buNone/>
-            </a:pPr>
-            <a:r>
-              <a:rPr lang="en-US" sz="950" spc="30" kern="0" dirty="0">
-                <a:solidFill>
-                  <a:srgbClr val="6E7175"/>
-                </a:solidFill>
-                <a:latin typeface="Montserrat Medium" pitchFamily="34" charset="0"/>
-                <a:ea typeface="Montserrat Medium" pitchFamily="34" charset="-122"/>
-                <a:cs typeface="Montserrat Medium" pitchFamily="34" charset="-120"/>
-              </a:rPr>
-              <a:t>rows on Kevlar’s list</a:t>
-            </a:r>
-            <a:endParaRPr lang="en-US" sz="950" dirty="0"/>
-          </a:p>
-        </p:txBody>
-      </p:sp>
-      <p:sp>
-        <p:nvSpPr>
-          <p:cNvPr id="24" name="Shape 21"/>
-          <p:cNvSpPr/>
-          <p:nvPr/>
-        </p:nvSpPr>
-        <p:spPr>
-          <a:xfrm>
-            <a:off x="8389010" y="2633472"/>
-            <a:ext cx="1402994" cy="1627632"/>
-          </a:xfrm>
-          <a:prstGeom prst="roundRect">
-            <a:avLst>
-              <a:gd name="adj" fmla="val 3910"/>
-            </a:avLst>
-          </a:prstGeom>
-          <a:solidFill>
-            <a:srgbClr val="F6EEF0"/>
-          </a:solidFill>
-          <a:ln w="9525">
-            <a:solidFill>
-              <a:srgbClr val="942838"/>
-            </a:solidFill>
-            <a:prstDash val="solid"/>
-          </a:ln>
-          <a:effectLst>
             <a:outerShdw sx="100000" sy="100000" kx="0" ky="0" algn="bl" rotWithShape="0" blurRad="3.729501852638879e+136" dist="9.323754631597197e+135" dir="4.297676999371057e+159">
               <a:srgbClr val="959092">
                 <a:alpha val="2.2000000000000003e+164"/>
@@ -15104,13 +15109,13 @@
       </p:sp>
       <p:sp>
         <p:nvSpPr>
-          <p:cNvPr id="25" name="Text 22"/>
-          <p:cNvSpPr txBox="1"/>
-          <p:nvPr/>
-        </p:nvSpPr>
-        <p:spPr>
-          <a:xfrm>
-            <a:off x="8517026" y="3017520"/>
+          <p:cNvPr id="22" name="Text 19"/>
+          <p:cNvSpPr txBox="1"/>
+          <p:nvPr/>
+        </p:nvSpPr>
+        <p:spPr>
+          <a:xfrm>
+            <a:off x="6894576" y="3017520"/>
             <a:ext cx="1146962" cy="640080"/>
           </a:xfrm>
           <a:prstGeom prst="rect">
@@ -15129,13 +15134,13 @@
             <a:r>
               <a:rPr lang="en-US" sz="4000" spc="-160" kern="0" dirty="0">
                 <a:solidFill>
-                  <a:srgbClr val="942838"/>
+                  <a:srgbClr val="2B2D30"/>
                 </a:solidFill>
                 <a:latin typeface="Montserrat ExtraBold" pitchFamily="34" charset="0"/>
                 <a:ea typeface="Montserrat ExtraBold" pitchFamily="34" charset="-122"/>
                 <a:cs typeface="Montserrat ExtraBold" pitchFamily="34" charset="-120"/>
               </a:rPr>
-              <a:t>46</a:t>
+              <a:t>209</a:t>
             </a:r>
             <a:endParaRPr lang="en-US" sz="4000" dirty="0"/>
           </a:p>
@@ -15143,13 +15148,13 @@
       </p:sp>
       <p:sp>
         <p:nvSpPr>
-          <p:cNvPr id="26" name="Text 23"/>
-          <p:cNvSpPr txBox="1"/>
-          <p:nvPr/>
-        </p:nvSpPr>
-        <p:spPr>
-          <a:xfrm>
-            <a:off x="8517026" y="3730752"/>
+          <p:cNvPr id="23" name="Text 20"/>
+          <p:cNvSpPr txBox="1"/>
+          <p:nvPr/>
+        </p:nvSpPr>
+        <p:spPr>
+          <a:xfrm>
+            <a:off x="6894576" y="3730752"/>
             <a:ext cx="1146962" cy="457200"/>
           </a:xfrm>
           <a:prstGeom prst="rect">
@@ -15177,7 +15182,7 @@
                 <a:ea typeface="Montserrat Medium" pitchFamily="34" charset="-122"/>
                 <a:cs typeface="Montserrat Medium" pitchFamily="34" charset="-120"/>
               </a:rPr>
-              <a:t>tickets actually opened</a:t>
+              <a:t>rows on Kevlar’s list</a:t>
             </a:r>
             <a:endParaRPr lang="en-US" sz="950" dirty="0"/>
           </a:p>
@@ -15185,13 +15190,13 @@
       </p:sp>
       <p:sp>
         <p:nvSpPr>
-          <p:cNvPr id="27" name="Shape 24"/>
+          <p:cNvPr id="24" name="Shape 21"/>
           <p:cNvSpPr/>
           <p:nvPr/>
         </p:nvSpPr>
         <p:spPr>
           <a:xfrm>
-            <a:off x="10011461" y="2633472"/>
+            <a:off x="8389010" y="2633472"/>
             <a:ext cx="1402994" cy="1627632"/>
           </a:xfrm>
           <a:prstGeom prst="roundRect">
@@ -15212,6 +15217,121 @@
             <a:outerShdw sx="100000" sy="100000" kx="0" ky="0" algn="bl" rotWithShape="0" blurRad="4.736467352851376e+140" dist="1.184116838212844e+140" dir="2.5786061996226343e+164">
               <a:srgbClr val="959092">
                 <a:alpha val="2.2000000000000004e+169"/>
+              </a:srgbClr>
+            </a:outerShdw>
+          </a:effectLst>
+        </p:spPr>
+      </p:sp>
+      <p:sp>
+        <p:nvSpPr>
+          <p:cNvPr id="25" name="Text 22"/>
+          <p:cNvSpPr txBox="1"/>
+          <p:nvPr/>
+        </p:nvSpPr>
+        <p:spPr>
+          <a:xfrm>
+            <a:off x="8517026" y="3017520"/>
+            <a:ext cx="1146962" cy="640080"/>
+          </a:xfrm>
+          <a:prstGeom prst="rect">
+            <a:avLst/>
+          </a:prstGeom>
+          <a:noFill/>
+          <a:ln/>
+        </p:spPr>
+        <p:txBody>
+          <a:bodyPr wrap="square" lIns="0" tIns="0" rIns="0" bIns="0" rtlCol="0" anchor="t"/>
+          <a:lstStyle/>
+          <a:p>
+            <a:pPr algn="ctr" indent="0" marL="0">
+              <a:buNone/>
+            </a:pPr>
+            <a:r>
+              <a:rPr lang="en-US" sz="4000" spc="-160" kern="0" dirty="0">
+                <a:solidFill>
+                  <a:srgbClr val="942838"/>
+                </a:solidFill>
+                <a:latin typeface="Montserrat ExtraBold" pitchFamily="34" charset="0"/>
+                <a:ea typeface="Montserrat ExtraBold" pitchFamily="34" charset="-122"/>
+                <a:cs typeface="Montserrat ExtraBold" pitchFamily="34" charset="-120"/>
+              </a:rPr>
+              <a:t>46</a:t>
+            </a:r>
+            <a:endParaRPr lang="en-US" sz="4000" dirty="0"/>
+          </a:p>
+        </p:txBody>
+      </p:sp>
+      <p:sp>
+        <p:nvSpPr>
+          <p:cNvPr id="26" name="Text 23"/>
+          <p:cNvSpPr txBox="1"/>
+          <p:nvPr/>
+        </p:nvSpPr>
+        <p:spPr>
+          <a:xfrm>
+            <a:off x="8517026" y="3730752"/>
+            <a:ext cx="1146962" cy="457200"/>
+          </a:xfrm>
+          <a:prstGeom prst="rect">
+            <a:avLst/>
+          </a:prstGeom>
+          <a:noFill/>
+          <a:ln/>
+        </p:spPr>
+        <p:txBody>
+          <a:bodyPr wrap="square" lIns="0" tIns="0" rIns="0" bIns="0" rtlCol="0" anchor="t"/>
+          <a:lstStyle/>
+          <a:p>
+            <a:pPr algn="ctr" indent="0" marL="0">
+              <a:lnSpc>
+                <a:spcPct val="120000"/>
+              </a:lnSpc>
+              <a:buNone/>
+            </a:pPr>
+            <a:r>
+              <a:rPr lang="en-US" sz="950" spc="30" kern="0" dirty="0">
+                <a:solidFill>
+                  <a:srgbClr val="6E7175"/>
+                </a:solidFill>
+                <a:latin typeface="Montserrat Medium" pitchFamily="34" charset="0"/>
+                <a:ea typeface="Montserrat Medium" pitchFamily="34" charset="-122"/>
+                <a:cs typeface="Montserrat Medium" pitchFamily="34" charset="-120"/>
+              </a:rPr>
+              <a:t>tickets actually opened</a:t>
+            </a:r>
+            <a:endParaRPr lang="en-US" sz="950" dirty="0"/>
+          </a:p>
+        </p:txBody>
+      </p:sp>
+      <p:sp>
+        <p:nvSpPr>
+          <p:cNvPr id="27" name="Shape 24"/>
+          <p:cNvSpPr/>
+          <p:nvPr/>
+        </p:nvSpPr>
+        <p:spPr>
+          <a:xfrm>
+            <a:off x="10011461" y="2633472"/>
+            <a:ext cx="1402994" cy="1627632"/>
+          </a:xfrm>
+          <a:prstGeom prst="roundRect">
+            <a:avLst>
+              <a:gd name="adj" fmla="val 3910"/>
+            </a:avLst>
+          </a:prstGeom>
+          <a:solidFill>
+            <a:srgbClr val="F6EEF0"/>
+          </a:solidFill>
+          <a:ln w="9525">
+            <a:solidFill>
+              <a:srgbClr val="942838"/>
+            </a:solidFill>
+            <a:prstDash val="solid"/>
+          </a:ln>
+          <a:effectLst>
+            <a:outerShdw sx="100000" sy="100000" kx="0" ky="0" algn="bl" rotWithShape="0" blurRad="6.0153135381212476e+144" dist="1.5038283845303119e+144" dir="1.5471637197735807e+169">
+              <a:srgbClr val="959092">
+                <a:alpha val="2.2e+174"/>
               </a:srgbClr>
             </a:outerShdw>
           </a:effectLst>
@@ -17191,7 +17311,7 @@
                 <a:ea typeface="Montserrat SemiBold" pitchFamily="34" charset="-122"/>
                 <a:cs typeface="Montserrat SemiBold" pitchFamily="34" charset="-120"/>
               </a:rPr>
-              <a:t>AEGIS built, its safety rails tested, and run for real: 1,518 packages in a Stewart repository down to 3 needing a decision.</a:t>
+              <a:t>AEGIS built, its safety rails tested, and run for real: 1,518 packages in a Stewart repository down to a single upgrade.</a:t>
             </a:r>
             <a:endParaRPr lang="en-US" sz="1150" dirty="0"/>
           </a:p>
@@ -20869,7 +20989,7 @@
                 <a:ea typeface="Montserrat SemiBold" pitchFamily="34" charset="-122"/>
                 <a:cs typeface="Montserrat SemiBold" pitchFamily="34" charset="-120"/>
               </a:rPr>
-              <a:t>1,518 packages scanned in a real Stewart repository, 3 needing a decision</a:t>
+              <a:t>1,518 packages scanned in a real Stewart repository, down to one upgrade</a:t>
             </a:r>
             <a:endParaRPr lang="en-US" sz="1100" dirty="0"/>
           </a:p>
